--- a/output/北京科技大学_WebSlide科研汇报示例.pptx
+++ b/output/北京科技大学_WebSlide科研汇报示例.pptx
@@ -8552,11 +8552,11 @@
             <a:avLst/>
           </a:prstGeom>
           <a:solidFill>
-            <a:srgbClr val="FFFFFF"/>
+            <a:srgbClr val="EEF5F9"/>
           </a:solidFill>
           <a:ln w="12700">
             <a:solidFill>
-              <a:srgbClr val="FFFFFF">
+              <a:srgbClr val="EEF5F9">
                 <a:alpha val="0"/>
               </a:srgbClr>
             </a:solidFill>
@@ -8564,106 +8564,226 @@
           </a:ln>
         </p:spPr>
       </p:sp>
-      <p:pic>
-        <p:nvPicPr>
-          <p:cNvPr id="20" name="Image 1" descr="preencoded.png">    </p:cNvPr>
-          <p:cNvPicPr>
-            <a:picLocks noChangeAspect="1"/>
-          </p:cNvPicPr>
-          <p:nvPr/>
-        </p:nvPicPr>
-        <p:blipFill>
-          <a:blip r:embed="rId2"/>
-          <a:stretch>
-            <a:fillRect/>
-          </a:stretch>
-        </p:blipFill>
-        <p:spPr>
-          <a:xfrm>
-            <a:off x="6416040" y="2072640"/>
-            <a:ext cx="685800" cy="365760"/>
-          </a:xfrm>
-          <a:prstGeom prst="rect">
-            <a:avLst/>
-          </a:prstGeom>
-        </p:spPr>
-      </p:pic>
-      <p:pic>
-        <p:nvPicPr>
-          <p:cNvPr id="21" name="Image 2" descr="preencoded.png">    </p:cNvPr>
-          <p:cNvPicPr>
-            <a:picLocks noChangeAspect="1"/>
-          </p:cNvPicPr>
-          <p:nvPr/>
-        </p:nvPicPr>
-        <p:blipFill>
-          <a:blip r:embed="rId3"/>
-          <a:stretch>
-            <a:fillRect/>
-          </a:stretch>
-        </p:blipFill>
-        <p:spPr>
-          <a:xfrm>
-            <a:off x="6294120" y="2072640"/>
-            <a:ext cx="685800" cy="365760"/>
-          </a:xfrm>
-          <a:prstGeom prst="rect">
-            <a:avLst/>
-          </a:prstGeom>
-        </p:spPr>
-      </p:pic>
-      <p:sp>
-        <p:nvSpPr>
-          <p:cNvPr id="22" name="Text 16"/>
-          <p:cNvSpPr/>
-          <p:nvPr/>
-        </p:nvSpPr>
-        <p:spPr>
-          <a:xfrm>
-            <a:off x="6385560" y="2090499"/>
-            <a:ext cx="254079" cy="330041"/>
-          </a:xfrm>
-          <a:prstGeom prst="rect">
-            <a:avLst/>
-          </a:prstGeom>
-          <a:noFill/>
-          <a:ln/>
-        </p:spPr>
-        <p:txBody>
-          <a:bodyPr wrap="none" lIns="0" tIns="0" rIns="0" bIns="0" rtlCol="0" anchor="ctr"/>
+      <p:sp>
+        <p:nvSpPr>
+          <p:cNvPr id="20" name="Text 16"/>
+          <p:cNvSpPr/>
+          <p:nvPr/>
+        </p:nvSpPr>
+        <p:spPr>
+          <a:xfrm>
+            <a:off x="6294120" y="2026920"/>
+            <a:ext cx="5303520" cy="297180"/>
+          </a:xfrm>
+          <a:prstGeom prst="rect">
+            <a:avLst/>
+          </a:prstGeom>
+          <a:noFill/>
+          <a:ln/>
+        </p:spPr>
+        <p:txBody>
+          <a:bodyPr wrap="square" lIns="0" tIns="0" rIns="0" bIns="0" rtlCol="0" anchor="ctr"/>
           <a:lstStyle/>
           <a:p>
             <a:pPr algn="l" indent="0" marL="0">
               <a:lnSpc>
-                <a:spcPts val="2600"/>
-              </a:lnSpc>
-              <a:buNone/>
-            </a:pPr>
-            <a:r>
-              <a:rPr lang="en-US" sz="2000" b="1" dirty="0">
+                <a:spcPts val="2340"/>
+              </a:lnSpc>
+              <a:buNone/>
+            </a:pPr>
+            <a:r>
+              <a:rPr lang="en-US" sz="1800" b="1" dirty="0">
                 <a:solidFill>
                   <a:srgbClr val="FFFFFF"/>
                 </a:solidFill>
-                <a:latin typeface="Times New Roman" pitchFamily="34" charset="0"/>
-                <a:ea typeface="Times New Roman" pitchFamily="34" charset="-122"/>
-                <a:cs typeface="Times New Roman" pitchFamily="34" charset="-120"/>
-              </a:rPr>
-              <a:t>01</a:t>
-            </a:r>
-            <a:endParaRPr lang="en-US" sz="2000" dirty="0"/>
-          </a:p>
-        </p:txBody>
-      </p:sp>
-      <p:sp>
-        <p:nvSpPr>
-          <p:cNvPr id="23" name="Text 17"/>
-          <p:cNvSpPr/>
-          <p:nvPr/>
-        </p:nvSpPr>
-        <p:spPr>
-          <a:xfrm>
-            <a:off x="7223760" y="2106930"/>
-            <a:ext cx="4373880" cy="297180"/>
+                <a:latin typeface="Microsoft YaHei" pitchFamily="34" charset="0"/>
+                <a:ea typeface="Microsoft YaHei" pitchFamily="34" charset="-122"/>
+                <a:cs typeface="Microsoft YaHei" pitchFamily="34" charset="-120"/>
+              </a:rPr>
+              <a:t>操作路径</a:t>
+            </a:r>
+            <a:endParaRPr lang="en-US" sz="1800" dirty="0"/>
+          </a:p>
+        </p:txBody>
+      </p:sp>
+      <p:sp>
+        <p:nvSpPr>
+          <p:cNvPr id="21" name="Text 17"/>
+          <p:cNvSpPr/>
+          <p:nvPr/>
+        </p:nvSpPr>
+        <p:spPr>
+          <a:xfrm>
+            <a:off x="6294120" y="2522220"/>
+            <a:ext cx="5303520" cy="314920"/>
+          </a:xfrm>
+          <a:prstGeom prst="rect">
+            <a:avLst/>
+          </a:prstGeom>
+          <a:noFill/>
+          <a:ln/>
+        </p:spPr>
+        <p:txBody>
+          <a:bodyPr wrap="square" lIns="0" tIns="0" rIns="0" bIns="0" rtlCol="0" anchor="ctr"/>
+          <a:lstStyle/>
+          <a:p>
+            <a:pPr algn="just" indent="0" marL="0">
+              <a:lnSpc>
+                <a:spcPts val="2480"/>
+              </a:lnSpc>
+              <a:buNone/>
+            </a:pPr>
+            <a:r>
+              <a:rPr lang="en-US" sz="1600" dirty="0">
+                <a:solidFill>
+                  <a:srgbClr val="12374E"/>
+                </a:solidFill>
+                <a:latin typeface="Microsoft YaHei" pitchFamily="34" charset="0"/>
+                <a:ea typeface="Microsoft YaHei" pitchFamily="34" charset="-122"/>
+                <a:cs typeface="Microsoft YaHei" pitchFamily="34" charset="-120"/>
+              </a:rPr>
+              <a:t>双击占位区域打开弹窗；选择本地图片或视频。</a:t>
+            </a:r>
+            <a:endParaRPr lang="en-US" sz="1600" dirty="0"/>
+          </a:p>
+        </p:txBody>
+      </p:sp>
+      <p:sp>
+        <p:nvSpPr>
+          <p:cNvPr id="22" name="Text 18"/>
+          <p:cNvSpPr/>
+          <p:nvPr/>
+        </p:nvSpPr>
+        <p:spPr>
+          <a:xfrm>
+            <a:off x="6294120" y="2913340"/>
+            <a:ext cx="5303520" cy="629841"/>
+          </a:xfrm>
+          <a:prstGeom prst="rect">
+            <a:avLst/>
+          </a:prstGeom>
+          <a:noFill/>
+          <a:ln/>
+        </p:spPr>
+        <p:txBody>
+          <a:bodyPr wrap="square" lIns="0" tIns="0" rIns="0" bIns="0" rtlCol="0" anchor="ctr"/>
+          <a:lstStyle/>
+          <a:p>
+            <a:pPr algn="just" indent="0" marL="0">
+              <a:lnSpc>
+                <a:spcPts val="2480"/>
+              </a:lnSpc>
+              <a:buNone/>
+            </a:pPr>
+            <a:r>
+              <a:rPr lang="en-US" sz="1600" dirty="0">
+                <a:solidFill>
+                  <a:srgbClr val="12374E"/>
+                </a:solidFill>
+                <a:latin typeface="Microsoft YaHei" pitchFamily="34" charset="0"/>
+                <a:ea typeface="Microsoft YaHei" pitchFamily="34" charset="-122"/>
+                <a:cs typeface="Microsoft YaHei" pitchFamily="34" charset="-120"/>
+              </a:rPr>
+              <a:t>从预设或自定义宽高比中选择；用水平、垂直取景调整画面位置。</a:t>
+            </a:r>
+            <a:endParaRPr lang="en-US" sz="1600" dirty="0"/>
+          </a:p>
+        </p:txBody>
+      </p:sp>
+      <p:sp>
+        <p:nvSpPr>
+          <p:cNvPr id="23" name="Text 19"/>
+          <p:cNvSpPr/>
+          <p:nvPr/>
+        </p:nvSpPr>
+        <p:spPr>
+          <a:xfrm>
+            <a:off x="6294120" y="3619381"/>
+            <a:ext cx="5303520" cy="314920"/>
+          </a:xfrm>
+          <a:prstGeom prst="rect">
+            <a:avLst/>
+          </a:prstGeom>
+          <a:noFill/>
+          <a:ln/>
+        </p:spPr>
+        <p:txBody>
+          <a:bodyPr wrap="square" lIns="0" tIns="0" rIns="0" bIns="0" rtlCol="0" anchor="ctr"/>
+          <a:lstStyle/>
+          <a:p>
+            <a:pPr algn="just" indent="0" marL="0">
+              <a:lnSpc>
+                <a:spcPts val="2480"/>
+              </a:lnSpc>
+              <a:buNone/>
+            </a:pPr>
+            <a:r>
+              <a:rPr lang="en-US" sz="1600" dirty="0">
+                <a:solidFill>
+                  <a:srgbClr val="12374E"/>
+                </a:solidFill>
+                <a:latin typeface="Microsoft YaHei" pitchFamily="34" charset="0"/>
+                <a:ea typeface="Microsoft YaHei" pitchFamily="34" charset="-122"/>
+                <a:cs typeface="Microsoft YaHei" pitchFamily="34" charset="-120"/>
+              </a:rPr>
+              <a:t>等比放大突出重点；图注可选标题或标题加说明。</a:t>
+            </a:r>
+            <a:endParaRPr lang="en-US" sz="1600" dirty="0"/>
+          </a:p>
+        </p:txBody>
+      </p:sp>
+      <p:sp>
+        <p:nvSpPr>
+          <p:cNvPr id="24" name="Text 20"/>
+          <p:cNvSpPr/>
+          <p:nvPr/>
+        </p:nvSpPr>
+        <p:spPr>
+          <a:xfrm>
+            <a:off x="6294120" y="4010501"/>
+            <a:ext cx="5303520" cy="314920"/>
+          </a:xfrm>
+          <a:prstGeom prst="rect">
+            <a:avLst/>
+          </a:prstGeom>
+          <a:noFill/>
+          <a:ln/>
+        </p:spPr>
+        <p:txBody>
+          <a:bodyPr wrap="square" lIns="0" tIns="0" rIns="0" bIns="0" rtlCol="0" anchor="ctr"/>
+          <a:lstStyle/>
+          <a:p>
+            <a:pPr algn="just" indent="0" marL="0">
+              <a:lnSpc>
+                <a:spcPts val="2480"/>
+              </a:lnSpc>
+              <a:buNone/>
+            </a:pPr>
+            <a:r>
+              <a:rPr lang="en-US" sz="1600" dirty="0">
+                <a:solidFill>
+                  <a:srgbClr val="12374E"/>
+                </a:solidFill>
+                <a:latin typeface="Microsoft YaHei" pitchFamily="34" charset="0"/>
+                <a:ea typeface="Microsoft YaHei" pitchFamily="34" charset="-122"/>
+                <a:cs typeface="Microsoft YaHei" pitchFamily="34" charset="-120"/>
+              </a:rPr>
+              <a:t>确认图注与画面的间隙；无需图注时关闭图标题。</a:t>
+            </a:r>
+            <a:endParaRPr lang="en-US" sz="1600" dirty="0"/>
+          </a:p>
+        </p:txBody>
+      </p:sp>
+      <p:sp>
+        <p:nvSpPr>
+          <p:cNvPr id="25" name="Text 21"/>
+          <p:cNvSpPr/>
+          <p:nvPr/>
+        </p:nvSpPr>
+        <p:spPr>
+          <a:xfrm>
+            <a:off x="6294120" y="4447342"/>
+            <a:ext cx="5303520" cy="314920"/>
           </a:xfrm>
           <a:prstGeom prst="rect">
             <a:avLst/>
@@ -8677,12 +8797,12 @@
           <a:p>
             <a:pPr algn="l" indent="0" marL="0">
               <a:lnSpc>
-                <a:spcPts val="2340"/>
-              </a:lnSpc>
-              <a:buNone/>
-            </a:pPr>
-            <a:r>
-              <a:rPr lang="en-US" sz="1800" b="1" dirty="0">
+                <a:spcPts val="2480"/>
+              </a:lnSpc>
+              <a:buNone/>
+            </a:pPr>
+            <a:r>
+              <a:rPr lang="en-US" sz="1600" b="1" dirty="0">
                 <a:solidFill>
                   <a:srgbClr val="12374E"/>
                 </a:solidFill>
@@ -8690,68 +8810,41 @@
                 <a:ea typeface="Microsoft YaHei" pitchFamily="34" charset="-122"/>
                 <a:cs typeface="Microsoft YaHei" pitchFamily="34" charset="-120"/>
               </a:rPr>
-              <a:t>操作路径</a:t>
-            </a:r>
-            <a:endParaRPr lang="en-US" sz="1800" dirty="0"/>
-          </a:p>
-        </p:txBody>
-      </p:sp>
-      <p:sp>
-        <p:nvSpPr>
-          <p:cNvPr id="24" name="Shape 18"/>
-          <p:cNvSpPr/>
-          <p:nvPr/>
-        </p:nvSpPr>
-        <p:spPr>
-          <a:xfrm>
-            <a:off x="6294120" y="2430780"/>
-            <a:ext cx="5303520" cy="7620"/>
-          </a:xfrm>
-          <a:prstGeom prst="rect">
-            <a:avLst/>
-          </a:prstGeom>
-          <a:solidFill>
-            <a:srgbClr val="005B94"/>
-          </a:solidFill>
-          <a:ln w="12700">
-            <a:solidFill>
-              <a:srgbClr val="005B94">
-                <a:alpha val="0"/>
-              </a:srgbClr>
-            </a:solidFill>
-            <a:prstDash val="solid"/>
-          </a:ln>
-        </p:spPr>
-      </p:sp>
-      <p:sp>
-        <p:nvSpPr>
-          <p:cNvPr id="25" name="Text 19"/>
-          <p:cNvSpPr/>
-          <p:nvPr/>
-        </p:nvSpPr>
-        <p:spPr>
-          <a:xfrm>
-            <a:off x="6294120" y="2537460"/>
-            <a:ext cx="5303520" cy="314920"/>
-          </a:xfrm>
-          <a:prstGeom prst="rect">
-            <a:avLst/>
-          </a:prstGeom>
-          <a:noFill/>
-          <a:ln/>
-        </p:spPr>
-        <p:txBody>
-          <a:bodyPr wrap="square" lIns="0" tIns="0" rIns="0" bIns="0" rtlCol="0" anchor="ctr"/>
-          <a:lstStyle/>
-          <a:p>
-            <a:pPr algn="just" indent="0" marL="0">
-              <a:lnSpc>
-                <a:spcPts val="2480"/>
-              </a:lnSpc>
-              <a:buNone/>
-            </a:pPr>
-            <a:r>
-              <a:rPr lang="en-US" sz="1600" dirty="0">
+              <a:t>保持原始比例，避免单向拉伸</a:t>
+            </a:r>
+            <a:endParaRPr lang="en-US" sz="1600" dirty="0"/>
+          </a:p>
+        </p:txBody>
+      </p:sp>
+      <p:sp>
+        <p:nvSpPr>
+          <p:cNvPr id="26" name="Text 22"/>
+          <p:cNvSpPr/>
+          <p:nvPr/>
+        </p:nvSpPr>
+        <p:spPr>
+          <a:xfrm>
+            <a:off x="6294120" y="4884182"/>
+            <a:ext cx="5303520" cy="248841"/>
+          </a:xfrm>
+          <a:prstGeom prst="rect">
+            <a:avLst/>
+          </a:prstGeom>
+          <a:noFill/>
+          <a:ln/>
+        </p:spPr>
+        <p:txBody>
+          <a:bodyPr wrap="square" lIns="0" tIns="0" rIns="0" bIns="0" rtlCol="0" anchor="ctr"/>
+          <a:lstStyle/>
+          <a:p>
+            <a:pPr algn="l" indent="0" marL="0">
+              <a:lnSpc>
+                <a:spcPts val="1960"/>
+              </a:lnSpc>
+              <a:buNone/>
+            </a:pPr>
+            <a:r>
+              <a:rPr lang="en-US" sz="1400" dirty="0">
                 <a:solidFill>
                   <a:srgbClr val="12374E"/>
                 </a:solidFill>
@@ -8759,148 +8852,22 @@
                 <a:ea typeface="Microsoft YaHei" pitchFamily="34" charset="-122"/>
                 <a:cs typeface="Microsoft YaHei" pitchFamily="34" charset="-120"/>
               </a:rPr>
-              <a:t>双击占位区域打开弹窗；选择本地图片或视频。</a:t>
-            </a:r>
-            <a:endParaRPr lang="en-US" sz="1600" dirty="0"/>
-          </a:p>
-        </p:txBody>
-      </p:sp>
-      <p:sp>
-        <p:nvSpPr>
-          <p:cNvPr id="26" name="Text 20"/>
-          <p:cNvSpPr/>
-          <p:nvPr/>
-        </p:nvSpPr>
-        <p:spPr>
-          <a:xfrm>
-            <a:off x="6294120" y="2928580"/>
-            <a:ext cx="5303520" cy="629841"/>
-          </a:xfrm>
-          <a:prstGeom prst="rect">
-            <a:avLst/>
-          </a:prstGeom>
-          <a:noFill/>
-          <a:ln/>
-        </p:spPr>
-        <p:txBody>
-          <a:bodyPr wrap="square" lIns="0" tIns="0" rIns="0" bIns="0" rtlCol="0" anchor="ctr"/>
-          <a:lstStyle/>
-          <a:p>
-            <a:pPr algn="just" indent="0" marL="0">
-              <a:lnSpc>
-                <a:spcPts val="2480"/>
-              </a:lnSpc>
-              <a:buNone/>
-            </a:pPr>
-            <a:r>
-              <a:rPr lang="en-US" sz="1600" dirty="0">
-                <a:solidFill>
-                  <a:srgbClr val="12374E"/>
-                </a:solidFill>
-                <a:latin typeface="Microsoft YaHei" pitchFamily="34" charset="0"/>
-                <a:ea typeface="Microsoft YaHei" pitchFamily="34" charset="-122"/>
-                <a:cs typeface="Microsoft YaHei" pitchFamily="34" charset="-120"/>
-              </a:rPr>
-              <a:t>从预设或自定义宽高比中选择；用水平、垂直取景调整画面位置。</a:t>
-            </a:r>
-            <a:endParaRPr lang="en-US" sz="1600" dirty="0"/>
-          </a:p>
-        </p:txBody>
-      </p:sp>
-      <p:sp>
-        <p:nvSpPr>
-          <p:cNvPr id="27" name="Text 21"/>
-          <p:cNvSpPr/>
-          <p:nvPr/>
-        </p:nvSpPr>
-        <p:spPr>
-          <a:xfrm>
-            <a:off x="6294120" y="3634621"/>
-            <a:ext cx="5303520" cy="314920"/>
-          </a:xfrm>
-          <a:prstGeom prst="rect">
-            <a:avLst/>
-          </a:prstGeom>
-          <a:noFill/>
-          <a:ln/>
-        </p:spPr>
-        <p:txBody>
-          <a:bodyPr wrap="square" lIns="0" tIns="0" rIns="0" bIns="0" rtlCol="0" anchor="ctr"/>
-          <a:lstStyle/>
-          <a:p>
-            <a:pPr algn="just" indent="0" marL="0">
-              <a:lnSpc>
-                <a:spcPts val="2480"/>
-              </a:lnSpc>
-              <a:buNone/>
-            </a:pPr>
-            <a:r>
-              <a:rPr lang="en-US" sz="1600" dirty="0">
-                <a:solidFill>
-                  <a:srgbClr val="12374E"/>
-                </a:solidFill>
-                <a:latin typeface="Microsoft YaHei" pitchFamily="34" charset="0"/>
-                <a:ea typeface="Microsoft YaHei" pitchFamily="34" charset="-122"/>
-                <a:cs typeface="Microsoft YaHei" pitchFamily="34" charset="-120"/>
-              </a:rPr>
-              <a:t>等比放大突出重点；图注可选标题或标题加说明。</a:t>
-            </a:r>
-            <a:endParaRPr lang="en-US" sz="1600" dirty="0"/>
-          </a:p>
-        </p:txBody>
-      </p:sp>
-      <p:sp>
-        <p:nvSpPr>
-          <p:cNvPr id="28" name="Text 22"/>
-          <p:cNvSpPr/>
-          <p:nvPr/>
-        </p:nvSpPr>
-        <p:spPr>
-          <a:xfrm>
-            <a:off x="6294120" y="4025741"/>
-            <a:ext cx="5303520" cy="314920"/>
-          </a:xfrm>
-          <a:prstGeom prst="rect">
-            <a:avLst/>
-          </a:prstGeom>
-          <a:noFill/>
-          <a:ln/>
-        </p:spPr>
-        <p:txBody>
-          <a:bodyPr wrap="square" lIns="0" tIns="0" rIns="0" bIns="0" rtlCol="0" anchor="ctr"/>
-          <a:lstStyle/>
-          <a:p>
-            <a:pPr algn="just" indent="0" marL="0">
-              <a:lnSpc>
-                <a:spcPts val="2480"/>
-              </a:lnSpc>
-              <a:buNone/>
-            </a:pPr>
-            <a:r>
-              <a:rPr lang="en-US" sz="1600" dirty="0">
-                <a:solidFill>
-                  <a:srgbClr val="12374E"/>
-                </a:solidFill>
-                <a:latin typeface="Microsoft YaHei" pitchFamily="34" charset="0"/>
-                <a:ea typeface="Microsoft YaHei" pitchFamily="34" charset="-122"/>
-                <a:cs typeface="Microsoft YaHei" pitchFamily="34" charset="-120"/>
-              </a:rPr>
-              <a:t>确认图注与画面的间隙；无需图注时关闭图标题。</a:t>
-            </a:r>
-            <a:endParaRPr lang="en-US" sz="1600" dirty="0"/>
-          </a:p>
-        </p:txBody>
-      </p:sp>
-      <p:sp>
-        <p:nvSpPr>
-          <p:cNvPr id="29" name="Text 23"/>
-          <p:cNvSpPr/>
-          <p:nvPr/>
-        </p:nvSpPr>
-        <p:spPr>
-          <a:xfrm>
-            <a:off x="6294120" y="4439722"/>
-            <a:ext cx="5303520" cy="314920"/>
+              <a:t>PDF 显示视频静态帧；PPTX 可内嵌视频。</a:t>
+            </a:r>
+            <a:endParaRPr lang="en-US" sz="1400" dirty="0"/>
+          </a:p>
+        </p:txBody>
+      </p:sp>
+      <p:sp>
+        <p:nvSpPr>
+          <p:cNvPr id="27" name="Text 23"/>
+          <p:cNvSpPr/>
+          <p:nvPr/>
+        </p:nvSpPr>
+        <p:spPr>
+          <a:xfrm>
+            <a:off x="6278880" y="5376863"/>
+            <a:ext cx="5334000" cy="566261"/>
           </a:xfrm>
           <a:prstGeom prst="rect">
             <a:avLst/>
@@ -8914,62 +8881,20 @@
           <a:p>
             <a:pPr algn="l" indent="0" marL="0">
               <a:lnSpc>
-                <a:spcPts val="2480"/>
-              </a:lnSpc>
-              <a:buNone/>
-            </a:pPr>
-            <a:r>
-              <a:rPr lang="en-US" sz="1600" b="1" dirty="0">
-                <a:solidFill>
-                  <a:srgbClr val="12374E"/>
-                </a:solidFill>
-                <a:latin typeface="Microsoft YaHei" pitchFamily="34" charset="0"/>
-                <a:ea typeface="Microsoft YaHei" pitchFamily="34" charset="-122"/>
-                <a:cs typeface="Microsoft YaHei" pitchFamily="34" charset="-120"/>
-              </a:rPr>
-              <a:t>保持原始比例，避免单向拉伸</a:t>
-            </a:r>
-            <a:endParaRPr lang="en-US" sz="1600" dirty="0"/>
-          </a:p>
-        </p:txBody>
-      </p:sp>
-      <p:sp>
-        <p:nvSpPr>
-          <p:cNvPr id="30" name="Text 24"/>
-          <p:cNvSpPr/>
-          <p:nvPr/>
-        </p:nvSpPr>
-        <p:spPr>
-          <a:xfrm>
-            <a:off x="6294120" y="4853702"/>
-            <a:ext cx="5303520" cy="248841"/>
-          </a:xfrm>
-          <a:prstGeom prst="rect">
-            <a:avLst/>
-          </a:prstGeom>
-          <a:noFill/>
-          <a:ln/>
-        </p:spPr>
-        <p:txBody>
-          <a:bodyPr wrap="square" lIns="0" tIns="0" rIns="0" bIns="0" rtlCol="0" anchor="ctr"/>
-          <a:lstStyle/>
-          <a:p>
-            <a:pPr algn="l" indent="0" marL="0">
-              <a:lnSpc>
-                <a:spcPts val="1960"/>
+                <a:spcPts val="2170"/>
               </a:lnSpc>
               <a:buNone/>
             </a:pPr>
             <a:r>
               <a:rPr lang="en-US" sz="1400" dirty="0">
                 <a:solidFill>
-                  <a:srgbClr val="12374E"/>
-                </a:solidFill>
-                <a:latin typeface="Microsoft YaHei" pitchFamily="34" charset="0"/>
-                <a:ea typeface="Microsoft YaHei" pitchFamily="34" charset="-122"/>
-                <a:cs typeface="Microsoft YaHei" pitchFamily="34" charset="-120"/>
-              </a:rPr>
-              <a:t>PDF 显示视频静态帧；PPTX 可内嵌视频。</a:t>
+                  <a:srgbClr val="005B94"/>
+                </a:solidFill>
+                <a:latin typeface="Microsoft YaHei" pitchFamily="34" charset="0"/>
+                <a:ea typeface="Microsoft YaHei" pitchFamily="34" charset="-122"/>
+                <a:cs typeface="Microsoft YaHei" pitchFamily="34" charset="-120"/>
+              </a:rPr>
+              <a:t>取景检查：保留图中关键标注与坐标；说明裁剪范围，确保不会改变原始证据的含义。</a:t>
             </a:r>
             <a:endParaRPr lang="en-US" sz="1400" dirty="0"/>
           </a:p>
@@ -8977,49 +8902,7 @@
       </p:sp>
       <p:sp>
         <p:nvSpPr>
-          <p:cNvPr id="31" name="Text 25"/>
-          <p:cNvSpPr/>
-          <p:nvPr/>
-        </p:nvSpPr>
-        <p:spPr>
-          <a:xfrm>
-            <a:off x="6431280" y="5362099"/>
-            <a:ext cx="5029200" cy="566261"/>
-          </a:xfrm>
-          <a:prstGeom prst="rect">
-            <a:avLst/>
-          </a:prstGeom>
-          <a:noFill/>
-          <a:ln/>
-        </p:spPr>
-        <p:txBody>
-          <a:bodyPr wrap="square" lIns="0" tIns="0" rIns="0" bIns="0" rtlCol="0" anchor="ctr"/>
-          <a:lstStyle/>
-          <a:p>
-            <a:pPr algn="l" indent="0" marL="0">
-              <a:lnSpc>
-                <a:spcPts val="2170"/>
-              </a:lnSpc>
-              <a:buNone/>
-            </a:pPr>
-            <a:r>
-              <a:rPr lang="en-US" sz="1400" dirty="0">
-                <a:solidFill>
-                  <a:srgbClr val="005B94"/>
-                </a:solidFill>
-                <a:latin typeface="Microsoft YaHei" pitchFamily="34" charset="0"/>
-                <a:ea typeface="Microsoft YaHei" pitchFamily="34" charset="-122"/>
-                <a:cs typeface="Microsoft YaHei" pitchFamily="34" charset="-120"/>
-              </a:rPr>
-              <a:t>取景检查：保留图中关键标注与坐标；说明裁剪范围，确保不会改变原始证据的含义。</a:t>
-            </a:r>
-            <a:endParaRPr lang="en-US" sz="1400" dirty="0"/>
-          </a:p>
-        </p:txBody>
-      </p:sp>
-      <p:sp>
-        <p:nvSpPr>
-          <p:cNvPr id="32" name="Text 26"/>
+          <p:cNvPr id="28" name="Text 24"/>
           <p:cNvSpPr/>
           <p:nvPr/>
         </p:nvSpPr>
@@ -9061,7 +8944,7 @@
       </p:sp>
       <p:sp>
         <p:nvSpPr>
-          <p:cNvPr id="33" name="Text 27"/>
+          <p:cNvPr id="29" name="Text 25"/>
           <p:cNvSpPr/>
           <p:nvPr/>
         </p:nvSpPr>
@@ -9103,7 +8986,7 @@
       </p:sp>
       <p:sp>
         <p:nvSpPr>
-          <p:cNvPr id="34" name="Text 28"/>
+          <p:cNvPr id="30" name="Text 26"/>
           <p:cNvSpPr/>
           <p:nvPr/>
         </p:nvSpPr>
@@ -9145,7 +9028,7 @@
       </p:sp>
       <p:sp>
         <p:nvSpPr>
-          <p:cNvPr id="35" name="Shape 29"/>
+          <p:cNvPr id="31" name="Shape 27"/>
           <p:cNvSpPr/>
           <p:nvPr/>
         </p:nvSpPr>
@@ -46233,9 +46116,213 @@
           <a:chExt cx="0" cy="0"/>
         </a:xfrm>
       </p:grpSpPr>
+      <p:sp>
+        <p:nvSpPr>
+          <p:cNvPr id="3" name="Shape 0"/>
+          <p:cNvSpPr/>
+          <p:nvPr/>
+        </p:nvSpPr>
+        <p:spPr>
+          <a:xfrm>
+            <a:off x="0" y="0"/>
+            <a:ext cx="9753600" cy="53340"/>
+          </a:xfrm>
+          <a:prstGeom prst="rect">
+            <a:avLst/>
+          </a:prstGeom>
+          <a:solidFill>
+            <a:srgbClr val="005B94"/>
+          </a:solidFill>
+          <a:ln w="12700">
+            <a:solidFill>
+              <a:srgbClr val="005B94">
+                <a:alpha val="0"/>
+              </a:srgbClr>
+            </a:solidFill>
+            <a:prstDash val="solid"/>
+          </a:ln>
+        </p:spPr>
+      </p:sp>
+      <p:sp>
+        <p:nvSpPr>
+          <p:cNvPr id="4" name="Shape 1"/>
+          <p:cNvSpPr/>
+          <p:nvPr/>
+        </p:nvSpPr>
+        <p:spPr>
+          <a:xfrm>
+            <a:off x="9753600" y="0"/>
+            <a:ext cx="2438400" cy="53340"/>
+          </a:xfrm>
+          <a:prstGeom prst="rect">
+            <a:avLst/>
+          </a:prstGeom>
+          <a:solidFill>
+            <a:srgbClr val="2BA3C0"/>
+          </a:solidFill>
+          <a:ln w="12700">
+            <a:solidFill>
+              <a:srgbClr val="2BA3C0">
+                <a:alpha val="0"/>
+              </a:srgbClr>
+            </a:solidFill>
+            <a:prstDash val="solid"/>
+          </a:ln>
+        </p:spPr>
+      </p:sp>
+      <p:sp>
+        <p:nvSpPr>
+          <p:cNvPr id="5" name="Shape 2"/>
+          <p:cNvSpPr/>
+          <p:nvPr/>
+        </p:nvSpPr>
+        <p:spPr>
+          <a:xfrm>
+            <a:off x="441960" y="259080"/>
+            <a:ext cx="289560" cy="228600"/>
+          </a:xfrm>
+          <a:prstGeom prst="rect">
+            <a:avLst/>
+          </a:prstGeom>
+          <a:solidFill>
+            <a:srgbClr val="EEF5F9"/>
+          </a:solidFill>
+          <a:ln w="12700">
+            <a:solidFill>
+              <a:srgbClr val="EEF5F9">
+                <a:alpha val="0"/>
+              </a:srgbClr>
+            </a:solidFill>
+            <a:prstDash val="solid"/>
+          </a:ln>
+        </p:spPr>
+      </p:sp>
+      <p:sp>
+        <p:nvSpPr>
+          <p:cNvPr id="6" name="Text 3"/>
+          <p:cNvSpPr/>
+          <p:nvPr/>
+        </p:nvSpPr>
+        <p:spPr>
+          <a:xfrm>
+            <a:off x="480060" y="259080"/>
+            <a:ext cx="213360" cy="228600"/>
+          </a:xfrm>
+          <a:prstGeom prst="rect">
+            <a:avLst/>
+          </a:prstGeom>
+          <a:noFill/>
+          <a:ln/>
+        </p:spPr>
+        <p:txBody>
+          <a:bodyPr wrap="none" lIns="0" tIns="0" rIns="0" bIns="0" rtlCol="0" anchor="ctr"/>
+          <a:lstStyle/>
+          <a:p>
+            <a:pPr algn="l" indent="0" marL="0">
+              <a:buNone/>
+            </a:pPr>
+            <a:r>
+              <a:rPr lang="en-US" sz="1200" b="1" dirty="0">
+                <a:solidFill>
+                  <a:srgbClr val="005B94"/>
+                </a:solidFill>
+                <a:latin typeface="Arial" pitchFamily="34" charset="0"/>
+                <a:ea typeface="Arial" pitchFamily="34" charset="-122"/>
+                <a:cs typeface="Arial" pitchFamily="34" charset="-120"/>
+              </a:rPr>
+              <a:t>01</a:t>
+            </a:r>
+            <a:endParaRPr lang="en-US" sz="1200" dirty="0"/>
+          </a:p>
+        </p:txBody>
+      </p:sp>
+      <p:sp>
+        <p:nvSpPr>
+          <p:cNvPr id="7" name="Text 4"/>
+          <p:cNvSpPr/>
+          <p:nvPr/>
+        </p:nvSpPr>
+        <p:spPr>
+          <a:xfrm>
+            <a:off x="838200" y="235625"/>
+            <a:ext cx="9768840" cy="275511"/>
+          </a:xfrm>
+          <a:prstGeom prst="rect">
+            <a:avLst/>
+          </a:prstGeom>
+          <a:noFill/>
+          <a:ln/>
+        </p:spPr>
+        <p:txBody>
+          <a:bodyPr wrap="none" lIns="0" tIns="0" rIns="0" bIns="0" rtlCol="0" anchor="ctr"/>
+          <a:lstStyle/>
+          <a:p>
+            <a:pPr algn="l" indent="0" marL="0">
+              <a:lnSpc>
+                <a:spcPts val="2170"/>
+              </a:lnSpc>
+              <a:buNone/>
+            </a:pPr>
+            <a:r>
+              <a:rPr lang="en-US" sz="1400" b="1" dirty="0">
+                <a:solidFill>
+                  <a:srgbClr val="005B94"/>
+                </a:solidFill>
+                <a:latin typeface="Microsoft YaHei" pitchFamily="34" charset="0"/>
+                <a:ea typeface="Microsoft YaHei" pitchFamily="34" charset="-122"/>
+                <a:cs typeface="Microsoft YaHei" pitchFamily="34" charset="-120"/>
+              </a:rPr>
+              <a:t>制作起步</a:t>
+            </a:r>
+            <a:endParaRPr lang="en-US" sz="1400" dirty="0"/>
+          </a:p>
+        </p:txBody>
+      </p:sp>
+      <p:sp>
+        <p:nvSpPr>
+          <p:cNvPr id="8" name="Text 5"/>
+          <p:cNvSpPr/>
+          <p:nvPr/>
+        </p:nvSpPr>
+        <p:spPr>
+          <a:xfrm>
+            <a:off x="441960" y="609600"/>
+            <a:ext cx="10165080" cy="433864"/>
+          </a:xfrm>
+          <a:prstGeom prst="rect">
+            <a:avLst/>
+          </a:prstGeom>
+          <a:noFill/>
+          <a:ln/>
+        </p:spPr>
+        <p:txBody>
+          <a:bodyPr wrap="none" lIns="0" tIns="0" rIns="0" bIns="0" rtlCol="0" anchor="ctr"/>
+          <a:lstStyle/>
+          <a:p>
+            <a:pPr algn="l" indent="0" marL="0">
+              <a:lnSpc>
+                <a:spcPts val="3416"/>
+              </a:lnSpc>
+              <a:buNone/>
+            </a:pPr>
+            <a:r>
+              <a:rPr lang="en-US" sz="2800" b="1" dirty="0">
+                <a:solidFill>
+                  <a:srgbClr val="005B94"/>
+                </a:solidFill>
+                <a:latin typeface="Microsoft YaHei" pitchFamily="34" charset="0"/>
+                <a:ea typeface="Microsoft YaHei" pitchFamily="34" charset="-122"/>
+                <a:cs typeface="Microsoft YaHei" pitchFamily="34" charset="-120"/>
+              </a:rPr>
+              <a:t>研究现状分析</a:t>
+            </a:r>
+            <a:endParaRPr lang="en-US" sz="2800" dirty="0"/>
+          </a:p>
+        </p:txBody>
+      </p:sp>
       <p:pic>
         <p:nvPicPr>
-          <p:cNvPr id="3" name="Image 0" descr="preencoded.png">    </p:cNvPr>
+          <p:cNvPr id="9" name="Image 0" descr="preencoded.png">    </p:cNvPr>
           <p:cNvPicPr>
             <a:picLocks noChangeAspect="1"/>
           </p:cNvPicPr>
@@ -46249,8 +46336,8 @@
         </p:blipFill>
         <p:spPr>
           <a:xfrm>
-            <a:off x="0" y="0"/>
-            <a:ext cx="12192000" cy="6858000"/>
+            <a:off x="10835640" y="201930"/>
+            <a:ext cx="914400" cy="914400"/>
           </a:xfrm>
           <a:prstGeom prst="rect">
             <a:avLst/>
@@ -46259,130 +46346,76 @@
       </p:pic>
       <p:sp>
         <p:nvSpPr>
-          <p:cNvPr id="4" name="Text 0"/>
-          <p:cNvSpPr/>
-          <p:nvPr/>
-        </p:nvSpPr>
-        <p:spPr>
-          <a:xfrm>
-            <a:off x="480060" y="259080"/>
-            <a:ext cx="213360" cy="228600"/>
-          </a:xfrm>
-          <a:prstGeom prst="rect">
-            <a:avLst/>
-          </a:prstGeom>
-          <a:noFill/>
-          <a:ln/>
-        </p:spPr>
-        <p:txBody>
-          <a:bodyPr wrap="none" lIns="0" tIns="0" rIns="0" bIns="0" rtlCol="0" anchor="ctr"/>
+          <p:cNvPr id="10" name="Shape 6"/>
+          <p:cNvSpPr/>
+          <p:nvPr/>
+        </p:nvSpPr>
+        <p:spPr>
+          <a:xfrm>
+            <a:off x="441960" y="1264920"/>
+            <a:ext cx="11308080" cy="15240"/>
+          </a:xfrm>
+          <a:prstGeom prst="rect">
+            <a:avLst/>
+          </a:prstGeom>
+          <a:solidFill>
+            <a:srgbClr val="005B94"/>
+          </a:solidFill>
+          <a:ln w="12700">
+            <a:solidFill>
+              <a:srgbClr val="005B94">
+                <a:alpha val="0"/>
+              </a:srgbClr>
+            </a:solidFill>
+            <a:prstDash val="solid"/>
+          </a:ln>
+        </p:spPr>
+      </p:sp>
+      <p:sp>
+        <p:nvSpPr>
+          <p:cNvPr id="11" name="Text 7"/>
+          <p:cNvSpPr/>
+          <p:nvPr/>
+        </p:nvSpPr>
+        <p:spPr>
+          <a:xfrm>
+            <a:off x="441960" y="1463040"/>
+            <a:ext cx="11308080" cy="629841"/>
+          </a:xfrm>
+          <a:prstGeom prst="rect">
+            <a:avLst/>
+          </a:prstGeom>
+          <a:noFill/>
+          <a:ln/>
+        </p:spPr>
+        <p:txBody>
+          <a:bodyPr wrap="square" lIns="0" tIns="0" rIns="0" bIns="0" rtlCol="0" anchor="ctr"/>
           <a:lstStyle/>
           <a:p>
             <a:pPr algn="l" indent="0" marL="0">
-              <a:buNone/>
-            </a:pPr>
-            <a:r>
-              <a:rPr lang="en-US" sz="1200" b="1" dirty="0">
-                <a:solidFill>
-                  <a:srgbClr val="005B94"/>
-                </a:solidFill>
-                <a:latin typeface="Arial" pitchFamily="34" charset="0"/>
-                <a:ea typeface="Arial" pitchFamily="34" charset="-122"/>
-                <a:cs typeface="Arial" pitchFamily="34" charset="-120"/>
-              </a:rPr>
-              <a:t>01</a:t>
-            </a:r>
-            <a:endParaRPr lang="en-US" sz="1200" dirty="0"/>
-          </a:p>
-        </p:txBody>
-      </p:sp>
-      <p:sp>
-        <p:nvSpPr>
-          <p:cNvPr id="5" name="Text 1"/>
-          <p:cNvSpPr/>
-          <p:nvPr/>
-        </p:nvSpPr>
-        <p:spPr>
-          <a:xfrm>
-            <a:off x="838200" y="235625"/>
-            <a:ext cx="9768840" cy="275511"/>
-          </a:xfrm>
-          <a:prstGeom prst="rect">
-            <a:avLst/>
-          </a:prstGeom>
-          <a:noFill/>
-          <a:ln/>
-        </p:spPr>
-        <p:txBody>
-          <a:bodyPr wrap="none" lIns="0" tIns="0" rIns="0" bIns="0" rtlCol="0" anchor="ctr"/>
-          <a:lstStyle/>
-          <a:p>
-            <a:pPr algn="l" indent="0" marL="0">
-              <a:lnSpc>
-                <a:spcPts val="2170"/>
-              </a:lnSpc>
-              <a:buNone/>
-            </a:pPr>
-            <a:r>
-              <a:rPr lang="en-US" sz="1400" b="1" dirty="0">
-                <a:solidFill>
-                  <a:srgbClr val="40647D"/>
-                </a:solidFill>
-                <a:latin typeface="Microsoft YaHei" pitchFamily="34" charset="0"/>
-                <a:ea typeface="Microsoft YaHei" pitchFamily="34" charset="-122"/>
-                <a:cs typeface="Microsoft YaHei" pitchFamily="34" charset="-120"/>
-              </a:rPr>
-              <a:t>制作起步</a:t>
-            </a:r>
-            <a:endParaRPr lang="en-US" sz="1400" dirty="0"/>
-          </a:p>
-        </p:txBody>
-      </p:sp>
-      <p:sp>
-        <p:nvSpPr>
-          <p:cNvPr id="6" name="Text 2"/>
-          <p:cNvSpPr/>
-          <p:nvPr/>
-        </p:nvSpPr>
-        <p:spPr>
-          <a:xfrm>
-            <a:off x="441960" y="609600"/>
-            <a:ext cx="10165080" cy="433864"/>
-          </a:xfrm>
-          <a:prstGeom prst="rect">
-            <a:avLst/>
-          </a:prstGeom>
-          <a:noFill/>
-          <a:ln/>
-        </p:spPr>
-        <p:txBody>
-          <a:bodyPr wrap="none" lIns="0" tIns="0" rIns="0" bIns="0" rtlCol="0" anchor="ctr"/>
-          <a:lstStyle/>
-          <a:p>
-            <a:pPr algn="l" indent="0" marL="0">
-              <a:lnSpc>
-                <a:spcPts val="3416"/>
-              </a:lnSpc>
-              <a:buNone/>
-            </a:pPr>
-            <a:r>
-              <a:rPr lang="en-US" sz="2800" b="1" dirty="0">
-                <a:solidFill>
-                  <a:srgbClr val="005B94"/>
-                </a:solidFill>
-                <a:latin typeface="Microsoft YaHei" pitchFamily="34" charset="0"/>
-                <a:ea typeface="Microsoft YaHei" pitchFamily="34" charset="-122"/>
-                <a:cs typeface="Microsoft YaHei" pitchFamily="34" charset="-120"/>
-              </a:rPr>
-              <a:t>研究现状分析</a:t>
-            </a:r>
-            <a:endParaRPr lang="en-US" sz="2800" dirty="0"/>
+              <a:lnSpc>
+                <a:spcPts val="2480"/>
+              </a:lnSpc>
+              <a:buNone/>
+            </a:pPr>
+            <a:r>
+              <a:rPr lang="en-US" sz="1600" dirty="0">
+                <a:solidFill>
+                  <a:srgbClr val="12374E"/>
+                </a:solidFill>
+                <a:latin typeface="Microsoft YaHei" pitchFamily="34" charset="0"/>
+                <a:ea typeface="Microsoft YaHei" pitchFamily="34" charset="-122"/>
+                <a:cs typeface="Microsoft YaHei" pitchFamily="34" charset="-120"/>
+              </a:rPr>
+              <a:t>七十余载薪火相传，从1952年六校矿冶合流到新时代“双一流”建设，学校始终与祖国钢铁工业同频共振，走出了一条从单科性院校到多学科性研究型大学的跨越之路。</a:t>
+            </a:r>
+            <a:endParaRPr lang="en-US" sz="1600" dirty="0"/>
           </a:p>
         </p:txBody>
       </p:sp>
       <p:pic>
         <p:nvPicPr>
-          <p:cNvPr id="7" name="Image 1" descr="preencoded.png">    </p:cNvPr>
+          <p:cNvPr id="12" name="Image 1" descr="preencoded.png">    </p:cNvPr>
           <p:cNvPicPr>
             <a:picLocks noChangeAspect="1"/>
           </p:cNvPicPr>
@@ -46396,8 +46429,8 @@
         </p:blipFill>
         <p:spPr>
           <a:xfrm>
-            <a:off x="10835640" y="201930"/>
-            <a:ext cx="914400" cy="914400"/>
+            <a:off x="441960" y="5730240"/>
+            <a:ext cx="11308080" cy="472440"/>
           </a:xfrm>
           <a:prstGeom prst="rect">
             <a:avLst/>
@@ -46406,55 +46439,67 @@
       </p:pic>
       <p:sp>
         <p:nvSpPr>
-          <p:cNvPr id="8" name="Text 3"/>
-          <p:cNvSpPr/>
-          <p:nvPr/>
-        </p:nvSpPr>
-        <p:spPr>
-          <a:xfrm>
-            <a:off x="441960" y="1463040"/>
-            <a:ext cx="11308080" cy="629841"/>
-          </a:xfrm>
-          <a:prstGeom prst="rect">
-            <a:avLst/>
-          </a:prstGeom>
-          <a:noFill/>
-          <a:ln/>
-        </p:spPr>
-        <p:txBody>
-          <a:bodyPr wrap="square" lIns="0" tIns="0" rIns="0" bIns="0" rtlCol="0" anchor="ctr"/>
-          <a:lstStyle/>
-          <a:p>
-            <a:pPr algn="l" indent="0" marL="0">
-              <a:lnSpc>
-                <a:spcPts val="2480"/>
-              </a:lnSpc>
-              <a:buNone/>
-            </a:pPr>
-            <a:r>
-              <a:rPr lang="en-US" sz="1600" dirty="0">
-                <a:solidFill>
-                  <a:srgbClr val="12374E"/>
-                </a:solidFill>
-                <a:latin typeface="Microsoft YaHei" pitchFamily="34" charset="0"/>
-                <a:ea typeface="Microsoft YaHei" pitchFamily="34" charset="-122"/>
-                <a:cs typeface="Microsoft YaHei" pitchFamily="34" charset="-120"/>
-              </a:rPr>
-              <a:t>七十余载薪火相传，从1952年六校矿冶合流到新时代“双一流”建设，学校始终与祖国钢铁工业同频共振，走出了一条从单科性院校到多学科性研究型大学的跨越之路。</a:t>
-            </a:r>
-            <a:endParaRPr lang="en-US" sz="1600" dirty="0"/>
-          </a:p>
-        </p:txBody>
-      </p:sp>
-      <p:sp>
-        <p:nvSpPr>
-          <p:cNvPr id="9" name="Text 4"/>
-          <p:cNvSpPr/>
-          <p:nvPr/>
-        </p:nvSpPr>
-        <p:spPr>
-          <a:xfrm>
-            <a:off x="807720" y="2306241"/>
+          <p:cNvPr id="13" name="Shape 8"/>
+          <p:cNvSpPr/>
+          <p:nvPr/>
+        </p:nvSpPr>
+        <p:spPr>
+          <a:xfrm>
+            <a:off x="685800" y="2331720"/>
+            <a:ext cx="2613660" cy="3276600"/>
+          </a:xfrm>
+          <a:prstGeom prst="rect">
+            <a:avLst/>
+          </a:prstGeom>
+          <a:solidFill>
+            <a:srgbClr val="EEF5F9"/>
+          </a:solidFill>
+          <a:ln w="12700">
+            <a:solidFill>
+              <a:srgbClr val="EEF5F9">
+                <a:alpha val="0"/>
+              </a:srgbClr>
+            </a:solidFill>
+            <a:prstDash val="solid"/>
+          </a:ln>
+        </p:spPr>
+      </p:sp>
+      <p:sp>
+        <p:nvSpPr>
+          <p:cNvPr id="14" name="Shape 9"/>
+          <p:cNvSpPr/>
+          <p:nvPr/>
+        </p:nvSpPr>
+        <p:spPr>
+          <a:xfrm>
+            <a:off x="685800" y="2331720"/>
+            <a:ext cx="2613660" cy="441960"/>
+          </a:xfrm>
+          <a:prstGeom prst="rect">
+            <a:avLst/>
+          </a:prstGeom>
+          <a:solidFill>
+            <a:srgbClr val="005B94"/>
+          </a:solidFill>
+          <a:ln w="12700">
+            <a:solidFill>
+              <a:srgbClr val="005B94">
+                <a:alpha val="0"/>
+              </a:srgbClr>
+            </a:solidFill>
+            <a:prstDash val="solid"/>
+          </a:ln>
+        </p:spPr>
+      </p:sp>
+      <p:sp>
+        <p:nvSpPr>
+          <p:cNvPr id="15" name="Text 10"/>
+          <p:cNvSpPr/>
+          <p:nvPr/>
+        </p:nvSpPr>
+        <p:spPr>
+          <a:xfrm>
+            <a:off x="807720" y="2377440"/>
             <a:ext cx="2369820" cy="350520"/>
           </a:xfrm>
           <a:prstGeom prst="rect">
@@ -46490,7 +46535,7 @@
       </p:sp>
       <p:pic>
         <p:nvPicPr>
-          <p:cNvPr id="10" name="Image 2" descr="preencoded.png">    </p:cNvPr>
+          <p:cNvPr id="16" name="Image 2" descr="preencoded.png">    </p:cNvPr>
           <p:cNvPicPr>
             <a:picLocks noChangeAspect="1"/>
           </p:cNvPicPr>
@@ -46504,8 +46549,8 @@
         </p:blipFill>
         <p:spPr>
           <a:xfrm>
-            <a:off x="807720" y="2824401"/>
-            <a:ext cx="2369820" cy="1127760"/>
+            <a:off x="807720" y="2895600"/>
+            <a:ext cx="2369820" cy="1155978"/>
           </a:xfrm>
           <a:prstGeom prst="rect">
             <a:avLst/>
@@ -46514,14 +46559,14 @@
       </p:pic>
       <p:sp>
         <p:nvSpPr>
-          <p:cNvPr id="11" name="Text 5"/>
-          <p:cNvSpPr/>
-          <p:nvPr/>
-        </p:nvSpPr>
-        <p:spPr>
-          <a:xfrm>
-            <a:off x="807720" y="4150281"/>
-            <a:ext cx="2369820" cy="1381839"/>
+          <p:cNvPr id="17" name="Text 11"/>
+          <p:cNvSpPr/>
+          <p:nvPr/>
+        </p:nvSpPr>
+        <p:spPr>
+          <a:xfrm>
+            <a:off x="807720" y="4173498"/>
+            <a:ext cx="2369820" cy="1343382"/>
           </a:xfrm>
           <a:prstGeom prst="rect">
             <a:avLst/>
@@ -46556,14 +46601,14 @@
       </p:sp>
       <p:sp>
         <p:nvSpPr>
-          <p:cNvPr id="12" name="Text 6"/>
-          <p:cNvSpPr/>
-          <p:nvPr/>
-        </p:nvSpPr>
-        <p:spPr>
-          <a:xfrm>
-            <a:off x="3543300" y="2306241"/>
-            <a:ext cx="2369820" cy="350520"/>
+          <p:cNvPr id="18" name="Text 12"/>
+          <p:cNvSpPr/>
+          <p:nvPr/>
+        </p:nvSpPr>
+        <p:spPr>
+          <a:xfrm>
+            <a:off x="838200" y="5823585"/>
+            <a:ext cx="1371600" cy="285750"/>
           </a:xfrm>
           <a:prstGeom prst="rect">
             <a:avLst/>
@@ -46577,28 +46622,28 @@
           <a:p>
             <a:pPr algn="l" indent="0" marL="0">
               <a:lnSpc>
-                <a:spcPts val="2760"/>
-              </a:lnSpc>
-              <a:buNone/>
-            </a:pPr>
-            <a:r>
-              <a:rPr lang="en-US" sz="2400" b="1" dirty="0">
-                <a:solidFill>
-                  <a:srgbClr val="FFFFFF"/>
-                </a:solidFill>
-                <a:latin typeface="Microsoft YaHei" pitchFamily="34" charset="0"/>
-                <a:ea typeface="Microsoft YaHei" pitchFamily="34" charset="-122"/>
-                <a:cs typeface="Microsoft YaHei" pitchFamily="34" charset="-120"/>
-              </a:rPr>
-              <a:t>1960年</a:t>
-            </a:r>
-            <a:endParaRPr lang="en-US" sz="2400" dirty="0"/>
+                <a:spcPts val="2250"/>
+              </a:lnSpc>
+              <a:buNone/>
+            </a:pPr>
+            <a:r>
+              <a:rPr lang="en-US" sz="1800" b="1" dirty="0">
+                <a:solidFill>
+                  <a:srgbClr val="005B94"/>
+                </a:solidFill>
+                <a:latin typeface="Microsoft YaHei" pitchFamily="34" charset="0"/>
+                <a:ea typeface="Microsoft YaHei" pitchFamily="34" charset="-122"/>
+                <a:cs typeface="Microsoft YaHei" pitchFamily="34" charset="-120"/>
+              </a:rPr>
+              <a:t>六校矿冶合流</a:t>
+            </a:r>
+            <a:endParaRPr lang="en-US" sz="1800" dirty="0"/>
           </a:p>
         </p:txBody>
       </p:sp>
       <p:pic>
         <p:nvPicPr>
-          <p:cNvPr id="13" name="Image 3" descr="preencoded.png">    </p:cNvPr>
+          <p:cNvPr id="19" name="Image 3" descr="preencoded.png">    </p:cNvPr>
           <p:cNvPicPr>
             <a:picLocks noChangeAspect="1"/>
           </p:cNvPicPr>
@@ -46612,101 +46657,17 @@
         </p:blipFill>
         <p:spPr>
           <a:xfrm>
-            <a:off x="3543300" y="2824401"/>
-            <a:ext cx="2369820" cy="1127760"/>
+            <a:off x="670560" y="2331720"/>
+            <a:ext cx="30480" cy="3634740"/>
           </a:xfrm>
           <a:prstGeom prst="rect">
             <a:avLst/>
           </a:prstGeom>
         </p:spPr>
       </p:pic>
-      <p:sp>
-        <p:nvSpPr>
-          <p:cNvPr id="14" name="Text 7"/>
-          <p:cNvSpPr/>
-          <p:nvPr/>
-        </p:nvSpPr>
-        <p:spPr>
-          <a:xfrm>
-            <a:off x="3543300" y="4150281"/>
-            <a:ext cx="2369820" cy="1381839"/>
-          </a:xfrm>
-          <a:prstGeom prst="rect">
-            <a:avLst/>
-          </a:prstGeom>
-          <a:noFill/>
-          <a:ln/>
-        </p:spPr>
-        <p:txBody>
-          <a:bodyPr wrap="square" lIns="0" tIns="0" rIns="0" bIns="0" rtlCol="0" anchor="ctr"/>
-          <a:lstStyle/>
-          <a:p>
-            <a:pPr algn="just" indent="0" marL="0">
-              <a:lnSpc>
-                <a:spcPts val="2100"/>
-              </a:lnSpc>
-              <a:buNone/>
-            </a:pPr>
-            <a:r>
-              <a:rPr lang="en-US" sz="1400" dirty="0">
-                <a:solidFill>
-                  <a:srgbClr val="12374E"/>
-                </a:solidFill>
-                <a:latin typeface="Microsoft YaHei" pitchFamily="34" charset="0"/>
-                <a:ea typeface="Microsoft YaHei" pitchFamily="34" charset="-122"/>
-                <a:cs typeface="Microsoft YaHei" pitchFamily="34" charset="-120"/>
-              </a:rPr>
-              <a:t>1960年，学校更名为北京钢铁学院，同年被批准为全国重点高等学校。学校立足矿冶优势，巩固学科基础，培养钢铁工业所需的专业人才。</a:t>
-            </a:r>
-            <a:endParaRPr lang="en-US" sz="1400" dirty="0"/>
-          </a:p>
-        </p:txBody>
-      </p:sp>
-      <p:sp>
-        <p:nvSpPr>
-          <p:cNvPr id="15" name="Text 8"/>
-          <p:cNvSpPr/>
-          <p:nvPr/>
-        </p:nvSpPr>
-        <p:spPr>
-          <a:xfrm>
-            <a:off x="6278880" y="2306241"/>
-            <a:ext cx="2369820" cy="350520"/>
-          </a:xfrm>
-          <a:prstGeom prst="rect">
-            <a:avLst/>
-          </a:prstGeom>
-          <a:noFill/>
-          <a:ln/>
-        </p:spPr>
-        <p:txBody>
-          <a:bodyPr wrap="square" lIns="0" tIns="0" rIns="0" bIns="0" rtlCol="0" anchor="ctr"/>
-          <a:lstStyle/>
-          <a:p>
-            <a:pPr algn="l" indent="0" marL="0">
-              <a:lnSpc>
-                <a:spcPts val="2760"/>
-              </a:lnSpc>
-              <a:buNone/>
-            </a:pPr>
-            <a:r>
-              <a:rPr lang="en-US" sz="2400" b="1" dirty="0">
-                <a:solidFill>
-                  <a:srgbClr val="FFFFFF"/>
-                </a:solidFill>
-                <a:latin typeface="Microsoft YaHei" pitchFamily="34" charset="0"/>
-                <a:ea typeface="Microsoft YaHei" pitchFamily="34" charset="-122"/>
-                <a:cs typeface="Microsoft YaHei" pitchFamily="34" charset="-120"/>
-              </a:rPr>
-              <a:t>1988年</a:t>
-            </a:r>
-            <a:endParaRPr lang="en-US" sz="2400" dirty="0"/>
-          </a:p>
-        </p:txBody>
-      </p:sp>
       <p:pic>
         <p:nvPicPr>
-          <p:cNvPr id="16" name="Image 4" descr="preencoded.png">    </p:cNvPr>
+          <p:cNvPr id="20" name="Image 4" descr="preencoded.png">    </p:cNvPr>
           <p:cNvPicPr>
             <a:picLocks noChangeAspect="1"/>
           </p:cNvPicPr>
@@ -46720,8 +46681,8 @@
         </p:blipFill>
         <p:spPr>
           <a:xfrm>
-            <a:off x="6278880" y="2824401"/>
-            <a:ext cx="2369820" cy="1127760"/>
+            <a:off x="594360" y="5875020"/>
+            <a:ext cx="182880" cy="182880"/>
           </a:xfrm>
           <a:prstGeom prst="rect">
             <a:avLst/>
@@ -46730,55 +46691,67 @@
       </p:pic>
       <p:sp>
         <p:nvSpPr>
-          <p:cNvPr id="17" name="Text 9"/>
-          <p:cNvSpPr/>
-          <p:nvPr/>
-        </p:nvSpPr>
-        <p:spPr>
-          <a:xfrm>
-            <a:off x="6278880" y="4150281"/>
-            <a:ext cx="2369820" cy="1381839"/>
-          </a:xfrm>
-          <a:prstGeom prst="rect">
-            <a:avLst/>
-          </a:prstGeom>
-          <a:noFill/>
-          <a:ln/>
-        </p:spPr>
-        <p:txBody>
-          <a:bodyPr wrap="square" lIns="0" tIns="0" rIns="0" bIns="0" rtlCol="0" anchor="ctr"/>
-          <a:lstStyle/>
-          <a:p>
-            <a:pPr algn="just" indent="0" marL="0">
-              <a:lnSpc>
-                <a:spcPts val="2100"/>
-              </a:lnSpc>
-              <a:buNone/>
-            </a:pPr>
-            <a:r>
-              <a:rPr lang="en-US" sz="1400" dirty="0">
-                <a:solidFill>
-                  <a:srgbClr val="12374E"/>
-                </a:solidFill>
-                <a:latin typeface="Microsoft YaHei" pitchFamily="34" charset="0"/>
-                <a:ea typeface="Microsoft YaHei" pitchFamily="34" charset="-122"/>
-                <a:cs typeface="Microsoft YaHei" pitchFamily="34" charset="-120"/>
-              </a:rPr>
-              <a:t>1988年，学校正式更名为北京科技大学，迈入多科性大学发展阶段。以工为主，多学科协调发展，逐步拓展人才培养与科学研究的领域。</a:t>
-            </a:r>
-            <a:endParaRPr lang="en-US" sz="1400" dirty="0"/>
-          </a:p>
-        </p:txBody>
-      </p:sp>
-      <p:sp>
-        <p:nvSpPr>
-          <p:cNvPr id="18" name="Text 10"/>
-          <p:cNvSpPr/>
-          <p:nvPr/>
-        </p:nvSpPr>
-        <p:spPr>
-          <a:xfrm>
-            <a:off x="9014460" y="2306241"/>
+          <p:cNvPr id="21" name="Shape 13"/>
+          <p:cNvSpPr/>
+          <p:nvPr/>
+        </p:nvSpPr>
+        <p:spPr>
+          <a:xfrm>
+            <a:off x="3421380" y="2331720"/>
+            <a:ext cx="2613660" cy="3276600"/>
+          </a:xfrm>
+          <a:prstGeom prst="rect">
+            <a:avLst/>
+          </a:prstGeom>
+          <a:solidFill>
+            <a:srgbClr val="EEF5F9"/>
+          </a:solidFill>
+          <a:ln w="12700">
+            <a:solidFill>
+              <a:srgbClr val="EEF5F9">
+                <a:alpha val="0"/>
+              </a:srgbClr>
+            </a:solidFill>
+            <a:prstDash val="solid"/>
+          </a:ln>
+        </p:spPr>
+      </p:sp>
+      <p:sp>
+        <p:nvSpPr>
+          <p:cNvPr id="22" name="Shape 14"/>
+          <p:cNvSpPr/>
+          <p:nvPr/>
+        </p:nvSpPr>
+        <p:spPr>
+          <a:xfrm>
+            <a:off x="3421380" y="2331720"/>
+            <a:ext cx="2613660" cy="441960"/>
+          </a:xfrm>
+          <a:prstGeom prst="rect">
+            <a:avLst/>
+          </a:prstGeom>
+          <a:solidFill>
+            <a:srgbClr val="005B94"/>
+          </a:solidFill>
+          <a:ln w="12700">
+            <a:solidFill>
+              <a:srgbClr val="005B94">
+                <a:alpha val="0"/>
+              </a:srgbClr>
+            </a:solidFill>
+            <a:prstDash val="solid"/>
+          </a:ln>
+        </p:spPr>
+      </p:sp>
+      <p:sp>
+        <p:nvSpPr>
+          <p:cNvPr id="23" name="Text 15"/>
+          <p:cNvSpPr/>
+          <p:nvPr/>
+        </p:nvSpPr>
+        <p:spPr>
+          <a:xfrm>
+            <a:off x="3543300" y="2377440"/>
             <a:ext cx="2369820" cy="350520"/>
           </a:xfrm>
           <a:prstGeom prst="rect">
@@ -46806,7 +46779,7 @@
                 <a:ea typeface="Microsoft YaHei" pitchFamily="34" charset="-122"/>
                 <a:cs typeface="Microsoft YaHei" pitchFamily="34" charset="-120"/>
               </a:rPr>
-              <a:t>新世纪</a:t>
+              <a:t>1960年</a:t>
             </a:r>
             <a:endParaRPr lang="en-US" sz="2400" dirty="0"/>
           </a:p>
@@ -46814,7 +46787,7 @@
       </p:sp>
       <p:pic>
         <p:nvPicPr>
-          <p:cNvPr id="19" name="Image 5" descr="preencoded.png">    </p:cNvPr>
+          <p:cNvPr id="24" name="Image 5" descr="preencoded.png">    </p:cNvPr>
           <p:cNvPicPr>
             <a:picLocks noChangeAspect="1"/>
           </p:cNvPicPr>
@@ -46828,8 +46801,8 @@
         </p:blipFill>
         <p:spPr>
           <a:xfrm>
-            <a:off x="9014460" y="2824401"/>
-            <a:ext cx="2369820" cy="1127760"/>
+            <a:off x="3543300" y="2895600"/>
+            <a:ext cx="2369820" cy="1155978"/>
           </a:xfrm>
           <a:prstGeom prst="rect">
             <a:avLst/>
@@ -46838,14 +46811,14 @@
       </p:pic>
       <p:sp>
         <p:nvSpPr>
-          <p:cNvPr id="20" name="Text 11"/>
-          <p:cNvSpPr/>
-          <p:nvPr/>
-        </p:nvSpPr>
-        <p:spPr>
-          <a:xfrm>
-            <a:off x="9014460" y="4150281"/>
-            <a:ext cx="2369820" cy="1381839"/>
+          <p:cNvPr id="25" name="Text 16"/>
+          <p:cNvSpPr/>
+          <p:nvPr/>
+        </p:nvSpPr>
+        <p:spPr>
+          <a:xfrm>
+            <a:off x="3543300" y="4173498"/>
+            <a:ext cx="2369820" cy="1343382"/>
           </a:xfrm>
           <a:prstGeom prst="rect">
             <a:avLst/>
@@ -46872,6 +46845,510 @@
                 <a:ea typeface="Microsoft YaHei" pitchFamily="34" charset="-122"/>
                 <a:cs typeface="Microsoft YaHei" pitchFamily="34" charset="-120"/>
               </a:rPr>
+              <a:t>1960年，学校更名为北京钢铁学院，同年被批准为全国重点高等学校。学校立足矿冶优势，巩固学科基础，培养钢铁工业所需的专业人才。</a:t>
+            </a:r>
+            <a:endParaRPr lang="en-US" sz="1400" dirty="0"/>
+          </a:p>
+        </p:txBody>
+      </p:sp>
+      <p:sp>
+        <p:nvSpPr>
+          <p:cNvPr id="26" name="Text 17"/>
+          <p:cNvSpPr/>
+          <p:nvPr/>
+        </p:nvSpPr>
+        <p:spPr>
+          <a:xfrm>
+            <a:off x="3573780" y="5823585"/>
+            <a:ext cx="1371600" cy="285750"/>
+          </a:xfrm>
+          <a:prstGeom prst="rect">
+            <a:avLst/>
+          </a:prstGeom>
+          <a:noFill/>
+          <a:ln/>
+        </p:spPr>
+        <p:txBody>
+          <a:bodyPr wrap="square" lIns="0" tIns="0" rIns="0" bIns="0" rtlCol="0" anchor="ctr"/>
+          <a:lstStyle/>
+          <a:p>
+            <a:pPr algn="l" indent="0" marL="0">
+              <a:lnSpc>
+                <a:spcPts val="2250"/>
+              </a:lnSpc>
+              <a:buNone/>
+            </a:pPr>
+            <a:r>
+              <a:rPr lang="en-US" sz="1800" b="1" dirty="0">
+                <a:solidFill>
+                  <a:srgbClr val="005B94"/>
+                </a:solidFill>
+                <a:latin typeface="Microsoft YaHei" pitchFamily="34" charset="0"/>
+                <a:ea typeface="Microsoft YaHei" pitchFamily="34" charset="-122"/>
+                <a:cs typeface="Microsoft YaHei" pitchFamily="34" charset="-120"/>
+              </a:rPr>
+              <a:t>钢院列名重点</a:t>
+            </a:r>
+            <a:endParaRPr lang="en-US" sz="1800" dirty="0"/>
+          </a:p>
+        </p:txBody>
+      </p:sp>
+      <p:pic>
+        <p:nvPicPr>
+          <p:cNvPr id="27" name="Image 6" descr="preencoded.png">    </p:cNvPr>
+          <p:cNvPicPr>
+            <a:picLocks noChangeAspect="1"/>
+          </p:cNvPicPr>
+          <p:nvPr/>
+        </p:nvPicPr>
+        <p:blipFill>
+          <a:blip r:embed="rId7"/>
+          <a:stretch>
+            <a:fillRect/>
+          </a:stretch>
+        </p:blipFill>
+        <p:spPr>
+          <a:xfrm>
+            <a:off x="3406140" y="2331720"/>
+            <a:ext cx="30480" cy="3634740"/>
+          </a:xfrm>
+          <a:prstGeom prst="rect">
+            <a:avLst/>
+          </a:prstGeom>
+        </p:spPr>
+      </p:pic>
+      <p:pic>
+        <p:nvPicPr>
+          <p:cNvPr id="28" name="Image 7" descr="preencoded.png">    </p:cNvPr>
+          <p:cNvPicPr>
+            <a:picLocks noChangeAspect="1"/>
+          </p:cNvPicPr>
+          <p:nvPr/>
+        </p:nvPicPr>
+        <p:blipFill>
+          <a:blip r:embed="rId8"/>
+          <a:stretch>
+            <a:fillRect/>
+          </a:stretch>
+        </p:blipFill>
+        <p:spPr>
+          <a:xfrm>
+            <a:off x="3329940" y="5875020"/>
+            <a:ext cx="182880" cy="182880"/>
+          </a:xfrm>
+          <a:prstGeom prst="rect">
+            <a:avLst/>
+          </a:prstGeom>
+        </p:spPr>
+      </p:pic>
+      <p:sp>
+        <p:nvSpPr>
+          <p:cNvPr id="29" name="Shape 18"/>
+          <p:cNvSpPr/>
+          <p:nvPr/>
+        </p:nvSpPr>
+        <p:spPr>
+          <a:xfrm>
+            <a:off x="6156960" y="2331720"/>
+            <a:ext cx="2613660" cy="3276600"/>
+          </a:xfrm>
+          <a:prstGeom prst="rect">
+            <a:avLst/>
+          </a:prstGeom>
+          <a:solidFill>
+            <a:srgbClr val="EEF5F9"/>
+          </a:solidFill>
+          <a:ln w="12700">
+            <a:solidFill>
+              <a:srgbClr val="EEF5F9">
+                <a:alpha val="0"/>
+              </a:srgbClr>
+            </a:solidFill>
+            <a:prstDash val="solid"/>
+          </a:ln>
+        </p:spPr>
+      </p:sp>
+      <p:sp>
+        <p:nvSpPr>
+          <p:cNvPr id="30" name="Shape 19"/>
+          <p:cNvSpPr/>
+          <p:nvPr/>
+        </p:nvSpPr>
+        <p:spPr>
+          <a:xfrm>
+            <a:off x="6156960" y="2331720"/>
+            <a:ext cx="2613660" cy="441960"/>
+          </a:xfrm>
+          <a:prstGeom prst="rect">
+            <a:avLst/>
+          </a:prstGeom>
+          <a:solidFill>
+            <a:srgbClr val="005B94"/>
+          </a:solidFill>
+          <a:ln w="12700">
+            <a:solidFill>
+              <a:srgbClr val="005B94">
+                <a:alpha val="0"/>
+              </a:srgbClr>
+            </a:solidFill>
+            <a:prstDash val="solid"/>
+          </a:ln>
+        </p:spPr>
+      </p:sp>
+      <p:sp>
+        <p:nvSpPr>
+          <p:cNvPr id="31" name="Text 20"/>
+          <p:cNvSpPr/>
+          <p:nvPr/>
+        </p:nvSpPr>
+        <p:spPr>
+          <a:xfrm>
+            <a:off x="6278880" y="2377440"/>
+            <a:ext cx="2369820" cy="350520"/>
+          </a:xfrm>
+          <a:prstGeom prst="rect">
+            <a:avLst/>
+          </a:prstGeom>
+          <a:noFill/>
+          <a:ln/>
+        </p:spPr>
+        <p:txBody>
+          <a:bodyPr wrap="square" lIns="0" tIns="0" rIns="0" bIns="0" rtlCol="0" anchor="ctr"/>
+          <a:lstStyle/>
+          <a:p>
+            <a:pPr algn="l" indent="0" marL="0">
+              <a:lnSpc>
+                <a:spcPts val="2760"/>
+              </a:lnSpc>
+              <a:buNone/>
+            </a:pPr>
+            <a:r>
+              <a:rPr lang="en-US" sz="2400" b="1" dirty="0">
+                <a:solidFill>
+                  <a:srgbClr val="FFFFFF"/>
+                </a:solidFill>
+                <a:latin typeface="Microsoft YaHei" pitchFamily="34" charset="0"/>
+                <a:ea typeface="Microsoft YaHei" pitchFamily="34" charset="-122"/>
+                <a:cs typeface="Microsoft YaHei" pitchFamily="34" charset="-120"/>
+              </a:rPr>
+              <a:t>1988年</a:t>
+            </a:r>
+            <a:endParaRPr lang="en-US" sz="2400" dirty="0"/>
+          </a:p>
+        </p:txBody>
+      </p:sp>
+      <p:pic>
+        <p:nvPicPr>
+          <p:cNvPr id="32" name="Image 8" descr="preencoded.png">    </p:cNvPr>
+          <p:cNvPicPr>
+            <a:picLocks noChangeAspect="1"/>
+          </p:cNvPicPr>
+          <p:nvPr/>
+        </p:nvPicPr>
+        <p:blipFill>
+          <a:blip r:embed="rId9"/>
+          <a:stretch>
+            <a:fillRect/>
+          </a:stretch>
+        </p:blipFill>
+        <p:spPr>
+          <a:xfrm>
+            <a:off x="6278880" y="2895600"/>
+            <a:ext cx="2369820" cy="1155978"/>
+          </a:xfrm>
+          <a:prstGeom prst="rect">
+            <a:avLst/>
+          </a:prstGeom>
+        </p:spPr>
+      </p:pic>
+      <p:sp>
+        <p:nvSpPr>
+          <p:cNvPr id="33" name="Text 21"/>
+          <p:cNvSpPr/>
+          <p:nvPr/>
+        </p:nvSpPr>
+        <p:spPr>
+          <a:xfrm>
+            <a:off x="6278880" y="4173498"/>
+            <a:ext cx="2369820" cy="1343382"/>
+          </a:xfrm>
+          <a:prstGeom prst="rect">
+            <a:avLst/>
+          </a:prstGeom>
+          <a:noFill/>
+          <a:ln/>
+        </p:spPr>
+        <p:txBody>
+          <a:bodyPr wrap="square" lIns="0" tIns="0" rIns="0" bIns="0" rtlCol="0" anchor="ctr"/>
+          <a:lstStyle/>
+          <a:p>
+            <a:pPr algn="just" indent="0" marL="0">
+              <a:lnSpc>
+                <a:spcPts val="2100"/>
+              </a:lnSpc>
+              <a:buNone/>
+            </a:pPr>
+            <a:r>
+              <a:rPr lang="en-US" sz="1400" dirty="0">
+                <a:solidFill>
+                  <a:srgbClr val="12374E"/>
+                </a:solidFill>
+                <a:latin typeface="Microsoft YaHei" pitchFamily="34" charset="0"/>
+                <a:ea typeface="Microsoft YaHei" pitchFamily="34" charset="-122"/>
+                <a:cs typeface="Microsoft YaHei" pitchFamily="34" charset="-120"/>
+              </a:rPr>
+              <a:t>1988年，学校正式更名为北京科技大学，迈入多科性大学发展阶段。以工为主，多学科协调发展，逐步拓展人才培养与科学研究的领域。</a:t>
+            </a:r>
+            <a:endParaRPr lang="en-US" sz="1400" dirty="0"/>
+          </a:p>
+        </p:txBody>
+      </p:sp>
+      <p:sp>
+        <p:nvSpPr>
+          <p:cNvPr id="34" name="Text 22"/>
+          <p:cNvSpPr/>
+          <p:nvPr/>
+        </p:nvSpPr>
+        <p:spPr>
+          <a:xfrm>
+            <a:off x="6309360" y="5823585"/>
+            <a:ext cx="1371600" cy="285750"/>
+          </a:xfrm>
+          <a:prstGeom prst="rect">
+            <a:avLst/>
+          </a:prstGeom>
+          <a:noFill/>
+          <a:ln/>
+        </p:spPr>
+        <p:txBody>
+          <a:bodyPr wrap="square" lIns="0" tIns="0" rIns="0" bIns="0" rtlCol="0" anchor="ctr"/>
+          <a:lstStyle/>
+          <a:p>
+            <a:pPr algn="l" indent="0" marL="0">
+              <a:lnSpc>
+                <a:spcPts val="2250"/>
+              </a:lnSpc>
+              <a:buNone/>
+            </a:pPr>
+            <a:r>
+              <a:rPr lang="en-US" sz="1800" b="1" dirty="0">
+                <a:solidFill>
+                  <a:srgbClr val="005B94"/>
+                </a:solidFill>
+                <a:latin typeface="Microsoft YaHei" pitchFamily="34" charset="0"/>
+                <a:ea typeface="Microsoft YaHei" pitchFamily="34" charset="-122"/>
+                <a:cs typeface="Microsoft YaHei" pitchFamily="34" charset="-120"/>
+              </a:rPr>
+              <a:t>北科定名转型</a:t>
+            </a:r>
+            <a:endParaRPr lang="en-US" sz="1800" dirty="0"/>
+          </a:p>
+        </p:txBody>
+      </p:sp>
+      <p:pic>
+        <p:nvPicPr>
+          <p:cNvPr id="35" name="Image 9" descr="preencoded.png">    </p:cNvPr>
+          <p:cNvPicPr>
+            <a:picLocks noChangeAspect="1"/>
+          </p:cNvPicPr>
+          <p:nvPr/>
+        </p:nvPicPr>
+        <p:blipFill>
+          <a:blip r:embed="rId10"/>
+          <a:stretch>
+            <a:fillRect/>
+          </a:stretch>
+        </p:blipFill>
+        <p:spPr>
+          <a:xfrm>
+            <a:off x="6141720" y="2331720"/>
+            <a:ext cx="30480" cy="3634740"/>
+          </a:xfrm>
+          <a:prstGeom prst="rect">
+            <a:avLst/>
+          </a:prstGeom>
+        </p:spPr>
+      </p:pic>
+      <p:pic>
+        <p:nvPicPr>
+          <p:cNvPr id="36" name="Image 10" descr="preencoded.png">    </p:cNvPr>
+          <p:cNvPicPr>
+            <a:picLocks noChangeAspect="1"/>
+          </p:cNvPicPr>
+          <p:nvPr/>
+        </p:nvPicPr>
+        <p:blipFill>
+          <a:blip r:embed="rId11"/>
+          <a:stretch>
+            <a:fillRect/>
+          </a:stretch>
+        </p:blipFill>
+        <p:spPr>
+          <a:xfrm>
+            <a:off x="6065520" y="5875020"/>
+            <a:ext cx="182880" cy="182880"/>
+          </a:xfrm>
+          <a:prstGeom prst="rect">
+            <a:avLst/>
+          </a:prstGeom>
+        </p:spPr>
+      </p:pic>
+      <p:sp>
+        <p:nvSpPr>
+          <p:cNvPr id="37" name="Shape 23"/>
+          <p:cNvSpPr/>
+          <p:nvPr/>
+        </p:nvSpPr>
+        <p:spPr>
+          <a:xfrm>
+            <a:off x="8892540" y="2331720"/>
+            <a:ext cx="2613660" cy="3276600"/>
+          </a:xfrm>
+          <a:prstGeom prst="rect">
+            <a:avLst/>
+          </a:prstGeom>
+          <a:solidFill>
+            <a:srgbClr val="EEF5F9"/>
+          </a:solidFill>
+          <a:ln w="12700">
+            <a:solidFill>
+              <a:srgbClr val="EEF5F9">
+                <a:alpha val="0"/>
+              </a:srgbClr>
+            </a:solidFill>
+            <a:prstDash val="solid"/>
+          </a:ln>
+        </p:spPr>
+      </p:sp>
+      <p:sp>
+        <p:nvSpPr>
+          <p:cNvPr id="38" name="Shape 24"/>
+          <p:cNvSpPr/>
+          <p:nvPr/>
+        </p:nvSpPr>
+        <p:spPr>
+          <a:xfrm>
+            <a:off x="8892540" y="2331720"/>
+            <a:ext cx="2613660" cy="441960"/>
+          </a:xfrm>
+          <a:prstGeom prst="rect">
+            <a:avLst/>
+          </a:prstGeom>
+          <a:solidFill>
+            <a:srgbClr val="005B94"/>
+          </a:solidFill>
+          <a:ln w="12700">
+            <a:solidFill>
+              <a:srgbClr val="005B94">
+                <a:alpha val="0"/>
+              </a:srgbClr>
+            </a:solidFill>
+            <a:prstDash val="solid"/>
+          </a:ln>
+        </p:spPr>
+      </p:sp>
+      <p:sp>
+        <p:nvSpPr>
+          <p:cNvPr id="39" name="Text 25"/>
+          <p:cNvSpPr/>
+          <p:nvPr/>
+        </p:nvSpPr>
+        <p:spPr>
+          <a:xfrm>
+            <a:off x="9014460" y="2377440"/>
+            <a:ext cx="2369820" cy="350520"/>
+          </a:xfrm>
+          <a:prstGeom prst="rect">
+            <a:avLst/>
+          </a:prstGeom>
+          <a:noFill/>
+          <a:ln/>
+        </p:spPr>
+        <p:txBody>
+          <a:bodyPr wrap="square" lIns="0" tIns="0" rIns="0" bIns="0" rtlCol="0" anchor="ctr"/>
+          <a:lstStyle/>
+          <a:p>
+            <a:pPr algn="l" indent="0" marL="0">
+              <a:lnSpc>
+                <a:spcPts val="2760"/>
+              </a:lnSpc>
+              <a:buNone/>
+            </a:pPr>
+            <a:r>
+              <a:rPr lang="en-US" sz="2400" b="1" dirty="0">
+                <a:solidFill>
+                  <a:srgbClr val="FFFFFF"/>
+                </a:solidFill>
+                <a:latin typeface="Microsoft YaHei" pitchFamily="34" charset="0"/>
+                <a:ea typeface="Microsoft YaHei" pitchFamily="34" charset="-122"/>
+                <a:cs typeface="Microsoft YaHei" pitchFamily="34" charset="-120"/>
+              </a:rPr>
+              <a:t>新世纪</a:t>
+            </a:r>
+            <a:endParaRPr lang="en-US" sz="2400" dirty="0"/>
+          </a:p>
+        </p:txBody>
+      </p:sp>
+      <p:pic>
+        <p:nvPicPr>
+          <p:cNvPr id="40" name="Image 11" descr="preencoded.png">    </p:cNvPr>
+          <p:cNvPicPr>
+            <a:picLocks noChangeAspect="1"/>
+          </p:cNvPicPr>
+          <p:nvPr/>
+        </p:nvPicPr>
+        <p:blipFill>
+          <a:blip r:embed="rId12"/>
+          <a:stretch>
+            <a:fillRect/>
+          </a:stretch>
+        </p:blipFill>
+        <p:spPr>
+          <a:xfrm>
+            <a:off x="9014460" y="2895600"/>
+            <a:ext cx="2369820" cy="1155978"/>
+          </a:xfrm>
+          <a:prstGeom prst="rect">
+            <a:avLst/>
+          </a:prstGeom>
+        </p:spPr>
+      </p:pic>
+      <p:sp>
+        <p:nvSpPr>
+          <p:cNvPr id="41" name="Text 26"/>
+          <p:cNvSpPr/>
+          <p:nvPr/>
+        </p:nvSpPr>
+        <p:spPr>
+          <a:xfrm>
+            <a:off x="9014460" y="4173498"/>
+            <a:ext cx="2369820" cy="1343382"/>
+          </a:xfrm>
+          <a:prstGeom prst="rect">
+            <a:avLst/>
+          </a:prstGeom>
+          <a:noFill/>
+          <a:ln/>
+        </p:spPr>
+        <p:txBody>
+          <a:bodyPr wrap="square" lIns="0" tIns="0" rIns="0" bIns="0" rtlCol="0" anchor="ctr"/>
+          <a:lstStyle/>
+          <a:p>
+            <a:pPr algn="just" indent="0" marL="0">
+              <a:lnSpc>
+                <a:spcPts val="2100"/>
+              </a:lnSpc>
+              <a:buNone/>
+            </a:pPr>
+            <a:r>
+              <a:rPr lang="en-US" sz="1400" dirty="0">
+                <a:solidFill>
+                  <a:srgbClr val="12374E"/>
+                </a:solidFill>
+                <a:latin typeface="Microsoft YaHei" pitchFamily="34" charset="0"/>
+                <a:ea typeface="Microsoft YaHei" pitchFamily="34" charset="-122"/>
+                <a:cs typeface="Microsoft YaHei" pitchFamily="34" charset="-120"/>
+              </a:rPr>
               <a:t>学校入选国家“双一流”建设高校，推进雄安校区建设，布局碳中和学院及未来芯片创新平台，面向国家战略需求拓展前沿与交叉研究。</a:t>
             </a:r>
             <a:endParaRPr lang="en-US" sz="1400" dirty="0"/>
@@ -46880,14 +47357,14 @@
       </p:sp>
       <p:sp>
         <p:nvSpPr>
-          <p:cNvPr id="21" name="Text 12"/>
-          <p:cNvSpPr/>
-          <p:nvPr/>
-        </p:nvSpPr>
-        <p:spPr>
-          <a:xfrm>
-            <a:off x="838200" y="5808345"/>
-            <a:ext cx="1371600" cy="285750"/>
+          <p:cNvPr id="42" name="Text 27"/>
+          <p:cNvSpPr/>
+          <p:nvPr/>
+        </p:nvSpPr>
+        <p:spPr>
+          <a:xfrm>
+            <a:off x="9044940" y="5823585"/>
+            <a:ext cx="1600200" cy="285750"/>
           </a:xfrm>
           <a:prstGeom prst="rect">
             <a:avLst/>
@@ -46908,28 +47385,76 @@
             <a:r>
               <a:rPr lang="en-US" sz="1800" b="1" dirty="0">
                 <a:solidFill>
-                  <a:srgbClr val="12374E"/>
-                </a:solidFill>
-                <a:latin typeface="Microsoft YaHei" pitchFamily="34" charset="0"/>
-                <a:ea typeface="Microsoft YaHei" pitchFamily="34" charset="-122"/>
-                <a:cs typeface="Microsoft YaHei" pitchFamily="34" charset="-120"/>
-              </a:rPr>
-              <a:t>六校矿冶合流</a:t>
+                  <a:srgbClr val="005B94"/>
+                </a:solidFill>
+                <a:latin typeface="Microsoft YaHei" pitchFamily="34" charset="0"/>
+                <a:ea typeface="Microsoft YaHei" pitchFamily="34" charset="-122"/>
+                <a:cs typeface="Microsoft YaHei" pitchFamily="34" charset="-120"/>
+              </a:rPr>
+              <a:t>双一流布局前瞻</a:t>
             </a:r>
             <a:endParaRPr lang="en-US" sz="1800" dirty="0"/>
           </a:p>
         </p:txBody>
       </p:sp>
-      <p:sp>
-        <p:nvSpPr>
-          <p:cNvPr id="22" name="Text 13"/>
-          <p:cNvSpPr/>
-          <p:nvPr/>
-        </p:nvSpPr>
-        <p:spPr>
-          <a:xfrm>
-            <a:off x="3573780" y="5808345"/>
-            <a:ext cx="1371600" cy="285750"/>
+      <p:pic>
+        <p:nvPicPr>
+          <p:cNvPr id="43" name="Image 12" descr="preencoded.png">    </p:cNvPr>
+          <p:cNvPicPr>
+            <a:picLocks noChangeAspect="1"/>
+          </p:cNvPicPr>
+          <p:nvPr/>
+        </p:nvPicPr>
+        <p:blipFill>
+          <a:blip r:embed="rId13"/>
+          <a:stretch>
+            <a:fillRect/>
+          </a:stretch>
+        </p:blipFill>
+        <p:spPr>
+          <a:xfrm>
+            <a:off x="8877300" y="2331720"/>
+            <a:ext cx="30480" cy="3634740"/>
+          </a:xfrm>
+          <a:prstGeom prst="rect">
+            <a:avLst/>
+          </a:prstGeom>
+        </p:spPr>
+      </p:pic>
+      <p:pic>
+        <p:nvPicPr>
+          <p:cNvPr id="44" name="Image 13" descr="preencoded.png">    </p:cNvPr>
+          <p:cNvPicPr>
+            <a:picLocks noChangeAspect="1"/>
+          </p:cNvPicPr>
+          <p:nvPr/>
+        </p:nvPicPr>
+        <p:blipFill>
+          <a:blip r:embed="rId14"/>
+          <a:stretch>
+            <a:fillRect/>
+          </a:stretch>
+        </p:blipFill>
+        <p:spPr>
+          <a:xfrm>
+            <a:off x="8801100" y="5875020"/>
+            <a:ext cx="182880" cy="182880"/>
+          </a:xfrm>
+          <a:prstGeom prst="rect">
+            <a:avLst/>
+          </a:prstGeom>
+        </p:spPr>
+      </p:pic>
+      <p:sp>
+        <p:nvSpPr>
+          <p:cNvPr id="45" name="Text 28"/>
+          <p:cNvSpPr/>
+          <p:nvPr/>
+        </p:nvSpPr>
+        <p:spPr>
+          <a:xfrm>
+            <a:off x="441960" y="6485334"/>
+            <a:ext cx="2971800" cy="181332"/>
           </a:xfrm>
           <a:prstGeom prst="rect">
             <a:avLst/>
@@ -46943,35 +47468,77 @@
           <a:p>
             <a:pPr algn="l" indent="0" marL="0">
               <a:lnSpc>
-                <a:spcPts val="2250"/>
-              </a:lnSpc>
-              <a:buNone/>
-            </a:pPr>
-            <a:r>
-              <a:rPr lang="en-US" sz="1800" b="1" dirty="0">
-                <a:solidFill>
-                  <a:srgbClr val="12374E"/>
-                </a:solidFill>
-                <a:latin typeface="Microsoft YaHei" pitchFamily="34" charset="0"/>
-                <a:ea typeface="Microsoft YaHei" pitchFamily="34" charset="-122"/>
-                <a:cs typeface="Microsoft YaHei" pitchFamily="34" charset="-120"/>
-              </a:rPr>
-              <a:t>钢院列名重点</a:t>
-            </a:r>
-            <a:endParaRPr lang="en-US" sz="1800" dirty="0"/>
-          </a:p>
-        </p:txBody>
-      </p:sp>
-      <p:sp>
-        <p:nvSpPr>
-          <p:cNvPr id="23" name="Text 14"/>
-          <p:cNvSpPr/>
-          <p:nvPr/>
-        </p:nvSpPr>
-        <p:spPr>
-          <a:xfrm>
-            <a:off x="6309360" y="5808345"/>
-            <a:ext cx="1371600" cy="285750"/>
+                <a:spcPts val="1428"/>
+              </a:lnSpc>
+              <a:buNone/>
+            </a:pPr>
+            <a:r>
+              <a:rPr lang="en-US" sz="1020" dirty="0">
+                <a:solidFill>
+                  <a:srgbClr val="617B8B"/>
+                </a:solidFill>
+                <a:latin typeface="Microsoft YaHei" pitchFamily="34" charset="0"/>
+                <a:ea typeface="Microsoft YaHei" pitchFamily="34" charset="-122"/>
+                <a:cs typeface="Microsoft YaHei" pitchFamily="34" charset="-120"/>
+              </a:rPr>
+              <a:t>北京科技大学 · 科研汇报模板</a:t>
+            </a:r>
+            <a:endParaRPr lang="en-US" sz="1020" dirty="0"/>
+          </a:p>
+        </p:txBody>
+      </p:sp>
+      <p:sp>
+        <p:nvSpPr>
+          <p:cNvPr id="46" name="Text 29"/>
+          <p:cNvSpPr/>
+          <p:nvPr/>
+        </p:nvSpPr>
+        <p:spPr>
+          <a:xfrm>
+            <a:off x="3596640" y="6485334"/>
+            <a:ext cx="7534632" cy="181332"/>
+          </a:xfrm>
+          <a:prstGeom prst="rect">
+            <a:avLst/>
+          </a:prstGeom>
+          <a:noFill/>
+          <a:ln/>
+        </p:spPr>
+        <p:txBody>
+          <a:bodyPr wrap="square" lIns="0" tIns="0" rIns="0" bIns="0" rtlCol="0" anchor="ctr"/>
+          <a:lstStyle/>
+          <a:p>
+            <a:pPr algn="r" indent="0" marL="0">
+              <a:lnSpc>
+                <a:spcPts val="1428"/>
+              </a:lnSpc>
+              <a:buNone/>
+            </a:pPr>
+            <a:r>
+              <a:rPr lang="en-US" sz="1020" dirty="0">
+                <a:solidFill>
+                  <a:srgbClr val="617B8B"/>
+                </a:solidFill>
+                <a:latin typeface="Microsoft YaHei" pitchFamily="34" charset="0"/>
+                <a:ea typeface="Microsoft YaHei" pitchFamily="34" charset="-122"/>
+                <a:cs typeface="Microsoft YaHei" pitchFamily="34" charset="-120"/>
+              </a:rPr>
+              <a:t>版式及操作示例，使用真实材料时请核对数据与来源。</a:t>
+            </a:r>
+            <a:endParaRPr lang="en-US" sz="1020" dirty="0"/>
+          </a:p>
+        </p:txBody>
+      </p:sp>
+      <p:sp>
+        <p:nvSpPr>
+          <p:cNvPr id="47" name="Text 30"/>
+          <p:cNvSpPr/>
+          <p:nvPr/>
+        </p:nvSpPr>
+        <p:spPr>
+          <a:xfrm>
+            <a:off x="11314152" y="6485334"/>
+            <a:ext cx="435888" cy="181332"/>
           </a:xfrm>
           <a:prstGeom prst="rect">
             <a:avLst/>
@@ -46985,90 +47552,6 @@
           <a:p>
             <a:pPr algn="l" indent="0" marL="0">
               <a:lnSpc>
-                <a:spcPts val="2250"/>
-              </a:lnSpc>
-              <a:buNone/>
-            </a:pPr>
-            <a:r>
-              <a:rPr lang="en-US" sz="1800" b="1" dirty="0">
-                <a:solidFill>
-                  <a:srgbClr val="12374E"/>
-                </a:solidFill>
-                <a:latin typeface="Microsoft YaHei" pitchFamily="34" charset="0"/>
-                <a:ea typeface="Microsoft YaHei" pitchFamily="34" charset="-122"/>
-                <a:cs typeface="Microsoft YaHei" pitchFamily="34" charset="-120"/>
-              </a:rPr>
-              <a:t>北科定名转型</a:t>
-            </a:r>
-            <a:endParaRPr lang="en-US" sz="1800" dirty="0"/>
-          </a:p>
-        </p:txBody>
-      </p:sp>
-      <p:sp>
-        <p:nvSpPr>
-          <p:cNvPr id="24" name="Text 15"/>
-          <p:cNvSpPr/>
-          <p:nvPr/>
-        </p:nvSpPr>
-        <p:spPr>
-          <a:xfrm>
-            <a:off x="9044940" y="5808345"/>
-            <a:ext cx="1600200" cy="285750"/>
-          </a:xfrm>
-          <a:prstGeom prst="rect">
-            <a:avLst/>
-          </a:prstGeom>
-          <a:noFill/>
-          <a:ln/>
-        </p:spPr>
-        <p:txBody>
-          <a:bodyPr wrap="square" lIns="0" tIns="0" rIns="0" bIns="0" rtlCol="0" anchor="ctr"/>
-          <a:lstStyle/>
-          <a:p>
-            <a:pPr algn="l" indent="0" marL="0">
-              <a:lnSpc>
-                <a:spcPts val="2250"/>
-              </a:lnSpc>
-              <a:buNone/>
-            </a:pPr>
-            <a:r>
-              <a:rPr lang="en-US" sz="1800" b="1" dirty="0">
-                <a:solidFill>
-                  <a:srgbClr val="12374E"/>
-                </a:solidFill>
-                <a:latin typeface="Microsoft YaHei" pitchFamily="34" charset="0"/>
-                <a:ea typeface="Microsoft YaHei" pitchFamily="34" charset="-122"/>
-                <a:cs typeface="Microsoft YaHei" pitchFamily="34" charset="-120"/>
-              </a:rPr>
-              <a:t>双一流布局前瞻</a:t>
-            </a:r>
-            <a:endParaRPr lang="en-US" sz="1800" dirty="0"/>
-          </a:p>
-        </p:txBody>
-      </p:sp>
-      <p:sp>
-        <p:nvSpPr>
-          <p:cNvPr id="25" name="Text 16"/>
-          <p:cNvSpPr/>
-          <p:nvPr/>
-        </p:nvSpPr>
-        <p:spPr>
-          <a:xfrm>
-            <a:off x="441960" y="6489144"/>
-            <a:ext cx="2286000" cy="181332"/>
-          </a:xfrm>
-          <a:prstGeom prst="rect">
-            <a:avLst/>
-          </a:prstGeom>
-          <a:noFill/>
-          <a:ln/>
-        </p:spPr>
-        <p:txBody>
-          <a:bodyPr wrap="square" lIns="0" tIns="0" rIns="0" bIns="0" rtlCol="0" anchor="ctr"/>
-          <a:lstStyle/>
-          <a:p>
-            <a:pPr algn="l" indent="0" marL="0">
-              <a:lnSpc>
                 <a:spcPts val="1428"/>
               </a:lnSpc>
               <a:buNone/>
@@ -47082,7 +47565,7 @@
                 <a:ea typeface="Microsoft YaHei" pitchFamily="34" charset="-122"/>
                 <a:cs typeface="Microsoft YaHei" pitchFamily="34" charset="-120"/>
               </a:rPr>
-              <a:t>北京科技大学 · 科研汇报模板</a:t>
+              <a:t>08 / 30</a:t>
             </a:r>
             <a:endParaRPr lang="en-US" sz="1020" dirty="0"/>
           </a:p>
@@ -47090,87 +47573,30 @@
       </p:sp>
       <p:sp>
         <p:nvSpPr>
-          <p:cNvPr id="26" name="Text 17"/>
-          <p:cNvSpPr/>
-          <p:nvPr/>
-        </p:nvSpPr>
-        <p:spPr>
-          <a:xfrm>
-            <a:off x="2910840" y="6492478"/>
-            <a:ext cx="8212455" cy="174784"/>
-          </a:xfrm>
-          <a:prstGeom prst="rect">
-            <a:avLst/>
-          </a:prstGeom>
-          <a:noFill/>
-          <a:ln/>
-        </p:spPr>
-        <p:txBody>
-          <a:bodyPr wrap="square" lIns="0" tIns="0" rIns="0" bIns="0" rtlCol="0" anchor="ctr"/>
-          <a:lstStyle/>
-          <a:p>
-            <a:pPr algn="r" indent="0" marL="0">
-              <a:lnSpc>
-                <a:spcPts val="1377"/>
-              </a:lnSpc>
-              <a:buNone/>
-            </a:pPr>
-            <a:r>
-              <a:rPr lang="en-US" sz="1020" dirty="0">
-                <a:solidFill>
-                  <a:srgbClr val="617B8B"/>
-                </a:solidFill>
-                <a:latin typeface="Microsoft YaHei" pitchFamily="34" charset="0"/>
-                <a:ea typeface="Microsoft YaHei" pitchFamily="34" charset="-122"/>
-                <a:cs typeface="Microsoft YaHei" pitchFamily="34" charset="-120"/>
-              </a:rPr>
-              <a:t>版式及操作示例，使用真实材料时请核对数据与来源。</a:t>
-            </a:r>
-            <a:endParaRPr lang="en-US" sz="1020" dirty="0"/>
-          </a:p>
-        </p:txBody>
-      </p:sp>
-      <p:sp>
-        <p:nvSpPr>
-          <p:cNvPr id="27" name="Text 18"/>
-          <p:cNvSpPr/>
-          <p:nvPr/>
-        </p:nvSpPr>
-        <p:spPr>
-          <a:xfrm>
-            <a:off x="11306175" y="6489144"/>
-            <a:ext cx="443865" cy="181332"/>
-          </a:xfrm>
-          <a:prstGeom prst="rect">
-            <a:avLst/>
-          </a:prstGeom>
-          <a:noFill/>
-          <a:ln/>
-        </p:spPr>
-        <p:txBody>
-          <a:bodyPr wrap="none" lIns="0" tIns="0" rIns="0" bIns="0" rtlCol="0" anchor="ctr"/>
-          <a:lstStyle/>
-          <a:p>
-            <a:pPr algn="l" indent="0" marL="0">
-              <a:lnSpc>
-                <a:spcPts val="1428"/>
-              </a:lnSpc>
-              <a:buNone/>
-            </a:pPr>
-            <a:r>
-              <a:rPr lang="en-US" sz="1020" dirty="0">
-                <a:solidFill>
-                  <a:srgbClr val="617B8B"/>
-                </a:solidFill>
-                <a:latin typeface="Microsoft YaHei" pitchFamily="34" charset="0"/>
-                <a:ea typeface="Microsoft YaHei" pitchFamily="34" charset="-122"/>
-                <a:cs typeface="Microsoft YaHei" pitchFamily="34" charset="-120"/>
-              </a:rPr>
-              <a:t>08 / 30</a:t>
-            </a:r>
-            <a:endParaRPr lang="en-US" sz="1020" dirty="0"/>
-          </a:p>
-        </p:txBody>
+          <p:cNvPr id="48" name="Shape 31"/>
+          <p:cNvSpPr/>
+          <p:nvPr/>
+        </p:nvSpPr>
+        <p:spPr>
+          <a:xfrm>
+            <a:off x="441960" y="6355080"/>
+            <a:ext cx="11308080" cy="7620"/>
+          </a:xfrm>
+          <a:prstGeom prst="rect">
+            <a:avLst/>
+          </a:prstGeom>
+          <a:solidFill>
+            <a:srgbClr val="D8E2E9"/>
+          </a:solidFill>
+          <a:ln w="12700">
+            <a:solidFill>
+              <a:srgbClr val="D8E2E9">
+                <a:alpha val="0"/>
+              </a:srgbClr>
+            </a:solidFill>
+            <a:prstDash val="solid"/>
+          </a:ln>
+        </p:spPr>
       </p:sp>
     </p:spTree>
   </p:cSld>

--- a/output/北京科技大学_WebSlide科研汇报示例.pptx
+++ b/output/北京科技大学_WebSlide科研汇报示例.pptx
@@ -4227,8 +4227,8 @@
         </p:nvSpPr>
         <p:spPr>
           <a:xfrm>
-            <a:off x="624840" y="2118360"/>
-            <a:ext cx="5151120" cy="297180"/>
+            <a:off x="579120" y="2072640"/>
+            <a:ext cx="5242560" cy="297180"/>
           </a:xfrm>
           <a:prstGeom prst="rect">
             <a:avLst/>
@@ -4269,8 +4269,8 @@
         </p:nvSpPr>
         <p:spPr>
           <a:xfrm>
-            <a:off x="624840" y="2522220"/>
-            <a:ext cx="5151120" cy="314920"/>
+            <a:off x="579120" y="2476500"/>
+            <a:ext cx="5242560" cy="314920"/>
           </a:xfrm>
           <a:prstGeom prst="rect">
             <a:avLst/>
@@ -4311,8 +4311,8 @@
         </p:nvSpPr>
         <p:spPr>
           <a:xfrm>
-            <a:off x="624840" y="2913340"/>
-            <a:ext cx="5151120" cy="314920"/>
+            <a:off x="579120" y="2867620"/>
+            <a:ext cx="5242560" cy="314920"/>
           </a:xfrm>
           <a:prstGeom prst="rect">
             <a:avLst/>
@@ -4353,8 +4353,8 @@
         </p:nvSpPr>
         <p:spPr>
           <a:xfrm>
-            <a:off x="624840" y="3304461"/>
-            <a:ext cx="5151120" cy="314920"/>
+            <a:off x="579120" y="3258741"/>
+            <a:ext cx="5242560" cy="314920"/>
           </a:xfrm>
           <a:prstGeom prst="rect">
             <a:avLst/>
@@ -4422,8 +4422,8 @@
         </p:nvSpPr>
         <p:spPr>
           <a:xfrm>
-            <a:off x="6324600" y="2118360"/>
-            <a:ext cx="5242560" cy="297180"/>
+            <a:off x="6278880" y="2072640"/>
+            <a:ext cx="5334000" cy="297180"/>
           </a:xfrm>
           <a:prstGeom prst="rect">
             <a:avLst/>
@@ -4464,8 +4464,8 @@
         </p:nvSpPr>
         <p:spPr>
           <a:xfrm>
-            <a:off x="6324600" y="2522220"/>
-            <a:ext cx="5242560" cy="314920"/>
+            <a:off x="6278880" y="2476500"/>
+            <a:ext cx="5334000" cy="314920"/>
           </a:xfrm>
           <a:prstGeom prst="rect">
             <a:avLst/>
@@ -4506,8 +4506,8 @@
         </p:nvSpPr>
         <p:spPr>
           <a:xfrm>
-            <a:off x="6324600" y="2913340"/>
-            <a:ext cx="5242560" cy="314920"/>
+            <a:off x="6278880" y="2867620"/>
+            <a:ext cx="5334000" cy="314920"/>
           </a:xfrm>
           <a:prstGeom prst="rect">
             <a:avLst/>
@@ -4548,8 +4548,8 @@
         </p:nvSpPr>
         <p:spPr>
           <a:xfrm>
-            <a:off x="6324600" y="3304461"/>
-            <a:ext cx="5242560" cy="314920"/>
+            <a:off x="6278880" y="3258741"/>
+            <a:ext cx="5334000" cy="314920"/>
           </a:xfrm>
           <a:prstGeom prst="rect">
             <a:avLst/>
@@ -4611,7 +4611,34 @@
       </p:sp>
       <p:sp>
         <p:nvSpPr>
-          <p:cNvPr id="23" name="Text 19"/>
+          <p:cNvPr id="23" name="Shape 19"/>
+          <p:cNvSpPr/>
+          <p:nvPr/>
+        </p:nvSpPr>
+        <p:spPr>
+          <a:xfrm>
+            <a:off x="441960" y="4152900"/>
+            <a:ext cx="5516880" cy="449580"/>
+          </a:xfrm>
+          <a:prstGeom prst="rect">
+            <a:avLst/>
+          </a:prstGeom>
+          <a:solidFill>
+            <a:srgbClr val="005B94"/>
+          </a:solidFill>
+          <a:ln w="12700">
+            <a:solidFill>
+              <a:srgbClr val="005B94">
+                <a:alpha val="0"/>
+              </a:srgbClr>
+            </a:solidFill>
+            <a:prstDash val="solid"/>
+          </a:ln>
+        </p:spPr>
+      </p:sp>
+      <p:sp>
+        <p:nvSpPr>
+          <p:cNvPr id="24" name="Text 20"/>
           <p:cNvSpPr/>
           <p:nvPr/>
         </p:nvSpPr>
@@ -4653,7 +4680,7 @@
       </p:sp>
       <p:sp>
         <p:nvSpPr>
-          <p:cNvPr id="24" name="Text 20"/>
+          <p:cNvPr id="25" name="Text 21"/>
           <p:cNvSpPr/>
           <p:nvPr/>
         </p:nvSpPr>
@@ -4695,7 +4722,7 @@
       </p:sp>
       <p:sp>
         <p:nvSpPr>
-          <p:cNvPr id="25" name="Text 21"/>
+          <p:cNvPr id="26" name="Text 22"/>
           <p:cNvSpPr/>
           <p:nvPr/>
         </p:nvSpPr>
@@ -4737,7 +4764,7 @@
       </p:sp>
       <p:sp>
         <p:nvSpPr>
-          <p:cNvPr id="26" name="Text 22"/>
+          <p:cNvPr id="27" name="Text 23"/>
           <p:cNvSpPr/>
           <p:nvPr/>
         </p:nvSpPr>
@@ -4779,7 +4806,7 @@
       </p:sp>
       <p:sp>
         <p:nvSpPr>
-          <p:cNvPr id="27" name="Shape 23"/>
+          <p:cNvPr id="28" name="Shape 24"/>
           <p:cNvSpPr/>
           <p:nvPr/>
         </p:nvSpPr>
@@ -4806,7 +4833,7 @@
       </p:sp>
       <p:sp>
         <p:nvSpPr>
-          <p:cNvPr id="28" name="Text 24"/>
+          <p:cNvPr id="29" name="Text 25"/>
           <p:cNvSpPr/>
           <p:nvPr/>
         </p:nvSpPr>
@@ -4848,7 +4875,7 @@
       </p:sp>
       <p:sp>
         <p:nvSpPr>
-          <p:cNvPr id="29" name="Text 25"/>
+          <p:cNvPr id="30" name="Text 26"/>
           <p:cNvSpPr/>
           <p:nvPr/>
         </p:nvSpPr>
@@ -4890,7 +4917,7 @@
       </p:sp>
       <p:sp>
         <p:nvSpPr>
-          <p:cNvPr id="30" name="Text 26"/>
+          <p:cNvPr id="31" name="Text 27"/>
           <p:cNvSpPr/>
           <p:nvPr/>
         </p:nvSpPr>
@@ -4932,7 +4959,7 @@
       </p:sp>
       <p:sp>
         <p:nvSpPr>
-          <p:cNvPr id="31" name="Text 27"/>
+          <p:cNvPr id="32" name="Text 28"/>
           <p:cNvSpPr/>
           <p:nvPr/>
         </p:nvSpPr>
@@ -4974,7 +5001,7 @@
       </p:sp>
       <p:sp>
         <p:nvSpPr>
-          <p:cNvPr id="32" name="Text 28"/>
+          <p:cNvPr id="33" name="Text 29"/>
           <p:cNvSpPr/>
           <p:nvPr/>
         </p:nvSpPr>
@@ -5016,7 +5043,7 @@
       </p:sp>
       <p:sp>
         <p:nvSpPr>
-          <p:cNvPr id="33" name="Text 29"/>
+          <p:cNvPr id="34" name="Text 30"/>
           <p:cNvSpPr/>
           <p:nvPr/>
         </p:nvSpPr>
@@ -5058,7 +5085,7 @@
       </p:sp>
       <p:sp>
         <p:nvSpPr>
-          <p:cNvPr id="34" name="Text 30"/>
+          <p:cNvPr id="35" name="Text 31"/>
           <p:cNvSpPr/>
           <p:nvPr/>
         </p:nvSpPr>
@@ -5100,7 +5127,7 @@
       </p:sp>
       <p:sp>
         <p:nvSpPr>
-          <p:cNvPr id="35" name="Shape 31"/>
+          <p:cNvPr id="36" name="Shape 32"/>
           <p:cNvSpPr/>
           <p:nvPr/>
         </p:nvSpPr>
@@ -7180,8 +7207,8 @@
         </p:nvSpPr>
         <p:spPr>
           <a:xfrm>
-            <a:off x="624840" y="4418409"/>
-            <a:ext cx="5151120" cy="314920"/>
+            <a:off x="563880" y="4418409"/>
+            <a:ext cx="5273040" cy="314920"/>
           </a:xfrm>
           <a:prstGeom prst="rect">
             <a:avLst/>
@@ -7222,8 +7249,8 @@
         </p:nvSpPr>
         <p:spPr>
           <a:xfrm>
-            <a:off x="624840" y="4809530"/>
-            <a:ext cx="5151120" cy="314920"/>
+            <a:off x="563880" y="4809530"/>
+            <a:ext cx="5273040" cy="314920"/>
           </a:xfrm>
           <a:prstGeom prst="rect">
             <a:avLst/>
@@ -7264,8 +7291,8 @@
         </p:nvSpPr>
         <p:spPr>
           <a:xfrm>
-            <a:off x="624840" y="5200650"/>
-            <a:ext cx="5151120" cy="314920"/>
+            <a:off x="563880" y="5200650"/>
+            <a:ext cx="5273040" cy="314920"/>
           </a:xfrm>
           <a:prstGeom prst="rect">
             <a:avLst/>
@@ -7306,8 +7333,8 @@
         </p:nvSpPr>
         <p:spPr>
           <a:xfrm>
-            <a:off x="624840" y="5591770"/>
-            <a:ext cx="5151120" cy="314920"/>
+            <a:off x="563880" y="5591770"/>
+            <a:ext cx="5273040" cy="314920"/>
           </a:xfrm>
           <a:prstGeom prst="rect">
             <a:avLst/>
@@ -8566,7 +8593,34 @@
       </p:sp>
       <p:sp>
         <p:nvSpPr>
-          <p:cNvPr id="20" name="Text 16"/>
+          <p:cNvPr id="20" name="Shape 16"/>
+          <p:cNvSpPr/>
+          <p:nvPr/>
+        </p:nvSpPr>
+        <p:spPr>
+          <a:xfrm>
+            <a:off x="6141720" y="1950720"/>
+            <a:ext cx="5608320" cy="449580"/>
+          </a:xfrm>
+          <a:prstGeom prst="rect">
+            <a:avLst/>
+          </a:prstGeom>
+          <a:solidFill>
+            <a:srgbClr val="005B94"/>
+          </a:solidFill>
+          <a:ln w="12700">
+            <a:solidFill>
+              <a:srgbClr val="005B94">
+                <a:alpha val="0"/>
+              </a:srgbClr>
+            </a:solidFill>
+            <a:prstDash val="solid"/>
+          </a:ln>
+        </p:spPr>
+      </p:sp>
+      <p:sp>
+        <p:nvSpPr>
+          <p:cNvPr id="21" name="Text 17"/>
           <p:cNvSpPr/>
           <p:nvPr/>
         </p:nvSpPr>
@@ -8608,7 +8662,7 @@
       </p:sp>
       <p:sp>
         <p:nvSpPr>
-          <p:cNvPr id="21" name="Text 17"/>
+          <p:cNvPr id="22" name="Text 18"/>
           <p:cNvSpPr/>
           <p:nvPr/>
         </p:nvSpPr>
@@ -8650,7 +8704,7 @@
       </p:sp>
       <p:sp>
         <p:nvSpPr>
-          <p:cNvPr id="22" name="Text 18"/>
+          <p:cNvPr id="23" name="Text 19"/>
           <p:cNvSpPr/>
           <p:nvPr/>
         </p:nvSpPr>
@@ -8692,7 +8746,7 @@
       </p:sp>
       <p:sp>
         <p:nvSpPr>
-          <p:cNvPr id="23" name="Text 19"/>
+          <p:cNvPr id="24" name="Text 20"/>
           <p:cNvSpPr/>
           <p:nvPr/>
         </p:nvSpPr>
@@ -8734,7 +8788,7 @@
       </p:sp>
       <p:sp>
         <p:nvSpPr>
-          <p:cNvPr id="24" name="Text 20"/>
+          <p:cNvPr id="25" name="Text 21"/>
           <p:cNvSpPr/>
           <p:nvPr/>
         </p:nvSpPr>
@@ -8776,7 +8830,7 @@
       </p:sp>
       <p:sp>
         <p:nvSpPr>
-          <p:cNvPr id="25" name="Text 21"/>
+          <p:cNvPr id="26" name="Text 22"/>
           <p:cNvSpPr/>
           <p:nvPr/>
         </p:nvSpPr>
@@ -8818,7 +8872,7 @@
       </p:sp>
       <p:sp>
         <p:nvSpPr>
-          <p:cNvPr id="26" name="Text 22"/>
+          <p:cNvPr id="27" name="Text 23"/>
           <p:cNvSpPr/>
           <p:nvPr/>
         </p:nvSpPr>
@@ -8860,7 +8914,7 @@
       </p:sp>
       <p:sp>
         <p:nvSpPr>
-          <p:cNvPr id="27" name="Text 23"/>
+          <p:cNvPr id="28" name="Text 24"/>
           <p:cNvSpPr/>
           <p:nvPr/>
         </p:nvSpPr>
@@ -8902,7 +8956,7 @@
       </p:sp>
       <p:sp>
         <p:nvSpPr>
-          <p:cNvPr id="28" name="Text 24"/>
+          <p:cNvPr id="29" name="Text 25"/>
           <p:cNvSpPr/>
           <p:nvPr/>
         </p:nvSpPr>
@@ -8944,7 +8998,7 @@
       </p:sp>
       <p:sp>
         <p:nvSpPr>
-          <p:cNvPr id="29" name="Text 25"/>
+          <p:cNvPr id="30" name="Text 26"/>
           <p:cNvSpPr/>
           <p:nvPr/>
         </p:nvSpPr>
@@ -8986,7 +9040,7 @@
       </p:sp>
       <p:sp>
         <p:nvSpPr>
-          <p:cNvPr id="30" name="Text 26"/>
+          <p:cNvPr id="31" name="Text 27"/>
           <p:cNvSpPr/>
           <p:nvPr/>
         </p:nvSpPr>
@@ -9028,7 +9082,7 @@
       </p:sp>
       <p:sp>
         <p:nvSpPr>
-          <p:cNvPr id="31" name="Shape 27"/>
+          <p:cNvPr id="32" name="Shape 28"/>
           <p:cNvSpPr/>
           <p:nvPr/>
         </p:nvSpPr>
@@ -9603,8 +9657,8 @@
         </p:nvSpPr>
         <p:spPr>
           <a:xfrm>
-            <a:off x="624840" y="3840480"/>
-            <a:ext cx="5151120" cy="297180"/>
+            <a:off x="472440" y="3870960"/>
+            <a:ext cx="5455920" cy="297180"/>
           </a:xfrm>
           <a:prstGeom prst="rect">
             <a:avLst/>
@@ -9645,8 +9699,8 @@
         </p:nvSpPr>
         <p:spPr>
           <a:xfrm>
-            <a:off x="624840" y="4244340"/>
-            <a:ext cx="5151120" cy="314920"/>
+            <a:off x="472440" y="4274820"/>
+            <a:ext cx="5455920" cy="314920"/>
           </a:xfrm>
           <a:prstGeom prst="rect">
             <a:avLst/>
@@ -9687,8 +9741,8 @@
         </p:nvSpPr>
         <p:spPr>
           <a:xfrm>
-            <a:off x="624840" y="4635460"/>
-            <a:ext cx="5151120" cy="314920"/>
+            <a:off x="472440" y="4665940"/>
+            <a:ext cx="5455920" cy="314920"/>
           </a:xfrm>
           <a:prstGeom prst="rect">
             <a:avLst/>
@@ -9729,8 +9783,8 @@
         </p:nvSpPr>
         <p:spPr>
           <a:xfrm>
-            <a:off x="624840" y="5026581"/>
-            <a:ext cx="5151120" cy="314920"/>
+            <a:off x="472440" y="5057061"/>
+            <a:ext cx="5455920" cy="314920"/>
           </a:xfrm>
           <a:prstGeom prst="rect">
             <a:avLst/>
@@ -9798,8 +9852,8 @@
         </p:nvSpPr>
         <p:spPr>
           <a:xfrm>
-            <a:off x="6324600" y="3840480"/>
-            <a:ext cx="5242560" cy="297180"/>
+            <a:off x="6172200" y="3870960"/>
+            <a:ext cx="5547360" cy="297180"/>
           </a:xfrm>
           <a:prstGeom prst="rect">
             <a:avLst/>
@@ -9840,8 +9894,8 @@
         </p:nvSpPr>
         <p:spPr>
           <a:xfrm>
-            <a:off x="6324600" y="4244340"/>
-            <a:ext cx="5242560" cy="314920"/>
+            <a:off x="6172200" y="4274820"/>
+            <a:ext cx="5547360" cy="314920"/>
           </a:xfrm>
           <a:prstGeom prst="rect">
             <a:avLst/>
@@ -9882,8 +9936,8 @@
         </p:nvSpPr>
         <p:spPr>
           <a:xfrm>
-            <a:off x="6324600" y="4635460"/>
-            <a:ext cx="5242560" cy="314920"/>
+            <a:off x="6172200" y="4665940"/>
+            <a:ext cx="5547360" cy="314920"/>
           </a:xfrm>
           <a:prstGeom prst="rect">
             <a:avLst/>
@@ -9924,8 +9978,8 @@
         </p:nvSpPr>
         <p:spPr>
           <a:xfrm>
-            <a:off x="6324600" y="5026581"/>
-            <a:ext cx="5242560" cy="314920"/>
+            <a:off x="6172200" y="5057061"/>
+            <a:ext cx="5547360" cy="314920"/>
           </a:xfrm>
           <a:prstGeom prst="rect">
             <a:avLst/>
@@ -9993,17 +10047,17 @@
         </p:nvSpPr>
         <p:spPr>
           <a:xfrm>
-            <a:off x="2236113" y="5791200"/>
-            <a:ext cx="7719774" cy="304800"/>
-          </a:xfrm>
-          <a:prstGeom prst="rect">
-            <a:avLst/>
-          </a:prstGeom>
-          <a:noFill/>
-          <a:ln/>
-        </p:spPr>
-        <p:txBody>
-          <a:bodyPr wrap="square" lIns="0" tIns="0" rIns="0" bIns="0" rtlCol="0" anchor="ctr"/>
+            <a:off x="609600" y="5791200"/>
+            <a:ext cx="10972800" cy="304800"/>
+          </a:xfrm>
+          <a:prstGeom prst="rect">
+            <a:avLst/>
+          </a:prstGeom>
+          <a:noFill/>
+          <a:ln/>
+        </p:spPr>
+        <p:txBody>
+          <a:bodyPr wrap="none" lIns="0" tIns="0" rIns="0" bIns="0" rtlCol="0" anchor="ctr"/>
           <a:lstStyle/>
           <a:p>
             <a:pPr algn="ctr" indent="0" marL="0">
@@ -10679,8 +10733,8 @@
         </p:nvSpPr>
         <p:spPr>
           <a:xfrm>
-            <a:off x="8092440" y="2118360"/>
-            <a:ext cx="3474720" cy="297180"/>
+            <a:off x="8046720" y="2072640"/>
+            <a:ext cx="3566160" cy="297180"/>
           </a:xfrm>
           <a:prstGeom prst="rect">
             <a:avLst/>
@@ -10721,8 +10775,8 @@
         </p:nvSpPr>
         <p:spPr>
           <a:xfrm>
-            <a:off x="8092440" y="2522220"/>
-            <a:ext cx="3474720" cy="629841"/>
+            <a:off x="8046720" y="2476500"/>
+            <a:ext cx="3566160" cy="629841"/>
           </a:xfrm>
           <a:prstGeom prst="rect">
             <a:avLst/>
@@ -10790,8 +10844,8 @@
         </p:nvSpPr>
         <p:spPr>
           <a:xfrm>
-            <a:off x="8092440" y="3525441"/>
-            <a:ext cx="3474720" cy="297180"/>
+            <a:off x="8046720" y="3479721"/>
+            <a:ext cx="3566160" cy="297180"/>
           </a:xfrm>
           <a:prstGeom prst="rect">
             <a:avLst/>
@@ -10832,8 +10886,8 @@
         </p:nvSpPr>
         <p:spPr>
           <a:xfrm>
-            <a:off x="8092440" y="3929301"/>
-            <a:ext cx="3474720" cy="629841"/>
+            <a:off x="8046720" y="3883581"/>
+            <a:ext cx="3566160" cy="629841"/>
           </a:xfrm>
           <a:prstGeom prst="rect">
             <a:avLst/>
@@ -10901,8 +10955,8 @@
         </p:nvSpPr>
         <p:spPr>
           <a:xfrm>
-            <a:off x="8092440" y="4932640"/>
-            <a:ext cx="3474720" cy="297180"/>
+            <a:off x="8046720" y="4886920"/>
+            <a:ext cx="3566160" cy="297180"/>
           </a:xfrm>
           <a:prstGeom prst="rect">
             <a:avLst/>
@@ -10943,8 +10997,8 @@
         </p:nvSpPr>
         <p:spPr>
           <a:xfrm>
-            <a:off x="8092440" y="5336500"/>
-            <a:ext cx="3474720" cy="629841"/>
+            <a:off x="8046720" y="5290780"/>
+            <a:ext cx="3566160" cy="629841"/>
           </a:xfrm>
           <a:prstGeom prst="rect">
             <a:avLst/>
@@ -11764,17 +11818,17 @@
         </p:nvSpPr>
         <p:spPr>
           <a:xfrm>
-            <a:off x="2439233" y="5791200"/>
-            <a:ext cx="7313414" cy="304800"/>
-          </a:xfrm>
-          <a:prstGeom prst="rect">
-            <a:avLst/>
-          </a:prstGeom>
-          <a:noFill/>
-          <a:ln/>
-        </p:spPr>
-        <p:txBody>
-          <a:bodyPr wrap="square" lIns="0" tIns="0" rIns="0" bIns="0" rtlCol="0" anchor="ctr"/>
+            <a:off x="609600" y="5791200"/>
+            <a:ext cx="10972800" cy="304800"/>
+          </a:xfrm>
+          <a:prstGeom prst="rect">
+            <a:avLst/>
+          </a:prstGeom>
+          <a:noFill/>
+          <a:ln/>
+        </p:spPr>
+        <p:txBody>
+          <a:bodyPr wrap="none" lIns="0" tIns="0" rIns="0" bIns="0" rtlCol="0" anchor="ctr"/>
           <a:lstStyle/>
           <a:p>
             <a:pPr algn="ctr" indent="0" marL="0">
@@ -19570,17 +19624,17 @@
         </p:nvSpPr>
         <p:spPr>
           <a:xfrm>
-            <a:off x="2439233" y="5791200"/>
-            <a:ext cx="7313414" cy="304800"/>
-          </a:xfrm>
-          <a:prstGeom prst="rect">
-            <a:avLst/>
-          </a:prstGeom>
-          <a:noFill/>
-          <a:ln/>
-        </p:spPr>
-        <p:txBody>
-          <a:bodyPr wrap="square" lIns="0" tIns="0" rIns="0" bIns="0" rtlCol="0" anchor="ctr"/>
+            <a:off x="609600" y="5791200"/>
+            <a:ext cx="10972800" cy="304800"/>
+          </a:xfrm>
+          <a:prstGeom prst="rect">
+            <a:avLst/>
+          </a:prstGeom>
+          <a:noFill/>
+          <a:ln/>
+        </p:spPr>
+        <p:txBody>
+          <a:bodyPr wrap="none" lIns="0" tIns="0" rIns="0" bIns="0" rtlCol="0" anchor="ctr"/>
           <a:lstStyle/>
           <a:p>
             <a:pPr algn="ctr" indent="0" marL="0">
@@ -21856,7 +21910,34 @@
       </p:sp>
       <p:sp>
         <p:nvSpPr>
-          <p:cNvPr id="13" name="Text 9"/>
+          <p:cNvPr id="13" name="Shape 9"/>
+          <p:cNvSpPr/>
+          <p:nvPr/>
+        </p:nvSpPr>
+        <p:spPr>
+          <a:xfrm>
+            <a:off x="441960" y="1950720"/>
+            <a:ext cx="7284720" cy="449580"/>
+          </a:xfrm>
+          <a:prstGeom prst="rect">
+            <a:avLst/>
+          </a:prstGeom>
+          <a:solidFill>
+            <a:srgbClr val="005B94"/>
+          </a:solidFill>
+          <a:ln w="12700">
+            <a:solidFill>
+              <a:srgbClr val="005B94">
+                <a:alpha val="0"/>
+              </a:srgbClr>
+            </a:solidFill>
+            <a:prstDash val="solid"/>
+          </a:ln>
+        </p:spPr>
+      </p:sp>
+      <p:sp>
+        <p:nvSpPr>
+          <p:cNvPr id="14" name="Text 10"/>
           <p:cNvSpPr/>
           <p:nvPr/>
         </p:nvSpPr>
@@ -21898,7 +21979,7 @@
       </p:sp>
       <p:sp>
         <p:nvSpPr>
-          <p:cNvPr id="14" name="Text 10"/>
+          <p:cNvPr id="15" name="Text 11"/>
           <p:cNvSpPr/>
           <p:nvPr/>
         </p:nvSpPr>
@@ -21940,7 +22021,7 @@
       </p:sp>
       <p:sp>
         <p:nvSpPr>
-          <p:cNvPr id="15" name="Text 11"/>
+          <p:cNvPr id="16" name="Text 12"/>
           <p:cNvSpPr/>
           <p:nvPr/>
         </p:nvSpPr>
@@ -21982,7 +22063,7 @@
       </p:sp>
       <p:sp>
         <p:nvSpPr>
-          <p:cNvPr id="16" name="Text 12"/>
+          <p:cNvPr id="17" name="Text 13"/>
           <p:cNvSpPr/>
           <p:nvPr/>
         </p:nvSpPr>
@@ -22024,7 +22105,7 @@
       </p:sp>
       <p:sp>
         <p:nvSpPr>
-          <p:cNvPr id="17" name="Text 13"/>
+          <p:cNvPr id="18" name="Text 14"/>
           <p:cNvSpPr/>
           <p:nvPr/>
         </p:nvSpPr>
@@ -22066,7 +22147,7 @@
       </p:sp>
       <p:sp>
         <p:nvSpPr>
-          <p:cNvPr id="18" name="Text 14"/>
+          <p:cNvPr id="19" name="Text 15"/>
           <p:cNvSpPr/>
           <p:nvPr/>
         </p:nvSpPr>
@@ -22108,7 +22189,7 @@
       </p:sp>
       <p:sp>
         <p:nvSpPr>
-          <p:cNvPr id="19" name="Text 15"/>
+          <p:cNvPr id="20" name="Text 16"/>
           <p:cNvSpPr/>
           <p:nvPr/>
         </p:nvSpPr>
@@ -22150,7 +22231,7 @@
       </p:sp>
       <p:sp>
         <p:nvSpPr>
-          <p:cNvPr id="20" name="Text 16"/>
+          <p:cNvPr id="21" name="Text 17"/>
           <p:cNvSpPr/>
           <p:nvPr/>
         </p:nvSpPr>
@@ -22192,7 +22273,7 @@
       </p:sp>
       <p:sp>
         <p:nvSpPr>
-          <p:cNvPr id="21" name="Text 17"/>
+          <p:cNvPr id="22" name="Text 18"/>
           <p:cNvSpPr/>
           <p:nvPr/>
         </p:nvSpPr>
@@ -22234,7 +22315,7 @@
       </p:sp>
       <p:sp>
         <p:nvSpPr>
-          <p:cNvPr id="22" name="Text 18"/>
+          <p:cNvPr id="23" name="Text 19"/>
           <p:cNvSpPr/>
           <p:nvPr/>
         </p:nvSpPr>
@@ -22276,7 +22357,7 @@
       </p:sp>
       <p:sp>
         <p:nvSpPr>
-          <p:cNvPr id="23" name="Shape 19"/>
+          <p:cNvPr id="24" name="Shape 20"/>
           <p:cNvSpPr/>
           <p:nvPr/>
         </p:nvSpPr>
@@ -22303,14 +22384,14 @@
       </p:sp>
       <p:sp>
         <p:nvSpPr>
-          <p:cNvPr id="24" name="Text 20"/>
-          <p:cNvSpPr/>
-          <p:nvPr/>
-        </p:nvSpPr>
-        <p:spPr>
-          <a:xfrm>
-            <a:off x="8092440" y="2118360"/>
-            <a:ext cx="3474720" cy="297180"/>
+          <p:cNvPr id="25" name="Text 21"/>
+          <p:cNvSpPr/>
+          <p:nvPr/>
+        </p:nvSpPr>
+        <p:spPr>
+          <a:xfrm>
+            <a:off x="8046720" y="2072640"/>
+            <a:ext cx="3566160" cy="297180"/>
           </a:xfrm>
           <a:prstGeom prst="rect">
             <a:avLst/>
@@ -22345,14 +22426,14 @@
       </p:sp>
       <p:sp>
         <p:nvSpPr>
-          <p:cNvPr id="25" name="Text 21"/>
-          <p:cNvSpPr/>
-          <p:nvPr/>
-        </p:nvSpPr>
-        <p:spPr>
-          <a:xfrm>
-            <a:off x="8092440" y="2522220"/>
-            <a:ext cx="3474720" cy="629841"/>
+          <p:cNvPr id="26" name="Text 22"/>
+          <p:cNvSpPr/>
+          <p:nvPr/>
+        </p:nvSpPr>
+        <p:spPr>
+          <a:xfrm>
+            <a:off x="8046720" y="2476500"/>
+            <a:ext cx="3566160" cy="629841"/>
           </a:xfrm>
           <a:prstGeom prst="rect">
             <a:avLst/>
@@ -22387,7 +22468,7 @@
       </p:sp>
       <p:sp>
         <p:nvSpPr>
-          <p:cNvPr id="26" name="Shape 22"/>
+          <p:cNvPr id="27" name="Shape 23"/>
           <p:cNvSpPr/>
           <p:nvPr/>
         </p:nvSpPr>
@@ -22414,14 +22495,14 @@
       </p:sp>
       <p:sp>
         <p:nvSpPr>
-          <p:cNvPr id="27" name="Text 23"/>
-          <p:cNvSpPr/>
-          <p:nvPr/>
-        </p:nvSpPr>
-        <p:spPr>
-          <a:xfrm>
-            <a:off x="8092440" y="3525441"/>
-            <a:ext cx="3474720" cy="297180"/>
+          <p:cNvPr id="28" name="Text 24"/>
+          <p:cNvSpPr/>
+          <p:nvPr/>
+        </p:nvSpPr>
+        <p:spPr>
+          <a:xfrm>
+            <a:off x="8046720" y="3479721"/>
+            <a:ext cx="3566160" cy="297180"/>
           </a:xfrm>
           <a:prstGeom prst="rect">
             <a:avLst/>
@@ -22456,14 +22537,14 @@
       </p:sp>
       <p:sp>
         <p:nvSpPr>
-          <p:cNvPr id="28" name="Text 24"/>
-          <p:cNvSpPr/>
-          <p:nvPr/>
-        </p:nvSpPr>
-        <p:spPr>
-          <a:xfrm>
-            <a:off x="8092440" y="3929301"/>
-            <a:ext cx="3474720" cy="629841"/>
+          <p:cNvPr id="29" name="Text 25"/>
+          <p:cNvSpPr/>
+          <p:nvPr/>
+        </p:nvSpPr>
+        <p:spPr>
+          <a:xfrm>
+            <a:off x="8046720" y="3883581"/>
+            <a:ext cx="3566160" cy="629841"/>
           </a:xfrm>
           <a:prstGeom prst="rect">
             <a:avLst/>
@@ -22498,7 +22579,7 @@
       </p:sp>
       <p:sp>
         <p:nvSpPr>
-          <p:cNvPr id="29" name="Shape 25"/>
+          <p:cNvPr id="30" name="Shape 26"/>
           <p:cNvSpPr/>
           <p:nvPr/>
         </p:nvSpPr>
@@ -22525,14 +22606,14 @@
       </p:sp>
       <p:sp>
         <p:nvSpPr>
-          <p:cNvPr id="30" name="Text 26"/>
-          <p:cNvSpPr/>
-          <p:nvPr/>
-        </p:nvSpPr>
-        <p:spPr>
-          <a:xfrm>
-            <a:off x="8092440" y="4932640"/>
-            <a:ext cx="3474720" cy="297180"/>
+          <p:cNvPr id="31" name="Text 27"/>
+          <p:cNvSpPr/>
+          <p:nvPr/>
+        </p:nvSpPr>
+        <p:spPr>
+          <a:xfrm>
+            <a:off x="8046720" y="4886920"/>
+            <a:ext cx="3566160" cy="297180"/>
           </a:xfrm>
           <a:prstGeom prst="rect">
             <a:avLst/>
@@ -22567,14 +22648,14 @@
       </p:sp>
       <p:sp>
         <p:nvSpPr>
-          <p:cNvPr id="31" name="Text 27"/>
-          <p:cNvSpPr/>
-          <p:nvPr/>
-        </p:nvSpPr>
-        <p:spPr>
-          <a:xfrm>
-            <a:off x="8092440" y="5336500"/>
-            <a:ext cx="3474720" cy="629841"/>
+          <p:cNvPr id="32" name="Text 28"/>
+          <p:cNvSpPr/>
+          <p:nvPr/>
+        </p:nvSpPr>
+        <p:spPr>
+          <a:xfrm>
+            <a:off x="8046720" y="5290780"/>
+            <a:ext cx="3566160" cy="629841"/>
           </a:xfrm>
           <a:prstGeom prst="rect">
             <a:avLst/>
@@ -22609,7 +22690,7 @@
       </p:sp>
       <p:sp>
         <p:nvSpPr>
-          <p:cNvPr id="32" name="Text 28"/>
+          <p:cNvPr id="33" name="Text 29"/>
           <p:cNvSpPr/>
           <p:nvPr/>
         </p:nvSpPr>
@@ -22651,7 +22732,7 @@
       </p:sp>
       <p:sp>
         <p:nvSpPr>
-          <p:cNvPr id="33" name="Text 29"/>
+          <p:cNvPr id="34" name="Text 30"/>
           <p:cNvSpPr/>
           <p:nvPr/>
         </p:nvSpPr>
@@ -22693,7 +22774,7 @@
       </p:sp>
       <p:sp>
         <p:nvSpPr>
-          <p:cNvPr id="34" name="Text 30"/>
+          <p:cNvPr id="35" name="Text 31"/>
           <p:cNvSpPr/>
           <p:nvPr/>
         </p:nvSpPr>
@@ -22735,7 +22816,7 @@
       </p:sp>
       <p:sp>
         <p:nvSpPr>
-          <p:cNvPr id="35" name="Shape 31"/>
+          <p:cNvPr id="36" name="Shape 32"/>
           <p:cNvSpPr/>
           <p:nvPr/>
         </p:nvSpPr>
@@ -23126,8 +23207,8 @@
         </p:nvSpPr>
         <p:spPr>
           <a:xfrm>
-            <a:off x="624840" y="2072640"/>
-            <a:ext cx="5196840" cy="330041"/>
+            <a:off x="579120" y="2072640"/>
+            <a:ext cx="5288280" cy="330041"/>
           </a:xfrm>
           <a:prstGeom prst="rect">
             <a:avLst/>
@@ -23175,8 +23256,8 @@
         </p:nvSpPr>
         <p:spPr>
           <a:xfrm>
-            <a:off x="624840" y="2509361"/>
-            <a:ext cx="5196840" cy="314920"/>
+            <a:off x="579120" y="2509361"/>
+            <a:ext cx="5288280" cy="314920"/>
           </a:xfrm>
           <a:prstGeom prst="rect">
             <a:avLst/>
@@ -23217,8 +23298,8 @@
         </p:nvSpPr>
         <p:spPr>
           <a:xfrm>
-            <a:off x="624840" y="2900482"/>
-            <a:ext cx="5196840" cy="314920"/>
+            <a:off x="579120" y="2900482"/>
+            <a:ext cx="5288280" cy="314920"/>
           </a:xfrm>
           <a:prstGeom prst="rect">
             <a:avLst/>
@@ -23259,8 +23340,8 @@
         </p:nvSpPr>
         <p:spPr>
           <a:xfrm>
-            <a:off x="624840" y="3291602"/>
-            <a:ext cx="5196840" cy="314920"/>
+            <a:off x="579120" y="3291602"/>
+            <a:ext cx="5288280" cy="314920"/>
           </a:xfrm>
           <a:prstGeom prst="rect">
             <a:avLst/>
@@ -23372,8 +23453,8 @@
         </p:nvSpPr>
         <p:spPr>
           <a:xfrm>
-            <a:off x="6370320" y="2072640"/>
-            <a:ext cx="5196840" cy="330041"/>
+            <a:off x="6324600" y="2072640"/>
+            <a:ext cx="5288280" cy="330041"/>
           </a:xfrm>
           <a:prstGeom prst="rect">
             <a:avLst/>
@@ -23421,8 +23502,8 @@
         </p:nvSpPr>
         <p:spPr>
           <a:xfrm>
-            <a:off x="6370320" y="2509361"/>
-            <a:ext cx="5196840" cy="314920"/>
+            <a:off x="6324600" y="2509361"/>
+            <a:ext cx="5288280" cy="314920"/>
           </a:xfrm>
           <a:prstGeom prst="rect">
             <a:avLst/>
@@ -23463,8 +23544,8 @@
         </p:nvSpPr>
         <p:spPr>
           <a:xfrm>
-            <a:off x="6370320" y="2900482"/>
-            <a:ext cx="5196840" cy="314920"/>
+            <a:off x="6324600" y="2900482"/>
+            <a:ext cx="5288280" cy="314920"/>
           </a:xfrm>
           <a:prstGeom prst="rect">
             <a:avLst/>
@@ -23505,8 +23586,8 @@
         </p:nvSpPr>
         <p:spPr>
           <a:xfrm>
-            <a:off x="6370320" y="3291602"/>
-            <a:ext cx="5196840" cy="314920"/>
+            <a:off x="6324600" y="3291602"/>
+            <a:ext cx="5288280" cy="314920"/>
           </a:xfrm>
           <a:prstGeom prst="rect">
             <a:avLst/>
@@ -23618,8 +23699,8 @@
         </p:nvSpPr>
         <p:spPr>
           <a:xfrm>
-            <a:off x="624840" y="4274820"/>
-            <a:ext cx="5196840" cy="330041"/>
+            <a:off x="579120" y="4274820"/>
+            <a:ext cx="5288280" cy="330041"/>
           </a:xfrm>
           <a:prstGeom prst="rect">
             <a:avLst/>
@@ -23667,8 +23748,8 @@
         </p:nvSpPr>
         <p:spPr>
           <a:xfrm>
-            <a:off x="624840" y="4711541"/>
-            <a:ext cx="5196840" cy="314920"/>
+            <a:off x="579120" y="4711541"/>
+            <a:ext cx="5288280" cy="314920"/>
           </a:xfrm>
           <a:prstGeom prst="rect">
             <a:avLst/>
@@ -23709,8 +23790,8 @@
         </p:nvSpPr>
         <p:spPr>
           <a:xfrm>
-            <a:off x="624840" y="5102662"/>
-            <a:ext cx="5196840" cy="314920"/>
+            <a:off x="579120" y="5102662"/>
+            <a:ext cx="5288280" cy="314920"/>
           </a:xfrm>
           <a:prstGeom prst="rect">
             <a:avLst/>
@@ -23751,8 +23832,8 @@
         </p:nvSpPr>
         <p:spPr>
           <a:xfrm>
-            <a:off x="624840" y="5493782"/>
-            <a:ext cx="5196840" cy="314920"/>
+            <a:off x="579120" y="5493782"/>
+            <a:ext cx="5288280" cy="314920"/>
           </a:xfrm>
           <a:prstGeom prst="rect">
             <a:avLst/>
@@ -23864,8 +23945,8 @@
         </p:nvSpPr>
         <p:spPr>
           <a:xfrm>
-            <a:off x="6370320" y="4274820"/>
-            <a:ext cx="5196840" cy="330041"/>
+            <a:off x="6324600" y="4274820"/>
+            <a:ext cx="5288280" cy="330041"/>
           </a:xfrm>
           <a:prstGeom prst="rect">
             <a:avLst/>
@@ -23913,8 +23994,8 @@
         </p:nvSpPr>
         <p:spPr>
           <a:xfrm>
-            <a:off x="6370320" y="4711541"/>
-            <a:ext cx="5196840" cy="314920"/>
+            <a:off x="6324600" y="4711541"/>
+            <a:ext cx="5288280" cy="314920"/>
           </a:xfrm>
           <a:prstGeom prst="rect">
             <a:avLst/>
@@ -23955,8 +24036,8 @@
         </p:nvSpPr>
         <p:spPr>
           <a:xfrm>
-            <a:off x="6370320" y="5102662"/>
-            <a:ext cx="5196840" cy="314920"/>
+            <a:off x="6324600" y="5102662"/>
+            <a:ext cx="5288280" cy="314920"/>
           </a:xfrm>
           <a:prstGeom prst="rect">
             <a:avLst/>
@@ -23997,8 +24078,8 @@
         </p:nvSpPr>
         <p:spPr>
           <a:xfrm>
-            <a:off x="6370320" y="5493782"/>
-            <a:ext cx="5196840" cy="314920"/>
+            <a:off x="6324600" y="5493782"/>
+            <a:ext cx="5288280" cy="314920"/>
           </a:xfrm>
           <a:prstGeom prst="rect">
             <a:avLst/>
@@ -24781,7 +24862,34 @@
       </p:sp>
       <p:sp>
         <p:nvSpPr>
-          <p:cNvPr id="13" name="Text 9"/>
+          <p:cNvPr id="13" name="Shape 9"/>
+          <p:cNvSpPr/>
+          <p:nvPr/>
+        </p:nvSpPr>
+        <p:spPr>
+          <a:xfrm>
+            <a:off x="441960" y="1950720"/>
+            <a:ext cx="3647361" cy="449580"/>
+          </a:xfrm>
+          <a:prstGeom prst="rect">
+            <a:avLst/>
+          </a:prstGeom>
+          <a:solidFill>
+            <a:srgbClr val="005B94"/>
+          </a:solidFill>
+          <a:ln w="12700">
+            <a:solidFill>
+              <a:srgbClr val="005B94">
+                <a:alpha val="0"/>
+              </a:srgbClr>
+            </a:solidFill>
+            <a:prstDash val="solid"/>
+          </a:ln>
+        </p:spPr>
+      </p:sp>
+      <p:sp>
+        <p:nvSpPr>
+          <p:cNvPr id="14" name="Text 10"/>
           <p:cNvSpPr/>
           <p:nvPr/>
         </p:nvSpPr>
@@ -24823,7 +24931,7 @@
       </p:sp>
       <p:sp>
         <p:nvSpPr>
-          <p:cNvPr id="14" name="Text 10"/>
+          <p:cNvPr id="15" name="Text 11"/>
           <p:cNvSpPr/>
           <p:nvPr/>
         </p:nvSpPr>
@@ -24865,7 +24973,7 @@
       </p:sp>
       <p:sp>
         <p:nvSpPr>
-          <p:cNvPr id="15" name="Text 11"/>
+          <p:cNvPr id="16" name="Text 12"/>
           <p:cNvSpPr/>
           <p:nvPr/>
         </p:nvSpPr>
@@ -24907,7 +25015,7 @@
       </p:sp>
       <p:sp>
         <p:nvSpPr>
-          <p:cNvPr id="16" name="Text 12"/>
+          <p:cNvPr id="17" name="Text 13"/>
           <p:cNvSpPr/>
           <p:nvPr/>
         </p:nvSpPr>
@@ -24949,7 +25057,7 @@
       </p:sp>
       <p:sp>
         <p:nvSpPr>
-          <p:cNvPr id="17" name="Text 13"/>
+          <p:cNvPr id="18" name="Text 14"/>
           <p:cNvSpPr/>
           <p:nvPr/>
         </p:nvSpPr>
@@ -24991,7 +25099,7 @@
       </p:sp>
       <p:sp>
         <p:nvSpPr>
-          <p:cNvPr id="18" name="Shape 14"/>
+          <p:cNvPr id="19" name="Shape 15"/>
           <p:cNvSpPr/>
           <p:nvPr/>
         </p:nvSpPr>
@@ -25018,7 +25126,34 @@
       </p:sp>
       <p:sp>
         <p:nvSpPr>
-          <p:cNvPr id="19" name="Text 15"/>
+          <p:cNvPr id="20" name="Shape 16"/>
+          <p:cNvSpPr/>
+          <p:nvPr/>
+        </p:nvSpPr>
+        <p:spPr>
+          <a:xfrm>
+            <a:off x="4272201" y="1950720"/>
+            <a:ext cx="3647480" cy="449580"/>
+          </a:xfrm>
+          <a:prstGeom prst="rect">
+            <a:avLst/>
+          </a:prstGeom>
+          <a:solidFill>
+            <a:srgbClr val="005B94"/>
+          </a:solidFill>
+          <a:ln w="12700">
+            <a:solidFill>
+              <a:srgbClr val="005B94">
+                <a:alpha val="0"/>
+              </a:srgbClr>
+            </a:solidFill>
+            <a:prstDash val="solid"/>
+          </a:ln>
+        </p:spPr>
+      </p:sp>
+      <p:sp>
+        <p:nvSpPr>
+          <p:cNvPr id="21" name="Text 17"/>
           <p:cNvSpPr/>
           <p:nvPr/>
         </p:nvSpPr>
@@ -25060,7 +25195,7 @@
       </p:sp>
       <p:sp>
         <p:nvSpPr>
-          <p:cNvPr id="20" name="Text 16"/>
+          <p:cNvPr id="22" name="Text 18"/>
           <p:cNvSpPr/>
           <p:nvPr/>
         </p:nvSpPr>
@@ -25102,7 +25237,7 @@
       </p:sp>
       <p:sp>
         <p:nvSpPr>
-          <p:cNvPr id="21" name="Text 17"/>
+          <p:cNvPr id="23" name="Text 19"/>
           <p:cNvSpPr/>
           <p:nvPr/>
         </p:nvSpPr>
@@ -25144,7 +25279,7 @@
       </p:sp>
       <p:sp>
         <p:nvSpPr>
-          <p:cNvPr id="22" name="Text 18"/>
+          <p:cNvPr id="24" name="Text 20"/>
           <p:cNvSpPr/>
           <p:nvPr/>
         </p:nvSpPr>
@@ -25186,7 +25321,7 @@
       </p:sp>
       <p:sp>
         <p:nvSpPr>
-          <p:cNvPr id="23" name="Text 19"/>
+          <p:cNvPr id="25" name="Text 21"/>
           <p:cNvSpPr/>
           <p:nvPr/>
         </p:nvSpPr>
@@ -25228,7 +25363,7 @@
       </p:sp>
       <p:sp>
         <p:nvSpPr>
-          <p:cNvPr id="24" name="Shape 20"/>
+          <p:cNvPr id="26" name="Shape 22"/>
           <p:cNvSpPr/>
           <p:nvPr/>
         </p:nvSpPr>
@@ -25255,7 +25390,34 @@
       </p:sp>
       <p:sp>
         <p:nvSpPr>
-          <p:cNvPr id="25" name="Text 21"/>
+          <p:cNvPr id="27" name="Shape 23"/>
+          <p:cNvSpPr/>
+          <p:nvPr/>
+        </p:nvSpPr>
+        <p:spPr>
+          <a:xfrm>
+            <a:off x="8102560" y="1950720"/>
+            <a:ext cx="3647361" cy="449580"/>
+          </a:xfrm>
+          <a:prstGeom prst="rect">
+            <a:avLst/>
+          </a:prstGeom>
+          <a:solidFill>
+            <a:srgbClr val="005B94"/>
+          </a:solidFill>
+          <a:ln w="12700">
+            <a:solidFill>
+              <a:srgbClr val="005B94">
+                <a:alpha val="0"/>
+              </a:srgbClr>
+            </a:solidFill>
+            <a:prstDash val="solid"/>
+          </a:ln>
+        </p:spPr>
+      </p:sp>
+      <p:sp>
+        <p:nvSpPr>
+          <p:cNvPr id="28" name="Text 24"/>
           <p:cNvSpPr/>
           <p:nvPr/>
         </p:nvSpPr>
@@ -25297,7 +25459,7 @@
       </p:sp>
       <p:sp>
         <p:nvSpPr>
-          <p:cNvPr id="26" name="Text 22"/>
+          <p:cNvPr id="29" name="Text 25"/>
           <p:cNvSpPr/>
           <p:nvPr/>
         </p:nvSpPr>
@@ -25339,7 +25501,7 @@
       </p:sp>
       <p:sp>
         <p:nvSpPr>
-          <p:cNvPr id="27" name="Text 23"/>
+          <p:cNvPr id="30" name="Text 26"/>
           <p:cNvSpPr/>
           <p:nvPr/>
         </p:nvSpPr>
@@ -25381,7 +25543,7 @@
       </p:sp>
       <p:sp>
         <p:nvSpPr>
-          <p:cNvPr id="28" name="Text 24"/>
+          <p:cNvPr id="31" name="Text 27"/>
           <p:cNvSpPr/>
           <p:nvPr/>
         </p:nvSpPr>
@@ -25423,7 +25585,7 @@
       </p:sp>
       <p:sp>
         <p:nvSpPr>
-          <p:cNvPr id="29" name="Text 25"/>
+          <p:cNvPr id="32" name="Text 28"/>
           <p:cNvSpPr/>
           <p:nvPr/>
         </p:nvSpPr>
@@ -25465,7 +25627,7 @@
       </p:sp>
       <p:sp>
         <p:nvSpPr>
-          <p:cNvPr id="30" name="Shape 26"/>
+          <p:cNvPr id="33" name="Shape 29"/>
           <p:cNvSpPr/>
           <p:nvPr/>
         </p:nvSpPr>
@@ -25492,23 +25654,23 @@
       </p:sp>
       <p:sp>
         <p:nvSpPr>
-          <p:cNvPr id="31" name="Text 27"/>
-          <p:cNvSpPr/>
-          <p:nvPr/>
-        </p:nvSpPr>
-        <p:spPr>
-          <a:xfrm>
-            <a:off x="2642354" y="5791200"/>
-            <a:ext cx="6907173" cy="304800"/>
-          </a:xfrm>
-          <a:prstGeom prst="rect">
-            <a:avLst/>
-          </a:prstGeom>
-          <a:noFill/>
-          <a:ln/>
-        </p:spPr>
-        <p:txBody>
-          <a:bodyPr wrap="square" lIns="0" tIns="0" rIns="0" bIns="0" rtlCol="0" anchor="ctr"/>
+          <p:cNvPr id="34" name="Text 30"/>
+          <p:cNvSpPr/>
+          <p:nvPr/>
+        </p:nvSpPr>
+        <p:spPr>
+          <a:xfrm>
+            <a:off x="609600" y="5791200"/>
+            <a:ext cx="10972800" cy="304800"/>
+          </a:xfrm>
+          <a:prstGeom prst="rect">
+            <a:avLst/>
+          </a:prstGeom>
+          <a:noFill/>
+          <a:ln/>
+        </p:spPr>
+        <p:txBody>
+          <a:bodyPr wrap="none" lIns="0" tIns="0" rIns="0" bIns="0" rtlCol="0" anchor="ctr"/>
           <a:lstStyle/>
           <a:p>
             <a:pPr algn="ctr" indent="0" marL="0">
@@ -25534,7 +25696,7 @@
       </p:sp>
       <p:sp>
         <p:nvSpPr>
-          <p:cNvPr id="32" name="Text 28"/>
+          <p:cNvPr id="35" name="Text 31"/>
           <p:cNvSpPr/>
           <p:nvPr/>
         </p:nvSpPr>
@@ -25576,7 +25738,7 @@
       </p:sp>
       <p:sp>
         <p:nvSpPr>
-          <p:cNvPr id="33" name="Text 29"/>
+          <p:cNvPr id="36" name="Text 32"/>
           <p:cNvSpPr/>
           <p:nvPr/>
         </p:nvSpPr>
@@ -25618,7 +25780,7 @@
       </p:sp>
       <p:sp>
         <p:nvSpPr>
-          <p:cNvPr id="34" name="Text 30"/>
+          <p:cNvPr id="37" name="Text 33"/>
           <p:cNvSpPr/>
           <p:nvPr/>
         </p:nvSpPr>
@@ -25660,7 +25822,7 @@
       </p:sp>
       <p:sp>
         <p:nvSpPr>
-          <p:cNvPr id="35" name="Shape 31"/>
+          <p:cNvPr id="38" name="Shape 34"/>
           <p:cNvSpPr/>
           <p:nvPr/>
         </p:nvSpPr>
@@ -26586,17 +26748,17 @@
         </p:nvSpPr>
         <p:spPr>
           <a:xfrm>
-            <a:off x="2540794" y="5791200"/>
-            <a:ext cx="7110293" cy="304800"/>
-          </a:xfrm>
-          <a:prstGeom prst="rect">
-            <a:avLst/>
-          </a:prstGeom>
-          <a:noFill/>
-          <a:ln/>
-        </p:spPr>
-        <p:txBody>
-          <a:bodyPr wrap="square" lIns="0" tIns="0" rIns="0" bIns="0" rtlCol="0" anchor="ctr"/>
+            <a:off x="609600" y="5791200"/>
+            <a:ext cx="10972800" cy="304800"/>
+          </a:xfrm>
+          <a:prstGeom prst="rect">
+            <a:avLst/>
+          </a:prstGeom>
+          <a:noFill/>
+          <a:ln/>
+        </p:spPr>
+        <p:txBody>
+          <a:bodyPr wrap="none" lIns="0" tIns="0" rIns="0" bIns="0" rtlCol="0" anchor="ctr"/>
           <a:lstStyle/>
           <a:p>
             <a:pPr algn="ctr" indent="0" marL="0">
@@ -27701,8 +27863,8 @@
         </p:nvSpPr>
         <p:spPr>
           <a:xfrm>
-            <a:off x="624840" y="4983480"/>
-            <a:ext cx="3393400" cy="297180"/>
+            <a:off x="579120" y="4937760"/>
+            <a:ext cx="3484840" cy="297180"/>
           </a:xfrm>
           <a:prstGeom prst="rect">
             <a:avLst/>
@@ -27743,8 +27905,8 @@
         </p:nvSpPr>
         <p:spPr>
           <a:xfrm>
-            <a:off x="624840" y="5387340"/>
-            <a:ext cx="3393400" cy="487680"/>
+            <a:off x="579120" y="5341620"/>
+            <a:ext cx="3484840" cy="487680"/>
           </a:xfrm>
           <a:prstGeom prst="rect">
             <a:avLst/>
@@ -27812,8 +27974,8 @@
         </p:nvSpPr>
         <p:spPr>
           <a:xfrm>
-            <a:off x="4384000" y="4983480"/>
-            <a:ext cx="3393400" cy="297180"/>
+            <a:off x="4338280" y="4937760"/>
+            <a:ext cx="3484840" cy="297180"/>
           </a:xfrm>
           <a:prstGeom prst="rect">
             <a:avLst/>
@@ -27854,8 +28016,8 @@
         </p:nvSpPr>
         <p:spPr>
           <a:xfrm>
-            <a:off x="4384000" y="5387340"/>
-            <a:ext cx="3393400" cy="495776"/>
+            <a:off x="4338280" y="5341620"/>
+            <a:ext cx="3484840" cy="495776"/>
           </a:xfrm>
           <a:prstGeom prst="rect">
             <a:avLst/>
@@ -27923,8 +28085,8 @@
         </p:nvSpPr>
         <p:spPr>
           <a:xfrm>
-            <a:off x="8143161" y="4983480"/>
-            <a:ext cx="3393519" cy="297180"/>
+            <a:off x="8097441" y="4937760"/>
+            <a:ext cx="3484959" cy="297180"/>
           </a:xfrm>
           <a:prstGeom prst="rect">
             <a:avLst/>
@@ -27965,8 +28127,8 @@
         </p:nvSpPr>
         <p:spPr>
           <a:xfrm>
-            <a:off x="8143161" y="5387340"/>
-            <a:ext cx="3393519" cy="487680"/>
+            <a:off x="8097441" y="5341620"/>
+            <a:ext cx="3484959" cy="487680"/>
           </a:xfrm>
           <a:prstGeom prst="rect">
             <a:avLst/>
@@ -28184,9 +28346,213 @@
           <a:chExt cx="0" cy="0"/>
         </a:xfrm>
       </p:grpSpPr>
+      <p:sp>
+        <p:nvSpPr>
+          <p:cNvPr id="3" name="Shape 0"/>
+          <p:cNvSpPr/>
+          <p:nvPr/>
+        </p:nvSpPr>
+        <p:spPr>
+          <a:xfrm>
+            <a:off x="0" y="0"/>
+            <a:ext cx="9753600" cy="53340"/>
+          </a:xfrm>
+          <a:prstGeom prst="rect">
+            <a:avLst/>
+          </a:prstGeom>
+          <a:solidFill>
+            <a:srgbClr val="005B94"/>
+          </a:solidFill>
+          <a:ln w="12700">
+            <a:solidFill>
+              <a:srgbClr val="005B94">
+                <a:alpha val="0"/>
+              </a:srgbClr>
+            </a:solidFill>
+            <a:prstDash val="solid"/>
+          </a:ln>
+        </p:spPr>
+      </p:sp>
+      <p:sp>
+        <p:nvSpPr>
+          <p:cNvPr id="4" name="Shape 1"/>
+          <p:cNvSpPr/>
+          <p:nvPr/>
+        </p:nvSpPr>
+        <p:spPr>
+          <a:xfrm>
+            <a:off x="9753600" y="0"/>
+            <a:ext cx="2438400" cy="53340"/>
+          </a:xfrm>
+          <a:prstGeom prst="rect">
+            <a:avLst/>
+          </a:prstGeom>
+          <a:solidFill>
+            <a:srgbClr val="2BA3C0"/>
+          </a:solidFill>
+          <a:ln w="12700">
+            <a:solidFill>
+              <a:srgbClr val="2BA3C0">
+                <a:alpha val="0"/>
+              </a:srgbClr>
+            </a:solidFill>
+            <a:prstDash val="solid"/>
+          </a:ln>
+        </p:spPr>
+      </p:sp>
+      <p:sp>
+        <p:nvSpPr>
+          <p:cNvPr id="5" name="Shape 2"/>
+          <p:cNvSpPr/>
+          <p:nvPr/>
+        </p:nvSpPr>
+        <p:spPr>
+          <a:xfrm>
+            <a:off x="441960" y="259080"/>
+            <a:ext cx="289560" cy="228600"/>
+          </a:xfrm>
+          <a:prstGeom prst="rect">
+            <a:avLst/>
+          </a:prstGeom>
+          <a:solidFill>
+            <a:srgbClr val="EEF5F9"/>
+          </a:solidFill>
+          <a:ln w="12700">
+            <a:solidFill>
+              <a:srgbClr val="EEF5F9">
+                <a:alpha val="0"/>
+              </a:srgbClr>
+            </a:solidFill>
+            <a:prstDash val="solid"/>
+          </a:ln>
+        </p:spPr>
+      </p:sp>
+      <p:sp>
+        <p:nvSpPr>
+          <p:cNvPr id="6" name="Text 3"/>
+          <p:cNvSpPr/>
+          <p:nvPr/>
+        </p:nvSpPr>
+        <p:spPr>
+          <a:xfrm>
+            <a:off x="480060" y="259080"/>
+            <a:ext cx="213360" cy="228600"/>
+          </a:xfrm>
+          <a:prstGeom prst="rect">
+            <a:avLst/>
+          </a:prstGeom>
+          <a:noFill/>
+          <a:ln/>
+        </p:spPr>
+        <p:txBody>
+          <a:bodyPr wrap="none" lIns="0" tIns="0" rIns="0" bIns="0" rtlCol="0" anchor="ctr"/>
+          <a:lstStyle/>
+          <a:p>
+            <a:pPr algn="l" indent="0" marL="0">
+              <a:buNone/>
+            </a:pPr>
+            <a:r>
+              <a:rPr lang="en-US" sz="1200" b="1" dirty="0">
+                <a:solidFill>
+                  <a:srgbClr val="005B94"/>
+                </a:solidFill>
+                <a:latin typeface="Arial" pitchFamily="34" charset="0"/>
+                <a:ea typeface="Arial" pitchFamily="34" charset="-122"/>
+                <a:cs typeface="Arial" pitchFamily="34" charset="-120"/>
+              </a:rPr>
+              <a:t>03</a:t>
+            </a:r>
+            <a:endParaRPr lang="en-US" sz="1200" dirty="0"/>
+          </a:p>
+        </p:txBody>
+      </p:sp>
+      <p:sp>
+        <p:nvSpPr>
+          <p:cNvPr id="7" name="Text 4"/>
+          <p:cNvSpPr/>
+          <p:nvPr/>
+        </p:nvSpPr>
+        <p:spPr>
+          <a:xfrm>
+            <a:off x="838200" y="235625"/>
+            <a:ext cx="9768840" cy="275511"/>
+          </a:xfrm>
+          <a:prstGeom prst="rect">
+            <a:avLst/>
+          </a:prstGeom>
+          <a:noFill/>
+          <a:ln/>
+        </p:spPr>
+        <p:txBody>
+          <a:bodyPr wrap="none" lIns="0" tIns="0" rIns="0" bIns="0" rtlCol="0" anchor="ctr"/>
+          <a:lstStyle/>
+          <a:p>
+            <a:pPr algn="l" indent="0" marL="0">
+              <a:lnSpc>
+                <a:spcPts val="2170"/>
+              </a:lnSpc>
+              <a:buNone/>
+            </a:pPr>
+            <a:r>
+              <a:rPr lang="en-US" sz="1400" b="1" dirty="0">
+                <a:solidFill>
+                  <a:srgbClr val="005B94"/>
+                </a:solidFill>
+                <a:latin typeface="Microsoft YaHei" pitchFamily="34" charset="0"/>
+                <a:ea typeface="Microsoft YaHei" pitchFamily="34" charset="-122"/>
+                <a:cs typeface="Microsoft YaHei" pitchFamily="34" charset="-120"/>
+              </a:rPr>
+              <a:t>预览与演示</a:t>
+            </a:r>
+            <a:endParaRPr lang="en-US" sz="1400" dirty="0"/>
+          </a:p>
+        </p:txBody>
+      </p:sp>
+      <p:sp>
+        <p:nvSpPr>
+          <p:cNvPr id="8" name="Text 5"/>
+          <p:cNvSpPr/>
+          <p:nvPr/>
+        </p:nvSpPr>
+        <p:spPr>
+          <a:xfrm>
+            <a:off x="441960" y="609600"/>
+            <a:ext cx="10165080" cy="433864"/>
+          </a:xfrm>
+          <a:prstGeom prst="rect">
+            <a:avLst/>
+          </a:prstGeom>
+          <a:noFill/>
+          <a:ln/>
+        </p:spPr>
+        <p:txBody>
+          <a:bodyPr wrap="none" lIns="0" tIns="0" rIns="0" bIns="0" rtlCol="0" anchor="ctr"/>
+          <a:lstStyle/>
+          <a:p>
+            <a:pPr algn="l" indent="0" marL="0">
+              <a:lnSpc>
+                <a:spcPts val="3416"/>
+              </a:lnSpc>
+              <a:buNone/>
+            </a:pPr>
+            <a:r>
+              <a:rPr lang="en-US" sz="2800" b="1" dirty="0">
+                <a:solidFill>
+                  <a:srgbClr val="005B94"/>
+                </a:solidFill>
+                <a:latin typeface="Microsoft YaHei" pitchFamily="34" charset="0"/>
+                <a:ea typeface="Microsoft YaHei" pitchFamily="34" charset="-122"/>
+                <a:cs typeface="Microsoft YaHei" pitchFamily="34" charset="-120"/>
+              </a:rPr>
+              <a:t>阶段总结与后续计划</a:t>
+            </a:r>
+            <a:endParaRPr lang="en-US" sz="2800" dirty="0"/>
+          </a:p>
+        </p:txBody>
+      </p:sp>
       <p:pic>
         <p:nvPicPr>
-          <p:cNvPr id="3" name="Image 0" descr="preencoded.png">    </p:cNvPr>
+          <p:cNvPr id="9" name="Image 0" descr="preencoded.png">    </p:cNvPr>
           <p:cNvPicPr>
             <a:picLocks noChangeAspect="1"/>
           </p:cNvPicPr>
@@ -28200,8 +28566,8 @@
         </p:blipFill>
         <p:spPr>
           <a:xfrm>
-            <a:off x="0" y="0"/>
-            <a:ext cx="12192000" cy="6858000"/>
+            <a:off x="10835640" y="201930"/>
+            <a:ext cx="914400" cy="914400"/>
           </a:xfrm>
           <a:prstGeom prst="rect">
             <a:avLst/>
@@ -28210,130 +28576,34 @@
       </p:pic>
       <p:sp>
         <p:nvSpPr>
-          <p:cNvPr id="4" name="Text 0"/>
-          <p:cNvSpPr/>
-          <p:nvPr/>
-        </p:nvSpPr>
-        <p:spPr>
-          <a:xfrm>
-            <a:off x="480060" y="259080"/>
-            <a:ext cx="213360" cy="228600"/>
-          </a:xfrm>
-          <a:prstGeom prst="rect">
-            <a:avLst/>
-          </a:prstGeom>
-          <a:noFill/>
-          <a:ln/>
-        </p:spPr>
-        <p:txBody>
-          <a:bodyPr wrap="none" lIns="0" tIns="0" rIns="0" bIns="0" rtlCol="0" anchor="ctr"/>
-          <a:lstStyle/>
-          <a:p>
-            <a:pPr algn="l" indent="0" marL="0">
-              <a:buNone/>
-            </a:pPr>
-            <a:r>
-              <a:rPr lang="en-US" sz="1200" b="1" dirty="0">
-                <a:solidFill>
-                  <a:srgbClr val="005B94"/>
-                </a:solidFill>
-                <a:latin typeface="Arial" pitchFamily="34" charset="0"/>
-                <a:ea typeface="Arial" pitchFamily="34" charset="-122"/>
-                <a:cs typeface="Arial" pitchFamily="34" charset="-120"/>
-              </a:rPr>
-              <a:t>03</a:t>
-            </a:r>
-            <a:endParaRPr lang="en-US" sz="1200" dirty="0"/>
-          </a:p>
-        </p:txBody>
-      </p:sp>
-      <p:sp>
-        <p:nvSpPr>
-          <p:cNvPr id="5" name="Text 1"/>
-          <p:cNvSpPr/>
-          <p:nvPr/>
-        </p:nvSpPr>
-        <p:spPr>
-          <a:xfrm>
-            <a:off x="838200" y="235625"/>
-            <a:ext cx="9768840" cy="275511"/>
-          </a:xfrm>
-          <a:prstGeom prst="rect">
-            <a:avLst/>
-          </a:prstGeom>
-          <a:noFill/>
-          <a:ln/>
-        </p:spPr>
-        <p:txBody>
-          <a:bodyPr wrap="none" lIns="0" tIns="0" rIns="0" bIns="0" rtlCol="0" anchor="ctr"/>
-          <a:lstStyle/>
-          <a:p>
-            <a:pPr algn="l" indent="0" marL="0">
-              <a:lnSpc>
-                <a:spcPts val="2170"/>
-              </a:lnSpc>
-              <a:buNone/>
-            </a:pPr>
-            <a:r>
-              <a:rPr lang="en-US" sz="1400" b="1" dirty="0">
-                <a:solidFill>
-                  <a:srgbClr val="40647D"/>
-                </a:solidFill>
-                <a:latin typeface="Microsoft YaHei" pitchFamily="34" charset="0"/>
-                <a:ea typeface="Microsoft YaHei" pitchFamily="34" charset="-122"/>
-                <a:cs typeface="Microsoft YaHei" pitchFamily="34" charset="-120"/>
-              </a:rPr>
-              <a:t>预览与演示</a:t>
-            </a:r>
-            <a:endParaRPr lang="en-US" sz="1400" dirty="0"/>
-          </a:p>
-        </p:txBody>
-      </p:sp>
-      <p:sp>
-        <p:nvSpPr>
-          <p:cNvPr id="6" name="Text 2"/>
-          <p:cNvSpPr/>
-          <p:nvPr/>
-        </p:nvSpPr>
-        <p:spPr>
-          <a:xfrm>
-            <a:off x="441960" y="609600"/>
-            <a:ext cx="10165080" cy="433864"/>
-          </a:xfrm>
-          <a:prstGeom prst="rect">
-            <a:avLst/>
-          </a:prstGeom>
-          <a:noFill/>
-          <a:ln/>
-        </p:spPr>
-        <p:txBody>
-          <a:bodyPr wrap="none" lIns="0" tIns="0" rIns="0" bIns="0" rtlCol="0" anchor="ctr"/>
-          <a:lstStyle/>
-          <a:p>
-            <a:pPr algn="l" indent="0" marL="0">
-              <a:lnSpc>
-                <a:spcPts val="3416"/>
-              </a:lnSpc>
-              <a:buNone/>
-            </a:pPr>
-            <a:r>
-              <a:rPr lang="en-US" sz="2800" b="1" dirty="0">
-                <a:solidFill>
-                  <a:srgbClr val="005B94"/>
-                </a:solidFill>
-                <a:latin typeface="Microsoft YaHei" pitchFamily="34" charset="0"/>
-                <a:ea typeface="Microsoft YaHei" pitchFamily="34" charset="-122"/>
-                <a:cs typeface="Microsoft YaHei" pitchFamily="34" charset="-120"/>
-              </a:rPr>
-              <a:t>阶段总结与后续计划</a:t>
-            </a:r>
-            <a:endParaRPr lang="en-US" sz="2800" dirty="0"/>
-          </a:p>
-        </p:txBody>
-      </p:sp>
-      <p:sp>
-        <p:nvSpPr>
-          <p:cNvPr id="7" name="Text 3"/>
+          <p:cNvPr id="10" name="Shape 6"/>
+          <p:cNvSpPr/>
+          <p:nvPr/>
+        </p:nvSpPr>
+        <p:spPr>
+          <a:xfrm>
+            <a:off x="441960" y="1264920"/>
+            <a:ext cx="11308080" cy="15240"/>
+          </a:xfrm>
+          <a:prstGeom prst="rect">
+            <a:avLst/>
+          </a:prstGeom>
+          <a:solidFill>
+            <a:srgbClr val="005B94"/>
+          </a:solidFill>
+          <a:ln w="12700">
+            <a:solidFill>
+              <a:srgbClr val="005B94">
+                <a:alpha val="0"/>
+              </a:srgbClr>
+            </a:solidFill>
+            <a:prstDash val="solid"/>
+          </a:ln>
+        </p:spPr>
+      </p:sp>
+      <p:sp>
+        <p:nvSpPr>
+          <p:cNvPr id="11" name="Text 7"/>
           <p:cNvSpPr/>
           <p:nvPr/>
         </p:nvSpPr>
@@ -28375,14 +28645,14 @@
       </p:sp>
       <p:sp>
         <p:nvSpPr>
-          <p:cNvPr id="8" name="Text 4"/>
-          <p:cNvSpPr/>
-          <p:nvPr/>
-        </p:nvSpPr>
-        <p:spPr>
-          <a:xfrm>
-            <a:off x="441960" y="1945600"/>
-            <a:ext cx="5516880" cy="330041"/>
+          <p:cNvPr id="12" name="Text 8"/>
+          <p:cNvSpPr/>
+          <p:nvPr/>
+        </p:nvSpPr>
+        <p:spPr>
+          <a:xfrm>
+            <a:off x="441960" y="1950720"/>
+            <a:ext cx="5379720" cy="330041"/>
           </a:xfrm>
           <a:prstGeom prst="rect">
             <a:avLst/>
@@ -28417,14 +28687,41 @@
       </p:sp>
       <p:sp>
         <p:nvSpPr>
-          <p:cNvPr id="9" name="Text 5"/>
-          <p:cNvSpPr/>
-          <p:nvPr/>
-        </p:nvSpPr>
-        <p:spPr>
-          <a:xfrm>
-            <a:off x="922020" y="2501503"/>
-            <a:ext cx="4892040" cy="308610"/>
+          <p:cNvPr id="13" name="Shape 9"/>
+          <p:cNvSpPr/>
+          <p:nvPr/>
+        </p:nvSpPr>
+        <p:spPr>
+          <a:xfrm>
+            <a:off x="441960" y="2402681"/>
+            <a:ext cx="5379720" cy="1195507"/>
+          </a:xfrm>
+          <a:prstGeom prst="rect">
+            <a:avLst/>
+          </a:prstGeom>
+          <a:solidFill>
+            <a:srgbClr val="EEF5F9"/>
+          </a:solidFill>
+          <a:ln w="12700">
+            <a:solidFill>
+              <a:srgbClr val="EEF5F9">
+                <a:alpha val="0"/>
+              </a:srgbClr>
+            </a:solidFill>
+            <a:prstDash val="solid"/>
+          </a:ln>
+        </p:spPr>
+      </p:sp>
+      <p:sp>
+        <p:nvSpPr>
+          <p:cNvPr id="14" name="Text 10"/>
+          <p:cNvSpPr/>
+          <p:nvPr/>
+        </p:nvSpPr>
+        <p:spPr>
+          <a:xfrm>
+            <a:off x="579120" y="2524601"/>
+            <a:ext cx="5105400" cy="297180"/>
           </a:xfrm>
           <a:prstGeom prst="rect">
             <a:avLst/>
@@ -28438,7 +28735,7 @@
           <a:p>
             <a:pPr algn="l" indent="0" marL="0">
               <a:lnSpc>
-                <a:spcPts val="2430"/>
+                <a:spcPts val="2340"/>
               </a:lnSpc>
               <a:buNone/>
             </a:pPr>
@@ -28459,14 +28756,83 @@
       </p:sp>
       <p:sp>
         <p:nvSpPr>
-          <p:cNvPr id="10" name="Text 6"/>
-          <p:cNvSpPr/>
-          <p:nvPr/>
-        </p:nvSpPr>
-        <p:spPr>
-          <a:xfrm>
-            <a:off x="922020" y="2871073"/>
-            <a:ext cx="4892040" cy="609600"/>
+          <p:cNvPr id="15" name="Text 11"/>
+          <p:cNvSpPr/>
+          <p:nvPr/>
+        </p:nvSpPr>
+        <p:spPr>
+          <a:xfrm>
+            <a:off x="579120" y="2882741"/>
+            <a:ext cx="5105400" cy="589359"/>
+          </a:xfrm>
+          <a:prstGeom prst="rect">
+            <a:avLst/>
+          </a:prstGeom>
+          <a:noFill/>
+          <a:ln/>
+        </p:spPr>
+        <p:txBody>
+          <a:bodyPr wrap="square" lIns="0" tIns="0" rIns="0" bIns="0" rtlCol="0" anchor="ctr"/>
+          <a:lstStyle/>
+          <a:p>
+            <a:pPr algn="just" indent="0" marL="0">
+              <a:lnSpc>
+                <a:spcPts val="2320"/>
+              </a:lnSpc>
+              <a:buNone/>
+            </a:pPr>
+            <a:r>
+              <a:rPr lang="en-US" sz="1600" dirty="0">
+                <a:solidFill>
+                  <a:srgbClr val="12374E"/>
+                </a:solidFill>
+                <a:latin typeface="Microsoft YaHei" pitchFamily="34" charset="0"/>
+                <a:ea typeface="Microsoft YaHei" pitchFamily="34" charset="-122"/>
+                <a:cs typeface="Microsoft YaHei" pitchFamily="34" charset="-120"/>
+              </a:rPr>
+              <a:t>已实现的方法与完成的实验，注明代码版本、数据范围和记录位置。</a:t>
+            </a:r>
+            <a:endParaRPr lang="en-US" sz="1600" dirty="0"/>
+          </a:p>
+        </p:txBody>
+      </p:sp>
+      <p:sp>
+        <p:nvSpPr>
+          <p:cNvPr id="16" name="Shape 12"/>
+          <p:cNvSpPr/>
+          <p:nvPr/>
+        </p:nvSpPr>
+        <p:spPr>
+          <a:xfrm>
+            <a:off x="441960" y="3689628"/>
+            <a:ext cx="5379720" cy="1195507"/>
+          </a:xfrm>
+          <a:prstGeom prst="rect">
+            <a:avLst/>
+          </a:prstGeom>
+          <a:solidFill>
+            <a:srgbClr val="EEF5F9"/>
+          </a:solidFill>
+          <a:ln w="12700">
+            <a:solidFill>
+              <a:srgbClr val="EEF5F9">
+                <a:alpha val="0"/>
+              </a:srgbClr>
+            </a:solidFill>
+            <a:prstDash val="solid"/>
+          </a:ln>
+        </p:spPr>
+      </p:sp>
+      <p:sp>
+        <p:nvSpPr>
+          <p:cNvPr id="17" name="Text 13"/>
+          <p:cNvSpPr/>
+          <p:nvPr/>
+        </p:nvSpPr>
+        <p:spPr>
+          <a:xfrm>
+            <a:off x="579120" y="3811548"/>
+            <a:ext cx="5105400" cy="297180"/>
           </a:xfrm>
           <a:prstGeom prst="rect">
             <a:avLst/>
@@ -28480,7 +28846,49 @@
           <a:p>
             <a:pPr algn="l" indent="0" marL="0">
               <a:lnSpc>
-                <a:spcPts val="2400"/>
+                <a:spcPts val="2340"/>
+              </a:lnSpc>
+              <a:buNone/>
+            </a:pPr>
+            <a:r>
+              <a:rPr lang="en-US" sz="1800" b="1" dirty="0">
+                <a:solidFill>
+                  <a:srgbClr val="005B94"/>
+                </a:solidFill>
+                <a:latin typeface="Microsoft YaHei" pitchFamily="34" charset="0"/>
+                <a:ea typeface="Microsoft YaHei" pitchFamily="34" charset="-122"/>
+                <a:cs typeface="Microsoft YaHei" pitchFamily="34" charset="-120"/>
+              </a:rPr>
+              <a:t>证据支持的结论</a:t>
+            </a:r>
+            <a:endParaRPr lang="en-US" sz="1800" dirty="0"/>
+          </a:p>
+        </p:txBody>
+      </p:sp>
+      <p:sp>
+        <p:nvSpPr>
+          <p:cNvPr id="18" name="Text 14"/>
+          <p:cNvSpPr/>
+          <p:nvPr/>
+        </p:nvSpPr>
+        <p:spPr>
+          <a:xfrm>
+            <a:off x="579120" y="4169688"/>
+            <a:ext cx="5105400" cy="589359"/>
+          </a:xfrm>
+          <a:prstGeom prst="rect">
+            <a:avLst/>
+          </a:prstGeom>
+          <a:noFill/>
+          <a:ln/>
+        </p:spPr>
+        <p:txBody>
+          <a:bodyPr wrap="square" lIns="0" tIns="0" rIns="0" bIns="0" rtlCol="0" anchor="ctr"/>
+          <a:lstStyle/>
+          <a:p>
+            <a:pPr algn="just" indent="0" marL="0">
+              <a:lnSpc>
+                <a:spcPts val="2320"/>
               </a:lnSpc>
               <a:buNone/>
             </a:pPr>
@@ -28493,7 +28901,7 @@
                 <a:ea typeface="Microsoft YaHei" pitchFamily="34" charset="-122"/>
                 <a:cs typeface="Microsoft YaHei" pitchFamily="34" charset="-120"/>
               </a:rPr>
-              <a:t>列出已实现的方法与完成的实验，注明代码版本、数据范围和记录位置。</a:t>
+              <a:t>关联对应图表，写明结论适用的场景与条件；初步观察标明尚待复核。</a:t>
             </a:r>
             <a:endParaRPr lang="en-US" sz="1600" dirty="0"/>
           </a:p>
@@ -28501,14 +28909,41 @@
       </p:sp>
       <p:sp>
         <p:nvSpPr>
-          <p:cNvPr id="11" name="Text 7"/>
-          <p:cNvSpPr/>
-          <p:nvPr/>
-        </p:nvSpPr>
-        <p:spPr>
-          <a:xfrm>
-            <a:off x="922020" y="3795236"/>
-            <a:ext cx="4892040" cy="308610"/>
+          <p:cNvPr id="19" name="Shape 15"/>
+          <p:cNvSpPr/>
+          <p:nvPr/>
+        </p:nvSpPr>
+        <p:spPr>
+          <a:xfrm>
+            <a:off x="441960" y="4976574"/>
+            <a:ext cx="5379720" cy="1195626"/>
+          </a:xfrm>
+          <a:prstGeom prst="rect">
+            <a:avLst/>
+          </a:prstGeom>
+          <a:solidFill>
+            <a:srgbClr val="EEF5F9"/>
+          </a:solidFill>
+          <a:ln w="12700">
+            <a:solidFill>
+              <a:srgbClr val="EEF5F9">
+                <a:alpha val="0"/>
+              </a:srgbClr>
+            </a:solidFill>
+            <a:prstDash val="solid"/>
+          </a:ln>
+        </p:spPr>
+      </p:sp>
+      <p:sp>
+        <p:nvSpPr>
+          <p:cNvPr id="20" name="Text 16"/>
+          <p:cNvSpPr/>
+          <p:nvPr/>
+        </p:nvSpPr>
+        <p:spPr>
+          <a:xfrm>
+            <a:off x="579120" y="5098494"/>
+            <a:ext cx="5105400" cy="297180"/>
           </a:xfrm>
           <a:prstGeom prst="rect">
             <a:avLst/>
@@ -28522,7 +28957,7 @@
           <a:p>
             <a:pPr algn="l" indent="0" marL="0">
               <a:lnSpc>
-                <a:spcPts val="2430"/>
+                <a:spcPts val="2340"/>
               </a:lnSpc>
               <a:buNone/>
             </a:pPr>
@@ -28535,7 +28970,7 @@
                 <a:ea typeface="Microsoft YaHei" pitchFamily="34" charset="-122"/>
                 <a:cs typeface="Microsoft YaHei" pitchFamily="34" charset="-120"/>
               </a:rPr>
-              <a:t>证据支持的结论</a:t>
+              <a:t>仍待解决的问题</a:t>
             </a:r>
             <a:endParaRPr lang="en-US" sz="1800" dirty="0"/>
           </a:p>
@@ -28543,14 +28978,56 @@
       </p:sp>
       <p:sp>
         <p:nvSpPr>
-          <p:cNvPr id="12" name="Text 8"/>
-          <p:cNvSpPr/>
-          <p:nvPr/>
-        </p:nvSpPr>
-        <p:spPr>
-          <a:xfrm>
-            <a:off x="922020" y="4164806"/>
-            <a:ext cx="4892040" cy="609600"/>
+          <p:cNvPr id="21" name="Text 17"/>
+          <p:cNvSpPr/>
+          <p:nvPr/>
+        </p:nvSpPr>
+        <p:spPr>
+          <a:xfrm>
+            <a:off x="579120" y="5456634"/>
+            <a:ext cx="5105400" cy="589359"/>
+          </a:xfrm>
+          <a:prstGeom prst="rect">
+            <a:avLst/>
+          </a:prstGeom>
+          <a:noFill/>
+          <a:ln/>
+        </p:spPr>
+        <p:txBody>
+          <a:bodyPr wrap="square" lIns="0" tIns="0" rIns="0" bIns="0" rtlCol="0" anchor="ctr"/>
+          <a:lstStyle/>
+          <a:p>
+            <a:pPr algn="just" indent="0" marL="0">
+              <a:lnSpc>
+                <a:spcPts val="2320"/>
+              </a:lnSpc>
+              <a:buNone/>
+            </a:pPr>
+            <a:r>
+              <a:rPr lang="en-US" sz="1600" dirty="0">
+                <a:solidFill>
+                  <a:srgbClr val="12374E"/>
+                </a:solidFill>
+                <a:latin typeface="Microsoft YaHei" pitchFamily="34" charset="0"/>
+                <a:ea typeface="Microsoft YaHei" pitchFamily="34" charset="-122"/>
+                <a:cs typeface="Microsoft YaHei" pitchFamily="34" charset="-120"/>
+              </a:rPr>
+              <a:t>未覆盖的场景、失败情形及主要限制，说明其对当前判断的影响。</a:t>
+            </a:r>
+            <a:endParaRPr lang="en-US" sz="1600" dirty="0"/>
+          </a:p>
+        </p:txBody>
+      </p:sp>
+      <p:sp>
+        <p:nvSpPr>
+          <p:cNvPr id="22" name="Text 18"/>
+          <p:cNvSpPr/>
+          <p:nvPr/>
+        </p:nvSpPr>
+        <p:spPr>
+          <a:xfrm>
+            <a:off x="6362700" y="1950720"/>
+            <a:ext cx="5387340" cy="330041"/>
           </a:xfrm>
           <a:prstGeom prst="rect">
             <a:avLst/>
@@ -28564,7 +29041,1703 @@
           <a:p>
             <a:pPr algn="l" indent="0" marL="0">
               <a:lnSpc>
-                <a:spcPts val="2400"/>
+                <a:spcPts val="2600"/>
+              </a:lnSpc>
+              <a:buNone/>
+            </a:pPr>
+            <a:r>
+              <a:rPr lang="en-US" sz="2000" b="1" dirty="0">
+                <a:solidFill>
+                  <a:srgbClr val="005B94"/>
+                </a:solidFill>
+                <a:latin typeface="Microsoft YaHei" pitchFamily="34" charset="0"/>
+                <a:ea typeface="Microsoft YaHei" pitchFamily="34" charset="-122"/>
+                <a:cs typeface="Microsoft YaHei" pitchFamily="34" charset="-120"/>
+              </a:rPr>
+              <a:t>下一步计划</a:t>
+            </a:r>
+            <a:endParaRPr lang="en-US" sz="2000" dirty="0"/>
+          </a:p>
+        </p:txBody>
+      </p:sp>
+      <p:sp>
+        <p:nvSpPr>
+          <p:cNvPr id="23" name="Shape 19"/>
+          <p:cNvSpPr/>
+          <p:nvPr/>
+        </p:nvSpPr>
+        <p:spPr>
+          <a:xfrm>
+            <a:off x="6362700" y="2417921"/>
+            <a:ext cx="1023580" cy="337661"/>
+          </a:xfrm>
+          <a:prstGeom prst="rect">
+            <a:avLst/>
+          </a:prstGeom>
+          <a:solidFill>
+            <a:srgbClr val="005B94"/>
+          </a:solidFill>
+          <a:ln w="12700">
+            <a:solidFill>
+              <a:srgbClr val="005B94">
+                <a:alpha val="0"/>
+              </a:srgbClr>
+            </a:solidFill>
+            <a:prstDash val="solid"/>
+          </a:ln>
+        </p:spPr>
+      </p:sp>
+      <p:sp>
+        <p:nvSpPr>
+          <p:cNvPr id="24" name="Shape 20"/>
+          <p:cNvSpPr/>
+          <p:nvPr/>
+        </p:nvSpPr>
+        <p:spPr>
+          <a:xfrm>
+            <a:off x="6362700" y="2747963"/>
+            <a:ext cx="1023580" cy="7620"/>
+          </a:xfrm>
+          <a:prstGeom prst="rect">
+            <a:avLst/>
+          </a:prstGeom>
+          <a:solidFill>
+            <a:srgbClr val="C1D2DE"/>
+          </a:solidFill>
+          <a:ln w="12700">
+            <a:solidFill>
+              <a:srgbClr val="C1D2DE">
+                <a:alpha val="0"/>
+              </a:srgbClr>
+            </a:solidFill>
+            <a:prstDash val="solid"/>
+          </a:ln>
+        </p:spPr>
+      </p:sp>
+      <p:sp>
+        <p:nvSpPr>
+          <p:cNvPr id="25" name="Text 21"/>
+          <p:cNvSpPr/>
+          <p:nvPr/>
+        </p:nvSpPr>
+        <p:spPr>
+          <a:xfrm>
+            <a:off x="6454140" y="2456021"/>
+            <a:ext cx="840700" cy="257651"/>
+          </a:xfrm>
+          <a:prstGeom prst="rect">
+            <a:avLst/>
+          </a:prstGeom>
+          <a:noFill/>
+          <a:ln/>
+        </p:spPr>
+        <p:txBody>
+          <a:bodyPr wrap="square" lIns="0" tIns="0" rIns="0" bIns="0" rtlCol="0" anchor="ctr"/>
+          <a:lstStyle/>
+          <a:p>
+            <a:pPr algn="l" indent="0" marL="0">
+              <a:lnSpc>
+                <a:spcPts val="2030"/>
+              </a:lnSpc>
+              <a:buNone/>
+            </a:pPr>
+            <a:r>
+              <a:rPr lang="en-US" sz="1400" b="1" dirty="0">
+                <a:solidFill>
+                  <a:srgbClr val="FFFFFF"/>
+                </a:solidFill>
+                <a:latin typeface="Microsoft YaHei" pitchFamily="34" charset="0"/>
+                <a:ea typeface="Microsoft YaHei" pitchFamily="34" charset="-122"/>
+                <a:cs typeface="Microsoft YaHei" pitchFamily="34" charset="-120"/>
+              </a:rPr>
+              <a:t>工作阶段</a:t>
+            </a:r>
+            <a:endParaRPr lang="en-US" sz="1400" dirty="0"/>
+          </a:p>
+        </p:txBody>
+      </p:sp>
+      <p:sp>
+        <p:nvSpPr>
+          <p:cNvPr id="26" name="Shape 22"/>
+          <p:cNvSpPr/>
+          <p:nvPr/>
+        </p:nvSpPr>
+        <p:spPr>
+          <a:xfrm>
+            <a:off x="7386280" y="2417921"/>
+            <a:ext cx="1939409" cy="337661"/>
+          </a:xfrm>
+          <a:prstGeom prst="rect">
+            <a:avLst/>
+          </a:prstGeom>
+          <a:solidFill>
+            <a:srgbClr val="005B94"/>
+          </a:solidFill>
+          <a:ln w="12700">
+            <a:solidFill>
+              <a:srgbClr val="005B94">
+                <a:alpha val="0"/>
+              </a:srgbClr>
+            </a:solidFill>
+            <a:prstDash val="solid"/>
+          </a:ln>
+        </p:spPr>
+      </p:sp>
+      <p:sp>
+        <p:nvSpPr>
+          <p:cNvPr id="27" name="Shape 23"/>
+          <p:cNvSpPr/>
+          <p:nvPr/>
+        </p:nvSpPr>
+        <p:spPr>
+          <a:xfrm>
+            <a:off x="7386280" y="2747963"/>
+            <a:ext cx="1939409" cy="7620"/>
+          </a:xfrm>
+          <a:prstGeom prst="rect">
+            <a:avLst/>
+          </a:prstGeom>
+          <a:solidFill>
+            <a:srgbClr val="C1D2DE"/>
+          </a:solidFill>
+          <a:ln w="12700">
+            <a:solidFill>
+              <a:srgbClr val="C1D2DE">
+                <a:alpha val="0"/>
+              </a:srgbClr>
+            </a:solidFill>
+            <a:prstDash val="solid"/>
+          </a:ln>
+        </p:spPr>
+      </p:sp>
+      <p:sp>
+        <p:nvSpPr>
+          <p:cNvPr id="28" name="Text 24"/>
+          <p:cNvSpPr/>
+          <p:nvPr/>
+        </p:nvSpPr>
+        <p:spPr>
+          <a:xfrm>
+            <a:off x="7477720" y="2456021"/>
+            <a:ext cx="1756529" cy="257651"/>
+          </a:xfrm>
+          <a:prstGeom prst="rect">
+            <a:avLst/>
+          </a:prstGeom>
+          <a:noFill/>
+          <a:ln/>
+        </p:spPr>
+        <p:txBody>
+          <a:bodyPr wrap="square" lIns="0" tIns="0" rIns="0" bIns="0" rtlCol="0" anchor="ctr"/>
+          <a:lstStyle/>
+          <a:p>
+            <a:pPr algn="l" indent="0" marL="0">
+              <a:lnSpc>
+                <a:spcPts val="2030"/>
+              </a:lnSpc>
+              <a:buNone/>
+            </a:pPr>
+            <a:r>
+              <a:rPr lang="en-US" sz="1400" b="1" dirty="0">
+                <a:solidFill>
+                  <a:srgbClr val="FFFFFF"/>
+                </a:solidFill>
+                <a:latin typeface="Microsoft YaHei" pitchFamily="34" charset="0"/>
+                <a:ea typeface="Microsoft YaHei" pitchFamily="34" charset="-122"/>
+                <a:cs typeface="Microsoft YaHei" pitchFamily="34" charset="-120"/>
+              </a:rPr>
+              <a:t>关键任务</a:t>
+            </a:r>
+            <a:endParaRPr lang="en-US" sz="1400" dirty="0"/>
+          </a:p>
+        </p:txBody>
+      </p:sp>
+      <p:sp>
+        <p:nvSpPr>
+          <p:cNvPr id="29" name="Shape 25"/>
+          <p:cNvSpPr/>
+          <p:nvPr/>
+        </p:nvSpPr>
+        <p:spPr>
+          <a:xfrm>
+            <a:off x="9325689" y="2417921"/>
+            <a:ext cx="2424351" cy="337661"/>
+          </a:xfrm>
+          <a:prstGeom prst="rect">
+            <a:avLst/>
+          </a:prstGeom>
+          <a:solidFill>
+            <a:srgbClr val="005B94"/>
+          </a:solidFill>
+          <a:ln w="12700">
+            <a:solidFill>
+              <a:srgbClr val="005B94">
+                <a:alpha val="0"/>
+              </a:srgbClr>
+            </a:solidFill>
+            <a:prstDash val="solid"/>
+          </a:ln>
+        </p:spPr>
+      </p:sp>
+      <p:sp>
+        <p:nvSpPr>
+          <p:cNvPr id="30" name="Shape 26"/>
+          <p:cNvSpPr/>
+          <p:nvPr/>
+        </p:nvSpPr>
+        <p:spPr>
+          <a:xfrm>
+            <a:off x="9325689" y="2747963"/>
+            <a:ext cx="2424351" cy="7620"/>
+          </a:xfrm>
+          <a:prstGeom prst="rect">
+            <a:avLst/>
+          </a:prstGeom>
+          <a:solidFill>
+            <a:srgbClr val="C1D2DE"/>
+          </a:solidFill>
+          <a:ln w="12700">
+            <a:solidFill>
+              <a:srgbClr val="C1D2DE">
+                <a:alpha val="0"/>
+              </a:srgbClr>
+            </a:solidFill>
+            <a:prstDash val="solid"/>
+          </a:ln>
+        </p:spPr>
+      </p:sp>
+      <p:sp>
+        <p:nvSpPr>
+          <p:cNvPr id="31" name="Text 27"/>
+          <p:cNvSpPr/>
+          <p:nvPr/>
+        </p:nvSpPr>
+        <p:spPr>
+          <a:xfrm>
+            <a:off x="9417129" y="2456021"/>
+            <a:ext cx="2241471" cy="257651"/>
+          </a:xfrm>
+          <a:prstGeom prst="rect">
+            <a:avLst/>
+          </a:prstGeom>
+          <a:noFill/>
+          <a:ln/>
+        </p:spPr>
+        <p:txBody>
+          <a:bodyPr wrap="square" lIns="0" tIns="0" rIns="0" bIns="0" rtlCol="0" anchor="ctr"/>
+          <a:lstStyle/>
+          <a:p>
+            <a:pPr algn="l" indent="0" marL="0">
+              <a:lnSpc>
+                <a:spcPts val="2030"/>
+              </a:lnSpc>
+              <a:buNone/>
+            </a:pPr>
+            <a:r>
+              <a:rPr lang="en-US" sz="1400" b="1" dirty="0">
+                <a:solidFill>
+                  <a:srgbClr val="FFFFFF"/>
+                </a:solidFill>
+                <a:latin typeface="Microsoft YaHei" pitchFamily="34" charset="0"/>
+                <a:ea typeface="Microsoft YaHei" pitchFamily="34" charset="-122"/>
+                <a:cs typeface="Microsoft YaHei" pitchFamily="34" charset="-120"/>
+              </a:rPr>
+              <a:t>验收产出</a:t>
+            </a:r>
+            <a:endParaRPr lang="en-US" sz="1400" dirty="0"/>
+          </a:p>
+        </p:txBody>
+      </p:sp>
+      <p:sp>
+        <p:nvSpPr>
+          <p:cNvPr id="32" name="Shape 28"/>
+          <p:cNvSpPr/>
+          <p:nvPr/>
+        </p:nvSpPr>
+        <p:spPr>
+          <a:xfrm>
+            <a:off x="6362700" y="2755583"/>
+            <a:ext cx="1023580" cy="599123"/>
+          </a:xfrm>
+          <a:prstGeom prst="rect">
+            <a:avLst/>
+          </a:prstGeom>
+          <a:solidFill>
+            <a:srgbClr val="FFFFFF"/>
+          </a:solidFill>
+          <a:ln w="12700">
+            <a:solidFill>
+              <a:srgbClr val="FFFFFF">
+                <a:alpha val="0"/>
+              </a:srgbClr>
+            </a:solidFill>
+            <a:prstDash val="solid"/>
+          </a:ln>
+        </p:spPr>
+      </p:sp>
+      <p:sp>
+        <p:nvSpPr>
+          <p:cNvPr id="33" name="Shape 29"/>
+          <p:cNvSpPr/>
+          <p:nvPr/>
+        </p:nvSpPr>
+        <p:spPr>
+          <a:xfrm>
+            <a:off x="6362700" y="3347085"/>
+            <a:ext cx="1023580" cy="7620"/>
+          </a:xfrm>
+          <a:prstGeom prst="rect">
+            <a:avLst/>
+          </a:prstGeom>
+          <a:solidFill>
+            <a:srgbClr val="C1D2DE"/>
+          </a:solidFill>
+          <a:ln w="12700">
+            <a:solidFill>
+              <a:srgbClr val="C1D2DE">
+                <a:alpha val="0"/>
+              </a:srgbClr>
+            </a:solidFill>
+            <a:prstDash val="solid"/>
+          </a:ln>
+        </p:spPr>
+      </p:sp>
+      <p:sp>
+        <p:nvSpPr>
+          <p:cNvPr id="34" name="Text 30"/>
+          <p:cNvSpPr/>
+          <p:nvPr/>
+        </p:nvSpPr>
+        <p:spPr>
+          <a:xfrm>
+            <a:off x="6454140" y="2926318"/>
+            <a:ext cx="840700" cy="257651"/>
+          </a:xfrm>
+          <a:prstGeom prst="rect">
+            <a:avLst/>
+          </a:prstGeom>
+          <a:noFill/>
+          <a:ln/>
+        </p:spPr>
+        <p:txBody>
+          <a:bodyPr wrap="square" lIns="0" tIns="0" rIns="0" bIns="0" rtlCol="0" anchor="ctr"/>
+          <a:lstStyle/>
+          <a:p>
+            <a:pPr algn="l" indent="0" marL="0">
+              <a:lnSpc>
+                <a:spcPts val="2030"/>
+              </a:lnSpc>
+              <a:buNone/>
+            </a:pPr>
+            <a:r>
+              <a:rPr lang="en-US" sz="1400" b="1" dirty="0">
+                <a:solidFill>
+                  <a:srgbClr val="12374E"/>
+                </a:solidFill>
+                <a:latin typeface="Microsoft YaHei" pitchFamily="34" charset="0"/>
+                <a:ea typeface="Microsoft YaHei" pitchFamily="34" charset="-122"/>
+                <a:cs typeface="Microsoft YaHei" pitchFamily="34" charset="-120"/>
+              </a:rPr>
+              <a:t>近期</a:t>
+            </a:r>
+            <a:endParaRPr lang="en-US" sz="1400" dirty="0"/>
+          </a:p>
+        </p:txBody>
+      </p:sp>
+      <p:sp>
+        <p:nvSpPr>
+          <p:cNvPr id="35" name="Shape 31"/>
+          <p:cNvSpPr/>
+          <p:nvPr/>
+        </p:nvSpPr>
+        <p:spPr>
+          <a:xfrm>
+            <a:off x="7386280" y="2755583"/>
+            <a:ext cx="1939409" cy="599123"/>
+          </a:xfrm>
+          <a:prstGeom prst="rect">
+            <a:avLst/>
+          </a:prstGeom>
+          <a:solidFill>
+            <a:srgbClr val="FFFFFF"/>
+          </a:solidFill>
+          <a:ln w="12700">
+            <a:solidFill>
+              <a:srgbClr val="FFFFFF">
+                <a:alpha val="0"/>
+              </a:srgbClr>
+            </a:solidFill>
+            <a:prstDash val="solid"/>
+          </a:ln>
+        </p:spPr>
+      </p:sp>
+      <p:sp>
+        <p:nvSpPr>
+          <p:cNvPr id="36" name="Shape 32"/>
+          <p:cNvSpPr/>
+          <p:nvPr/>
+        </p:nvSpPr>
+        <p:spPr>
+          <a:xfrm>
+            <a:off x="7386280" y="3347085"/>
+            <a:ext cx="1939409" cy="7620"/>
+          </a:xfrm>
+          <a:prstGeom prst="rect">
+            <a:avLst/>
+          </a:prstGeom>
+          <a:solidFill>
+            <a:srgbClr val="C1D2DE"/>
+          </a:solidFill>
+          <a:ln w="12700">
+            <a:solidFill>
+              <a:srgbClr val="C1D2DE">
+                <a:alpha val="0"/>
+              </a:srgbClr>
+            </a:solidFill>
+            <a:prstDash val="solid"/>
+          </a:ln>
+        </p:spPr>
+      </p:sp>
+      <p:sp>
+        <p:nvSpPr>
+          <p:cNvPr id="37" name="Text 33"/>
+          <p:cNvSpPr/>
+          <p:nvPr/>
+        </p:nvSpPr>
+        <p:spPr>
+          <a:xfrm>
+            <a:off x="7477720" y="2797493"/>
+            <a:ext cx="1756529" cy="515303"/>
+          </a:xfrm>
+          <a:prstGeom prst="rect">
+            <a:avLst/>
+          </a:prstGeom>
+          <a:noFill/>
+          <a:ln/>
+        </p:spPr>
+        <p:txBody>
+          <a:bodyPr wrap="square" lIns="0" tIns="0" rIns="0" bIns="0" rtlCol="0" anchor="ctr"/>
+          <a:lstStyle/>
+          <a:p>
+            <a:pPr algn="l" indent="0" marL="0">
+              <a:lnSpc>
+                <a:spcPts val="2030"/>
+              </a:lnSpc>
+              <a:buNone/>
+            </a:pPr>
+            <a:r>
+              <a:rPr lang="en-US" sz="1400" dirty="0">
+                <a:solidFill>
+                  <a:srgbClr val="12374E"/>
+                </a:solidFill>
+                <a:latin typeface="Microsoft YaHei" pitchFamily="34" charset="0"/>
+                <a:ea typeface="Microsoft YaHei" pitchFamily="34" charset="-122"/>
+                <a:cs typeface="Microsoft YaHei" pitchFamily="34" charset="-120"/>
+              </a:rPr>
+              <a:t>统一实验设置</a:t>
+            </a:r>
+            <a:endParaRPr lang="en-US" sz="1400" dirty="0"/>
+          </a:p>
+          <a:p>
+            <a:pPr algn="l" indent="0" marL="0">
+              <a:lnSpc>
+                <a:spcPts val="2030"/>
+              </a:lnSpc>
+              <a:buNone/>
+            </a:pPr>
+            <a:r>
+              <a:rPr lang="en-US" sz="1400" dirty="0">
+                <a:solidFill>
+                  <a:srgbClr val="12374E"/>
+                </a:solidFill>
+                <a:latin typeface="Microsoft YaHei" pitchFamily="34" charset="0"/>
+                <a:ea typeface="Microsoft YaHei" pitchFamily="34" charset="-122"/>
+                <a:cs typeface="Microsoft YaHei" pitchFamily="34" charset="-120"/>
+              </a:rPr>
+              <a:t>固定数据划分</a:t>
+            </a:r>
+            <a:endParaRPr lang="en-US" sz="1400" dirty="0"/>
+          </a:p>
+        </p:txBody>
+      </p:sp>
+      <p:sp>
+        <p:nvSpPr>
+          <p:cNvPr id="38" name="Shape 34"/>
+          <p:cNvSpPr/>
+          <p:nvPr/>
+        </p:nvSpPr>
+        <p:spPr>
+          <a:xfrm>
+            <a:off x="9325689" y="2755583"/>
+            <a:ext cx="2424351" cy="599123"/>
+          </a:xfrm>
+          <a:prstGeom prst="rect">
+            <a:avLst/>
+          </a:prstGeom>
+          <a:solidFill>
+            <a:srgbClr val="FFFFFF"/>
+          </a:solidFill>
+          <a:ln w="12700">
+            <a:solidFill>
+              <a:srgbClr val="FFFFFF">
+                <a:alpha val="0"/>
+              </a:srgbClr>
+            </a:solidFill>
+            <a:prstDash val="solid"/>
+          </a:ln>
+        </p:spPr>
+      </p:sp>
+      <p:sp>
+        <p:nvSpPr>
+          <p:cNvPr id="39" name="Shape 35"/>
+          <p:cNvSpPr/>
+          <p:nvPr/>
+        </p:nvSpPr>
+        <p:spPr>
+          <a:xfrm>
+            <a:off x="9325689" y="3347085"/>
+            <a:ext cx="2424351" cy="7620"/>
+          </a:xfrm>
+          <a:prstGeom prst="rect">
+            <a:avLst/>
+          </a:prstGeom>
+          <a:solidFill>
+            <a:srgbClr val="C1D2DE"/>
+          </a:solidFill>
+          <a:ln w="12700">
+            <a:solidFill>
+              <a:srgbClr val="C1D2DE">
+                <a:alpha val="0"/>
+              </a:srgbClr>
+            </a:solidFill>
+            <a:prstDash val="solid"/>
+          </a:ln>
+        </p:spPr>
+      </p:sp>
+      <p:sp>
+        <p:nvSpPr>
+          <p:cNvPr id="40" name="Text 36"/>
+          <p:cNvSpPr/>
+          <p:nvPr/>
+        </p:nvSpPr>
+        <p:spPr>
+          <a:xfrm>
+            <a:off x="9417129" y="2797493"/>
+            <a:ext cx="2241471" cy="515303"/>
+          </a:xfrm>
+          <a:prstGeom prst="rect">
+            <a:avLst/>
+          </a:prstGeom>
+          <a:noFill/>
+          <a:ln/>
+        </p:spPr>
+        <p:txBody>
+          <a:bodyPr wrap="square" lIns="0" tIns="0" rIns="0" bIns="0" rtlCol="0" anchor="ctr"/>
+          <a:lstStyle/>
+          <a:p>
+            <a:pPr algn="l" indent="0" marL="0">
+              <a:lnSpc>
+                <a:spcPts val="2030"/>
+              </a:lnSpc>
+              <a:buNone/>
+            </a:pPr>
+            <a:r>
+              <a:rPr lang="en-US" sz="1400" dirty="0">
+                <a:solidFill>
+                  <a:srgbClr val="12374E"/>
+                </a:solidFill>
+                <a:latin typeface="Microsoft YaHei" pitchFamily="34" charset="0"/>
+                <a:ea typeface="Microsoft YaHei" pitchFamily="34" charset="-122"/>
+                <a:cs typeface="Microsoft YaHei" pitchFamily="34" charset="-120"/>
+              </a:rPr>
+              <a:t>参数清单、数据版本</a:t>
+            </a:r>
+            <a:endParaRPr lang="en-US" sz="1400" dirty="0"/>
+          </a:p>
+          <a:p>
+            <a:pPr algn="l" indent="0" marL="0">
+              <a:lnSpc>
+                <a:spcPts val="2030"/>
+              </a:lnSpc>
+              <a:buNone/>
+            </a:pPr>
+            <a:r>
+              <a:rPr lang="en-US" sz="1400" dirty="0">
+                <a:solidFill>
+                  <a:srgbClr val="12374E"/>
+                </a:solidFill>
+                <a:latin typeface="Microsoft YaHei" pitchFamily="34" charset="0"/>
+                <a:ea typeface="Microsoft YaHei" pitchFamily="34" charset="-122"/>
+                <a:cs typeface="Microsoft YaHei" pitchFamily="34" charset="-120"/>
+              </a:rPr>
+              <a:t>及可复现脚本</a:t>
+            </a:r>
+            <a:endParaRPr lang="en-US" sz="1400" dirty="0"/>
+          </a:p>
+        </p:txBody>
+      </p:sp>
+      <p:sp>
+        <p:nvSpPr>
+          <p:cNvPr id="41" name="Shape 37"/>
+          <p:cNvSpPr/>
+          <p:nvPr/>
+        </p:nvSpPr>
+        <p:spPr>
+          <a:xfrm>
+            <a:off x="6362700" y="3354705"/>
+            <a:ext cx="1023580" cy="599123"/>
+          </a:xfrm>
+          <a:prstGeom prst="rect">
+            <a:avLst/>
+          </a:prstGeom>
+          <a:solidFill>
+            <a:srgbClr val="EEF5F9"/>
+          </a:solidFill>
+          <a:ln w="12700">
+            <a:solidFill>
+              <a:srgbClr val="EEF5F9">
+                <a:alpha val="0"/>
+              </a:srgbClr>
+            </a:solidFill>
+            <a:prstDash val="solid"/>
+          </a:ln>
+        </p:spPr>
+      </p:sp>
+      <p:sp>
+        <p:nvSpPr>
+          <p:cNvPr id="42" name="Shape 38"/>
+          <p:cNvSpPr/>
+          <p:nvPr/>
+        </p:nvSpPr>
+        <p:spPr>
+          <a:xfrm>
+            <a:off x="6362700" y="3946208"/>
+            <a:ext cx="1023580" cy="7620"/>
+          </a:xfrm>
+          <a:prstGeom prst="rect">
+            <a:avLst/>
+          </a:prstGeom>
+          <a:solidFill>
+            <a:srgbClr val="C1D2DE"/>
+          </a:solidFill>
+          <a:ln w="12700">
+            <a:solidFill>
+              <a:srgbClr val="C1D2DE">
+                <a:alpha val="0"/>
+              </a:srgbClr>
+            </a:solidFill>
+            <a:prstDash val="solid"/>
+          </a:ln>
+        </p:spPr>
+      </p:sp>
+      <p:sp>
+        <p:nvSpPr>
+          <p:cNvPr id="43" name="Text 39"/>
+          <p:cNvSpPr/>
+          <p:nvPr/>
+        </p:nvSpPr>
+        <p:spPr>
+          <a:xfrm>
+            <a:off x="6454140" y="3525441"/>
+            <a:ext cx="840700" cy="257651"/>
+          </a:xfrm>
+          <a:prstGeom prst="rect">
+            <a:avLst/>
+          </a:prstGeom>
+          <a:noFill/>
+          <a:ln/>
+        </p:spPr>
+        <p:txBody>
+          <a:bodyPr wrap="square" lIns="0" tIns="0" rIns="0" bIns="0" rtlCol="0" anchor="ctr"/>
+          <a:lstStyle/>
+          <a:p>
+            <a:pPr algn="l" indent="0" marL="0">
+              <a:lnSpc>
+                <a:spcPts val="2030"/>
+              </a:lnSpc>
+              <a:buNone/>
+            </a:pPr>
+            <a:r>
+              <a:rPr lang="en-US" sz="1400" b="1" dirty="0">
+                <a:solidFill>
+                  <a:srgbClr val="12374E"/>
+                </a:solidFill>
+                <a:latin typeface="Microsoft YaHei" pitchFamily="34" charset="0"/>
+                <a:ea typeface="Microsoft YaHei" pitchFamily="34" charset="-122"/>
+                <a:cs typeface="Microsoft YaHei" pitchFamily="34" charset="-120"/>
+              </a:rPr>
+              <a:t>随后</a:t>
+            </a:r>
+            <a:endParaRPr lang="en-US" sz="1400" dirty="0"/>
+          </a:p>
+        </p:txBody>
+      </p:sp>
+      <p:sp>
+        <p:nvSpPr>
+          <p:cNvPr id="44" name="Shape 40"/>
+          <p:cNvSpPr/>
+          <p:nvPr/>
+        </p:nvSpPr>
+        <p:spPr>
+          <a:xfrm>
+            <a:off x="7386280" y="3354705"/>
+            <a:ext cx="1939409" cy="599123"/>
+          </a:xfrm>
+          <a:prstGeom prst="rect">
+            <a:avLst/>
+          </a:prstGeom>
+          <a:solidFill>
+            <a:srgbClr val="EEF5F9"/>
+          </a:solidFill>
+          <a:ln w="12700">
+            <a:solidFill>
+              <a:srgbClr val="EEF5F9">
+                <a:alpha val="0"/>
+              </a:srgbClr>
+            </a:solidFill>
+            <a:prstDash val="solid"/>
+          </a:ln>
+        </p:spPr>
+      </p:sp>
+      <p:sp>
+        <p:nvSpPr>
+          <p:cNvPr id="45" name="Shape 41"/>
+          <p:cNvSpPr/>
+          <p:nvPr/>
+        </p:nvSpPr>
+        <p:spPr>
+          <a:xfrm>
+            <a:off x="7386280" y="3946208"/>
+            <a:ext cx="1939409" cy="7620"/>
+          </a:xfrm>
+          <a:prstGeom prst="rect">
+            <a:avLst/>
+          </a:prstGeom>
+          <a:solidFill>
+            <a:srgbClr val="C1D2DE"/>
+          </a:solidFill>
+          <a:ln w="12700">
+            <a:solidFill>
+              <a:srgbClr val="C1D2DE">
+                <a:alpha val="0"/>
+              </a:srgbClr>
+            </a:solidFill>
+            <a:prstDash val="solid"/>
+          </a:ln>
+        </p:spPr>
+      </p:sp>
+      <p:sp>
+        <p:nvSpPr>
+          <p:cNvPr id="46" name="Text 42"/>
+          <p:cNvSpPr/>
+          <p:nvPr/>
+        </p:nvSpPr>
+        <p:spPr>
+          <a:xfrm>
+            <a:off x="7477720" y="3396615"/>
+            <a:ext cx="1756529" cy="515303"/>
+          </a:xfrm>
+          <a:prstGeom prst="rect">
+            <a:avLst/>
+          </a:prstGeom>
+          <a:noFill/>
+          <a:ln/>
+        </p:spPr>
+        <p:txBody>
+          <a:bodyPr wrap="square" lIns="0" tIns="0" rIns="0" bIns="0" rtlCol="0" anchor="ctr"/>
+          <a:lstStyle/>
+          <a:p>
+            <a:pPr algn="l" indent="0" marL="0">
+              <a:lnSpc>
+                <a:spcPts val="2030"/>
+              </a:lnSpc>
+              <a:buNone/>
+            </a:pPr>
+            <a:r>
+              <a:rPr lang="en-US" sz="1400" dirty="0">
+                <a:solidFill>
+                  <a:srgbClr val="12374E"/>
+                </a:solidFill>
+                <a:latin typeface="Microsoft YaHei" pitchFamily="34" charset="0"/>
+                <a:ea typeface="Microsoft YaHei" pitchFamily="34" charset="-122"/>
+                <a:cs typeface="Microsoft YaHei" pitchFamily="34" charset="-120"/>
+              </a:rPr>
+              <a:t>补充对照实验</a:t>
+            </a:r>
+            <a:endParaRPr lang="en-US" sz="1400" dirty="0"/>
+          </a:p>
+          <a:p>
+            <a:pPr algn="l" indent="0" marL="0">
+              <a:lnSpc>
+                <a:spcPts val="2030"/>
+              </a:lnSpc>
+              <a:buNone/>
+            </a:pPr>
+            <a:r>
+              <a:rPr lang="en-US" sz="1400" dirty="0">
+                <a:solidFill>
+                  <a:srgbClr val="12374E"/>
+                </a:solidFill>
+                <a:latin typeface="Microsoft YaHei" pitchFamily="34" charset="0"/>
+                <a:ea typeface="Microsoft YaHei" pitchFamily="34" charset="-122"/>
+                <a:cs typeface="Microsoft YaHei" pitchFamily="34" charset="-120"/>
+              </a:rPr>
+              <a:t>开展关键消融</a:t>
+            </a:r>
+            <a:endParaRPr lang="en-US" sz="1400" dirty="0"/>
+          </a:p>
+        </p:txBody>
+      </p:sp>
+      <p:sp>
+        <p:nvSpPr>
+          <p:cNvPr id="47" name="Shape 43"/>
+          <p:cNvSpPr/>
+          <p:nvPr/>
+        </p:nvSpPr>
+        <p:spPr>
+          <a:xfrm>
+            <a:off x="9325689" y="3354705"/>
+            <a:ext cx="2424351" cy="599123"/>
+          </a:xfrm>
+          <a:prstGeom prst="rect">
+            <a:avLst/>
+          </a:prstGeom>
+          <a:solidFill>
+            <a:srgbClr val="EEF5F9"/>
+          </a:solidFill>
+          <a:ln w="12700">
+            <a:solidFill>
+              <a:srgbClr val="EEF5F9">
+                <a:alpha val="0"/>
+              </a:srgbClr>
+            </a:solidFill>
+            <a:prstDash val="solid"/>
+          </a:ln>
+        </p:spPr>
+      </p:sp>
+      <p:sp>
+        <p:nvSpPr>
+          <p:cNvPr id="48" name="Shape 44"/>
+          <p:cNvSpPr/>
+          <p:nvPr/>
+        </p:nvSpPr>
+        <p:spPr>
+          <a:xfrm>
+            <a:off x="9325689" y="3946208"/>
+            <a:ext cx="2424351" cy="7620"/>
+          </a:xfrm>
+          <a:prstGeom prst="rect">
+            <a:avLst/>
+          </a:prstGeom>
+          <a:solidFill>
+            <a:srgbClr val="C1D2DE"/>
+          </a:solidFill>
+          <a:ln w="12700">
+            <a:solidFill>
+              <a:srgbClr val="C1D2DE">
+                <a:alpha val="0"/>
+              </a:srgbClr>
+            </a:solidFill>
+            <a:prstDash val="solid"/>
+          </a:ln>
+        </p:spPr>
+      </p:sp>
+      <p:sp>
+        <p:nvSpPr>
+          <p:cNvPr id="49" name="Text 45"/>
+          <p:cNvSpPr/>
+          <p:nvPr/>
+        </p:nvSpPr>
+        <p:spPr>
+          <a:xfrm>
+            <a:off x="9417129" y="3396615"/>
+            <a:ext cx="2241471" cy="515303"/>
+          </a:xfrm>
+          <a:prstGeom prst="rect">
+            <a:avLst/>
+          </a:prstGeom>
+          <a:noFill/>
+          <a:ln/>
+        </p:spPr>
+        <p:txBody>
+          <a:bodyPr wrap="square" lIns="0" tIns="0" rIns="0" bIns="0" rtlCol="0" anchor="ctr"/>
+          <a:lstStyle/>
+          <a:p>
+            <a:pPr algn="l" indent="0" marL="0">
+              <a:lnSpc>
+                <a:spcPts val="2030"/>
+              </a:lnSpc>
+              <a:buNone/>
+            </a:pPr>
+            <a:r>
+              <a:rPr lang="en-US" sz="1400" dirty="0">
+                <a:solidFill>
+                  <a:srgbClr val="12374E"/>
+                </a:solidFill>
+                <a:latin typeface="Microsoft YaHei" pitchFamily="34" charset="0"/>
+                <a:ea typeface="Microsoft YaHei" pitchFamily="34" charset="-122"/>
+                <a:cs typeface="Microsoft YaHei" pitchFamily="34" charset="-120"/>
+              </a:rPr>
+              <a:t>均值 ± 标准差</a:t>
+            </a:r>
+            <a:endParaRPr lang="en-US" sz="1400" dirty="0"/>
+          </a:p>
+          <a:p>
+            <a:pPr algn="l" indent="0" marL="0">
+              <a:lnSpc>
+                <a:spcPts val="2030"/>
+              </a:lnSpc>
+              <a:buNone/>
+            </a:pPr>
+            <a:r>
+              <a:rPr lang="en-US" sz="1400" dirty="0">
+                <a:solidFill>
+                  <a:srgbClr val="12374E"/>
+                </a:solidFill>
+                <a:latin typeface="Microsoft YaHei" pitchFamily="34" charset="0"/>
+                <a:ea typeface="Microsoft YaHei" pitchFamily="34" charset="-122"/>
+                <a:cs typeface="Microsoft YaHei" pitchFamily="34" charset="-120"/>
+              </a:rPr>
+              <a:t>重复次数及日志</a:t>
+            </a:r>
+            <a:endParaRPr lang="en-US" sz="1400" dirty="0"/>
+          </a:p>
+        </p:txBody>
+      </p:sp>
+      <p:sp>
+        <p:nvSpPr>
+          <p:cNvPr id="50" name="Shape 46"/>
+          <p:cNvSpPr/>
+          <p:nvPr/>
+        </p:nvSpPr>
+        <p:spPr>
+          <a:xfrm>
+            <a:off x="6362700" y="3953828"/>
+            <a:ext cx="1023580" cy="599123"/>
+          </a:xfrm>
+          <a:prstGeom prst="rect">
+            <a:avLst/>
+          </a:prstGeom>
+          <a:solidFill>
+            <a:srgbClr val="FFFFFF"/>
+          </a:solidFill>
+          <a:ln w="12700">
+            <a:solidFill>
+              <a:srgbClr val="FFFFFF">
+                <a:alpha val="0"/>
+              </a:srgbClr>
+            </a:solidFill>
+            <a:prstDash val="solid"/>
+          </a:ln>
+        </p:spPr>
+      </p:sp>
+      <p:sp>
+        <p:nvSpPr>
+          <p:cNvPr id="51" name="Shape 47"/>
+          <p:cNvSpPr/>
+          <p:nvPr/>
+        </p:nvSpPr>
+        <p:spPr>
+          <a:xfrm>
+            <a:off x="6362700" y="4545330"/>
+            <a:ext cx="1023580" cy="7620"/>
+          </a:xfrm>
+          <a:prstGeom prst="rect">
+            <a:avLst/>
+          </a:prstGeom>
+          <a:solidFill>
+            <a:srgbClr val="C1D2DE"/>
+          </a:solidFill>
+          <a:ln w="12700">
+            <a:solidFill>
+              <a:srgbClr val="C1D2DE">
+                <a:alpha val="0"/>
+              </a:srgbClr>
+            </a:solidFill>
+            <a:prstDash val="solid"/>
+          </a:ln>
+        </p:spPr>
+      </p:sp>
+      <p:sp>
+        <p:nvSpPr>
+          <p:cNvPr id="52" name="Text 48"/>
+          <p:cNvSpPr/>
+          <p:nvPr/>
+        </p:nvSpPr>
+        <p:spPr>
+          <a:xfrm>
+            <a:off x="6454140" y="4124563"/>
+            <a:ext cx="840700" cy="257651"/>
+          </a:xfrm>
+          <a:prstGeom prst="rect">
+            <a:avLst/>
+          </a:prstGeom>
+          <a:noFill/>
+          <a:ln/>
+        </p:spPr>
+        <p:txBody>
+          <a:bodyPr wrap="square" lIns="0" tIns="0" rIns="0" bIns="0" rtlCol="0" anchor="ctr"/>
+          <a:lstStyle/>
+          <a:p>
+            <a:pPr algn="l" indent="0" marL="0">
+              <a:lnSpc>
+                <a:spcPts val="2030"/>
+              </a:lnSpc>
+              <a:buNone/>
+            </a:pPr>
+            <a:r>
+              <a:rPr lang="en-US" sz="1400" b="1" dirty="0">
+                <a:solidFill>
+                  <a:srgbClr val="12374E"/>
+                </a:solidFill>
+                <a:latin typeface="Microsoft YaHei" pitchFamily="34" charset="0"/>
+                <a:ea typeface="Microsoft YaHei" pitchFamily="34" charset="-122"/>
+                <a:cs typeface="Microsoft YaHei" pitchFamily="34" charset="-120"/>
+              </a:rPr>
+              <a:t>并行</a:t>
+            </a:r>
+            <a:endParaRPr lang="en-US" sz="1400" dirty="0"/>
+          </a:p>
+        </p:txBody>
+      </p:sp>
+      <p:sp>
+        <p:nvSpPr>
+          <p:cNvPr id="53" name="Shape 49"/>
+          <p:cNvSpPr/>
+          <p:nvPr/>
+        </p:nvSpPr>
+        <p:spPr>
+          <a:xfrm>
+            <a:off x="7386280" y="3953828"/>
+            <a:ext cx="1939409" cy="599123"/>
+          </a:xfrm>
+          <a:prstGeom prst="rect">
+            <a:avLst/>
+          </a:prstGeom>
+          <a:solidFill>
+            <a:srgbClr val="FFFFFF"/>
+          </a:solidFill>
+          <a:ln w="12700">
+            <a:solidFill>
+              <a:srgbClr val="FFFFFF">
+                <a:alpha val="0"/>
+              </a:srgbClr>
+            </a:solidFill>
+            <a:prstDash val="solid"/>
+          </a:ln>
+        </p:spPr>
+      </p:sp>
+      <p:sp>
+        <p:nvSpPr>
+          <p:cNvPr id="54" name="Shape 50"/>
+          <p:cNvSpPr/>
+          <p:nvPr/>
+        </p:nvSpPr>
+        <p:spPr>
+          <a:xfrm>
+            <a:off x="7386280" y="4545330"/>
+            <a:ext cx="1939409" cy="7620"/>
+          </a:xfrm>
+          <a:prstGeom prst="rect">
+            <a:avLst/>
+          </a:prstGeom>
+          <a:solidFill>
+            <a:srgbClr val="C1D2DE"/>
+          </a:solidFill>
+          <a:ln w="12700">
+            <a:solidFill>
+              <a:srgbClr val="C1D2DE">
+                <a:alpha val="0"/>
+              </a:srgbClr>
+            </a:solidFill>
+            <a:prstDash val="solid"/>
+          </a:ln>
+        </p:spPr>
+      </p:sp>
+      <p:sp>
+        <p:nvSpPr>
+          <p:cNvPr id="55" name="Text 51"/>
+          <p:cNvSpPr/>
+          <p:nvPr/>
+        </p:nvSpPr>
+        <p:spPr>
+          <a:xfrm>
+            <a:off x="7477720" y="3995738"/>
+            <a:ext cx="1756529" cy="515303"/>
+          </a:xfrm>
+          <a:prstGeom prst="rect">
+            <a:avLst/>
+          </a:prstGeom>
+          <a:noFill/>
+          <a:ln/>
+        </p:spPr>
+        <p:txBody>
+          <a:bodyPr wrap="square" lIns="0" tIns="0" rIns="0" bIns="0" rtlCol="0" anchor="ctr"/>
+          <a:lstStyle/>
+          <a:p>
+            <a:pPr algn="l" indent="0" marL="0">
+              <a:lnSpc>
+                <a:spcPts val="2030"/>
+              </a:lnSpc>
+              <a:buNone/>
+            </a:pPr>
+            <a:r>
+              <a:rPr lang="en-US" sz="1400" dirty="0">
+                <a:solidFill>
+                  <a:srgbClr val="12374E"/>
+                </a:solidFill>
+                <a:latin typeface="Microsoft YaHei" pitchFamily="34" charset="0"/>
+                <a:ea typeface="Microsoft YaHei" pitchFamily="34" charset="-122"/>
+                <a:cs typeface="Microsoft YaHei" pitchFamily="34" charset="-120"/>
+              </a:rPr>
+              <a:t>分析异常结果</a:t>
+            </a:r>
+            <a:endParaRPr lang="en-US" sz="1400" dirty="0"/>
+          </a:p>
+          <a:p>
+            <a:pPr algn="l" indent="0" marL="0">
+              <a:lnSpc>
+                <a:spcPts val="2030"/>
+              </a:lnSpc>
+              <a:buNone/>
+            </a:pPr>
+            <a:r>
+              <a:rPr lang="en-US" sz="1400" dirty="0">
+                <a:solidFill>
+                  <a:srgbClr val="12374E"/>
+                </a:solidFill>
+                <a:latin typeface="Microsoft YaHei" pitchFamily="34" charset="0"/>
+                <a:ea typeface="Microsoft YaHei" pitchFamily="34" charset="-122"/>
+                <a:cs typeface="Microsoft YaHei" pitchFamily="34" charset="-120"/>
+              </a:rPr>
+              <a:t>归纳失败案例</a:t>
+            </a:r>
+            <a:endParaRPr lang="en-US" sz="1400" dirty="0"/>
+          </a:p>
+        </p:txBody>
+      </p:sp>
+      <p:sp>
+        <p:nvSpPr>
+          <p:cNvPr id="56" name="Shape 52"/>
+          <p:cNvSpPr/>
+          <p:nvPr/>
+        </p:nvSpPr>
+        <p:spPr>
+          <a:xfrm>
+            <a:off x="9325689" y="3953828"/>
+            <a:ext cx="2424351" cy="599123"/>
+          </a:xfrm>
+          <a:prstGeom prst="rect">
+            <a:avLst/>
+          </a:prstGeom>
+          <a:solidFill>
+            <a:srgbClr val="FFFFFF"/>
+          </a:solidFill>
+          <a:ln w="12700">
+            <a:solidFill>
+              <a:srgbClr val="FFFFFF">
+                <a:alpha val="0"/>
+              </a:srgbClr>
+            </a:solidFill>
+            <a:prstDash val="solid"/>
+          </a:ln>
+        </p:spPr>
+      </p:sp>
+      <p:sp>
+        <p:nvSpPr>
+          <p:cNvPr id="57" name="Shape 53"/>
+          <p:cNvSpPr/>
+          <p:nvPr/>
+        </p:nvSpPr>
+        <p:spPr>
+          <a:xfrm>
+            <a:off x="9325689" y="4545330"/>
+            <a:ext cx="2424351" cy="7620"/>
+          </a:xfrm>
+          <a:prstGeom prst="rect">
+            <a:avLst/>
+          </a:prstGeom>
+          <a:solidFill>
+            <a:srgbClr val="C1D2DE"/>
+          </a:solidFill>
+          <a:ln w="12700">
+            <a:solidFill>
+              <a:srgbClr val="C1D2DE">
+                <a:alpha val="0"/>
+              </a:srgbClr>
+            </a:solidFill>
+            <a:prstDash val="solid"/>
+          </a:ln>
+        </p:spPr>
+      </p:sp>
+      <p:sp>
+        <p:nvSpPr>
+          <p:cNvPr id="58" name="Text 54"/>
+          <p:cNvSpPr/>
+          <p:nvPr/>
+        </p:nvSpPr>
+        <p:spPr>
+          <a:xfrm>
+            <a:off x="9417129" y="3995738"/>
+            <a:ext cx="2241471" cy="515303"/>
+          </a:xfrm>
+          <a:prstGeom prst="rect">
+            <a:avLst/>
+          </a:prstGeom>
+          <a:noFill/>
+          <a:ln/>
+        </p:spPr>
+        <p:txBody>
+          <a:bodyPr wrap="square" lIns="0" tIns="0" rIns="0" bIns="0" rtlCol="0" anchor="ctr"/>
+          <a:lstStyle/>
+          <a:p>
+            <a:pPr algn="l" indent="0" marL="0">
+              <a:lnSpc>
+                <a:spcPts val="2030"/>
+              </a:lnSpc>
+              <a:buNone/>
+            </a:pPr>
+            <a:r>
+              <a:rPr lang="en-US" sz="1400" dirty="0">
+                <a:solidFill>
+                  <a:srgbClr val="12374E"/>
+                </a:solidFill>
+                <a:latin typeface="Microsoft YaHei" pitchFamily="34" charset="0"/>
+                <a:ea typeface="Microsoft YaHei" pitchFamily="34" charset="-122"/>
+                <a:cs typeface="Microsoft YaHei" pitchFamily="34" charset="-120"/>
+              </a:rPr>
+              <a:t>差异解释与边界条件</a:t>
+            </a:r>
+            <a:endParaRPr lang="en-US" sz="1400" dirty="0"/>
+          </a:p>
+          <a:p>
+            <a:pPr algn="l" indent="0" marL="0">
+              <a:lnSpc>
+                <a:spcPts val="2030"/>
+              </a:lnSpc>
+              <a:buNone/>
+            </a:pPr>
+            <a:r>
+              <a:rPr lang="en-US" sz="1400" dirty="0">
+                <a:solidFill>
+                  <a:srgbClr val="12374E"/>
+                </a:solidFill>
+                <a:latin typeface="Microsoft YaHei" pitchFamily="34" charset="0"/>
+                <a:ea typeface="Microsoft YaHei" pitchFamily="34" charset="-122"/>
+                <a:cs typeface="Microsoft YaHei" pitchFamily="34" charset="-120"/>
+              </a:rPr>
+              <a:t>典型样例定位</a:t>
+            </a:r>
+            <a:endParaRPr lang="en-US" sz="1400" dirty="0"/>
+          </a:p>
+        </p:txBody>
+      </p:sp>
+      <p:sp>
+        <p:nvSpPr>
+          <p:cNvPr id="59" name="Shape 55"/>
+          <p:cNvSpPr/>
+          <p:nvPr/>
+        </p:nvSpPr>
+        <p:spPr>
+          <a:xfrm>
+            <a:off x="6362700" y="4552950"/>
+            <a:ext cx="1023580" cy="599123"/>
+          </a:xfrm>
+          <a:prstGeom prst="rect">
+            <a:avLst/>
+          </a:prstGeom>
+          <a:solidFill>
+            <a:srgbClr val="EEF5F9"/>
+          </a:solidFill>
+          <a:ln w="12700">
+            <a:solidFill>
+              <a:srgbClr val="EEF5F9">
+                <a:alpha val="0"/>
+              </a:srgbClr>
+            </a:solidFill>
+            <a:prstDash val="solid"/>
+          </a:ln>
+        </p:spPr>
+      </p:sp>
+      <p:sp>
+        <p:nvSpPr>
+          <p:cNvPr id="60" name="Shape 56"/>
+          <p:cNvSpPr/>
+          <p:nvPr/>
+        </p:nvSpPr>
+        <p:spPr>
+          <a:xfrm>
+            <a:off x="6362700" y="5144453"/>
+            <a:ext cx="1023580" cy="7620"/>
+          </a:xfrm>
+          <a:prstGeom prst="rect">
+            <a:avLst/>
+          </a:prstGeom>
+          <a:solidFill>
+            <a:srgbClr val="C1D2DE"/>
+          </a:solidFill>
+          <a:ln w="12700">
+            <a:solidFill>
+              <a:srgbClr val="C1D2DE">
+                <a:alpha val="0"/>
+              </a:srgbClr>
+            </a:solidFill>
+            <a:prstDash val="solid"/>
+          </a:ln>
+        </p:spPr>
+      </p:sp>
+      <p:sp>
+        <p:nvSpPr>
+          <p:cNvPr id="61" name="Text 57"/>
+          <p:cNvSpPr/>
+          <p:nvPr/>
+        </p:nvSpPr>
+        <p:spPr>
+          <a:xfrm>
+            <a:off x="6454140" y="4723686"/>
+            <a:ext cx="840700" cy="257651"/>
+          </a:xfrm>
+          <a:prstGeom prst="rect">
+            <a:avLst/>
+          </a:prstGeom>
+          <a:noFill/>
+          <a:ln/>
+        </p:spPr>
+        <p:txBody>
+          <a:bodyPr wrap="square" lIns="0" tIns="0" rIns="0" bIns="0" rtlCol="0" anchor="ctr"/>
+          <a:lstStyle/>
+          <a:p>
+            <a:pPr algn="l" indent="0" marL="0">
+              <a:lnSpc>
+                <a:spcPts val="2030"/>
+              </a:lnSpc>
+              <a:buNone/>
+            </a:pPr>
+            <a:r>
+              <a:rPr lang="en-US" sz="1400" b="1" dirty="0">
+                <a:solidFill>
+                  <a:srgbClr val="12374E"/>
+                </a:solidFill>
+                <a:latin typeface="Microsoft YaHei" pitchFamily="34" charset="0"/>
+                <a:ea typeface="Microsoft YaHei" pitchFamily="34" charset="-122"/>
+                <a:cs typeface="Microsoft YaHei" pitchFamily="34" charset="-120"/>
+              </a:rPr>
+              <a:t>下次汇报</a:t>
+            </a:r>
+            <a:endParaRPr lang="en-US" sz="1400" dirty="0"/>
+          </a:p>
+        </p:txBody>
+      </p:sp>
+      <p:sp>
+        <p:nvSpPr>
+          <p:cNvPr id="62" name="Shape 58"/>
+          <p:cNvSpPr/>
+          <p:nvPr/>
+        </p:nvSpPr>
+        <p:spPr>
+          <a:xfrm>
+            <a:off x="7386280" y="4552950"/>
+            <a:ext cx="1939409" cy="599123"/>
+          </a:xfrm>
+          <a:prstGeom prst="rect">
+            <a:avLst/>
+          </a:prstGeom>
+          <a:solidFill>
+            <a:srgbClr val="EEF5F9"/>
+          </a:solidFill>
+          <a:ln w="12700">
+            <a:solidFill>
+              <a:srgbClr val="EEF5F9">
+                <a:alpha val="0"/>
+              </a:srgbClr>
+            </a:solidFill>
+            <a:prstDash val="solid"/>
+          </a:ln>
+        </p:spPr>
+      </p:sp>
+      <p:sp>
+        <p:nvSpPr>
+          <p:cNvPr id="63" name="Shape 59"/>
+          <p:cNvSpPr/>
+          <p:nvPr/>
+        </p:nvSpPr>
+        <p:spPr>
+          <a:xfrm>
+            <a:off x="7386280" y="5144453"/>
+            <a:ext cx="1939409" cy="7620"/>
+          </a:xfrm>
+          <a:prstGeom prst="rect">
+            <a:avLst/>
+          </a:prstGeom>
+          <a:solidFill>
+            <a:srgbClr val="C1D2DE"/>
+          </a:solidFill>
+          <a:ln w="12700">
+            <a:solidFill>
+              <a:srgbClr val="C1D2DE">
+                <a:alpha val="0"/>
+              </a:srgbClr>
+            </a:solidFill>
+            <a:prstDash val="solid"/>
+          </a:ln>
+        </p:spPr>
+      </p:sp>
+      <p:sp>
+        <p:nvSpPr>
+          <p:cNvPr id="64" name="Text 60"/>
+          <p:cNvSpPr/>
+          <p:nvPr/>
+        </p:nvSpPr>
+        <p:spPr>
+          <a:xfrm>
+            <a:off x="7477720" y="4594860"/>
+            <a:ext cx="1756529" cy="515303"/>
+          </a:xfrm>
+          <a:prstGeom prst="rect">
+            <a:avLst/>
+          </a:prstGeom>
+          <a:noFill/>
+          <a:ln/>
+        </p:spPr>
+        <p:txBody>
+          <a:bodyPr wrap="square" lIns="0" tIns="0" rIns="0" bIns="0" rtlCol="0" anchor="ctr"/>
+          <a:lstStyle/>
+          <a:p>
+            <a:pPr algn="l" indent="0" marL="0">
+              <a:lnSpc>
+                <a:spcPts val="2030"/>
+              </a:lnSpc>
+              <a:buNone/>
+            </a:pPr>
+            <a:r>
+              <a:rPr lang="en-US" sz="1400" dirty="0">
+                <a:solidFill>
+                  <a:srgbClr val="12374E"/>
+                </a:solidFill>
+                <a:latin typeface="Microsoft YaHei" pitchFamily="34" charset="0"/>
+                <a:ea typeface="Microsoft YaHei" pitchFamily="34" charset="-122"/>
+                <a:cs typeface="Microsoft YaHei" pitchFamily="34" charset="-120"/>
+              </a:rPr>
+              <a:t>汇总新增证据</a:t>
+            </a:r>
+            <a:endParaRPr lang="en-US" sz="1400" dirty="0"/>
+          </a:p>
+          <a:p>
+            <a:pPr algn="l" indent="0" marL="0">
+              <a:lnSpc>
+                <a:spcPts val="2030"/>
+              </a:lnSpc>
+              <a:buNone/>
+            </a:pPr>
+            <a:r>
+              <a:rPr lang="en-US" sz="1400" dirty="0">
+                <a:solidFill>
+                  <a:srgbClr val="12374E"/>
+                </a:solidFill>
+                <a:latin typeface="Microsoft YaHei" pitchFamily="34" charset="0"/>
+                <a:ea typeface="Microsoft YaHei" pitchFamily="34" charset="-122"/>
+                <a:cs typeface="Microsoft YaHei" pitchFamily="34" charset="-120"/>
+              </a:rPr>
+              <a:t>逐项回应问题</a:t>
+            </a:r>
+            <a:endParaRPr lang="en-US" sz="1400" dirty="0"/>
+          </a:p>
+        </p:txBody>
+      </p:sp>
+      <p:sp>
+        <p:nvSpPr>
+          <p:cNvPr id="65" name="Shape 61"/>
+          <p:cNvSpPr/>
+          <p:nvPr/>
+        </p:nvSpPr>
+        <p:spPr>
+          <a:xfrm>
+            <a:off x="9325689" y="4552950"/>
+            <a:ext cx="2424351" cy="599123"/>
+          </a:xfrm>
+          <a:prstGeom prst="rect">
+            <a:avLst/>
+          </a:prstGeom>
+          <a:solidFill>
+            <a:srgbClr val="EEF5F9"/>
+          </a:solidFill>
+          <a:ln w="12700">
+            <a:solidFill>
+              <a:srgbClr val="EEF5F9">
+                <a:alpha val="0"/>
+              </a:srgbClr>
+            </a:solidFill>
+            <a:prstDash val="solid"/>
+          </a:ln>
+        </p:spPr>
+      </p:sp>
+      <p:sp>
+        <p:nvSpPr>
+          <p:cNvPr id="66" name="Shape 62"/>
+          <p:cNvSpPr/>
+          <p:nvPr/>
+        </p:nvSpPr>
+        <p:spPr>
+          <a:xfrm>
+            <a:off x="9325689" y="5144453"/>
+            <a:ext cx="2424351" cy="7620"/>
+          </a:xfrm>
+          <a:prstGeom prst="rect">
+            <a:avLst/>
+          </a:prstGeom>
+          <a:solidFill>
+            <a:srgbClr val="C1D2DE"/>
+          </a:solidFill>
+          <a:ln w="12700">
+            <a:solidFill>
+              <a:srgbClr val="C1D2DE">
+                <a:alpha val="0"/>
+              </a:srgbClr>
+            </a:solidFill>
+            <a:prstDash val="solid"/>
+          </a:ln>
+        </p:spPr>
+      </p:sp>
+      <p:sp>
+        <p:nvSpPr>
+          <p:cNvPr id="67" name="Text 63"/>
+          <p:cNvSpPr/>
+          <p:nvPr/>
+        </p:nvSpPr>
+        <p:spPr>
+          <a:xfrm>
+            <a:off x="9417129" y="4594860"/>
+            <a:ext cx="2241471" cy="515303"/>
+          </a:xfrm>
+          <a:prstGeom prst="rect">
+            <a:avLst/>
+          </a:prstGeom>
+          <a:noFill/>
+          <a:ln/>
+        </p:spPr>
+        <p:txBody>
+          <a:bodyPr wrap="square" lIns="0" tIns="0" rIns="0" bIns="0" rtlCol="0" anchor="ctr"/>
+          <a:lstStyle/>
+          <a:p>
+            <a:pPr algn="l" indent="0" marL="0">
+              <a:lnSpc>
+                <a:spcPts val="2030"/>
+              </a:lnSpc>
+              <a:buNone/>
+            </a:pPr>
+            <a:r>
+              <a:rPr lang="en-US" sz="1400" dirty="0">
+                <a:solidFill>
+                  <a:srgbClr val="12374E"/>
+                </a:solidFill>
+                <a:latin typeface="Microsoft YaHei" pitchFamily="34" charset="0"/>
+                <a:ea typeface="Microsoft YaHei" pitchFamily="34" charset="-122"/>
+                <a:cs typeface="Microsoft YaHei" pitchFamily="34" charset="-120"/>
+              </a:rPr>
+              <a:t>更新图表与问题清单</a:t>
+            </a:r>
+            <a:endParaRPr lang="en-US" sz="1400" dirty="0"/>
+          </a:p>
+          <a:p>
+            <a:pPr algn="l" indent="0" marL="0">
+              <a:lnSpc>
+                <a:spcPts val="2030"/>
+              </a:lnSpc>
+              <a:buNone/>
+            </a:pPr>
+            <a:r>
+              <a:rPr lang="en-US" sz="1400" dirty="0">
+                <a:solidFill>
+                  <a:srgbClr val="12374E"/>
+                </a:solidFill>
+                <a:latin typeface="Microsoft YaHei" pitchFamily="34" charset="0"/>
+                <a:ea typeface="Microsoft YaHei" pitchFamily="34" charset="-122"/>
+                <a:cs typeface="Microsoft YaHei" pitchFamily="34" charset="-120"/>
+              </a:rPr>
+              <a:t>修订研究结论</a:t>
+            </a:r>
+            <a:endParaRPr lang="en-US" sz="1400" dirty="0"/>
+          </a:p>
+        </p:txBody>
+      </p:sp>
+      <p:sp>
+        <p:nvSpPr>
+          <p:cNvPr id="68" name="Shape 64"/>
+          <p:cNvSpPr/>
+          <p:nvPr/>
+        </p:nvSpPr>
+        <p:spPr>
+          <a:xfrm>
+            <a:off x="6355080" y="5273040"/>
+            <a:ext cx="5394960" cy="899160"/>
+          </a:xfrm>
+          <a:prstGeom prst="rect">
+            <a:avLst/>
+          </a:prstGeom>
+          <a:solidFill>
+            <a:srgbClr val="EEF5F9"/>
+          </a:solidFill>
+          <a:ln w="12700">
+            <a:solidFill>
+              <a:srgbClr val="EEF5F9">
+                <a:alpha val="0"/>
+              </a:srgbClr>
+            </a:solidFill>
+            <a:prstDash val="solid"/>
+          </a:ln>
+        </p:spPr>
+      </p:sp>
+      <p:sp>
+        <p:nvSpPr>
+          <p:cNvPr id="69" name="Shape 65"/>
+          <p:cNvSpPr/>
+          <p:nvPr/>
+        </p:nvSpPr>
+        <p:spPr>
+          <a:xfrm>
+            <a:off x="6355080" y="5273040"/>
+            <a:ext cx="45720" cy="899160"/>
+          </a:xfrm>
+          <a:prstGeom prst="rect">
+            <a:avLst/>
+          </a:prstGeom>
+          <a:solidFill>
+            <a:srgbClr val="005B94"/>
+          </a:solidFill>
+          <a:ln w="12700">
+            <a:solidFill>
+              <a:srgbClr val="005B94">
+                <a:alpha val="0"/>
+              </a:srgbClr>
+            </a:solidFill>
+            <a:prstDash val="solid"/>
+          </a:ln>
+        </p:spPr>
+      </p:sp>
+      <p:sp>
+        <p:nvSpPr>
+          <p:cNvPr id="70" name="Text 66"/>
+          <p:cNvSpPr/>
+          <p:nvPr/>
+        </p:nvSpPr>
+        <p:spPr>
+          <a:xfrm>
+            <a:off x="6477000" y="5389840"/>
+            <a:ext cx="5151120" cy="294680"/>
+          </a:xfrm>
+          <a:prstGeom prst="rect">
+            <a:avLst/>
+          </a:prstGeom>
+          <a:noFill/>
+          <a:ln/>
+        </p:spPr>
+        <p:txBody>
+          <a:bodyPr wrap="square" lIns="0" tIns="0" rIns="0" bIns="0" rtlCol="0" anchor="ctr"/>
+          <a:lstStyle/>
+          <a:p>
+            <a:pPr algn="just" indent="0" marL="0">
+              <a:lnSpc>
+                <a:spcPts val="2320"/>
               </a:lnSpc>
               <a:buNone/>
             </a:pPr>
@@ -28577,7 +30750,7 @@
                 <a:ea typeface="Microsoft YaHei" pitchFamily="34" charset="-122"/>
                 <a:cs typeface="Microsoft YaHei" pitchFamily="34" charset="-120"/>
               </a:rPr>
-              <a:t>关联对应图表，写明结论适用的场景与条件；初步观察需标明尚待复核。</a:t>
+              <a:t>本次讨论：确认实验优先级和验收标准。</a:t>
             </a:r>
             <a:endParaRPr lang="en-US" sz="1600" dirty="0"/>
           </a:p>
@@ -28585,14 +30758,56 @@
       </p:sp>
       <p:sp>
         <p:nvSpPr>
-          <p:cNvPr id="13" name="Text 9"/>
-          <p:cNvSpPr/>
-          <p:nvPr/>
-        </p:nvSpPr>
-        <p:spPr>
-          <a:xfrm>
-            <a:off x="922020" y="5088969"/>
-            <a:ext cx="4892040" cy="308610"/>
+          <p:cNvPr id="71" name="Text 67"/>
+          <p:cNvSpPr/>
+          <p:nvPr/>
+        </p:nvSpPr>
+        <p:spPr>
+          <a:xfrm>
+            <a:off x="6477000" y="5760720"/>
+            <a:ext cx="5151120" cy="294680"/>
+          </a:xfrm>
+          <a:prstGeom prst="rect">
+            <a:avLst/>
+          </a:prstGeom>
+          <a:noFill/>
+          <a:ln/>
+        </p:spPr>
+        <p:txBody>
+          <a:bodyPr wrap="square" lIns="0" tIns="0" rIns="0" bIns="0" rtlCol="0" anchor="ctr"/>
+          <a:lstStyle/>
+          <a:p>
+            <a:pPr algn="just" indent="0" marL="0">
+              <a:lnSpc>
+                <a:spcPts val="2320"/>
+              </a:lnSpc>
+              <a:buNone/>
+            </a:pPr>
+            <a:r>
+              <a:rPr lang="en-US" sz="1600" dirty="0">
+                <a:solidFill>
+                  <a:srgbClr val="12374E"/>
+                </a:solidFill>
+                <a:latin typeface="Microsoft YaHei" pitchFamily="34" charset="0"/>
+                <a:ea typeface="Microsoft YaHei" pitchFamily="34" charset="-122"/>
+                <a:cs typeface="Microsoft YaHei" pitchFamily="34" charset="-120"/>
+              </a:rPr>
+              <a:t>各阶段时间按实际进展填写。</a:t>
+            </a:r>
+            <a:endParaRPr lang="en-US" sz="1600" dirty="0"/>
+          </a:p>
+        </p:txBody>
+      </p:sp>
+      <p:sp>
+        <p:nvSpPr>
+          <p:cNvPr id="72" name="Text 68"/>
+          <p:cNvSpPr/>
+          <p:nvPr/>
+        </p:nvSpPr>
+        <p:spPr>
+          <a:xfrm>
+            <a:off x="441960" y="6485334"/>
+            <a:ext cx="2971800" cy="181332"/>
           </a:xfrm>
           <a:prstGeom prst="rect">
             <a:avLst/>
@@ -28606,35 +30821,77 @@
           <a:p>
             <a:pPr algn="l" indent="0" marL="0">
               <a:lnSpc>
-                <a:spcPts val="2430"/>
-              </a:lnSpc>
-              <a:buNone/>
-            </a:pPr>
-            <a:r>
-              <a:rPr lang="en-US" sz="1800" b="1" dirty="0">
-                <a:solidFill>
-                  <a:srgbClr val="005B94"/>
-                </a:solidFill>
-                <a:latin typeface="Microsoft YaHei" pitchFamily="34" charset="0"/>
-                <a:ea typeface="Microsoft YaHei" pitchFamily="34" charset="-122"/>
-                <a:cs typeface="Microsoft YaHei" pitchFamily="34" charset="-120"/>
-              </a:rPr>
-              <a:t>仍待解决的问题</a:t>
-            </a:r>
-            <a:endParaRPr lang="en-US" sz="1800" dirty="0"/>
-          </a:p>
-        </p:txBody>
-      </p:sp>
-      <p:sp>
-        <p:nvSpPr>
-          <p:cNvPr id="14" name="Text 10"/>
-          <p:cNvSpPr/>
-          <p:nvPr/>
-        </p:nvSpPr>
-        <p:spPr>
-          <a:xfrm>
-            <a:off x="922020" y="5458539"/>
-            <a:ext cx="4892040" cy="609600"/>
+                <a:spcPts val="1428"/>
+              </a:lnSpc>
+              <a:buNone/>
+            </a:pPr>
+            <a:r>
+              <a:rPr lang="en-US" sz="1020" dirty="0">
+                <a:solidFill>
+                  <a:srgbClr val="617B8B"/>
+                </a:solidFill>
+                <a:latin typeface="Microsoft YaHei" pitchFamily="34" charset="0"/>
+                <a:ea typeface="Microsoft YaHei" pitchFamily="34" charset="-122"/>
+                <a:cs typeface="Microsoft YaHei" pitchFamily="34" charset="-120"/>
+              </a:rPr>
+              <a:t>北京科技大学 · 科研汇报模板</a:t>
+            </a:r>
+            <a:endParaRPr lang="en-US" sz="1020" dirty="0"/>
+          </a:p>
+        </p:txBody>
+      </p:sp>
+      <p:sp>
+        <p:nvSpPr>
+          <p:cNvPr id="73" name="Text 69"/>
+          <p:cNvSpPr/>
+          <p:nvPr/>
+        </p:nvSpPr>
+        <p:spPr>
+          <a:xfrm>
+            <a:off x="3596640" y="6485334"/>
+            <a:ext cx="7534632" cy="181332"/>
+          </a:xfrm>
+          <a:prstGeom prst="rect">
+            <a:avLst/>
+          </a:prstGeom>
+          <a:noFill/>
+          <a:ln/>
+        </p:spPr>
+        <p:txBody>
+          <a:bodyPr wrap="square" lIns="0" tIns="0" rIns="0" bIns="0" rtlCol="0" anchor="ctr"/>
+          <a:lstStyle/>
+          <a:p>
+            <a:pPr algn="r" indent="0" marL="0">
+              <a:lnSpc>
+                <a:spcPts val="1428"/>
+              </a:lnSpc>
+              <a:buNone/>
+            </a:pPr>
+            <a:r>
+              <a:rPr lang="en-US" sz="1020" dirty="0">
+                <a:solidFill>
+                  <a:srgbClr val="617B8B"/>
+                </a:solidFill>
+                <a:latin typeface="Microsoft YaHei" pitchFamily="34" charset="0"/>
+                <a:ea typeface="Microsoft YaHei" pitchFamily="34" charset="-122"/>
+                <a:cs typeface="Microsoft YaHei" pitchFamily="34" charset="-120"/>
+              </a:rPr>
+              <a:t>阶段总结与任务安排示例，以实际工作记录为准</a:t>
+            </a:r>
+            <a:endParaRPr lang="en-US" sz="1020" dirty="0"/>
+          </a:p>
+        </p:txBody>
+      </p:sp>
+      <p:sp>
+        <p:nvSpPr>
+          <p:cNvPr id="74" name="Text 70"/>
+          <p:cNvSpPr/>
+          <p:nvPr/>
+        </p:nvSpPr>
+        <p:spPr>
+          <a:xfrm>
+            <a:off x="11314152" y="6485334"/>
+            <a:ext cx="435888" cy="181332"/>
           </a:xfrm>
           <a:prstGeom prst="rect">
             <a:avLst/>
@@ -28648,848 +30905,6 @@
           <a:p>
             <a:pPr algn="l" indent="0" marL="0">
               <a:lnSpc>
-                <a:spcPts val="2400"/>
-              </a:lnSpc>
-              <a:buNone/>
-            </a:pPr>
-            <a:r>
-              <a:rPr lang="en-US" sz="1600" dirty="0">
-                <a:solidFill>
-                  <a:srgbClr val="12374E"/>
-                </a:solidFill>
-                <a:latin typeface="Microsoft YaHei" pitchFamily="34" charset="0"/>
-                <a:ea typeface="Microsoft YaHei" pitchFamily="34" charset="-122"/>
-                <a:cs typeface="Microsoft YaHei" pitchFamily="34" charset="-120"/>
-              </a:rPr>
-              <a:t>指出未覆盖的场景、失败情形及主要限制，说明其对当前判断的影响。</a:t>
-            </a:r>
-            <a:endParaRPr lang="en-US" sz="1600" dirty="0"/>
-          </a:p>
-        </p:txBody>
-      </p:sp>
-      <p:sp>
-        <p:nvSpPr>
-          <p:cNvPr id="15" name="Text 11"/>
-          <p:cNvSpPr/>
-          <p:nvPr/>
-        </p:nvSpPr>
-        <p:spPr>
-          <a:xfrm>
-            <a:off x="6499860" y="1945600"/>
-            <a:ext cx="5250180" cy="330041"/>
-          </a:xfrm>
-          <a:prstGeom prst="rect">
-            <a:avLst/>
-          </a:prstGeom>
-          <a:noFill/>
-          <a:ln/>
-        </p:spPr>
-        <p:txBody>
-          <a:bodyPr wrap="square" lIns="0" tIns="0" rIns="0" bIns="0" rtlCol="0" anchor="ctr"/>
-          <a:lstStyle/>
-          <a:p>
-            <a:pPr algn="l" indent="0" marL="0">
-              <a:lnSpc>
-                <a:spcPts val="2600"/>
-              </a:lnSpc>
-              <a:buNone/>
-            </a:pPr>
-            <a:r>
-              <a:rPr lang="en-US" sz="2000" b="1" dirty="0">
-                <a:solidFill>
-                  <a:srgbClr val="005B94"/>
-                </a:solidFill>
-                <a:latin typeface="Microsoft YaHei" pitchFamily="34" charset="0"/>
-                <a:ea typeface="Microsoft YaHei" pitchFamily="34" charset="-122"/>
-                <a:cs typeface="Microsoft YaHei" pitchFamily="34" charset="-120"/>
-              </a:rPr>
-              <a:t>下一步计划</a:t>
-            </a:r>
-            <a:endParaRPr lang="en-US" sz="2000" dirty="0"/>
-          </a:p>
-        </p:txBody>
-      </p:sp>
-      <p:sp>
-        <p:nvSpPr>
-          <p:cNvPr id="16" name="Text 12"/>
-          <p:cNvSpPr/>
-          <p:nvPr/>
-        </p:nvSpPr>
-        <p:spPr>
-          <a:xfrm>
-            <a:off x="6591300" y="2841903"/>
-            <a:ext cx="814626" cy="522923"/>
-          </a:xfrm>
-          <a:prstGeom prst="rect">
-            <a:avLst/>
-          </a:prstGeom>
-          <a:noFill/>
-          <a:ln/>
-        </p:spPr>
-        <p:txBody>
-          <a:bodyPr wrap="square" lIns="0" tIns="0" rIns="0" bIns="0" rtlCol="0" anchor="ctr"/>
-          <a:lstStyle/>
-          <a:p>
-            <a:pPr algn="l" indent="0" marL="0">
-              <a:lnSpc>
-                <a:spcPts val="2030"/>
-              </a:lnSpc>
-              <a:buNone/>
-            </a:pPr>
-            <a:r>
-              <a:rPr lang="en-US" sz="1400" b="1" dirty="0">
-                <a:solidFill>
-                  <a:srgbClr val="12374E"/>
-                </a:solidFill>
-                <a:latin typeface="Microsoft YaHei" pitchFamily="34" charset="0"/>
-                <a:ea typeface="Microsoft YaHei" pitchFamily="34" charset="-122"/>
-                <a:cs typeface="Microsoft YaHei" pitchFamily="34" charset="-120"/>
-              </a:rPr>
-              <a:t>近期</a:t>
-            </a:r>
-            <a:endParaRPr lang="en-US" sz="1400" dirty="0"/>
-          </a:p>
-        </p:txBody>
-      </p:sp>
-      <p:sp>
-        <p:nvSpPr>
-          <p:cNvPr id="17" name="Text 13"/>
-          <p:cNvSpPr/>
-          <p:nvPr/>
-        </p:nvSpPr>
-        <p:spPr>
-          <a:xfrm>
-            <a:off x="7588806" y="2841903"/>
-            <a:ext cx="1707118" cy="522923"/>
-          </a:xfrm>
-          <a:prstGeom prst="rect">
-            <a:avLst/>
-          </a:prstGeom>
-          <a:noFill/>
-          <a:ln/>
-        </p:spPr>
-        <p:txBody>
-          <a:bodyPr wrap="square" lIns="0" tIns="0" rIns="0" bIns="0" rtlCol="0" anchor="ctr"/>
-          <a:lstStyle/>
-          <a:p>
-            <a:pPr algn="l" indent="0" marL="0">
-              <a:lnSpc>
-                <a:spcPts val="2030"/>
-              </a:lnSpc>
-              <a:buNone/>
-            </a:pPr>
-            <a:r>
-              <a:rPr lang="en-US" sz="1400" dirty="0">
-                <a:solidFill>
-                  <a:srgbClr val="12374E"/>
-                </a:solidFill>
-                <a:latin typeface="Microsoft YaHei" pitchFamily="34" charset="0"/>
-                <a:ea typeface="Microsoft YaHei" pitchFamily="34" charset="-122"/>
-                <a:cs typeface="Microsoft YaHei" pitchFamily="34" charset="-120"/>
-              </a:rPr>
-              <a:t>统一实验设置</a:t>
-            </a:r>
-            <a:endParaRPr lang="en-US" sz="1400" dirty="0"/>
-          </a:p>
-          <a:p>
-            <a:pPr algn="l" indent="0" marL="0">
-              <a:lnSpc>
-                <a:spcPts val="2030"/>
-              </a:lnSpc>
-              <a:buNone/>
-            </a:pPr>
-            <a:r>
-              <a:rPr lang="en-US" sz="1400" dirty="0">
-                <a:solidFill>
-                  <a:srgbClr val="12374E"/>
-                </a:solidFill>
-                <a:latin typeface="Microsoft YaHei" pitchFamily="34" charset="0"/>
-                <a:ea typeface="Microsoft YaHei" pitchFamily="34" charset="-122"/>
-                <a:cs typeface="Microsoft YaHei" pitchFamily="34" charset="-120"/>
-              </a:rPr>
-              <a:t>固定数据划分</a:t>
-            </a:r>
-            <a:endParaRPr lang="en-US" sz="1400" dirty="0"/>
-          </a:p>
-        </p:txBody>
-      </p:sp>
-      <p:sp>
-        <p:nvSpPr>
-          <p:cNvPr id="18" name="Text 14"/>
-          <p:cNvSpPr/>
-          <p:nvPr/>
-        </p:nvSpPr>
-        <p:spPr>
-          <a:xfrm>
-            <a:off x="9478804" y="2841903"/>
-            <a:ext cx="2179796" cy="522923"/>
-          </a:xfrm>
-          <a:prstGeom prst="rect">
-            <a:avLst/>
-          </a:prstGeom>
-          <a:noFill/>
-          <a:ln/>
-        </p:spPr>
-        <p:txBody>
-          <a:bodyPr wrap="square" lIns="0" tIns="0" rIns="0" bIns="0" rtlCol="0" anchor="ctr"/>
-          <a:lstStyle/>
-          <a:p>
-            <a:pPr algn="l" indent="0" marL="0">
-              <a:lnSpc>
-                <a:spcPts val="2030"/>
-              </a:lnSpc>
-              <a:buNone/>
-            </a:pPr>
-            <a:r>
-              <a:rPr lang="en-US" sz="1400" dirty="0">
-                <a:solidFill>
-                  <a:srgbClr val="12374E"/>
-                </a:solidFill>
-                <a:latin typeface="Microsoft YaHei" pitchFamily="34" charset="0"/>
-                <a:ea typeface="Microsoft YaHei" pitchFamily="34" charset="-122"/>
-                <a:cs typeface="Microsoft YaHei" pitchFamily="34" charset="-120"/>
-              </a:rPr>
-              <a:t>参数清单、数据版本</a:t>
-            </a:r>
-            <a:endParaRPr lang="en-US" sz="1400" dirty="0"/>
-          </a:p>
-          <a:p>
-            <a:pPr algn="l" indent="0" marL="0">
-              <a:lnSpc>
-                <a:spcPts val="2030"/>
-              </a:lnSpc>
-              <a:buNone/>
-            </a:pPr>
-            <a:r>
-              <a:rPr lang="en-US" sz="1400" dirty="0">
-                <a:solidFill>
-                  <a:srgbClr val="12374E"/>
-                </a:solidFill>
-                <a:latin typeface="Microsoft YaHei" pitchFamily="34" charset="0"/>
-                <a:ea typeface="Microsoft YaHei" pitchFamily="34" charset="-122"/>
-                <a:cs typeface="Microsoft YaHei" pitchFamily="34" charset="-120"/>
-              </a:rPr>
-              <a:t>及可复现的实验脚本</a:t>
-            </a:r>
-            <a:endParaRPr lang="en-US" sz="1400" dirty="0"/>
-          </a:p>
-        </p:txBody>
-      </p:sp>
-      <p:sp>
-        <p:nvSpPr>
-          <p:cNvPr id="19" name="Text 15"/>
-          <p:cNvSpPr/>
-          <p:nvPr/>
-        </p:nvSpPr>
-        <p:spPr>
-          <a:xfrm>
-            <a:off x="6591300" y="3486745"/>
-            <a:ext cx="814626" cy="522923"/>
-          </a:xfrm>
-          <a:prstGeom prst="rect">
-            <a:avLst/>
-          </a:prstGeom>
-          <a:noFill/>
-          <a:ln/>
-        </p:spPr>
-        <p:txBody>
-          <a:bodyPr wrap="square" lIns="0" tIns="0" rIns="0" bIns="0" rtlCol="0" anchor="ctr"/>
-          <a:lstStyle/>
-          <a:p>
-            <a:pPr algn="l" indent="0" marL="0">
-              <a:lnSpc>
-                <a:spcPts val="2030"/>
-              </a:lnSpc>
-              <a:buNone/>
-            </a:pPr>
-            <a:r>
-              <a:rPr lang="en-US" sz="1400" b="1" dirty="0">
-                <a:solidFill>
-                  <a:srgbClr val="12374E"/>
-                </a:solidFill>
-                <a:latin typeface="Microsoft YaHei" pitchFamily="34" charset="0"/>
-                <a:ea typeface="Microsoft YaHei" pitchFamily="34" charset="-122"/>
-                <a:cs typeface="Microsoft YaHei" pitchFamily="34" charset="-120"/>
-              </a:rPr>
-              <a:t>随后</a:t>
-            </a:r>
-            <a:endParaRPr lang="en-US" sz="1400" dirty="0"/>
-          </a:p>
-        </p:txBody>
-      </p:sp>
-      <p:sp>
-        <p:nvSpPr>
-          <p:cNvPr id="20" name="Text 16"/>
-          <p:cNvSpPr/>
-          <p:nvPr/>
-        </p:nvSpPr>
-        <p:spPr>
-          <a:xfrm>
-            <a:off x="7588806" y="3486745"/>
-            <a:ext cx="1707118" cy="522923"/>
-          </a:xfrm>
-          <a:prstGeom prst="rect">
-            <a:avLst/>
-          </a:prstGeom>
-          <a:noFill/>
-          <a:ln/>
-        </p:spPr>
-        <p:txBody>
-          <a:bodyPr wrap="square" lIns="0" tIns="0" rIns="0" bIns="0" rtlCol="0" anchor="ctr"/>
-          <a:lstStyle/>
-          <a:p>
-            <a:pPr algn="l" indent="0" marL="0">
-              <a:lnSpc>
-                <a:spcPts val="2030"/>
-              </a:lnSpc>
-              <a:buNone/>
-            </a:pPr>
-            <a:r>
-              <a:rPr lang="en-US" sz="1400" dirty="0">
-                <a:solidFill>
-                  <a:srgbClr val="12374E"/>
-                </a:solidFill>
-                <a:latin typeface="Microsoft YaHei" pitchFamily="34" charset="0"/>
-                <a:ea typeface="Microsoft YaHei" pitchFamily="34" charset="-122"/>
-                <a:cs typeface="Microsoft YaHei" pitchFamily="34" charset="-120"/>
-              </a:rPr>
-              <a:t>补充对照实验</a:t>
-            </a:r>
-            <a:endParaRPr lang="en-US" sz="1400" dirty="0"/>
-          </a:p>
-          <a:p>
-            <a:pPr algn="l" indent="0" marL="0">
-              <a:lnSpc>
-                <a:spcPts val="2030"/>
-              </a:lnSpc>
-              <a:buNone/>
-            </a:pPr>
-            <a:r>
-              <a:rPr lang="en-US" sz="1400" dirty="0">
-                <a:solidFill>
-                  <a:srgbClr val="12374E"/>
-                </a:solidFill>
-                <a:latin typeface="Microsoft YaHei" pitchFamily="34" charset="0"/>
-                <a:ea typeface="Microsoft YaHei" pitchFamily="34" charset="-122"/>
-                <a:cs typeface="Microsoft YaHei" pitchFamily="34" charset="-120"/>
-              </a:rPr>
-              <a:t>开展关键消融</a:t>
-            </a:r>
-            <a:endParaRPr lang="en-US" sz="1400" dirty="0"/>
-          </a:p>
-        </p:txBody>
-      </p:sp>
-      <p:sp>
-        <p:nvSpPr>
-          <p:cNvPr id="21" name="Text 17"/>
-          <p:cNvSpPr/>
-          <p:nvPr/>
-        </p:nvSpPr>
-        <p:spPr>
-          <a:xfrm>
-            <a:off x="9478804" y="3486745"/>
-            <a:ext cx="2179796" cy="522923"/>
-          </a:xfrm>
-          <a:prstGeom prst="rect">
-            <a:avLst/>
-          </a:prstGeom>
-          <a:noFill/>
-          <a:ln/>
-        </p:spPr>
-        <p:txBody>
-          <a:bodyPr wrap="square" lIns="0" tIns="0" rIns="0" bIns="0" rtlCol="0" anchor="ctr"/>
-          <a:lstStyle/>
-          <a:p>
-            <a:pPr algn="l" indent="0" marL="0">
-              <a:lnSpc>
-                <a:spcPts val="2030"/>
-              </a:lnSpc>
-              <a:buNone/>
-            </a:pPr>
-            <a:r>
-              <a:rPr lang="en-US" sz="1400" dirty="0">
-                <a:solidFill>
-                  <a:srgbClr val="12374E"/>
-                </a:solidFill>
-                <a:latin typeface="Microsoft YaHei" pitchFamily="34" charset="0"/>
-                <a:ea typeface="Microsoft YaHei" pitchFamily="34" charset="-122"/>
-                <a:cs typeface="Microsoft YaHei" pitchFamily="34" charset="-120"/>
-              </a:rPr>
-              <a:t>均值 ± 标准差</a:t>
-            </a:r>
-            <a:endParaRPr lang="en-US" sz="1400" dirty="0"/>
-          </a:p>
-          <a:p>
-            <a:pPr algn="l" indent="0" marL="0">
-              <a:lnSpc>
-                <a:spcPts val="2030"/>
-              </a:lnSpc>
-              <a:buNone/>
-            </a:pPr>
-            <a:r>
-              <a:rPr lang="en-US" sz="1400" dirty="0">
-                <a:solidFill>
-                  <a:srgbClr val="12374E"/>
-                </a:solidFill>
-                <a:latin typeface="Microsoft YaHei" pitchFamily="34" charset="0"/>
-                <a:ea typeface="Microsoft YaHei" pitchFamily="34" charset="-122"/>
-                <a:cs typeface="Microsoft YaHei" pitchFamily="34" charset="-120"/>
-              </a:rPr>
-              <a:t>重复次数及原始日志</a:t>
-            </a:r>
-            <a:endParaRPr lang="en-US" sz="1400" dirty="0"/>
-          </a:p>
-        </p:txBody>
-      </p:sp>
-      <p:sp>
-        <p:nvSpPr>
-          <p:cNvPr id="22" name="Text 18"/>
-          <p:cNvSpPr/>
-          <p:nvPr/>
-        </p:nvSpPr>
-        <p:spPr>
-          <a:xfrm>
-            <a:off x="6591300" y="4131588"/>
-            <a:ext cx="814626" cy="522923"/>
-          </a:xfrm>
-          <a:prstGeom prst="rect">
-            <a:avLst/>
-          </a:prstGeom>
-          <a:noFill/>
-          <a:ln/>
-        </p:spPr>
-        <p:txBody>
-          <a:bodyPr wrap="square" lIns="0" tIns="0" rIns="0" bIns="0" rtlCol="0" anchor="ctr"/>
-          <a:lstStyle/>
-          <a:p>
-            <a:pPr algn="l" indent="0" marL="0">
-              <a:lnSpc>
-                <a:spcPts val="2030"/>
-              </a:lnSpc>
-              <a:buNone/>
-            </a:pPr>
-            <a:r>
-              <a:rPr lang="en-US" sz="1400" b="1" dirty="0">
-                <a:solidFill>
-                  <a:srgbClr val="12374E"/>
-                </a:solidFill>
-                <a:latin typeface="Microsoft YaHei" pitchFamily="34" charset="0"/>
-                <a:ea typeface="Microsoft YaHei" pitchFamily="34" charset="-122"/>
-                <a:cs typeface="Microsoft YaHei" pitchFamily="34" charset="-120"/>
-              </a:rPr>
-              <a:t>并行</a:t>
-            </a:r>
-            <a:endParaRPr lang="en-US" sz="1400" dirty="0"/>
-          </a:p>
-        </p:txBody>
-      </p:sp>
-      <p:sp>
-        <p:nvSpPr>
-          <p:cNvPr id="23" name="Text 19"/>
-          <p:cNvSpPr/>
-          <p:nvPr/>
-        </p:nvSpPr>
-        <p:spPr>
-          <a:xfrm>
-            <a:off x="7588806" y="4131588"/>
-            <a:ext cx="1707118" cy="522923"/>
-          </a:xfrm>
-          <a:prstGeom prst="rect">
-            <a:avLst/>
-          </a:prstGeom>
-          <a:noFill/>
-          <a:ln/>
-        </p:spPr>
-        <p:txBody>
-          <a:bodyPr wrap="square" lIns="0" tIns="0" rIns="0" bIns="0" rtlCol="0" anchor="ctr"/>
-          <a:lstStyle/>
-          <a:p>
-            <a:pPr algn="l" indent="0" marL="0">
-              <a:lnSpc>
-                <a:spcPts val="2030"/>
-              </a:lnSpc>
-              <a:buNone/>
-            </a:pPr>
-            <a:r>
-              <a:rPr lang="en-US" sz="1400" dirty="0">
-                <a:solidFill>
-                  <a:srgbClr val="12374E"/>
-                </a:solidFill>
-                <a:latin typeface="Microsoft YaHei" pitchFamily="34" charset="0"/>
-                <a:ea typeface="Microsoft YaHei" pitchFamily="34" charset="-122"/>
-                <a:cs typeface="Microsoft YaHei" pitchFamily="34" charset="-120"/>
-              </a:rPr>
-              <a:t>分析异常结果</a:t>
-            </a:r>
-            <a:endParaRPr lang="en-US" sz="1400" dirty="0"/>
-          </a:p>
-          <a:p>
-            <a:pPr algn="l" indent="0" marL="0">
-              <a:lnSpc>
-                <a:spcPts val="2030"/>
-              </a:lnSpc>
-              <a:buNone/>
-            </a:pPr>
-            <a:r>
-              <a:rPr lang="en-US" sz="1400" dirty="0">
-                <a:solidFill>
-                  <a:srgbClr val="12374E"/>
-                </a:solidFill>
-                <a:latin typeface="Microsoft YaHei" pitchFamily="34" charset="0"/>
-                <a:ea typeface="Microsoft YaHei" pitchFamily="34" charset="-122"/>
-                <a:cs typeface="Microsoft YaHei" pitchFamily="34" charset="-120"/>
-              </a:rPr>
-              <a:t>归纳失败案例</a:t>
-            </a:r>
-            <a:endParaRPr lang="en-US" sz="1400" dirty="0"/>
-          </a:p>
-        </p:txBody>
-      </p:sp>
-      <p:sp>
-        <p:nvSpPr>
-          <p:cNvPr id="24" name="Text 20"/>
-          <p:cNvSpPr/>
-          <p:nvPr/>
-        </p:nvSpPr>
-        <p:spPr>
-          <a:xfrm>
-            <a:off x="9478804" y="4131588"/>
-            <a:ext cx="2179796" cy="522923"/>
-          </a:xfrm>
-          <a:prstGeom prst="rect">
-            <a:avLst/>
-          </a:prstGeom>
-          <a:noFill/>
-          <a:ln/>
-        </p:spPr>
-        <p:txBody>
-          <a:bodyPr wrap="square" lIns="0" tIns="0" rIns="0" bIns="0" rtlCol="0" anchor="ctr"/>
-          <a:lstStyle/>
-          <a:p>
-            <a:pPr algn="l" indent="0" marL="0">
-              <a:lnSpc>
-                <a:spcPts val="2030"/>
-              </a:lnSpc>
-              <a:buNone/>
-            </a:pPr>
-            <a:r>
-              <a:rPr lang="en-US" sz="1400" dirty="0">
-                <a:solidFill>
-                  <a:srgbClr val="12374E"/>
-                </a:solidFill>
-                <a:latin typeface="Microsoft YaHei" pitchFamily="34" charset="0"/>
-                <a:ea typeface="Microsoft YaHei" pitchFamily="34" charset="-122"/>
-                <a:cs typeface="Microsoft YaHei" pitchFamily="34" charset="-120"/>
-              </a:rPr>
-              <a:t>差异解释与边界条件</a:t>
-            </a:r>
-            <a:endParaRPr lang="en-US" sz="1400" dirty="0"/>
-          </a:p>
-          <a:p>
-            <a:pPr algn="l" indent="0" marL="0">
-              <a:lnSpc>
-                <a:spcPts val="2030"/>
-              </a:lnSpc>
-              <a:buNone/>
-            </a:pPr>
-            <a:r>
-              <a:rPr lang="en-US" sz="1400" dirty="0">
-                <a:solidFill>
-                  <a:srgbClr val="12374E"/>
-                </a:solidFill>
-                <a:latin typeface="Microsoft YaHei" pitchFamily="34" charset="0"/>
-                <a:ea typeface="Microsoft YaHei" pitchFamily="34" charset="-122"/>
-                <a:cs typeface="Microsoft YaHei" pitchFamily="34" charset="-120"/>
-              </a:rPr>
-              <a:t>可定位的典型样例</a:t>
-            </a:r>
-            <a:endParaRPr lang="en-US" sz="1400" dirty="0"/>
-          </a:p>
-        </p:txBody>
-      </p:sp>
-      <p:sp>
-        <p:nvSpPr>
-          <p:cNvPr id="25" name="Text 21"/>
-          <p:cNvSpPr/>
-          <p:nvPr/>
-        </p:nvSpPr>
-        <p:spPr>
-          <a:xfrm>
-            <a:off x="6591300" y="4776430"/>
-            <a:ext cx="814626" cy="522923"/>
-          </a:xfrm>
-          <a:prstGeom prst="rect">
-            <a:avLst/>
-          </a:prstGeom>
-          <a:noFill/>
-          <a:ln/>
-        </p:spPr>
-        <p:txBody>
-          <a:bodyPr wrap="square" lIns="0" tIns="0" rIns="0" bIns="0" rtlCol="0" anchor="ctr"/>
-          <a:lstStyle/>
-          <a:p>
-            <a:pPr algn="l" indent="0" marL="0">
-              <a:lnSpc>
-                <a:spcPts val="2030"/>
-              </a:lnSpc>
-              <a:buNone/>
-            </a:pPr>
-            <a:r>
-              <a:rPr lang="en-US" sz="1400" b="1" dirty="0">
-                <a:solidFill>
-                  <a:srgbClr val="12374E"/>
-                </a:solidFill>
-                <a:latin typeface="Microsoft YaHei" pitchFamily="34" charset="0"/>
-                <a:ea typeface="Microsoft YaHei" pitchFamily="34" charset="-122"/>
-                <a:cs typeface="Microsoft YaHei" pitchFamily="34" charset="-120"/>
-              </a:rPr>
-              <a:t>下次汇报</a:t>
-            </a:r>
-            <a:endParaRPr lang="en-US" sz="1400" dirty="0"/>
-          </a:p>
-        </p:txBody>
-      </p:sp>
-      <p:sp>
-        <p:nvSpPr>
-          <p:cNvPr id="26" name="Text 22"/>
-          <p:cNvSpPr/>
-          <p:nvPr/>
-        </p:nvSpPr>
-        <p:spPr>
-          <a:xfrm>
-            <a:off x="7588806" y="4776430"/>
-            <a:ext cx="1707118" cy="522923"/>
-          </a:xfrm>
-          <a:prstGeom prst="rect">
-            <a:avLst/>
-          </a:prstGeom>
-          <a:noFill/>
-          <a:ln/>
-        </p:spPr>
-        <p:txBody>
-          <a:bodyPr wrap="square" lIns="0" tIns="0" rIns="0" bIns="0" rtlCol="0" anchor="ctr"/>
-          <a:lstStyle/>
-          <a:p>
-            <a:pPr algn="l" indent="0" marL="0">
-              <a:lnSpc>
-                <a:spcPts val="2030"/>
-              </a:lnSpc>
-              <a:buNone/>
-            </a:pPr>
-            <a:r>
-              <a:rPr lang="en-US" sz="1400" dirty="0">
-                <a:solidFill>
-                  <a:srgbClr val="12374E"/>
-                </a:solidFill>
-                <a:latin typeface="Microsoft YaHei" pitchFamily="34" charset="0"/>
-                <a:ea typeface="Microsoft YaHei" pitchFamily="34" charset="-122"/>
-                <a:cs typeface="Microsoft YaHei" pitchFamily="34" charset="-120"/>
-              </a:rPr>
-              <a:t>汇总新增证据</a:t>
-            </a:r>
-            <a:endParaRPr lang="en-US" sz="1400" dirty="0"/>
-          </a:p>
-          <a:p>
-            <a:pPr algn="l" indent="0" marL="0">
-              <a:lnSpc>
-                <a:spcPts val="2030"/>
-              </a:lnSpc>
-              <a:buNone/>
-            </a:pPr>
-            <a:r>
-              <a:rPr lang="en-US" sz="1400" dirty="0">
-                <a:solidFill>
-                  <a:srgbClr val="12374E"/>
-                </a:solidFill>
-                <a:latin typeface="Microsoft YaHei" pitchFamily="34" charset="0"/>
-                <a:ea typeface="Microsoft YaHei" pitchFamily="34" charset="-122"/>
-                <a:cs typeface="Microsoft YaHei" pitchFamily="34" charset="-120"/>
-              </a:rPr>
-              <a:t>逐项回应问题</a:t>
-            </a:r>
-            <a:endParaRPr lang="en-US" sz="1400" dirty="0"/>
-          </a:p>
-        </p:txBody>
-      </p:sp>
-      <p:sp>
-        <p:nvSpPr>
-          <p:cNvPr id="27" name="Text 23"/>
-          <p:cNvSpPr/>
-          <p:nvPr/>
-        </p:nvSpPr>
-        <p:spPr>
-          <a:xfrm>
-            <a:off x="9478804" y="4776430"/>
-            <a:ext cx="2179796" cy="522923"/>
-          </a:xfrm>
-          <a:prstGeom prst="rect">
-            <a:avLst/>
-          </a:prstGeom>
-          <a:noFill/>
-          <a:ln/>
-        </p:spPr>
-        <p:txBody>
-          <a:bodyPr wrap="square" lIns="0" tIns="0" rIns="0" bIns="0" rtlCol="0" anchor="ctr"/>
-          <a:lstStyle/>
-          <a:p>
-            <a:pPr algn="l" indent="0" marL="0">
-              <a:lnSpc>
-                <a:spcPts val="2030"/>
-              </a:lnSpc>
-              <a:buNone/>
-            </a:pPr>
-            <a:r>
-              <a:rPr lang="en-US" sz="1400" dirty="0">
-                <a:solidFill>
-                  <a:srgbClr val="12374E"/>
-                </a:solidFill>
-                <a:latin typeface="Microsoft YaHei" pitchFamily="34" charset="0"/>
-                <a:ea typeface="Microsoft YaHei" pitchFamily="34" charset="-122"/>
-                <a:cs typeface="Microsoft YaHei" pitchFamily="34" charset="-120"/>
-              </a:rPr>
-              <a:t>更新图表与问题清单</a:t>
-            </a:r>
-            <a:endParaRPr lang="en-US" sz="1400" dirty="0"/>
-          </a:p>
-          <a:p>
-            <a:pPr algn="l" indent="0" marL="0">
-              <a:lnSpc>
-                <a:spcPts val="2030"/>
-              </a:lnSpc>
-              <a:buNone/>
-            </a:pPr>
-            <a:r>
-              <a:rPr lang="en-US" sz="1400" dirty="0">
-                <a:solidFill>
-                  <a:srgbClr val="12374E"/>
-                </a:solidFill>
-                <a:latin typeface="Microsoft YaHei" pitchFamily="34" charset="0"/>
-                <a:ea typeface="Microsoft YaHei" pitchFamily="34" charset="-122"/>
-                <a:cs typeface="Microsoft YaHei" pitchFamily="34" charset="-120"/>
-              </a:rPr>
-              <a:t>逐项修订研究结论</a:t>
-            </a:r>
-            <a:endParaRPr lang="en-US" sz="1400" dirty="0"/>
-          </a:p>
-        </p:txBody>
-      </p:sp>
-      <p:sp>
-        <p:nvSpPr>
-          <p:cNvPr id="28" name="Text 24"/>
-          <p:cNvSpPr/>
-          <p:nvPr/>
-        </p:nvSpPr>
-        <p:spPr>
-          <a:xfrm>
-            <a:off x="6621780" y="5623560"/>
-            <a:ext cx="5006340" cy="457200"/>
-          </a:xfrm>
-          <a:prstGeom prst="rect">
-            <a:avLst/>
-          </a:prstGeom>
-          <a:noFill/>
-          <a:ln/>
-        </p:spPr>
-        <p:txBody>
-          <a:bodyPr wrap="square" lIns="0" tIns="0" rIns="0" bIns="0" rtlCol="0" anchor="ctr"/>
-          <a:lstStyle/>
-          <a:p>
-            <a:pPr algn="l" indent="0" marL="0">
-              <a:lnSpc>
-                <a:spcPts val="1800"/>
-              </a:lnSpc>
-              <a:buNone/>
-            </a:pPr>
-            <a:r>
-              <a:rPr lang="en-US" sz="1200" b="1" dirty="0">
-                <a:solidFill>
-                  <a:srgbClr val="12374E"/>
-                </a:solidFill>
-                <a:latin typeface="Microsoft YaHei" pitchFamily="34" charset="0"/>
-                <a:ea typeface="Microsoft YaHei" pitchFamily="34" charset="-122"/>
-                <a:cs typeface="Microsoft YaHei" pitchFamily="34" charset="-120"/>
-              </a:rPr>
-              <a:t>本次讨论：</a:t>
-            </a:r>
-            <a:pPr algn="l" indent="0" marL="0">
-              <a:lnSpc>
-                <a:spcPts val="1800"/>
-              </a:lnSpc>
-              <a:buNone/>
-            </a:pPr>
-            <a:r>
-              <a:rPr lang="en-US" sz="1200" dirty="0">
-                <a:solidFill>
-                  <a:srgbClr val="12374E"/>
-                </a:solidFill>
-                <a:latin typeface="Microsoft YaHei" pitchFamily="34" charset="0"/>
-                <a:ea typeface="Microsoft YaHei" pitchFamily="34" charset="-122"/>
-                <a:cs typeface="Microsoft YaHei" pitchFamily="34" charset="-120"/>
-              </a:rPr>
-              <a:t>确认实验优先级和验收标准。</a:t>
-            </a:r>
-            <a:pPr algn="l" indent="0" marL="0">
-              <a:lnSpc>
-                <a:spcPts val="1800"/>
-              </a:lnSpc>
-              <a:buNone/>
-            </a:pPr>
-            <a:r>
-              <a:rPr lang="en-US" sz="1200" dirty="0">
-                <a:solidFill>
-                  <a:srgbClr val="12374E"/>
-                </a:solidFill>
-                <a:latin typeface="Microsoft YaHei" pitchFamily="34" charset="0"/>
-                <a:ea typeface="Microsoft YaHei" pitchFamily="34" charset="-122"/>
-                <a:cs typeface="Microsoft YaHei" pitchFamily="34" charset="-120"/>
-              </a:rPr>
-              <a:t>
-</a:t>
-            </a:r>
-            <a:pPr algn="l" indent="0" marL="0">
-              <a:lnSpc>
-                <a:spcPts val="1800"/>
-              </a:lnSpc>
-              <a:buNone/>
-            </a:pPr>
-            <a:r>
-              <a:rPr lang="en-US" sz="1200" dirty="0">
-                <a:solidFill>
-                  <a:srgbClr val="12374E"/>
-                </a:solidFill>
-                <a:latin typeface="Microsoft YaHei" pitchFamily="34" charset="0"/>
-                <a:ea typeface="Microsoft YaHei" pitchFamily="34" charset="-122"/>
-                <a:cs typeface="Microsoft YaHei" pitchFamily="34" charset="-120"/>
-              </a:rPr>
-              <a:t>各阶段时间按实际进展填写。</a:t>
-            </a:r>
-            <a:endParaRPr lang="en-US" sz="1200" dirty="0"/>
-          </a:p>
-        </p:txBody>
-      </p:sp>
-      <p:sp>
-        <p:nvSpPr>
-          <p:cNvPr id="29" name="Text 25"/>
-          <p:cNvSpPr/>
-          <p:nvPr/>
-        </p:nvSpPr>
-        <p:spPr>
-          <a:xfrm>
-            <a:off x="441960" y="6489144"/>
-            <a:ext cx="2286000" cy="181332"/>
-          </a:xfrm>
-          <a:prstGeom prst="rect">
-            <a:avLst/>
-          </a:prstGeom>
-          <a:noFill/>
-          <a:ln/>
-        </p:spPr>
-        <p:txBody>
-          <a:bodyPr wrap="square" lIns="0" tIns="0" rIns="0" bIns="0" rtlCol="0" anchor="ctr"/>
-          <a:lstStyle/>
-          <a:p>
-            <a:pPr algn="l" indent="0" marL="0">
-              <a:lnSpc>
                 <a:spcPts val="1428"/>
               </a:lnSpc>
               <a:buNone/>
@@ -29503,7 +30918,7 @@
                 <a:ea typeface="Microsoft YaHei" pitchFamily="34" charset="-122"/>
                 <a:cs typeface="Microsoft YaHei" pitchFamily="34" charset="-120"/>
               </a:rPr>
-              <a:t>北京科技大学 · 科研汇报模板</a:t>
+              <a:t>24 / 30</a:t>
             </a:r>
             <a:endParaRPr lang="en-US" sz="1020" dirty="0"/>
           </a:p>
@@ -29511,87 +30926,30 @@
       </p:sp>
       <p:sp>
         <p:nvSpPr>
-          <p:cNvPr id="30" name="Text 26"/>
-          <p:cNvSpPr/>
-          <p:nvPr/>
-        </p:nvSpPr>
-        <p:spPr>
-          <a:xfrm>
-            <a:off x="2910840" y="6492478"/>
-            <a:ext cx="8212455" cy="174784"/>
-          </a:xfrm>
-          <a:prstGeom prst="rect">
-            <a:avLst/>
-          </a:prstGeom>
-          <a:noFill/>
-          <a:ln/>
-        </p:spPr>
-        <p:txBody>
-          <a:bodyPr wrap="square" lIns="0" tIns="0" rIns="0" bIns="0" rtlCol="0" anchor="ctr"/>
-          <a:lstStyle/>
-          <a:p>
-            <a:pPr algn="r" indent="0" marL="0">
-              <a:lnSpc>
-                <a:spcPts val="1377"/>
-              </a:lnSpc>
-              <a:buNone/>
-            </a:pPr>
-            <a:r>
-              <a:rPr lang="en-US" sz="1020" dirty="0">
-                <a:solidFill>
-                  <a:srgbClr val="617B8B"/>
-                </a:solidFill>
-                <a:latin typeface="Microsoft YaHei" pitchFamily="34" charset="0"/>
-                <a:ea typeface="Microsoft YaHei" pitchFamily="34" charset="-122"/>
-                <a:cs typeface="Microsoft YaHei" pitchFamily="34" charset="-120"/>
-              </a:rPr>
-              <a:t>阶段总结与任务安排示例，以实际工作记录为准</a:t>
-            </a:r>
-            <a:endParaRPr lang="en-US" sz="1020" dirty="0"/>
-          </a:p>
-        </p:txBody>
-      </p:sp>
-      <p:sp>
-        <p:nvSpPr>
-          <p:cNvPr id="31" name="Text 27"/>
-          <p:cNvSpPr/>
-          <p:nvPr/>
-        </p:nvSpPr>
-        <p:spPr>
-          <a:xfrm>
-            <a:off x="11306175" y="6489144"/>
-            <a:ext cx="443865" cy="181332"/>
-          </a:xfrm>
-          <a:prstGeom prst="rect">
-            <a:avLst/>
-          </a:prstGeom>
-          <a:noFill/>
-          <a:ln/>
-        </p:spPr>
-        <p:txBody>
-          <a:bodyPr wrap="none" lIns="0" tIns="0" rIns="0" bIns="0" rtlCol="0" anchor="ctr"/>
-          <a:lstStyle/>
-          <a:p>
-            <a:pPr algn="l" indent="0" marL="0">
-              <a:lnSpc>
-                <a:spcPts val="1428"/>
-              </a:lnSpc>
-              <a:buNone/>
-            </a:pPr>
-            <a:r>
-              <a:rPr lang="en-US" sz="1020" dirty="0">
-                <a:solidFill>
-                  <a:srgbClr val="617B8B"/>
-                </a:solidFill>
-                <a:latin typeface="Microsoft YaHei" pitchFamily="34" charset="0"/>
-                <a:ea typeface="Microsoft YaHei" pitchFamily="34" charset="-122"/>
-                <a:cs typeface="Microsoft YaHei" pitchFamily="34" charset="-120"/>
-              </a:rPr>
-              <a:t>24 / 30</a:t>
-            </a:r>
-            <a:endParaRPr lang="en-US" sz="1020" dirty="0"/>
-          </a:p>
-        </p:txBody>
+          <p:cNvPr id="75" name="Shape 71"/>
+          <p:cNvSpPr/>
+          <p:nvPr/>
+        </p:nvSpPr>
+        <p:spPr>
+          <a:xfrm>
+            <a:off x="441960" y="6355080"/>
+            <a:ext cx="11308080" cy="7620"/>
+          </a:xfrm>
+          <a:prstGeom prst="rect">
+            <a:avLst/>
+          </a:prstGeom>
+          <a:solidFill>
+            <a:srgbClr val="D8E2E9"/>
+          </a:solidFill>
+          <a:ln w="12700">
+            <a:solidFill>
+              <a:srgbClr val="D8E2E9">
+                <a:alpha val="0"/>
+              </a:srgbClr>
+            </a:solidFill>
+            <a:prstDash val="solid"/>
+          </a:ln>
+        </p:spPr>
       </p:sp>
     </p:spTree>
   </p:cSld>
@@ -30970,17 +32328,17 @@
         </p:nvSpPr>
         <p:spPr>
           <a:xfrm>
-            <a:off x="2540794" y="5791200"/>
-            <a:ext cx="7110293" cy="304800"/>
-          </a:xfrm>
-          <a:prstGeom prst="rect">
-            <a:avLst/>
-          </a:prstGeom>
-          <a:noFill/>
-          <a:ln/>
-        </p:spPr>
-        <p:txBody>
-          <a:bodyPr wrap="square" lIns="0" tIns="0" rIns="0" bIns="0" rtlCol="0" anchor="ctr"/>
+            <a:off x="609600" y="5791200"/>
+            <a:ext cx="10972800" cy="304800"/>
+          </a:xfrm>
+          <a:prstGeom prst="rect">
+            <a:avLst/>
+          </a:prstGeom>
+          <a:noFill/>
+          <a:ln/>
+        </p:spPr>
+        <p:txBody>
+          <a:bodyPr wrap="none" lIns="0" tIns="0" rIns="0" bIns="0" rtlCol="0" anchor="ctr"/>
           <a:lstStyle/>
           <a:p>
             <a:pPr algn="ctr" indent="0" marL="0">
@@ -31521,8 +32879,8 @@
         </p:nvSpPr>
         <p:spPr>
           <a:xfrm>
-            <a:off x="624840" y="2118360"/>
-            <a:ext cx="3281601" cy="297180"/>
+            <a:off x="579120" y="2072640"/>
+            <a:ext cx="3373041" cy="297180"/>
           </a:xfrm>
           <a:prstGeom prst="rect">
             <a:avLst/>
@@ -31563,8 +32921,8 @@
         </p:nvSpPr>
         <p:spPr>
           <a:xfrm>
-            <a:off x="624840" y="2522220"/>
-            <a:ext cx="3281601" cy="314920"/>
+            <a:off x="579120" y="2476500"/>
+            <a:ext cx="3373041" cy="314920"/>
           </a:xfrm>
           <a:prstGeom prst="rect">
             <a:avLst/>
@@ -31605,8 +32963,8 @@
         </p:nvSpPr>
         <p:spPr>
           <a:xfrm>
-            <a:off x="624840" y="2913340"/>
-            <a:ext cx="3281601" cy="314920"/>
+            <a:off x="579120" y="2867620"/>
+            <a:ext cx="3373041" cy="314920"/>
           </a:xfrm>
           <a:prstGeom prst="rect">
             <a:avLst/>
@@ -31647,8 +33005,8 @@
         </p:nvSpPr>
         <p:spPr>
           <a:xfrm>
-            <a:off x="624840" y="3304461"/>
-            <a:ext cx="3281601" cy="629841"/>
+            <a:off x="579120" y="3258741"/>
+            <a:ext cx="3373041" cy="629841"/>
           </a:xfrm>
           <a:prstGeom prst="rect">
             <a:avLst/>
@@ -31689,8 +33047,8 @@
         </p:nvSpPr>
         <p:spPr>
           <a:xfrm>
-            <a:off x="624840" y="4010501"/>
-            <a:ext cx="3281601" cy="314920"/>
+            <a:off x="579120" y="3964781"/>
+            <a:ext cx="3373041" cy="314920"/>
           </a:xfrm>
           <a:prstGeom prst="rect">
             <a:avLst/>
@@ -31758,8 +33116,8 @@
         </p:nvSpPr>
         <p:spPr>
           <a:xfrm>
-            <a:off x="4455081" y="2118360"/>
-            <a:ext cx="3281720" cy="297180"/>
+            <a:off x="4409361" y="2072640"/>
+            <a:ext cx="3373160" cy="297180"/>
           </a:xfrm>
           <a:prstGeom prst="rect">
             <a:avLst/>
@@ -31800,8 +33158,8 @@
         </p:nvSpPr>
         <p:spPr>
           <a:xfrm>
-            <a:off x="4455081" y="2522220"/>
-            <a:ext cx="3281720" cy="314920"/>
+            <a:off x="4409361" y="2476500"/>
+            <a:ext cx="3373160" cy="314920"/>
           </a:xfrm>
           <a:prstGeom prst="rect">
             <a:avLst/>
@@ -31842,8 +33200,8 @@
         </p:nvSpPr>
         <p:spPr>
           <a:xfrm>
-            <a:off x="4455081" y="2913340"/>
-            <a:ext cx="3281720" cy="314920"/>
+            <a:off x="4409361" y="2867620"/>
+            <a:ext cx="3373160" cy="314920"/>
           </a:xfrm>
           <a:prstGeom prst="rect">
             <a:avLst/>
@@ -31884,8 +33242,8 @@
         </p:nvSpPr>
         <p:spPr>
           <a:xfrm>
-            <a:off x="4455081" y="3304461"/>
-            <a:ext cx="3281720" cy="314920"/>
+            <a:off x="4409361" y="3258741"/>
+            <a:ext cx="3373160" cy="314920"/>
           </a:xfrm>
           <a:prstGeom prst="rect">
             <a:avLst/>
@@ -31926,8 +33284,8 @@
         </p:nvSpPr>
         <p:spPr>
           <a:xfrm>
-            <a:off x="4455081" y="3695581"/>
-            <a:ext cx="3281720" cy="314920"/>
+            <a:off x="4409361" y="3649861"/>
+            <a:ext cx="3373160" cy="314920"/>
           </a:xfrm>
           <a:prstGeom prst="rect">
             <a:avLst/>
@@ -31995,8 +33353,8 @@
         </p:nvSpPr>
         <p:spPr>
           <a:xfrm>
-            <a:off x="8285440" y="2118360"/>
-            <a:ext cx="3281601" cy="297180"/>
+            <a:off x="8239720" y="2072640"/>
+            <a:ext cx="3373041" cy="297180"/>
           </a:xfrm>
           <a:prstGeom prst="rect">
             <a:avLst/>
@@ -32037,8 +33395,8 @@
         </p:nvSpPr>
         <p:spPr>
           <a:xfrm>
-            <a:off x="8285440" y="2522220"/>
-            <a:ext cx="3281601" cy="314920"/>
+            <a:off x="8239720" y="2476500"/>
+            <a:ext cx="3373041" cy="314920"/>
           </a:xfrm>
           <a:prstGeom prst="rect">
             <a:avLst/>
@@ -32079,8 +33437,8 @@
         </p:nvSpPr>
         <p:spPr>
           <a:xfrm>
-            <a:off x="8285440" y="2913340"/>
-            <a:ext cx="3281601" cy="314920"/>
+            <a:off x="8239720" y="2867620"/>
+            <a:ext cx="3373041" cy="314920"/>
           </a:xfrm>
           <a:prstGeom prst="rect">
             <a:avLst/>
@@ -32121,8 +33479,8 @@
         </p:nvSpPr>
         <p:spPr>
           <a:xfrm>
-            <a:off x="8285440" y="3304461"/>
-            <a:ext cx="3281601" cy="314920"/>
+            <a:off x="8239720" y="3258741"/>
+            <a:ext cx="3373041" cy="314920"/>
           </a:xfrm>
           <a:prstGeom prst="rect">
             <a:avLst/>
@@ -32163,8 +33521,8 @@
         </p:nvSpPr>
         <p:spPr>
           <a:xfrm>
-            <a:off x="8285440" y="3695581"/>
-            <a:ext cx="3281601" cy="314920"/>
+            <a:off x="8239720" y="3649861"/>
+            <a:ext cx="3373041" cy="314920"/>
           </a:xfrm>
           <a:prstGeom prst="rect">
             <a:avLst/>
@@ -32619,17 +33977,17 @@
         </p:nvSpPr>
         <p:spPr>
           <a:xfrm>
-            <a:off x="2236113" y="5791200"/>
-            <a:ext cx="7719774" cy="304800"/>
-          </a:xfrm>
-          <a:prstGeom prst="rect">
-            <a:avLst/>
-          </a:prstGeom>
-          <a:noFill/>
-          <a:ln/>
-        </p:spPr>
-        <p:txBody>
-          <a:bodyPr wrap="square" lIns="0" tIns="0" rIns="0" bIns="0" rtlCol="0" anchor="ctr"/>
+            <a:off x="609600" y="5791200"/>
+            <a:ext cx="10972800" cy="304800"/>
+          </a:xfrm>
+          <a:prstGeom prst="rect">
+            <a:avLst/>
+          </a:prstGeom>
+          <a:noFill/>
+          <a:ln/>
+        </p:spPr>
+        <p:txBody>
+          <a:bodyPr wrap="none" lIns="0" tIns="0" rIns="0" bIns="0" rtlCol="0" anchor="ctr"/>
           <a:lstStyle/>
           <a:p>
             <a:pPr algn="ctr" indent="0" marL="0">
@@ -34100,9 +35458,213 @@
           <a:chExt cx="0" cy="0"/>
         </a:xfrm>
       </p:grpSpPr>
+      <p:sp>
+        <p:nvSpPr>
+          <p:cNvPr id="2" name="Shape 0"/>
+          <p:cNvSpPr/>
+          <p:nvPr/>
+        </p:nvSpPr>
+        <p:spPr>
+          <a:xfrm>
+            <a:off x="0" y="0"/>
+            <a:ext cx="9753600" cy="53340"/>
+          </a:xfrm>
+          <a:prstGeom prst="rect">
+            <a:avLst/>
+          </a:prstGeom>
+          <a:solidFill>
+            <a:srgbClr val="005B94"/>
+          </a:solidFill>
+          <a:ln w="12700">
+            <a:solidFill>
+              <a:srgbClr val="005B94">
+                <a:alpha val="0"/>
+              </a:srgbClr>
+            </a:solidFill>
+            <a:prstDash val="solid"/>
+          </a:ln>
+        </p:spPr>
+      </p:sp>
+      <p:sp>
+        <p:nvSpPr>
+          <p:cNvPr id="3" name="Shape 1"/>
+          <p:cNvSpPr/>
+          <p:nvPr/>
+        </p:nvSpPr>
+        <p:spPr>
+          <a:xfrm>
+            <a:off x="9753600" y="0"/>
+            <a:ext cx="2438400" cy="53340"/>
+          </a:xfrm>
+          <a:prstGeom prst="rect">
+            <a:avLst/>
+          </a:prstGeom>
+          <a:solidFill>
+            <a:srgbClr val="2BA3C0"/>
+          </a:solidFill>
+          <a:ln w="12700">
+            <a:solidFill>
+              <a:srgbClr val="2BA3C0">
+                <a:alpha val="0"/>
+              </a:srgbClr>
+            </a:solidFill>
+            <a:prstDash val="solid"/>
+          </a:ln>
+        </p:spPr>
+      </p:sp>
+      <p:sp>
+        <p:nvSpPr>
+          <p:cNvPr id="4" name="Shape 2"/>
+          <p:cNvSpPr/>
+          <p:nvPr/>
+        </p:nvSpPr>
+        <p:spPr>
+          <a:xfrm>
+            <a:off x="441960" y="259080"/>
+            <a:ext cx="381000" cy="228600"/>
+          </a:xfrm>
+          <a:prstGeom prst="rect">
+            <a:avLst/>
+          </a:prstGeom>
+          <a:solidFill>
+            <a:srgbClr val="EEF5F9"/>
+          </a:solidFill>
+          <a:ln w="12700">
+            <a:solidFill>
+              <a:srgbClr val="EEF5F9">
+                <a:alpha val="0"/>
+              </a:srgbClr>
+            </a:solidFill>
+            <a:prstDash val="solid"/>
+          </a:ln>
+        </p:spPr>
+      </p:sp>
+      <p:sp>
+        <p:nvSpPr>
+          <p:cNvPr id="5" name="Text 3"/>
+          <p:cNvSpPr/>
+          <p:nvPr/>
+        </p:nvSpPr>
+        <p:spPr>
+          <a:xfrm>
+            <a:off x="480060" y="259080"/>
+            <a:ext cx="304800" cy="228600"/>
+          </a:xfrm>
+          <a:prstGeom prst="rect">
+            <a:avLst/>
+          </a:prstGeom>
+          <a:noFill/>
+          <a:ln/>
+        </p:spPr>
+        <p:txBody>
+          <a:bodyPr wrap="none" lIns="0" tIns="0" rIns="0" bIns="0" rtlCol="0" anchor="ctr"/>
+          <a:lstStyle/>
+          <a:p>
+            <a:pPr algn="l" indent="0" marL="0">
+              <a:buNone/>
+            </a:pPr>
+            <a:r>
+              <a:rPr lang="en-US" sz="1200" b="1" dirty="0">
+                <a:solidFill>
+                  <a:srgbClr val="005B94"/>
+                </a:solidFill>
+                <a:latin typeface="Arial" pitchFamily="34" charset="0"/>
+                <a:ea typeface="Arial" pitchFamily="34" charset="-122"/>
+                <a:cs typeface="Arial" pitchFamily="34" charset="-120"/>
+              </a:rPr>
+              <a:t>附录</a:t>
+            </a:r>
+            <a:endParaRPr lang="en-US" sz="1200" dirty="0"/>
+          </a:p>
+        </p:txBody>
+      </p:sp>
+      <p:sp>
+        <p:nvSpPr>
+          <p:cNvPr id="6" name="Text 4"/>
+          <p:cNvSpPr/>
+          <p:nvPr/>
+        </p:nvSpPr>
+        <p:spPr>
+          <a:xfrm>
+            <a:off x="929640" y="235625"/>
+            <a:ext cx="9677400" cy="275511"/>
+          </a:xfrm>
+          <a:prstGeom prst="rect">
+            <a:avLst/>
+          </a:prstGeom>
+          <a:noFill/>
+          <a:ln/>
+        </p:spPr>
+        <p:txBody>
+          <a:bodyPr wrap="none" lIns="0" tIns="0" rIns="0" bIns="0" rtlCol="0" anchor="ctr"/>
+          <a:lstStyle/>
+          <a:p>
+            <a:pPr algn="l" indent="0" marL="0">
+              <a:lnSpc>
+                <a:spcPts val="2170"/>
+              </a:lnSpc>
+              <a:buNone/>
+            </a:pPr>
+            <a:r>
+              <a:rPr lang="en-US" sz="1400" b="1" dirty="0">
+                <a:solidFill>
+                  <a:srgbClr val="005B94"/>
+                </a:solidFill>
+                <a:latin typeface="Microsoft YaHei" pitchFamily="34" charset="0"/>
+                <a:ea typeface="Microsoft YaHei" pitchFamily="34" charset="-122"/>
+                <a:cs typeface="Microsoft YaHei" pitchFamily="34" charset="-120"/>
+              </a:rPr>
+              <a:t>参考与作者</a:t>
+            </a:r>
+            <a:endParaRPr lang="en-US" sz="1400" dirty="0"/>
+          </a:p>
+        </p:txBody>
+      </p:sp>
+      <p:sp>
+        <p:nvSpPr>
+          <p:cNvPr id="7" name="Text 5"/>
+          <p:cNvSpPr/>
+          <p:nvPr/>
+        </p:nvSpPr>
+        <p:spPr>
+          <a:xfrm>
+            <a:off x="441960" y="609600"/>
+            <a:ext cx="10165080" cy="433864"/>
+          </a:xfrm>
+          <a:prstGeom prst="rect">
+            <a:avLst/>
+          </a:prstGeom>
+          <a:noFill/>
+          <a:ln/>
+        </p:spPr>
+        <p:txBody>
+          <a:bodyPr wrap="none" lIns="0" tIns="0" rIns="0" bIns="0" rtlCol="0" anchor="ctr"/>
+          <a:lstStyle/>
+          <a:p>
+            <a:pPr algn="l" indent="0" marL="0">
+              <a:lnSpc>
+                <a:spcPts val="3416"/>
+              </a:lnSpc>
+              <a:buNone/>
+            </a:pPr>
+            <a:r>
+              <a:rPr lang="en-US" sz="2800" b="1" dirty="0">
+                <a:solidFill>
+                  <a:srgbClr val="005B94"/>
+                </a:solidFill>
+                <a:latin typeface="Microsoft YaHei" pitchFamily="34" charset="0"/>
+                <a:ea typeface="Microsoft YaHei" pitchFamily="34" charset="-122"/>
+                <a:cs typeface="Microsoft YaHei" pitchFamily="34" charset="-120"/>
+              </a:rPr>
+              <a:t>作者简介</a:t>
+            </a:r>
+            <a:endParaRPr lang="en-US" sz="2800" dirty="0"/>
+          </a:p>
+        </p:txBody>
+      </p:sp>
       <p:pic>
         <p:nvPicPr>
-          <p:cNvPr id="2" name="Image 0" descr="preencoded.png">    </p:cNvPr>
+          <p:cNvPr id="8" name="Image 0" descr="preencoded.png">    </p:cNvPr>
           <p:cNvPicPr>
             <a:picLocks noChangeAspect="1"/>
           </p:cNvPicPr>
@@ -34116,8 +35678,8 @@
         </p:blipFill>
         <p:spPr>
           <a:xfrm>
-            <a:off x="0" y="0"/>
-            <a:ext cx="12192000" cy="6858000"/>
+            <a:off x="10835640" y="201930"/>
+            <a:ext cx="914400" cy="914400"/>
           </a:xfrm>
           <a:prstGeom prst="rect">
             <a:avLst/>
@@ -34126,130 +35688,59 @@
       </p:pic>
       <p:sp>
         <p:nvSpPr>
-          <p:cNvPr id="3" name="Text 0"/>
-          <p:cNvSpPr/>
-          <p:nvPr/>
-        </p:nvSpPr>
-        <p:spPr>
-          <a:xfrm>
-            <a:off x="518160" y="259080"/>
-            <a:ext cx="304800" cy="228600"/>
-          </a:xfrm>
-          <a:prstGeom prst="rect">
-            <a:avLst/>
-          </a:prstGeom>
-          <a:noFill/>
-          <a:ln/>
-        </p:spPr>
-        <p:txBody>
-          <a:bodyPr wrap="none" lIns="0" tIns="0" rIns="0" bIns="0" rtlCol="0" anchor="ctr"/>
-          <a:lstStyle/>
-          <a:p>
-            <a:pPr algn="l" indent="0" marL="0">
-              <a:buNone/>
-            </a:pPr>
-            <a:r>
-              <a:rPr lang="en-US" sz="1200" b="1" dirty="0">
-                <a:solidFill>
-                  <a:srgbClr val="005B94"/>
-                </a:solidFill>
-                <a:latin typeface="Microsoft YaHei" pitchFamily="34" charset="0"/>
-                <a:ea typeface="Microsoft YaHei" pitchFamily="34" charset="-122"/>
-                <a:cs typeface="Microsoft YaHei" pitchFamily="34" charset="-120"/>
-              </a:rPr>
-              <a:t>附录</a:t>
-            </a:r>
-            <a:endParaRPr lang="en-US" sz="1200" dirty="0"/>
-          </a:p>
-        </p:txBody>
-      </p:sp>
-      <p:sp>
-        <p:nvSpPr>
-          <p:cNvPr id="4" name="Text 1"/>
-          <p:cNvSpPr/>
-          <p:nvPr/>
-        </p:nvSpPr>
-        <p:spPr>
-          <a:xfrm>
-            <a:off x="1005840" y="235625"/>
-            <a:ext cx="9601200" cy="275511"/>
-          </a:xfrm>
-          <a:prstGeom prst="rect">
-            <a:avLst/>
-          </a:prstGeom>
-          <a:noFill/>
-          <a:ln/>
-        </p:spPr>
-        <p:txBody>
-          <a:bodyPr wrap="none" lIns="0" tIns="0" rIns="0" bIns="0" rtlCol="0" anchor="ctr"/>
-          <a:lstStyle/>
-          <a:p>
-            <a:pPr algn="l" indent="0" marL="0">
-              <a:lnSpc>
-                <a:spcPts val="2170"/>
-              </a:lnSpc>
-              <a:buNone/>
-            </a:pPr>
-            <a:r>
-              <a:rPr lang="en-US" sz="1400" b="1" dirty="0">
-                <a:solidFill>
-                  <a:srgbClr val="40647D"/>
-                </a:solidFill>
-                <a:latin typeface="Microsoft YaHei" pitchFamily="34" charset="0"/>
-                <a:ea typeface="Microsoft YaHei" pitchFamily="34" charset="-122"/>
-                <a:cs typeface="Microsoft YaHei" pitchFamily="34" charset="-120"/>
-              </a:rPr>
-              <a:t>参考与作者</a:t>
-            </a:r>
-            <a:endParaRPr lang="en-US" sz="1400" dirty="0"/>
-          </a:p>
-        </p:txBody>
-      </p:sp>
-      <p:sp>
-        <p:nvSpPr>
-          <p:cNvPr id="5" name="Text 2"/>
-          <p:cNvSpPr/>
-          <p:nvPr/>
-        </p:nvSpPr>
-        <p:spPr>
-          <a:xfrm>
-            <a:off x="441960" y="609600"/>
-            <a:ext cx="10165080" cy="433864"/>
-          </a:xfrm>
-          <a:prstGeom prst="rect">
-            <a:avLst/>
-          </a:prstGeom>
-          <a:noFill/>
-          <a:ln/>
-        </p:spPr>
-        <p:txBody>
-          <a:bodyPr wrap="none" lIns="0" tIns="0" rIns="0" bIns="0" rtlCol="0" anchor="ctr"/>
-          <a:lstStyle/>
-          <a:p>
-            <a:pPr algn="l" indent="0" marL="0">
-              <a:lnSpc>
-                <a:spcPts val="3416"/>
-              </a:lnSpc>
-              <a:buNone/>
-            </a:pPr>
-            <a:r>
-              <a:rPr lang="en-US" sz="2800" b="1" dirty="0">
-                <a:solidFill>
-                  <a:srgbClr val="005B94"/>
-                </a:solidFill>
-                <a:latin typeface="Microsoft YaHei" pitchFamily="34" charset="0"/>
-                <a:ea typeface="Microsoft YaHei" pitchFamily="34" charset="-122"/>
-                <a:cs typeface="Microsoft YaHei" pitchFamily="34" charset="-120"/>
-              </a:rPr>
-              <a:t>作者简介</a:t>
-            </a:r>
-            <a:endParaRPr lang="en-US" sz="2800" dirty="0"/>
-          </a:p>
-        </p:txBody>
+          <p:cNvPr id="9" name="Shape 6"/>
+          <p:cNvSpPr/>
+          <p:nvPr/>
+        </p:nvSpPr>
+        <p:spPr>
+          <a:xfrm>
+            <a:off x="441960" y="1264920"/>
+            <a:ext cx="11308080" cy="15240"/>
+          </a:xfrm>
+          <a:prstGeom prst="rect">
+            <a:avLst/>
+          </a:prstGeom>
+          <a:solidFill>
+            <a:srgbClr val="005B94"/>
+          </a:solidFill>
+          <a:ln w="12700">
+            <a:solidFill>
+              <a:srgbClr val="005B94">
+                <a:alpha val="0"/>
+              </a:srgbClr>
+            </a:solidFill>
+            <a:prstDash val="solid"/>
+          </a:ln>
+        </p:spPr>
+      </p:sp>
+      <p:sp>
+        <p:nvSpPr>
+          <p:cNvPr id="10" name="Shape 7"/>
+          <p:cNvSpPr/>
+          <p:nvPr/>
+        </p:nvSpPr>
+        <p:spPr>
+          <a:xfrm>
+            <a:off x="441960" y="1463040"/>
+            <a:ext cx="2590800" cy="4770120"/>
+          </a:xfrm>
+          <a:prstGeom prst="rect">
+            <a:avLst/>
+          </a:prstGeom>
+          <a:solidFill>
+            <a:srgbClr val="F1F7FB"/>
+          </a:solidFill>
+          <a:ln w="7620">
+            <a:solidFill>
+              <a:srgbClr val="DFEBF3"/>
+            </a:solidFill>
+            <a:prstDash val="solid"/>
+          </a:ln>
+        </p:spPr>
       </p:sp>
       <p:pic>
         <p:nvPicPr>
-          <p:cNvPr id="6" name="Image 1" descr="preencoded.png">    </p:cNvPr>
+          <p:cNvPr id="11" name="Image 1" descr="preencoded.png">    </p:cNvPr>
           <p:cNvPicPr>
             <a:picLocks noChangeAspect="1"/>
           </p:cNvPicPr>
@@ -34263,30 +35754,6 @@
         </p:blipFill>
         <p:spPr>
           <a:xfrm>
-            <a:off x="10835640" y="201930"/>
-            <a:ext cx="914400" cy="914400"/>
-          </a:xfrm>
-          <a:prstGeom prst="rect">
-            <a:avLst/>
-          </a:prstGeom>
-        </p:spPr>
-      </p:pic>
-      <p:pic>
-        <p:nvPicPr>
-          <p:cNvPr id="7" name="Image 2" descr="preencoded.png">    </p:cNvPr>
-          <p:cNvPicPr>
-            <a:picLocks noChangeAspect="1"/>
-          </p:cNvPicPr>
-          <p:nvPr/>
-        </p:nvPicPr>
-        <p:blipFill>
-          <a:blip r:embed="rId3"/>
-          <a:stretch>
-            <a:fillRect/>
-          </a:stretch>
-        </p:blipFill>
-        <p:spPr>
-          <a:xfrm>
             <a:off x="990600" y="1653540"/>
             <a:ext cx="1493520" cy="1676400"/>
           </a:xfrm>
@@ -34297,7 +35764,7 @@
       </p:pic>
       <p:sp>
         <p:nvSpPr>
-          <p:cNvPr id="8" name="Text 3"/>
+          <p:cNvPr id="12" name="Text 8"/>
           <p:cNvSpPr/>
           <p:nvPr/>
         </p:nvSpPr>
@@ -34339,7 +35806,7 @@
       </p:sp>
       <p:sp>
         <p:nvSpPr>
-          <p:cNvPr id="9" name="Text 4"/>
+          <p:cNvPr id="13" name="Text 9"/>
           <p:cNvSpPr/>
           <p:nvPr/>
         </p:nvSpPr>
@@ -34381,7 +35848,7 @@
       </p:sp>
       <p:sp>
         <p:nvSpPr>
-          <p:cNvPr id="10" name="Text 5"/>
+          <p:cNvPr id="14" name="Text 10"/>
           <p:cNvSpPr/>
           <p:nvPr/>
         </p:nvSpPr>
@@ -34443,7 +35910,7 @@
       </p:sp>
       <p:sp>
         <p:nvSpPr>
-          <p:cNvPr id="11" name="Text 6"/>
+          <p:cNvPr id="15" name="Text 11"/>
           <p:cNvSpPr/>
           <p:nvPr/>
         </p:nvSpPr>
@@ -34485,13 +35952,13 @@
       </p:sp>
       <p:sp>
         <p:nvSpPr>
-          <p:cNvPr id="12" name="Text 7"/>
-          <p:cNvSpPr/>
-          <p:nvPr/>
-        </p:nvSpPr>
-        <p:spPr>
-          <a:xfrm>
-            <a:off x="601980" y="5486400"/>
+          <p:cNvPr id="16" name="Text 12"/>
+          <p:cNvSpPr/>
+          <p:nvPr/>
+        </p:nvSpPr>
+        <p:spPr>
+          <a:xfrm>
+            <a:off x="601980" y="5547360"/>
             <a:ext cx="1074420" cy="342900"/>
           </a:xfrm>
           <a:prstGeom prst="rect">
@@ -34527,13 +35994,13 @@
       </p:sp>
       <p:sp>
         <p:nvSpPr>
-          <p:cNvPr id="13" name="Text 8"/>
-          <p:cNvSpPr/>
-          <p:nvPr/>
-        </p:nvSpPr>
-        <p:spPr>
-          <a:xfrm>
-            <a:off x="601980" y="5859780"/>
+          <p:cNvPr id="17" name="Text 13"/>
+          <p:cNvSpPr/>
+          <p:nvPr/>
+        </p:nvSpPr>
+        <p:spPr>
+          <a:xfrm>
+            <a:off x="601980" y="5920740"/>
             <a:ext cx="1074420" cy="213360"/>
           </a:xfrm>
           <a:prstGeom prst="rect">
@@ -34569,13 +36036,13 @@
       </p:sp>
       <p:sp>
         <p:nvSpPr>
-          <p:cNvPr id="14" name="Text 9"/>
-          <p:cNvSpPr/>
-          <p:nvPr/>
-        </p:nvSpPr>
-        <p:spPr>
-          <a:xfrm>
-            <a:off x="1798320" y="5486400"/>
+          <p:cNvPr id="18" name="Text 14"/>
+          <p:cNvSpPr/>
+          <p:nvPr/>
+        </p:nvSpPr>
+        <p:spPr>
+          <a:xfrm>
+            <a:off x="1798320" y="5547360"/>
             <a:ext cx="1074420" cy="342900"/>
           </a:xfrm>
           <a:prstGeom prst="rect">
@@ -34611,13 +36078,13 @@
       </p:sp>
       <p:sp>
         <p:nvSpPr>
-          <p:cNvPr id="15" name="Text 10"/>
-          <p:cNvSpPr/>
-          <p:nvPr/>
-        </p:nvSpPr>
-        <p:spPr>
-          <a:xfrm>
-            <a:off x="1798320" y="5859780"/>
+          <p:cNvPr id="19" name="Text 15"/>
+          <p:cNvSpPr/>
+          <p:nvPr/>
+        </p:nvSpPr>
+        <p:spPr>
+          <a:xfrm>
+            <a:off x="1798320" y="5920740"/>
             <a:ext cx="1074420" cy="213360"/>
           </a:xfrm>
           <a:prstGeom prst="rect">
@@ -34653,7 +36120,61 @@
       </p:sp>
       <p:sp>
         <p:nvSpPr>
-          <p:cNvPr id="16" name="Text 11"/>
+          <p:cNvPr id="20" name="Shape 16"/>
+          <p:cNvSpPr/>
+          <p:nvPr/>
+        </p:nvSpPr>
+        <p:spPr>
+          <a:xfrm>
+            <a:off x="3276600" y="1463040"/>
+            <a:ext cx="8473440" cy="1680686"/>
+          </a:xfrm>
+          <a:prstGeom prst="rect">
+            <a:avLst/>
+          </a:prstGeom>
+          <a:solidFill>
+            <a:srgbClr val="FFFFFF">
+              <a:alpha val="0"/>
+            </a:srgbClr>
+          </a:solidFill>
+          <a:ln w="7620">
+            <a:solidFill>
+              <a:srgbClr val="CFDDE6"/>
+            </a:solidFill>
+            <a:prstDash val="solid"/>
+          </a:ln>
+        </p:spPr>
+      </p:sp>
+      <p:sp>
+        <p:nvSpPr>
+          <p:cNvPr id="21" name="Shape 17"/>
+          <p:cNvSpPr/>
+          <p:nvPr/>
+        </p:nvSpPr>
+        <p:spPr>
+          <a:xfrm>
+            <a:off x="3284220" y="1470660"/>
+            <a:ext cx="8458200" cy="400050"/>
+          </a:xfrm>
+          <a:prstGeom prst="rect">
+            <a:avLst/>
+          </a:prstGeom>
+          <a:solidFill>
+            <a:srgbClr val="005B94"/>
+          </a:solidFill>
+          <a:ln w="12700">
+            <a:solidFill>
+              <a:srgbClr val="005B94">
+                <a:alpha val="0"/>
+              </a:srgbClr>
+            </a:solidFill>
+            <a:prstDash val="solid"/>
+          </a:ln>
+        </p:spPr>
+      </p:sp>
+      <p:sp>
+        <p:nvSpPr>
+          <p:cNvPr id="22" name="Text 18"/>
           <p:cNvSpPr/>
           <p:nvPr/>
         </p:nvSpPr>
@@ -34695,14 +36216,68 @@
       </p:sp>
       <p:sp>
         <p:nvSpPr>
-          <p:cNvPr id="17" name="Text 12"/>
-          <p:cNvSpPr/>
-          <p:nvPr/>
-        </p:nvSpPr>
-        <p:spPr>
-          <a:xfrm>
-            <a:off x="3375660" y="2253020"/>
-            <a:ext cx="1677829" cy="224790"/>
+          <p:cNvPr id="23" name="Shape 19"/>
+          <p:cNvSpPr/>
+          <p:nvPr/>
+        </p:nvSpPr>
+        <p:spPr>
+          <a:xfrm>
+            <a:off x="3284220" y="1870710"/>
+            <a:ext cx="2768560" cy="332661"/>
+          </a:xfrm>
+          <a:prstGeom prst="rect">
+            <a:avLst/>
+          </a:prstGeom>
+          <a:solidFill>
+            <a:srgbClr val="FFFFFF"/>
+          </a:solidFill>
+          <a:ln w="12700">
+            <a:solidFill>
+              <a:srgbClr val="FFFFFF">
+                <a:alpha val="0"/>
+              </a:srgbClr>
+            </a:solidFill>
+            <a:prstDash val="solid"/>
+          </a:ln>
+        </p:spPr>
+      </p:sp>
+      <p:sp>
+        <p:nvSpPr>
+          <p:cNvPr id="24" name="Shape 20"/>
+          <p:cNvSpPr/>
+          <p:nvPr/>
+        </p:nvSpPr>
+        <p:spPr>
+          <a:xfrm>
+            <a:off x="3284220" y="2188131"/>
+            <a:ext cx="2768560" cy="15240"/>
+          </a:xfrm>
+          <a:prstGeom prst="rect">
+            <a:avLst/>
+          </a:prstGeom>
+          <a:solidFill>
+            <a:srgbClr val="005B94"/>
+          </a:solidFill>
+          <a:ln w="12700">
+            <a:solidFill>
+              <a:srgbClr val="005B94">
+                <a:alpha val="0"/>
+              </a:srgbClr>
+            </a:solidFill>
+            <a:prstDash val="solid"/>
+          </a:ln>
+        </p:spPr>
+      </p:sp>
+      <p:sp>
+        <p:nvSpPr>
+          <p:cNvPr id="25" name="Text 21"/>
+          <p:cNvSpPr/>
+          <p:nvPr/>
+        </p:nvSpPr>
+        <p:spPr>
+          <a:xfrm>
+            <a:off x="3375660" y="1896070"/>
+            <a:ext cx="2585680" cy="274320"/>
           </a:xfrm>
           <a:prstGeom prst="rect">
             <a:avLst/>
@@ -34716,12 +36291,273 @@
           <a:p>
             <a:pPr algn="ctr" indent="0" marL="0">
               <a:lnSpc>
-                <a:spcPts val="1740"/>
-              </a:lnSpc>
-              <a:buNone/>
-            </a:pPr>
-            <a:r>
-              <a:rPr lang="en-US" sz="1200" dirty="0">
+                <a:spcPts val="2160"/>
+              </a:lnSpc>
+              <a:buNone/>
+            </a:pPr>
+            <a:r>
+              <a:rPr lang="en-US" sz="1600" b="1" dirty="0">
+                <a:solidFill>
+                  <a:srgbClr val="005B94"/>
+                </a:solidFill>
+                <a:latin typeface="Microsoft YaHei" pitchFamily="34" charset="0"/>
+                <a:ea typeface="Microsoft YaHei" pitchFamily="34" charset="-122"/>
+                <a:cs typeface="Microsoft YaHei" pitchFamily="34" charset="-120"/>
+              </a:rPr>
+              <a:t>起止时间</a:t>
+            </a:r>
+            <a:endParaRPr lang="en-US" sz="1600" dirty="0"/>
+          </a:p>
+        </p:txBody>
+      </p:sp>
+      <p:sp>
+        <p:nvSpPr>
+          <p:cNvPr id="26" name="Shape 22"/>
+          <p:cNvSpPr/>
+          <p:nvPr/>
+        </p:nvSpPr>
+        <p:spPr>
+          <a:xfrm>
+            <a:off x="6128980" y="1870710"/>
+            <a:ext cx="2768560" cy="332661"/>
+          </a:xfrm>
+          <a:prstGeom prst="rect">
+            <a:avLst/>
+          </a:prstGeom>
+          <a:solidFill>
+            <a:srgbClr val="FFFFFF"/>
+          </a:solidFill>
+          <a:ln w="12700">
+            <a:solidFill>
+              <a:srgbClr val="FFFFFF">
+                <a:alpha val="0"/>
+              </a:srgbClr>
+            </a:solidFill>
+            <a:prstDash val="solid"/>
+          </a:ln>
+        </p:spPr>
+      </p:sp>
+      <p:sp>
+        <p:nvSpPr>
+          <p:cNvPr id="27" name="Shape 23"/>
+          <p:cNvSpPr/>
+          <p:nvPr/>
+        </p:nvSpPr>
+        <p:spPr>
+          <a:xfrm>
+            <a:off x="6128980" y="2188131"/>
+            <a:ext cx="2768560" cy="15240"/>
+          </a:xfrm>
+          <a:prstGeom prst="rect">
+            <a:avLst/>
+          </a:prstGeom>
+          <a:solidFill>
+            <a:srgbClr val="005B94"/>
+          </a:solidFill>
+          <a:ln w="12700">
+            <a:solidFill>
+              <a:srgbClr val="005B94">
+                <a:alpha val="0"/>
+              </a:srgbClr>
+            </a:solidFill>
+            <a:prstDash val="solid"/>
+          </a:ln>
+        </p:spPr>
+      </p:sp>
+      <p:sp>
+        <p:nvSpPr>
+          <p:cNvPr id="28" name="Text 24"/>
+          <p:cNvSpPr/>
+          <p:nvPr/>
+        </p:nvSpPr>
+        <p:spPr>
+          <a:xfrm>
+            <a:off x="6220420" y="1896070"/>
+            <a:ext cx="2585680" cy="274320"/>
+          </a:xfrm>
+          <a:prstGeom prst="rect">
+            <a:avLst/>
+          </a:prstGeom>
+          <a:noFill/>
+          <a:ln/>
+        </p:spPr>
+        <p:txBody>
+          <a:bodyPr wrap="square" lIns="0" tIns="0" rIns="0" bIns="0" rtlCol="0" anchor="ctr"/>
+          <a:lstStyle/>
+          <a:p>
+            <a:pPr algn="ctr" indent="0" marL="0">
+              <a:lnSpc>
+                <a:spcPts val="2160"/>
+              </a:lnSpc>
+              <a:buNone/>
+            </a:pPr>
+            <a:r>
+              <a:rPr lang="en-US" sz="1600" b="1" dirty="0">
+                <a:solidFill>
+                  <a:srgbClr val="005B94"/>
+                </a:solidFill>
+                <a:latin typeface="Microsoft YaHei" pitchFamily="34" charset="0"/>
+                <a:ea typeface="Microsoft YaHei" pitchFamily="34" charset="-122"/>
+                <a:cs typeface="Microsoft YaHei" pitchFamily="34" charset="-120"/>
+              </a:rPr>
+              <a:t>学校／工作单位</a:t>
+            </a:r>
+            <a:endParaRPr lang="en-US" sz="1600" dirty="0"/>
+          </a:p>
+        </p:txBody>
+      </p:sp>
+      <p:sp>
+        <p:nvSpPr>
+          <p:cNvPr id="29" name="Shape 25"/>
+          <p:cNvSpPr/>
+          <p:nvPr/>
+        </p:nvSpPr>
+        <p:spPr>
+          <a:xfrm>
+            <a:off x="8973741" y="1870710"/>
+            <a:ext cx="2768679" cy="332661"/>
+          </a:xfrm>
+          <a:prstGeom prst="rect">
+            <a:avLst/>
+          </a:prstGeom>
+          <a:solidFill>
+            <a:srgbClr val="FFFFFF"/>
+          </a:solidFill>
+          <a:ln w="12700">
+            <a:solidFill>
+              <a:srgbClr val="FFFFFF">
+                <a:alpha val="0"/>
+              </a:srgbClr>
+            </a:solidFill>
+            <a:prstDash val="solid"/>
+          </a:ln>
+        </p:spPr>
+      </p:sp>
+      <p:sp>
+        <p:nvSpPr>
+          <p:cNvPr id="30" name="Shape 26"/>
+          <p:cNvSpPr/>
+          <p:nvPr/>
+        </p:nvSpPr>
+        <p:spPr>
+          <a:xfrm>
+            <a:off x="8973741" y="2188131"/>
+            <a:ext cx="2768679" cy="15240"/>
+          </a:xfrm>
+          <a:prstGeom prst="rect">
+            <a:avLst/>
+          </a:prstGeom>
+          <a:solidFill>
+            <a:srgbClr val="005B94"/>
+          </a:solidFill>
+          <a:ln w="12700">
+            <a:solidFill>
+              <a:srgbClr val="005B94">
+                <a:alpha val="0"/>
+              </a:srgbClr>
+            </a:solidFill>
+            <a:prstDash val="solid"/>
+          </a:ln>
+        </p:spPr>
+      </p:sp>
+      <p:sp>
+        <p:nvSpPr>
+          <p:cNvPr id="31" name="Text 27"/>
+          <p:cNvSpPr/>
+          <p:nvPr/>
+        </p:nvSpPr>
+        <p:spPr>
+          <a:xfrm>
+            <a:off x="9065181" y="1896070"/>
+            <a:ext cx="2585799" cy="274320"/>
+          </a:xfrm>
+          <a:prstGeom prst="rect">
+            <a:avLst/>
+          </a:prstGeom>
+          <a:noFill/>
+          <a:ln/>
+        </p:spPr>
+        <p:txBody>
+          <a:bodyPr wrap="square" lIns="0" tIns="0" rIns="0" bIns="0" rtlCol="0" anchor="ctr"/>
+          <a:lstStyle/>
+          <a:p>
+            <a:pPr algn="ctr" indent="0" marL="0">
+              <a:lnSpc>
+                <a:spcPts val="2160"/>
+              </a:lnSpc>
+              <a:buNone/>
+            </a:pPr>
+            <a:r>
+              <a:rPr lang="en-US" sz="1600" b="1" dirty="0">
+                <a:solidFill>
+                  <a:srgbClr val="005B94"/>
+                </a:solidFill>
+                <a:latin typeface="Microsoft YaHei" pitchFamily="34" charset="0"/>
+                <a:ea typeface="Microsoft YaHei" pitchFamily="34" charset="-122"/>
+                <a:cs typeface="Microsoft YaHei" pitchFamily="34" charset="-120"/>
+              </a:rPr>
+              <a:t>学位／专业／职务</a:t>
+            </a:r>
+            <a:endParaRPr lang="en-US" sz="1600" dirty="0"/>
+          </a:p>
+        </p:txBody>
+      </p:sp>
+      <p:sp>
+        <p:nvSpPr>
+          <p:cNvPr id="32" name="Shape 28"/>
+          <p:cNvSpPr/>
+          <p:nvPr/>
+        </p:nvSpPr>
+        <p:spPr>
+          <a:xfrm>
+            <a:off x="3284220" y="2203371"/>
+            <a:ext cx="2768560" cy="315992"/>
+          </a:xfrm>
+          <a:prstGeom prst="rect">
+            <a:avLst/>
+          </a:prstGeom>
+          <a:solidFill>
+            <a:srgbClr val="FFFFFF"/>
+          </a:solidFill>
+          <a:ln w="12700">
+            <a:solidFill>
+              <a:srgbClr val="FFFFFF">
+                <a:alpha val="0"/>
+              </a:srgbClr>
+            </a:solidFill>
+            <a:prstDash val="solid"/>
+          </a:ln>
+        </p:spPr>
+      </p:sp>
+      <p:sp>
+        <p:nvSpPr>
+          <p:cNvPr id="33" name="Text 29"/>
+          <p:cNvSpPr/>
+          <p:nvPr/>
+        </p:nvSpPr>
+        <p:spPr>
+          <a:xfrm>
+            <a:off x="3375660" y="2236351"/>
+            <a:ext cx="2585680" cy="257651"/>
+          </a:xfrm>
+          <a:prstGeom prst="rect">
+            <a:avLst/>
+          </a:prstGeom>
+          <a:noFill/>
+          <a:ln/>
+        </p:spPr>
+        <p:txBody>
+          <a:bodyPr wrap="square" lIns="0" tIns="0" rIns="0" bIns="0" rtlCol="0" anchor="ctr"/>
+          <a:lstStyle/>
+          <a:p>
+            <a:pPr algn="ctr" indent="0" marL="0">
+              <a:lnSpc>
+                <a:spcPts val="2030"/>
+              </a:lnSpc>
+              <a:buNone/>
+            </a:pPr>
+            <a:r>
+              <a:rPr lang="en-US" sz="1400" dirty="0">
                 <a:solidFill>
                   <a:srgbClr val="12374E"/>
                 </a:solidFill>
@@ -34731,20 +36567,47 @@
               </a:rPr>
               <a:t>20XX—20XX</a:t>
             </a:r>
-            <a:endParaRPr lang="en-US" sz="1200" dirty="0"/>
-          </a:p>
-        </p:txBody>
-      </p:sp>
-      <p:sp>
-        <p:nvSpPr>
-          <p:cNvPr id="18" name="Text 13"/>
-          <p:cNvSpPr/>
-          <p:nvPr/>
-        </p:nvSpPr>
-        <p:spPr>
-          <a:xfrm>
-            <a:off x="5312569" y="2253020"/>
-            <a:ext cx="3200400" cy="224790"/>
+            <a:endParaRPr lang="en-US" sz="1400" dirty="0"/>
+          </a:p>
+        </p:txBody>
+      </p:sp>
+      <p:sp>
+        <p:nvSpPr>
+          <p:cNvPr id="34" name="Shape 30"/>
+          <p:cNvSpPr/>
+          <p:nvPr/>
+        </p:nvSpPr>
+        <p:spPr>
+          <a:xfrm>
+            <a:off x="6128980" y="2203371"/>
+            <a:ext cx="2768560" cy="315992"/>
+          </a:xfrm>
+          <a:prstGeom prst="rect">
+            <a:avLst/>
+          </a:prstGeom>
+          <a:solidFill>
+            <a:srgbClr val="FFFFFF"/>
+          </a:solidFill>
+          <a:ln w="12700">
+            <a:solidFill>
+              <a:srgbClr val="FFFFFF">
+                <a:alpha val="0"/>
+              </a:srgbClr>
+            </a:solidFill>
+            <a:prstDash val="solid"/>
+          </a:ln>
+        </p:spPr>
+      </p:sp>
+      <p:sp>
+        <p:nvSpPr>
+          <p:cNvPr id="35" name="Text 31"/>
+          <p:cNvSpPr/>
+          <p:nvPr/>
+        </p:nvSpPr>
+        <p:spPr>
+          <a:xfrm>
+            <a:off x="6220420" y="2236351"/>
+            <a:ext cx="2585680" cy="257651"/>
           </a:xfrm>
           <a:prstGeom prst="rect">
             <a:avLst/>
@@ -34758,12 +36621,12 @@
           <a:p>
             <a:pPr algn="ctr" indent="0" marL="0">
               <a:lnSpc>
-                <a:spcPts val="1740"/>
-              </a:lnSpc>
-              <a:buNone/>
-            </a:pPr>
-            <a:r>
-              <a:rPr lang="en-US" sz="1200" dirty="0">
+                <a:spcPts val="2030"/>
+              </a:lnSpc>
+              <a:buNone/>
+            </a:pPr>
+            <a:r>
+              <a:rPr lang="en-US" sz="1400" dirty="0">
                 <a:solidFill>
                   <a:srgbClr val="12374E"/>
                 </a:solidFill>
@@ -34773,20 +36636,47 @@
               </a:rPr>
               <a:t>学校及院系</a:t>
             </a:r>
-            <a:endParaRPr lang="en-US" sz="1200" dirty="0"/>
-          </a:p>
-        </p:txBody>
-      </p:sp>
-      <p:sp>
-        <p:nvSpPr>
-          <p:cNvPr id="19" name="Text 14"/>
-          <p:cNvSpPr/>
-          <p:nvPr/>
-        </p:nvSpPr>
-        <p:spPr>
-          <a:xfrm>
-            <a:off x="8772049" y="2253020"/>
-            <a:ext cx="2878931" cy="224790"/>
+            <a:endParaRPr lang="en-US" sz="1400" dirty="0"/>
+          </a:p>
+        </p:txBody>
+      </p:sp>
+      <p:sp>
+        <p:nvSpPr>
+          <p:cNvPr id="36" name="Shape 32"/>
+          <p:cNvSpPr/>
+          <p:nvPr/>
+        </p:nvSpPr>
+        <p:spPr>
+          <a:xfrm>
+            <a:off x="8973741" y="2203371"/>
+            <a:ext cx="2768679" cy="315992"/>
+          </a:xfrm>
+          <a:prstGeom prst="rect">
+            <a:avLst/>
+          </a:prstGeom>
+          <a:solidFill>
+            <a:srgbClr val="FFFFFF"/>
+          </a:solidFill>
+          <a:ln w="12700">
+            <a:solidFill>
+              <a:srgbClr val="FFFFFF">
+                <a:alpha val="0"/>
+              </a:srgbClr>
+            </a:solidFill>
+            <a:prstDash val="solid"/>
+          </a:ln>
+        </p:spPr>
+      </p:sp>
+      <p:sp>
+        <p:nvSpPr>
+          <p:cNvPr id="37" name="Text 33"/>
+          <p:cNvSpPr/>
+          <p:nvPr/>
+        </p:nvSpPr>
+        <p:spPr>
+          <a:xfrm>
+            <a:off x="9065181" y="2236351"/>
+            <a:ext cx="2585799" cy="257651"/>
           </a:xfrm>
           <a:prstGeom prst="rect">
             <a:avLst/>
@@ -34800,12 +36690,12 @@
           <a:p>
             <a:pPr algn="ctr" indent="0" marL="0">
               <a:lnSpc>
-                <a:spcPts val="1740"/>
-              </a:lnSpc>
-              <a:buNone/>
-            </a:pPr>
-            <a:r>
-              <a:rPr lang="en-US" sz="1200" dirty="0">
+                <a:spcPts val="2030"/>
+              </a:lnSpc>
+              <a:buNone/>
+            </a:pPr>
+            <a:r>
+              <a:rPr lang="en-US" sz="1400" dirty="0">
                 <a:solidFill>
                   <a:srgbClr val="12374E"/>
                 </a:solidFill>
@@ -34815,20 +36705,47 @@
               </a:rPr>
               <a:t>学位与专业</a:t>
             </a:r>
-            <a:endParaRPr lang="en-US" sz="1200" dirty="0"/>
-          </a:p>
-        </p:txBody>
-      </p:sp>
-      <p:sp>
-        <p:nvSpPr>
-          <p:cNvPr id="20" name="Text 15"/>
-          <p:cNvSpPr/>
-          <p:nvPr/>
-        </p:nvSpPr>
-        <p:spPr>
-          <a:xfrm>
-            <a:off x="3375660" y="2554010"/>
-            <a:ext cx="1677829" cy="220980"/>
+            <a:endParaRPr lang="en-US" sz="1400" dirty="0"/>
+          </a:p>
+        </p:txBody>
+      </p:sp>
+      <p:sp>
+        <p:nvSpPr>
+          <p:cNvPr id="38" name="Shape 34"/>
+          <p:cNvSpPr/>
+          <p:nvPr/>
+        </p:nvSpPr>
+        <p:spPr>
+          <a:xfrm>
+            <a:off x="3284220" y="2519363"/>
+            <a:ext cx="2768560" cy="308372"/>
+          </a:xfrm>
+          <a:prstGeom prst="rect">
+            <a:avLst/>
+          </a:prstGeom>
+          <a:solidFill>
+            <a:srgbClr val="FFFFFF"/>
+          </a:solidFill>
+          <a:ln w="12700">
+            <a:solidFill>
+              <a:srgbClr val="FFFFFF">
+                <a:alpha val="0"/>
+              </a:srgbClr>
+            </a:solidFill>
+            <a:prstDash val="solid"/>
+          </a:ln>
+        </p:spPr>
+      </p:sp>
+      <p:sp>
+        <p:nvSpPr>
+          <p:cNvPr id="39" name="Text 35"/>
+          <p:cNvSpPr/>
+          <p:nvPr/>
+        </p:nvSpPr>
+        <p:spPr>
+          <a:xfrm>
+            <a:off x="3375660" y="2544723"/>
+            <a:ext cx="2585680" cy="257651"/>
           </a:xfrm>
           <a:prstGeom prst="rect">
             <a:avLst/>
@@ -34842,12 +36759,12 @@
           <a:p>
             <a:pPr algn="ctr" indent="0" marL="0">
               <a:lnSpc>
-                <a:spcPts val="1740"/>
-              </a:lnSpc>
-              <a:buNone/>
-            </a:pPr>
-            <a:r>
-              <a:rPr lang="en-US" sz="1200" dirty="0">
+                <a:spcPts val="2030"/>
+              </a:lnSpc>
+              <a:buNone/>
+            </a:pPr>
+            <a:r>
+              <a:rPr lang="en-US" sz="1400" dirty="0">
                 <a:solidFill>
                   <a:srgbClr val="12374E"/>
                 </a:solidFill>
@@ -34857,20 +36774,47 @@
               </a:rPr>
               <a:t>20XX—20XX</a:t>
             </a:r>
-            <a:endParaRPr lang="en-US" sz="1200" dirty="0"/>
-          </a:p>
-        </p:txBody>
-      </p:sp>
-      <p:sp>
-        <p:nvSpPr>
-          <p:cNvPr id="21" name="Text 16"/>
-          <p:cNvSpPr/>
-          <p:nvPr/>
-        </p:nvSpPr>
-        <p:spPr>
-          <a:xfrm>
-            <a:off x="5312569" y="2554010"/>
-            <a:ext cx="3200400" cy="220980"/>
+            <a:endParaRPr lang="en-US" sz="1400" dirty="0"/>
+          </a:p>
+        </p:txBody>
+      </p:sp>
+      <p:sp>
+        <p:nvSpPr>
+          <p:cNvPr id="40" name="Shape 36"/>
+          <p:cNvSpPr/>
+          <p:nvPr/>
+        </p:nvSpPr>
+        <p:spPr>
+          <a:xfrm>
+            <a:off x="6128980" y="2519363"/>
+            <a:ext cx="2768560" cy="308372"/>
+          </a:xfrm>
+          <a:prstGeom prst="rect">
+            <a:avLst/>
+          </a:prstGeom>
+          <a:solidFill>
+            <a:srgbClr val="FFFFFF"/>
+          </a:solidFill>
+          <a:ln w="12700">
+            <a:solidFill>
+              <a:srgbClr val="FFFFFF">
+                <a:alpha val="0"/>
+              </a:srgbClr>
+            </a:solidFill>
+            <a:prstDash val="solid"/>
+          </a:ln>
+        </p:spPr>
+      </p:sp>
+      <p:sp>
+        <p:nvSpPr>
+          <p:cNvPr id="41" name="Text 37"/>
+          <p:cNvSpPr/>
+          <p:nvPr/>
+        </p:nvSpPr>
+        <p:spPr>
+          <a:xfrm>
+            <a:off x="6220420" y="2544723"/>
+            <a:ext cx="2585680" cy="257651"/>
           </a:xfrm>
           <a:prstGeom prst="rect">
             <a:avLst/>
@@ -34884,12 +36828,12 @@
           <a:p>
             <a:pPr algn="ctr" indent="0" marL="0">
               <a:lnSpc>
-                <a:spcPts val="1740"/>
-              </a:lnSpc>
-              <a:buNone/>
-            </a:pPr>
-            <a:r>
-              <a:rPr lang="en-US" sz="1200" dirty="0">
+                <a:spcPts val="2030"/>
+              </a:lnSpc>
+              <a:buNone/>
+            </a:pPr>
+            <a:r>
+              <a:rPr lang="en-US" sz="1400" dirty="0">
                 <a:solidFill>
                   <a:srgbClr val="12374E"/>
                 </a:solidFill>
@@ -34899,20 +36843,47 @@
               </a:rPr>
               <a:t>研究机构／工作单位</a:t>
             </a:r>
-            <a:endParaRPr lang="en-US" sz="1200" dirty="0"/>
-          </a:p>
-        </p:txBody>
-      </p:sp>
-      <p:sp>
-        <p:nvSpPr>
-          <p:cNvPr id="22" name="Text 17"/>
-          <p:cNvSpPr/>
-          <p:nvPr/>
-        </p:nvSpPr>
-        <p:spPr>
-          <a:xfrm>
-            <a:off x="8772049" y="2554010"/>
-            <a:ext cx="2878931" cy="220980"/>
+            <a:endParaRPr lang="en-US" sz="1400" dirty="0"/>
+          </a:p>
+        </p:txBody>
+      </p:sp>
+      <p:sp>
+        <p:nvSpPr>
+          <p:cNvPr id="42" name="Shape 38"/>
+          <p:cNvSpPr/>
+          <p:nvPr/>
+        </p:nvSpPr>
+        <p:spPr>
+          <a:xfrm>
+            <a:off x="8973741" y="2519363"/>
+            <a:ext cx="2768679" cy="308372"/>
+          </a:xfrm>
+          <a:prstGeom prst="rect">
+            <a:avLst/>
+          </a:prstGeom>
+          <a:solidFill>
+            <a:srgbClr val="FFFFFF"/>
+          </a:solidFill>
+          <a:ln w="12700">
+            <a:solidFill>
+              <a:srgbClr val="FFFFFF">
+                <a:alpha val="0"/>
+              </a:srgbClr>
+            </a:solidFill>
+            <a:prstDash val="solid"/>
+          </a:ln>
+        </p:spPr>
+      </p:sp>
+      <p:sp>
+        <p:nvSpPr>
+          <p:cNvPr id="43" name="Text 39"/>
+          <p:cNvSpPr/>
+          <p:nvPr/>
+        </p:nvSpPr>
+        <p:spPr>
+          <a:xfrm>
+            <a:off x="9065181" y="2544723"/>
+            <a:ext cx="2585799" cy="257651"/>
           </a:xfrm>
           <a:prstGeom prst="rect">
             <a:avLst/>
@@ -34926,12 +36897,12 @@
           <a:p>
             <a:pPr algn="ctr" indent="0" marL="0">
               <a:lnSpc>
-                <a:spcPts val="1740"/>
-              </a:lnSpc>
-              <a:buNone/>
-            </a:pPr>
-            <a:r>
-              <a:rPr lang="en-US" sz="1200" dirty="0">
+                <a:spcPts val="2030"/>
+              </a:lnSpc>
+              <a:buNone/>
+            </a:pPr>
+            <a:r>
+              <a:rPr lang="en-US" sz="1400" dirty="0">
                 <a:solidFill>
                   <a:srgbClr val="12374E"/>
                 </a:solidFill>
@@ -34941,20 +36912,47 @@
               </a:rPr>
               <a:t>科研岗位</a:t>
             </a:r>
-            <a:endParaRPr lang="en-US" sz="1200" dirty="0"/>
-          </a:p>
-        </p:txBody>
-      </p:sp>
-      <p:sp>
-        <p:nvSpPr>
-          <p:cNvPr id="23" name="Text 18"/>
-          <p:cNvSpPr/>
-          <p:nvPr/>
-        </p:nvSpPr>
-        <p:spPr>
-          <a:xfrm>
-            <a:off x="3375660" y="2851190"/>
-            <a:ext cx="1677829" cy="220980"/>
+            <a:endParaRPr lang="en-US" sz="1400" dirty="0"/>
+          </a:p>
+        </p:txBody>
+      </p:sp>
+      <p:sp>
+        <p:nvSpPr>
+          <p:cNvPr id="44" name="Shape 40"/>
+          <p:cNvSpPr/>
+          <p:nvPr/>
+        </p:nvSpPr>
+        <p:spPr>
+          <a:xfrm>
+            <a:off x="3284220" y="2827734"/>
+            <a:ext cx="2768560" cy="308372"/>
+          </a:xfrm>
+          <a:prstGeom prst="rect">
+            <a:avLst/>
+          </a:prstGeom>
+          <a:solidFill>
+            <a:srgbClr val="FFFFFF"/>
+          </a:solidFill>
+          <a:ln w="12700">
+            <a:solidFill>
+              <a:srgbClr val="FFFFFF">
+                <a:alpha val="0"/>
+              </a:srgbClr>
+            </a:solidFill>
+            <a:prstDash val="solid"/>
+          </a:ln>
+        </p:spPr>
+      </p:sp>
+      <p:sp>
+        <p:nvSpPr>
+          <p:cNvPr id="45" name="Text 41"/>
+          <p:cNvSpPr/>
+          <p:nvPr/>
+        </p:nvSpPr>
+        <p:spPr>
+          <a:xfrm>
+            <a:off x="3375660" y="2853095"/>
+            <a:ext cx="2585680" cy="257651"/>
           </a:xfrm>
           <a:prstGeom prst="rect">
             <a:avLst/>
@@ -34968,12 +36966,12 @@
           <a:p>
             <a:pPr algn="ctr" indent="0" marL="0">
               <a:lnSpc>
-                <a:spcPts val="1740"/>
-              </a:lnSpc>
-              <a:buNone/>
-            </a:pPr>
-            <a:r>
-              <a:rPr lang="en-US" sz="1200" dirty="0">
+                <a:spcPts val="2030"/>
+              </a:lnSpc>
+              <a:buNone/>
+            </a:pPr>
+            <a:r>
+              <a:rPr lang="en-US" sz="1400" dirty="0">
                 <a:solidFill>
                   <a:srgbClr val="12374E"/>
                 </a:solidFill>
@@ -34983,20 +36981,47 @@
               </a:rPr>
               <a:t>20XX—至今</a:t>
             </a:r>
-            <a:endParaRPr lang="en-US" sz="1200" dirty="0"/>
-          </a:p>
-        </p:txBody>
-      </p:sp>
-      <p:sp>
-        <p:nvSpPr>
-          <p:cNvPr id="24" name="Text 19"/>
-          <p:cNvSpPr/>
-          <p:nvPr/>
-        </p:nvSpPr>
-        <p:spPr>
-          <a:xfrm>
-            <a:off x="5312569" y="2851190"/>
-            <a:ext cx="3200400" cy="220980"/>
+            <a:endParaRPr lang="en-US" sz="1400" dirty="0"/>
+          </a:p>
+        </p:txBody>
+      </p:sp>
+      <p:sp>
+        <p:nvSpPr>
+          <p:cNvPr id="46" name="Shape 42"/>
+          <p:cNvSpPr/>
+          <p:nvPr/>
+        </p:nvSpPr>
+        <p:spPr>
+          <a:xfrm>
+            <a:off x="6128980" y="2827734"/>
+            <a:ext cx="2768560" cy="308372"/>
+          </a:xfrm>
+          <a:prstGeom prst="rect">
+            <a:avLst/>
+          </a:prstGeom>
+          <a:solidFill>
+            <a:srgbClr val="FFFFFF"/>
+          </a:solidFill>
+          <a:ln w="12700">
+            <a:solidFill>
+              <a:srgbClr val="FFFFFF">
+                <a:alpha val="0"/>
+              </a:srgbClr>
+            </a:solidFill>
+            <a:prstDash val="solid"/>
+          </a:ln>
+        </p:spPr>
+      </p:sp>
+      <p:sp>
+        <p:nvSpPr>
+          <p:cNvPr id="47" name="Text 43"/>
+          <p:cNvSpPr/>
+          <p:nvPr/>
+        </p:nvSpPr>
+        <p:spPr>
+          <a:xfrm>
+            <a:off x="6220420" y="2853095"/>
+            <a:ext cx="2585680" cy="257651"/>
           </a:xfrm>
           <a:prstGeom prst="rect">
             <a:avLst/>
@@ -35010,12 +37035,12 @@
           <a:p>
             <a:pPr algn="ctr" indent="0" marL="0">
               <a:lnSpc>
-                <a:spcPts val="1740"/>
-              </a:lnSpc>
-              <a:buNone/>
-            </a:pPr>
-            <a:r>
-              <a:rPr lang="en-US" sz="1200" dirty="0">
+                <a:spcPts val="2030"/>
+              </a:lnSpc>
+              <a:buNone/>
+            </a:pPr>
+            <a:r>
+              <a:rPr lang="en-US" sz="1400" dirty="0">
                 <a:solidFill>
                   <a:srgbClr val="12374E"/>
                 </a:solidFill>
@@ -35025,20 +37050,47 @@
               </a:rPr>
               <a:t>现工作单位</a:t>
             </a:r>
-            <a:endParaRPr lang="en-US" sz="1200" dirty="0"/>
-          </a:p>
-        </p:txBody>
-      </p:sp>
-      <p:sp>
-        <p:nvSpPr>
-          <p:cNvPr id="25" name="Text 20"/>
-          <p:cNvSpPr/>
-          <p:nvPr/>
-        </p:nvSpPr>
-        <p:spPr>
-          <a:xfrm>
-            <a:off x="8772049" y="2851190"/>
-            <a:ext cx="2878931" cy="220980"/>
+            <a:endParaRPr lang="en-US" sz="1400" dirty="0"/>
+          </a:p>
+        </p:txBody>
+      </p:sp>
+      <p:sp>
+        <p:nvSpPr>
+          <p:cNvPr id="48" name="Shape 44"/>
+          <p:cNvSpPr/>
+          <p:nvPr/>
+        </p:nvSpPr>
+        <p:spPr>
+          <a:xfrm>
+            <a:off x="8973741" y="2827734"/>
+            <a:ext cx="2768679" cy="308372"/>
+          </a:xfrm>
+          <a:prstGeom prst="rect">
+            <a:avLst/>
+          </a:prstGeom>
+          <a:solidFill>
+            <a:srgbClr val="FFFFFF"/>
+          </a:solidFill>
+          <a:ln w="12700">
+            <a:solidFill>
+              <a:srgbClr val="FFFFFF">
+                <a:alpha val="0"/>
+              </a:srgbClr>
+            </a:solidFill>
+            <a:prstDash val="solid"/>
+          </a:ln>
+        </p:spPr>
+      </p:sp>
+      <p:sp>
+        <p:nvSpPr>
+          <p:cNvPr id="49" name="Text 45"/>
+          <p:cNvSpPr/>
+          <p:nvPr/>
+        </p:nvSpPr>
+        <p:spPr>
+          <a:xfrm>
+            <a:off x="9065181" y="2853095"/>
+            <a:ext cx="2585799" cy="257651"/>
           </a:xfrm>
           <a:prstGeom prst="rect">
             <a:avLst/>
@@ -35052,12 +37104,12 @@
           <a:p>
             <a:pPr algn="ctr" indent="0" marL="0">
               <a:lnSpc>
-                <a:spcPts val="1740"/>
-              </a:lnSpc>
-              <a:buNone/>
-            </a:pPr>
-            <a:r>
-              <a:rPr lang="en-US" sz="1200" dirty="0">
+                <a:spcPts val="2030"/>
+              </a:lnSpc>
+              <a:buNone/>
+            </a:pPr>
+            <a:r>
+              <a:rPr lang="en-US" sz="1400" dirty="0">
                 <a:solidFill>
                   <a:srgbClr val="12374E"/>
                 </a:solidFill>
@@ -35067,19 +37119,73 @@
               </a:rPr>
               <a:t>现任职务</a:t>
             </a:r>
-            <a:endParaRPr lang="en-US" sz="1200" dirty="0"/>
-          </a:p>
-        </p:txBody>
-      </p:sp>
-      <p:sp>
-        <p:nvSpPr>
-          <p:cNvPr id="26" name="Text 21"/>
-          <p:cNvSpPr/>
-          <p:nvPr/>
-        </p:nvSpPr>
-        <p:spPr>
-          <a:xfrm>
-            <a:off x="3406140" y="3293150"/>
+            <a:endParaRPr lang="en-US" sz="1400" dirty="0"/>
+          </a:p>
+        </p:txBody>
+      </p:sp>
+      <p:sp>
+        <p:nvSpPr>
+          <p:cNvPr id="50" name="Shape 46"/>
+          <p:cNvSpPr/>
+          <p:nvPr/>
+        </p:nvSpPr>
+        <p:spPr>
+          <a:xfrm>
+            <a:off x="3276600" y="3276600"/>
+            <a:ext cx="8473440" cy="1364933"/>
+          </a:xfrm>
+          <a:prstGeom prst="rect">
+            <a:avLst/>
+          </a:prstGeom>
+          <a:solidFill>
+            <a:srgbClr val="FFFFFF">
+              <a:alpha val="0"/>
+            </a:srgbClr>
+          </a:solidFill>
+          <a:ln w="7620">
+            <a:solidFill>
+              <a:srgbClr val="CFDDE6"/>
+            </a:solidFill>
+            <a:prstDash val="solid"/>
+          </a:ln>
+        </p:spPr>
+      </p:sp>
+      <p:sp>
+        <p:nvSpPr>
+          <p:cNvPr id="51" name="Shape 47"/>
+          <p:cNvSpPr/>
+          <p:nvPr/>
+        </p:nvSpPr>
+        <p:spPr>
+          <a:xfrm>
+            <a:off x="3284220" y="3284220"/>
+            <a:ext cx="8458200" cy="400050"/>
+          </a:xfrm>
+          <a:prstGeom prst="rect">
+            <a:avLst/>
+          </a:prstGeom>
+          <a:solidFill>
+            <a:srgbClr val="005B94"/>
+          </a:solidFill>
+          <a:ln w="12700">
+            <a:solidFill>
+              <a:srgbClr val="005B94">
+                <a:alpha val="0"/>
+              </a:srgbClr>
+            </a:solidFill>
+            <a:prstDash val="solid"/>
+          </a:ln>
+        </p:spPr>
+      </p:sp>
+      <p:sp>
+        <p:nvSpPr>
+          <p:cNvPr id="52" name="Text 48"/>
+          <p:cNvSpPr/>
+          <p:nvPr/>
+        </p:nvSpPr>
+        <p:spPr>
+          <a:xfrm>
+            <a:off x="3406140" y="3329940"/>
             <a:ext cx="8214360" cy="308610"/>
           </a:xfrm>
           <a:prstGeom prst="rect">
@@ -35115,14 +37221,41 @@
       </p:sp>
       <p:sp>
         <p:nvSpPr>
-          <p:cNvPr id="27" name="Text 22"/>
-          <p:cNvSpPr/>
-          <p:nvPr/>
-        </p:nvSpPr>
-        <p:spPr>
-          <a:xfrm>
-            <a:off x="3406140" y="3738920"/>
-            <a:ext cx="4015740" cy="239911"/>
+          <p:cNvPr id="53" name="Shape 49"/>
+          <p:cNvSpPr/>
+          <p:nvPr/>
+        </p:nvSpPr>
+        <p:spPr>
+          <a:xfrm>
+            <a:off x="3284220" y="3684270"/>
+            <a:ext cx="4229100" cy="350520"/>
+          </a:xfrm>
+          <a:prstGeom prst="rect">
+            <a:avLst/>
+          </a:prstGeom>
+          <a:solidFill>
+            <a:srgbClr val="FFFFFF"/>
+          </a:solidFill>
+          <a:ln w="12700">
+            <a:solidFill>
+              <a:srgbClr val="FFFFFF">
+                <a:alpha val="0"/>
+              </a:srgbClr>
+            </a:solidFill>
+            <a:prstDash val="solid"/>
+          </a:ln>
+        </p:spPr>
+      </p:sp>
+      <p:sp>
+        <p:nvSpPr>
+          <p:cNvPr id="54" name="Text 50"/>
+          <p:cNvSpPr/>
+          <p:nvPr/>
+        </p:nvSpPr>
+        <p:spPr>
+          <a:xfrm>
+            <a:off x="3406140" y="3729990"/>
+            <a:ext cx="3985260" cy="274320"/>
           </a:xfrm>
           <a:prstGeom prst="rect">
             <a:avLst/>
@@ -35136,12 +37269,12 @@
           <a:p>
             <a:pPr algn="l" indent="0" marL="0">
               <a:lnSpc>
-                <a:spcPts val="1890"/>
-              </a:lnSpc>
-              <a:buNone/>
-            </a:pPr>
-            <a:r>
-              <a:rPr lang="en-US" sz="1400" b="1" dirty="0">
+                <a:spcPts val="2160"/>
+              </a:lnSpc>
+              <a:buNone/>
+            </a:pPr>
+            <a:r>
+              <a:rPr lang="en-US" sz="1600" b="1" dirty="0">
                 <a:solidFill>
                   <a:srgbClr val="005B94"/>
                 </a:solidFill>
@@ -35151,20 +37284,185 @@
               </a:rPr>
               <a:t>学术任职</a:t>
             </a:r>
+            <a:endParaRPr lang="en-US" sz="1600" dirty="0"/>
+          </a:p>
+        </p:txBody>
+      </p:sp>
+      <p:sp>
+        <p:nvSpPr>
+          <p:cNvPr id="55" name="Shape 51"/>
+          <p:cNvSpPr/>
+          <p:nvPr/>
+        </p:nvSpPr>
+        <p:spPr>
+          <a:xfrm>
+            <a:off x="7513320" y="3684270"/>
+            <a:ext cx="4229100" cy="350520"/>
+          </a:xfrm>
+          <a:prstGeom prst="rect">
+            <a:avLst/>
+          </a:prstGeom>
+          <a:solidFill>
+            <a:srgbClr val="FFFFFF"/>
+          </a:solidFill>
+          <a:ln w="12700">
+            <a:solidFill>
+              <a:srgbClr val="FFFFFF">
+                <a:alpha val="0"/>
+              </a:srgbClr>
+            </a:solidFill>
+            <a:prstDash val="solid"/>
+          </a:ln>
+        </p:spPr>
+      </p:sp>
+      <p:sp>
+        <p:nvSpPr>
+          <p:cNvPr id="56" name="Text 52"/>
+          <p:cNvSpPr/>
+          <p:nvPr/>
+        </p:nvSpPr>
+        <p:spPr>
+          <a:xfrm>
+            <a:off x="7635240" y="3729990"/>
+            <a:ext cx="3985260" cy="274320"/>
+          </a:xfrm>
+          <a:prstGeom prst="rect">
+            <a:avLst/>
+          </a:prstGeom>
+          <a:noFill/>
+          <a:ln/>
+        </p:spPr>
+        <p:txBody>
+          <a:bodyPr wrap="square" lIns="0" tIns="0" rIns="0" bIns="0" rtlCol="0" anchor="ctr"/>
+          <a:lstStyle/>
+          <a:p>
+            <a:pPr algn="l" indent="0" marL="0">
+              <a:lnSpc>
+                <a:spcPts val="2160"/>
+              </a:lnSpc>
+              <a:buNone/>
+            </a:pPr>
+            <a:r>
+              <a:rPr lang="en-US" sz="1600" b="1" dirty="0">
+                <a:solidFill>
+                  <a:srgbClr val="005B94"/>
+                </a:solidFill>
+                <a:latin typeface="Microsoft YaHei" pitchFamily="34" charset="0"/>
+                <a:ea typeface="Microsoft YaHei" pitchFamily="34" charset="-122"/>
+                <a:cs typeface="Microsoft YaHei" pitchFamily="34" charset="-120"/>
+              </a:rPr>
+              <a:t>代表性项目与奖项</a:t>
+            </a:r>
+            <a:endParaRPr lang="en-US" sz="1600" dirty="0"/>
+          </a:p>
+        </p:txBody>
+      </p:sp>
+      <p:sp>
+        <p:nvSpPr>
+          <p:cNvPr id="57" name="Shape 53"/>
+          <p:cNvSpPr/>
+          <p:nvPr/>
+        </p:nvSpPr>
+        <p:spPr>
+          <a:xfrm>
+            <a:off x="3284220" y="4034790"/>
+            <a:ext cx="4229100" cy="299561"/>
+          </a:xfrm>
+          <a:prstGeom prst="rect">
+            <a:avLst/>
+          </a:prstGeom>
+          <a:solidFill>
+            <a:srgbClr val="FFFFFF"/>
+          </a:solidFill>
+          <a:ln w="12700">
+            <a:solidFill>
+              <a:srgbClr val="FFFFFF">
+                <a:alpha val="0"/>
+              </a:srgbClr>
+            </a:solidFill>
+            <a:prstDash val="solid"/>
+          </a:ln>
+        </p:spPr>
+      </p:sp>
+      <p:sp>
+        <p:nvSpPr>
+          <p:cNvPr id="58" name="Text 54"/>
+          <p:cNvSpPr/>
+          <p:nvPr/>
+        </p:nvSpPr>
+        <p:spPr>
+          <a:xfrm>
+            <a:off x="3406140" y="4060150"/>
+            <a:ext cx="3985260" cy="248841"/>
+          </a:xfrm>
+          <a:prstGeom prst="rect">
+            <a:avLst/>
+          </a:prstGeom>
+          <a:noFill/>
+          <a:ln/>
+        </p:spPr>
+        <p:txBody>
+          <a:bodyPr wrap="square" lIns="0" tIns="0" rIns="0" bIns="0" rtlCol="0" anchor="ctr"/>
+          <a:lstStyle/>
+          <a:p>
+            <a:pPr algn="l" indent="0" marL="0">
+              <a:lnSpc>
+                <a:spcPts val="1960"/>
+              </a:lnSpc>
+              <a:buNone/>
+            </a:pPr>
+            <a:r>
+              <a:rPr lang="en-US" sz="1400" dirty="0">
+                <a:solidFill>
+                  <a:srgbClr val="12374E"/>
+                </a:solidFill>
+                <a:latin typeface="Microsoft YaHei" pitchFamily="34" charset="0"/>
+                <a:ea typeface="Microsoft YaHei" pitchFamily="34" charset="-122"/>
+                <a:cs typeface="Microsoft YaHei" pitchFamily="34" charset="-120"/>
+              </a:rPr>
+              <a:t>学术组织／期刊：职务</a:t>
+            </a:r>
             <a:endParaRPr lang="en-US" sz="1400" dirty="0"/>
           </a:p>
         </p:txBody>
       </p:sp>
       <p:sp>
         <p:nvSpPr>
-          <p:cNvPr id="28" name="Text 23"/>
-          <p:cNvSpPr/>
-          <p:nvPr/>
-        </p:nvSpPr>
-        <p:spPr>
-          <a:xfrm>
-            <a:off x="3634740" y="4024551"/>
-            <a:ext cx="3787140" cy="213360"/>
+          <p:cNvPr id="59" name="Shape 55"/>
+          <p:cNvSpPr/>
+          <p:nvPr/>
+        </p:nvSpPr>
+        <p:spPr>
+          <a:xfrm>
+            <a:off x="7513320" y="4034790"/>
+            <a:ext cx="4229100" cy="299561"/>
+          </a:xfrm>
+          <a:prstGeom prst="rect">
+            <a:avLst/>
+          </a:prstGeom>
+          <a:solidFill>
+            <a:srgbClr val="FFFFFF"/>
+          </a:solidFill>
+          <a:ln w="12700">
+            <a:solidFill>
+              <a:srgbClr val="FFFFFF">
+                <a:alpha val="0"/>
+              </a:srgbClr>
+            </a:solidFill>
+            <a:prstDash val="solid"/>
+          </a:ln>
+        </p:spPr>
+      </p:sp>
+      <p:sp>
+        <p:nvSpPr>
+          <p:cNvPr id="60" name="Text 56"/>
+          <p:cNvSpPr/>
+          <p:nvPr/>
+        </p:nvSpPr>
+        <p:spPr>
+          <a:xfrm>
+            <a:off x="7635240" y="4060150"/>
+            <a:ext cx="3985260" cy="248841"/>
           </a:xfrm>
           <a:prstGeom prst="rect">
             <a:avLst/>
@@ -35178,12 +37476,12 @@
           <a:p>
             <a:pPr algn="l" indent="0" marL="0">
               <a:lnSpc>
-                <a:spcPts val="1680"/>
-              </a:lnSpc>
-              <a:buNone/>
-            </a:pPr>
-            <a:r>
-              <a:rPr lang="en-US" sz="1200" dirty="0">
+                <a:spcPts val="1960"/>
+              </a:lnSpc>
+              <a:buNone/>
+            </a:pPr>
+            <a:r>
+              <a:rPr lang="en-US" sz="1400" dirty="0">
                 <a:solidFill>
                   <a:srgbClr val="12374E"/>
                 </a:solidFill>
@@ -35191,22 +37489,49 @@
                 <a:ea typeface="Microsoft YaHei" pitchFamily="34" charset="-122"/>
                 <a:cs typeface="Microsoft YaHei" pitchFamily="34" charset="-120"/>
               </a:rPr>
-              <a:t>•　学术组织／期刊：职务</a:t>
-            </a:r>
-            <a:endParaRPr lang="en-US" sz="1200" dirty="0"/>
-          </a:p>
-        </p:txBody>
-      </p:sp>
-      <p:sp>
-        <p:nvSpPr>
-          <p:cNvPr id="29" name="Text 24"/>
-          <p:cNvSpPr/>
-          <p:nvPr/>
-        </p:nvSpPr>
-        <p:spPr>
-          <a:xfrm>
-            <a:off x="3634740" y="4298871"/>
-            <a:ext cx="3787140" cy="213360"/>
+              <a:t>项目：名称、本人角色</a:t>
+            </a:r>
+            <a:endParaRPr lang="en-US" sz="1400" dirty="0"/>
+          </a:p>
+        </p:txBody>
+      </p:sp>
+      <p:sp>
+        <p:nvSpPr>
+          <p:cNvPr id="61" name="Shape 57"/>
+          <p:cNvSpPr/>
+          <p:nvPr/>
+        </p:nvSpPr>
+        <p:spPr>
+          <a:xfrm>
+            <a:off x="3284220" y="4334351"/>
+            <a:ext cx="4229100" cy="299561"/>
+          </a:xfrm>
+          <a:prstGeom prst="rect">
+            <a:avLst/>
+          </a:prstGeom>
+          <a:solidFill>
+            <a:srgbClr val="FFFFFF"/>
+          </a:solidFill>
+          <a:ln w="12700">
+            <a:solidFill>
+              <a:srgbClr val="FFFFFF">
+                <a:alpha val="0"/>
+              </a:srgbClr>
+            </a:solidFill>
+            <a:prstDash val="solid"/>
+          </a:ln>
+        </p:spPr>
+      </p:sp>
+      <p:sp>
+        <p:nvSpPr>
+          <p:cNvPr id="62" name="Text 58"/>
+          <p:cNvSpPr/>
+          <p:nvPr/>
+        </p:nvSpPr>
+        <p:spPr>
+          <a:xfrm>
+            <a:off x="3406140" y="4359712"/>
+            <a:ext cx="3985260" cy="248841"/>
           </a:xfrm>
           <a:prstGeom prst="rect">
             <a:avLst/>
@@ -35220,12 +37545,12 @@
           <a:p>
             <a:pPr algn="l" indent="0" marL="0">
               <a:lnSpc>
-                <a:spcPts val="1680"/>
-              </a:lnSpc>
-              <a:buNone/>
-            </a:pPr>
-            <a:r>
-              <a:rPr lang="en-US" sz="1200" dirty="0">
+                <a:spcPts val="1960"/>
+              </a:lnSpc>
+              <a:buNone/>
+            </a:pPr>
+            <a:r>
+              <a:rPr lang="en-US" sz="1400" dirty="0">
                 <a:solidFill>
                   <a:srgbClr val="12374E"/>
                 </a:solidFill>
@@ -35233,22 +37558,49 @@
                 <a:ea typeface="Microsoft YaHei" pitchFamily="34" charset="-122"/>
                 <a:cs typeface="Microsoft YaHei" pitchFamily="34" charset="-120"/>
               </a:rPr>
-              <a:t>•　任期／服务事项：时间</a:t>
-            </a:r>
-            <a:endParaRPr lang="en-US" sz="1200" dirty="0"/>
-          </a:p>
-        </p:txBody>
-      </p:sp>
-      <p:sp>
-        <p:nvSpPr>
-          <p:cNvPr id="30" name="Text 25"/>
-          <p:cNvSpPr/>
-          <p:nvPr/>
-        </p:nvSpPr>
-        <p:spPr>
-          <a:xfrm>
-            <a:off x="7604760" y="3738920"/>
-            <a:ext cx="4015740" cy="239911"/>
+              <a:t>任期／服务事项：时间</a:t>
+            </a:r>
+            <a:endParaRPr lang="en-US" sz="1400" dirty="0"/>
+          </a:p>
+        </p:txBody>
+      </p:sp>
+      <p:sp>
+        <p:nvSpPr>
+          <p:cNvPr id="63" name="Shape 59"/>
+          <p:cNvSpPr/>
+          <p:nvPr/>
+        </p:nvSpPr>
+        <p:spPr>
+          <a:xfrm>
+            <a:off x="7513320" y="4334351"/>
+            <a:ext cx="4229100" cy="299561"/>
+          </a:xfrm>
+          <a:prstGeom prst="rect">
+            <a:avLst/>
+          </a:prstGeom>
+          <a:solidFill>
+            <a:srgbClr val="FFFFFF"/>
+          </a:solidFill>
+          <a:ln w="12700">
+            <a:solidFill>
+              <a:srgbClr val="FFFFFF">
+                <a:alpha val="0"/>
+              </a:srgbClr>
+            </a:solidFill>
+            <a:prstDash val="solid"/>
+          </a:ln>
+        </p:spPr>
+      </p:sp>
+      <p:sp>
+        <p:nvSpPr>
+          <p:cNvPr id="64" name="Text 60"/>
+          <p:cNvSpPr/>
+          <p:nvPr/>
+        </p:nvSpPr>
+        <p:spPr>
+          <a:xfrm>
+            <a:off x="7635240" y="4359712"/>
+            <a:ext cx="3985260" cy="248841"/>
           </a:xfrm>
           <a:prstGeom prst="rect">
             <a:avLst/>
@@ -35262,12 +37614,177 @@
           <a:p>
             <a:pPr algn="l" indent="0" marL="0">
               <a:lnSpc>
-                <a:spcPts val="1890"/>
-              </a:lnSpc>
-              <a:buNone/>
-            </a:pPr>
-            <a:r>
-              <a:rPr lang="en-US" sz="1400" b="1" dirty="0">
+                <a:spcPts val="1960"/>
+              </a:lnSpc>
+              <a:buNone/>
+            </a:pPr>
+            <a:r>
+              <a:rPr lang="en-US" sz="1400" dirty="0">
+                <a:solidFill>
+                  <a:srgbClr val="12374E"/>
+                </a:solidFill>
+                <a:latin typeface="Microsoft YaHei" pitchFamily="34" charset="0"/>
+                <a:ea typeface="Microsoft YaHei" pitchFamily="34" charset="-122"/>
+                <a:cs typeface="Microsoft YaHei" pitchFamily="34" charset="-120"/>
+              </a:rPr>
+              <a:t>奖项：名称、年份／排名</a:t>
+            </a:r>
+            <a:endParaRPr lang="en-US" sz="1400" dirty="0"/>
+          </a:p>
+        </p:txBody>
+      </p:sp>
+      <p:sp>
+        <p:nvSpPr>
+          <p:cNvPr id="65" name="Shape 61"/>
+          <p:cNvSpPr/>
+          <p:nvPr/>
+        </p:nvSpPr>
+        <p:spPr>
+          <a:xfrm>
+            <a:off x="3276600" y="4763453"/>
+            <a:ext cx="8473440" cy="1469708"/>
+          </a:xfrm>
+          <a:prstGeom prst="rect">
+            <a:avLst/>
+          </a:prstGeom>
+          <a:solidFill>
+            <a:srgbClr val="FFFFFF">
+              <a:alpha val="0"/>
+            </a:srgbClr>
+          </a:solidFill>
+          <a:ln w="7620">
+            <a:solidFill>
+              <a:srgbClr val="CFDDE6"/>
+            </a:solidFill>
+            <a:prstDash val="solid"/>
+          </a:ln>
+        </p:spPr>
+      </p:sp>
+      <p:sp>
+        <p:nvSpPr>
+          <p:cNvPr id="66" name="Shape 62"/>
+          <p:cNvSpPr/>
+          <p:nvPr/>
+        </p:nvSpPr>
+        <p:spPr>
+          <a:xfrm>
+            <a:off x="3284220" y="4771073"/>
+            <a:ext cx="8458200" cy="400050"/>
+          </a:xfrm>
+          <a:prstGeom prst="rect">
+            <a:avLst/>
+          </a:prstGeom>
+          <a:solidFill>
+            <a:srgbClr val="005B94"/>
+          </a:solidFill>
+          <a:ln w="12700">
+            <a:solidFill>
+              <a:srgbClr val="005B94">
+                <a:alpha val="0"/>
+              </a:srgbClr>
+            </a:solidFill>
+            <a:prstDash val="solid"/>
+          </a:ln>
+        </p:spPr>
+      </p:sp>
+      <p:sp>
+        <p:nvSpPr>
+          <p:cNvPr id="67" name="Text 63"/>
+          <p:cNvSpPr/>
+          <p:nvPr/>
+        </p:nvSpPr>
+        <p:spPr>
+          <a:xfrm>
+            <a:off x="3406140" y="4816793"/>
+            <a:ext cx="8214360" cy="308610"/>
+          </a:xfrm>
+          <a:prstGeom prst="rect">
+            <a:avLst/>
+          </a:prstGeom>
+          <a:noFill/>
+          <a:ln/>
+        </p:spPr>
+        <p:txBody>
+          <a:bodyPr wrap="square" lIns="0" tIns="0" rIns="0" bIns="0" rtlCol="0" anchor="ctr"/>
+          <a:lstStyle/>
+          <a:p>
+            <a:pPr algn="l" indent="0" marL="0">
+              <a:lnSpc>
+                <a:spcPts val="2430"/>
+              </a:lnSpc>
+              <a:buNone/>
+            </a:pPr>
+            <a:r>
+              <a:rPr lang="en-US" sz="1800" b="1" dirty="0">
+                <a:solidFill>
+                  <a:srgbClr val="FFFFFF"/>
+                </a:solidFill>
+                <a:latin typeface="Microsoft YaHei" pitchFamily="34" charset="0"/>
+                <a:ea typeface="Microsoft YaHei" pitchFamily="34" charset="-122"/>
+                <a:cs typeface="Microsoft YaHei" pitchFamily="34" charset="-120"/>
+              </a:rPr>
+              <a:t>主要研究方向</a:t>
+            </a:r>
+            <a:endParaRPr lang="en-US" sz="1800" dirty="0"/>
+          </a:p>
+        </p:txBody>
+      </p:sp>
+      <p:sp>
+        <p:nvSpPr>
+          <p:cNvPr id="68" name="Shape 64"/>
+          <p:cNvSpPr/>
+          <p:nvPr/>
+        </p:nvSpPr>
+        <p:spPr>
+          <a:xfrm>
+            <a:off x="3284220" y="5171123"/>
+            <a:ext cx="2819400" cy="382905"/>
+          </a:xfrm>
+          <a:prstGeom prst="rect">
+            <a:avLst/>
+          </a:prstGeom>
+          <a:solidFill>
+            <a:srgbClr val="FFFFFF"/>
+          </a:solidFill>
+          <a:ln w="12700">
+            <a:solidFill>
+              <a:srgbClr val="FFFFFF">
+                <a:alpha val="0"/>
+              </a:srgbClr>
+            </a:solidFill>
+            <a:prstDash val="solid"/>
+          </a:ln>
+        </p:spPr>
+      </p:sp>
+      <p:sp>
+        <p:nvSpPr>
+          <p:cNvPr id="69" name="Text 65"/>
+          <p:cNvSpPr/>
+          <p:nvPr/>
+        </p:nvSpPr>
+        <p:spPr>
+          <a:xfrm>
+            <a:off x="3406140" y="5216843"/>
+            <a:ext cx="2575560" cy="274320"/>
+          </a:xfrm>
+          <a:prstGeom prst="rect">
+            <a:avLst/>
+          </a:prstGeom>
+          <a:noFill/>
+          <a:ln/>
+        </p:spPr>
+        <p:txBody>
+          <a:bodyPr wrap="square" lIns="0" tIns="0" rIns="0" bIns="0" rtlCol="0" anchor="ctr"/>
+          <a:lstStyle/>
+          <a:p>
+            <a:pPr algn="l" indent="0" marL="0">
+              <a:lnSpc>
+                <a:spcPts val="2160"/>
+              </a:lnSpc>
+              <a:buNone/>
+            </a:pPr>
+            <a:r>
+              <a:rPr lang="en-US" sz="1600" b="1" dirty="0">
                 <a:solidFill>
                   <a:srgbClr val="005B94"/>
                 </a:solidFill>
@@ -35275,41 +37792,226 @@
                 <a:ea typeface="Microsoft YaHei" pitchFamily="34" charset="-122"/>
                 <a:cs typeface="Microsoft YaHei" pitchFamily="34" charset="-120"/>
               </a:rPr>
-              <a:t>代表性项目与奖项</a:t>
+              <a:t>研究方向一</a:t>
+            </a:r>
+            <a:endParaRPr lang="en-US" sz="1600" dirty="0"/>
+          </a:p>
+        </p:txBody>
+      </p:sp>
+      <p:sp>
+        <p:nvSpPr>
+          <p:cNvPr id="70" name="Shape 66"/>
+          <p:cNvSpPr/>
+          <p:nvPr/>
+        </p:nvSpPr>
+        <p:spPr>
+          <a:xfrm>
+            <a:off x="6103620" y="5171123"/>
+            <a:ext cx="2819400" cy="382905"/>
+          </a:xfrm>
+          <a:prstGeom prst="rect">
+            <a:avLst/>
+          </a:prstGeom>
+          <a:solidFill>
+            <a:srgbClr val="FFFFFF"/>
+          </a:solidFill>
+          <a:ln w="12700">
+            <a:solidFill>
+              <a:srgbClr val="FFFFFF">
+                <a:alpha val="0"/>
+              </a:srgbClr>
+            </a:solidFill>
+            <a:prstDash val="solid"/>
+          </a:ln>
+        </p:spPr>
+      </p:sp>
+      <p:sp>
+        <p:nvSpPr>
+          <p:cNvPr id="71" name="Text 67"/>
+          <p:cNvSpPr/>
+          <p:nvPr/>
+        </p:nvSpPr>
+        <p:spPr>
+          <a:xfrm>
+            <a:off x="6225540" y="5216843"/>
+            <a:ext cx="2575560" cy="274320"/>
+          </a:xfrm>
+          <a:prstGeom prst="rect">
+            <a:avLst/>
+          </a:prstGeom>
+          <a:noFill/>
+          <a:ln/>
+        </p:spPr>
+        <p:txBody>
+          <a:bodyPr wrap="square" lIns="0" tIns="0" rIns="0" bIns="0" rtlCol="0" anchor="ctr"/>
+          <a:lstStyle/>
+          <a:p>
+            <a:pPr algn="l" indent="0" marL="0">
+              <a:lnSpc>
+                <a:spcPts val="2160"/>
+              </a:lnSpc>
+              <a:buNone/>
+            </a:pPr>
+            <a:r>
+              <a:rPr lang="en-US" sz="1600" b="1" dirty="0">
+                <a:solidFill>
+                  <a:srgbClr val="005B94"/>
+                </a:solidFill>
+                <a:latin typeface="Microsoft YaHei" pitchFamily="34" charset="0"/>
+                <a:ea typeface="Microsoft YaHei" pitchFamily="34" charset="-122"/>
+                <a:cs typeface="Microsoft YaHei" pitchFamily="34" charset="-120"/>
+              </a:rPr>
+              <a:t>研究方向二</a:t>
+            </a:r>
+            <a:endParaRPr lang="en-US" sz="1600" dirty="0"/>
+          </a:p>
+        </p:txBody>
+      </p:sp>
+      <p:sp>
+        <p:nvSpPr>
+          <p:cNvPr id="72" name="Shape 68"/>
+          <p:cNvSpPr/>
+          <p:nvPr/>
+        </p:nvSpPr>
+        <p:spPr>
+          <a:xfrm>
+            <a:off x="8923020" y="5171123"/>
+            <a:ext cx="2819400" cy="382905"/>
+          </a:xfrm>
+          <a:prstGeom prst="rect">
+            <a:avLst/>
+          </a:prstGeom>
+          <a:solidFill>
+            <a:srgbClr val="FFFFFF"/>
+          </a:solidFill>
+          <a:ln w="12700">
+            <a:solidFill>
+              <a:srgbClr val="FFFFFF">
+                <a:alpha val="0"/>
+              </a:srgbClr>
+            </a:solidFill>
+            <a:prstDash val="solid"/>
+          </a:ln>
+        </p:spPr>
+      </p:sp>
+      <p:sp>
+        <p:nvSpPr>
+          <p:cNvPr id="73" name="Text 69"/>
+          <p:cNvSpPr/>
+          <p:nvPr/>
+        </p:nvSpPr>
+        <p:spPr>
+          <a:xfrm>
+            <a:off x="9044940" y="5216843"/>
+            <a:ext cx="2575560" cy="274320"/>
+          </a:xfrm>
+          <a:prstGeom prst="rect">
+            <a:avLst/>
+          </a:prstGeom>
+          <a:noFill/>
+          <a:ln/>
+        </p:spPr>
+        <p:txBody>
+          <a:bodyPr wrap="square" lIns="0" tIns="0" rIns="0" bIns="0" rtlCol="0" anchor="ctr"/>
+          <a:lstStyle/>
+          <a:p>
+            <a:pPr algn="l" indent="0" marL="0">
+              <a:lnSpc>
+                <a:spcPts val="2160"/>
+              </a:lnSpc>
+              <a:buNone/>
+            </a:pPr>
+            <a:r>
+              <a:rPr lang="en-US" sz="1600" b="1" dirty="0">
+                <a:solidFill>
+                  <a:srgbClr val="005B94"/>
+                </a:solidFill>
+                <a:latin typeface="Microsoft YaHei" pitchFamily="34" charset="0"/>
+                <a:ea typeface="Microsoft YaHei" pitchFamily="34" charset="-122"/>
+                <a:cs typeface="Microsoft YaHei" pitchFamily="34" charset="-120"/>
+              </a:rPr>
+              <a:t>研究方向三</a:t>
+            </a:r>
+            <a:endParaRPr lang="en-US" sz="1600" dirty="0"/>
+          </a:p>
+        </p:txBody>
+      </p:sp>
+      <p:sp>
+        <p:nvSpPr>
+          <p:cNvPr id="74" name="Shape 70"/>
+          <p:cNvSpPr/>
+          <p:nvPr/>
+        </p:nvSpPr>
+        <p:spPr>
+          <a:xfrm>
+            <a:off x="3284220" y="5554028"/>
+            <a:ext cx="2819400" cy="671513"/>
+          </a:xfrm>
+          <a:prstGeom prst="rect">
+            <a:avLst/>
+          </a:prstGeom>
+          <a:solidFill>
+            <a:srgbClr val="FFFFFF"/>
+          </a:solidFill>
+          <a:ln w="12700">
+            <a:solidFill>
+              <a:srgbClr val="FFFFFF">
+                <a:alpha val="0"/>
+              </a:srgbClr>
+            </a:solidFill>
+            <a:prstDash val="solid"/>
+          </a:ln>
+        </p:spPr>
+      </p:sp>
+      <p:sp>
+        <p:nvSpPr>
+          <p:cNvPr id="75" name="Text 71"/>
+          <p:cNvSpPr/>
+          <p:nvPr/>
+        </p:nvSpPr>
+        <p:spPr>
+          <a:xfrm>
+            <a:off x="3406140" y="5636419"/>
+            <a:ext cx="2575560" cy="497681"/>
+          </a:xfrm>
+          <a:prstGeom prst="rect">
+            <a:avLst/>
+          </a:prstGeom>
+          <a:noFill/>
+          <a:ln/>
+        </p:spPr>
+        <p:txBody>
+          <a:bodyPr wrap="square" lIns="0" tIns="0" rIns="0" bIns="0" rtlCol="0" anchor="ctr"/>
+          <a:lstStyle/>
+          <a:p>
+            <a:pPr algn="l" indent="0" marL="0">
+              <a:lnSpc>
+                <a:spcPts val="1960"/>
+              </a:lnSpc>
+              <a:buNone/>
+            </a:pPr>
+            <a:r>
+              <a:rPr lang="en-US" sz="1400" dirty="0">
+                <a:solidFill>
+                  <a:srgbClr val="12374E"/>
+                </a:solidFill>
+                <a:latin typeface="Microsoft YaHei" pitchFamily="34" charset="0"/>
+                <a:ea typeface="Microsoft YaHei" pitchFamily="34" charset="-122"/>
+                <a:cs typeface="Microsoft YaHei" pitchFamily="34" charset="-120"/>
+              </a:rPr>
+              <a:t>研究对象：</a:t>
             </a:r>
             <a:endParaRPr lang="en-US" sz="1400" dirty="0"/>
           </a:p>
-        </p:txBody>
-      </p:sp>
-      <p:sp>
-        <p:nvSpPr>
-          <p:cNvPr id="31" name="Text 26"/>
-          <p:cNvSpPr/>
-          <p:nvPr/>
-        </p:nvSpPr>
-        <p:spPr>
-          <a:xfrm>
-            <a:off x="7833360" y="4024551"/>
-            <a:ext cx="3787140" cy="213360"/>
-          </a:xfrm>
-          <a:prstGeom prst="rect">
-            <a:avLst/>
-          </a:prstGeom>
-          <a:noFill/>
-          <a:ln/>
-        </p:spPr>
-        <p:txBody>
-          <a:bodyPr wrap="square" lIns="0" tIns="0" rIns="0" bIns="0" rtlCol="0" anchor="ctr"/>
-          <a:lstStyle/>
           <a:p>
             <a:pPr algn="l" indent="0" marL="0">
               <a:lnSpc>
-                <a:spcPts val="1680"/>
-              </a:lnSpc>
-              <a:buNone/>
-            </a:pPr>
-            <a:r>
-              <a:rPr lang="en-US" sz="1200" dirty="0">
+                <a:spcPts val="1960"/>
+              </a:lnSpc>
+              <a:buNone/>
+            </a:pPr>
+            <a:r>
+              <a:rPr lang="en-US" sz="1400" dirty="0">
                 <a:solidFill>
                   <a:srgbClr val="12374E"/>
                 </a:solidFill>
@@ -35317,22 +38019,49 @@
                 <a:ea typeface="Microsoft YaHei" pitchFamily="34" charset="-122"/>
                 <a:cs typeface="Microsoft YaHei" pitchFamily="34" charset="-120"/>
               </a:rPr>
-              <a:t>•　项目：名称、本人角色</a:t>
-            </a:r>
-            <a:endParaRPr lang="en-US" sz="1200" dirty="0"/>
-          </a:p>
-        </p:txBody>
-      </p:sp>
-      <p:sp>
-        <p:nvSpPr>
-          <p:cNvPr id="32" name="Text 27"/>
-          <p:cNvSpPr/>
-          <p:nvPr/>
-        </p:nvSpPr>
-        <p:spPr>
-          <a:xfrm>
-            <a:off x="7833360" y="4298871"/>
-            <a:ext cx="3787140" cy="213360"/>
+              <a:t>核心问题：</a:t>
+            </a:r>
+            <a:endParaRPr lang="en-US" sz="1400" dirty="0"/>
+          </a:p>
+        </p:txBody>
+      </p:sp>
+      <p:sp>
+        <p:nvSpPr>
+          <p:cNvPr id="76" name="Shape 72"/>
+          <p:cNvSpPr/>
+          <p:nvPr/>
+        </p:nvSpPr>
+        <p:spPr>
+          <a:xfrm>
+            <a:off x="6103620" y="5554028"/>
+            <a:ext cx="2819400" cy="671513"/>
+          </a:xfrm>
+          <a:prstGeom prst="rect">
+            <a:avLst/>
+          </a:prstGeom>
+          <a:solidFill>
+            <a:srgbClr val="FFFFFF"/>
+          </a:solidFill>
+          <a:ln w="12700">
+            <a:solidFill>
+              <a:srgbClr val="FFFFFF">
+                <a:alpha val="0"/>
+              </a:srgbClr>
+            </a:solidFill>
+            <a:prstDash val="solid"/>
+          </a:ln>
+        </p:spPr>
+      </p:sp>
+      <p:sp>
+        <p:nvSpPr>
+          <p:cNvPr id="77" name="Text 73"/>
+          <p:cNvSpPr/>
+          <p:nvPr/>
+        </p:nvSpPr>
+        <p:spPr>
+          <a:xfrm>
+            <a:off x="6225540" y="5636419"/>
+            <a:ext cx="2575560" cy="497681"/>
           </a:xfrm>
           <a:prstGeom prst="rect">
             <a:avLst/>
@@ -35346,12 +38075,12 @@
           <a:p>
             <a:pPr algn="l" indent="0" marL="0">
               <a:lnSpc>
-                <a:spcPts val="1680"/>
-              </a:lnSpc>
-              <a:buNone/>
-            </a:pPr>
-            <a:r>
-              <a:rPr lang="en-US" sz="1200" dirty="0">
+                <a:spcPts val="1960"/>
+              </a:lnSpc>
+              <a:buNone/>
+            </a:pPr>
+            <a:r>
+              <a:rPr lang="en-US" sz="1400" dirty="0">
                 <a:solidFill>
                   <a:srgbClr val="12374E"/>
                 </a:solidFill>
@@ -35359,64 +38088,69 @@
                 <a:ea typeface="Microsoft YaHei" pitchFamily="34" charset="-122"/>
                 <a:cs typeface="Microsoft YaHei" pitchFamily="34" charset="-120"/>
               </a:rPr>
-              <a:t>•　奖项：名称、年份／排名</a:t>
-            </a:r>
-            <a:endParaRPr lang="en-US" sz="1200" dirty="0"/>
-          </a:p>
-        </p:txBody>
-      </p:sp>
-      <p:sp>
-        <p:nvSpPr>
-          <p:cNvPr id="33" name="Text 28"/>
-          <p:cNvSpPr/>
-          <p:nvPr/>
-        </p:nvSpPr>
-        <p:spPr>
-          <a:xfrm>
-            <a:off x="3406140" y="4786551"/>
-            <a:ext cx="8214360" cy="308610"/>
-          </a:xfrm>
-          <a:prstGeom prst="rect">
-            <a:avLst/>
-          </a:prstGeom>
-          <a:noFill/>
-          <a:ln/>
-        </p:spPr>
-        <p:txBody>
-          <a:bodyPr wrap="square" lIns="0" tIns="0" rIns="0" bIns="0" rtlCol="0" anchor="ctr"/>
-          <a:lstStyle/>
+              <a:t>主要方法：</a:t>
+            </a:r>
+            <a:endParaRPr lang="en-US" sz="1400" dirty="0"/>
+          </a:p>
           <a:p>
             <a:pPr algn="l" indent="0" marL="0">
               <a:lnSpc>
-                <a:spcPts val="2430"/>
-              </a:lnSpc>
-              <a:buNone/>
-            </a:pPr>
-            <a:r>
-              <a:rPr lang="en-US" sz="1800" b="1" dirty="0">
-                <a:solidFill>
-                  <a:srgbClr val="FFFFFF"/>
-                </a:solidFill>
-                <a:latin typeface="Microsoft YaHei" pitchFamily="34" charset="0"/>
-                <a:ea typeface="Microsoft YaHei" pitchFamily="34" charset="-122"/>
-                <a:cs typeface="Microsoft YaHei" pitchFamily="34" charset="-120"/>
-              </a:rPr>
-              <a:t>主要研究方向</a:t>
-            </a:r>
-            <a:endParaRPr lang="en-US" sz="1800" dirty="0"/>
-          </a:p>
-        </p:txBody>
-      </p:sp>
-      <p:sp>
-        <p:nvSpPr>
-          <p:cNvPr id="34" name="Text 29"/>
-          <p:cNvSpPr/>
-          <p:nvPr/>
-        </p:nvSpPr>
-        <p:spPr>
-          <a:xfrm>
-            <a:off x="3406140" y="5232321"/>
-            <a:ext cx="2636520" cy="239911"/>
+                <a:spcPts val="1960"/>
+              </a:lnSpc>
+              <a:buNone/>
+            </a:pPr>
+            <a:r>
+              <a:rPr lang="en-US" sz="1400" dirty="0">
+                <a:solidFill>
+                  <a:srgbClr val="12374E"/>
+                </a:solidFill>
+                <a:latin typeface="Microsoft YaHei" pitchFamily="34" charset="0"/>
+                <a:ea typeface="Microsoft YaHei" pitchFamily="34" charset="-122"/>
+                <a:cs typeface="Microsoft YaHei" pitchFamily="34" charset="-120"/>
+              </a:rPr>
+              <a:t>技术特点：</a:t>
+            </a:r>
+            <a:endParaRPr lang="en-US" sz="1400" dirty="0"/>
+          </a:p>
+        </p:txBody>
+      </p:sp>
+      <p:sp>
+        <p:nvSpPr>
+          <p:cNvPr id="78" name="Shape 74"/>
+          <p:cNvSpPr/>
+          <p:nvPr/>
+        </p:nvSpPr>
+        <p:spPr>
+          <a:xfrm>
+            <a:off x="8923020" y="5554028"/>
+            <a:ext cx="2819400" cy="671513"/>
+          </a:xfrm>
+          <a:prstGeom prst="rect">
+            <a:avLst/>
+          </a:prstGeom>
+          <a:solidFill>
+            <a:srgbClr val="FFFFFF"/>
+          </a:solidFill>
+          <a:ln w="12700">
+            <a:solidFill>
+              <a:srgbClr val="FFFFFF">
+                <a:alpha val="0"/>
+              </a:srgbClr>
+            </a:solidFill>
+            <a:prstDash val="solid"/>
+          </a:ln>
+        </p:spPr>
+      </p:sp>
+      <p:sp>
+        <p:nvSpPr>
+          <p:cNvPr id="79" name="Text 75"/>
+          <p:cNvSpPr/>
+          <p:nvPr/>
+        </p:nvSpPr>
+        <p:spPr>
+          <a:xfrm>
+            <a:off x="9044940" y="5636419"/>
+            <a:ext cx="2575560" cy="497681"/>
           </a:xfrm>
           <a:prstGeom prst="rect">
             <a:avLst/>
@@ -35430,54 +38164,32 @@
           <a:p>
             <a:pPr algn="l" indent="0" marL="0">
               <a:lnSpc>
-                <a:spcPts val="1890"/>
-              </a:lnSpc>
-              <a:buNone/>
-            </a:pPr>
-            <a:r>
-              <a:rPr lang="en-US" sz="1400" b="1" dirty="0">
-                <a:solidFill>
-                  <a:srgbClr val="005B94"/>
-                </a:solidFill>
-                <a:latin typeface="Microsoft YaHei" pitchFamily="34" charset="0"/>
-                <a:ea typeface="Microsoft YaHei" pitchFamily="34" charset="-122"/>
-                <a:cs typeface="Microsoft YaHei" pitchFamily="34" charset="-120"/>
-              </a:rPr>
-              <a:t>研究方向一</a:t>
+                <a:spcPts val="1960"/>
+              </a:lnSpc>
+              <a:buNone/>
+            </a:pPr>
+            <a:r>
+              <a:rPr lang="en-US" sz="1400" dirty="0">
+                <a:solidFill>
+                  <a:srgbClr val="12374E"/>
+                </a:solidFill>
+                <a:latin typeface="Microsoft YaHei" pitchFamily="34" charset="0"/>
+                <a:ea typeface="Microsoft YaHei" pitchFamily="34" charset="-122"/>
+                <a:cs typeface="Microsoft YaHei" pitchFamily="34" charset="-120"/>
+              </a:rPr>
+              <a:t>应用场景：</a:t>
             </a:r>
             <a:endParaRPr lang="en-US" sz="1400" dirty="0"/>
           </a:p>
-        </p:txBody>
-      </p:sp>
-      <p:sp>
-        <p:nvSpPr>
-          <p:cNvPr id="35" name="Text 30"/>
-          <p:cNvSpPr/>
-          <p:nvPr/>
-        </p:nvSpPr>
-        <p:spPr>
-          <a:xfrm>
-            <a:off x="3634740" y="5585460"/>
-            <a:ext cx="2407920" cy="213360"/>
-          </a:xfrm>
-          <a:prstGeom prst="rect">
-            <a:avLst/>
-          </a:prstGeom>
-          <a:noFill/>
-          <a:ln/>
-        </p:spPr>
-        <p:txBody>
-          <a:bodyPr wrap="square" lIns="0" tIns="0" rIns="0" bIns="0" rtlCol="0" anchor="ctr"/>
-          <a:lstStyle/>
           <a:p>
             <a:pPr algn="l" indent="0" marL="0">
               <a:lnSpc>
-                <a:spcPts val="1680"/>
-              </a:lnSpc>
-              <a:buNone/>
-            </a:pPr>
-            <a:r>
-              <a:rPr lang="en-US" sz="1200" dirty="0">
+                <a:spcPts val="1960"/>
+              </a:lnSpc>
+              <a:buNone/>
+            </a:pPr>
+            <a:r>
+              <a:rPr lang="en-US" sz="1400" dirty="0">
                 <a:solidFill>
                   <a:srgbClr val="12374E"/>
                 </a:solidFill>
@@ -35485,22 +38197,22 @@
                 <a:ea typeface="Microsoft YaHei" pitchFamily="34" charset="-122"/>
                 <a:cs typeface="Microsoft YaHei" pitchFamily="34" charset="-120"/>
               </a:rPr>
-              <a:t>•　研究对象：</a:t>
-            </a:r>
-            <a:endParaRPr lang="en-US" sz="1200" dirty="0"/>
-          </a:p>
-        </p:txBody>
-      </p:sp>
-      <p:sp>
-        <p:nvSpPr>
-          <p:cNvPr id="36" name="Text 31"/>
-          <p:cNvSpPr/>
-          <p:nvPr/>
-        </p:nvSpPr>
-        <p:spPr>
-          <a:xfrm>
-            <a:off x="3634740" y="5859780"/>
-            <a:ext cx="2407920" cy="213360"/>
+              <a:t>研究目标：</a:t>
+            </a:r>
+            <a:endParaRPr lang="en-US" sz="1400" dirty="0"/>
+          </a:p>
+        </p:txBody>
+      </p:sp>
+      <p:sp>
+        <p:nvSpPr>
+          <p:cNvPr id="80" name="Text 76"/>
+          <p:cNvSpPr/>
+          <p:nvPr/>
+        </p:nvSpPr>
+        <p:spPr>
+          <a:xfrm>
+            <a:off x="441960" y="6485334"/>
+            <a:ext cx="2971800" cy="181332"/>
           </a:xfrm>
           <a:prstGeom prst="rect">
             <a:avLst/>
@@ -35514,35 +38226,77 @@
           <a:p>
             <a:pPr algn="l" indent="0" marL="0">
               <a:lnSpc>
-                <a:spcPts val="1680"/>
-              </a:lnSpc>
-              <a:buNone/>
-            </a:pPr>
-            <a:r>
-              <a:rPr lang="en-US" sz="1200" dirty="0">
-                <a:solidFill>
-                  <a:srgbClr val="12374E"/>
-                </a:solidFill>
-                <a:latin typeface="Microsoft YaHei" pitchFamily="34" charset="0"/>
-                <a:ea typeface="Microsoft YaHei" pitchFamily="34" charset="-122"/>
-                <a:cs typeface="Microsoft YaHei" pitchFamily="34" charset="-120"/>
-              </a:rPr>
-              <a:t>•　核心问题：</a:t>
-            </a:r>
-            <a:endParaRPr lang="en-US" sz="1200" dirty="0"/>
-          </a:p>
-        </p:txBody>
-      </p:sp>
-      <p:sp>
-        <p:nvSpPr>
-          <p:cNvPr id="37" name="Text 32"/>
-          <p:cNvSpPr/>
-          <p:nvPr/>
-        </p:nvSpPr>
-        <p:spPr>
-          <a:xfrm>
-            <a:off x="6195060" y="5232321"/>
-            <a:ext cx="2636520" cy="239911"/>
+                <a:spcPts val="1428"/>
+              </a:lnSpc>
+              <a:buNone/>
+            </a:pPr>
+            <a:r>
+              <a:rPr lang="en-US" sz="1020" dirty="0">
+                <a:solidFill>
+                  <a:srgbClr val="617B8B"/>
+                </a:solidFill>
+                <a:latin typeface="Microsoft YaHei" pitchFamily="34" charset="0"/>
+                <a:ea typeface="Microsoft YaHei" pitchFamily="34" charset="-122"/>
+                <a:cs typeface="Microsoft YaHei" pitchFamily="34" charset="-120"/>
+              </a:rPr>
+              <a:t>北京科技大学 · 科研汇报示例</a:t>
+            </a:r>
+            <a:endParaRPr lang="en-US" sz="1020" dirty="0"/>
+          </a:p>
+        </p:txBody>
+      </p:sp>
+      <p:sp>
+        <p:nvSpPr>
+          <p:cNvPr id="81" name="Text 77"/>
+          <p:cNvSpPr/>
+          <p:nvPr/>
+        </p:nvSpPr>
+        <p:spPr>
+          <a:xfrm>
+            <a:off x="3596640" y="6485334"/>
+            <a:ext cx="7534632" cy="181332"/>
+          </a:xfrm>
+          <a:prstGeom prst="rect">
+            <a:avLst/>
+          </a:prstGeom>
+          <a:noFill/>
+          <a:ln/>
+        </p:spPr>
+        <p:txBody>
+          <a:bodyPr wrap="square" lIns="0" tIns="0" rIns="0" bIns="0" rtlCol="0" anchor="ctr"/>
+          <a:lstStyle/>
+          <a:p>
+            <a:pPr algn="r" indent="0" marL="0">
+              <a:lnSpc>
+                <a:spcPts val="1428"/>
+              </a:lnSpc>
+              <a:buNone/>
+            </a:pPr>
+            <a:r>
+              <a:rPr lang="en-US" sz="1020" dirty="0">
+                <a:solidFill>
+                  <a:srgbClr val="617B8B"/>
+                </a:solidFill>
+                <a:latin typeface="Microsoft YaHei" pitchFamily="34" charset="0"/>
+                <a:ea typeface="Microsoft YaHei" pitchFamily="34" charset="-122"/>
+                <a:cs typeface="Microsoft YaHei" pitchFamily="34" charset="-120"/>
+              </a:rPr>
+              <a:t>作者信息占位示例；请以本人简历与可核实成果为准</a:t>
+            </a:r>
+            <a:endParaRPr lang="en-US" sz="1020" dirty="0"/>
+          </a:p>
+        </p:txBody>
+      </p:sp>
+      <p:sp>
+        <p:nvSpPr>
+          <p:cNvPr id="82" name="Text 78"/>
+          <p:cNvSpPr/>
+          <p:nvPr/>
+        </p:nvSpPr>
+        <p:spPr>
+          <a:xfrm>
+            <a:off x="11314152" y="6485334"/>
+            <a:ext cx="435888" cy="181332"/>
           </a:xfrm>
           <a:prstGeom prst="rect">
             <a:avLst/>
@@ -35556,258 +38310,6 @@
           <a:p>
             <a:pPr algn="l" indent="0" marL="0">
               <a:lnSpc>
-                <a:spcPts val="1890"/>
-              </a:lnSpc>
-              <a:buNone/>
-            </a:pPr>
-            <a:r>
-              <a:rPr lang="en-US" sz="1400" b="1" dirty="0">
-                <a:solidFill>
-                  <a:srgbClr val="005B94"/>
-                </a:solidFill>
-                <a:latin typeface="Microsoft YaHei" pitchFamily="34" charset="0"/>
-                <a:ea typeface="Microsoft YaHei" pitchFamily="34" charset="-122"/>
-                <a:cs typeface="Microsoft YaHei" pitchFamily="34" charset="-120"/>
-              </a:rPr>
-              <a:t>研究方向二</a:t>
-            </a:r>
-            <a:endParaRPr lang="en-US" sz="1400" dirty="0"/>
-          </a:p>
-        </p:txBody>
-      </p:sp>
-      <p:sp>
-        <p:nvSpPr>
-          <p:cNvPr id="38" name="Text 33"/>
-          <p:cNvSpPr/>
-          <p:nvPr/>
-        </p:nvSpPr>
-        <p:spPr>
-          <a:xfrm>
-            <a:off x="6423660" y="5585460"/>
-            <a:ext cx="2407920" cy="213360"/>
-          </a:xfrm>
-          <a:prstGeom prst="rect">
-            <a:avLst/>
-          </a:prstGeom>
-          <a:noFill/>
-          <a:ln/>
-        </p:spPr>
-        <p:txBody>
-          <a:bodyPr wrap="square" lIns="0" tIns="0" rIns="0" bIns="0" rtlCol="0" anchor="ctr"/>
-          <a:lstStyle/>
-          <a:p>
-            <a:pPr algn="l" indent="0" marL="0">
-              <a:lnSpc>
-                <a:spcPts val="1680"/>
-              </a:lnSpc>
-              <a:buNone/>
-            </a:pPr>
-            <a:r>
-              <a:rPr lang="en-US" sz="1200" dirty="0">
-                <a:solidFill>
-                  <a:srgbClr val="12374E"/>
-                </a:solidFill>
-                <a:latin typeface="Microsoft YaHei" pitchFamily="34" charset="0"/>
-                <a:ea typeface="Microsoft YaHei" pitchFamily="34" charset="-122"/>
-                <a:cs typeface="Microsoft YaHei" pitchFamily="34" charset="-120"/>
-              </a:rPr>
-              <a:t>•　主要方法：</a:t>
-            </a:r>
-            <a:endParaRPr lang="en-US" sz="1200" dirty="0"/>
-          </a:p>
-        </p:txBody>
-      </p:sp>
-      <p:sp>
-        <p:nvSpPr>
-          <p:cNvPr id="39" name="Text 34"/>
-          <p:cNvSpPr/>
-          <p:nvPr/>
-        </p:nvSpPr>
-        <p:spPr>
-          <a:xfrm>
-            <a:off x="6423660" y="5859780"/>
-            <a:ext cx="2407920" cy="213360"/>
-          </a:xfrm>
-          <a:prstGeom prst="rect">
-            <a:avLst/>
-          </a:prstGeom>
-          <a:noFill/>
-          <a:ln/>
-        </p:spPr>
-        <p:txBody>
-          <a:bodyPr wrap="square" lIns="0" tIns="0" rIns="0" bIns="0" rtlCol="0" anchor="ctr"/>
-          <a:lstStyle/>
-          <a:p>
-            <a:pPr algn="l" indent="0" marL="0">
-              <a:lnSpc>
-                <a:spcPts val="1680"/>
-              </a:lnSpc>
-              <a:buNone/>
-            </a:pPr>
-            <a:r>
-              <a:rPr lang="en-US" sz="1200" dirty="0">
-                <a:solidFill>
-                  <a:srgbClr val="12374E"/>
-                </a:solidFill>
-                <a:latin typeface="Microsoft YaHei" pitchFamily="34" charset="0"/>
-                <a:ea typeface="Microsoft YaHei" pitchFamily="34" charset="-122"/>
-                <a:cs typeface="Microsoft YaHei" pitchFamily="34" charset="-120"/>
-              </a:rPr>
-              <a:t>•　技术特点：</a:t>
-            </a:r>
-            <a:endParaRPr lang="en-US" sz="1200" dirty="0"/>
-          </a:p>
-        </p:txBody>
-      </p:sp>
-      <p:sp>
-        <p:nvSpPr>
-          <p:cNvPr id="40" name="Text 35"/>
-          <p:cNvSpPr/>
-          <p:nvPr/>
-        </p:nvSpPr>
-        <p:spPr>
-          <a:xfrm>
-            <a:off x="8983980" y="5232321"/>
-            <a:ext cx="2636520" cy="239911"/>
-          </a:xfrm>
-          <a:prstGeom prst="rect">
-            <a:avLst/>
-          </a:prstGeom>
-          <a:noFill/>
-          <a:ln/>
-        </p:spPr>
-        <p:txBody>
-          <a:bodyPr wrap="square" lIns="0" tIns="0" rIns="0" bIns="0" rtlCol="0" anchor="ctr"/>
-          <a:lstStyle/>
-          <a:p>
-            <a:pPr algn="l" indent="0" marL="0">
-              <a:lnSpc>
-                <a:spcPts val="1890"/>
-              </a:lnSpc>
-              <a:buNone/>
-            </a:pPr>
-            <a:r>
-              <a:rPr lang="en-US" sz="1400" b="1" dirty="0">
-                <a:solidFill>
-                  <a:srgbClr val="005B94"/>
-                </a:solidFill>
-                <a:latin typeface="Microsoft YaHei" pitchFamily="34" charset="0"/>
-                <a:ea typeface="Microsoft YaHei" pitchFamily="34" charset="-122"/>
-                <a:cs typeface="Microsoft YaHei" pitchFamily="34" charset="-120"/>
-              </a:rPr>
-              <a:t>研究方向三</a:t>
-            </a:r>
-            <a:endParaRPr lang="en-US" sz="1400" dirty="0"/>
-          </a:p>
-        </p:txBody>
-      </p:sp>
-      <p:sp>
-        <p:nvSpPr>
-          <p:cNvPr id="41" name="Text 36"/>
-          <p:cNvSpPr/>
-          <p:nvPr/>
-        </p:nvSpPr>
-        <p:spPr>
-          <a:xfrm>
-            <a:off x="9212580" y="5585460"/>
-            <a:ext cx="2407920" cy="213360"/>
-          </a:xfrm>
-          <a:prstGeom prst="rect">
-            <a:avLst/>
-          </a:prstGeom>
-          <a:noFill/>
-          <a:ln/>
-        </p:spPr>
-        <p:txBody>
-          <a:bodyPr wrap="square" lIns="0" tIns="0" rIns="0" bIns="0" rtlCol="0" anchor="ctr"/>
-          <a:lstStyle/>
-          <a:p>
-            <a:pPr algn="l" indent="0" marL="0">
-              <a:lnSpc>
-                <a:spcPts val="1680"/>
-              </a:lnSpc>
-              <a:buNone/>
-            </a:pPr>
-            <a:r>
-              <a:rPr lang="en-US" sz="1200" dirty="0">
-                <a:solidFill>
-                  <a:srgbClr val="12374E"/>
-                </a:solidFill>
-                <a:latin typeface="Microsoft YaHei" pitchFamily="34" charset="0"/>
-                <a:ea typeface="Microsoft YaHei" pitchFamily="34" charset="-122"/>
-                <a:cs typeface="Microsoft YaHei" pitchFamily="34" charset="-120"/>
-              </a:rPr>
-              <a:t>•　应用场景：</a:t>
-            </a:r>
-            <a:endParaRPr lang="en-US" sz="1200" dirty="0"/>
-          </a:p>
-        </p:txBody>
-      </p:sp>
-      <p:sp>
-        <p:nvSpPr>
-          <p:cNvPr id="42" name="Text 37"/>
-          <p:cNvSpPr/>
-          <p:nvPr/>
-        </p:nvSpPr>
-        <p:spPr>
-          <a:xfrm>
-            <a:off x="9212580" y="5859780"/>
-            <a:ext cx="2407920" cy="213360"/>
-          </a:xfrm>
-          <a:prstGeom prst="rect">
-            <a:avLst/>
-          </a:prstGeom>
-          <a:noFill/>
-          <a:ln/>
-        </p:spPr>
-        <p:txBody>
-          <a:bodyPr wrap="square" lIns="0" tIns="0" rIns="0" bIns="0" rtlCol="0" anchor="ctr"/>
-          <a:lstStyle/>
-          <a:p>
-            <a:pPr algn="l" indent="0" marL="0">
-              <a:lnSpc>
-                <a:spcPts val="1680"/>
-              </a:lnSpc>
-              <a:buNone/>
-            </a:pPr>
-            <a:r>
-              <a:rPr lang="en-US" sz="1200" dirty="0">
-                <a:solidFill>
-                  <a:srgbClr val="12374E"/>
-                </a:solidFill>
-                <a:latin typeface="Microsoft YaHei" pitchFamily="34" charset="0"/>
-                <a:ea typeface="Microsoft YaHei" pitchFamily="34" charset="-122"/>
-                <a:cs typeface="Microsoft YaHei" pitchFamily="34" charset="-120"/>
-              </a:rPr>
-              <a:t>•　研究目标：</a:t>
-            </a:r>
-            <a:endParaRPr lang="en-US" sz="1200" dirty="0"/>
-          </a:p>
-        </p:txBody>
-      </p:sp>
-      <p:sp>
-        <p:nvSpPr>
-          <p:cNvPr id="43" name="Text 38"/>
-          <p:cNvSpPr/>
-          <p:nvPr/>
-        </p:nvSpPr>
-        <p:spPr>
-          <a:xfrm>
-            <a:off x="441960" y="6489144"/>
-            <a:ext cx="2286000" cy="181332"/>
-          </a:xfrm>
-          <a:prstGeom prst="rect">
-            <a:avLst/>
-          </a:prstGeom>
-          <a:noFill/>
-          <a:ln/>
-        </p:spPr>
-        <p:txBody>
-          <a:bodyPr wrap="square" lIns="0" tIns="0" rIns="0" bIns="0" rtlCol="0" anchor="ctr"/>
-          <a:lstStyle/>
-          <a:p>
-            <a:pPr algn="l" indent="0" marL="0">
-              <a:lnSpc>
                 <a:spcPts val="1428"/>
               </a:lnSpc>
               <a:buNone/>
@@ -35821,7 +38323,7 @@
                 <a:ea typeface="Microsoft YaHei" pitchFamily="34" charset="-122"/>
                 <a:cs typeface="Microsoft YaHei" pitchFamily="34" charset="-120"/>
               </a:rPr>
-              <a:t>北京科技大学 · 科研汇报示例</a:t>
+              <a:t>29 / 30</a:t>
             </a:r>
             <a:endParaRPr lang="en-US" sz="1020" dirty="0"/>
           </a:p>
@@ -35829,87 +38331,30 @@
       </p:sp>
       <p:sp>
         <p:nvSpPr>
-          <p:cNvPr id="44" name="Text 39"/>
-          <p:cNvSpPr/>
-          <p:nvPr/>
-        </p:nvSpPr>
-        <p:spPr>
-          <a:xfrm>
-            <a:off x="2910840" y="6492478"/>
-            <a:ext cx="8212455" cy="174784"/>
-          </a:xfrm>
-          <a:prstGeom prst="rect">
-            <a:avLst/>
-          </a:prstGeom>
-          <a:noFill/>
-          <a:ln/>
-        </p:spPr>
-        <p:txBody>
-          <a:bodyPr wrap="square" lIns="0" tIns="0" rIns="0" bIns="0" rtlCol="0" anchor="ctr"/>
-          <a:lstStyle/>
-          <a:p>
-            <a:pPr algn="r" indent="0" marL="0">
-              <a:lnSpc>
-                <a:spcPts val="1377"/>
-              </a:lnSpc>
-              <a:buNone/>
-            </a:pPr>
-            <a:r>
-              <a:rPr lang="en-US" sz="1020" dirty="0">
-                <a:solidFill>
-                  <a:srgbClr val="617B8B"/>
-                </a:solidFill>
-                <a:latin typeface="Microsoft YaHei" pitchFamily="34" charset="0"/>
-                <a:ea typeface="Microsoft YaHei" pitchFamily="34" charset="-122"/>
-                <a:cs typeface="Microsoft YaHei" pitchFamily="34" charset="-120"/>
-              </a:rPr>
-              <a:t>作者信息占位示例；请以本人简历与可核实成果为准</a:t>
-            </a:r>
-            <a:endParaRPr lang="en-US" sz="1020" dirty="0"/>
-          </a:p>
-        </p:txBody>
-      </p:sp>
-      <p:sp>
-        <p:nvSpPr>
-          <p:cNvPr id="45" name="Text 40"/>
-          <p:cNvSpPr/>
-          <p:nvPr/>
-        </p:nvSpPr>
-        <p:spPr>
-          <a:xfrm>
-            <a:off x="11306175" y="6489144"/>
-            <a:ext cx="443865" cy="181332"/>
-          </a:xfrm>
-          <a:prstGeom prst="rect">
-            <a:avLst/>
-          </a:prstGeom>
-          <a:noFill/>
-          <a:ln/>
-        </p:spPr>
-        <p:txBody>
-          <a:bodyPr wrap="none" lIns="0" tIns="0" rIns="0" bIns="0" rtlCol="0" anchor="ctr"/>
-          <a:lstStyle/>
-          <a:p>
-            <a:pPr algn="l" indent="0" marL="0">
-              <a:lnSpc>
-                <a:spcPts val="1428"/>
-              </a:lnSpc>
-              <a:buNone/>
-            </a:pPr>
-            <a:r>
-              <a:rPr lang="en-US" sz="1020" dirty="0">
-                <a:solidFill>
-                  <a:srgbClr val="617B8B"/>
-                </a:solidFill>
-                <a:latin typeface="Microsoft YaHei" pitchFamily="34" charset="0"/>
-                <a:ea typeface="Microsoft YaHei" pitchFamily="34" charset="-122"/>
-                <a:cs typeface="Microsoft YaHei" pitchFamily="34" charset="-120"/>
-              </a:rPr>
-              <a:t>29 / 30</a:t>
-            </a:r>
-            <a:endParaRPr lang="en-US" sz="1020" dirty="0"/>
-          </a:p>
-        </p:txBody>
+          <p:cNvPr id="83" name="Shape 79"/>
+          <p:cNvSpPr/>
+          <p:nvPr/>
+        </p:nvSpPr>
+        <p:spPr>
+          <a:xfrm>
+            <a:off x="441960" y="6355080"/>
+            <a:ext cx="11308080" cy="7620"/>
+          </a:xfrm>
+          <a:prstGeom prst="rect">
+            <a:avLst/>
+          </a:prstGeom>
+          <a:solidFill>
+            <a:srgbClr val="D8E2E9"/>
+          </a:solidFill>
+          <a:ln w="12700">
+            <a:solidFill>
+              <a:srgbClr val="D8E2E9">
+                <a:alpha val="0"/>
+              </a:srgbClr>
+            </a:solidFill>
+            <a:prstDash val="solid"/>
+          </a:ln>
+        </p:spPr>
       </p:sp>
     </p:spTree>
   </p:cSld>
@@ -42461,8 +44906,8 @@
         </p:nvSpPr>
         <p:spPr>
           <a:xfrm>
-            <a:off x="7360920" y="2118360"/>
-            <a:ext cx="4206240" cy="297180"/>
+            <a:off x="7315200" y="2072640"/>
+            <a:ext cx="4297680" cy="297180"/>
           </a:xfrm>
           <a:prstGeom prst="rect">
             <a:avLst/>
@@ -42503,8 +44948,8 @@
         </p:nvSpPr>
         <p:spPr>
           <a:xfrm>
-            <a:off x="7360920" y="2522220"/>
-            <a:ext cx="4206240" cy="629841"/>
+            <a:off x="7315200" y="2476500"/>
+            <a:ext cx="4297680" cy="629841"/>
           </a:xfrm>
           <a:prstGeom prst="rect">
             <a:avLst/>
@@ -42572,8 +45017,8 @@
         </p:nvSpPr>
         <p:spPr>
           <a:xfrm>
-            <a:off x="7360920" y="3525441"/>
-            <a:ext cx="4206240" cy="297180"/>
+            <a:off x="7315200" y="3479721"/>
+            <a:ext cx="4297680" cy="297180"/>
           </a:xfrm>
           <a:prstGeom prst="rect">
             <a:avLst/>
@@ -42614,8 +45059,8 @@
         </p:nvSpPr>
         <p:spPr>
           <a:xfrm>
-            <a:off x="7360920" y="3929301"/>
-            <a:ext cx="4206240" cy="629841"/>
+            <a:off x="7315200" y="3883581"/>
+            <a:ext cx="4297680" cy="629841"/>
           </a:xfrm>
           <a:prstGeom prst="rect">
             <a:avLst/>
@@ -42683,8 +45128,8 @@
         </p:nvSpPr>
         <p:spPr>
           <a:xfrm>
-            <a:off x="7360920" y="4932640"/>
-            <a:ext cx="4206240" cy="297180"/>
+            <a:off x="7315200" y="4886920"/>
+            <a:ext cx="4297680" cy="297180"/>
           </a:xfrm>
           <a:prstGeom prst="rect">
             <a:avLst/>
@@ -42725,8 +45170,8 @@
         </p:nvSpPr>
         <p:spPr>
           <a:xfrm>
-            <a:off x="7360920" y="5336500"/>
-            <a:ext cx="4206240" cy="629841"/>
+            <a:off x="7315200" y="5290780"/>
+            <a:ext cx="4297680" cy="629841"/>
           </a:xfrm>
           <a:prstGeom prst="rect">
             <a:avLst/>
@@ -43867,8 +46312,8 @@
         </p:nvSpPr>
         <p:spPr>
           <a:xfrm>
-            <a:off x="624840" y="5024080"/>
-            <a:ext cx="5181600" cy="314920"/>
+            <a:off x="563880" y="5024080"/>
+            <a:ext cx="5303520" cy="314920"/>
           </a:xfrm>
           <a:prstGeom prst="rect">
             <a:avLst/>
@@ -43963,8 +46408,8 @@
         </p:nvSpPr>
         <p:spPr>
           <a:xfrm>
-            <a:off x="6355080" y="5024080"/>
-            <a:ext cx="5181600" cy="314920"/>
+            <a:off x="6294120" y="5024080"/>
+            <a:ext cx="5303520" cy="314920"/>
           </a:xfrm>
           <a:prstGeom prst="rect">
             <a:avLst/>
@@ -44032,17 +46477,17 @@
         </p:nvSpPr>
         <p:spPr>
           <a:xfrm>
-            <a:off x="2642354" y="5791200"/>
-            <a:ext cx="6907173" cy="304800"/>
-          </a:xfrm>
-          <a:prstGeom prst="rect">
-            <a:avLst/>
-          </a:prstGeom>
-          <a:noFill/>
-          <a:ln/>
-        </p:spPr>
-        <p:txBody>
-          <a:bodyPr wrap="square" lIns="0" tIns="0" rIns="0" bIns="0" rtlCol="0" anchor="ctr"/>
+            <a:off x="609600" y="5791200"/>
+            <a:ext cx="10972800" cy="304800"/>
+          </a:xfrm>
+          <a:prstGeom prst="rect">
+            <a:avLst/>
+          </a:prstGeom>
+          <a:noFill/>
+          <a:ln/>
+        </p:spPr>
+        <p:txBody>
+          <a:bodyPr wrap="none" lIns="0" tIns="0" rIns="0" bIns="0" rtlCol="0" anchor="ctr"/>
           <a:lstStyle/>
           <a:p>
             <a:pPr algn="ctr" indent="0" marL="0">
@@ -45897,17 +48342,17 @@
         </p:nvSpPr>
         <p:spPr>
           <a:xfrm>
-            <a:off x="2305169" y="5791200"/>
-            <a:ext cx="7581543" cy="304800"/>
-          </a:xfrm>
-          <a:prstGeom prst="rect">
-            <a:avLst/>
-          </a:prstGeom>
-          <a:noFill/>
-          <a:ln/>
-        </p:spPr>
-        <p:txBody>
-          <a:bodyPr wrap="square" lIns="0" tIns="0" rIns="0" bIns="0" rtlCol="0" anchor="ctr"/>
+            <a:off x="609600" y="5791200"/>
+            <a:ext cx="10972800" cy="304800"/>
+          </a:xfrm>
+          <a:prstGeom prst="rect">
+            <a:avLst/>
+          </a:prstGeom>
+          <a:noFill/>
+          <a:ln/>
+        </p:spPr>
+        <p:txBody>
+          <a:bodyPr wrap="none" lIns="0" tIns="0" rIns="0" bIns="0" rtlCol="0" anchor="ctr"/>
           <a:lstStyle/>
           <a:p>
             <a:pPr algn="ctr" indent="0" marL="0">

--- a/output/北京科技大学_WebSlide科研汇报示例.pptx
+++ b/output/北京科技大学_WebSlide科研汇报示例.pptx
@@ -3525,7 +3525,7 @@
           <a:ln/>
         </p:spPr>
         <p:txBody>
-          <a:bodyPr wrap="none" lIns="0" tIns="0" rIns="0" bIns="0" rtlCol="0" anchor="ctr"/>
+          <a:bodyPr wrap="none" lIns="0" tIns="0" rIns="0" bIns="0" rtlCol="0" anchor="t"/>
           <a:lstStyle/>
           <a:p>
             <a:pPr algn="ctr" indent="0" marL="0" eaLnBrk="1" latinLnBrk="0" hangingPunct="1">
@@ -3587,7 +3587,7 @@
           <a:ln/>
         </p:spPr>
         <p:txBody>
-          <a:bodyPr wrap="none" lIns="0" tIns="0" rIns="0" bIns="0" rtlCol="0" anchor="ctr"/>
+          <a:bodyPr wrap="none" lIns="0" tIns="0" rIns="0" bIns="0" rtlCol="0" anchor="t"/>
           <a:lstStyle/>
           <a:p>
             <a:pPr algn="ctr" indent="0" marL="0" eaLnBrk="1" latinLnBrk="0" hangingPunct="1">
@@ -3629,7 +3629,7 @@
           <a:ln/>
         </p:spPr>
         <p:txBody>
-          <a:bodyPr wrap="none" lIns="0" tIns="0" rIns="0" bIns="0" rtlCol="0" anchor="ctr"/>
+          <a:bodyPr wrap="none" lIns="0" tIns="0" rIns="0" bIns="0" rtlCol="0" anchor="t"/>
           <a:lstStyle/>
           <a:p>
             <a:pPr algn="just" indent="0" marL="0" eaLnBrk="1" latinLnBrk="0" hangingPunct="1">
@@ -3671,7 +3671,7 @@
           <a:ln/>
         </p:spPr>
         <p:txBody>
-          <a:bodyPr wrap="none" lIns="0" tIns="0" rIns="0" bIns="0" rtlCol="0" anchor="ctr"/>
+          <a:bodyPr wrap="none" lIns="0" tIns="0" rIns="0" bIns="0" rtlCol="0" anchor="t"/>
           <a:lstStyle/>
           <a:p>
             <a:pPr algn="l" indent="0" marL="0" eaLnBrk="1" latinLnBrk="0" hangingPunct="1">
@@ -3713,7 +3713,7 @@
           <a:ln/>
         </p:spPr>
         <p:txBody>
-          <a:bodyPr wrap="none" lIns="0" tIns="0" rIns="0" bIns="0" rtlCol="0" anchor="ctr"/>
+          <a:bodyPr wrap="none" lIns="0" tIns="0" rIns="0" bIns="0" rtlCol="0" anchor="t"/>
           <a:lstStyle/>
           <a:p>
             <a:pPr algn="just" indent="0" marL="0" eaLnBrk="1" latinLnBrk="0" hangingPunct="1">
@@ -3755,7 +3755,7 @@
           <a:ln/>
         </p:spPr>
         <p:txBody>
-          <a:bodyPr wrap="none" lIns="0" tIns="0" rIns="0" bIns="0" rtlCol="0" anchor="ctr"/>
+          <a:bodyPr wrap="none" lIns="0" tIns="0" rIns="0" bIns="0" rtlCol="0" anchor="t"/>
           <a:lstStyle/>
           <a:p>
             <a:pPr algn="l" indent="0" marL="0" eaLnBrk="1" latinLnBrk="0" hangingPunct="1">
@@ -3797,7 +3797,7 @@
           <a:ln/>
         </p:spPr>
         <p:txBody>
-          <a:bodyPr wrap="none" lIns="0" tIns="0" rIns="0" bIns="0" rtlCol="0" anchor="ctr"/>
+          <a:bodyPr wrap="none" lIns="0" tIns="0" rIns="0" bIns="0" rtlCol="0" anchor="t"/>
           <a:lstStyle/>
           <a:p>
             <a:pPr algn="just" indent="0" marL="0" eaLnBrk="1" latinLnBrk="0" hangingPunct="1">
@@ -3839,7 +3839,7 @@
           <a:ln/>
         </p:spPr>
         <p:txBody>
-          <a:bodyPr wrap="none" lIns="0" tIns="0" rIns="0" bIns="0" rtlCol="0" anchor="ctr"/>
+          <a:bodyPr wrap="none" lIns="0" tIns="0" rIns="0" bIns="0" rtlCol="0" anchor="t"/>
           <a:lstStyle/>
           <a:p>
             <a:pPr algn="l" indent="0" marL="0" eaLnBrk="1" latinLnBrk="0" hangingPunct="1">
@@ -3994,7 +3994,7 @@
           <a:ln/>
         </p:spPr>
         <p:txBody>
-          <a:bodyPr wrap="none" lIns="0" tIns="0" rIns="0" bIns="0" rtlCol="0" anchor="ctr"/>
+          <a:bodyPr wrap="none" lIns="0" tIns="0" rIns="0" bIns="0" rtlCol="0" anchor="t"/>
           <a:lstStyle/>
           <a:p>
             <a:pPr algn="l" indent="0" marL="0" eaLnBrk="1" latinLnBrk="0" hangingPunct="1">
@@ -4033,7 +4033,7 @@
           <a:ln/>
         </p:spPr>
         <p:txBody>
-          <a:bodyPr wrap="none" lIns="0" tIns="0" rIns="0" bIns="0" rtlCol="0" anchor="ctr"/>
+          <a:bodyPr wrap="none" lIns="0" tIns="0" rIns="0" bIns="0" rtlCol="0" anchor="t"/>
           <a:lstStyle/>
           <a:p>
             <a:pPr algn="l" indent="0" marL="0" eaLnBrk="1" latinLnBrk="0" hangingPunct="1">
@@ -4075,7 +4075,7 @@
           <a:ln/>
         </p:spPr>
         <p:txBody>
-          <a:bodyPr wrap="none" lIns="0" tIns="0" rIns="0" bIns="0" rtlCol="0" anchor="ctr"/>
+          <a:bodyPr wrap="none" lIns="0" tIns="0" rIns="0" bIns="0" rtlCol="0" anchor="t"/>
           <a:lstStyle/>
           <a:p>
             <a:pPr algn="l" indent="0" marL="0" eaLnBrk="1" latinLnBrk="0" hangingPunct="1">
@@ -4168,7 +4168,7 @@
           <a:ln/>
         </p:spPr>
         <p:txBody>
-          <a:bodyPr wrap="none" lIns="0" tIns="0" rIns="0" bIns="0" rtlCol="0" anchor="ctr"/>
+          <a:bodyPr wrap="none" lIns="0" tIns="0" rIns="0" bIns="0" rtlCol="0" anchor="t"/>
           <a:lstStyle/>
           <a:p>
             <a:pPr algn="l" indent="0" marL="0" eaLnBrk="1" latinLnBrk="0" hangingPunct="1">
@@ -4237,7 +4237,7 @@
           <a:ln/>
         </p:spPr>
         <p:txBody>
-          <a:bodyPr wrap="none" lIns="0" tIns="0" rIns="0" bIns="0" rtlCol="0" anchor="ctr"/>
+          <a:bodyPr wrap="none" lIns="0" tIns="0" rIns="0" bIns="0" rtlCol="0" anchor="t"/>
           <a:lstStyle/>
           <a:p>
             <a:pPr algn="l" indent="0" marL="0" eaLnBrk="1" latinLnBrk="0" hangingPunct="1">
@@ -4279,7 +4279,7 @@
           <a:ln/>
         </p:spPr>
         <p:txBody>
-          <a:bodyPr wrap="none" lIns="0" tIns="0" rIns="0" bIns="0" rtlCol="0" anchor="ctr"/>
+          <a:bodyPr wrap="none" lIns="0" tIns="0" rIns="0" bIns="0" rtlCol="0" anchor="t"/>
           <a:lstStyle/>
           <a:p>
             <a:pPr algn="just" marL="243840" indent="-243840" eaLnBrk="1" latinLnBrk="0" hangingPunct="1">
@@ -4322,7 +4322,7 @@
           <a:ln/>
         </p:spPr>
         <p:txBody>
-          <a:bodyPr wrap="none" lIns="0" tIns="0" rIns="0" bIns="0" rtlCol="0" anchor="ctr"/>
+          <a:bodyPr wrap="none" lIns="0" tIns="0" rIns="0" bIns="0" rtlCol="0" anchor="t"/>
           <a:lstStyle/>
           <a:p>
             <a:pPr algn="just" marL="243840" indent="-243840" eaLnBrk="1" latinLnBrk="0" hangingPunct="1">
@@ -4365,7 +4365,7 @@
           <a:ln/>
         </p:spPr>
         <p:txBody>
-          <a:bodyPr wrap="none" lIns="0" tIns="0" rIns="0" bIns="0" rtlCol="0" anchor="ctr"/>
+          <a:bodyPr wrap="none" lIns="0" tIns="0" rIns="0" bIns="0" rtlCol="0" anchor="t"/>
           <a:lstStyle/>
           <a:p>
             <a:pPr algn="just" marL="243840" indent="-243840" eaLnBrk="1" latinLnBrk="0" hangingPunct="1">
@@ -4435,7 +4435,7 @@
           <a:ln/>
         </p:spPr>
         <p:txBody>
-          <a:bodyPr wrap="none" lIns="0" tIns="0" rIns="0" bIns="0" rtlCol="0" anchor="ctr"/>
+          <a:bodyPr wrap="none" lIns="0" tIns="0" rIns="0" bIns="0" rtlCol="0" anchor="t"/>
           <a:lstStyle/>
           <a:p>
             <a:pPr algn="l" indent="0" marL="0" eaLnBrk="1" latinLnBrk="0" hangingPunct="1">
@@ -4477,7 +4477,7 @@
           <a:ln/>
         </p:spPr>
         <p:txBody>
-          <a:bodyPr wrap="none" lIns="0" tIns="0" rIns="0" bIns="0" rtlCol="0" anchor="ctr"/>
+          <a:bodyPr wrap="none" lIns="0" tIns="0" rIns="0" bIns="0" rtlCol="0" anchor="t"/>
           <a:lstStyle/>
           <a:p>
             <a:pPr algn="just" marL="243840" indent="-243840" eaLnBrk="1" latinLnBrk="0" hangingPunct="1">
@@ -4520,7 +4520,7 @@
           <a:ln/>
         </p:spPr>
         <p:txBody>
-          <a:bodyPr wrap="none" lIns="0" tIns="0" rIns="0" bIns="0" rtlCol="0" anchor="ctr"/>
+          <a:bodyPr wrap="none" lIns="0" tIns="0" rIns="0" bIns="0" rtlCol="0" anchor="t"/>
           <a:lstStyle/>
           <a:p>
             <a:pPr algn="just" marL="243840" indent="-243840" eaLnBrk="1" latinLnBrk="0" hangingPunct="1">
@@ -4563,7 +4563,7 @@
           <a:ln/>
         </p:spPr>
         <p:txBody>
-          <a:bodyPr wrap="none" lIns="0" tIns="0" rIns="0" bIns="0" rtlCol="0" anchor="ctr"/>
+          <a:bodyPr wrap="none" lIns="0" tIns="0" rIns="0" bIns="0" rtlCol="0" anchor="t"/>
           <a:lstStyle/>
           <a:p>
             <a:pPr algn="just" marL="243840" indent="-243840" eaLnBrk="1" latinLnBrk="0" hangingPunct="1">
@@ -4660,7 +4660,7 @@
           <a:ln/>
         </p:spPr>
         <p:txBody>
-          <a:bodyPr wrap="none" lIns="0" tIns="0" rIns="0" bIns="0" rtlCol="0" anchor="ctr"/>
+          <a:bodyPr wrap="none" lIns="0" tIns="0" rIns="0" bIns="0" rtlCol="0" anchor="t"/>
           <a:lstStyle/>
           <a:p>
             <a:pPr algn="l" indent="0" marL="0" eaLnBrk="1" latinLnBrk="0" hangingPunct="1">
@@ -4702,7 +4702,7 @@
           <a:ln/>
         </p:spPr>
         <p:txBody>
-          <a:bodyPr wrap="none" lIns="0" tIns="0" rIns="0" bIns="0" rtlCol="0" anchor="ctr"/>
+          <a:bodyPr wrap="none" lIns="0" tIns="0" rIns="0" bIns="0" rtlCol="0" anchor="t"/>
           <a:lstStyle/>
           <a:p>
             <a:pPr algn="just" marL="243840" indent="-243840" eaLnBrk="1" latinLnBrk="0" hangingPunct="1">
@@ -4745,7 +4745,7 @@
           <a:ln/>
         </p:spPr>
         <p:txBody>
-          <a:bodyPr wrap="none" lIns="0" tIns="0" rIns="0" bIns="0" rtlCol="0" anchor="ctr"/>
+          <a:bodyPr wrap="none" lIns="0" tIns="0" rIns="0" bIns="0" rtlCol="0" anchor="t"/>
           <a:lstStyle/>
           <a:p>
             <a:pPr algn="just" marL="243840" indent="-243840" eaLnBrk="1" latinLnBrk="0" hangingPunct="1">
@@ -4788,7 +4788,7 @@
           <a:ln/>
         </p:spPr>
         <p:txBody>
-          <a:bodyPr wrap="none" lIns="0" tIns="0" rIns="0" bIns="0" rtlCol="0" anchor="ctr"/>
+          <a:bodyPr wrap="none" lIns="0" tIns="0" rIns="0" bIns="0" rtlCol="0" anchor="t"/>
           <a:lstStyle/>
           <a:p>
             <a:pPr algn="just" marL="243840" indent="-243840" eaLnBrk="1" latinLnBrk="0" hangingPunct="1">
@@ -4858,7 +4858,7 @@
           <a:ln/>
         </p:spPr>
         <p:txBody>
-          <a:bodyPr wrap="none" lIns="0" tIns="0" rIns="0" bIns="0" rtlCol="0" anchor="ctr"/>
+          <a:bodyPr wrap="none" lIns="0" tIns="0" rIns="0" bIns="0" rtlCol="0" anchor="t"/>
           <a:lstStyle/>
           <a:p>
             <a:pPr algn="l" indent="0" marL="0" eaLnBrk="1" latinLnBrk="0" hangingPunct="1">
@@ -4900,7 +4900,7 @@
           <a:ln/>
         </p:spPr>
         <p:txBody>
-          <a:bodyPr wrap="none" lIns="0" tIns="0" rIns="0" bIns="0" rtlCol="0" anchor="ctr"/>
+          <a:bodyPr wrap="none" lIns="0" tIns="0" rIns="0" bIns="0" rtlCol="0" anchor="t"/>
           <a:lstStyle/>
           <a:p>
             <a:pPr algn="just" marL="243840" indent="-243840" eaLnBrk="1" latinLnBrk="0" hangingPunct="1">
@@ -4943,7 +4943,7 @@
           <a:ln/>
         </p:spPr>
         <p:txBody>
-          <a:bodyPr wrap="none" lIns="0" tIns="0" rIns="0" bIns="0" rtlCol="0" anchor="ctr"/>
+          <a:bodyPr wrap="none" lIns="0" tIns="0" rIns="0" bIns="0" rtlCol="0" anchor="t"/>
           <a:lstStyle/>
           <a:p>
             <a:pPr algn="just" marL="243840" indent="-243840" eaLnBrk="1" latinLnBrk="0" hangingPunct="1">
@@ -4986,7 +4986,7 @@
           <a:ln/>
         </p:spPr>
         <p:txBody>
-          <a:bodyPr wrap="none" lIns="0" tIns="0" rIns="0" bIns="0" rtlCol="0" anchor="ctr"/>
+          <a:bodyPr wrap="none" lIns="0" tIns="0" rIns="0" bIns="0" rtlCol="0" anchor="t"/>
           <a:lstStyle/>
           <a:p>
             <a:pPr algn="just" marL="243840" indent="-243840" eaLnBrk="1" latinLnBrk="0" hangingPunct="1">
@@ -5029,7 +5029,7 @@
           <a:ln/>
         </p:spPr>
         <p:txBody>
-          <a:bodyPr wrap="none" lIns="0" tIns="0" rIns="0" bIns="0" rtlCol="0" anchor="ctr"/>
+          <a:bodyPr wrap="none" lIns="0" tIns="0" rIns="0" bIns="0" rtlCol="0" anchor="t"/>
           <a:lstStyle/>
           <a:p>
             <a:pPr algn="l" indent="0" marL="0" eaLnBrk="1" latinLnBrk="0" hangingPunct="1">
@@ -5071,7 +5071,7 @@
           <a:ln/>
         </p:spPr>
         <p:txBody>
-          <a:bodyPr wrap="none" lIns="0" tIns="0" rIns="0" bIns="0" rtlCol="0" anchor="ctr"/>
+          <a:bodyPr wrap="none" lIns="0" tIns="0" rIns="0" bIns="0" rtlCol="0" anchor="t"/>
           <a:lstStyle/>
           <a:p>
             <a:pPr algn="r" indent="0" marL="0" eaLnBrk="1" latinLnBrk="0" hangingPunct="1">
@@ -5113,7 +5113,7 @@
           <a:ln/>
         </p:spPr>
         <p:txBody>
-          <a:bodyPr wrap="none" lIns="0" tIns="0" rIns="0" bIns="0" rtlCol="0" anchor="ctr"/>
+          <a:bodyPr wrap="none" lIns="0" tIns="0" rIns="0" bIns="0" rtlCol="0" anchor="t"/>
           <a:lstStyle/>
           <a:p>
             <a:pPr algn="l" indent="0" marL="0" eaLnBrk="1" latinLnBrk="0" hangingPunct="1">
@@ -5295,7 +5295,7 @@
           <a:ln/>
         </p:spPr>
         <p:txBody>
-          <a:bodyPr wrap="none" lIns="0" tIns="0" rIns="0" bIns="0" rtlCol="0" anchor="ctr"/>
+          <a:bodyPr wrap="none" lIns="0" tIns="0" rIns="0" bIns="0" rtlCol="0" anchor="t"/>
           <a:lstStyle/>
           <a:p>
             <a:pPr algn="l" indent="0" marL="0" eaLnBrk="1" latinLnBrk="0" hangingPunct="1">
@@ -5334,7 +5334,7 @@
           <a:ln/>
         </p:spPr>
         <p:txBody>
-          <a:bodyPr wrap="none" lIns="0" tIns="0" rIns="0" bIns="0" rtlCol="0" anchor="ctr"/>
+          <a:bodyPr wrap="none" lIns="0" tIns="0" rIns="0" bIns="0" rtlCol="0" anchor="t"/>
           <a:lstStyle/>
           <a:p>
             <a:pPr algn="l" indent="0" marL="0" eaLnBrk="1" latinLnBrk="0" hangingPunct="1">
@@ -5376,7 +5376,7 @@
           <a:ln/>
         </p:spPr>
         <p:txBody>
-          <a:bodyPr wrap="none" lIns="0" tIns="0" rIns="0" bIns="0" rtlCol="0" anchor="ctr"/>
+          <a:bodyPr wrap="none" lIns="0" tIns="0" rIns="0" bIns="0" rtlCol="0" anchor="t"/>
           <a:lstStyle/>
           <a:p>
             <a:pPr algn="l" indent="0" marL="0" eaLnBrk="1" latinLnBrk="0" hangingPunct="1">
@@ -5469,7 +5469,7 @@
           <a:ln/>
         </p:spPr>
         <p:txBody>
-          <a:bodyPr wrap="none" lIns="0" tIns="0" rIns="0" bIns="0" rtlCol="0" anchor="ctr"/>
+          <a:bodyPr wrap="none" lIns="0" tIns="0" rIns="0" bIns="0" rtlCol="0" anchor="t"/>
           <a:lstStyle/>
           <a:p>
             <a:pPr algn="l" indent="0" marL="0" eaLnBrk="1" latinLnBrk="0" hangingPunct="1">
@@ -5583,7 +5583,7 @@
           <a:ln/>
         </p:spPr>
         <p:txBody>
-          <a:bodyPr wrap="none" lIns="0" tIns="0" rIns="0" bIns="0" rtlCol="0" anchor="ctr"/>
+          <a:bodyPr wrap="none" lIns="0" tIns="0" rIns="0" bIns="0" rtlCol="0" anchor="t"/>
           <a:lstStyle/>
           <a:p>
             <a:pPr algn="ctr" indent="0" marL="0" eaLnBrk="1" latinLnBrk="0" hangingPunct="1">
@@ -5625,7 +5625,7 @@
           <a:ln/>
         </p:spPr>
         <p:txBody>
-          <a:bodyPr wrap="none" lIns="0" tIns="0" rIns="0" bIns="0" rtlCol="0" anchor="ctr"/>
+          <a:bodyPr wrap="none" lIns="0" tIns="0" rIns="0" bIns="0" rtlCol="0" anchor="t"/>
           <a:lstStyle/>
           <a:p>
             <a:pPr algn="just" marL="243840" indent="-243840" eaLnBrk="1" latinLnBrk="0" hangingPunct="1">
@@ -5668,7 +5668,7 @@
           <a:ln/>
         </p:spPr>
         <p:txBody>
-          <a:bodyPr wrap="none" lIns="0" tIns="0" rIns="0" bIns="0" rtlCol="0" anchor="ctr"/>
+          <a:bodyPr wrap="none" lIns="0" tIns="0" rIns="0" bIns="0" rtlCol="0" anchor="t"/>
           <a:lstStyle/>
           <a:p>
             <a:pPr algn="just" marL="243840" indent="-243840" eaLnBrk="1" latinLnBrk="0" hangingPunct="1">
@@ -5711,7 +5711,7 @@
           <a:ln/>
         </p:spPr>
         <p:txBody>
-          <a:bodyPr wrap="none" lIns="0" tIns="0" rIns="0" bIns="0" rtlCol="0" anchor="ctr"/>
+          <a:bodyPr wrap="none" lIns="0" tIns="0" rIns="0" bIns="0" rtlCol="0" anchor="t"/>
           <a:lstStyle/>
           <a:p>
             <a:pPr algn="just" marL="243840" indent="-243840" eaLnBrk="1" latinLnBrk="0" hangingPunct="1">
@@ -5805,7 +5805,7 @@
           <a:ln/>
         </p:spPr>
         <p:txBody>
-          <a:bodyPr wrap="none" lIns="0" tIns="0" rIns="0" bIns="0" rtlCol="0" anchor="ctr"/>
+          <a:bodyPr wrap="none" lIns="0" tIns="0" rIns="0" bIns="0" rtlCol="0" anchor="t"/>
           <a:lstStyle/>
           <a:p>
             <a:pPr algn="ctr" indent="0" marL="0" eaLnBrk="1" latinLnBrk="0" hangingPunct="1">
@@ -5847,7 +5847,7 @@
           <a:ln/>
         </p:spPr>
         <p:txBody>
-          <a:bodyPr wrap="none" lIns="0" tIns="0" rIns="0" bIns="0" rtlCol="0" anchor="ctr"/>
+          <a:bodyPr wrap="none" lIns="0" tIns="0" rIns="0" bIns="0" rtlCol="0" anchor="t"/>
           <a:lstStyle/>
           <a:p>
             <a:pPr algn="just" marL="243840" indent="-243840" eaLnBrk="1" latinLnBrk="0" hangingPunct="1">
@@ -5890,7 +5890,7 @@
           <a:ln/>
         </p:spPr>
         <p:txBody>
-          <a:bodyPr wrap="none" lIns="0" tIns="0" rIns="0" bIns="0" rtlCol="0" anchor="ctr"/>
+          <a:bodyPr wrap="none" lIns="0" tIns="0" rIns="0" bIns="0" rtlCol="0" anchor="t"/>
           <a:lstStyle/>
           <a:p>
             <a:pPr algn="just" marL="243840" indent="-243840" eaLnBrk="1" latinLnBrk="0" hangingPunct="1">
@@ -5933,7 +5933,7 @@
           <a:ln/>
         </p:spPr>
         <p:txBody>
-          <a:bodyPr wrap="none" lIns="0" tIns="0" rIns="0" bIns="0" rtlCol="0" anchor="ctr"/>
+          <a:bodyPr wrap="none" lIns="0" tIns="0" rIns="0" bIns="0" rtlCol="0" anchor="t"/>
           <a:lstStyle/>
           <a:p>
             <a:pPr algn="just" marL="243840" indent="-243840" eaLnBrk="1" latinLnBrk="0" hangingPunct="1">
@@ -6024,7 +6024,7 @@
           <a:ln/>
         </p:spPr>
         <p:txBody>
-          <a:bodyPr wrap="none" lIns="0" tIns="0" rIns="0" bIns="0" rtlCol="0" anchor="ctr"/>
+          <a:bodyPr wrap="none" lIns="0" tIns="0" rIns="0" bIns="0" rtlCol="0" anchor="t"/>
           <a:lstStyle/>
           <a:p>
             <a:pPr algn="ctr" indent="0" marL="0" eaLnBrk="1" latinLnBrk="0" hangingPunct="1">
@@ -6066,7 +6066,7 @@
           <a:ln/>
         </p:spPr>
         <p:txBody>
-          <a:bodyPr wrap="none" lIns="0" tIns="0" rIns="0" bIns="0" rtlCol="0" anchor="ctr"/>
+          <a:bodyPr wrap="none" lIns="0" tIns="0" rIns="0" bIns="0" rtlCol="0" anchor="t"/>
           <a:lstStyle/>
           <a:p>
             <a:pPr algn="just" marL="243840" indent="-243840" eaLnBrk="1" latinLnBrk="0" hangingPunct="1">
@@ -6109,7 +6109,7 @@
           <a:ln/>
         </p:spPr>
         <p:txBody>
-          <a:bodyPr wrap="none" lIns="0" tIns="0" rIns="0" bIns="0" rtlCol="0" anchor="ctr"/>
+          <a:bodyPr wrap="none" lIns="0" tIns="0" rIns="0" bIns="0" rtlCol="0" anchor="t"/>
           <a:lstStyle/>
           <a:p>
             <a:pPr algn="just" marL="243840" indent="-243840" eaLnBrk="1" latinLnBrk="0" hangingPunct="1">
@@ -6152,7 +6152,7 @@
           <a:ln/>
         </p:spPr>
         <p:txBody>
-          <a:bodyPr wrap="none" lIns="0" tIns="0" rIns="0" bIns="0" rtlCol="0" anchor="ctr"/>
+          <a:bodyPr wrap="none" lIns="0" tIns="0" rIns="0" bIns="0" rtlCol="0" anchor="t"/>
           <a:lstStyle/>
           <a:p>
             <a:pPr algn="just" marL="243840" indent="-243840" eaLnBrk="1" latinLnBrk="0" hangingPunct="1">
@@ -6270,7 +6270,7 @@
           <a:ln/>
         </p:spPr>
         <p:txBody>
-          <a:bodyPr wrap="none" lIns="0" tIns="0" rIns="0" bIns="0" rtlCol="0" anchor="ctr"/>
+          <a:bodyPr wrap="none" lIns="0" tIns="0" rIns="0" bIns="0" rtlCol="0" anchor="t"/>
           <a:lstStyle/>
           <a:p>
             <a:pPr algn="l" indent="0" marL="0" eaLnBrk="1" latinLnBrk="0" hangingPunct="1">
@@ -6312,7 +6312,7 @@
           <a:ln/>
         </p:spPr>
         <p:txBody>
-          <a:bodyPr wrap="none" lIns="0" tIns="0" rIns="0" bIns="0" rtlCol="0" anchor="ctr"/>
+          <a:bodyPr wrap="none" lIns="0" tIns="0" rIns="0" bIns="0" rtlCol="0" anchor="t"/>
           <a:lstStyle/>
           <a:p>
             <a:pPr algn="l" indent="0" marL="0" eaLnBrk="1" latinLnBrk="0" hangingPunct="1">
@@ -6381,7 +6381,7 @@
           <a:ln/>
         </p:spPr>
         <p:txBody>
-          <a:bodyPr wrap="none" lIns="0" tIns="0" rIns="0" bIns="0" rtlCol="0" anchor="ctr"/>
+          <a:bodyPr wrap="none" lIns="0" tIns="0" rIns="0" bIns="0" rtlCol="0" anchor="t"/>
           <a:lstStyle/>
           <a:p>
             <a:pPr algn="just" marL="243840" indent="-243840" eaLnBrk="1" latinLnBrk="0" hangingPunct="1">
@@ -6424,7 +6424,7 @@
           <a:ln/>
         </p:spPr>
         <p:txBody>
-          <a:bodyPr wrap="none" lIns="0" tIns="0" rIns="0" bIns="0" rtlCol="0" anchor="ctr"/>
+          <a:bodyPr wrap="none" lIns="0" tIns="0" rIns="0" bIns="0" rtlCol="0" anchor="t"/>
           <a:lstStyle/>
           <a:p>
             <a:pPr algn="just" marL="243840" indent="-243840" eaLnBrk="1" latinLnBrk="0" hangingPunct="1">
@@ -6467,7 +6467,7 @@
           <a:ln/>
         </p:spPr>
         <p:txBody>
-          <a:bodyPr wrap="none" lIns="0" tIns="0" rIns="0" bIns="0" rtlCol="0" anchor="ctr"/>
+          <a:bodyPr wrap="none" lIns="0" tIns="0" rIns="0" bIns="0" rtlCol="0" anchor="t"/>
           <a:lstStyle/>
           <a:p>
             <a:pPr algn="just" marL="243840" indent="-243840" eaLnBrk="1" latinLnBrk="0" hangingPunct="1">
@@ -6510,7 +6510,7 @@
           <a:ln/>
         </p:spPr>
         <p:txBody>
-          <a:bodyPr wrap="none" lIns="0" tIns="0" rIns="0" bIns="0" rtlCol="0" anchor="ctr"/>
+          <a:bodyPr wrap="none" lIns="0" tIns="0" rIns="0" bIns="0" rtlCol="0" anchor="t"/>
           <a:lstStyle/>
           <a:p>
             <a:pPr algn="l" indent="0" marL="0" eaLnBrk="1" latinLnBrk="0" hangingPunct="1">
@@ -6552,7 +6552,7 @@
           <a:ln/>
         </p:spPr>
         <p:txBody>
-          <a:bodyPr wrap="none" lIns="0" tIns="0" rIns="0" bIns="0" rtlCol="0" anchor="ctr"/>
+          <a:bodyPr wrap="none" lIns="0" tIns="0" rIns="0" bIns="0" rtlCol="0" anchor="t"/>
           <a:lstStyle/>
           <a:p>
             <a:pPr algn="r" indent="0" marL="0" eaLnBrk="1" latinLnBrk="0" hangingPunct="1">
@@ -6594,7 +6594,7 @@
           <a:ln/>
         </p:spPr>
         <p:txBody>
-          <a:bodyPr wrap="none" lIns="0" tIns="0" rIns="0" bIns="0" rtlCol="0" anchor="ctr"/>
+          <a:bodyPr wrap="none" lIns="0" tIns="0" rIns="0" bIns="0" rtlCol="0" anchor="t"/>
           <a:lstStyle/>
           <a:p>
             <a:pPr algn="l" indent="0" marL="0" eaLnBrk="1" latinLnBrk="0" hangingPunct="1">
@@ -6776,7 +6776,7 @@
           <a:ln/>
         </p:spPr>
         <p:txBody>
-          <a:bodyPr wrap="none" lIns="0" tIns="0" rIns="0" bIns="0" rtlCol="0" anchor="ctr"/>
+          <a:bodyPr wrap="none" lIns="0" tIns="0" rIns="0" bIns="0" rtlCol="0" anchor="t"/>
           <a:lstStyle/>
           <a:p>
             <a:pPr algn="l" indent="0" marL="0" eaLnBrk="1" latinLnBrk="0" hangingPunct="1">
@@ -6815,7 +6815,7 @@
           <a:ln/>
         </p:spPr>
         <p:txBody>
-          <a:bodyPr wrap="none" lIns="0" tIns="0" rIns="0" bIns="0" rtlCol="0" anchor="ctr"/>
+          <a:bodyPr wrap="none" lIns="0" tIns="0" rIns="0" bIns="0" rtlCol="0" anchor="t"/>
           <a:lstStyle/>
           <a:p>
             <a:pPr algn="l" indent="0" marL="0" eaLnBrk="1" latinLnBrk="0" hangingPunct="1">
@@ -6857,7 +6857,7 @@
           <a:ln/>
         </p:spPr>
         <p:txBody>
-          <a:bodyPr wrap="none" lIns="0" tIns="0" rIns="0" bIns="0" rtlCol="0" anchor="ctr"/>
+          <a:bodyPr wrap="none" lIns="0" tIns="0" rIns="0" bIns="0" rtlCol="0" anchor="t"/>
           <a:lstStyle/>
           <a:p>
             <a:pPr algn="l" indent="0" marL="0" eaLnBrk="1" latinLnBrk="0" hangingPunct="1">
@@ -6950,7 +6950,7 @@
           <a:ln/>
         </p:spPr>
         <p:txBody>
-          <a:bodyPr wrap="none" lIns="0" tIns="0" rIns="0" bIns="0" rtlCol="0" anchor="ctr"/>
+          <a:bodyPr wrap="none" lIns="0" tIns="0" rIns="0" bIns="0" rtlCol="0" anchor="t"/>
           <a:lstStyle/>
           <a:p>
             <a:pPr algn="l" indent="0" marL="0" eaLnBrk="1" latinLnBrk="0" hangingPunct="1">
@@ -7019,7 +7019,7 @@
           <a:ln/>
         </p:spPr>
         <p:txBody>
-          <a:bodyPr wrap="none" lIns="0" tIns="0" rIns="0" bIns="0" rtlCol="0" anchor="ctr"/>
+          <a:bodyPr wrap="none" lIns="0" tIns="0" rIns="0" bIns="0" rtlCol="0" anchor="t"/>
           <a:lstStyle/>
           <a:p>
             <a:pPr algn="l" indent="0" marL="0" eaLnBrk="1" latinLnBrk="0" hangingPunct="1">
@@ -7061,7 +7061,7 @@
           <a:ln/>
         </p:spPr>
         <p:txBody>
-          <a:bodyPr wrap="none" lIns="0" tIns="0" rIns="0" bIns="0" rtlCol="0" anchor="ctr"/>
+          <a:bodyPr wrap="none" lIns="0" tIns="0" rIns="0" bIns="0" rtlCol="0" anchor="t"/>
           <a:lstStyle/>
           <a:p>
             <a:pPr algn="just" marL="243840" indent="-243840" eaLnBrk="1" latinLnBrk="0" hangingPunct="1">
@@ -7104,7 +7104,7 @@
           <a:ln/>
         </p:spPr>
         <p:txBody>
-          <a:bodyPr wrap="none" lIns="0" tIns="0" rIns="0" bIns="0" rtlCol="0" anchor="ctr"/>
+          <a:bodyPr wrap="none" lIns="0" tIns="0" rIns="0" bIns="0" rtlCol="0" anchor="t"/>
           <a:lstStyle/>
           <a:p>
             <a:pPr algn="just" marL="243840" indent="-243840" eaLnBrk="1" latinLnBrk="0" hangingPunct="1">
@@ -7147,7 +7147,7 @@
           <a:ln/>
         </p:spPr>
         <p:txBody>
-          <a:bodyPr wrap="none" lIns="0" tIns="0" rIns="0" bIns="0" rtlCol="0" anchor="ctr"/>
+          <a:bodyPr wrap="none" lIns="0" tIns="0" rIns="0" bIns="0" rtlCol="0" anchor="t"/>
           <a:lstStyle/>
           <a:p>
             <a:pPr algn="just" marL="243840" indent="-243840" eaLnBrk="1" latinLnBrk="0" hangingPunct="1">
@@ -7244,7 +7244,7 @@
           <a:ln/>
         </p:spPr>
         <p:txBody>
-          <a:bodyPr wrap="none" lIns="0" tIns="0" rIns="0" bIns="0" rtlCol="0" anchor="ctr"/>
+          <a:bodyPr wrap="none" lIns="0" tIns="0" rIns="0" bIns="0" rtlCol="0" anchor="t"/>
           <a:lstStyle/>
           <a:p>
             <a:pPr algn="just" indent="0" marL="0" eaLnBrk="1" latinLnBrk="0" hangingPunct="1">
@@ -7286,7 +7286,7 @@
           <a:ln/>
         </p:spPr>
         <p:txBody>
-          <a:bodyPr wrap="none" lIns="0" tIns="0" rIns="0" bIns="0" rtlCol="0" anchor="ctr"/>
+          <a:bodyPr wrap="none" lIns="0" tIns="0" rIns="0" bIns="0" rtlCol="0" anchor="t"/>
           <a:lstStyle/>
           <a:p>
             <a:pPr algn="just" indent="0" marL="0" eaLnBrk="1" latinLnBrk="0" hangingPunct="1">
@@ -7328,7 +7328,7 @@
           <a:ln/>
         </p:spPr>
         <p:txBody>
-          <a:bodyPr wrap="none" lIns="0" tIns="0" rIns="0" bIns="0" rtlCol="0" anchor="ctr"/>
+          <a:bodyPr wrap="none" lIns="0" tIns="0" rIns="0" bIns="0" rtlCol="0" anchor="t"/>
           <a:lstStyle/>
           <a:p>
             <a:pPr algn="just" indent="0" marL="0" eaLnBrk="1" latinLnBrk="0" hangingPunct="1">
@@ -7370,7 +7370,7 @@
           <a:ln/>
         </p:spPr>
         <p:txBody>
-          <a:bodyPr wrap="none" lIns="0" tIns="0" rIns="0" bIns="0" rtlCol="0" anchor="ctr"/>
+          <a:bodyPr wrap="none" lIns="0" tIns="0" rIns="0" bIns="0" rtlCol="0" anchor="t"/>
           <a:lstStyle/>
           <a:p>
             <a:pPr algn="just" indent="0" marL="0" eaLnBrk="1" latinLnBrk="0" hangingPunct="1">
@@ -7460,7 +7460,7 @@
           <a:ln/>
         </p:spPr>
         <p:txBody>
-          <a:bodyPr wrap="none" lIns="0" tIns="0" rIns="0" bIns="0" rtlCol="0" anchor="ctr"/>
+          <a:bodyPr wrap="none" lIns="0" tIns="0" rIns="0" bIns="0" rtlCol="0" anchor="t"/>
           <a:lstStyle/>
           <a:p>
             <a:pPr algn="ctr" indent="0" marL="0" eaLnBrk="1" latinLnBrk="0" hangingPunct="1">
@@ -7502,7 +7502,7 @@
           <a:ln/>
         </p:spPr>
         <p:txBody>
-          <a:bodyPr wrap="none" lIns="0" tIns="0" rIns="0" bIns="0" rtlCol="0" anchor="ctr"/>
+          <a:bodyPr wrap="none" lIns="0" tIns="0" rIns="0" bIns="0" rtlCol="0" anchor="t"/>
           <a:lstStyle/>
           <a:p>
             <a:pPr algn="l" indent="0" marL="0" eaLnBrk="1" latinLnBrk="0" hangingPunct="1">
@@ -7544,7 +7544,7 @@
           <a:ln/>
         </p:spPr>
         <p:txBody>
-          <a:bodyPr wrap="none" lIns="0" tIns="0" rIns="0" bIns="0" rtlCol="0" anchor="ctr"/>
+          <a:bodyPr wrap="none" lIns="0" tIns="0" rIns="0" bIns="0" rtlCol="0" anchor="t"/>
           <a:lstStyle/>
           <a:p>
             <a:pPr algn="just" marL="243840" indent="-243840" eaLnBrk="1" latinLnBrk="0" hangingPunct="1">
@@ -7587,7 +7587,7 @@
           <a:ln/>
         </p:spPr>
         <p:txBody>
-          <a:bodyPr wrap="none" lIns="0" tIns="0" rIns="0" bIns="0" rtlCol="0" anchor="ctr"/>
+          <a:bodyPr wrap="none" lIns="0" tIns="0" rIns="0" bIns="0" rtlCol="0" anchor="t"/>
           <a:lstStyle/>
           <a:p>
             <a:pPr algn="just" marL="243840" indent="-243840" eaLnBrk="1" latinLnBrk="0" hangingPunct="1">
@@ -7630,7 +7630,7 @@
           <a:ln/>
         </p:spPr>
         <p:txBody>
-          <a:bodyPr wrap="none" lIns="0" tIns="0" rIns="0" bIns="0" rtlCol="0" anchor="ctr"/>
+          <a:bodyPr wrap="none" lIns="0" tIns="0" rIns="0" bIns="0" rtlCol="0" anchor="t"/>
           <a:lstStyle/>
           <a:p>
             <a:pPr algn="just" marL="243840" indent="-243840" eaLnBrk="1" latinLnBrk="0" hangingPunct="1">
@@ -7700,7 +7700,7 @@
           <a:ln/>
         </p:spPr>
         <p:txBody>
-          <a:bodyPr wrap="none" lIns="0" tIns="0" rIns="0" bIns="0" rtlCol="0" anchor="ctr"/>
+          <a:bodyPr wrap="none" lIns="0" tIns="0" rIns="0" bIns="0" rtlCol="0" anchor="t"/>
           <a:lstStyle/>
           <a:p>
             <a:pPr algn="l" indent="0" marL="0" eaLnBrk="1" latinLnBrk="0" hangingPunct="1">
@@ -7742,7 +7742,7 @@
           <a:ln/>
         </p:spPr>
         <p:txBody>
-          <a:bodyPr wrap="none" lIns="0" tIns="0" rIns="0" bIns="0" rtlCol="0" anchor="ctr"/>
+          <a:bodyPr wrap="none" lIns="0" tIns="0" rIns="0" bIns="0" rtlCol="0" anchor="t"/>
           <a:lstStyle/>
           <a:p>
             <a:pPr algn="just" marL="243840" indent="-243840" eaLnBrk="1" latinLnBrk="0" hangingPunct="1">
@@ -7785,7 +7785,7 @@
           <a:ln/>
         </p:spPr>
         <p:txBody>
-          <a:bodyPr wrap="none" lIns="0" tIns="0" rIns="0" bIns="0" rtlCol="0" anchor="ctr"/>
+          <a:bodyPr wrap="none" lIns="0" tIns="0" rIns="0" bIns="0" rtlCol="0" anchor="t"/>
           <a:lstStyle/>
           <a:p>
             <a:pPr algn="just" marL="243840" indent="-243840" eaLnBrk="1" latinLnBrk="0" hangingPunct="1">
@@ -7828,7 +7828,7 @@
           <a:ln/>
         </p:spPr>
         <p:txBody>
-          <a:bodyPr wrap="none" lIns="0" tIns="0" rIns="0" bIns="0" rtlCol="0" anchor="ctr"/>
+          <a:bodyPr wrap="none" lIns="0" tIns="0" rIns="0" bIns="0" rtlCol="0" anchor="t"/>
           <a:lstStyle/>
           <a:p>
             <a:pPr algn="just" marL="243840" indent="-243840" eaLnBrk="1" latinLnBrk="0" hangingPunct="1">
@@ -7871,7 +7871,7 @@
           <a:ln/>
         </p:spPr>
         <p:txBody>
-          <a:bodyPr wrap="none" lIns="0" tIns="0" rIns="0" bIns="0" rtlCol="0" anchor="ctr"/>
+          <a:bodyPr wrap="none" lIns="0" tIns="0" rIns="0" bIns="0" rtlCol="0" anchor="t"/>
           <a:lstStyle/>
           <a:p>
             <a:pPr algn="l" indent="0" marL="0" eaLnBrk="1" latinLnBrk="0" hangingPunct="1">
@@ -7913,7 +7913,7 @@
           <a:ln/>
         </p:spPr>
         <p:txBody>
-          <a:bodyPr wrap="none" lIns="0" tIns="0" rIns="0" bIns="0" rtlCol="0" anchor="ctr"/>
+          <a:bodyPr wrap="none" lIns="0" tIns="0" rIns="0" bIns="0" rtlCol="0" anchor="t"/>
           <a:lstStyle/>
           <a:p>
             <a:pPr algn="r" indent="0" marL="0" eaLnBrk="1" latinLnBrk="0" hangingPunct="1">
@@ -7955,7 +7955,7 @@
           <a:ln/>
         </p:spPr>
         <p:txBody>
-          <a:bodyPr wrap="none" lIns="0" tIns="0" rIns="0" bIns="0" rtlCol="0" anchor="ctr"/>
+          <a:bodyPr wrap="none" lIns="0" tIns="0" rIns="0" bIns="0" rtlCol="0" anchor="t"/>
           <a:lstStyle/>
           <a:p>
             <a:pPr algn="l" indent="0" marL="0" eaLnBrk="1" latinLnBrk="0" hangingPunct="1">
@@ -8137,7 +8137,7 @@
           <a:ln/>
         </p:spPr>
         <p:txBody>
-          <a:bodyPr wrap="none" lIns="0" tIns="0" rIns="0" bIns="0" rtlCol="0" anchor="ctr"/>
+          <a:bodyPr wrap="none" lIns="0" tIns="0" rIns="0" bIns="0" rtlCol="0" anchor="t"/>
           <a:lstStyle/>
           <a:p>
             <a:pPr algn="l" indent="0" marL="0" eaLnBrk="1" latinLnBrk="0" hangingPunct="1">
@@ -8176,7 +8176,7 @@
           <a:ln/>
         </p:spPr>
         <p:txBody>
-          <a:bodyPr wrap="none" lIns="0" tIns="0" rIns="0" bIns="0" rtlCol="0" anchor="ctr"/>
+          <a:bodyPr wrap="none" lIns="0" tIns="0" rIns="0" bIns="0" rtlCol="0" anchor="t"/>
           <a:lstStyle/>
           <a:p>
             <a:pPr algn="l" indent="0" marL="0" eaLnBrk="1" latinLnBrk="0" hangingPunct="1">
@@ -8218,7 +8218,7 @@
           <a:ln/>
         </p:spPr>
         <p:txBody>
-          <a:bodyPr wrap="none" lIns="0" tIns="0" rIns="0" bIns="0" rtlCol="0" anchor="ctr"/>
+          <a:bodyPr wrap="none" lIns="0" tIns="0" rIns="0" bIns="0" rtlCol="0" anchor="t"/>
           <a:lstStyle/>
           <a:p>
             <a:pPr algn="l" indent="0" marL="0" eaLnBrk="1" latinLnBrk="0" hangingPunct="1">
@@ -8311,7 +8311,7 @@
           <a:ln/>
         </p:spPr>
         <p:txBody>
-          <a:bodyPr wrap="none" lIns="0" tIns="0" rIns="0" bIns="0" rtlCol="0" anchor="ctr"/>
+          <a:bodyPr wrap="none" lIns="0" tIns="0" rIns="0" bIns="0" rtlCol="0" anchor="t"/>
           <a:lstStyle/>
           <a:p>
             <a:pPr algn="l" indent="0" marL="0" eaLnBrk="1" latinLnBrk="0" hangingPunct="1">
@@ -8405,7 +8405,7 @@
           <a:ln/>
         </p:spPr>
         <p:txBody>
-          <a:bodyPr wrap="none" lIns="0" tIns="0" rIns="0" bIns="0" rtlCol="0" anchor="ctr"/>
+          <a:bodyPr wrap="none" lIns="0" tIns="0" rIns="0" bIns="0" rtlCol="0" anchor="t"/>
           <a:lstStyle/>
           <a:p>
             <a:pPr algn="l" indent="0" marL="0" eaLnBrk="1" latinLnBrk="0" hangingPunct="1">
@@ -8447,7 +8447,7 @@
           <a:ln/>
         </p:spPr>
         <p:txBody>
-          <a:bodyPr wrap="none" lIns="0" tIns="0" rIns="0" bIns="0" rtlCol="0" anchor="ctr"/>
+          <a:bodyPr wrap="none" lIns="0" tIns="0" rIns="0" bIns="0" rtlCol="0" anchor="t"/>
           <a:lstStyle/>
           <a:p>
             <a:pPr algn="l" indent="0" marL="0" eaLnBrk="1" latinLnBrk="0" hangingPunct="1">
@@ -8489,7 +8489,7 @@
           <a:ln/>
         </p:spPr>
         <p:txBody>
-          <a:bodyPr wrap="none" lIns="0" tIns="0" rIns="0" bIns="0" rtlCol="0" anchor="ctr"/>
+          <a:bodyPr wrap="none" lIns="0" tIns="0" rIns="0" bIns="0" rtlCol="0" anchor="t"/>
           <a:lstStyle/>
           <a:p>
             <a:pPr algn="l" indent="0" marL="0" eaLnBrk="1" latinLnBrk="0" hangingPunct="1">
@@ -8531,7 +8531,7 @@
           <a:ln/>
         </p:spPr>
         <p:txBody>
-          <a:bodyPr wrap="none" lIns="0" tIns="0" rIns="0" bIns="0" rtlCol="0" anchor="ctr"/>
+          <a:bodyPr wrap="none" lIns="0" tIns="0" rIns="0" bIns="0" rtlCol="0" anchor="t"/>
           <a:lstStyle/>
           <a:p>
             <a:pPr algn="l" indent="0" marL="0" eaLnBrk="1" latinLnBrk="0" hangingPunct="1">
@@ -8573,7 +8573,7 @@
           <a:ln/>
         </p:spPr>
         <p:txBody>
-          <a:bodyPr wrap="none" lIns="0" tIns="0" rIns="0" bIns="0" rtlCol="0" anchor="ctr"/>
+          <a:bodyPr wrap="none" lIns="0" tIns="0" rIns="0" bIns="0" rtlCol="0" anchor="t"/>
           <a:lstStyle/>
           <a:p>
             <a:pPr algn="l" indent="0" marL="0" eaLnBrk="1" latinLnBrk="0" hangingPunct="1">
@@ -8669,7 +8669,7 @@
           <a:ln/>
         </p:spPr>
         <p:txBody>
-          <a:bodyPr wrap="none" lIns="0" tIns="0" rIns="0" bIns="0" rtlCol="0" anchor="ctr"/>
+          <a:bodyPr wrap="none" lIns="0" tIns="0" rIns="0" bIns="0" rtlCol="0" anchor="t"/>
           <a:lstStyle/>
           <a:p>
             <a:pPr algn="l" indent="0" marL="0" eaLnBrk="1" latinLnBrk="0" hangingPunct="1">
@@ -8711,7 +8711,7 @@
           <a:ln/>
         </p:spPr>
         <p:txBody>
-          <a:bodyPr wrap="none" lIns="0" tIns="0" rIns="0" bIns="0" rtlCol="0" anchor="ctr"/>
+          <a:bodyPr wrap="none" lIns="0" tIns="0" rIns="0" bIns="0" rtlCol="0" anchor="t"/>
           <a:lstStyle/>
           <a:p>
             <a:pPr algn="just" marL="243840" indent="-243840" eaLnBrk="1" latinLnBrk="0" hangingPunct="1">
@@ -8754,7 +8754,7 @@
           <a:ln/>
         </p:spPr>
         <p:txBody>
-          <a:bodyPr wrap="square" lIns="0" tIns="0" rIns="0" bIns="0" rtlCol="0" anchor="ctr"/>
+          <a:bodyPr wrap="square" lIns="0" tIns="0" rIns="0" bIns="0" rtlCol="0" anchor="t"/>
           <a:lstStyle/>
           <a:p>
             <a:pPr algn="just" marL="243840" indent="-243840" eaLnBrk="1" latinLnBrk="0" hangingPunct="1">
@@ -8797,7 +8797,7 @@
           <a:ln/>
         </p:spPr>
         <p:txBody>
-          <a:bodyPr wrap="none" lIns="0" tIns="0" rIns="0" bIns="0" rtlCol="0" anchor="ctr"/>
+          <a:bodyPr wrap="none" lIns="0" tIns="0" rIns="0" bIns="0" rtlCol="0" anchor="t"/>
           <a:lstStyle/>
           <a:p>
             <a:pPr algn="just" marL="243840" indent="-243840" eaLnBrk="1" latinLnBrk="0" hangingPunct="1">
@@ -8840,7 +8840,7 @@
           <a:ln/>
         </p:spPr>
         <p:txBody>
-          <a:bodyPr wrap="none" lIns="0" tIns="0" rIns="0" bIns="0" rtlCol="0" anchor="ctr"/>
+          <a:bodyPr wrap="none" lIns="0" tIns="0" rIns="0" bIns="0" rtlCol="0" anchor="t"/>
           <a:lstStyle/>
           <a:p>
             <a:pPr algn="just" marL="243840" indent="-243840" eaLnBrk="1" latinLnBrk="0" hangingPunct="1">
@@ -8883,7 +8883,7 @@
           <a:ln/>
         </p:spPr>
         <p:txBody>
-          <a:bodyPr wrap="none" lIns="0" tIns="0" rIns="0" bIns="0" rtlCol="0" anchor="ctr"/>
+          <a:bodyPr wrap="none" lIns="0" tIns="0" rIns="0" bIns="0" rtlCol="0" anchor="t"/>
           <a:lstStyle/>
           <a:p>
             <a:pPr algn="l" indent="0" marL="0" eaLnBrk="1" latinLnBrk="0" hangingPunct="1">
@@ -8925,7 +8925,7 @@
           <a:ln/>
         </p:spPr>
         <p:txBody>
-          <a:bodyPr wrap="none" lIns="0" tIns="0" rIns="0" bIns="0" rtlCol="0" anchor="ctr"/>
+          <a:bodyPr wrap="none" lIns="0" tIns="0" rIns="0" bIns="0" rtlCol="0" anchor="t"/>
           <a:lstStyle/>
           <a:p>
             <a:pPr algn="l" indent="0" marL="0" eaLnBrk="1" latinLnBrk="0" hangingPunct="1">
@@ -8967,7 +8967,7 @@
           <a:ln/>
         </p:spPr>
         <p:txBody>
-          <a:bodyPr wrap="square" lIns="0" tIns="0" rIns="0" bIns="0" rtlCol="0" anchor="ctr"/>
+          <a:bodyPr wrap="square" lIns="0" tIns="0" rIns="0" bIns="0" rtlCol="0" anchor="t"/>
           <a:lstStyle/>
           <a:p>
             <a:pPr algn="l" indent="0" marL="0" eaLnBrk="1" latinLnBrk="0" hangingPunct="1">
@@ -9009,7 +9009,7 @@
           <a:ln/>
         </p:spPr>
         <p:txBody>
-          <a:bodyPr wrap="none" lIns="0" tIns="0" rIns="0" bIns="0" rtlCol="0" anchor="ctr"/>
+          <a:bodyPr wrap="none" lIns="0" tIns="0" rIns="0" bIns="0" rtlCol="0" anchor="t"/>
           <a:lstStyle/>
           <a:p>
             <a:pPr algn="l" indent="0" marL="0" eaLnBrk="1" latinLnBrk="0" hangingPunct="1">
@@ -9051,7 +9051,7 @@
           <a:ln/>
         </p:spPr>
         <p:txBody>
-          <a:bodyPr wrap="none" lIns="0" tIns="0" rIns="0" bIns="0" rtlCol="0" anchor="ctr"/>
+          <a:bodyPr wrap="none" lIns="0" tIns="0" rIns="0" bIns="0" rtlCol="0" anchor="t"/>
           <a:lstStyle/>
           <a:p>
             <a:pPr algn="r" indent="0" marL="0" eaLnBrk="1" latinLnBrk="0" hangingPunct="1">
@@ -9093,7 +9093,7 @@
           <a:ln/>
         </p:spPr>
         <p:txBody>
-          <a:bodyPr wrap="none" lIns="0" tIns="0" rIns="0" bIns="0" rtlCol="0" anchor="ctr"/>
+          <a:bodyPr wrap="none" lIns="0" tIns="0" rIns="0" bIns="0" rtlCol="0" anchor="t"/>
           <a:lstStyle/>
           <a:p>
             <a:pPr algn="l" indent="0" marL="0" eaLnBrk="1" latinLnBrk="0" hangingPunct="1">
@@ -9275,7 +9275,7 @@
           <a:ln/>
         </p:spPr>
         <p:txBody>
-          <a:bodyPr wrap="none" lIns="0" tIns="0" rIns="0" bIns="0" rtlCol="0" anchor="ctr"/>
+          <a:bodyPr wrap="none" lIns="0" tIns="0" rIns="0" bIns="0" rtlCol="0" anchor="t"/>
           <a:lstStyle/>
           <a:p>
             <a:pPr algn="l" indent="0" marL="0" eaLnBrk="1" latinLnBrk="0" hangingPunct="1">
@@ -9314,7 +9314,7 @@
           <a:ln/>
         </p:spPr>
         <p:txBody>
-          <a:bodyPr wrap="none" lIns="0" tIns="0" rIns="0" bIns="0" rtlCol="0" anchor="ctr"/>
+          <a:bodyPr wrap="none" lIns="0" tIns="0" rIns="0" bIns="0" rtlCol="0" anchor="t"/>
           <a:lstStyle/>
           <a:p>
             <a:pPr algn="l" indent="0" marL="0" eaLnBrk="1" latinLnBrk="0" hangingPunct="1">
@@ -9356,7 +9356,7 @@
           <a:ln/>
         </p:spPr>
         <p:txBody>
-          <a:bodyPr wrap="none" lIns="0" tIns="0" rIns="0" bIns="0" rtlCol="0" anchor="ctr"/>
+          <a:bodyPr wrap="none" lIns="0" tIns="0" rIns="0" bIns="0" rtlCol="0" anchor="t"/>
           <a:lstStyle/>
           <a:p>
             <a:pPr algn="l" indent="0" marL="0" eaLnBrk="1" latinLnBrk="0" hangingPunct="1">
@@ -9449,7 +9449,7 @@
           <a:ln/>
         </p:spPr>
         <p:txBody>
-          <a:bodyPr wrap="none" lIns="0" tIns="0" rIns="0" bIns="0" rtlCol="0" anchor="ctr"/>
+          <a:bodyPr wrap="none" lIns="0" tIns="0" rIns="0" bIns="0" rtlCol="0" anchor="t"/>
           <a:lstStyle/>
           <a:p>
             <a:pPr algn="l" indent="0" marL="0" eaLnBrk="1" latinLnBrk="0" hangingPunct="1">
@@ -9542,7 +9542,7 @@
           <a:ln/>
         </p:spPr>
         <p:txBody>
-          <a:bodyPr wrap="none" lIns="0" tIns="0" rIns="0" bIns="0" rtlCol="0" anchor="ctr"/>
+          <a:bodyPr wrap="none" lIns="0" tIns="0" rIns="0" bIns="0" rtlCol="0" anchor="t"/>
           <a:lstStyle/>
           <a:p>
             <a:pPr algn="l" indent="0" marL="0" eaLnBrk="1" latinLnBrk="0" hangingPunct="1">
@@ -9635,7 +9635,7 @@
           <a:ln/>
         </p:spPr>
         <p:txBody>
-          <a:bodyPr wrap="none" lIns="0" tIns="0" rIns="0" bIns="0" rtlCol="0" anchor="ctr"/>
+          <a:bodyPr wrap="none" lIns="0" tIns="0" rIns="0" bIns="0" rtlCol="0" anchor="t"/>
           <a:lstStyle/>
           <a:p>
             <a:pPr algn="l" indent="0" marL="0" eaLnBrk="1" latinLnBrk="0" hangingPunct="1">
@@ -9704,7 +9704,7 @@
           <a:ln/>
         </p:spPr>
         <p:txBody>
-          <a:bodyPr wrap="none" lIns="0" tIns="0" rIns="0" bIns="0" rtlCol="0" anchor="ctr"/>
+          <a:bodyPr wrap="none" lIns="0" tIns="0" rIns="0" bIns="0" rtlCol="0" anchor="t"/>
           <a:lstStyle/>
           <a:p>
             <a:pPr algn="l" indent="0" marL="0" eaLnBrk="1" latinLnBrk="0" hangingPunct="1">
@@ -9746,7 +9746,7 @@
           <a:ln/>
         </p:spPr>
         <p:txBody>
-          <a:bodyPr wrap="none" lIns="0" tIns="0" rIns="0" bIns="0" rtlCol="0" anchor="ctr"/>
+          <a:bodyPr wrap="none" lIns="0" tIns="0" rIns="0" bIns="0" rtlCol="0" anchor="t"/>
           <a:lstStyle/>
           <a:p>
             <a:pPr algn="just" marL="243840" indent="-243840" eaLnBrk="1" latinLnBrk="0" hangingPunct="1">
@@ -9789,7 +9789,7 @@
           <a:ln/>
         </p:spPr>
         <p:txBody>
-          <a:bodyPr wrap="none" lIns="0" tIns="0" rIns="0" bIns="0" rtlCol="0" anchor="ctr"/>
+          <a:bodyPr wrap="none" lIns="0" tIns="0" rIns="0" bIns="0" rtlCol="0" anchor="t"/>
           <a:lstStyle/>
           <a:p>
             <a:pPr algn="just" marL="243840" indent="-243840" eaLnBrk="1" latinLnBrk="0" hangingPunct="1">
@@ -9832,7 +9832,7 @@
           <a:ln/>
         </p:spPr>
         <p:txBody>
-          <a:bodyPr wrap="none" lIns="0" tIns="0" rIns="0" bIns="0" rtlCol="0" anchor="ctr"/>
+          <a:bodyPr wrap="none" lIns="0" tIns="0" rIns="0" bIns="0" rtlCol="0" anchor="t"/>
           <a:lstStyle/>
           <a:p>
             <a:pPr algn="just" marL="243840" indent="-243840" eaLnBrk="1" latinLnBrk="0" hangingPunct="1">
@@ -9902,7 +9902,7 @@
           <a:ln/>
         </p:spPr>
         <p:txBody>
-          <a:bodyPr wrap="none" lIns="0" tIns="0" rIns="0" bIns="0" rtlCol="0" anchor="ctr"/>
+          <a:bodyPr wrap="none" lIns="0" tIns="0" rIns="0" bIns="0" rtlCol="0" anchor="t"/>
           <a:lstStyle/>
           <a:p>
             <a:pPr algn="l" indent="0" marL="0" eaLnBrk="1" latinLnBrk="0" hangingPunct="1">
@@ -9944,7 +9944,7 @@
           <a:ln/>
         </p:spPr>
         <p:txBody>
-          <a:bodyPr wrap="none" lIns="0" tIns="0" rIns="0" bIns="0" rtlCol="0" anchor="ctr"/>
+          <a:bodyPr wrap="none" lIns="0" tIns="0" rIns="0" bIns="0" rtlCol="0" anchor="t"/>
           <a:lstStyle/>
           <a:p>
             <a:pPr algn="just" marL="243840" indent="-243840" eaLnBrk="1" latinLnBrk="0" hangingPunct="1">
@@ -9987,7 +9987,7 @@
           <a:ln/>
         </p:spPr>
         <p:txBody>
-          <a:bodyPr wrap="none" lIns="0" tIns="0" rIns="0" bIns="0" rtlCol="0" anchor="ctr"/>
+          <a:bodyPr wrap="none" lIns="0" tIns="0" rIns="0" bIns="0" rtlCol="0" anchor="t"/>
           <a:lstStyle/>
           <a:p>
             <a:pPr algn="just" marL="243840" indent="-243840" eaLnBrk="1" latinLnBrk="0" hangingPunct="1">
@@ -10030,7 +10030,7 @@
           <a:ln/>
         </p:spPr>
         <p:txBody>
-          <a:bodyPr wrap="none" lIns="0" tIns="0" rIns="0" bIns="0" rtlCol="0" anchor="ctr"/>
+          <a:bodyPr wrap="none" lIns="0" tIns="0" rIns="0" bIns="0" rtlCol="0" anchor="t"/>
           <a:lstStyle/>
           <a:p>
             <a:pPr algn="just" marL="243840" indent="-243840" eaLnBrk="1" latinLnBrk="0" hangingPunct="1">
@@ -10100,7 +10100,7 @@
           <a:ln/>
         </p:spPr>
         <p:txBody>
-          <a:bodyPr wrap="none" lIns="0" tIns="0" rIns="0" bIns="0" rtlCol="0" anchor="ctr"/>
+          <a:bodyPr wrap="none" lIns="0" tIns="0" rIns="0" bIns="0" rtlCol="0" anchor="t"/>
           <a:lstStyle/>
           <a:p>
             <a:pPr algn="ctr" indent="0" marL="0" eaLnBrk="1" latinLnBrk="0" hangingPunct="1">
@@ -10142,7 +10142,7 @@
           <a:ln/>
         </p:spPr>
         <p:txBody>
-          <a:bodyPr wrap="none" lIns="0" tIns="0" rIns="0" bIns="0" rtlCol="0" anchor="ctr"/>
+          <a:bodyPr wrap="none" lIns="0" tIns="0" rIns="0" bIns="0" rtlCol="0" anchor="t"/>
           <a:lstStyle/>
           <a:p>
             <a:pPr algn="l" indent="0" marL="0" eaLnBrk="1" latinLnBrk="0" hangingPunct="1">
@@ -10184,7 +10184,7 @@
           <a:ln/>
         </p:spPr>
         <p:txBody>
-          <a:bodyPr wrap="none" lIns="0" tIns="0" rIns="0" bIns="0" rtlCol="0" anchor="ctr"/>
+          <a:bodyPr wrap="none" lIns="0" tIns="0" rIns="0" bIns="0" rtlCol="0" anchor="t"/>
           <a:lstStyle/>
           <a:p>
             <a:pPr algn="r" indent="0" marL="0" eaLnBrk="1" latinLnBrk="0" hangingPunct="1">
@@ -10226,7 +10226,7 @@
           <a:ln/>
         </p:spPr>
         <p:txBody>
-          <a:bodyPr wrap="none" lIns="0" tIns="0" rIns="0" bIns="0" rtlCol="0" anchor="ctr"/>
+          <a:bodyPr wrap="none" lIns="0" tIns="0" rIns="0" bIns="0" rtlCol="0" anchor="t"/>
           <a:lstStyle/>
           <a:p>
             <a:pPr algn="l" indent="0" marL="0" eaLnBrk="1" latinLnBrk="0" hangingPunct="1">
@@ -10408,7 +10408,7 @@
           <a:ln/>
         </p:spPr>
         <p:txBody>
-          <a:bodyPr wrap="none" lIns="0" tIns="0" rIns="0" bIns="0" rtlCol="0" anchor="ctr"/>
+          <a:bodyPr wrap="none" lIns="0" tIns="0" rIns="0" bIns="0" rtlCol="0" anchor="t"/>
           <a:lstStyle/>
           <a:p>
             <a:pPr algn="l" indent="0" marL="0" eaLnBrk="1" latinLnBrk="0" hangingPunct="1">
@@ -10447,7 +10447,7 @@
           <a:ln/>
         </p:spPr>
         <p:txBody>
-          <a:bodyPr wrap="none" lIns="0" tIns="0" rIns="0" bIns="0" rtlCol="0" anchor="ctr"/>
+          <a:bodyPr wrap="none" lIns="0" tIns="0" rIns="0" bIns="0" rtlCol="0" anchor="t"/>
           <a:lstStyle/>
           <a:p>
             <a:pPr algn="l" indent="0" marL="0" eaLnBrk="1" latinLnBrk="0" hangingPunct="1">
@@ -10489,7 +10489,7 @@
           <a:ln/>
         </p:spPr>
         <p:txBody>
-          <a:bodyPr wrap="none" lIns="0" tIns="0" rIns="0" bIns="0" rtlCol="0" anchor="ctr"/>
+          <a:bodyPr wrap="none" lIns="0" tIns="0" rIns="0" bIns="0" rtlCol="0" anchor="t"/>
           <a:lstStyle/>
           <a:p>
             <a:pPr algn="l" indent="0" marL="0" eaLnBrk="1" latinLnBrk="0" hangingPunct="1">
@@ -10582,7 +10582,7 @@
           <a:ln/>
         </p:spPr>
         <p:txBody>
-          <a:bodyPr wrap="none" lIns="0" tIns="0" rIns="0" bIns="0" rtlCol="0" anchor="ctr"/>
+          <a:bodyPr wrap="none" lIns="0" tIns="0" rIns="0" bIns="0" rtlCol="0" anchor="t"/>
           <a:lstStyle/>
           <a:p>
             <a:pPr algn="l" indent="0" marL="0" eaLnBrk="1" latinLnBrk="0" hangingPunct="1">
@@ -10675,7 +10675,7 @@
           <a:ln/>
         </p:spPr>
         <p:txBody>
-          <a:bodyPr wrap="none" lIns="0" tIns="0" rIns="0" bIns="0" rtlCol="0" anchor="ctr"/>
+          <a:bodyPr wrap="none" lIns="0" tIns="0" rIns="0" bIns="0" rtlCol="0" anchor="t"/>
           <a:lstStyle/>
           <a:p>
             <a:pPr algn="l" indent="0" marL="0" eaLnBrk="1" latinLnBrk="0" hangingPunct="1">
@@ -10717,7 +10717,7 @@
           <a:ln/>
         </p:spPr>
         <p:txBody>
-          <a:bodyPr wrap="none" lIns="0" tIns="0" rIns="0" bIns="0" rtlCol="0" anchor="ctr"/>
+          <a:bodyPr wrap="none" lIns="0" tIns="0" rIns="0" bIns="0" rtlCol="0" anchor="t"/>
           <a:lstStyle/>
           <a:p>
             <a:pPr algn="l" indent="0" marL="0" eaLnBrk="1" latinLnBrk="0" hangingPunct="1">
@@ -10786,7 +10786,7 @@
           <a:ln/>
         </p:spPr>
         <p:txBody>
-          <a:bodyPr wrap="none" lIns="0" tIns="0" rIns="0" bIns="0" rtlCol="0" anchor="ctr"/>
+          <a:bodyPr wrap="none" lIns="0" tIns="0" rIns="0" bIns="0" rtlCol="0" anchor="t"/>
           <a:lstStyle/>
           <a:p>
             <a:pPr algn="l" indent="0" marL="0" eaLnBrk="1" latinLnBrk="0" hangingPunct="1">
@@ -10828,7 +10828,7 @@
           <a:ln/>
         </p:spPr>
         <p:txBody>
-          <a:bodyPr wrap="square" lIns="0" tIns="0" rIns="0" bIns="0" rtlCol="0" anchor="ctr"/>
+          <a:bodyPr wrap="square" lIns="0" tIns="0" rIns="0" bIns="0" rtlCol="0" anchor="t"/>
           <a:lstStyle/>
           <a:p>
             <a:pPr algn="just" indent="0" marL="0" eaLnBrk="1" latinLnBrk="0" hangingPunct="1">
@@ -10897,7 +10897,7 @@
           <a:ln/>
         </p:spPr>
         <p:txBody>
-          <a:bodyPr wrap="none" lIns="0" tIns="0" rIns="0" bIns="0" rtlCol="0" anchor="ctr"/>
+          <a:bodyPr wrap="none" lIns="0" tIns="0" rIns="0" bIns="0" rtlCol="0" anchor="t"/>
           <a:lstStyle/>
           <a:p>
             <a:pPr algn="l" indent="0" marL="0" eaLnBrk="1" latinLnBrk="0" hangingPunct="1">
@@ -10939,7 +10939,7 @@
           <a:ln/>
         </p:spPr>
         <p:txBody>
-          <a:bodyPr wrap="square" lIns="0" tIns="0" rIns="0" bIns="0" rtlCol="0" anchor="ctr"/>
+          <a:bodyPr wrap="square" lIns="0" tIns="0" rIns="0" bIns="0" rtlCol="0" anchor="t"/>
           <a:lstStyle/>
           <a:p>
             <a:pPr algn="just" indent="0" marL="0" eaLnBrk="1" latinLnBrk="0" hangingPunct="1">
@@ -11008,7 +11008,7 @@
           <a:ln/>
         </p:spPr>
         <p:txBody>
-          <a:bodyPr wrap="none" lIns="0" tIns="0" rIns="0" bIns="0" rtlCol="0" anchor="ctr"/>
+          <a:bodyPr wrap="none" lIns="0" tIns="0" rIns="0" bIns="0" rtlCol="0" anchor="t"/>
           <a:lstStyle/>
           <a:p>
             <a:pPr algn="l" indent="0" marL="0" eaLnBrk="1" latinLnBrk="0" hangingPunct="1">
@@ -11050,7 +11050,7 @@
           <a:ln/>
         </p:spPr>
         <p:txBody>
-          <a:bodyPr wrap="square" lIns="0" tIns="0" rIns="0" bIns="0" rtlCol="0" anchor="ctr"/>
+          <a:bodyPr wrap="square" lIns="0" tIns="0" rIns="0" bIns="0" rtlCol="0" anchor="t"/>
           <a:lstStyle/>
           <a:p>
             <a:pPr algn="just" indent="0" marL="0" eaLnBrk="1" latinLnBrk="0" hangingPunct="1">
@@ -11092,7 +11092,7 @@
           <a:ln/>
         </p:spPr>
         <p:txBody>
-          <a:bodyPr wrap="none" lIns="0" tIns="0" rIns="0" bIns="0" rtlCol="0" anchor="ctr"/>
+          <a:bodyPr wrap="none" lIns="0" tIns="0" rIns="0" bIns="0" rtlCol="0" anchor="t"/>
           <a:lstStyle/>
           <a:p>
             <a:pPr algn="l" indent="0" marL="0" eaLnBrk="1" latinLnBrk="0" hangingPunct="1">
@@ -11134,7 +11134,7 @@
           <a:ln/>
         </p:spPr>
         <p:txBody>
-          <a:bodyPr wrap="none" lIns="0" tIns="0" rIns="0" bIns="0" rtlCol="0" anchor="ctr"/>
+          <a:bodyPr wrap="none" lIns="0" tIns="0" rIns="0" bIns="0" rtlCol="0" anchor="t"/>
           <a:lstStyle/>
           <a:p>
             <a:pPr algn="r" indent="0" marL="0" eaLnBrk="1" latinLnBrk="0" hangingPunct="1">
@@ -11176,7 +11176,7 @@
           <a:ln/>
         </p:spPr>
         <p:txBody>
-          <a:bodyPr wrap="none" lIns="0" tIns="0" rIns="0" bIns="0" rtlCol="0" anchor="ctr"/>
+          <a:bodyPr wrap="none" lIns="0" tIns="0" rIns="0" bIns="0" rtlCol="0" anchor="t"/>
           <a:lstStyle/>
           <a:p>
             <a:pPr algn="l" indent="0" marL="0" eaLnBrk="1" latinLnBrk="0" hangingPunct="1">
@@ -11358,7 +11358,7 @@
           <a:ln/>
         </p:spPr>
         <p:txBody>
-          <a:bodyPr wrap="none" lIns="0" tIns="0" rIns="0" bIns="0" rtlCol="0" anchor="ctr"/>
+          <a:bodyPr wrap="none" lIns="0" tIns="0" rIns="0" bIns="0" rtlCol="0" anchor="t"/>
           <a:lstStyle/>
           <a:p>
             <a:pPr algn="l" indent="0" marL="0" eaLnBrk="1" latinLnBrk="0" hangingPunct="1">
@@ -11397,7 +11397,7 @@
           <a:ln/>
         </p:spPr>
         <p:txBody>
-          <a:bodyPr wrap="none" lIns="0" tIns="0" rIns="0" bIns="0" rtlCol="0" anchor="ctr"/>
+          <a:bodyPr wrap="none" lIns="0" tIns="0" rIns="0" bIns="0" rtlCol="0" anchor="t"/>
           <a:lstStyle/>
           <a:p>
             <a:pPr algn="l" indent="0" marL="0" eaLnBrk="1" latinLnBrk="0" hangingPunct="1">
@@ -11439,7 +11439,7 @@
           <a:ln/>
         </p:spPr>
         <p:txBody>
-          <a:bodyPr wrap="none" lIns="0" tIns="0" rIns="0" bIns="0" rtlCol="0" anchor="ctr"/>
+          <a:bodyPr wrap="none" lIns="0" tIns="0" rIns="0" bIns="0" rtlCol="0" anchor="t"/>
           <a:lstStyle/>
           <a:p>
             <a:pPr algn="l" indent="0" marL="0" eaLnBrk="1" latinLnBrk="0" hangingPunct="1">
@@ -11532,7 +11532,7 @@
           <a:ln/>
         </p:spPr>
         <p:txBody>
-          <a:bodyPr wrap="none" lIns="0" tIns="0" rIns="0" bIns="0" rtlCol="0" anchor="ctr"/>
+          <a:bodyPr wrap="none" lIns="0" tIns="0" rIns="0" bIns="0" rtlCol="0" anchor="t"/>
           <a:lstStyle/>
           <a:p>
             <a:pPr algn="l" indent="0" marL="0" eaLnBrk="1" latinLnBrk="0" hangingPunct="1">
@@ -11625,7 +11625,7 @@
           <a:ln/>
         </p:spPr>
         <p:txBody>
-          <a:bodyPr wrap="none" lIns="0" tIns="0" rIns="0" bIns="0" rtlCol="0" anchor="ctr"/>
+          <a:bodyPr wrap="none" lIns="0" tIns="0" rIns="0" bIns="0" rtlCol="0" anchor="t"/>
           <a:lstStyle/>
           <a:p>
             <a:pPr algn="l" indent="0" marL="0" eaLnBrk="1" latinLnBrk="0" hangingPunct="1">
@@ -11667,7 +11667,7 @@
           <a:ln/>
         </p:spPr>
         <p:txBody>
-          <a:bodyPr wrap="none" lIns="0" tIns="0" rIns="0" bIns="0" rtlCol="0" anchor="ctr"/>
+          <a:bodyPr wrap="none" lIns="0" tIns="0" rIns="0" bIns="0" rtlCol="0" anchor="t"/>
           <a:lstStyle/>
           <a:p>
             <a:pPr algn="l" indent="0" marL="0" eaLnBrk="1" latinLnBrk="0" hangingPunct="1">
@@ -11760,7 +11760,7 @@
           <a:ln/>
         </p:spPr>
         <p:txBody>
-          <a:bodyPr wrap="none" lIns="0" tIns="0" rIns="0" bIns="0" rtlCol="0" anchor="ctr"/>
+          <a:bodyPr wrap="none" lIns="0" tIns="0" rIns="0" bIns="0" rtlCol="0" anchor="t"/>
           <a:lstStyle/>
           <a:p>
             <a:pPr algn="l" indent="0" marL="0" eaLnBrk="1" latinLnBrk="0" hangingPunct="1">
@@ -11802,7 +11802,7 @@
           <a:ln/>
         </p:spPr>
         <p:txBody>
-          <a:bodyPr wrap="none" lIns="0" tIns="0" rIns="0" bIns="0" rtlCol="0" anchor="ctr"/>
+          <a:bodyPr wrap="none" lIns="0" tIns="0" rIns="0" bIns="0" rtlCol="0" anchor="t"/>
           <a:lstStyle/>
           <a:p>
             <a:pPr algn="l" indent="0" marL="0" eaLnBrk="1" latinLnBrk="0" hangingPunct="1">
@@ -11871,7 +11871,7 @@
           <a:ln/>
         </p:spPr>
         <p:txBody>
-          <a:bodyPr wrap="none" lIns="0" tIns="0" rIns="0" bIns="0" rtlCol="0" anchor="ctr"/>
+          <a:bodyPr wrap="none" lIns="0" tIns="0" rIns="0" bIns="0" rtlCol="0" anchor="t"/>
           <a:lstStyle/>
           <a:p>
             <a:pPr algn="ctr" indent="0" marL="0" eaLnBrk="1" latinLnBrk="0" hangingPunct="1">
@@ -11913,7 +11913,7 @@
           <a:ln/>
         </p:spPr>
         <p:txBody>
-          <a:bodyPr wrap="none" lIns="0" tIns="0" rIns="0" bIns="0" rtlCol="0" anchor="ctr"/>
+          <a:bodyPr wrap="none" lIns="0" tIns="0" rIns="0" bIns="0" rtlCol="0" anchor="t"/>
           <a:lstStyle/>
           <a:p>
             <a:pPr algn="l" indent="0" marL="0" eaLnBrk="1" latinLnBrk="0" hangingPunct="1">
@@ -11955,7 +11955,7 @@
           <a:ln/>
         </p:spPr>
         <p:txBody>
-          <a:bodyPr wrap="none" lIns="0" tIns="0" rIns="0" bIns="0" rtlCol="0" anchor="ctr"/>
+          <a:bodyPr wrap="none" lIns="0" tIns="0" rIns="0" bIns="0" rtlCol="0" anchor="t"/>
           <a:lstStyle/>
           <a:p>
             <a:pPr algn="r" indent="0" marL="0" eaLnBrk="1" latinLnBrk="0" hangingPunct="1">
@@ -11997,7 +11997,7 @@
           <a:ln/>
         </p:spPr>
         <p:txBody>
-          <a:bodyPr wrap="none" lIns="0" tIns="0" rIns="0" bIns="0" rtlCol="0" anchor="ctr"/>
+          <a:bodyPr wrap="none" lIns="0" tIns="0" rIns="0" bIns="0" rtlCol="0" anchor="t"/>
           <a:lstStyle/>
           <a:p>
             <a:pPr algn="l" indent="0" marL="0" eaLnBrk="1" latinLnBrk="0" hangingPunct="1">
@@ -12179,7 +12179,7 @@
           <a:ln/>
         </p:spPr>
         <p:txBody>
-          <a:bodyPr wrap="none" lIns="0" tIns="0" rIns="0" bIns="0" rtlCol="0" anchor="ctr"/>
+          <a:bodyPr wrap="none" lIns="0" tIns="0" rIns="0" bIns="0" rtlCol="0" anchor="t"/>
           <a:lstStyle/>
           <a:p>
             <a:pPr algn="l" indent="0" marL="0" eaLnBrk="1" latinLnBrk="0" hangingPunct="1">
@@ -12218,7 +12218,7 @@
           <a:ln/>
         </p:spPr>
         <p:txBody>
-          <a:bodyPr wrap="none" lIns="0" tIns="0" rIns="0" bIns="0" rtlCol="0" anchor="ctr"/>
+          <a:bodyPr wrap="none" lIns="0" tIns="0" rIns="0" bIns="0" rtlCol="0" anchor="t"/>
           <a:lstStyle/>
           <a:p>
             <a:pPr algn="l" indent="0" marL="0" eaLnBrk="1" latinLnBrk="0" hangingPunct="1">
@@ -12260,7 +12260,7 @@
           <a:ln/>
         </p:spPr>
         <p:txBody>
-          <a:bodyPr wrap="none" lIns="0" tIns="0" rIns="0" bIns="0" rtlCol="0" anchor="ctr"/>
+          <a:bodyPr wrap="none" lIns="0" tIns="0" rIns="0" bIns="0" rtlCol="0" anchor="t"/>
           <a:lstStyle/>
           <a:p>
             <a:pPr algn="l" indent="0" marL="0" eaLnBrk="1" latinLnBrk="0" hangingPunct="1">
@@ -12353,7 +12353,7 @@
           <a:ln/>
         </p:spPr>
         <p:txBody>
-          <a:bodyPr wrap="none" lIns="0" tIns="0" rIns="0" bIns="0" rtlCol="0" anchor="ctr"/>
+          <a:bodyPr wrap="none" lIns="0" tIns="0" rIns="0" bIns="0" rtlCol="0" anchor="t"/>
           <a:lstStyle/>
           <a:p>
             <a:pPr algn="l" indent="0" marL="0" eaLnBrk="1" latinLnBrk="0" hangingPunct="1">
@@ -12476,7 +12476,7 @@
           <a:ln/>
         </p:spPr>
         <p:txBody>
-          <a:bodyPr wrap="none" lIns="0" tIns="0" rIns="0" bIns="0" rtlCol="0" anchor="ctr"/>
+          <a:bodyPr wrap="none" lIns="0" tIns="0" rIns="0" bIns="0" rtlCol="0" anchor="t"/>
           <a:lstStyle/>
           <a:p>
             <a:pPr algn="l" indent="0" marL="0" eaLnBrk="1" latinLnBrk="0" hangingPunct="1">
@@ -12599,7 +12599,7 @@
           <a:ln/>
         </p:spPr>
         <p:txBody>
-          <a:bodyPr wrap="none" lIns="0" tIns="0" rIns="0" bIns="0" rtlCol="0" anchor="ctr"/>
+          <a:bodyPr wrap="none" lIns="0" tIns="0" rIns="0" bIns="0" rtlCol="0" anchor="t"/>
           <a:lstStyle/>
           <a:p>
             <a:pPr algn="ctr" indent="0" marL="0" eaLnBrk="1" latinLnBrk="0" hangingPunct="1">
@@ -12722,7 +12722,7 @@
           <a:ln/>
         </p:spPr>
         <p:txBody>
-          <a:bodyPr wrap="none" lIns="0" tIns="0" rIns="0" bIns="0" rtlCol="0" anchor="ctr"/>
+          <a:bodyPr wrap="none" lIns="0" tIns="0" rIns="0" bIns="0" rtlCol="0" anchor="t"/>
           <a:lstStyle/>
           <a:p>
             <a:pPr algn="ctr" indent="0" marL="0" eaLnBrk="1" latinLnBrk="0" hangingPunct="1">
@@ -12845,7 +12845,7 @@
           <a:ln/>
         </p:spPr>
         <p:txBody>
-          <a:bodyPr wrap="none" lIns="0" tIns="0" rIns="0" bIns="0" rtlCol="0" anchor="ctr"/>
+          <a:bodyPr wrap="none" lIns="0" tIns="0" rIns="0" bIns="0" rtlCol="0" anchor="t"/>
           <a:lstStyle/>
           <a:p>
             <a:pPr algn="ctr" indent="0" marL="0" eaLnBrk="1" latinLnBrk="0" hangingPunct="1">
@@ -12941,7 +12941,7 @@
           <a:ln/>
         </p:spPr>
         <p:txBody>
-          <a:bodyPr wrap="none" lIns="0" tIns="0" rIns="0" bIns="0" rtlCol="0" anchor="ctr"/>
+          <a:bodyPr wrap="none" lIns="0" tIns="0" rIns="0" bIns="0" rtlCol="0" anchor="t"/>
           <a:lstStyle/>
           <a:p>
             <a:pPr algn="l" indent="0" marL="0" eaLnBrk="1" latinLnBrk="0" hangingPunct="1">
@@ -13064,7 +13064,7 @@
           <a:ln/>
         </p:spPr>
         <p:txBody>
-          <a:bodyPr wrap="none" lIns="0" tIns="0" rIns="0" bIns="0" rtlCol="0" anchor="ctr"/>
+          <a:bodyPr wrap="none" lIns="0" tIns="0" rIns="0" bIns="0" rtlCol="0" anchor="t"/>
           <a:lstStyle/>
           <a:p>
             <a:pPr algn="ctr" indent="0" marL="0" eaLnBrk="1" latinLnBrk="0" hangingPunct="1">
@@ -13160,7 +13160,7 @@
           <a:ln/>
         </p:spPr>
         <p:txBody>
-          <a:bodyPr wrap="none" lIns="0" tIns="0" rIns="0" bIns="0" rtlCol="0" anchor="ctr"/>
+          <a:bodyPr wrap="none" lIns="0" tIns="0" rIns="0" bIns="0" rtlCol="0" anchor="t"/>
           <a:lstStyle/>
           <a:p>
             <a:pPr algn="ctr" indent="0" marL="0" eaLnBrk="1" latinLnBrk="0" hangingPunct="1">
@@ -13283,7 +13283,7 @@
           <a:ln/>
         </p:spPr>
         <p:txBody>
-          <a:bodyPr wrap="none" lIns="0" tIns="0" rIns="0" bIns="0" rtlCol="0" anchor="ctr"/>
+          <a:bodyPr wrap="none" lIns="0" tIns="0" rIns="0" bIns="0" rtlCol="0" anchor="t"/>
           <a:lstStyle/>
           <a:p>
             <a:pPr algn="ctr" indent="0" marL="0" eaLnBrk="1" latinLnBrk="0" hangingPunct="1">
@@ -13379,7 +13379,7 @@
           <a:ln/>
         </p:spPr>
         <p:txBody>
-          <a:bodyPr wrap="none" lIns="0" tIns="0" rIns="0" bIns="0" rtlCol="0" anchor="ctr"/>
+          <a:bodyPr wrap="none" lIns="0" tIns="0" rIns="0" bIns="0" rtlCol="0" anchor="t"/>
           <a:lstStyle/>
           <a:p>
             <a:pPr algn="ctr" indent="0" marL="0" eaLnBrk="1" latinLnBrk="0" hangingPunct="1">
@@ -13502,7 +13502,7 @@
           <a:ln/>
         </p:spPr>
         <p:txBody>
-          <a:bodyPr wrap="none" lIns="0" tIns="0" rIns="0" bIns="0" rtlCol="0" anchor="ctr"/>
+          <a:bodyPr wrap="none" lIns="0" tIns="0" rIns="0" bIns="0" rtlCol="0" anchor="t"/>
           <a:lstStyle/>
           <a:p>
             <a:pPr algn="ctr" indent="0" marL="0" eaLnBrk="1" latinLnBrk="0" hangingPunct="1">
@@ -13625,7 +13625,7 @@
           <a:ln/>
         </p:spPr>
         <p:txBody>
-          <a:bodyPr wrap="none" lIns="0" tIns="0" rIns="0" bIns="0" rtlCol="0" anchor="ctr"/>
+          <a:bodyPr wrap="none" lIns="0" tIns="0" rIns="0" bIns="0" rtlCol="0" anchor="t"/>
           <a:lstStyle/>
           <a:p>
             <a:pPr algn="l" indent="0" marL="0" eaLnBrk="1" latinLnBrk="0" hangingPunct="1">
@@ -13721,7 +13721,7 @@
           <a:ln/>
         </p:spPr>
         <p:txBody>
-          <a:bodyPr wrap="none" lIns="0" tIns="0" rIns="0" bIns="0" rtlCol="0" anchor="ctr"/>
+          <a:bodyPr wrap="none" lIns="0" tIns="0" rIns="0" bIns="0" rtlCol="0" anchor="t"/>
           <a:lstStyle/>
           <a:p>
             <a:pPr algn="ctr" indent="0" marL="0" eaLnBrk="1" latinLnBrk="0" hangingPunct="1">
@@ -13844,7 +13844,7 @@
           <a:ln/>
         </p:spPr>
         <p:txBody>
-          <a:bodyPr wrap="none" lIns="0" tIns="0" rIns="0" bIns="0" rtlCol="0" anchor="ctr"/>
+          <a:bodyPr wrap="none" lIns="0" tIns="0" rIns="0" bIns="0" rtlCol="0" anchor="t"/>
           <a:lstStyle/>
           <a:p>
             <a:pPr algn="ctr" indent="0" marL="0" eaLnBrk="1" latinLnBrk="0" hangingPunct="1">
@@ -13940,7 +13940,7 @@
           <a:ln/>
         </p:spPr>
         <p:txBody>
-          <a:bodyPr wrap="none" lIns="0" tIns="0" rIns="0" bIns="0" rtlCol="0" anchor="ctr"/>
+          <a:bodyPr wrap="none" lIns="0" tIns="0" rIns="0" bIns="0" rtlCol="0" anchor="t"/>
           <a:lstStyle/>
           <a:p>
             <a:pPr algn="ctr" indent="0" marL="0" eaLnBrk="1" latinLnBrk="0" hangingPunct="1">
@@ -14063,7 +14063,7 @@
           <a:ln/>
         </p:spPr>
         <p:txBody>
-          <a:bodyPr wrap="none" lIns="0" tIns="0" rIns="0" bIns="0" rtlCol="0" anchor="ctr"/>
+          <a:bodyPr wrap="none" lIns="0" tIns="0" rIns="0" bIns="0" rtlCol="0" anchor="t"/>
           <a:lstStyle/>
           <a:p>
             <a:pPr algn="ctr" indent="0" marL="0" eaLnBrk="1" latinLnBrk="0" hangingPunct="1">
@@ -14159,7 +14159,7 @@
           <a:ln/>
         </p:spPr>
         <p:txBody>
-          <a:bodyPr wrap="none" lIns="0" tIns="0" rIns="0" bIns="0" rtlCol="0" anchor="ctr"/>
+          <a:bodyPr wrap="none" lIns="0" tIns="0" rIns="0" bIns="0" rtlCol="0" anchor="t"/>
           <a:lstStyle/>
           <a:p>
             <a:pPr algn="ctr" indent="0" marL="0" eaLnBrk="1" latinLnBrk="0" hangingPunct="1">
@@ -14255,7 +14255,7 @@
           <a:ln/>
         </p:spPr>
         <p:txBody>
-          <a:bodyPr wrap="none" lIns="0" tIns="0" rIns="0" bIns="0" rtlCol="0" anchor="ctr"/>
+          <a:bodyPr wrap="none" lIns="0" tIns="0" rIns="0" bIns="0" rtlCol="0" anchor="t"/>
           <a:lstStyle/>
           <a:p>
             <a:pPr algn="ctr" indent="0" marL="0" eaLnBrk="1" latinLnBrk="0" hangingPunct="1">
@@ -14378,7 +14378,7 @@
           <a:ln/>
         </p:spPr>
         <p:txBody>
-          <a:bodyPr wrap="none" lIns="0" tIns="0" rIns="0" bIns="0" rtlCol="0" anchor="ctr"/>
+          <a:bodyPr wrap="none" lIns="0" tIns="0" rIns="0" bIns="0" rtlCol="0" anchor="t"/>
           <a:lstStyle/>
           <a:p>
             <a:pPr algn="l" indent="0" marL="0" eaLnBrk="1" latinLnBrk="0" hangingPunct="1">
@@ -14474,7 +14474,7 @@
           <a:ln/>
         </p:spPr>
         <p:txBody>
-          <a:bodyPr wrap="none" lIns="0" tIns="0" rIns="0" bIns="0" rtlCol="0" anchor="ctr"/>
+          <a:bodyPr wrap="none" lIns="0" tIns="0" rIns="0" bIns="0" rtlCol="0" anchor="t"/>
           <a:lstStyle/>
           <a:p>
             <a:pPr algn="ctr" indent="0" marL="0" eaLnBrk="1" latinLnBrk="0" hangingPunct="1">
@@ -14597,7 +14597,7 @@
           <a:ln/>
         </p:spPr>
         <p:txBody>
-          <a:bodyPr wrap="none" lIns="0" tIns="0" rIns="0" bIns="0" rtlCol="0" anchor="ctr"/>
+          <a:bodyPr wrap="none" lIns="0" tIns="0" rIns="0" bIns="0" rtlCol="0" anchor="t"/>
           <a:lstStyle/>
           <a:p>
             <a:pPr algn="ctr" indent="0" marL="0" eaLnBrk="1" latinLnBrk="0" hangingPunct="1">
@@ -14693,7 +14693,7 @@
           <a:ln/>
         </p:spPr>
         <p:txBody>
-          <a:bodyPr wrap="none" lIns="0" tIns="0" rIns="0" bIns="0" rtlCol="0" anchor="ctr"/>
+          <a:bodyPr wrap="none" lIns="0" tIns="0" rIns="0" bIns="0" rtlCol="0" anchor="t"/>
           <a:lstStyle/>
           <a:p>
             <a:pPr algn="ctr" indent="0" marL="0" eaLnBrk="1" latinLnBrk="0" hangingPunct="1">
@@ -14816,7 +14816,7 @@
           <a:ln/>
         </p:spPr>
         <p:txBody>
-          <a:bodyPr wrap="none" lIns="0" tIns="0" rIns="0" bIns="0" rtlCol="0" anchor="ctr"/>
+          <a:bodyPr wrap="none" lIns="0" tIns="0" rIns="0" bIns="0" rtlCol="0" anchor="t"/>
           <a:lstStyle/>
           <a:p>
             <a:pPr algn="ctr" indent="0" marL="0" eaLnBrk="1" latinLnBrk="0" hangingPunct="1">
@@ -14912,7 +14912,7 @@
           <a:ln/>
         </p:spPr>
         <p:txBody>
-          <a:bodyPr wrap="none" lIns="0" tIns="0" rIns="0" bIns="0" rtlCol="0" anchor="ctr"/>
+          <a:bodyPr wrap="none" lIns="0" tIns="0" rIns="0" bIns="0" rtlCol="0" anchor="t"/>
           <a:lstStyle/>
           <a:p>
             <a:pPr algn="ctr" indent="0" marL="0" eaLnBrk="1" latinLnBrk="0" hangingPunct="1">
@@ -15008,7 +15008,7 @@
           <a:ln/>
         </p:spPr>
         <p:txBody>
-          <a:bodyPr wrap="none" lIns="0" tIns="0" rIns="0" bIns="0" rtlCol="0" anchor="ctr"/>
+          <a:bodyPr wrap="none" lIns="0" tIns="0" rIns="0" bIns="0" rtlCol="0" anchor="t"/>
           <a:lstStyle/>
           <a:p>
             <a:pPr algn="ctr" indent="0" marL="0" eaLnBrk="1" latinLnBrk="0" hangingPunct="1">
@@ -15131,7 +15131,7 @@
           <a:ln/>
         </p:spPr>
         <p:txBody>
-          <a:bodyPr wrap="none" lIns="0" tIns="0" rIns="0" bIns="0" rtlCol="0" anchor="ctr"/>
+          <a:bodyPr wrap="none" lIns="0" tIns="0" rIns="0" bIns="0" rtlCol="0" anchor="t"/>
           <a:lstStyle/>
           <a:p>
             <a:pPr algn="l" indent="0" marL="0" eaLnBrk="1" latinLnBrk="0" hangingPunct="1">
@@ -15227,7 +15227,7 @@
           <a:ln/>
         </p:spPr>
         <p:txBody>
-          <a:bodyPr wrap="none" lIns="0" tIns="0" rIns="0" bIns="0" rtlCol="0" anchor="ctr"/>
+          <a:bodyPr wrap="none" lIns="0" tIns="0" rIns="0" bIns="0" rtlCol="0" anchor="t"/>
           <a:lstStyle/>
           <a:p>
             <a:pPr algn="ctr" indent="0" marL="0" eaLnBrk="1" latinLnBrk="0" hangingPunct="1">
@@ -15350,7 +15350,7 @@
           <a:ln/>
         </p:spPr>
         <p:txBody>
-          <a:bodyPr wrap="none" lIns="0" tIns="0" rIns="0" bIns="0" rtlCol="0" anchor="ctr"/>
+          <a:bodyPr wrap="none" lIns="0" tIns="0" rIns="0" bIns="0" rtlCol="0" anchor="t"/>
           <a:lstStyle/>
           <a:p>
             <a:pPr algn="ctr" indent="0" marL="0" eaLnBrk="1" latinLnBrk="0" hangingPunct="1">
@@ -15446,7 +15446,7 @@
           <a:ln/>
         </p:spPr>
         <p:txBody>
-          <a:bodyPr wrap="none" lIns="0" tIns="0" rIns="0" bIns="0" rtlCol="0" anchor="ctr"/>
+          <a:bodyPr wrap="none" lIns="0" tIns="0" rIns="0" bIns="0" rtlCol="0" anchor="t"/>
           <a:lstStyle/>
           <a:p>
             <a:pPr algn="ctr" indent="0" marL="0" eaLnBrk="1" latinLnBrk="0" hangingPunct="1">
@@ -15569,7 +15569,7 @@
           <a:ln/>
         </p:spPr>
         <p:txBody>
-          <a:bodyPr wrap="none" lIns="0" tIns="0" rIns="0" bIns="0" rtlCol="0" anchor="ctr"/>
+          <a:bodyPr wrap="none" lIns="0" tIns="0" rIns="0" bIns="0" rtlCol="0" anchor="t"/>
           <a:lstStyle/>
           <a:p>
             <a:pPr algn="ctr" indent="0" marL="0" eaLnBrk="1" latinLnBrk="0" hangingPunct="1">
@@ -15665,7 +15665,7 @@
           <a:ln/>
         </p:spPr>
         <p:txBody>
-          <a:bodyPr wrap="none" lIns="0" tIns="0" rIns="0" bIns="0" rtlCol="0" anchor="ctr"/>
+          <a:bodyPr wrap="none" lIns="0" tIns="0" rIns="0" bIns="0" rtlCol="0" anchor="t"/>
           <a:lstStyle/>
           <a:p>
             <a:pPr algn="ctr" indent="0" marL="0" eaLnBrk="1" latinLnBrk="0" hangingPunct="1">
@@ -15761,7 +15761,7 @@
           <a:ln/>
         </p:spPr>
         <p:txBody>
-          <a:bodyPr wrap="none" lIns="0" tIns="0" rIns="0" bIns="0" rtlCol="0" anchor="ctr"/>
+          <a:bodyPr wrap="none" lIns="0" tIns="0" rIns="0" bIns="0" rtlCol="0" anchor="t"/>
           <a:lstStyle/>
           <a:p>
             <a:pPr algn="ctr" indent="0" marL="0" eaLnBrk="1" latinLnBrk="0" hangingPunct="1">
@@ -15884,7 +15884,7 @@
           <a:ln/>
         </p:spPr>
         <p:txBody>
-          <a:bodyPr wrap="none" lIns="0" tIns="0" rIns="0" bIns="0" rtlCol="0" anchor="ctr"/>
+          <a:bodyPr wrap="none" lIns="0" tIns="0" rIns="0" bIns="0" rtlCol="0" anchor="t"/>
           <a:lstStyle/>
           <a:p>
             <a:pPr algn="l" indent="0" marL="0" eaLnBrk="1" latinLnBrk="0" hangingPunct="1">
@@ -15980,7 +15980,7 @@
           <a:ln/>
         </p:spPr>
         <p:txBody>
-          <a:bodyPr wrap="none" lIns="0" tIns="0" rIns="0" bIns="0" rtlCol="0" anchor="ctr"/>
+          <a:bodyPr wrap="none" lIns="0" tIns="0" rIns="0" bIns="0" rtlCol="0" anchor="t"/>
           <a:lstStyle/>
           <a:p>
             <a:pPr algn="ctr" indent="0" marL="0" eaLnBrk="1" latinLnBrk="0" hangingPunct="1">
@@ -16103,7 +16103,7 @@
           <a:ln/>
         </p:spPr>
         <p:txBody>
-          <a:bodyPr wrap="none" lIns="0" tIns="0" rIns="0" bIns="0" rtlCol="0" anchor="ctr"/>
+          <a:bodyPr wrap="none" lIns="0" tIns="0" rIns="0" bIns="0" rtlCol="0" anchor="t"/>
           <a:lstStyle/>
           <a:p>
             <a:pPr algn="ctr" indent="0" marL="0" eaLnBrk="1" latinLnBrk="0" hangingPunct="1">
@@ -16199,7 +16199,7 @@
           <a:ln/>
         </p:spPr>
         <p:txBody>
-          <a:bodyPr wrap="none" lIns="0" tIns="0" rIns="0" bIns="0" rtlCol="0" anchor="ctr"/>
+          <a:bodyPr wrap="none" lIns="0" tIns="0" rIns="0" bIns="0" rtlCol="0" anchor="t"/>
           <a:lstStyle/>
           <a:p>
             <a:pPr algn="ctr" indent="0" marL="0" eaLnBrk="1" latinLnBrk="0" hangingPunct="1">
@@ -16322,7 +16322,7 @@
           <a:ln/>
         </p:spPr>
         <p:txBody>
-          <a:bodyPr wrap="none" lIns="0" tIns="0" rIns="0" bIns="0" rtlCol="0" anchor="ctr"/>
+          <a:bodyPr wrap="none" lIns="0" tIns="0" rIns="0" bIns="0" rtlCol="0" anchor="t"/>
           <a:lstStyle/>
           <a:p>
             <a:pPr algn="ctr" indent="0" marL="0" eaLnBrk="1" latinLnBrk="0" hangingPunct="1">
@@ -16418,7 +16418,7 @@
           <a:ln/>
         </p:spPr>
         <p:txBody>
-          <a:bodyPr wrap="none" lIns="0" tIns="0" rIns="0" bIns="0" rtlCol="0" anchor="ctr"/>
+          <a:bodyPr wrap="none" lIns="0" tIns="0" rIns="0" bIns="0" rtlCol="0" anchor="t"/>
           <a:lstStyle/>
           <a:p>
             <a:pPr algn="ctr" indent="0" marL="0" eaLnBrk="1" latinLnBrk="0" hangingPunct="1">
@@ -16514,7 +16514,7 @@
           <a:ln/>
         </p:spPr>
         <p:txBody>
-          <a:bodyPr wrap="none" lIns="0" tIns="0" rIns="0" bIns="0" rtlCol="0" anchor="ctr"/>
+          <a:bodyPr wrap="none" lIns="0" tIns="0" rIns="0" bIns="0" rtlCol="0" anchor="t"/>
           <a:lstStyle/>
           <a:p>
             <a:pPr algn="ctr" indent="0" marL="0" eaLnBrk="1" latinLnBrk="0" hangingPunct="1">
@@ -16637,7 +16637,7 @@
           <a:ln/>
         </p:spPr>
         <p:txBody>
-          <a:bodyPr wrap="none" lIns="0" tIns="0" rIns="0" bIns="0" rtlCol="0" anchor="ctr"/>
+          <a:bodyPr wrap="none" lIns="0" tIns="0" rIns="0" bIns="0" rtlCol="0" anchor="t"/>
           <a:lstStyle/>
           <a:p>
             <a:pPr algn="l" indent="0" marL="0" eaLnBrk="1" latinLnBrk="0" hangingPunct="1">
@@ -16733,7 +16733,7 @@
           <a:ln/>
         </p:spPr>
         <p:txBody>
-          <a:bodyPr wrap="none" lIns="0" tIns="0" rIns="0" bIns="0" rtlCol="0" anchor="ctr"/>
+          <a:bodyPr wrap="none" lIns="0" tIns="0" rIns="0" bIns="0" rtlCol="0" anchor="t"/>
           <a:lstStyle/>
           <a:p>
             <a:pPr algn="ctr" indent="0" marL="0" eaLnBrk="1" latinLnBrk="0" hangingPunct="1">
@@ -16856,7 +16856,7 @@
           <a:ln/>
         </p:spPr>
         <p:txBody>
-          <a:bodyPr wrap="none" lIns="0" tIns="0" rIns="0" bIns="0" rtlCol="0" anchor="ctr"/>
+          <a:bodyPr wrap="none" lIns="0" tIns="0" rIns="0" bIns="0" rtlCol="0" anchor="t"/>
           <a:lstStyle/>
           <a:p>
             <a:pPr algn="ctr" indent="0" marL="0" eaLnBrk="1" latinLnBrk="0" hangingPunct="1">
@@ -16952,7 +16952,7 @@
           <a:ln/>
         </p:spPr>
         <p:txBody>
-          <a:bodyPr wrap="none" lIns="0" tIns="0" rIns="0" bIns="0" rtlCol="0" anchor="ctr"/>
+          <a:bodyPr wrap="none" lIns="0" tIns="0" rIns="0" bIns="0" rtlCol="0" anchor="t"/>
           <a:lstStyle/>
           <a:p>
             <a:pPr algn="ctr" indent="0" marL="0" eaLnBrk="1" latinLnBrk="0" hangingPunct="1">
@@ -17075,7 +17075,7 @@
           <a:ln/>
         </p:spPr>
         <p:txBody>
-          <a:bodyPr wrap="none" lIns="0" tIns="0" rIns="0" bIns="0" rtlCol="0" anchor="ctr"/>
+          <a:bodyPr wrap="none" lIns="0" tIns="0" rIns="0" bIns="0" rtlCol="0" anchor="t"/>
           <a:lstStyle/>
           <a:p>
             <a:pPr algn="ctr" indent="0" marL="0" eaLnBrk="1" latinLnBrk="0" hangingPunct="1">
@@ -17171,7 +17171,7 @@
           <a:ln/>
         </p:spPr>
         <p:txBody>
-          <a:bodyPr wrap="none" lIns="0" tIns="0" rIns="0" bIns="0" rtlCol="0" anchor="ctr"/>
+          <a:bodyPr wrap="none" lIns="0" tIns="0" rIns="0" bIns="0" rtlCol="0" anchor="t"/>
           <a:lstStyle/>
           <a:p>
             <a:pPr algn="ctr" indent="0" marL="0" eaLnBrk="1" latinLnBrk="0" hangingPunct="1">
@@ -17267,7 +17267,7 @@
           <a:ln/>
         </p:spPr>
         <p:txBody>
-          <a:bodyPr wrap="none" lIns="0" tIns="0" rIns="0" bIns="0" rtlCol="0" anchor="ctr"/>
+          <a:bodyPr wrap="none" lIns="0" tIns="0" rIns="0" bIns="0" rtlCol="0" anchor="t"/>
           <a:lstStyle/>
           <a:p>
             <a:pPr algn="ctr" indent="0" marL="0" eaLnBrk="1" latinLnBrk="0" hangingPunct="1">
@@ -17390,7 +17390,7 @@
           <a:ln/>
         </p:spPr>
         <p:txBody>
-          <a:bodyPr wrap="none" lIns="0" tIns="0" rIns="0" bIns="0" rtlCol="0" anchor="ctr"/>
+          <a:bodyPr wrap="none" lIns="0" tIns="0" rIns="0" bIns="0" rtlCol="0" anchor="t"/>
           <a:lstStyle/>
           <a:p>
             <a:pPr algn="l" indent="0" marL="0" eaLnBrk="1" latinLnBrk="0" hangingPunct="1">
@@ -17486,7 +17486,7 @@
           <a:ln/>
         </p:spPr>
         <p:txBody>
-          <a:bodyPr wrap="none" lIns="0" tIns="0" rIns="0" bIns="0" rtlCol="0" anchor="ctr"/>
+          <a:bodyPr wrap="none" lIns="0" tIns="0" rIns="0" bIns="0" rtlCol="0" anchor="t"/>
           <a:lstStyle/>
           <a:p>
             <a:pPr algn="ctr" indent="0" marL="0" eaLnBrk="1" latinLnBrk="0" hangingPunct="1">
@@ -17609,7 +17609,7 @@
           <a:ln/>
         </p:spPr>
         <p:txBody>
-          <a:bodyPr wrap="none" lIns="0" tIns="0" rIns="0" bIns="0" rtlCol="0" anchor="ctr"/>
+          <a:bodyPr wrap="none" lIns="0" tIns="0" rIns="0" bIns="0" rtlCol="0" anchor="t"/>
           <a:lstStyle/>
           <a:p>
             <a:pPr algn="ctr" indent="0" marL="0" eaLnBrk="1" latinLnBrk="0" hangingPunct="1">
@@ -17705,7 +17705,7 @@
           <a:ln/>
         </p:spPr>
         <p:txBody>
-          <a:bodyPr wrap="none" lIns="0" tIns="0" rIns="0" bIns="0" rtlCol="0" anchor="ctr"/>
+          <a:bodyPr wrap="none" lIns="0" tIns="0" rIns="0" bIns="0" rtlCol="0" anchor="t"/>
           <a:lstStyle/>
           <a:p>
             <a:pPr algn="ctr" indent="0" marL="0" eaLnBrk="1" latinLnBrk="0" hangingPunct="1">
@@ -17828,7 +17828,7 @@
           <a:ln/>
         </p:spPr>
         <p:txBody>
-          <a:bodyPr wrap="none" lIns="0" tIns="0" rIns="0" bIns="0" rtlCol="0" anchor="ctr"/>
+          <a:bodyPr wrap="none" lIns="0" tIns="0" rIns="0" bIns="0" rtlCol="0" anchor="t"/>
           <a:lstStyle/>
           <a:p>
             <a:pPr algn="ctr" indent="0" marL="0" eaLnBrk="1" latinLnBrk="0" hangingPunct="1">
@@ -17924,7 +17924,7 @@
           <a:ln/>
         </p:spPr>
         <p:txBody>
-          <a:bodyPr wrap="none" lIns="0" tIns="0" rIns="0" bIns="0" rtlCol="0" anchor="ctr"/>
+          <a:bodyPr wrap="none" lIns="0" tIns="0" rIns="0" bIns="0" rtlCol="0" anchor="t"/>
           <a:lstStyle/>
           <a:p>
             <a:pPr algn="ctr" indent="0" marL="0" eaLnBrk="1" latinLnBrk="0" hangingPunct="1">
@@ -18020,7 +18020,7 @@
           <a:ln/>
         </p:spPr>
         <p:txBody>
-          <a:bodyPr wrap="none" lIns="0" tIns="0" rIns="0" bIns="0" rtlCol="0" anchor="ctr"/>
+          <a:bodyPr wrap="none" lIns="0" tIns="0" rIns="0" bIns="0" rtlCol="0" anchor="t"/>
           <a:lstStyle/>
           <a:p>
             <a:pPr algn="ctr" indent="0" marL="0" eaLnBrk="1" latinLnBrk="0" hangingPunct="1">
@@ -18143,7 +18143,7 @@
           <a:ln/>
         </p:spPr>
         <p:txBody>
-          <a:bodyPr wrap="none" lIns="0" tIns="0" rIns="0" bIns="0" rtlCol="0" anchor="ctr"/>
+          <a:bodyPr wrap="none" lIns="0" tIns="0" rIns="0" bIns="0" rtlCol="0" anchor="t"/>
           <a:lstStyle/>
           <a:p>
             <a:pPr algn="l" indent="0" marL="0" eaLnBrk="1" latinLnBrk="0" hangingPunct="1">
@@ -18239,7 +18239,7 @@
           <a:ln/>
         </p:spPr>
         <p:txBody>
-          <a:bodyPr wrap="none" lIns="0" tIns="0" rIns="0" bIns="0" rtlCol="0" anchor="ctr"/>
+          <a:bodyPr wrap="none" lIns="0" tIns="0" rIns="0" bIns="0" rtlCol="0" anchor="t"/>
           <a:lstStyle/>
           <a:p>
             <a:pPr algn="ctr" indent="0" marL="0" eaLnBrk="1" latinLnBrk="0" hangingPunct="1">
@@ -18362,7 +18362,7 @@
           <a:ln/>
         </p:spPr>
         <p:txBody>
-          <a:bodyPr wrap="none" lIns="0" tIns="0" rIns="0" bIns="0" rtlCol="0" anchor="ctr"/>
+          <a:bodyPr wrap="none" lIns="0" tIns="0" rIns="0" bIns="0" rtlCol="0" anchor="t"/>
           <a:lstStyle/>
           <a:p>
             <a:pPr algn="ctr" indent="0" marL="0" eaLnBrk="1" latinLnBrk="0" hangingPunct="1">
@@ -18458,7 +18458,7 @@
           <a:ln/>
         </p:spPr>
         <p:txBody>
-          <a:bodyPr wrap="none" lIns="0" tIns="0" rIns="0" bIns="0" rtlCol="0" anchor="ctr"/>
+          <a:bodyPr wrap="none" lIns="0" tIns="0" rIns="0" bIns="0" rtlCol="0" anchor="t"/>
           <a:lstStyle/>
           <a:p>
             <a:pPr algn="ctr" indent="0" marL="0" eaLnBrk="1" latinLnBrk="0" hangingPunct="1">
@@ -18581,7 +18581,7 @@
           <a:ln/>
         </p:spPr>
         <p:txBody>
-          <a:bodyPr wrap="none" lIns="0" tIns="0" rIns="0" bIns="0" rtlCol="0" anchor="ctr"/>
+          <a:bodyPr wrap="none" lIns="0" tIns="0" rIns="0" bIns="0" rtlCol="0" anchor="t"/>
           <a:lstStyle/>
           <a:p>
             <a:pPr algn="ctr" indent="0" marL="0" eaLnBrk="1" latinLnBrk="0" hangingPunct="1">
@@ -18677,7 +18677,7 @@
           <a:ln/>
         </p:spPr>
         <p:txBody>
-          <a:bodyPr wrap="none" lIns="0" tIns="0" rIns="0" bIns="0" rtlCol="0" anchor="ctr"/>
+          <a:bodyPr wrap="none" lIns="0" tIns="0" rIns="0" bIns="0" rtlCol="0" anchor="t"/>
           <a:lstStyle/>
           <a:p>
             <a:pPr algn="ctr" indent="0" marL="0" eaLnBrk="1" latinLnBrk="0" hangingPunct="1">
@@ -18773,7 +18773,7 @@
           <a:ln/>
         </p:spPr>
         <p:txBody>
-          <a:bodyPr wrap="none" lIns="0" tIns="0" rIns="0" bIns="0" rtlCol="0" anchor="ctr"/>
+          <a:bodyPr wrap="none" lIns="0" tIns="0" rIns="0" bIns="0" rtlCol="0" anchor="t"/>
           <a:lstStyle/>
           <a:p>
             <a:pPr algn="ctr" indent="0" marL="0" eaLnBrk="1" latinLnBrk="0" hangingPunct="1">
@@ -18896,7 +18896,7 @@
           <a:ln/>
         </p:spPr>
         <p:txBody>
-          <a:bodyPr wrap="none" lIns="0" tIns="0" rIns="0" bIns="0" rtlCol="0" anchor="ctr"/>
+          <a:bodyPr wrap="none" lIns="0" tIns="0" rIns="0" bIns="0" rtlCol="0" anchor="t"/>
           <a:lstStyle/>
           <a:p>
             <a:pPr algn="l" indent="0" marL="0" eaLnBrk="1" latinLnBrk="0" hangingPunct="1">
@@ -18992,7 +18992,7 @@
           <a:ln/>
         </p:spPr>
         <p:txBody>
-          <a:bodyPr wrap="none" lIns="0" tIns="0" rIns="0" bIns="0" rtlCol="0" anchor="ctr"/>
+          <a:bodyPr wrap="none" lIns="0" tIns="0" rIns="0" bIns="0" rtlCol="0" anchor="t"/>
           <a:lstStyle/>
           <a:p>
             <a:pPr algn="ctr" indent="0" marL="0" eaLnBrk="1" latinLnBrk="0" hangingPunct="1">
@@ -19115,7 +19115,7 @@
           <a:ln/>
         </p:spPr>
         <p:txBody>
-          <a:bodyPr wrap="none" lIns="0" tIns="0" rIns="0" bIns="0" rtlCol="0" anchor="ctr"/>
+          <a:bodyPr wrap="none" lIns="0" tIns="0" rIns="0" bIns="0" rtlCol="0" anchor="t"/>
           <a:lstStyle/>
           <a:p>
             <a:pPr algn="ctr" indent="0" marL="0" eaLnBrk="1" latinLnBrk="0" hangingPunct="1">
@@ -19211,7 +19211,7 @@
           <a:ln/>
         </p:spPr>
         <p:txBody>
-          <a:bodyPr wrap="none" lIns="0" tIns="0" rIns="0" bIns="0" rtlCol="0" anchor="ctr"/>
+          <a:bodyPr wrap="none" lIns="0" tIns="0" rIns="0" bIns="0" rtlCol="0" anchor="t"/>
           <a:lstStyle/>
           <a:p>
             <a:pPr algn="ctr" indent="0" marL="0" eaLnBrk="1" latinLnBrk="0" hangingPunct="1">
@@ -19334,7 +19334,7 @@
           <a:ln/>
         </p:spPr>
         <p:txBody>
-          <a:bodyPr wrap="none" lIns="0" tIns="0" rIns="0" bIns="0" rtlCol="0" anchor="ctr"/>
+          <a:bodyPr wrap="none" lIns="0" tIns="0" rIns="0" bIns="0" rtlCol="0" anchor="t"/>
           <a:lstStyle/>
           <a:p>
             <a:pPr algn="ctr" indent="0" marL="0" eaLnBrk="1" latinLnBrk="0" hangingPunct="1">
@@ -19430,7 +19430,7 @@
           <a:ln/>
         </p:spPr>
         <p:txBody>
-          <a:bodyPr wrap="none" lIns="0" tIns="0" rIns="0" bIns="0" rtlCol="0" anchor="ctr"/>
+          <a:bodyPr wrap="none" lIns="0" tIns="0" rIns="0" bIns="0" rtlCol="0" anchor="t"/>
           <a:lstStyle/>
           <a:p>
             <a:pPr algn="ctr" indent="0" marL="0" eaLnBrk="1" latinLnBrk="0" hangingPunct="1">
@@ -19526,7 +19526,7 @@
           <a:ln/>
         </p:spPr>
         <p:txBody>
-          <a:bodyPr wrap="none" lIns="0" tIns="0" rIns="0" bIns="0" rtlCol="0" anchor="ctr"/>
+          <a:bodyPr wrap="none" lIns="0" tIns="0" rIns="0" bIns="0" rtlCol="0" anchor="t"/>
           <a:lstStyle/>
           <a:p>
             <a:pPr algn="ctr" indent="0" marL="0" eaLnBrk="1" latinLnBrk="0" hangingPunct="1">
@@ -19568,7 +19568,7 @@
           <a:ln/>
         </p:spPr>
         <p:txBody>
-          <a:bodyPr wrap="square" lIns="0" tIns="0" rIns="0" bIns="0" rtlCol="0" anchor="ctr"/>
+          <a:bodyPr wrap="square" lIns="0" tIns="0" rIns="0" bIns="0" rtlCol="0" anchor="t"/>
           <a:lstStyle/>
           <a:p>
             <a:pPr algn="l" indent="0" marL="0" eaLnBrk="1" latinLnBrk="0" hangingPunct="1">
@@ -19677,7 +19677,7 @@
           <a:ln/>
         </p:spPr>
         <p:txBody>
-          <a:bodyPr wrap="none" lIns="0" tIns="0" rIns="0" bIns="0" rtlCol="0" anchor="ctr"/>
+          <a:bodyPr wrap="none" lIns="0" tIns="0" rIns="0" bIns="0" rtlCol="0" anchor="t"/>
           <a:lstStyle/>
           <a:p>
             <a:pPr algn="ctr" indent="0" marL="0" eaLnBrk="1" latinLnBrk="0" hangingPunct="1">
@@ -19719,7 +19719,7 @@
           <a:ln/>
         </p:spPr>
         <p:txBody>
-          <a:bodyPr wrap="none" lIns="0" tIns="0" rIns="0" bIns="0" rtlCol="0" anchor="ctr"/>
+          <a:bodyPr wrap="none" lIns="0" tIns="0" rIns="0" bIns="0" rtlCol="0" anchor="t"/>
           <a:lstStyle/>
           <a:p>
             <a:pPr algn="l" indent="0" marL="0" eaLnBrk="1" latinLnBrk="0" hangingPunct="1">
@@ -19761,7 +19761,7 @@
           <a:ln/>
         </p:spPr>
         <p:txBody>
-          <a:bodyPr wrap="none" lIns="0" tIns="0" rIns="0" bIns="0" rtlCol="0" anchor="ctr"/>
+          <a:bodyPr wrap="none" lIns="0" tIns="0" rIns="0" bIns="0" rtlCol="0" anchor="t"/>
           <a:lstStyle/>
           <a:p>
             <a:pPr algn="r" indent="0" marL="0" eaLnBrk="1" latinLnBrk="0" hangingPunct="1">
@@ -19803,7 +19803,7 @@
           <a:ln/>
         </p:spPr>
         <p:txBody>
-          <a:bodyPr wrap="none" lIns="0" tIns="0" rIns="0" bIns="0" rtlCol="0" anchor="ctr"/>
+          <a:bodyPr wrap="none" lIns="0" tIns="0" rIns="0" bIns="0" rtlCol="0" anchor="t"/>
           <a:lstStyle/>
           <a:p>
             <a:pPr algn="l" indent="0" marL="0" eaLnBrk="1" latinLnBrk="0" hangingPunct="1">
@@ -19928,7 +19928,7 @@
           <a:ln/>
         </p:spPr>
         <p:txBody>
-          <a:bodyPr wrap="none" lIns="0" tIns="0" rIns="0" bIns="0" rtlCol="0" anchor="ctr"/>
+          <a:bodyPr wrap="none" lIns="0" tIns="0" rIns="0" bIns="0" rtlCol="0" anchor="t"/>
           <a:lstStyle/>
           <a:p>
             <a:pPr algn="l" indent="0" marL="0" eaLnBrk="1" latinLnBrk="0" hangingPunct="1">
@@ -19967,7 +19967,7 @@
           <a:ln/>
         </p:spPr>
         <p:txBody>
-          <a:bodyPr wrap="none" lIns="0" tIns="0" rIns="0" bIns="0" rtlCol="0" anchor="ctr"/>
+          <a:bodyPr wrap="none" lIns="0" tIns="0" rIns="0" bIns="0" rtlCol="0" anchor="t"/>
           <a:lstStyle/>
           <a:p>
             <a:pPr algn="l" indent="0" marL="0" eaLnBrk="1" latinLnBrk="0" hangingPunct="1">
@@ -20009,7 +20009,7 @@
           <a:ln/>
         </p:spPr>
         <p:txBody>
-          <a:bodyPr wrap="none" lIns="0" tIns="0" rIns="0" bIns="0" rtlCol="0" anchor="ctr"/>
+          <a:bodyPr wrap="none" lIns="0" tIns="0" rIns="0" bIns="0" rtlCol="0" anchor="t"/>
           <a:lstStyle/>
           <a:p>
             <a:pPr algn="l" indent="0" marL="0" eaLnBrk="1" latinLnBrk="0" hangingPunct="1">
@@ -20075,7 +20075,7 @@
           <a:ln/>
         </p:spPr>
         <p:txBody>
-          <a:bodyPr wrap="none" lIns="0" tIns="0" rIns="0" bIns="0" rtlCol="0" anchor="ctr"/>
+          <a:bodyPr wrap="none" lIns="0" tIns="0" rIns="0" bIns="0" rtlCol="0" anchor="t"/>
           <a:lstStyle/>
           <a:p>
             <a:pPr algn="l" indent="0" marL="0" eaLnBrk="1" latinLnBrk="0" hangingPunct="1">
@@ -20117,7 +20117,7 @@
           <a:ln/>
         </p:spPr>
         <p:txBody>
-          <a:bodyPr wrap="none" lIns="0" tIns="0" rIns="0" bIns="0" rtlCol="0" anchor="ctr"/>
+          <a:bodyPr wrap="none" lIns="0" tIns="0" rIns="0" bIns="0" rtlCol="0" anchor="t"/>
           <a:lstStyle/>
           <a:p>
             <a:pPr algn="l" indent="0" marL="0" eaLnBrk="1" latinLnBrk="0" hangingPunct="1">
@@ -20183,7 +20183,7 @@
           <a:ln/>
         </p:spPr>
         <p:txBody>
-          <a:bodyPr wrap="square" lIns="0" tIns="0" rIns="0" bIns="0" rtlCol="0" anchor="ctr"/>
+          <a:bodyPr wrap="square" lIns="0" tIns="0" rIns="0" bIns="0" rtlCol="0" anchor="t"/>
           <a:lstStyle/>
           <a:p>
             <a:pPr algn="l" indent="0" marL="0" eaLnBrk="1" latinLnBrk="0" hangingPunct="1">
@@ -20245,7 +20245,7 @@
           <a:ln/>
         </p:spPr>
         <p:txBody>
-          <a:bodyPr wrap="none" lIns="0" tIns="0" rIns="0" bIns="0" rtlCol="0" anchor="ctr"/>
+          <a:bodyPr wrap="none" lIns="0" tIns="0" rIns="0" bIns="0" rtlCol="0" anchor="t"/>
           <a:lstStyle/>
           <a:p>
             <a:pPr algn="l" indent="0" marL="0" eaLnBrk="1" latinLnBrk="0" hangingPunct="1">
@@ -20311,7 +20311,7 @@
           <a:ln/>
         </p:spPr>
         <p:txBody>
-          <a:bodyPr wrap="square" lIns="0" tIns="0" rIns="0" bIns="0" rtlCol="0" anchor="ctr"/>
+          <a:bodyPr wrap="square" lIns="0" tIns="0" rIns="0" bIns="0" rtlCol="0" anchor="t"/>
           <a:lstStyle/>
           <a:p>
             <a:pPr algn="l" indent="0" marL="0" eaLnBrk="1" latinLnBrk="0" hangingPunct="1">
@@ -20398,7 +20398,7 @@
           <a:ln/>
         </p:spPr>
         <p:txBody>
-          <a:bodyPr wrap="none" lIns="0" tIns="0" rIns="0" bIns="0" rtlCol="0" anchor="ctr"/>
+          <a:bodyPr wrap="none" lIns="0" tIns="0" rIns="0" bIns="0" rtlCol="0" anchor="t"/>
           <a:lstStyle/>
           <a:p>
             <a:pPr algn="l" indent="0" marL="0" eaLnBrk="1" latinLnBrk="0" hangingPunct="1">
@@ -20464,7 +20464,7 @@
           <a:ln/>
         </p:spPr>
         <p:txBody>
-          <a:bodyPr wrap="none" lIns="0" tIns="0" rIns="0" bIns="0" rtlCol="0" anchor="ctr"/>
+          <a:bodyPr wrap="none" lIns="0" tIns="0" rIns="0" bIns="0" rtlCol="0" anchor="t"/>
           <a:lstStyle/>
           <a:p>
             <a:pPr algn="l" indent="0" marL="0" eaLnBrk="1" latinLnBrk="0" hangingPunct="1">
@@ -20530,7 +20530,7 @@
           <a:ln/>
         </p:spPr>
         <p:txBody>
-          <a:bodyPr wrap="none" lIns="0" tIns="0" rIns="0" bIns="0" rtlCol="0" anchor="ctr"/>
+          <a:bodyPr wrap="none" lIns="0" tIns="0" rIns="0" bIns="0" rtlCol="0" anchor="t"/>
           <a:lstStyle/>
           <a:p>
             <a:pPr algn="l" indent="0" marL="0" eaLnBrk="1" latinLnBrk="0" hangingPunct="1">
@@ -20618,7 +20618,7 @@
           <a:ln/>
         </p:spPr>
         <p:txBody>
-          <a:bodyPr wrap="none" lIns="0" tIns="0" rIns="0" bIns="0" rtlCol="0" anchor="ctr"/>
+          <a:bodyPr wrap="none" lIns="0" tIns="0" rIns="0" bIns="0" rtlCol="0" anchor="t"/>
           <a:lstStyle/>
           <a:p>
             <a:pPr algn="l" indent="0" marL="0" eaLnBrk="1" latinLnBrk="0" hangingPunct="1">
@@ -20684,7 +20684,7 @@
           <a:ln/>
         </p:spPr>
         <p:txBody>
-          <a:bodyPr wrap="none" lIns="0" tIns="0" rIns="0" bIns="0" rtlCol="0" anchor="ctr"/>
+          <a:bodyPr wrap="none" lIns="0" tIns="0" rIns="0" bIns="0" rtlCol="0" anchor="t"/>
           <a:lstStyle/>
           <a:p>
             <a:pPr algn="l" indent="0" marL="0" eaLnBrk="1" latinLnBrk="0" hangingPunct="1">
@@ -20772,7 +20772,7 @@
           <a:ln/>
         </p:spPr>
         <p:txBody>
-          <a:bodyPr wrap="none" lIns="0" tIns="0" rIns="0" bIns="0" rtlCol="0" anchor="ctr"/>
+          <a:bodyPr wrap="none" lIns="0" tIns="0" rIns="0" bIns="0" rtlCol="0" anchor="t"/>
           <a:lstStyle/>
           <a:p>
             <a:pPr algn="l" indent="0" marL="0" eaLnBrk="1" latinLnBrk="0" hangingPunct="1">
@@ -20860,7 +20860,7 @@
           <a:ln/>
         </p:spPr>
         <p:txBody>
-          <a:bodyPr wrap="none" lIns="0" tIns="0" rIns="0" bIns="0" rtlCol="0" anchor="ctr"/>
+          <a:bodyPr wrap="none" lIns="0" tIns="0" rIns="0" bIns="0" rtlCol="0" anchor="t"/>
           <a:lstStyle/>
           <a:p>
             <a:pPr algn="l" indent="0" marL="0" eaLnBrk="1" latinLnBrk="0" hangingPunct="1">
@@ -20902,7 +20902,7 @@
           <a:ln/>
         </p:spPr>
         <p:txBody>
-          <a:bodyPr wrap="none" lIns="0" tIns="0" rIns="0" bIns="0" rtlCol="0" anchor="ctr"/>
+          <a:bodyPr wrap="none" lIns="0" tIns="0" rIns="0" bIns="0" rtlCol="0" anchor="t"/>
           <a:lstStyle/>
           <a:p>
             <a:pPr algn="l" indent="0" marL="0" eaLnBrk="1" latinLnBrk="0" hangingPunct="1">
@@ -20944,7 +20944,7 @@
           <a:ln/>
         </p:spPr>
         <p:txBody>
-          <a:bodyPr wrap="none" lIns="0" tIns="0" rIns="0" bIns="0" rtlCol="0" anchor="ctr"/>
+          <a:bodyPr wrap="none" lIns="0" tIns="0" rIns="0" bIns="0" rtlCol="0" anchor="t"/>
           <a:lstStyle/>
           <a:p>
             <a:pPr algn="l" indent="0" marL="0" eaLnBrk="1" latinLnBrk="0" hangingPunct="1">
@@ -21010,7 +21010,7 @@
           <a:ln/>
         </p:spPr>
         <p:txBody>
-          <a:bodyPr wrap="none" lIns="0" tIns="0" rIns="0" bIns="0" rtlCol="0" anchor="ctr"/>
+          <a:bodyPr wrap="none" lIns="0" tIns="0" rIns="0" bIns="0" rtlCol="0" anchor="t"/>
           <a:lstStyle/>
           <a:p>
             <a:pPr algn="l" indent="0" marL="0" eaLnBrk="1" latinLnBrk="0" hangingPunct="1">
@@ -21052,7 +21052,7 @@
           <a:ln/>
         </p:spPr>
         <p:txBody>
-          <a:bodyPr wrap="none" lIns="0" tIns="0" rIns="0" bIns="0" rtlCol="0" anchor="ctr"/>
+          <a:bodyPr wrap="none" lIns="0" tIns="0" rIns="0" bIns="0" rtlCol="0" anchor="t"/>
           <a:lstStyle/>
           <a:p>
             <a:pPr algn="l" indent="0" marL="0" eaLnBrk="1" latinLnBrk="0" hangingPunct="1">
@@ -21118,7 +21118,7 @@
           <a:ln/>
         </p:spPr>
         <p:txBody>
-          <a:bodyPr wrap="none" lIns="0" tIns="0" rIns="0" bIns="0" rtlCol="0" anchor="ctr"/>
+          <a:bodyPr wrap="none" lIns="0" tIns="0" rIns="0" bIns="0" rtlCol="0" anchor="t"/>
           <a:lstStyle/>
           <a:p>
             <a:pPr algn="l" indent="0" marL="0" eaLnBrk="1" latinLnBrk="0" hangingPunct="1">
@@ -21160,7 +21160,7 @@
           <a:ln/>
         </p:spPr>
         <p:txBody>
-          <a:bodyPr wrap="none" lIns="0" tIns="0" rIns="0" bIns="0" rtlCol="0" anchor="ctr"/>
+          <a:bodyPr wrap="none" lIns="0" tIns="0" rIns="0" bIns="0" rtlCol="0" anchor="t"/>
           <a:lstStyle/>
           <a:p>
             <a:pPr algn="l" indent="0" marL="0" eaLnBrk="1" latinLnBrk="0" hangingPunct="1">
@@ -21226,7 +21226,7 @@
           <a:ln/>
         </p:spPr>
         <p:txBody>
-          <a:bodyPr wrap="none" lIns="0" tIns="0" rIns="0" bIns="0" rtlCol="0" anchor="ctr"/>
+          <a:bodyPr wrap="none" lIns="0" tIns="0" rIns="0" bIns="0" rtlCol="0" anchor="t"/>
           <a:lstStyle/>
           <a:p>
             <a:pPr algn="l" indent="0" marL="0" eaLnBrk="1" latinLnBrk="0" hangingPunct="1">
@@ -21268,7 +21268,7 @@
           <a:ln/>
         </p:spPr>
         <p:txBody>
-          <a:bodyPr wrap="none" lIns="0" tIns="0" rIns="0" bIns="0" rtlCol="0" anchor="ctr"/>
+          <a:bodyPr wrap="none" lIns="0" tIns="0" rIns="0" bIns="0" rtlCol="0" anchor="t"/>
           <a:lstStyle/>
           <a:p>
             <a:pPr algn="l" indent="0" marL="0" eaLnBrk="1" latinLnBrk="0" hangingPunct="1">
@@ -21334,7 +21334,7 @@
           <a:ln/>
         </p:spPr>
         <p:txBody>
-          <a:bodyPr wrap="none" lIns="0" tIns="0" rIns="0" bIns="0" rtlCol="0" anchor="ctr"/>
+          <a:bodyPr wrap="none" lIns="0" tIns="0" rIns="0" bIns="0" rtlCol="0" anchor="t"/>
           <a:lstStyle/>
           <a:p>
             <a:pPr algn="l" indent="0" marL="0" eaLnBrk="1" latinLnBrk="0" hangingPunct="1">
@@ -21376,7 +21376,7 @@
           <a:ln/>
         </p:spPr>
         <p:txBody>
-          <a:bodyPr wrap="none" lIns="0" tIns="0" rIns="0" bIns="0" rtlCol="0" anchor="ctr"/>
+          <a:bodyPr wrap="none" lIns="0" tIns="0" rIns="0" bIns="0" rtlCol="0" anchor="t"/>
           <a:lstStyle/>
           <a:p>
             <a:pPr algn="l" indent="0" marL="0" eaLnBrk="1" latinLnBrk="0" hangingPunct="1">
@@ -21418,7 +21418,7 @@
           <a:ln/>
         </p:spPr>
         <p:txBody>
-          <a:bodyPr wrap="none" lIns="0" tIns="0" rIns="0" bIns="0" rtlCol="0" anchor="ctr"/>
+          <a:bodyPr wrap="none" lIns="0" tIns="0" rIns="0" bIns="0" rtlCol="0" anchor="t"/>
           <a:lstStyle/>
           <a:p>
             <a:pPr algn="l" indent="0" marL="0" eaLnBrk="1" latinLnBrk="0" hangingPunct="1">
@@ -21462,7 +21462,7 @@
           <a:ln/>
         </p:spPr>
         <p:txBody>
-          <a:bodyPr wrap="none" lIns="0" tIns="0" rIns="0" bIns="0" rtlCol="0" anchor="ctr"/>
+          <a:bodyPr wrap="none" lIns="0" tIns="0" rIns="0" bIns="0" rtlCol="0" anchor="t"/>
           <a:lstStyle/>
           <a:p>
             <a:pPr algn="r" indent="0" marL="0" eaLnBrk="1" latinLnBrk="0" hangingPunct="1">
@@ -21511,7 +21511,7 @@
           <a:ln/>
         </p:spPr>
         <p:txBody>
-          <a:bodyPr wrap="none" lIns="0" tIns="0" rIns="0" bIns="0" rtlCol="0" anchor="ctr"/>
+          <a:bodyPr wrap="none" lIns="0" tIns="0" rIns="0" bIns="0" rtlCol="0" anchor="t"/>
           <a:lstStyle/>
           <a:p>
             <a:pPr algn="l" indent="0" marL="0" eaLnBrk="1" latinLnBrk="0" hangingPunct="1">
@@ -21688,7 +21688,7 @@
           <a:ln/>
         </p:spPr>
         <p:txBody>
-          <a:bodyPr wrap="none" lIns="0" tIns="0" rIns="0" bIns="0" rtlCol="0" anchor="ctr"/>
+          <a:bodyPr wrap="none" lIns="0" tIns="0" rIns="0" bIns="0" rtlCol="0" anchor="t"/>
           <a:lstStyle/>
           <a:p>
             <a:pPr algn="l" indent="0" marL="0" eaLnBrk="1" latinLnBrk="0" hangingPunct="1">
@@ -21727,7 +21727,7 @@
           <a:ln/>
         </p:spPr>
         <p:txBody>
-          <a:bodyPr wrap="none" lIns="0" tIns="0" rIns="0" bIns="0" rtlCol="0" anchor="ctr"/>
+          <a:bodyPr wrap="none" lIns="0" tIns="0" rIns="0" bIns="0" rtlCol="0" anchor="t"/>
           <a:lstStyle/>
           <a:p>
             <a:pPr algn="l" indent="0" marL="0" eaLnBrk="1" latinLnBrk="0" hangingPunct="1">
@@ -21769,7 +21769,7 @@
           <a:ln/>
         </p:spPr>
         <p:txBody>
-          <a:bodyPr wrap="none" lIns="0" tIns="0" rIns="0" bIns="0" rtlCol="0" anchor="ctr"/>
+          <a:bodyPr wrap="none" lIns="0" tIns="0" rIns="0" bIns="0" rtlCol="0" anchor="t"/>
           <a:lstStyle/>
           <a:p>
             <a:pPr algn="l" indent="0" marL="0" eaLnBrk="1" latinLnBrk="0" hangingPunct="1">
@@ -21862,7 +21862,7 @@
           <a:ln/>
         </p:spPr>
         <p:txBody>
-          <a:bodyPr wrap="none" lIns="0" tIns="0" rIns="0" bIns="0" rtlCol="0" anchor="ctr"/>
+          <a:bodyPr wrap="none" lIns="0" tIns="0" rIns="0" bIns="0" rtlCol="0" anchor="t"/>
           <a:lstStyle/>
           <a:p>
             <a:pPr algn="l" indent="0" marL="0" eaLnBrk="1" latinLnBrk="0" hangingPunct="1">
@@ -21958,7 +21958,7 @@
           <a:ln/>
         </p:spPr>
         <p:txBody>
-          <a:bodyPr wrap="none" lIns="0" tIns="0" rIns="0" bIns="0" rtlCol="0" anchor="ctr"/>
+          <a:bodyPr wrap="none" lIns="0" tIns="0" rIns="0" bIns="0" rtlCol="0" anchor="t"/>
           <a:lstStyle/>
           <a:p>
             <a:pPr algn="l" indent="0" marL="0" eaLnBrk="1" latinLnBrk="0" hangingPunct="1">
@@ -22000,7 +22000,7 @@
           <a:ln/>
         </p:spPr>
         <p:txBody>
-          <a:bodyPr wrap="none" lIns="0" tIns="0" rIns="0" bIns="0" rtlCol="0" anchor="ctr"/>
+          <a:bodyPr wrap="none" lIns="0" tIns="0" rIns="0" bIns="0" rtlCol="0" anchor="t"/>
           <a:lstStyle/>
           <a:p>
             <a:pPr algn="l" indent="0" marL="0" eaLnBrk="1" latinLnBrk="0" hangingPunct="1">
@@ -22042,7 +22042,7 @@
           <a:ln/>
         </p:spPr>
         <p:txBody>
-          <a:bodyPr wrap="none" lIns="0" tIns="0" rIns="0" bIns="0" rtlCol="0" anchor="ctr"/>
+          <a:bodyPr wrap="none" lIns="0" tIns="0" rIns="0" bIns="0" rtlCol="0" anchor="t"/>
           <a:lstStyle/>
           <a:p>
             <a:pPr algn="l" indent="0" marL="0" eaLnBrk="1" latinLnBrk="0" hangingPunct="1">
@@ -22084,7 +22084,7 @@
           <a:ln/>
         </p:spPr>
         <p:txBody>
-          <a:bodyPr wrap="none" lIns="0" tIns="0" rIns="0" bIns="0" rtlCol="0" anchor="ctr"/>
+          <a:bodyPr wrap="none" lIns="0" tIns="0" rIns="0" bIns="0" rtlCol="0" anchor="t"/>
           <a:lstStyle/>
           <a:p>
             <a:pPr algn="l" indent="0" marL="0" eaLnBrk="1" latinLnBrk="0" hangingPunct="1">
@@ -22126,7 +22126,7 @@
           <a:ln/>
         </p:spPr>
         <p:txBody>
-          <a:bodyPr wrap="none" lIns="0" tIns="0" rIns="0" bIns="0" rtlCol="0" anchor="ctr"/>
+          <a:bodyPr wrap="none" lIns="0" tIns="0" rIns="0" bIns="0" rtlCol="0" anchor="t"/>
           <a:lstStyle/>
           <a:p>
             <a:pPr algn="l" indent="0" marL="0" eaLnBrk="1" latinLnBrk="0" hangingPunct="1">
@@ -22168,7 +22168,7 @@
           <a:ln/>
         </p:spPr>
         <p:txBody>
-          <a:bodyPr wrap="none" lIns="0" tIns="0" rIns="0" bIns="0" rtlCol="0" anchor="ctr"/>
+          <a:bodyPr wrap="none" lIns="0" tIns="0" rIns="0" bIns="0" rtlCol="0" anchor="t"/>
           <a:lstStyle/>
           <a:p>
             <a:pPr algn="l" indent="0" marL="0" eaLnBrk="1" latinLnBrk="0" hangingPunct="1">
@@ -22210,7 +22210,7 @@
           <a:ln/>
         </p:spPr>
         <p:txBody>
-          <a:bodyPr wrap="none" lIns="0" tIns="0" rIns="0" bIns="0" rtlCol="0" anchor="ctr"/>
+          <a:bodyPr wrap="none" lIns="0" tIns="0" rIns="0" bIns="0" rtlCol="0" anchor="t"/>
           <a:lstStyle/>
           <a:p>
             <a:pPr algn="l" indent="0" marL="0" eaLnBrk="1" latinLnBrk="0" hangingPunct="1">
@@ -22252,7 +22252,7 @@
           <a:ln/>
         </p:spPr>
         <p:txBody>
-          <a:bodyPr wrap="none" lIns="0" tIns="0" rIns="0" bIns="0" rtlCol="0" anchor="ctr"/>
+          <a:bodyPr wrap="none" lIns="0" tIns="0" rIns="0" bIns="0" rtlCol="0" anchor="t"/>
           <a:lstStyle/>
           <a:p>
             <a:pPr algn="l" indent="0" marL="0" eaLnBrk="1" latinLnBrk="0" hangingPunct="1">
@@ -22294,7 +22294,7 @@
           <a:ln/>
         </p:spPr>
         <p:txBody>
-          <a:bodyPr wrap="none" lIns="0" tIns="0" rIns="0" bIns="0" rtlCol="0" anchor="ctr"/>
+          <a:bodyPr wrap="none" lIns="0" tIns="0" rIns="0" bIns="0" rtlCol="0" anchor="t"/>
           <a:lstStyle/>
           <a:p>
             <a:pPr algn="l" indent="0" marL="0" eaLnBrk="1" latinLnBrk="0" hangingPunct="1">
@@ -22336,7 +22336,7 @@
           <a:ln/>
         </p:spPr>
         <p:txBody>
-          <a:bodyPr wrap="none" lIns="0" tIns="0" rIns="0" bIns="0" rtlCol="0" anchor="ctr"/>
+          <a:bodyPr wrap="none" lIns="0" tIns="0" rIns="0" bIns="0" rtlCol="0" anchor="t"/>
           <a:lstStyle/>
           <a:p>
             <a:pPr algn="l" indent="0" marL="0" eaLnBrk="1" latinLnBrk="0" hangingPunct="1">
@@ -22405,7 +22405,7 @@
           <a:ln/>
         </p:spPr>
         <p:txBody>
-          <a:bodyPr wrap="none" lIns="0" tIns="0" rIns="0" bIns="0" rtlCol="0" anchor="ctr"/>
+          <a:bodyPr wrap="none" lIns="0" tIns="0" rIns="0" bIns="0" rtlCol="0" anchor="t"/>
           <a:lstStyle/>
           <a:p>
             <a:pPr algn="l" indent="0" marL="0" eaLnBrk="1" latinLnBrk="0" hangingPunct="1">
@@ -22447,7 +22447,7 @@
           <a:ln/>
         </p:spPr>
         <p:txBody>
-          <a:bodyPr wrap="square" lIns="0" tIns="0" rIns="0" bIns="0" rtlCol="0" anchor="ctr"/>
+          <a:bodyPr wrap="square" lIns="0" tIns="0" rIns="0" bIns="0" rtlCol="0" anchor="t"/>
           <a:lstStyle/>
           <a:p>
             <a:pPr algn="just" indent="0" marL="0" eaLnBrk="1" latinLnBrk="0" hangingPunct="1">
@@ -22516,7 +22516,7 @@
           <a:ln/>
         </p:spPr>
         <p:txBody>
-          <a:bodyPr wrap="none" lIns="0" tIns="0" rIns="0" bIns="0" rtlCol="0" anchor="ctr"/>
+          <a:bodyPr wrap="none" lIns="0" tIns="0" rIns="0" bIns="0" rtlCol="0" anchor="t"/>
           <a:lstStyle/>
           <a:p>
             <a:pPr algn="l" indent="0" marL="0" eaLnBrk="1" latinLnBrk="0" hangingPunct="1">
@@ -22558,7 +22558,7 @@
           <a:ln/>
         </p:spPr>
         <p:txBody>
-          <a:bodyPr wrap="square" lIns="0" tIns="0" rIns="0" bIns="0" rtlCol="0" anchor="ctr"/>
+          <a:bodyPr wrap="square" lIns="0" tIns="0" rIns="0" bIns="0" rtlCol="0" anchor="t"/>
           <a:lstStyle/>
           <a:p>
             <a:pPr algn="just" indent="0" marL="0" eaLnBrk="1" latinLnBrk="0" hangingPunct="1">
@@ -22627,7 +22627,7 @@
           <a:ln/>
         </p:spPr>
         <p:txBody>
-          <a:bodyPr wrap="none" lIns="0" tIns="0" rIns="0" bIns="0" rtlCol="0" anchor="ctr"/>
+          <a:bodyPr wrap="none" lIns="0" tIns="0" rIns="0" bIns="0" rtlCol="0" anchor="t"/>
           <a:lstStyle/>
           <a:p>
             <a:pPr algn="l" indent="0" marL="0" eaLnBrk="1" latinLnBrk="0" hangingPunct="1">
@@ -22669,7 +22669,7 @@
           <a:ln/>
         </p:spPr>
         <p:txBody>
-          <a:bodyPr wrap="square" lIns="0" tIns="0" rIns="0" bIns="0" rtlCol="0" anchor="ctr"/>
+          <a:bodyPr wrap="square" lIns="0" tIns="0" rIns="0" bIns="0" rtlCol="0" anchor="t"/>
           <a:lstStyle/>
           <a:p>
             <a:pPr algn="just" indent="0" marL="0" eaLnBrk="1" latinLnBrk="0" hangingPunct="1">
@@ -22711,7 +22711,7 @@
           <a:ln/>
         </p:spPr>
         <p:txBody>
-          <a:bodyPr wrap="none" lIns="0" tIns="0" rIns="0" bIns="0" rtlCol="0" anchor="ctr"/>
+          <a:bodyPr wrap="none" lIns="0" tIns="0" rIns="0" bIns="0" rtlCol="0" anchor="t"/>
           <a:lstStyle/>
           <a:p>
             <a:pPr algn="l" indent="0" marL="0" eaLnBrk="1" latinLnBrk="0" hangingPunct="1">
@@ -22753,7 +22753,7 @@
           <a:ln/>
         </p:spPr>
         <p:txBody>
-          <a:bodyPr wrap="none" lIns="0" tIns="0" rIns="0" bIns="0" rtlCol="0" anchor="ctr"/>
+          <a:bodyPr wrap="none" lIns="0" tIns="0" rIns="0" bIns="0" rtlCol="0" anchor="t"/>
           <a:lstStyle/>
           <a:p>
             <a:pPr algn="r" indent="0" marL="0" eaLnBrk="1" latinLnBrk="0" hangingPunct="1">
@@ -22795,7 +22795,7 @@
           <a:ln/>
         </p:spPr>
         <p:txBody>
-          <a:bodyPr wrap="none" lIns="0" tIns="0" rIns="0" bIns="0" rtlCol="0" anchor="ctr"/>
+          <a:bodyPr wrap="none" lIns="0" tIns="0" rIns="0" bIns="0" rtlCol="0" anchor="t"/>
           <a:lstStyle/>
           <a:p>
             <a:pPr algn="l" indent="0" marL="0" eaLnBrk="1" latinLnBrk="0" hangingPunct="1">
@@ -22977,7 +22977,7 @@
           <a:ln/>
         </p:spPr>
         <p:txBody>
-          <a:bodyPr wrap="none" lIns="0" tIns="0" rIns="0" bIns="0" rtlCol="0" anchor="ctr"/>
+          <a:bodyPr wrap="none" lIns="0" tIns="0" rIns="0" bIns="0" rtlCol="0" anchor="t"/>
           <a:lstStyle/>
           <a:p>
             <a:pPr algn="l" indent="0" marL="0" eaLnBrk="1" latinLnBrk="0" hangingPunct="1">
@@ -23016,7 +23016,7 @@
           <a:ln/>
         </p:spPr>
         <p:txBody>
-          <a:bodyPr wrap="none" lIns="0" tIns="0" rIns="0" bIns="0" rtlCol="0" anchor="ctr"/>
+          <a:bodyPr wrap="none" lIns="0" tIns="0" rIns="0" bIns="0" rtlCol="0" anchor="t"/>
           <a:lstStyle/>
           <a:p>
             <a:pPr algn="l" indent="0" marL="0" eaLnBrk="1" latinLnBrk="0" hangingPunct="1">
@@ -23058,7 +23058,7 @@
           <a:ln/>
         </p:spPr>
         <p:txBody>
-          <a:bodyPr wrap="none" lIns="0" tIns="0" rIns="0" bIns="0" rtlCol="0" anchor="ctr"/>
+          <a:bodyPr wrap="none" lIns="0" tIns="0" rIns="0" bIns="0" rtlCol="0" anchor="t"/>
           <a:lstStyle/>
           <a:p>
             <a:pPr algn="l" indent="0" marL="0" eaLnBrk="1" latinLnBrk="0" hangingPunct="1">
@@ -23151,7 +23151,7 @@
           <a:ln/>
         </p:spPr>
         <p:txBody>
-          <a:bodyPr wrap="none" lIns="0" tIns="0" rIns="0" bIns="0" rtlCol="0" anchor="ctr"/>
+          <a:bodyPr wrap="none" lIns="0" tIns="0" rIns="0" bIns="0" rtlCol="0" anchor="t"/>
           <a:lstStyle/>
           <a:p>
             <a:pPr algn="l" indent="0" marL="0" eaLnBrk="1" latinLnBrk="0" hangingPunct="1">
@@ -23222,7 +23222,7 @@
           <a:ln/>
         </p:spPr>
         <p:txBody>
-          <a:bodyPr wrap="none" lIns="0" tIns="0" rIns="0" bIns="0" rtlCol="0" anchor="ctr"/>
+          <a:bodyPr wrap="none" lIns="0" tIns="0" rIns="0" bIns="0" rtlCol="0" anchor="t"/>
           <a:lstStyle/>
           <a:p>
             <a:pPr algn="l" indent="0" marL="0" eaLnBrk="1" latinLnBrk="0" hangingPunct="1">
@@ -23271,7 +23271,7 @@
           <a:ln/>
         </p:spPr>
         <p:txBody>
-          <a:bodyPr wrap="none" lIns="0" tIns="0" rIns="0" bIns="0" rtlCol="0" anchor="ctr"/>
+          <a:bodyPr wrap="none" lIns="0" tIns="0" rIns="0" bIns="0" rtlCol="0" anchor="t"/>
           <a:lstStyle/>
           <a:p>
             <a:pPr algn="just" marL="243840" indent="-243840" eaLnBrk="1" latinLnBrk="0" hangingPunct="1">
@@ -23314,7 +23314,7 @@
           <a:ln/>
         </p:spPr>
         <p:txBody>
-          <a:bodyPr wrap="none" lIns="0" tIns="0" rIns="0" bIns="0" rtlCol="0" anchor="ctr"/>
+          <a:bodyPr wrap="none" lIns="0" tIns="0" rIns="0" bIns="0" rtlCol="0" anchor="t"/>
           <a:lstStyle/>
           <a:p>
             <a:pPr algn="just" marL="243840" indent="-243840" eaLnBrk="1" latinLnBrk="0" hangingPunct="1">
@@ -23357,7 +23357,7 @@
           <a:ln/>
         </p:spPr>
         <p:txBody>
-          <a:bodyPr wrap="none" lIns="0" tIns="0" rIns="0" bIns="0" rtlCol="0" anchor="ctr"/>
+          <a:bodyPr wrap="none" lIns="0" tIns="0" rIns="0" bIns="0" rtlCol="0" anchor="t"/>
           <a:lstStyle/>
           <a:p>
             <a:pPr algn="just" marL="243840" indent="-243840" eaLnBrk="1" latinLnBrk="0" hangingPunct="1">
@@ -23400,7 +23400,7 @@
           <a:ln/>
         </p:spPr>
         <p:txBody>
-          <a:bodyPr wrap="none" lIns="0" tIns="0" rIns="0" bIns="0" rtlCol="0" anchor="ctr"/>
+          <a:bodyPr wrap="none" lIns="0" tIns="0" rIns="0" bIns="0" rtlCol="0" anchor="t"/>
           <a:lstStyle/>
           <a:p>
             <a:pPr algn="l" indent="0" marL="0" eaLnBrk="1" latinLnBrk="0" hangingPunct="1">
@@ -23471,7 +23471,7 @@
           <a:ln/>
         </p:spPr>
         <p:txBody>
-          <a:bodyPr wrap="none" lIns="0" tIns="0" rIns="0" bIns="0" rtlCol="0" anchor="ctr"/>
+          <a:bodyPr wrap="none" lIns="0" tIns="0" rIns="0" bIns="0" rtlCol="0" anchor="t"/>
           <a:lstStyle/>
           <a:p>
             <a:pPr algn="l" indent="0" marL="0" eaLnBrk="1" latinLnBrk="0" hangingPunct="1">
@@ -23520,7 +23520,7 @@
           <a:ln/>
         </p:spPr>
         <p:txBody>
-          <a:bodyPr wrap="none" lIns="0" tIns="0" rIns="0" bIns="0" rtlCol="0" anchor="ctr"/>
+          <a:bodyPr wrap="none" lIns="0" tIns="0" rIns="0" bIns="0" rtlCol="0" anchor="t"/>
           <a:lstStyle/>
           <a:p>
             <a:pPr algn="just" marL="243840" indent="-243840" eaLnBrk="1" latinLnBrk="0" hangingPunct="1">
@@ -23563,7 +23563,7 @@
           <a:ln/>
         </p:spPr>
         <p:txBody>
-          <a:bodyPr wrap="none" lIns="0" tIns="0" rIns="0" bIns="0" rtlCol="0" anchor="ctr"/>
+          <a:bodyPr wrap="none" lIns="0" tIns="0" rIns="0" bIns="0" rtlCol="0" anchor="t"/>
           <a:lstStyle/>
           <a:p>
             <a:pPr algn="just" marL="243840" indent="-243840" eaLnBrk="1" latinLnBrk="0" hangingPunct="1">
@@ -23606,7 +23606,7 @@
           <a:ln/>
         </p:spPr>
         <p:txBody>
-          <a:bodyPr wrap="none" lIns="0" tIns="0" rIns="0" bIns="0" rtlCol="0" anchor="ctr"/>
+          <a:bodyPr wrap="none" lIns="0" tIns="0" rIns="0" bIns="0" rtlCol="0" anchor="t"/>
           <a:lstStyle/>
           <a:p>
             <a:pPr algn="just" marL="243840" indent="-243840" eaLnBrk="1" latinLnBrk="0" hangingPunct="1">
@@ -23649,7 +23649,7 @@
           <a:ln/>
         </p:spPr>
         <p:txBody>
-          <a:bodyPr wrap="none" lIns="0" tIns="0" rIns="0" bIns="0" rtlCol="0" anchor="ctr"/>
+          <a:bodyPr wrap="none" lIns="0" tIns="0" rIns="0" bIns="0" rtlCol="0" anchor="t"/>
           <a:lstStyle/>
           <a:p>
             <a:pPr algn="l" indent="0" marL="0" eaLnBrk="1" latinLnBrk="0" hangingPunct="1">
@@ -23720,7 +23720,7 @@
           <a:ln/>
         </p:spPr>
         <p:txBody>
-          <a:bodyPr wrap="none" lIns="0" tIns="0" rIns="0" bIns="0" rtlCol="0" anchor="ctr"/>
+          <a:bodyPr wrap="none" lIns="0" tIns="0" rIns="0" bIns="0" rtlCol="0" anchor="t"/>
           <a:lstStyle/>
           <a:p>
             <a:pPr algn="l" indent="0" marL="0" eaLnBrk="1" latinLnBrk="0" hangingPunct="1">
@@ -23769,7 +23769,7 @@
           <a:ln/>
         </p:spPr>
         <p:txBody>
-          <a:bodyPr wrap="none" lIns="0" tIns="0" rIns="0" bIns="0" rtlCol="0" anchor="ctr"/>
+          <a:bodyPr wrap="none" lIns="0" tIns="0" rIns="0" bIns="0" rtlCol="0" anchor="t"/>
           <a:lstStyle/>
           <a:p>
             <a:pPr algn="just" marL="243840" indent="-243840" eaLnBrk="1" latinLnBrk="0" hangingPunct="1">
@@ -23812,7 +23812,7 @@
           <a:ln/>
         </p:spPr>
         <p:txBody>
-          <a:bodyPr wrap="none" lIns="0" tIns="0" rIns="0" bIns="0" rtlCol="0" anchor="ctr"/>
+          <a:bodyPr wrap="none" lIns="0" tIns="0" rIns="0" bIns="0" rtlCol="0" anchor="t"/>
           <a:lstStyle/>
           <a:p>
             <a:pPr algn="just" marL="243840" indent="-243840" eaLnBrk="1" latinLnBrk="0" hangingPunct="1">
@@ -23855,7 +23855,7 @@
           <a:ln/>
         </p:spPr>
         <p:txBody>
-          <a:bodyPr wrap="none" lIns="0" tIns="0" rIns="0" bIns="0" rtlCol="0" anchor="ctr"/>
+          <a:bodyPr wrap="none" lIns="0" tIns="0" rIns="0" bIns="0" rtlCol="0" anchor="t"/>
           <a:lstStyle/>
           <a:p>
             <a:pPr algn="just" marL="243840" indent="-243840" eaLnBrk="1" latinLnBrk="0" hangingPunct="1">
@@ -23898,7 +23898,7 @@
           <a:ln/>
         </p:spPr>
         <p:txBody>
-          <a:bodyPr wrap="none" lIns="0" tIns="0" rIns="0" bIns="0" rtlCol="0" anchor="ctr"/>
+          <a:bodyPr wrap="none" lIns="0" tIns="0" rIns="0" bIns="0" rtlCol="0" anchor="t"/>
           <a:lstStyle/>
           <a:p>
             <a:pPr algn="l" indent="0" marL="0" eaLnBrk="1" latinLnBrk="0" hangingPunct="1">
@@ -23969,7 +23969,7 @@
           <a:ln/>
         </p:spPr>
         <p:txBody>
-          <a:bodyPr wrap="none" lIns="0" tIns="0" rIns="0" bIns="0" rtlCol="0" anchor="ctr"/>
+          <a:bodyPr wrap="none" lIns="0" tIns="0" rIns="0" bIns="0" rtlCol="0" anchor="t"/>
           <a:lstStyle/>
           <a:p>
             <a:pPr algn="l" indent="0" marL="0" eaLnBrk="1" latinLnBrk="0" hangingPunct="1">
@@ -24018,7 +24018,7 @@
           <a:ln/>
         </p:spPr>
         <p:txBody>
-          <a:bodyPr wrap="none" lIns="0" tIns="0" rIns="0" bIns="0" rtlCol="0" anchor="ctr"/>
+          <a:bodyPr wrap="none" lIns="0" tIns="0" rIns="0" bIns="0" rtlCol="0" anchor="t"/>
           <a:lstStyle/>
           <a:p>
             <a:pPr algn="just" marL="243840" indent="-243840" eaLnBrk="1" latinLnBrk="0" hangingPunct="1">
@@ -24061,7 +24061,7 @@
           <a:ln/>
         </p:spPr>
         <p:txBody>
-          <a:bodyPr wrap="none" lIns="0" tIns="0" rIns="0" bIns="0" rtlCol="0" anchor="ctr"/>
+          <a:bodyPr wrap="none" lIns="0" tIns="0" rIns="0" bIns="0" rtlCol="0" anchor="t"/>
           <a:lstStyle/>
           <a:p>
             <a:pPr algn="just" marL="243840" indent="-243840" eaLnBrk="1" latinLnBrk="0" hangingPunct="1">
@@ -24104,7 +24104,7 @@
           <a:ln/>
         </p:spPr>
         <p:txBody>
-          <a:bodyPr wrap="none" lIns="0" tIns="0" rIns="0" bIns="0" rtlCol="0" anchor="ctr"/>
+          <a:bodyPr wrap="none" lIns="0" tIns="0" rIns="0" bIns="0" rtlCol="0" anchor="t"/>
           <a:lstStyle/>
           <a:p>
             <a:pPr algn="just" marL="243840" indent="-243840" eaLnBrk="1" latinLnBrk="0" hangingPunct="1">
@@ -24147,7 +24147,7 @@
           <a:ln/>
         </p:spPr>
         <p:txBody>
-          <a:bodyPr wrap="none" lIns="0" tIns="0" rIns="0" bIns="0" rtlCol="0" anchor="ctr"/>
+          <a:bodyPr wrap="none" lIns="0" tIns="0" rIns="0" bIns="0" rtlCol="0" anchor="t"/>
           <a:lstStyle/>
           <a:p>
             <a:pPr algn="l" indent="0" marL="0" eaLnBrk="1" latinLnBrk="0" hangingPunct="1">
@@ -24189,7 +24189,7 @@
           <a:ln/>
         </p:spPr>
         <p:txBody>
-          <a:bodyPr wrap="none" lIns="0" tIns="0" rIns="0" bIns="0" rtlCol="0" anchor="ctr"/>
+          <a:bodyPr wrap="none" lIns="0" tIns="0" rIns="0" bIns="0" rtlCol="0" anchor="t"/>
           <a:lstStyle/>
           <a:p>
             <a:pPr algn="l" indent="0" marL="0" eaLnBrk="1" latinLnBrk="0" hangingPunct="1">
@@ -24231,7 +24231,7 @@
           <a:ln/>
         </p:spPr>
         <p:txBody>
-          <a:bodyPr wrap="none" lIns="0" tIns="0" rIns="0" bIns="0" rtlCol="0" anchor="ctr"/>
+          <a:bodyPr wrap="none" lIns="0" tIns="0" rIns="0" bIns="0" rtlCol="0" anchor="t"/>
           <a:lstStyle/>
           <a:p>
             <a:pPr algn="l" indent="0" marL="0" eaLnBrk="1" latinLnBrk="0" hangingPunct="1">
@@ -24386,7 +24386,7 @@
           <a:ln/>
         </p:spPr>
         <p:txBody>
-          <a:bodyPr wrap="none" lIns="0" tIns="0" rIns="0" bIns="0" rtlCol="0" anchor="ctr"/>
+          <a:bodyPr wrap="none" lIns="0" tIns="0" rIns="0" bIns="0" rtlCol="0" anchor="t"/>
           <a:lstStyle/>
           <a:p>
             <a:pPr algn="ctr" indent="0" marL="0" eaLnBrk="1" latinLnBrk="0" hangingPunct="1">
@@ -24455,7 +24455,7 @@
           <a:ln/>
         </p:spPr>
         <p:txBody>
-          <a:bodyPr wrap="none" lIns="0" tIns="0" rIns="0" bIns="0" rtlCol="0" anchor="ctr"/>
+          <a:bodyPr wrap="none" lIns="0" tIns="0" rIns="0" bIns="0" rtlCol="0" anchor="t"/>
           <a:lstStyle/>
           <a:p>
             <a:pPr algn="ctr" indent="0" marL="0" eaLnBrk="1" latinLnBrk="0" hangingPunct="1">
@@ -24497,7 +24497,7 @@
           <a:ln/>
         </p:spPr>
         <p:txBody>
-          <a:bodyPr wrap="none" lIns="0" tIns="0" rIns="0" bIns="0" rtlCol="0" anchor="ctr"/>
+          <a:bodyPr wrap="none" lIns="0" tIns="0" rIns="0" bIns="0" rtlCol="0" anchor="t"/>
           <a:lstStyle/>
           <a:p>
             <a:pPr algn="ctr" indent="0" marL="0" eaLnBrk="1" latinLnBrk="0" hangingPunct="1">
@@ -24652,7 +24652,7 @@
           <a:ln/>
         </p:spPr>
         <p:txBody>
-          <a:bodyPr wrap="none" lIns="0" tIns="0" rIns="0" bIns="0" rtlCol="0" anchor="ctr"/>
+          <a:bodyPr wrap="none" lIns="0" tIns="0" rIns="0" bIns="0" rtlCol="0" anchor="t"/>
           <a:lstStyle/>
           <a:p>
             <a:pPr algn="l" indent="0" marL="0" eaLnBrk="1" latinLnBrk="0" hangingPunct="1">
@@ -24691,7 +24691,7 @@
           <a:ln/>
         </p:spPr>
         <p:txBody>
-          <a:bodyPr wrap="none" lIns="0" tIns="0" rIns="0" bIns="0" rtlCol="0" anchor="ctr"/>
+          <a:bodyPr wrap="none" lIns="0" tIns="0" rIns="0" bIns="0" rtlCol="0" anchor="t"/>
           <a:lstStyle/>
           <a:p>
             <a:pPr algn="l" indent="0" marL="0" eaLnBrk="1" latinLnBrk="0" hangingPunct="1">
@@ -24733,7 +24733,7 @@
           <a:ln/>
         </p:spPr>
         <p:txBody>
-          <a:bodyPr wrap="none" lIns="0" tIns="0" rIns="0" bIns="0" rtlCol="0" anchor="ctr"/>
+          <a:bodyPr wrap="none" lIns="0" tIns="0" rIns="0" bIns="0" rtlCol="0" anchor="t"/>
           <a:lstStyle/>
           <a:p>
             <a:pPr algn="l" indent="0" marL="0" eaLnBrk="1" latinLnBrk="0" hangingPunct="1">
@@ -24826,7 +24826,7 @@
           <a:ln/>
         </p:spPr>
         <p:txBody>
-          <a:bodyPr wrap="none" lIns="0" tIns="0" rIns="0" bIns="0" rtlCol="0" anchor="ctr"/>
+          <a:bodyPr wrap="none" lIns="0" tIns="0" rIns="0" bIns="0" rtlCol="0" anchor="t"/>
           <a:lstStyle/>
           <a:p>
             <a:pPr algn="l" indent="0" marL="0" eaLnBrk="1" latinLnBrk="0" hangingPunct="1">
@@ -24922,7 +24922,7 @@
           <a:ln/>
         </p:spPr>
         <p:txBody>
-          <a:bodyPr wrap="none" lIns="0" tIns="0" rIns="0" bIns="0" rtlCol="0" anchor="ctr"/>
+          <a:bodyPr wrap="none" lIns="0" tIns="0" rIns="0" bIns="0" rtlCol="0" anchor="t"/>
           <a:lstStyle/>
           <a:p>
             <a:pPr algn="l" indent="0" marL="0" eaLnBrk="1" latinLnBrk="0" hangingPunct="1">
@@ -24964,7 +24964,7 @@
           <a:ln/>
         </p:spPr>
         <p:txBody>
-          <a:bodyPr wrap="square" lIns="0" tIns="0" rIns="0" bIns="0" rtlCol="0" anchor="ctr"/>
+          <a:bodyPr wrap="square" lIns="0" tIns="0" rIns="0" bIns="0" rtlCol="0" anchor="t"/>
           <a:lstStyle/>
           <a:p>
             <a:pPr algn="just" marL="243840" indent="-243840" eaLnBrk="1" latinLnBrk="0" hangingPunct="1">
@@ -25007,7 +25007,7 @@
           <a:ln/>
         </p:spPr>
         <p:txBody>
-          <a:bodyPr wrap="square" lIns="0" tIns="0" rIns="0" bIns="0" rtlCol="0" anchor="ctr"/>
+          <a:bodyPr wrap="square" lIns="0" tIns="0" rIns="0" bIns="0" rtlCol="0" anchor="t"/>
           <a:lstStyle/>
           <a:p>
             <a:pPr algn="just" marL="243840" indent="-243840" eaLnBrk="1" latinLnBrk="0" hangingPunct="1">
@@ -25050,7 +25050,7 @@
           <a:ln/>
         </p:spPr>
         <p:txBody>
-          <a:bodyPr wrap="square" lIns="0" tIns="0" rIns="0" bIns="0" rtlCol="0" anchor="ctr"/>
+          <a:bodyPr wrap="square" lIns="0" tIns="0" rIns="0" bIns="0" rtlCol="0" anchor="t"/>
           <a:lstStyle/>
           <a:p>
             <a:pPr algn="just" marL="243840" indent="-243840" eaLnBrk="1" latinLnBrk="0" hangingPunct="1">
@@ -25093,7 +25093,7 @@
           <a:ln/>
         </p:spPr>
         <p:txBody>
-          <a:bodyPr wrap="square" lIns="0" tIns="0" rIns="0" bIns="0" rtlCol="0" anchor="ctr"/>
+          <a:bodyPr wrap="square" lIns="0" tIns="0" rIns="0" bIns="0" rtlCol="0" anchor="t"/>
           <a:lstStyle/>
           <a:p>
             <a:pPr algn="just" marL="243840" indent="-243840" eaLnBrk="1" latinLnBrk="0" hangingPunct="1">
@@ -25190,7 +25190,7 @@
           <a:ln/>
         </p:spPr>
         <p:txBody>
-          <a:bodyPr wrap="none" lIns="0" tIns="0" rIns="0" bIns="0" rtlCol="0" anchor="ctr"/>
+          <a:bodyPr wrap="none" lIns="0" tIns="0" rIns="0" bIns="0" rtlCol="0" anchor="t"/>
           <a:lstStyle/>
           <a:p>
             <a:pPr algn="l" indent="0" marL="0" eaLnBrk="1" latinLnBrk="0" hangingPunct="1">
@@ -25232,7 +25232,7 @@
           <a:ln/>
         </p:spPr>
         <p:txBody>
-          <a:bodyPr wrap="square" lIns="0" tIns="0" rIns="0" bIns="0" rtlCol="0" anchor="ctr"/>
+          <a:bodyPr wrap="square" lIns="0" tIns="0" rIns="0" bIns="0" rtlCol="0" anchor="t"/>
           <a:lstStyle/>
           <a:p>
             <a:pPr algn="just" marL="243840" indent="-243840" eaLnBrk="1" latinLnBrk="0" hangingPunct="1">
@@ -25275,7 +25275,7 @@
           <a:ln/>
         </p:spPr>
         <p:txBody>
-          <a:bodyPr wrap="square" lIns="0" tIns="0" rIns="0" bIns="0" rtlCol="0" anchor="ctr"/>
+          <a:bodyPr wrap="square" lIns="0" tIns="0" rIns="0" bIns="0" rtlCol="0" anchor="t"/>
           <a:lstStyle/>
           <a:p>
             <a:pPr algn="just" marL="243840" indent="-243840" eaLnBrk="1" latinLnBrk="0" hangingPunct="1">
@@ -25318,7 +25318,7 @@
           <a:ln/>
         </p:spPr>
         <p:txBody>
-          <a:bodyPr wrap="square" lIns="0" tIns="0" rIns="0" bIns="0" rtlCol="0" anchor="ctr"/>
+          <a:bodyPr wrap="square" lIns="0" tIns="0" rIns="0" bIns="0" rtlCol="0" anchor="t"/>
           <a:lstStyle/>
           <a:p>
             <a:pPr algn="just" marL="243840" indent="-243840" eaLnBrk="1" latinLnBrk="0" hangingPunct="1">
@@ -25361,7 +25361,7 @@
           <a:ln/>
         </p:spPr>
         <p:txBody>
-          <a:bodyPr wrap="square" lIns="0" tIns="0" rIns="0" bIns="0" rtlCol="0" anchor="ctr"/>
+          <a:bodyPr wrap="square" lIns="0" tIns="0" rIns="0" bIns="0" rtlCol="0" anchor="t"/>
           <a:lstStyle/>
           <a:p>
             <a:pPr algn="just" marL="243840" indent="-243840" eaLnBrk="1" latinLnBrk="0" hangingPunct="1">
@@ -25458,7 +25458,7 @@
           <a:ln/>
         </p:spPr>
         <p:txBody>
-          <a:bodyPr wrap="none" lIns="0" tIns="0" rIns="0" bIns="0" rtlCol="0" anchor="ctr"/>
+          <a:bodyPr wrap="none" lIns="0" tIns="0" rIns="0" bIns="0" rtlCol="0" anchor="t"/>
           <a:lstStyle/>
           <a:p>
             <a:pPr algn="l" indent="0" marL="0" eaLnBrk="1" latinLnBrk="0" hangingPunct="1">
@@ -25500,7 +25500,7 @@
           <a:ln/>
         </p:spPr>
         <p:txBody>
-          <a:bodyPr wrap="square" lIns="0" tIns="0" rIns="0" bIns="0" rtlCol="0" anchor="ctr"/>
+          <a:bodyPr wrap="square" lIns="0" tIns="0" rIns="0" bIns="0" rtlCol="0" anchor="t"/>
           <a:lstStyle/>
           <a:p>
             <a:pPr algn="just" marL="243840" indent="-243840" eaLnBrk="1" latinLnBrk="0" hangingPunct="1">
@@ -25543,7 +25543,7 @@
           <a:ln/>
         </p:spPr>
         <p:txBody>
-          <a:bodyPr wrap="square" lIns="0" tIns="0" rIns="0" bIns="0" rtlCol="0" anchor="ctr"/>
+          <a:bodyPr wrap="square" lIns="0" tIns="0" rIns="0" bIns="0" rtlCol="0" anchor="t"/>
           <a:lstStyle/>
           <a:p>
             <a:pPr algn="just" marL="243840" indent="-243840" eaLnBrk="1" latinLnBrk="0" hangingPunct="1">
@@ -25586,7 +25586,7 @@
           <a:ln/>
         </p:spPr>
         <p:txBody>
-          <a:bodyPr wrap="square" lIns="0" tIns="0" rIns="0" bIns="0" rtlCol="0" anchor="ctr"/>
+          <a:bodyPr wrap="square" lIns="0" tIns="0" rIns="0" bIns="0" rtlCol="0" anchor="t"/>
           <a:lstStyle/>
           <a:p>
             <a:pPr algn="just" marL="243840" indent="-243840" eaLnBrk="1" latinLnBrk="0" hangingPunct="1">
@@ -25629,7 +25629,7 @@
           <a:ln/>
         </p:spPr>
         <p:txBody>
-          <a:bodyPr wrap="square" lIns="0" tIns="0" rIns="0" bIns="0" rtlCol="0" anchor="ctr"/>
+          <a:bodyPr wrap="square" lIns="0" tIns="0" rIns="0" bIns="0" rtlCol="0" anchor="t"/>
           <a:lstStyle/>
           <a:p>
             <a:pPr algn="just" marL="243840" indent="-243840" eaLnBrk="1" latinLnBrk="0" hangingPunct="1">
@@ -25699,7 +25699,7 @@
           <a:ln/>
         </p:spPr>
         <p:txBody>
-          <a:bodyPr wrap="none" lIns="0" tIns="0" rIns="0" bIns="0" rtlCol="0" anchor="ctr"/>
+          <a:bodyPr wrap="none" lIns="0" tIns="0" rIns="0" bIns="0" rtlCol="0" anchor="t"/>
           <a:lstStyle/>
           <a:p>
             <a:pPr algn="ctr" indent="0" marL="0" eaLnBrk="1" latinLnBrk="0" hangingPunct="1">
@@ -25741,7 +25741,7 @@
           <a:ln/>
         </p:spPr>
         <p:txBody>
-          <a:bodyPr wrap="none" lIns="0" tIns="0" rIns="0" bIns="0" rtlCol="0" anchor="ctr"/>
+          <a:bodyPr wrap="none" lIns="0" tIns="0" rIns="0" bIns="0" rtlCol="0" anchor="t"/>
           <a:lstStyle/>
           <a:p>
             <a:pPr algn="l" indent="0" marL="0" eaLnBrk="1" latinLnBrk="0" hangingPunct="1">
@@ -25783,7 +25783,7 @@
           <a:ln/>
         </p:spPr>
         <p:txBody>
-          <a:bodyPr wrap="none" lIns="0" tIns="0" rIns="0" bIns="0" rtlCol="0" anchor="ctr"/>
+          <a:bodyPr wrap="none" lIns="0" tIns="0" rIns="0" bIns="0" rtlCol="0" anchor="t"/>
           <a:lstStyle/>
           <a:p>
             <a:pPr algn="r" indent="0" marL="0" eaLnBrk="1" latinLnBrk="0" hangingPunct="1">
@@ -25825,7 +25825,7 @@
           <a:ln/>
         </p:spPr>
         <p:txBody>
-          <a:bodyPr wrap="none" lIns="0" tIns="0" rIns="0" bIns="0" rtlCol="0" anchor="ctr"/>
+          <a:bodyPr wrap="none" lIns="0" tIns="0" rIns="0" bIns="0" rtlCol="0" anchor="t"/>
           <a:lstStyle/>
           <a:p>
             <a:pPr algn="l" indent="0" marL="0" eaLnBrk="1" latinLnBrk="0" hangingPunct="1">
@@ -26007,7 +26007,7 @@
           <a:ln/>
         </p:spPr>
         <p:txBody>
-          <a:bodyPr wrap="none" lIns="0" tIns="0" rIns="0" bIns="0" rtlCol="0" anchor="ctr"/>
+          <a:bodyPr wrap="none" lIns="0" tIns="0" rIns="0" bIns="0" rtlCol="0" anchor="t"/>
           <a:lstStyle/>
           <a:p>
             <a:pPr algn="l" indent="0" marL="0" eaLnBrk="1" latinLnBrk="0" hangingPunct="1">
@@ -26046,7 +26046,7 @@
           <a:ln/>
         </p:spPr>
         <p:txBody>
-          <a:bodyPr wrap="none" lIns="0" tIns="0" rIns="0" bIns="0" rtlCol="0" anchor="ctr"/>
+          <a:bodyPr wrap="none" lIns="0" tIns="0" rIns="0" bIns="0" rtlCol="0" anchor="t"/>
           <a:lstStyle/>
           <a:p>
             <a:pPr algn="l" indent="0" marL="0" eaLnBrk="1" latinLnBrk="0" hangingPunct="1">
@@ -26088,7 +26088,7 @@
           <a:ln/>
         </p:spPr>
         <p:txBody>
-          <a:bodyPr wrap="none" lIns="0" tIns="0" rIns="0" bIns="0" rtlCol="0" anchor="ctr"/>
+          <a:bodyPr wrap="none" lIns="0" tIns="0" rIns="0" bIns="0" rtlCol="0" anchor="t"/>
           <a:lstStyle/>
           <a:p>
             <a:pPr algn="l" indent="0" marL="0" eaLnBrk="1" latinLnBrk="0" hangingPunct="1">
@@ -26181,7 +26181,7 @@
           <a:ln/>
         </p:spPr>
         <p:txBody>
-          <a:bodyPr wrap="none" lIns="0" tIns="0" rIns="0" bIns="0" rtlCol="0" anchor="ctr"/>
+          <a:bodyPr wrap="none" lIns="0" tIns="0" rIns="0" bIns="0" rtlCol="0" anchor="t"/>
           <a:lstStyle/>
           <a:p>
             <a:pPr algn="l" indent="0" marL="0" eaLnBrk="1" latinLnBrk="0" hangingPunct="1">
@@ -26271,7 +26271,7 @@
           <a:ln/>
         </p:spPr>
         <p:txBody>
-          <a:bodyPr wrap="none" lIns="0" tIns="0" rIns="0" bIns="0" rtlCol="0" anchor="ctr"/>
+          <a:bodyPr wrap="none" lIns="0" tIns="0" rIns="0" bIns="0" rtlCol="0" anchor="t"/>
           <a:lstStyle/>
           <a:p>
             <a:pPr algn="ctr" indent="0" marL="0" eaLnBrk="1" latinLnBrk="0" hangingPunct="1">
@@ -26313,7 +26313,7 @@
           <a:ln/>
         </p:spPr>
         <p:txBody>
-          <a:bodyPr wrap="none" lIns="0" tIns="0" rIns="0" bIns="0" rtlCol="0" anchor="ctr"/>
+          <a:bodyPr wrap="none" lIns="0" tIns="0" rIns="0" bIns="0" rtlCol="0" anchor="t"/>
           <a:lstStyle/>
           <a:p>
             <a:pPr algn="l" indent="0" marL="0" eaLnBrk="1" latinLnBrk="0" hangingPunct="1">
@@ -26355,7 +26355,7 @@
           <a:ln/>
         </p:spPr>
         <p:txBody>
-          <a:bodyPr wrap="square" lIns="0" tIns="0" rIns="0" bIns="0" rtlCol="0" anchor="ctr"/>
+          <a:bodyPr wrap="square" lIns="0" tIns="0" rIns="0" bIns="0" rtlCol="0" anchor="t"/>
           <a:lstStyle/>
           <a:p>
             <a:pPr algn="just" marL="243840" indent="-243840" eaLnBrk="1" latinLnBrk="0" hangingPunct="1">
@@ -26398,7 +26398,7 @@
           <a:ln/>
         </p:spPr>
         <p:txBody>
-          <a:bodyPr wrap="none" lIns="0" tIns="0" rIns="0" bIns="0" rtlCol="0" anchor="ctr"/>
+          <a:bodyPr wrap="none" lIns="0" tIns="0" rIns="0" bIns="0" rtlCol="0" anchor="t"/>
           <a:lstStyle/>
           <a:p>
             <a:pPr algn="just" marL="243840" indent="-243840" eaLnBrk="1" latinLnBrk="0" hangingPunct="1">
@@ -26441,7 +26441,7 @@
           <a:ln/>
         </p:spPr>
         <p:txBody>
-          <a:bodyPr wrap="square" lIns="0" tIns="0" rIns="0" bIns="0" rtlCol="0" anchor="ctr"/>
+          <a:bodyPr wrap="square" lIns="0" tIns="0" rIns="0" bIns="0" rtlCol="0" anchor="t"/>
           <a:lstStyle/>
           <a:p>
             <a:pPr algn="just" marL="243840" indent="-243840" eaLnBrk="1" latinLnBrk="0" hangingPunct="1">
@@ -26484,7 +26484,7 @@
           <a:ln/>
         </p:spPr>
         <p:txBody>
-          <a:bodyPr wrap="none" lIns="0" tIns="0" rIns="0" bIns="0" rtlCol="0" anchor="ctr"/>
+          <a:bodyPr wrap="none" lIns="0" tIns="0" rIns="0" bIns="0" rtlCol="0" anchor="t"/>
           <a:lstStyle/>
           <a:p>
             <a:pPr algn="just" marL="243840" indent="-243840" eaLnBrk="1" latinLnBrk="0" hangingPunct="1">
@@ -26554,7 +26554,7 @@
           <a:ln/>
         </p:spPr>
         <p:txBody>
-          <a:bodyPr wrap="none" lIns="0" tIns="0" rIns="0" bIns="0" rtlCol="0" anchor="ctr"/>
+          <a:bodyPr wrap="none" lIns="0" tIns="0" rIns="0" bIns="0" rtlCol="0" anchor="t"/>
           <a:lstStyle/>
           <a:p>
             <a:pPr algn="l" indent="0" marL="0" eaLnBrk="1" latinLnBrk="0" hangingPunct="1">
@@ -26596,7 +26596,7 @@
           <a:ln/>
         </p:spPr>
         <p:txBody>
-          <a:bodyPr wrap="none" lIns="0" tIns="0" rIns="0" bIns="0" rtlCol="0" anchor="ctr"/>
+          <a:bodyPr wrap="none" lIns="0" tIns="0" rIns="0" bIns="0" rtlCol="0" anchor="t"/>
           <a:lstStyle/>
           <a:p>
             <a:pPr algn="just" marL="243840" indent="-243840" eaLnBrk="1" latinLnBrk="0" hangingPunct="1">
@@ -26639,7 +26639,7 @@
           <a:ln/>
         </p:spPr>
         <p:txBody>
-          <a:bodyPr wrap="none" lIns="0" tIns="0" rIns="0" bIns="0" rtlCol="0" anchor="ctr"/>
+          <a:bodyPr wrap="none" lIns="0" tIns="0" rIns="0" bIns="0" rtlCol="0" anchor="t"/>
           <a:lstStyle/>
           <a:p>
             <a:pPr algn="just" marL="243840" indent="-243840" eaLnBrk="1" latinLnBrk="0" hangingPunct="1">
@@ -26682,7 +26682,7 @@
           <a:ln/>
         </p:spPr>
         <p:txBody>
-          <a:bodyPr wrap="none" lIns="0" tIns="0" rIns="0" bIns="0" rtlCol="0" anchor="ctr"/>
+          <a:bodyPr wrap="none" lIns="0" tIns="0" rIns="0" bIns="0" rtlCol="0" anchor="t"/>
           <a:lstStyle/>
           <a:p>
             <a:pPr algn="just" marL="243840" indent="-243840" eaLnBrk="1" latinLnBrk="0" hangingPunct="1">
@@ -26725,7 +26725,7 @@
           <a:ln/>
         </p:spPr>
         <p:txBody>
-          <a:bodyPr wrap="none" lIns="0" tIns="0" rIns="0" bIns="0" rtlCol="0" anchor="ctr"/>
+          <a:bodyPr wrap="none" lIns="0" tIns="0" rIns="0" bIns="0" rtlCol="0" anchor="t"/>
           <a:lstStyle/>
           <a:p>
             <a:pPr algn="just" marL="243840" indent="-243840" eaLnBrk="1" latinLnBrk="0" hangingPunct="1">
@@ -26795,7 +26795,7 @@
           <a:ln/>
         </p:spPr>
         <p:txBody>
-          <a:bodyPr wrap="none" lIns="0" tIns="0" rIns="0" bIns="0" rtlCol="0" anchor="ctr"/>
+          <a:bodyPr wrap="none" lIns="0" tIns="0" rIns="0" bIns="0" rtlCol="0" anchor="t"/>
           <a:lstStyle/>
           <a:p>
             <a:pPr algn="ctr" indent="0" marL="0" eaLnBrk="1" latinLnBrk="0" hangingPunct="1">
@@ -26837,7 +26837,7 @@
           <a:ln/>
         </p:spPr>
         <p:txBody>
-          <a:bodyPr wrap="none" lIns="0" tIns="0" rIns="0" bIns="0" rtlCol="0" anchor="ctr"/>
+          <a:bodyPr wrap="none" lIns="0" tIns="0" rIns="0" bIns="0" rtlCol="0" anchor="t"/>
           <a:lstStyle/>
           <a:p>
             <a:pPr algn="l" indent="0" marL="0" eaLnBrk="1" latinLnBrk="0" hangingPunct="1">
@@ -26879,7 +26879,7 @@
           <a:ln/>
         </p:spPr>
         <p:txBody>
-          <a:bodyPr wrap="none" lIns="0" tIns="0" rIns="0" bIns="0" rtlCol="0" anchor="ctr"/>
+          <a:bodyPr wrap="none" lIns="0" tIns="0" rIns="0" bIns="0" rtlCol="0" anchor="t"/>
           <a:lstStyle/>
           <a:p>
             <a:pPr algn="r" indent="0" marL="0" eaLnBrk="1" latinLnBrk="0" hangingPunct="1">
@@ -26921,7 +26921,7 @@
           <a:ln/>
         </p:spPr>
         <p:txBody>
-          <a:bodyPr wrap="none" lIns="0" tIns="0" rIns="0" bIns="0" rtlCol="0" anchor="ctr"/>
+          <a:bodyPr wrap="none" lIns="0" tIns="0" rIns="0" bIns="0" rtlCol="0" anchor="t"/>
           <a:lstStyle/>
           <a:p>
             <a:pPr algn="l" indent="0" marL="0" eaLnBrk="1" latinLnBrk="0" hangingPunct="1">
@@ -27103,7 +27103,7 @@
           <a:ln/>
         </p:spPr>
         <p:txBody>
-          <a:bodyPr wrap="none" lIns="0" tIns="0" rIns="0" bIns="0" rtlCol="0" anchor="ctr"/>
+          <a:bodyPr wrap="none" lIns="0" tIns="0" rIns="0" bIns="0" rtlCol="0" anchor="t"/>
           <a:lstStyle/>
           <a:p>
             <a:pPr algn="l" indent="0" marL="0" eaLnBrk="1" latinLnBrk="0" hangingPunct="1">
@@ -27142,7 +27142,7 @@
           <a:ln/>
         </p:spPr>
         <p:txBody>
-          <a:bodyPr wrap="none" lIns="0" tIns="0" rIns="0" bIns="0" rtlCol="0" anchor="ctr"/>
+          <a:bodyPr wrap="none" lIns="0" tIns="0" rIns="0" bIns="0" rtlCol="0" anchor="t"/>
           <a:lstStyle/>
           <a:p>
             <a:pPr algn="l" indent="0" marL="0" eaLnBrk="1" latinLnBrk="0" hangingPunct="1">
@@ -27184,7 +27184,7 @@
           <a:ln/>
         </p:spPr>
         <p:txBody>
-          <a:bodyPr wrap="none" lIns="0" tIns="0" rIns="0" bIns="0" rtlCol="0" anchor="ctr"/>
+          <a:bodyPr wrap="none" lIns="0" tIns="0" rIns="0" bIns="0" rtlCol="0" anchor="t"/>
           <a:lstStyle/>
           <a:p>
             <a:pPr algn="l" indent="0" marL="0" eaLnBrk="1" latinLnBrk="0" hangingPunct="1">
@@ -27277,7 +27277,7 @@
           <a:ln/>
         </p:spPr>
         <p:txBody>
-          <a:bodyPr wrap="none" lIns="0" tIns="0" rIns="0" bIns="0" rtlCol="0" anchor="ctr"/>
+          <a:bodyPr wrap="none" lIns="0" tIns="0" rIns="0" bIns="0" rtlCol="0" anchor="t"/>
           <a:lstStyle/>
           <a:p>
             <a:pPr algn="l" indent="0" marL="0" eaLnBrk="1" latinLnBrk="0" hangingPunct="1">
@@ -27391,7 +27391,7 @@
           <a:ln/>
         </p:spPr>
         <p:txBody>
-          <a:bodyPr wrap="none" lIns="0" tIns="0" rIns="0" bIns="0" rtlCol="0" anchor="ctr"/>
+          <a:bodyPr wrap="none" lIns="0" tIns="0" rIns="0" bIns="0" rtlCol="0" anchor="t"/>
           <a:lstStyle/>
           <a:p>
             <a:pPr algn="ctr" indent="0" marL="0" eaLnBrk="1" latinLnBrk="0" hangingPunct="1">
@@ -27433,7 +27433,7 @@
           <a:ln/>
         </p:spPr>
         <p:txBody>
-          <a:bodyPr wrap="none" lIns="0" tIns="0" rIns="0" bIns="0" rtlCol="0" anchor="ctr"/>
+          <a:bodyPr wrap="none" lIns="0" tIns="0" rIns="0" bIns="0" rtlCol="0" anchor="t"/>
           <a:lstStyle/>
           <a:p>
             <a:pPr algn="just" marL="243840" indent="-243840" eaLnBrk="1" latinLnBrk="0" hangingPunct="1">
@@ -27476,7 +27476,7 @@
           <a:ln/>
         </p:spPr>
         <p:txBody>
-          <a:bodyPr wrap="none" lIns="0" tIns="0" rIns="0" bIns="0" rtlCol="0" anchor="ctr"/>
+          <a:bodyPr wrap="none" lIns="0" tIns="0" rIns="0" bIns="0" rtlCol="0" anchor="t"/>
           <a:lstStyle/>
           <a:p>
             <a:pPr algn="just" marL="243840" indent="-243840" eaLnBrk="1" latinLnBrk="0" hangingPunct="1">
@@ -27519,7 +27519,7 @@
           <a:ln/>
         </p:spPr>
         <p:txBody>
-          <a:bodyPr wrap="none" lIns="0" tIns="0" rIns="0" bIns="0" rtlCol="0" anchor="ctr"/>
+          <a:bodyPr wrap="none" lIns="0" tIns="0" rIns="0" bIns="0" rtlCol="0" anchor="t"/>
           <a:lstStyle/>
           <a:p>
             <a:pPr algn="just" marL="243840" indent="-243840" eaLnBrk="1" latinLnBrk="0" hangingPunct="1">
@@ -27562,7 +27562,7 @@
           <a:ln/>
         </p:spPr>
         <p:txBody>
-          <a:bodyPr wrap="none" lIns="0" tIns="0" rIns="0" bIns="0" rtlCol="0" anchor="ctr"/>
+          <a:bodyPr wrap="none" lIns="0" tIns="0" rIns="0" bIns="0" rtlCol="0" anchor="t"/>
           <a:lstStyle/>
           <a:p>
             <a:pPr algn="just" marL="243840" indent="-243840" eaLnBrk="1" latinLnBrk="0" hangingPunct="1">
@@ -27677,7 +27677,7 @@
           <a:ln/>
         </p:spPr>
         <p:txBody>
-          <a:bodyPr wrap="none" lIns="0" tIns="0" rIns="0" bIns="0" rtlCol="0" anchor="ctr"/>
+          <a:bodyPr wrap="none" lIns="0" tIns="0" rIns="0" bIns="0" rtlCol="0" anchor="t"/>
           <a:lstStyle/>
           <a:p>
             <a:pPr algn="ctr" indent="0" marL="0" eaLnBrk="1" latinLnBrk="0" hangingPunct="1">
@@ -27719,7 +27719,7 @@
           <a:ln/>
         </p:spPr>
         <p:txBody>
-          <a:bodyPr wrap="square" lIns="0" tIns="0" rIns="0" bIns="0" rtlCol="0" anchor="ctr"/>
+          <a:bodyPr wrap="square" lIns="0" tIns="0" rIns="0" bIns="0" rtlCol="0" anchor="t"/>
           <a:lstStyle/>
           <a:p>
             <a:pPr algn="just" marL="243840" indent="-243840" eaLnBrk="1" latinLnBrk="0" hangingPunct="1">
@@ -27762,7 +27762,7 @@
           <a:ln/>
         </p:spPr>
         <p:txBody>
-          <a:bodyPr wrap="none" lIns="0" tIns="0" rIns="0" bIns="0" rtlCol="0" anchor="ctr"/>
+          <a:bodyPr wrap="none" lIns="0" tIns="0" rIns="0" bIns="0" rtlCol="0" anchor="t"/>
           <a:lstStyle/>
           <a:p>
             <a:pPr algn="just" marL="243840" indent="-243840" eaLnBrk="1" latinLnBrk="0" hangingPunct="1">
@@ -27805,7 +27805,7 @@
           <a:ln/>
         </p:spPr>
         <p:txBody>
-          <a:bodyPr wrap="none" lIns="0" tIns="0" rIns="0" bIns="0" rtlCol="0" anchor="ctr"/>
+          <a:bodyPr wrap="none" lIns="0" tIns="0" rIns="0" bIns="0" rtlCol="0" anchor="t"/>
           <a:lstStyle/>
           <a:p>
             <a:pPr algn="just" marL="243840" indent="-243840" eaLnBrk="1" latinLnBrk="0" hangingPunct="1">
@@ -27848,7 +27848,7 @@
           <a:ln/>
         </p:spPr>
         <p:txBody>
-          <a:bodyPr wrap="none" lIns="0" tIns="0" rIns="0" bIns="0" rtlCol="0" anchor="ctr"/>
+          <a:bodyPr wrap="none" lIns="0" tIns="0" rIns="0" bIns="0" rtlCol="0" anchor="t"/>
           <a:lstStyle/>
           <a:p>
             <a:pPr algn="just" marL="243840" indent="-243840" eaLnBrk="1" latinLnBrk="0" hangingPunct="1">
@@ -27918,7 +27918,7 @@
           <a:ln/>
         </p:spPr>
         <p:txBody>
-          <a:bodyPr wrap="none" lIns="0" tIns="0" rIns="0" bIns="0" rtlCol="0" anchor="ctr"/>
+          <a:bodyPr wrap="none" lIns="0" tIns="0" rIns="0" bIns="0" rtlCol="0" anchor="t"/>
           <a:lstStyle/>
           <a:p>
             <a:pPr algn="l" indent="0" marL="0" eaLnBrk="1" latinLnBrk="0" hangingPunct="1">
@@ -27960,7 +27960,7 @@
           <a:ln/>
         </p:spPr>
         <p:txBody>
-          <a:bodyPr wrap="square" lIns="0" tIns="0" rIns="0" bIns="0" rtlCol="0" anchor="ctr"/>
+          <a:bodyPr wrap="square" lIns="0" tIns="0" rIns="0" bIns="0" rtlCol="0" anchor="t"/>
           <a:lstStyle/>
           <a:p>
             <a:pPr algn="just" indent="0" marL="0" eaLnBrk="1" latinLnBrk="0" hangingPunct="1">
@@ -28029,7 +28029,7 @@
           <a:ln/>
         </p:spPr>
         <p:txBody>
-          <a:bodyPr wrap="none" lIns="0" tIns="0" rIns="0" bIns="0" rtlCol="0" anchor="ctr"/>
+          <a:bodyPr wrap="none" lIns="0" tIns="0" rIns="0" bIns="0" rtlCol="0" anchor="t"/>
           <a:lstStyle/>
           <a:p>
             <a:pPr algn="l" indent="0" marL="0" eaLnBrk="1" latinLnBrk="0" hangingPunct="1">
@@ -28071,7 +28071,7 @@
           <a:ln/>
         </p:spPr>
         <p:txBody>
-          <a:bodyPr wrap="square" lIns="0" tIns="0" rIns="0" bIns="0" rtlCol="0" anchor="ctr"/>
+          <a:bodyPr wrap="square" lIns="0" tIns="0" rIns="0" bIns="0" rtlCol="0" anchor="t"/>
           <a:lstStyle/>
           <a:p>
             <a:pPr algn="just" indent="0" marL="0" eaLnBrk="1" latinLnBrk="0" hangingPunct="1">
@@ -28140,7 +28140,7 @@
           <a:ln/>
         </p:spPr>
         <p:txBody>
-          <a:bodyPr wrap="none" lIns="0" tIns="0" rIns="0" bIns="0" rtlCol="0" anchor="ctr"/>
+          <a:bodyPr wrap="none" lIns="0" tIns="0" rIns="0" bIns="0" rtlCol="0" anchor="t"/>
           <a:lstStyle/>
           <a:p>
             <a:pPr algn="l" indent="0" marL="0" eaLnBrk="1" latinLnBrk="0" hangingPunct="1">
@@ -28182,7 +28182,7 @@
           <a:ln/>
         </p:spPr>
         <p:txBody>
-          <a:bodyPr wrap="square" lIns="0" tIns="0" rIns="0" bIns="0" rtlCol="0" anchor="ctr"/>
+          <a:bodyPr wrap="square" lIns="0" tIns="0" rIns="0" bIns="0" rtlCol="0" anchor="t"/>
           <a:lstStyle/>
           <a:p>
             <a:pPr algn="just" indent="0" marL="0" eaLnBrk="1" latinLnBrk="0" hangingPunct="1">
@@ -28224,7 +28224,7 @@
           <a:ln/>
         </p:spPr>
         <p:txBody>
-          <a:bodyPr wrap="none" lIns="0" tIns="0" rIns="0" bIns="0" rtlCol="0" anchor="ctr"/>
+          <a:bodyPr wrap="none" lIns="0" tIns="0" rIns="0" bIns="0" rtlCol="0" anchor="t"/>
           <a:lstStyle/>
           <a:p>
             <a:pPr algn="l" indent="0" marL="0" eaLnBrk="1" latinLnBrk="0" hangingPunct="1">
@@ -28266,7 +28266,7 @@
           <a:ln/>
         </p:spPr>
         <p:txBody>
-          <a:bodyPr wrap="none" lIns="0" tIns="0" rIns="0" bIns="0" rtlCol="0" anchor="ctr"/>
+          <a:bodyPr wrap="none" lIns="0" tIns="0" rIns="0" bIns="0" rtlCol="0" anchor="t"/>
           <a:lstStyle/>
           <a:p>
             <a:pPr algn="r" indent="0" marL="0" eaLnBrk="1" latinLnBrk="0" hangingPunct="1">
@@ -28308,7 +28308,7 @@
           <a:ln/>
         </p:spPr>
         <p:txBody>
-          <a:bodyPr wrap="none" lIns="0" tIns="0" rIns="0" bIns="0" rtlCol="0" anchor="ctr"/>
+          <a:bodyPr wrap="none" lIns="0" tIns="0" rIns="0" bIns="0" rtlCol="0" anchor="t"/>
           <a:lstStyle/>
           <a:p>
             <a:pPr algn="l" indent="0" marL="0" eaLnBrk="1" latinLnBrk="0" hangingPunct="1">
@@ -28490,7 +28490,7 @@
           <a:ln/>
         </p:spPr>
         <p:txBody>
-          <a:bodyPr wrap="none" lIns="0" tIns="0" rIns="0" bIns="0" rtlCol="0" anchor="ctr"/>
+          <a:bodyPr wrap="none" lIns="0" tIns="0" rIns="0" bIns="0" rtlCol="0" anchor="t"/>
           <a:lstStyle/>
           <a:p>
             <a:pPr algn="l" indent="0" marL="0" eaLnBrk="1" latinLnBrk="0" hangingPunct="1">
@@ -28529,7 +28529,7 @@
           <a:ln/>
         </p:spPr>
         <p:txBody>
-          <a:bodyPr wrap="none" lIns="0" tIns="0" rIns="0" bIns="0" rtlCol="0" anchor="ctr"/>
+          <a:bodyPr wrap="none" lIns="0" tIns="0" rIns="0" bIns="0" rtlCol="0" anchor="t"/>
           <a:lstStyle/>
           <a:p>
             <a:pPr algn="l" indent="0" marL="0" eaLnBrk="1" latinLnBrk="0" hangingPunct="1">
@@ -28571,7 +28571,7 @@
           <a:ln/>
         </p:spPr>
         <p:txBody>
-          <a:bodyPr wrap="none" lIns="0" tIns="0" rIns="0" bIns="0" rtlCol="0" anchor="ctr"/>
+          <a:bodyPr wrap="none" lIns="0" tIns="0" rIns="0" bIns="0" rtlCol="0" anchor="t"/>
           <a:lstStyle/>
           <a:p>
             <a:pPr algn="l" indent="0" marL="0" eaLnBrk="1" latinLnBrk="0" hangingPunct="1">
@@ -28664,7 +28664,7 @@
           <a:ln/>
         </p:spPr>
         <p:txBody>
-          <a:bodyPr wrap="none" lIns="0" tIns="0" rIns="0" bIns="0" rtlCol="0" anchor="ctr"/>
+          <a:bodyPr wrap="none" lIns="0" tIns="0" rIns="0" bIns="0" rtlCol="0" anchor="t"/>
           <a:lstStyle/>
           <a:p>
             <a:pPr algn="l" indent="0" marL="0" eaLnBrk="1" latinLnBrk="0" hangingPunct="1">
@@ -28706,7 +28706,7 @@
           <a:ln/>
         </p:spPr>
         <p:txBody>
-          <a:bodyPr wrap="none" lIns="0" tIns="0" rIns="0" bIns="0" rtlCol="0" anchor="ctr"/>
+          <a:bodyPr wrap="none" lIns="0" tIns="0" rIns="0" bIns="0" rtlCol="0" anchor="t"/>
           <a:lstStyle/>
           <a:p>
             <a:pPr algn="l" indent="0" marL="0" eaLnBrk="1" latinLnBrk="0" hangingPunct="1">
@@ -28775,7 +28775,7 @@
           <a:ln/>
         </p:spPr>
         <p:txBody>
-          <a:bodyPr wrap="none" lIns="0" tIns="0" rIns="0" bIns="0" rtlCol="0" anchor="ctr"/>
+          <a:bodyPr wrap="none" lIns="0" tIns="0" rIns="0" bIns="0" rtlCol="0" anchor="t"/>
           <a:lstStyle/>
           <a:p>
             <a:pPr algn="l" indent="0" marL="0" eaLnBrk="1" latinLnBrk="0" hangingPunct="1">
@@ -28817,7 +28817,7 @@
           <a:ln/>
         </p:spPr>
         <p:txBody>
-          <a:bodyPr wrap="square" lIns="0" tIns="0" rIns="0" bIns="0" rtlCol="0" anchor="ctr"/>
+          <a:bodyPr wrap="square" lIns="0" tIns="0" rIns="0" bIns="0" rtlCol="0" anchor="t"/>
           <a:lstStyle/>
           <a:p>
             <a:pPr algn="just" indent="0" marL="0" eaLnBrk="1" latinLnBrk="0" hangingPunct="1">
@@ -28886,7 +28886,7 @@
           <a:ln/>
         </p:spPr>
         <p:txBody>
-          <a:bodyPr wrap="none" lIns="0" tIns="0" rIns="0" bIns="0" rtlCol="0" anchor="ctr"/>
+          <a:bodyPr wrap="none" lIns="0" tIns="0" rIns="0" bIns="0" rtlCol="0" anchor="t"/>
           <a:lstStyle/>
           <a:p>
             <a:pPr algn="l" indent="0" marL="0" eaLnBrk="1" latinLnBrk="0" hangingPunct="1">
@@ -28928,7 +28928,7 @@
           <a:ln/>
         </p:spPr>
         <p:txBody>
-          <a:bodyPr wrap="square" lIns="0" tIns="0" rIns="0" bIns="0" rtlCol="0" anchor="ctr"/>
+          <a:bodyPr wrap="square" lIns="0" tIns="0" rIns="0" bIns="0" rtlCol="0" anchor="t"/>
           <a:lstStyle/>
           <a:p>
             <a:pPr algn="just" indent="0" marL="0" eaLnBrk="1" latinLnBrk="0" hangingPunct="1">
@@ -28997,7 +28997,7 @@
           <a:ln/>
         </p:spPr>
         <p:txBody>
-          <a:bodyPr wrap="none" lIns="0" tIns="0" rIns="0" bIns="0" rtlCol="0" anchor="ctr"/>
+          <a:bodyPr wrap="none" lIns="0" tIns="0" rIns="0" bIns="0" rtlCol="0" anchor="t"/>
           <a:lstStyle/>
           <a:p>
             <a:pPr algn="l" indent="0" marL="0" eaLnBrk="1" latinLnBrk="0" hangingPunct="1">
@@ -29039,7 +29039,7 @@
           <a:ln/>
         </p:spPr>
         <p:txBody>
-          <a:bodyPr wrap="square" lIns="0" tIns="0" rIns="0" bIns="0" rtlCol="0" anchor="ctr"/>
+          <a:bodyPr wrap="square" lIns="0" tIns="0" rIns="0" bIns="0" rtlCol="0" anchor="t"/>
           <a:lstStyle/>
           <a:p>
             <a:pPr algn="just" indent="0" marL="0" eaLnBrk="1" latinLnBrk="0" hangingPunct="1">
@@ -29081,7 +29081,7 @@
           <a:ln/>
         </p:spPr>
         <p:txBody>
-          <a:bodyPr wrap="none" lIns="0" tIns="0" rIns="0" bIns="0" rtlCol="0" anchor="ctr"/>
+          <a:bodyPr wrap="none" lIns="0" tIns="0" rIns="0" bIns="0" rtlCol="0" anchor="t"/>
           <a:lstStyle/>
           <a:p>
             <a:pPr algn="l" indent="0" marL="0" eaLnBrk="1" latinLnBrk="0" hangingPunct="1">
@@ -29177,7 +29177,7 @@
           <a:ln/>
         </p:spPr>
         <p:txBody>
-          <a:bodyPr wrap="none" lIns="0" tIns="0" rIns="0" bIns="0" rtlCol="0" anchor="ctr"/>
+          <a:bodyPr wrap="none" lIns="0" tIns="0" rIns="0" bIns="0" rtlCol="0" anchor="t"/>
           <a:lstStyle/>
           <a:p>
             <a:pPr algn="l" indent="0" marL="0" eaLnBrk="1" latinLnBrk="0" hangingPunct="1">
@@ -29273,7 +29273,7 @@
           <a:ln/>
         </p:spPr>
         <p:txBody>
-          <a:bodyPr wrap="none" lIns="0" tIns="0" rIns="0" bIns="0" rtlCol="0" anchor="ctr"/>
+          <a:bodyPr wrap="none" lIns="0" tIns="0" rIns="0" bIns="0" rtlCol="0" anchor="t"/>
           <a:lstStyle/>
           <a:p>
             <a:pPr algn="l" indent="0" marL="0" eaLnBrk="1" latinLnBrk="0" hangingPunct="1">
@@ -29369,7 +29369,7 @@
           <a:ln/>
         </p:spPr>
         <p:txBody>
-          <a:bodyPr wrap="none" lIns="0" tIns="0" rIns="0" bIns="0" rtlCol="0" anchor="ctr"/>
+          <a:bodyPr wrap="none" lIns="0" tIns="0" rIns="0" bIns="0" rtlCol="0" anchor="t"/>
           <a:lstStyle/>
           <a:p>
             <a:pPr algn="l" indent="0" marL="0" eaLnBrk="1" latinLnBrk="0" hangingPunct="1">
@@ -29465,7 +29465,7 @@
           <a:ln/>
         </p:spPr>
         <p:txBody>
-          <a:bodyPr wrap="none" lIns="0" tIns="0" rIns="0" bIns="0" rtlCol="0" anchor="ctr"/>
+          <a:bodyPr wrap="none" lIns="0" tIns="0" rIns="0" bIns="0" rtlCol="0" anchor="t"/>
           <a:lstStyle/>
           <a:p>
             <a:pPr algn="l" indent="0" marL="0" eaLnBrk="1" latinLnBrk="0" hangingPunct="1">
@@ -29561,7 +29561,7 @@
           <a:ln/>
         </p:spPr>
         <p:txBody>
-          <a:bodyPr wrap="square" lIns="0" tIns="0" rIns="0" bIns="0" rtlCol="0" anchor="ctr"/>
+          <a:bodyPr wrap="square" lIns="0" tIns="0" rIns="0" bIns="0" rtlCol="0" anchor="t"/>
           <a:lstStyle/>
           <a:p>
             <a:pPr algn="l" indent="0" marL="0" eaLnBrk="1" latinLnBrk="0" hangingPunct="1">
@@ -29677,7 +29677,7 @@
           <a:ln/>
         </p:spPr>
         <p:txBody>
-          <a:bodyPr wrap="square" lIns="0" tIns="0" rIns="0" bIns="0" rtlCol="0" anchor="ctr"/>
+          <a:bodyPr wrap="square" lIns="0" tIns="0" rIns="0" bIns="0" rtlCol="0" anchor="t"/>
           <a:lstStyle/>
           <a:p>
             <a:pPr algn="l" indent="0" marL="0" eaLnBrk="1" latinLnBrk="0" hangingPunct="1">
@@ -29793,7 +29793,7 @@
           <a:ln/>
         </p:spPr>
         <p:txBody>
-          <a:bodyPr wrap="none" lIns="0" tIns="0" rIns="0" bIns="0" rtlCol="0" anchor="ctr"/>
+          <a:bodyPr wrap="none" lIns="0" tIns="0" rIns="0" bIns="0" rtlCol="0" anchor="t"/>
           <a:lstStyle/>
           <a:p>
             <a:pPr algn="l" indent="0" marL="0" eaLnBrk="1" latinLnBrk="0" hangingPunct="1">
@@ -29889,7 +29889,7 @@
           <a:ln/>
         </p:spPr>
         <p:txBody>
-          <a:bodyPr wrap="square" lIns="0" tIns="0" rIns="0" bIns="0" rtlCol="0" anchor="ctr"/>
+          <a:bodyPr wrap="square" lIns="0" tIns="0" rIns="0" bIns="0" rtlCol="0" anchor="t"/>
           <a:lstStyle/>
           <a:p>
             <a:pPr algn="l" indent="0" marL="0" eaLnBrk="1" latinLnBrk="0" hangingPunct="1">
@@ -30005,7 +30005,7 @@
           <a:ln/>
         </p:spPr>
         <p:txBody>
-          <a:bodyPr wrap="square" lIns="0" tIns="0" rIns="0" bIns="0" rtlCol="0" anchor="ctr"/>
+          <a:bodyPr wrap="square" lIns="0" tIns="0" rIns="0" bIns="0" rtlCol="0" anchor="t"/>
           <a:lstStyle/>
           <a:p>
             <a:pPr algn="l" indent="0" marL="0" eaLnBrk="1" latinLnBrk="0" hangingPunct="1">
@@ -30121,7 +30121,7 @@
           <a:ln/>
         </p:spPr>
         <p:txBody>
-          <a:bodyPr wrap="none" lIns="0" tIns="0" rIns="0" bIns="0" rtlCol="0" anchor="ctr"/>
+          <a:bodyPr wrap="none" lIns="0" tIns="0" rIns="0" bIns="0" rtlCol="0" anchor="t"/>
           <a:lstStyle/>
           <a:p>
             <a:pPr algn="l" indent="0" marL="0" eaLnBrk="1" latinLnBrk="0" hangingPunct="1">
@@ -30217,7 +30217,7 @@
           <a:ln/>
         </p:spPr>
         <p:txBody>
-          <a:bodyPr wrap="square" lIns="0" tIns="0" rIns="0" bIns="0" rtlCol="0" anchor="ctr"/>
+          <a:bodyPr wrap="square" lIns="0" tIns="0" rIns="0" bIns="0" rtlCol="0" anchor="t"/>
           <a:lstStyle/>
           <a:p>
             <a:pPr algn="l" indent="0" marL="0" eaLnBrk="1" latinLnBrk="0" hangingPunct="1">
@@ -30333,7 +30333,7 @@
           <a:ln/>
         </p:spPr>
         <p:txBody>
-          <a:bodyPr wrap="square" lIns="0" tIns="0" rIns="0" bIns="0" rtlCol="0" anchor="ctr"/>
+          <a:bodyPr wrap="square" lIns="0" tIns="0" rIns="0" bIns="0" rtlCol="0" anchor="t"/>
           <a:lstStyle/>
           <a:p>
             <a:pPr algn="l" indent="0" marL="0" eaLnBrk="1" latinLnBrk="0" hangingPunct="1">
@@ -30449,7 +30449,7 @@
           <a:ln/>
         </p:spPr>
         <p:txBody>
-          <a:bodyPr wrap="none" lIns="0" tIns="0" rIns="0" bIns="0" rtlCol="0" anchor="ctr"/>
+          <a:bodyPr wrap="none" lIns="0" tIns="0" rIns="0" bIns="0" rtlCol="0" anchor="t"/>
           <a:lstStyle/>
           <a:p>
             <a:pPr algn="l" indent="0" marL="0" eaLnBrk="1" latinLnBrk="0" hangingPunct="1">
@@ -30545,7 +30545,7 @@
           <a:ln/>
         </p:spPr>
         <p:txBody>
-          <a:bodyPr wrap="square" lIns="0" tIns="0" rIns="0" bIns="0" rtlCol="0" anchor="ctr"/>
+          <a:bodyPr wrap="square" lIns="0" tIns="0" rIns="0" bIns="0" rtlCol="0" anchor="t"/>
           <a:lstStyle/>
           <a:p>
             <a:pPr algn="l" indent="0" marL="0" eaLnBrk="1" latinLnBrk="0" hangingPunct="1">
@@ -30661,7 +30661,7 @@
           <a:ln/>
         </p:spPr>
         <p:txBody>
-          <a:bodyPr wrap="square" lIns="0" tIns="0" rIns="0" bIns="0" rtlCol="0" anchor="ctr"/>
+          <a:bodyPr wrap="square" lIns="0" tIns="0" rIns="0" bIns="0" rtlCol="0" anchor="t"/>
           <a:lstStyle/>
           <a:p>
             <a:pPr algn="l" indent="0" marL="0" eaLnBrk="1" latinLnBrk="0" hangingPunct="1">
@@ -30777,7 +30777,7 @@
           <a:ln/>
         </p:spPr>
         <p:txBody>
-          <a:bodyPr wrap="none" lIns="0" tIns="0" rIns="0" bIns="0" rtlCol="0" anchor="ctr"/>
+          <a:bodyPr wrap="none" lIns="0" tIns="0" rIns="0" bIns="0" rtlCol="0" anchor="t"/>
           <a:lstStyle/>
           <a:p>
             <a:pPr algn="just" indent="0" marL="0" eaLnBrk="1" latinLnBrk="0" hangingPunct="1">
@@ -30819,7 +30819,7 @@
           <a:ln/>
         </p:spPr>
         <p:txBody>
-          <a:bodyPr wrap="none" lIns="0" tIns="0" rIns="0" bIns="0" rtlCol="0" anchor="ctr"/>
+          <a:bodyPr wrap="none" lIns="0" tIns="0" rIns="0" bIns="0" rtlCol="0" anchor="t"/>
           <a:lstStyle/>
           <a:p>
             <a:pPr algn="just" indent="0" marL="0" eaLnBrk="1" latinLnBrk="0" hangingPunct="1">
@@ -30861,7 +30861,7 @@
           <a:ln/>
         </p:spPr>
         <p:txBody>
-          <a:bodyPr wrap="none" lIns="0" tIns="0" rIns="0" bIns="0" rtlCol="0" anchor="ctr"/>
+          <a:bodyPr wrap="none" lIns="0" tIns="0" rIns="0" bIns="0" rtlCol="0" anchor="t"/>
           <a:lstStyle/>
           <a:p>
             <a:pPr algn="l" indent="0" marL="0" eaLnBrk="1" latinLnBrk="0" hangingPunct="1">
@@ -30903,7 +30903,7 @@
           <a:ln/>
         </p:spPr>
         <p:txBody>
-          <a:bodyPr wrap="none" lIns="0" tIns="0" rIns="0" bIns="0" rtlCol="0" anchor="ctr"/>
+          <a:bodyPr wrap="none" lIns="0" tIns="0" rIns="0" bIns="0" rtlCol="0" anchor="t"/>
           <a:lstStyle/>
           <a:p>
             <a:pPr algn="r" indent="0" marL="0" eaLnBrk="1" latinLnBrk="0" hangingPunct="1">
@@ -30945,7 +30945,7 @@
           <a:ln/>
         </p:spPr>
         <p:txBody>
-          <a:bodyPr wrap="none" lIns="0" tIns="0" rIns="0" bIns="0" rtlCol="0" anchor="ctr"/>
+          <a:bodyPr wrap="none" lIns="0" tIns="0" rIns="0" bIns="0" rtlCol="0" anchor="t"/>
           <a:lstStyle/>
           <a:p>
             <a:pPr algn="l" indent="0" marL="0" eaLnBrk="1" latinLnBrk="0" hangingPunct="1">
@@ -31100,7 +31100,7 @@
           <a:ln/>
         </p:spPr>
         <p:txBody>
-          <a:bodyPr wrap="none" lIns="0" tIns="0" rIns="0" bIns="0" rtlCol="0" anchor="ctr"/>
+          <a:bodyPr wrap="none" lIns="0" tIns="0" rIns="0" bIns="0" rtlCol="0" anchor="t"/>
           <a:lstStyle/>
           <a:p>
             <a:pPr algn="ctr" indent="0" marL="0" eaLnBrk="1" latinLnBrk="0" hangingPunct="1">
@@ -31169,7 +31169,7 @@
           <a:ln/>
         </p:spPr>
         <p:txBody>
-          <a:bodyPr wrap="none" lIns="0" tIns="0" rIns="0" bIns="0" rtlCol="0" anchor="ctr"/>
+          <a:bodyPr wrap="none" lIns="0" tIns="0" rIns="0" bIns="0" rtlCol="0" anchor="t"/>
           <a:lstStyle/>
           <a:p>
             <a:pPr algn="ctr" indent="0" marL="0" eaLnBrk="1" latinLnBrk="0" hangingPunct="1">
@@ -31211,7 +31211,7 @@
           <a:ln/>
         </p:spPr>
         <p:txBody>
-          <a:bodyPr wrap="none" lIns="0" tIns="0" rIns="0" bIns="0" rtlCol="0" anchor="ctr"/>
+          <a:bodyPr wrap="none" lIns="0" tIns="0" rIns="0" bIns="0" rtlCol="0" anchor="t"/>
           <a:lstStyle/>
           <a:p>
             <a:pPr algn="ctr" indent="0" marL="0" eaLnBrk="1" latinLnBrk="0" hangingPunct="1">
@@ -31366,7 +31366,7 @@
           <a:ln/>
         </p:spPr>
         <p:txBody>
-          <a:bodyPr wrap="none" lIns="0" tIns="0" rIns="0" bIns="0" rtlCol="0" anchor="ctr"/>
+          <a:bodyPr wrap="none" lIns="0" tIns="0" rIns="0" bIns="0" rtlCol="0" anchor="t"/>
           <a:lstStyle/>
           <a:p>
             <a:pPr algn="l" indent="0" marL="0" eaLnBrk="1" latinLnBrk="0" hangingPunct="1">
@@ -31405,7 +31405,7 @@
           <a:ln/>
         </p:spPr>
         <p:txBody>
-          <a:bodyPr wrap="none" lIns="0" tIns="0" rIns="0" bIns="0" rtlCol="0" anchor="ctr"/>
+          <a:bodyPr wrap="none" lIns="0" tIns="0" rIns="0" bIns="0" rtlCol="0" anchor="t"/>
           <a:lstStyle/>
           <a:p>
             <a:pPr algn="l" indent="0" marL="0" eaLnBrk="1" latinLnBrk="0" hangingPunct="1">
@@ -31447,7 +31447,7 @@
           <a:ln/>
         </p:spPr>
         <p:txBody>
-          <a:bodyPr wrap="none" lIns="0" tIns="0" rIns="0" bIns="0" rtlCol="0" anchor="ctr"/>
+          <a:bodyPr wrap="none" lIns="0" tIns="0" rIns="0" bIns="0" rtlCol="0" anchor="t"/>
           <a:lstStyle/>
           <a:p>
             <a:pPr algn="l" indent="0" marL="0" eaLnBrk="1" latinLnBrk="0" hangingPunct="1">
@@ -31540,7 +31540,7 @@
           <a:ln/>
         </p:spPr>
         <p:txBody>
-          <a:bodyPr wrap="none" lIns="0" tIns="0" rIns="0" bIns="0" rtlCol="0" anchor="ctr"/>
+          <a:bodyPr wrap="none" lIns="0" tIns="0" rIns="0" bIns="0" rtlCol="0" anchor="t"/>
           <a:lstStyle/>
           <a:p>
             <a:pPr algn="l" indent="0" marL="0" eaLnBrk="1" latinLnBrk="0" hangingPunct="1">
@@ -31630,7 +31630,7 @@
           <a:ln/>
         </p:spPr>
         <p:txBody>
-          <a:bodyPr wrap="none" lIns="0" tIns="0" rIns="0" bIns="0" rtlCol="0" anchor="ctr"/>
+          <a:bodyPr wrap="none" lIns="0" tIns="0" rIns="0" bIns="0" rtlCol="0" anchor="t"/>
           <a:lstStyle/>
           <a:p>
             <a:pPr algn="ctr" indent="0" marL="0" eaLnBrk="1" latinLnBrk="0" hangingPunct="1">
@@ -31672,7 +31672,7 @@
           <a:ln/>
         </p:spPr>
         <p:txBody>
-          <a:bodyPr wrap="square" lIns="0" tIns="0" rIns="0" bIns="0" rtlCol="0" anchor="ctr"/>
+          <a:bodyPr wrap="square" lIns="0" tIns="0" rIns="0" bIns="0" rtlCol="0" anchor="t"/>
           <a:lstStyle/>
           <a:p>
             <a:pPr algn="just" marL="243840" indent="-243840" eaLnBrk="1" latinLnBrk="0" hangingPunct="1">
@@ -31715,7 +31715,7 @@
           <a:ln/>
         </p:spPr>
         <p:txBody>
-          <a:bodyPr wrap="square" lIns="0" tIns="0" rIns="0" bIns="0" rtlCol="0" anchor="ctr"/>
+          <a:bodyPr wrap="square" lIns="0" tIns="0" rIns="0" bIns="0" rtlCol="0" anchor="t"/>
           <a:lstStyle/>
           <a:p>
             <a:pPr algn="just" marL="243840" indent="-243840" eaLnBrk="1" latinLnBrk="0" hangingPunct="1">
@@ -31758,7 +31758,7 @@
           <a:ln/>
         </p:spPr>
         <p:txBody>
-          <a:bodyPr wrap="square" lIns="0" tIns="0" rIns="0" bIns="0" rtlCol="0" anchor="ctr"/>
+          <a:bodyPr wrap="square" lIns="0" tIns="0" rIns="0" bIns="0" rtlCol="0" anchor="t"/>
           <a:lstStyle/>
           <a:p>
             <a:pPr algn="just" marL="243840" indent="-243840" eaLnBrk="1" latinLnBrk="0" hangingPunct="1">
@@ -31801,7 +31801,7 @@
           <a:ln/>
         </p:spPr>
         <p:txBody>
-          <a:bodyPr wrap="none" lIns="0" tIns="0" rIns="0" bIns="0" rtlCol="0" anchor="ctr"/>
+          <a:bodyPr wrap="none" lIns="0" tIns="0" rIns="0" bIns="0" rtlCol="0" anchor="t"/>
           <a:lstStyle/>
           <a:p>
             <a:pPr algn="just" marL="243840" indent="-243840" eaLnBrk="1" latinLnBrk="0" hangingPunct="1">
@@ -31892,7 +31892,7 @@
           <a:ln/>
         </p:spPr>
         <p:txBody>
-          <a:bodyPr wrap="none" lIns="0" tIns="0" rIns="0" bIns="0" rtlCol="0" anchor="ctr"/>
+          <a:bodyPr wrap="none" lIns="0" tIns="0" rIns="0" bIns="0" rtlCol="0" anchor="t"/>
           <a:lstStyle/>
           <a:p>
             <a:pPr algn="ctr" indent="0" marL="0" eaLnBrk="1" latinLnBrk="0" hangingPunct="1">
@@ -31934,7 +31934,7 @@
           <a:ln/>
         </p:spPr>
         <p:txBody>
-          <a:bodyPr wrap="square" lIns="0" tIns="0" rIns="0" bIns="0" rtlCol="0" anchor="ctr"/>
+          <a:bodyPr wrap="square" lIns="0" tIns="0" rIns="0" bIns="0" rtlCol="0" anchor="t"/>
           <a:lstStyle/>
           <a:p>
             <a:pPr algn="just" marL="243840" indent="-243840" eaLnBrk="1" latinLnBrk="0" hangingPunct="1">
@@ -31977,7 +31977,7 @@
           <a:ln/>
         </p:spPr>
         <p:txBody>
-          <a:bodyPr wrap="square" lIns="0" tIns="0" rIns="0" bIns="0" rtlCol="0" anchor="ctr"/>
+          <a:bodyPr wrap="square" lIns="0" tIns="0" rIns="0" bIns="0" rtlCol="0" anchor="t"/>
           <a:lstStyle/>
           <a:p>
             <a:pPr algn="just" marL="243840" indent="-243840" eaLnBrk="1" latinLnBrk="0" hangingPunct="1">
@@ -32020,7 +32020,7 @@
           <a:ln/>
         </p:spPr>
         <p:txBody>
-          <a:bodyPr wrap="square" lIns="0" tIns="0" rIns="0" bIns="0" rtlCol="0" anchor="ctr"/>
+          <a:bodyPr wrap="square" lIns="0" tIns="0" rIns="0" bIns="0" rtlCol="0" anchor="t"/>
           <a:lstStyle/>
           <a:p>
             <a:pPr algn="just" marL="243840" indent="-243840" eaLnBrk="1" latinLnBrk="0" hangingPunct="1">
@@ -32063,7 +32063,7 @@
           <a:ln/>
         </p:spPr>
         <p:txBody>
-          <a:bodyPr wrap="none" lIns="0" tIns="0" rIns="0" bIns="0" rtlCol="0" anchor="ctr"/>
+          <a:bodyPr wrap="none" lIns="0" tIns="0" rIns="0" bIns="0" rtlCol="0" anchor="t"/>
           <a:lstStyle/>
           <a:p>
             <a:pPr algn="just" marL="243840" indent="-243840" eaLnBrk="1" latinLnBrk="0" hangingPunct="1">
@@ -32154,7 +32154,7 @@
           <a:ln/>
         </p:spPr>
         <p:txBody>
-          <a:bodyPr wrap="none" lIns="0" tIns="0" rIns="0" bIns="0" rtlCol="0" anchor="ctr"/>
+          <a:bodyPr wrap="none" lIns="0" tIns="0" rIns="0" bIns="0" rtlCol="0" anchor="t"/>
           <a:lstStyle/>
           <a:p>
             <a:pPr algn="ctr" indent="0" marL="0" eaLnBrk="1" latinLnBrk="0" hangingPunct="1">
@@ -32196,7 +32196,7 @@
           <a:ln/>
         </p:spPr>
         <p:txBody>
-          <a:bodyPr wrap="square" lIns="0" tIns="0" rIns="0" bIns="0" rtlCol="0" anchor="ctr"/>
+          <a:bodyPr wrap="square" lIns="0" tIns="0" rIns="0" bIns="0" rtlCol="0" anchor="t"/>
           <a:lstStyle/>
           <a:p>
             <a:pPr algn="just" marL="243840" indent="-243840" eaLnBrk="1" latinLnBrk="0" hangingPunct="1">
@@ -32239,7 +32239,7 @@
           <a:ln/>
         </p:spPr>
         <p:txBody>
-          <a:bodyPr wrap="square" lIns="0" tIns="0" rIns="0" bIns="0" rtlCol="0" anchor="ctr"/>
+          <a:bodyPr wrap="square" lIns="0" tIns="0" rIns="0" bIns="0" rtlCol="0" anchor="t"/>
           <a:lstStyle/>
           <a:p>
             <a:pPr algn="just" marL="243840" indent="-243840" eaLnBrk="1" latinLnBrk="0" hangingPunct="1">
@@ -32282,7 +32282,7 @@
           <a:ln/>
         </p:spPr>
         <p:txBody>
-          <a:bodyPr wrap="square" lIns="0" tIns="0" rIns="0" bIns="0" rtlCol="0" anchor="ctr"/>
+          <a:bodyPr wrap="square" lIns="0" tIns="0" rIns="0" bIns="0" rtlCol="0" anchor="t"/>
           <a:lstStyle/>
           <a:p>
             <a:pPr algn="just" marL="243840" indent="-243840" eaLnBrk="1" latinLnBrk="0" hangingPunct="1">
@@ -32325,7 +32325,7 @@
           <a:ln/>
         </p:spPr>
         <p:txBody>
-          <a:bodyPr wrap="none" lIns="0" tIns="0" rIns="0" bIns="0" rtlCol="0" anchor="ctr"/>
+          <a:bodyPr wrap="none" lIns="0" tIns="0" rIns="0" bIns="0" rtlCol="0" anchor="t"/>
           <a:lstStyle/>
           <a:p>
             <a:pPr algn="just" marL="243840" indent="-243840" eaLnBrk="1" latinLnBrk="0" hangingPunct="1">
@@ -32395,7 +32395,7 @@
           <a:ln/>
         </p:spPr>
         <p:txBody>
-          <a:bodyPr wrap="none" lIns="0" tIns="0" rIns="0" bIns="0" rtlCol="0" anchor="ctr"/>
+          <a:bodyPr wrap="none" lIns="0" tIns="0" rIns="0" bIns="0" rtlCol="0" anchor="t"/>
           <a:lstStyle/>
           <a:p>
             <a:pPr algn="ctr" indent="0" marL="0" eaLnBrk="1" latinLnBrk="0" hangingPunct="1">
@@ -32437,7 +32437,7 @@
           <a:ln/>
         </p:spPr>
         <p:txBody>
-          <a:bodyPr wrap="none" lIns="0" tIns="0" rIns="0" bIns="0" rtlCol="0" anchor="ctr"/>
+          <a:bodyPr wrap="none" lIns="0" tIns="0" rIns="0" bIns="0" rtlCol="0" anchor="t"/>
           <a:lstStyle/>
           <a:p>
             <a:pPr algn="l" indent="0" marL="0" eaLnBrk="1" latinLnBrk="0" hangingPunct="1">
@@ -32479,7 +32479,7 @@
           <a:ln/>
         </p:spPr>
         <p:txBody>
-          <a:bodyPr wrap="none" lIns="0" tIns="0" rIns="0" bIns="0" rtlCol="0" anchor="ctr"/>
+          <a:bodyPr wrap="none" lIns="0" tIns="0" rIns="0" bIns="0" rtlCol="0" anchor="t"/>
           <a:lstStyle/>
           <a:p>
             <a:pPr algn="r" indent="0" marL="0" eaLnBrk="1" latinLnBrk="0" hangingPunct="1">
@@ -32521,7 +32521,7 @@
           <a:ln/>
         </p:spPr>
         <p:txBody>
-          <a:bodyPr wrap="none" lIns="0" tIns="0" rIns="0" bIns="0" rtlCol="0" anchor="ctr"/>
+          <a:bodyPr wrap="none" lIns="0" tIns="0" rIns="0" bIns="0" rtlCol="0" anchor="t"/>
           <a:lstStyle/>
           <a:p>
             <a:pPr algn="l" indent="0" marL="0" eaLnBrk="1" latinLnBrk="0" hangingPunct="1">
@@ -32703,7 +32703,7 @@
           <a:ln/>
         </p:spPr>
         <p:txBody>
-          <a:bodyPr wrap="none" lIns="0" tIns="0" rIns="0" bIns="0" rtlCol="0" anchor="ctr"/>
+          <a:bodyPr wrap="none" lIns="0" tIns="0" rIns="0" bIns="0" rtlCol="0" anchor="t"/>
           <a:lstStyle/>
           <a:p>
             <a:pPr algn="l" indent="0" marL="0" eaLnBrk="1" latinLnBrk="0" hangingPunct="1">
@@ -32742,7 +32742,7 @@
           <a:ln/>
         </p:spPr>
         <p:txBody>
-          <a:bodyPr wrap="none" lIns="0" tIns="0" rIns="0" bIns="0" rtlCol="0" anchor="ctr"/>
+          <a:bodyPr wrap="none" lIns="0" tIns="0" rIns="0" bIns="0" rtlCol="0" anchor="t"/>
           <a:lstStyle/>
           <a:p>
             <a:pPr algn="l" indent="0" marL="0" eaLnBrk="1" latinLnBrk="0" hangingPunct="1">
@@ -32784,7 +32784,7 @@
           <a:ln/>
         </p:spPr>
         <p:txBody>
-          <a:bodyPr wrap="none" lIns="0" tIns="0" rIns="0" bIns="0" rtlCol="0" anchor="ctr"/>
+          <a:bodyPr wrap="none" lIns="0" tIns="0" rIns="0" bIns="0" rtlCol="0" anchor="t"/>
           <a:lstStyle/>
           <a:p>
             <a:pPr algn="l" indent="0" marL="0" eaLnBrk="1" latinLnBrk="0" hangingPunct="1">
@@ -32877,7 +32877,7 @@
           <a:ln/>
         </p:spPr>
         <p:txBody>
-          <a:bodyPr wrap="none" lIns="0" tIns="0" rIns="0" bIns="0" rtlCol="0" anchor="ctr"/>
+          <a:bodyPr wrap="none" lIns="0" tIns="0" rIns="0" bIns="0" rtlCol="0" anchor="t"/>
           <a:lstStyle/>
           <a:p>
             <a:pPr algn="l" indent="0" marL="0" eaLnBrk="1" latinLnBrk="0" hangingPunct="1">
@@ -32946,7 +32946,7 @@
           <a:ln/>
         </p:spPr>
         <p:txBody>
-          <a:bodyPr wrap="none" lIns="0" tIns="0" rIns="0" bIns="0" rtlCol="0" anchor="ctr"/>
+          <a:bodyPr wrap="none" lIns="0" tIns="0" rIns="0" bIns="0" rtlCol="0" anchor="t"/>
           <a:lstStyle/>
           <a:p>
             <a:pPr algn="l" indent="0" marL="0" eaLnBrk="1" latinLnBrk="0" hangingPunct="1">
@@ -32988,7 +32988,7 @@
           <a:ln/>
         </p:spPr>
         <p:txBody>
-          <a:bodyPr wrap="none" lIns="0" tIns="0" rIns="0" bIns="0" rtlCol="0" anchor="ctr"/>
+          <a:bodyPr wrap="none" lIns="0" tIns="0" rIns="0" bIns="0" rtlCol="0" anchor="t"/>
           <a:lstStyle/>
           <a:p>
             <a:pPr algn="just" marL="243840" indent="-243840" eaLnBrk="1" latinLnBrk="0" hangingPunct="1">
@@ -33031,7 +33031,7 @@
           <a:ln/>
         </p:spPr>
         <p:txBody>
-          <a:bodyPr wrap="none" lIns="0" tIns="0" rIns="0" bIns="0" rtlCol="0" anchor="ctr"/>
+          <a:bodyPr wrap="none" lIns="0" tIns="0" rIns="0" bIns="0" rtlCol="0" anchor="t"/>
           <a:lstStyle/>
           <a:p>
             <a:pPr algn="just" marL="243840" indent="-243840" eaLnBrk="1" latinLnBrk="0" hangingPunct="1">
@@ -33074,7 +33074,7 @@
           <a:ln/>
         </p:spPr>
         <p:txBody>
-          <a:bodyPr wrap="square" lIns="0" tIns="0" rIns="0" bIns="0" rtlCol="0" anchor="ctr"/>
+          <a:bodyPr wrap="square" lIns="0" tIns="0" rIns="0" bIns="0" rtlCol="0" anchor="t"/>
           <a:lstStyle/>
           <a:p>
             <a:pPr algn="just" marL="243840" indent="-243840" eaLnBrk="1" latinLnBrk="0" hangingPunct="1">
@@ -33117,7 +33117,7 @@
           <a:ln/>
         </p:spPr>
         <p:txBody>
-          <a:bodyPr wrap="none" lIns="0" tIns="0" rIns="0" bIns="0" rtlCol="0" anchor="ctr"/>
+          <a:bodyPr wrap="none" lIns="0" tIns="0" rIns="0" bIns="0" rtlCol="0" anchor="t"/>
           <a:lstStyle/>
           <a:p>
             <a:pPr algn="just" marL="243840" indent="-243840" eaLnBrk="1" latinLnBrk="0" hangingPunct="1">
@@ -33187,7 +33187,7 @@
           <a:ln/>
         </p:spPr>
         <p:txBody>
-          <a:bodyPr wrap="none" lIns="0" tIns="0" rIns="0" bIns="0" rtlCol="0" anchor="ctr"/>
+          <a:bodyPr wrap="none" lIns="0" tIns="0" rIns="0" bIns="0" rtlCol="0" anchor="t"/>
           <a:lstStyle/>
           <a:p>
             <a:pPr algn="l" indent="0" marL="0" eaLnBrk="1" latinLnBrk="0" hangingPunct="1">
@@ -33229,7 +33229,7 @@
           <a:ln/>
         </p:spPr>
         <p:txBody>
-          <a:bodyPr wrap="none" lIns="0" tIns="0" rIns="0" bIns="0" rtlCol="0" anchor="ctr"/>
+          <a:bodyPr wrap="none" lIns="0" tIns="0" rIns="0" bIns="0" rtlCol="0" anchor="t"/>
           <a:lstStyle/>
           <a:p>
             <a:pPr algn="just" marL="243840" indent="-243840" eaLnBrk="1" latinLnBrk="0" hangingPunct="1">
@@ -33272,7 +33272,7 @@
           <a:ln/>
         </p:spPr>
         <p:txBody>
-          <a:bodyPr wrap="none" lIns="0" tIns="0" rIns="0" bIns="0" rtlCol="0" anchor="ctr"/>
+          <a:bodyPr wrap="none" lIns="0" tIns="0" rIns="0" bIns="0" rtlCol="0" anchor="t"/>
           <a:lstStyle/>
           <a:p>
             <a:pPr algn="just" marL="243840" indent="-243840" eaLnBrk="1" latinLnBrk="0" hangingPunct="1">
@@ -33315,7 +33315,7 @@
           <a:ln/>
         </p:spPr>
         <p:txBody>
-          <a:bodyPr wrap="none" lIns="0" tIns="0" rIns="0" bIns="0" rtlCol="0" anchor="ctr"/>
+          <a:bodyPr wrap="none" lIns="0" tIns="0" rIns="0" bIns="0" rtlCol="0" anchor="t"/>
           <a:lstStyle/>
           <a:p>
             <a:pPr algn="just" marL="243840" indent="-243840" eaLnBrk="1" latinLnBrk="0" hangingPunct="1">
@@ -33358,7 +33358,7 @@
           <a:ln/>
         </p:spPr>
         <p:txBody>
-          <a:bodyPr wrap="none" lIns="0" tIns="0" rIns="0" bIns="0" rtlCol="0" anchor="ctr"/>
+          <a:bodyPr wrap="none" lIns="0" tIns="0" rIns="0" bIns="0" rtlCol="0" anchor="t"/>
           <a:lstStyle/>
           <a:p>
             <a:pPr algn="just" marL="243840" indent="-243840" eaLnBrk="1" latinLnBrk="0" hangingPunct="1">
@@ -33428,7 +33428,7 @@
           <a:ln/>
         </p:spPr>
         <p:txBody>
-          <a:bodyPr wrap="none" lIns="0" tIns="0" rIns="0" bIns="0" rtlCol="0" anchor="ctr"/>
+          <a:bodyPr wrap="none" lIns="0" tIns="0" rIns="0" bIns="0" rtlCol="0" anchor="t"/>
           <a:lstStyle/>
           <a:p>
             <a:pPr algn="l" indent="0" marL="0" eaLnBrk="1" latinLnBrk="0" hangingPunct="1">
@@ -33470,7 +33470,7 @@
           <a:ln/>
         </p:spPr>
         <p:txBody>
-          <a:bodyPr wrap="none" lIns="0" tIns="0" rIns="0" bIns="0" rtlCol="0" anchor="ctr"/>
+          <a:bodyPr wrap="none" lIns="0" tIns="0" rIns="0" bIns="0" rtlCol="0" anchor="t"/>
           <a:lstStyle/>
           <a:p>
             <a:pPr algn="just" marL="243840" indent="-243840" eaLnBrk="1" latinLnBrk="0" hangingPunct="1">
@@ -33513,7 +33513,7 @@
           <a:ln/>
         </p:spPr>
         <p:txBody>
-          <a:bodyPr wrap="none" lIns="0" tIns="0" rIns="0" bIns="0" rtlCol="0" anchor="ctr"/>
+          <a:bodyPr wrap="none" lIns="0" tIns="0" rIns="0" bIns="0" rtlCol="0" anchor="t"/>
           <a:lstStyle/>
           <a:p>
             <a:pPr algn="just" marL="243840" indent="-243840" eaLnBrk="1" latinLnBrk="0" hangingPunct="1">
@@ -33556,7 +33556,7 @@
           <a:ln/>
         </p:spPr>
         <p:txBody>
-          <a:bodyPr wrap="none" lIns="0" tIns="0" rIns="0" bIns="0" rtlCol="0" anchor="ctr"/>
+          <a:bodyPr wrap="none" lIns="0" tIns="0" rIns="0" bIns="0" rtlCol="0" anchor="t"/>
           <a:lstStyle/>
           <a:p>
             <a:pPr algn="just" marL="243840" indent="-243840" eaLnBrk="1" latinLnBrk="0" hangingPunct="1">
@@ -33599,7 +33599,7 @@
           <a:ln/>
         </p:spPr>
         <p:txBody>
-          <a:bodyPr wrap="none" lIns="0" tIns="0" rIns="0" bIns="0" rtlCol="0" anchor="ctr"/>
+          <a:bodyPr wrap="none" lIns="0" tIns="0" rIns="0" bIns="0" rtlCol="0" anchor="t"/>
           <a:lstStyle/>
           <a:p>
             <a:pPr algn="just" marL="243840" indent="-243840" eaLnBrk="1" latinLnBrk="0" hangingPunct="1">
@@ -33669,7 +33669,7 @@
           <a:ln/>
         </p:spPr>
         <p:txBody>
-          <a:bodyPr wrap="none" lIns="0" tIns="0" rIns="0" bIns="0" rtlCol="0" anchor="ctr"/>
+          <a:bodyPr wrap="none" lIns="0" tIns="0" rIns="0" bIns="0" rtlCol="0" anchor="t"/>
           <a:lstStyle/>
           <a:p>
             <a:pPr algn="l" indent="0" marL="0" eaLnBrk="1" latinLnBrk="0" hangingPunct="1">
@@ -33711,7 +33711,7 @@
           <a:ln/>
         </p:spPr>
         <p:txBody>
-          <a:bodyPr wrap="none" lIns="0" tIns="0" rIns="0" bIns="0" rtlCol="0" anchor="ctr"/>
+          <a:bodyPr wrap="none" lIns="0" tIns="0" rIns="0" bIns="0" rtlCol="0" anchor="t"/>
           <a:lstStyle/>
           <a:p>
             <a:pPr algn="just" indent="0" marL="0" eaLnBrk="1" latinLnBrk="0" hangingPunct="1">
@@ -33807,7 +33807,7 @@
           <a:ln/>
         </p:spPr>
         <p:txBody>
-          <a:bodyPr wrap="none" lIns="0" tIns="0" rIns="0" bIns="0" rtlCol="0" anchor="ctr"/>
+          <a:bodyPr wrap="none" lIns="0" tIns="0" rIns="0" bIns="0" rtlCol="0" anchor="t"/>
           <a:lstStyle/>
           <a:p>
             <a:pPr algn="l" indent="0" marL="0" eaLnBrk="1" latinLnBrk="0" hangingPunct="1">
@@ -33849,7 +33849,7 @@
           <a:ln/>
         </p:spPr>
         <p:txBody>
-          <a:bodyPr wrap="none" lIns="0" tIns="0" rIns="0" bIns="0" rtlCol="0" anchor="ctr"/>
+          <a:bodyPr wrap="none" lIns="0" tIns="0" rIns="0" bIns="0" rtlCol="0" anchor="t"/>
           <a:lstStyle/>
           <a:p>
             <a:pPr algn="just" indent="0" marL="0" eaLnBrk="1" latinLnBrk="0" hangingPunct="1">
@@ -33945,7 +33945,7 @@
           <a:ln/>
         </p:spPr>
         <p:txBody>
-          <a:bodyPr wrap="none" lIns="0" tIns="0" rIns="0" bIns="0" rtlCol="0" anchor="ctr"/>
+          <a:bodyPr wrap="none" lIns="0" tIns="0" rIns="0" bIns="0" rtlCol="0" anchor="t"/>
           <a:lstStyle/>
           <a:p>
             <a:pPr algn="l" indent="0" marL="0" eaLnBrk="1" latinLnBrk="0" hangingPunct="1">
@@ -33987,7 +33987,7 @@
           <a:ln/>
         </p:spPr>
         <p:txBody>
-          <a:bodyPr wrap="none" lIns="0" tIns="0" rIns="0" bIns="0" rtlCol="0" anchor="ctr"/>
+          <a:bodyPr wrap="none" lIns="0" tIns="0" rIns="0" bIns="0" rtlCol="0" anchor="t"/>
           <a:lstStyle/>
           <a:p>
             <a:pPr algn="just" indent="0" marL="0" eaLnBrk="1" latinLnBrk="0" hangingPunct="1">
@@ -34056,7 +34056,7 @@
           <a:ln/>
         </p:spPr>
         <p:txBody>
-          <a:bodyPr wrap="none" lIns="0" tIns="0" rIns="0" bIns="0" rtlCol="0" anchor="ctr"/>
+          <a:bodyPr wrap="none" lIns="0" tIns="0" rIns="0" bIns="0" rtlCol="0" anchor="t"/>
           <a:lstStyle/>
           <a:p>
             <a:pPr algn="ctr" indent="0" marL="0" eaLnBrk="1" latinLnBrk="0" hangingPunct="1">
@@ -34098,7 +34098,7 @@
           <a:ln/>
         </p:spPr>
         <p:txBody>
-          <a:bodyPr wrap="none" lIns="0" tIns="0" rIns="0" bIns="0" rtlCol="0" anchor="ctr"/>
+          <a:bodyPr wrap="none" lIns="0" tIns="0" rIns="0" bIns="0" rtlCol="0" anchor="t"/>
           <a:lstStyle/>
           <a:p>
             <a:pPr algn="l" indent="0" marL="0" eaLnBrk="1" latinLnBrk="0" hangingPunct="1">
@@ -34142,7 +34142,7 @@
           <a:ln/>
         </p:spPr>
         <p:txBody>
-          <a:bodyPr wrap="none" lIns="0" tIns="0" rIns="0" bIns="0" rtlCol="0" anchor="ctr"/>
+          <a:bodyPr wrap="none" lIns="0" tIns="0" rIns="0" bIns="0" rtlCol="0" anchor="t"/>
           <a:lstStyle/>
           <a:p>
             <a:pPr algn="r" indent="0" marL="0" eaLnBrk="1" latinLnBrk="0" hangingPunct="1">
@@ -34191,7 +34191,7 @@
           <a:ln/>
         </p:spPr>
         <p:txBody>
-          <a:bodyPr wrap="none" lIns="0" tIns="0" rIns="0" bIns="0" rtlCol="0" anchor="ctr"/>
+          <a:bodyPr wrap="none" lIns="0" tIns="0" rIns="0" bIns="0" rtlCol="0" anchor="t"/>
           <a:lstStyle/>
           <a:p>
             <a:pPr algn="l" indent="0" marL="0" eaLnBrk="1" latinLnBrk="0" hangingPunct="1">
@@ -34316,7 +34316,7 @@
           <a:ln/>
         </p:spPr>
         <p:txBody>
-          <a:bodyPr wrap="none" lIns="0" tIns="0" rIns="0" bIns="0" rtlCol="0" anchor="ctr"/>
+          <a:bodyPr wrap="none" lIns="0" tIns="0" rIns="0" bIns="0" rtlCol="0" anchor="t"/>
           <a:lstStyle/>
           <a:p>
             <a:pPr algn="l" indent="0" marL="0" eaLnBrk="1" latinLnBrk="0" hangingPunct="1">
@@ -34355,7 +34355,7 @@
           <a:ln/>
         </p:spPr>
         <p:txBody>
-          <a:bodyPr wrap="none" lIns="0" tIns="0" rIns="0" bIns="0" rtlCol="0" anchor="ctr"/>
+          <a:bodyPr wrap="none" lIns="0" tIns="0" rIns="0" bIns="0" rtlCol="0" anchor="t"/>
           <a:lstStyle/>
           <a:p>
             <a:pPr algn="l" indent="0" marL="0" eaLnBrk="1" latinLnBrk="0" hangingPunct="1">
@@ -34397,7 +34397,7 @@
           <a:ln/>
         </p:spPr>
         <p:txBody>
-          <a:bodyPr wrap="none" lIns="0" tIns="0" rIns="0" bIns="0" rtlCol="0" anchor="ctr"/>
+          <a:bodyPr wrap="none" lIns="0" tIns="0" rIns="0" bIns="0" rtlCol="0" anchor="t"/>
           <a:lstStyle/>
           <a:p>
             <a:pPr algn="l" indent="0" marL="0" eaLnBrk="1" latinLnBrk="0" hangingPunct="1">
@@ -34463,7 +34463,7 @@
           <a:ln/>
         </p:spPr>
         <p:txBody>
-          <a:bodyPr wrap="none" lIns="0" tIns="0" rIns="0" bIns="0" rtlCol="0" anchor="ctr"/>
+          <a:bodyPr wrap="none" lIns="0" tIns="0" rIns="0" bIns="0" rtlCol="0" anchor="t"/>
           <a:lstStyle/>
           <a:p>
             <a:pPr algn="l" indent="0" marL="0" eaLnBrk="1" latinLnBrk="0" hangingPunct="1">
@@ -34505,7 +34505,7 @@
           <a:ln/>
         </p:spPr>
         <p:txBody>
-          <a:bodyPr wrap="none" lIns="0" tIns="0" rIns="0" bIns="0" rtlCol="0" anchor="ctr"/>
+          <a:bodyPr wrap="none" lIns="0" tIns="0" rIns="0" bIns="0" rtlCol="0" anchor="t"/>
           <a:lstStyle/>
           <a:p>
             <a:pPr algn="l" indent="0" marL="0" eaLnBrk="1" latinLnBrk="0" hangingPunct="1">
@@ -34547,7 +34547,7 @@
           <a:ln/>
         </p:spPr>
         <p:txBody>
-          <a:bodyPr wrap="none" lIns="0" tIns="0" rIns="0" bIns="0" rtlCol="0" anchor="ctr"/>
+          <a:bodyPr wrap="none" lIns="0" tIns="0" rIns="0" bIns="0" rtlCol="0" anchor="t"/>
           <a:lstStyle/>
           <a:p>
             <a:pPr algn="just" indent="0" marL="0" eaLnBrk="1" latinLnBrk="0" hangingPunct="1">
@@ -34589,7 +34589,7 @@
           <a:ln/>
         </p:spPr>
         <p:txBody>
-          <a:bodyPr wrap="none" lIns="0" tIns="0" rIns="0" bIns="0" rtlCol="0" anchor="ctr"/>
+          <a:bodyPr wrap="none" lIns="0" tIns="0" rIns="0" bIns="0" rtlCol="0" anchor="t"/>
           <a:lstStyle/>
           <a:p>
             <a:pPr algn="l" indent="0" marL="0" eaLnBrk="1" latinLnBrk="0" hangingPunct="1">
@@ -34631,7 +34631,7 @@
           <a:ln/>
         </p:spPr>
         <p:txBody>
-          <a:bodyPr wrap="none" lIns="0" tIns="0" rIns="0" bIns="0" rtlCol="0" anchor="ctr"/>
+          <a:bodyPr wrap="none" lIns="0" tIns="0" rIns="0" bIns="0" rtlCol="0" anchor="t"/>
           <a:lstStyle/>
           <a:p>
             <a:pPr algn="just" indent="0" marL="0" eaLnBrk="1" latinLnBrk="0" hangingPunct="1">
@@ -34673,7 +34673,7 @@
           <a:ln/>
         </p:spPr>
         <p:txBody>
-          <a:bodyPr wrap="none" lIns="0" tIns="0" rIns="0" bIns="0" rtlCol="0" anchor="ctr"/>
+          <a:bodyPr wrap="none" lIns="0" tIns="0" rIns="0" bIns="0" rtlCol="0" anchor="t"/>
           <a:lstStyle/>
           <a:p>
             <a:pPr algn="l" indent="0" marL="0" eaLnBrk="1" latinLnBrk="0" hangingPunct="1">
@@ -34715,7 +34715,7 @@
           <a:ln/>
         </p:spPr>
         <p:txBody>
-          <a:bodyPr wrap="none" lIns="0" tIns="0" rIns="0" bIns="0" rtlCol="0" anchor="ctr"/>
+          <a:bodyPr wrap="none" lIns="0" tIns="0" rIns="0" bIns="0" rtlCol="0" anchor="t"/>
           <a:lstStyle/>
           <a:p>
             <a:pPr algn="just" indent="0" marL="0" eaLnBrk="1" latinLnBrk="0" hangingPunct="1">
@@ -34757,7 +34757,7 @@
           <a:ln/>
         </p:spPr>
         <p:txBody>
-          <a:bodyPr wrap="none" lIns="0" tIns="0" rIns="0" bIns="0" rtlCol="0" anchor="ctr"/>
+          <a:bodyPr wrap="none" lIns="0" tIns="0" rIns="0" bIns="0" rtlCol="0" anchor="t"/>
           <a:lstStyle/>
           <a:p>
             <a:pPr algn="l" indent="0" marL="0" eaLnBrk="1" latinLnBrk="0" hangingPunct="1">
@@ -34799,7 +34799,7 @@
           <a:ln/>
         </p:spPr>
         <p:txBody>
-          <a:bodyPr wrap="none" lIns="0" tIns="0" rIns="0" bIns="0" rtlCol="0" anchor="ctr"/>
+          <a:bodyPr wrap="none" lIns="0" tIns="0" rIns="0" bIns="0" rtlCol="0" anchor="t"/>
           <a:lstStyle/>
           <a:p>
             <a:pPr algn="just" indent="0" marL="0" eaLnBrk="1" latinLnBrk="0" hangingPunct="1">
@@ -34841,7 +34841,7 @@
           <a:ln/>
         </p:spPr>
         <p:txBody>
-          <a:bodyPr wrap="none" lIns="0" tIns="0" rIns="0" bIns="0" rtlCol="0" anchor="ctr"/>
+          <a:bodyPr wrap="none" lIns="0" tIns="0" rIns="0" bIns="0" rtlCol="0" anchor="t"/>
           <a:lstStyle/>
           <a:p>
             <a:pPr algn="l" indent="0" marL="0" eaLnBrk="1" latinLnBrk="0" hangingPunct="1">
@@ -34883,7 +34883,7 @@
           <a:ln/>
         </p:spPr>
         <p:txBody>
-          <a:bodyPr wrap="square" lIns="0" tIns="0" rIns="0" bIns="0" rtlCol="0" anchor="ctr"/>
+          <a:bodyPr wrap="square" lIns="0" tIns="0" rIns="0" bIns="0" rtlCol="0" anchor="t"/>
           <a:lstStyle/>
           <a:p>
             <a:pPr algn="just" indent="0" marL="0" eaLnBrk="1" latinLnBrk="0" hangingPunct="1">
@@ -34925,7 +34925,7 @@
           <a:ln/>
         </p:spPr>
         <p:txBody>
-          <a:bodyPr wrap="none" lIns="0" tIns="0" rIns="0" bIns="0" rtlCol="0" anchor="ctr"/>
+          <a:bodyPr wrap="none" lIns="0" tIns="0" rIns="0" bIns="0" rtlCol="0" anchor="t"/>
           <a:lstStyle/>
           <a:p>
             <a:pPr algn="l" indent="0" marL="0" eaLnBrk="1" latinLnBrk="0" hangingPunct="1">
@@ -34967,7 +34967,7 @@
           <a:ln/>
         </p:spPr>
         <p:txBody>
-          <a:bodyPr wrap="none" lIns="0" tIns="0" rIns="0" bIns="0" rtlCol="0" anchor="ctr"/>
+          <a:bodyPr wrap="none" lIns="0" tIns="0" rIns="0" bIns="0" rtlCol="0" anchor="t"/>
           <a:lstStyle/>
           <a:p>
             <a:pPr algn="just" indent="0" marL="0" eaLnBrk="1" latinLnBrk="0" hangingPunct="1">
@@ -35009,7 +35009,7 @@
           <a:ln/>
         </p:spPr>
         <p:txBody>
-          <a:bodyPr wrap="none" lIns="0" tIns="0" rIns="0" bIns="0" rtlCol="0" anchor="ctr"/>
+          <a:bodyPr wrap="none" lIns="0" tIns="0" rIns="0" bIns="0" rtlCol="0" anchor="t"/>
           <a:lstStyle/>
           <a:p>
             <a:pPr algn="l" indent="0" marL="0" eaLnBrk="1" latinLnBrk="0" hangingPunct="1">
@@ -35051,7 +35051,7 @@
           <a:ln/>
         </p:spPr>
         <p:txBody>
-          <a:bodyPr wrap="none" lIns="0" tIns="0" rIns="0" bIns="0" rtlCol="0" anchor="ctr"/>
+          <a:bodyPr wrap="none" lIns="0" tIns="0" rIns="0" bIns="0" rtlCol="0" anchor="t"/>
           <a:lstStyle/>
           <a:p>
             <a:pPr algn="just" indent="0" marL="0" eaLnBrk="1" latinLnBrk="0" hangingPunct="1">
@@ -35093,7 +35093,7 @@
           <a:ln/>
         </p:spPr>
         <p:txBody>
-          <a:bodyPr wrap="none" lIns="0" tIns="0" rIns="0" bIns="0" rtlCol="0" anchor="ctr"/>
+          <a:bodyPr wrap="none" lIns="0" tIns="0" rIns="0" bIns="0" rtlCol="0" anchor="t"/>
           <a:lstStyle/>
           <a:p>
             <a:pPr algn="l" indent="0" marL="0" eaLnBrk="1" latinLnBrk="0" hangingPunct="1">
@@ -35135,7 +35135,7 @@
           <a:ln/>
         </p:spPr>
         <p:txBody>
-          <a:bodyPr wrap="square" lIns="0" tIns="0" rIns="0" bIns="0" rtlCol="0" anchor="ctr"/>
+          <a:bodyPr wrap="square" lIns="0" tIns="0" rIns="0" bIns="0" rtlCol="0" anchor="t"/>
           <a:lstStyle/>
           <a:p>
             <a:pPr algn="just" indent="0" marL="0" eaLnBrk="1" latinLnBrk="0" hangingPunct="1">
@@ -35177,7 +35177,7 @@
           <a:ln/>
         </p:spPr>
         <p:txBody>
-          <a:bodyPr wrap="none" lIns="0" tIns="0" rIns="0" bIns="0" rtlCol="0" anchor="ctr"/>
+          <a:bodyPr wrap="none" lIns="0" tIns="0" rIns="0" bIns="0" rtlCol="0" anchor="t"/>
           <a:lstStyle/>
           <a:p>
             <a:pPr algn="l" indent="0" marL="0" eaLnBrk="1" latinLnBrk="0" hangingPunct="1">
@@ -35219,7 +35219,7 @@
           <a:ln/>
         </p:spPr>
         <p:txBody>
-          <a:bodyPr wrap="none" lIns="0" tIns="0" rIns="0" bIns="0" rtlCol="0" anchor="ctr"/>
+          <a:bodyPr wrap="none" lIns="0" tIns="0" rIns="0" bIns="0" rtlCol="0" anchor="t"/>
           <a:lstStyle/>
           <a:p>
             <a:pPr algn="just" indent="0" marL="0" eaLnBrk="1" latinLnBrk="0" hangingPunct="1">
@@ -35261,7 +35261,7 @@
           <a:ln/>
         </p:spPr>
         <p:txBody>
-          <a:bodyPr wrap="none" lIns="0" tIns="0" rIns="0" bIns="0" rtlCol="0" anchor="ctr"/>
+          <a:bodyPr wrap="none" lIns="0" tIns="0" rIns="0" bIns="0" rtlCol="0" anchor="t"/>
           <a:lstStyle/>
           <a:p>
             <a:pPr algn="l" indent="0" marL="0" eaLnBrk="1" latinLnBrk="0" hangingPunct="1">
@@ -35303,7 +35303,7 @@
           <a:ln/>
         </p:spPr>
         <p:txBody>
-          <a:bodyPr wrap="square" lIns="0" tIns="0" rIns="0" bIns="0" rtlCol="0" anchor="ctr"/>
+          <a:bodyPr wrap="square" lIns="0" tIns="0" rIns="0" bIns="0" rtlCol="0" anchor="t"/>
           <a:lstStyle/>
           <a:p>
             <a:pPr algn="just" indent="0" marL="0" eaLnBrk="1" latinLnBrk="0" hangingPunct="1">
@@ -35345,7 +35345,7 @@
           <a:ln/>
         </p:spPr>
         <p:txBody>
-          <a:bodyPr wrap="none" lIns="0" tIns="0" rIns="0" bIns="0" rtlCol="0" anchor="ctr"/>
+          <a:bodyPr wrap="none" lIns="0" tIns="0" rIns="0" bIns="0" rtlCol="0" anchor="t"/>
           <a:lstStyle/>
           <a:p>
             <a:pPr algn="l" indent="0" marL="0" eaLnBrk="1" latinLnBrk="0" hangingPunct="1">
@@ -35387,7 +35387,7 @@
           <a:ln/>
         </p:spPr>
         <p:txBody>
-          <a:bodyPr wrap="square" lIns="0" tIns="0" rIns="0" bIns="0" rtlCol="0" anchor="ctr"/>
+          <a:bodyPr wrap="square" lIns="0" tIns="0" rIns="0" bIns="0" rtlCol="0" anchor="t"/>
           <a:lstStyle/>
           <a:p>
             <a:pPr algn="just" indent="0" marL="0" eaLnBrk="1" latinLnBrk="0" hangingPunct="1">
@@ -35429,7 +35429,7 @@
           <a:ln/>
         </p:spPr>
         <p:txBody>
-          <a:bodyPr wrap="none" lIns="0" tIns="0" rIns="0" bIns="0" rtlCol="0" anchor="ctr"/>
+          <a:bodyPr wrap="none" lIns="0" tIns="0" rIns="0" bIns="0" rtlCol="0" anchor="t"/>
           <a:lstStyle/>
           <a:p>
             <a:pPr algn="l" indent="0" marL="0" eaLnBrk="1" latinLnBrk="0" hangingPunct="1">
@@ -35471,7 +35471,7 @@
           <a:ln/>
         </p:spPr>
         <p:txBody>
-          <a:bodyPr wrap="none" lIns="0" tIns="0" rIns="0" bIns="0" rtlCol="0" anchor="ctr"/>
+          <a:bodyPr wrap="none" lIns="0" tIns="0" rIns="0" bIns="0" rtlCol="0" anchor="t"/>
           <a:lstStyle/>
           <a:p>
             <a:pPr algn="l" indent="0" marL="0" eaLnBrk="1" latinLnBrk="0" hangingPunct="1">
@@ -35648,7 +35648,7 @@
           <a:ln/>
         </p:spPr>
         <p:txBody>
-          <a:bodyPr wrap="none" lIns="0" tIns="0" rIns="0" bIns="0" rtlCol="0" anchor="ctr"/>
+          <a:bodyPr wrap="none" lIns="0" tIns="0" rIns="0" bIns="0" rtlCol="0" anchor="t"/>
           <a:lstStyle/>
           <a:p>
             <a:pPr algn="l" indent="0" marL="0" eaLnBrk="1" latinLnBrk="0" hangingPunct="1">
@@ -35687,7 +35687,7 @@
           <a:ln/>
         </p:spPr>
         <p:txBody>
-          <a:bodyPr wrap="none" lIns="0" tIns="0" rIns="0" bIns="0" rtlCol="0" anchor="ctr"/>
+          <a:bodyPr wrap="none" lIns="0" tIns="0" rIns="0" bIns="0" rtlCol="0" anchor="t"/>
           <a:lstStyle/>
           <a:p>
             <a:pPr algn="l" indent="0" marL="0" eaLnBrk="1" latinLnBrk="0" hangingPunct="1">
@@ -35729,7 +35729,7 @@
           <a:ln/>
         </p:spPr>
         <p:txBody>
-          <a:bodyPr wrap="none" lIns="0" tIns="0" rIns="0" bIns="0" rtlCol="0" anchor="ctr"/>
+          <a:bodyPr wrap="none" lIns="0" tIns="0" rIns="0" bIns="0" rtlCol="0" anchor="t"/>
           <a:lstStyle/>
           <a:p>
             <a:pPr algn="l" indent="0" marL="0" eaLnBrk="1" latinLnBrk="0" hangingPunct="1">
@@ -35861,17 +35861,17 @@
         </p:nvSpPr>
         <p:spPr>
           <a:xfrm>
-            <a:off x="1229320" y="3421380"/>
-            <a:ext cx="1015960" cy="330041"/>
-          </a:xfrm>
-          <a:prstGeom prst="rect">
-            <a:avLst/>
-          </a:prstGeom>
-          <a:noFill/>
-          <a:ln/>
-        </p:spPr>
-        <p:txBody>
-          <a:bodyPr wrap="none" lIns="0" tIns="0" rIns="0" bIns="0" rtlCol="0" anchor="ctr"/>
+            <a:off x="601980" y="3421380"/>
+            <a:ext cx="2270760" cy="330041"/>
+          </a:xfrm>
+          <a:prstGeom prst="rect">
+            <a:avLst/>
+          </a:prstGeom>
+          <a:noFill/>
+          <a:ln/>
+        </p:spPr>
+        <p:txBody>
+          <a:bodyPr wrap="none" lIns="0" tIns="0" rIns="0" bIns="0" rtlCol="0" anchor="t"/>
           <a:lstStyle/>
           <a:p>
             <a:pPr algn="ctr" indent="0" marL="0" eaLnBrk="1" latinLnBrk="0" hangingPunct="1">
@@ -35903,17 +35903,17 @@
         </p:nvSpPr>
         <p:spPr>
           <a:xfrm>
-            <a:off x="1292900" y="3842861"/>
-            <a:ext cx="888921" cy="257651"/>
-          </a:xfrm>
-          <a:prstGeom prst="rect">
-            <a:avLst/>
-          </a:prstGeom>
-          <a:noFill/>
-          <a:ln/>
-        </p:spPr>
-        <p:txBody>
-          <a:bodyPr wrap="none" lIns="0" tIns="0" rIns="0" bIns="0" rtlCol="0" anchor="ctr"/>
+            <a:off x="601980" y="3842861"/>
+            <a:ext cx="2270760" cy="257651"/>
+          </a:xfrm>
+          <a:prstGeom prst="rect">
+            <a:avLst/>
+          </a:prstGeom>
+          <a:noFill/>
+          <a:ln/>
+        </p:spPr>
+        <p:txBody>
+          <a:bodyPr wrap="none" lIns="0" tIns="0" rIns="0" bIns="0" rtlCol="0" anchor="t"/>
           <a:lstStyle/>
           <a:p>
             <a:pPr algn="ctr" indent="0" marL="0" eaLnBrk="1" latinLnBrk="0" hangingPunct="1">
@@ -35945,17 +35945,17 @@
         </p:nvSpPr>
         <p:spPr>
           <a:xfrm>
-            <a:off x="1115139" y="4191952"/>
-            <a:ext cx="1244441" cy="515303"/>
-          </a:xfrm>
-          <a:prstGeom prst="rect">
-            <a:avLst/>
-          </a:prstGeom>
-          <a:noFill/>
-          <a:ln/>
-        </p:spPr>
-        <p:txBody>
-          <a:bodyPr wrap="square" lIns="0" tIns="0" rIns="0" bIns="0" rtlCol="0" anchor="ctr"/>
+            <a:off x="601980" y="4191952"/>
+            <a:ext cx="2270760" cy="515303"/>
+          </a:xfrm>
+          <a:prstGeom prst="rect">
+            <a:avLst/>
+          </a:prstGeom>
+          <a:noFill/>
+          <a:ln/>
+        </p:spPr>
+        <p:txBody>
+          <a:bodyPr wrap="none" lIns="0" tIns="0" rIns="0" bIns="0" rtlCol="0" anchor="t"/>
           <a:lstStyle/>
           <a:p>
             <a:pPr algn="ctr" indent="0" marL="0" eaLnBrk="1" latinLnBrk="0" hangingPunct="1">
@@ -36017,7 +36017,7 @@
           <a:ln/>
         </p:spPr>
         <p:txBody>
-          <a:bodyPr wrap="none" lIns="0" tIns="0" rIns="0" bIns="0" rtlCol="0" anchor="ctr"/>
+          <a:bodyPr wrap="none" lIns="0" tIns="0" rIns="0" bIns="0" rtlCol="0" anchor="t"/>
           <a:lstStyle/>
           <a:p>
             <a:pPr algn="ctr" indent="0" marL="0" eaLnBrk="1" latinLnBrk="0" hangingPunct="1">
@@ -36059,7 +36059,7 @@
           <a:ln/>
         </p:spPr>
         <p:txBody>
-          <a:bodyPr wrap="none" lIns="0" tIns="0" rIns="0" bIns="0" rtlCol="0" anchor="ctr"/>
+          <a:bodyPr wrap="none" lIns="0" tIns="0" rIns="0" bIns="0" rtlCol="0" anchor="t"/>
           <a:lstStyle/>
           <a:p>
             <a:pPr algn="ctr" indent="0" marL="0" eaLnBrk="1" latinLnBrk="0" hangingPunct="1">
@@ -36101,7 +36101,7 @@
           <a:ln/>
         </p:spPr>
         <p:txBody>
-          <a:bodyPr wrap="none" lIns="0" tIns="0" rIns="0" bIns="0" rtlCol="0" anchor="ctr"/>
+          <a:bodyPr wrap="none" lIns="0" tIns="0" rIns="0" bIns="0" rtlCol="0" anchor="t"/>
           <a:lstStyle/>
           <a:p>
             <a:pPr algn="ctr" indent="0" marL="0" eaLnBrk="1" latinLnBrk="0" hangingPunct="1">
@@ -36143,7 +36143,7 @@
           <a:ln/>
         </p:spPr>
         <p:txBody>
-          <a:bodyPr wrap="none" lIns="0" tIns="0" rIns="0" bIns="0" rtlCol="0" anchor="ctr"/>
+          <a:bodyPr wrap="none" lIns="0" tIns="0" rIns="0" bIns="0" rtlCol="0" anchor="t"/>
           <a:lstStyle/>
           <a:p>
             <a:pPr algn="ctr" indent="0" marL="0" eaLnBrk="1" latinLnBrk="0" hangingPunct="1">
@@ -36185,7 +36185,7 @@
           <a:ln/>
         </p:spPr>
         <p:txBody>
-          <a:bodyPr wrap="none" lIns="0" tIns="0" rIns="0" bIns="0" rtlCol="0" anchor="ctr"/>
+          <a:bodyPr wrap="none" lIns="0" tIns="0" rIns="0" bIns="0" rtlCol="0" anchor="t"/>
           <a:lstStyle/>
           <a:p>
             <a:pPr algn="ctr" indent="0" marL="0" eaLnBrk="1" latinLnBrk="0" hangingPunct="1">
@@ -36281,7 +36281,7 @@
           <a:ln/>
         </p:spPr>
         <p:txBody>
-          <a:bodyPr wrap="none" lIns="0" tIns="0" rIns="0" bIns="0" rtlCol="0" anchor="ctr"/>
+          <a:bodyPr wrap="none" lIns="0" tIns="0" rIns="0" bIns="0" rtlCol="0" anchor="t"/>
           <a:lstStyle/>
           <a:p>
             <a:pPr algn="l" indent="0" marL="0" eaLnBrk="1" latinLnBrk="0" hangingPunct="1">
@@ -36377,7 +36377,7 @@
           <a:ln/>
         </p:spPr>
         <p:txBody>
-          <a:bodyPr wrap="none" lIns="0" tIns="0" rIns="0" bIns="0" rtlCol="0" anchor="ctr"/>
+          <a:bodyPr wrap="none" lIns="0" tIns="0" rIns="0" bIns="0" rtlCol="0" anchor="t"/>
           <a:lstStyle/>
           <a:p>
             <a:pPr algn="ctr" indent="0" marL="0" eaLnBrk="1" latinLnBrk="0" hangingPunct="1">
@@ -36473,7 +36473,7 @@
           <a:ln/>
         </p:spPr>
         <p:txBody>
-          <a:bodyPr wrap="none" lIns="0" tIns="0" rIns="0" bIns="0" rtlCol="0" anchor="ctr"/>
+          <a:bodyPr wrap="none" lIns="0" tIns="0" rIns="0" bIns="0" rtlCol="0" anchor="t"/>
           <a:lstStyle/>
           <a:p>
             <a:pPr algn="ctr" indent="0" marL="0" eaLnBrk="1" latinLnBrk="0" hangingPunct="1">
@@ -36569,7 +36569,7 @@
           <a:ln/>
         </p:spPr>
         <p:txBody>
-          <a:bodyPr wrap="none" lIns="0" tIns="0" rIns="0" bIns="0" rtlCol="0" anchor="ctr"/>
+          <a:bodyPr wrap="none" lIns="0" tIns="0" rIns="0" bIns="0" rtlCol="0" anchor="t"/>
           <a:lstStyle/>
           <a:p>
             <a:pPr algn="ctr" indent="0" marL="0" eaLnBrk="1" latinLnBrk="0" hangingPunct="1">
@@ -36638,7 +36638,7 @@
           <a:ln/>
         </p:spPr>
         <p:txBody>
-          <a:bodyPr wrap="none" lIns="0" tIns="0" rIns="0" bIns="0" rtlCol="0" anchor="ctr"/>
+          <a:bodyPr wrap="none" lIns="0" tIns="0" rIns="0" bIns="0" rtlCol="0" anchor="t"/>
           <a:lstStyle/>
           <a:p>
             <a:pPr algn="ctr" indent="0" marL="0" eaLnBrk="1" latinLnBrk="0" hangingPunct="1">
@@ -36707,7 +36707,7 @@
           <a:ln/>
         </p:spPr>
         <p:txBody>
-          <a:bodyPr wrap="none" lIns="0" tIns="0" rIns="0" bIns="0" rtlCol="0" anchor="ctr"/>
+          <a:bodyPr wrap="none" lIns="0" tIns="0" rIns="0" bIns="0" rtlCol="0" anchor="t"/>
           <a:lstStyle/>
           <a:p>
             <a:pPr algn="ctr" indent="0" marL="0" eaLnBrk="1" latinLnBrk="0" hangingPunct="1">
@@ -36776,7 +36776,7 @@
           <a:ln/>
         </p:spPr>
         <p:txBody>
-          <a:bodyPr wrap="none" lIns="0" tIns="0" rIns="0" bIns="0" rtlCol="0" anchor="ctr"/>
+          <a:bodyPr wrap="none" lIns="0" tIns="0" rIns="0" bIns="0" rtlCol="0" anchor="t"/>
           <a:lstStyle/>
           <a:p>
             <a:pPr algn="ctr" indent="0" marL="0" eaLnBrk="1" latinLnBrk="0" hangingPunct="1">
@@ -36845,7 +36845,7 @@
           <a:ln/>
         </p:spPr>
         <p:txBody>
-          <a:bodyPr wrap="none" lIns="0" tIns="0" rIns="0" bIns="0" rtlCol="0" anchor="ctr"/>
+          <a:bodyPr wrap="none" lIns="0" tIns="0" rIns="0" bIns="0" rtlCol="0" anchor="t"/>
           <a:lstStyle/>
           <a:p>
             <a:pPr algn="ctr" indent="0" marL="0" eaLnBrk="1" latinLnBrk="0" hangingPunct="1">
@@ -36914,7 +36914,7 @@
           <a:ln/>
         </p:spPr>
         <p:txBody>
-          <a:bodyPr wrap="none" lIns="0" tIns="0" rIns="0" bIns="0" rtlCol="0" anchor="ctr"/>
+          <a:bodyPr wrap="none" lIns="0" tIns="0" rIns="0" bIns="0" rtlCol="0" anchor="t"/>
           <a:lstStyle/>
           <a:p>
             <a:pPr algn="ctr" indent="0" marL="0" eaLnBrk="1" latinLnBrk="0" hangingPunct="1">
@@ -36983,7 +36983,7 @@
           <a:ln/>
         </p:spPr>
         <p:txBody>
-          <a:bodyPr wrap="none" lIns="0" tIns="0" rIns="0" bIns="0" rtlCol="0" anchor="ctr"/>
+          <a:bodyPr wrap="none" lIns="0" tIns="0" rIns="0" bIns="0" rtlCol="0" anchor="t"/>
           <a:lstStyle/>
           <a:p>
             <a:pPr algn="ctr" indent="0" marL="0" eaLnBrk="1" latinLnBrk="0" hangingPunct="1">
@@ -37052,7 +37052,7 @@
           <a:ln/>
         </p:spPr>
         <p:txBody>
-          <a:bodyPr wrap="none" lIns="0" tIns="0" rIns="0" bIns="0" rtlCol="0" anchor="ctr"/>
+          <a:bodyPr wrap="none" lIns="0" tIns="0" rIns="0" bIns="0" rtlCol="0" anchor="t"/>
           <a:lstStyle/>
           <a:p>
             <a:pPr algn="ctr" indent="0" marL="0" eaLnBrk="1" latinLnBrk="0" hangingPunct="1">
@@ -37121,7 +37121,7 @@
           <a:ln/>
         </p:spPr>
         <p:txBody>
-          <a:bodyPr wrap="none" lIns="0" tIns="0" rIns="0" bIns="0" rtlCol="0" anchor="ctr"/>
+          <a:bodyPr wrap="none" lIns="0" tIns="0" rIns="0" bIns="0" rtlCol="0" anchor="t"/>
           <a:lstStyle/>
           <a:p>
             <a:pPr algn="ctr" indent="0" marL="0" eaLnBrk="1" latinLnBrk="0" hangingPunct="1">
@@ -37190,7 +37190,7 @@
           <a:ln/>
         </p:spPr>
         <p:txBody>
-          <a:bodyPr wrap="none" lIns="0" tIns="0" rIns="0" bIns="0" rtlCol="0" anchor="ctr"/>
+          <a:bodyPr wrap="none" lIns="0" tIns="0" rIns="0" bIns="0" rtlCol="0" anchor="t"/>
           <a:lstStyle/>
           <a:p>
             <a:pPr algn="ctr" indent="0" marL="0" eaLnBrk="1" latinLnBrk="0" hangingPunct="1">
@@ -37286,7 +37286,7 @@
           <a:ln/>
         </p:spPr>
         <p:txBody>
-          <a:bodyPr wrap="none" lIns="0" tIns="0" rIns="0" bIns="0" rtlCol="0" anchor="ctr"/>
+          <a:bodyPr wrap="none" lIns="0" tIns="0" rIns="0" bIns="0" rtlCol="0" anchor="t"/>
           <a:lstStyle/>
           <a:p>
             <a:pPr algn="l" indent="0" marL="0" eaLnBrk="1" latinLnBrk="0" hangingPunct="1">
@@ -37355,7 +37355,7 @@
           <a:ln/>
         </p:spPr>
         <p:txBody>
-          <a:bodyPr wrap="none" lIns="0" tIns="0" rIns="0" bIns="0" rtlCol="0" anchor="ctr"/>
+          <a:bodyPr wrap="none" lIns="0" tIns="0" rIns="0" bIns="0" rtlCol="0" anchor="t"/>
           <a:lstStyle/>
           <a:p>
             <a:pPr algn="l" indent="0" marL="0" eaLnBrk="1" latinLnBrk="0" hangingPunct="1">
@@ -37424,7 +37424,7 @@
           <a:ln/>
         </p:spPr>
         <p:txBody>
-          <a:bodyPr wrap="none" lIns="0" tIns="0" rIns="0" bIns="0" rtlCol="0" anchor="ctr"/>
+          <a:bodyPr wrap="none" lIns="0" tIns="0" rIns="0" bIns="0" rtlCol="0" anchor="t"/>
           <a:lstStyle/>
           <a:p>
             <a:pPr algn="l" indent="0" marL="0" eaLnBrk="1" latinLnBrk="0" hangingPunct="1">
@@ -37493,7 +37493,7 @@
           <a:ln/>
         </p:spPr>
         <p:txBody>
-          <a:bodyPr wrap="none" lIns="0" tIns="0" rIns="0" bIns="0" rtlCol="0" anchor="ctr"/>
+          <a:bodyPr wrap="none" lIns="0" tIns="0" rIns="0" bIns="0" rtlCol="0" anchor="t"/>
           <a:lstStyle/>
           <a:p>
             <a:pPr algn="l" indent="0" marL="0" eaLnBrk="1" latinLnBrk="0" hangingPunct="1">
@@ -37562,7 +37562,7 @@
           <a:ln/>
         </p:spPr>
         <p:txBody>
-          <a:bodyPr wrap="none" lIns="0" tIns="0" rIns="0" bIns="0" rtlCol="0" anchor="ctr"/>
+          <a:bodyPr wrap="none" lIns="0" tIns="0" rIns="0" bIns="0" rtlCol="0" anchor="t"/>
           <a:lstStyle/>
           <a:p>
             <a:pPr algn="l" indent="0" marL="0" eaLnBrk="1" latinLnBrk="0" hangingPunct="1">
@@ -37631,7 +37631,7 @@
           <a:ln/>
         </p:spPr>
         <p:txBody>
-          <a:bodyPr wrap="none" lIns="0" tIns="0" rIns="0" bIns="0" rtlCol="0" anchor="ctr"/>
+          <a:bodyPr wrap="none" lIns="0" tIns="0" rIns="0" bIns="0" rtlCol="0" anchor="t"/>
           <a:lstStyle/>
           <a:p>
             <a:pPr algn="l" indent="0" marL="0" eaLnBrk="1" latinLnBrk="0" hangingPunct="1">
@@ -37700,7 +37700,7 @@
           <a:ln/>
         </p:spPr>
         <p:txBody>
-          <a:bodyPr wrap="none" lIns="0" tIns="0" rIns="0" bIns="0" rtlCol="0" anchor="ctr"/>
+          <a:bodyPr wrap="none" lIns="0" tIns="0" rIns="0" bIns="0" rtlCol="0" anchor="t"/>
           <a:lstStyle/>
           <a:p>
             <a:pPr algn="l" indent="0" marL="0" eaLnBrk="1" latinLnBrk="0" hangingPunct="1">
@@ -37796,7 +37796,7 @@
           <a:ln/>
         </p:spPr>
         <p:txBody>
-          <a:bodyPr wrap="none" lIns="0" tIns="0" rIns="0" bIns="0" rtlCol="0" anchor="ctr"/>
+          <a:bodyPr wrap="none" lIns="0" tIns="0" rIns="0" bIns="0" rtlCol="0" anchor="t"/>
           <a:lstStyle/>
           <a:p>
             <a:pPr algn="l" indent="0" marL="0" eaLnBrk="1" latinLnBrk="0" hangingPunct="1">
@@ -37865,7 +37865,7 @@
           <a:ln/>
         </p:spPr>
         <p:txBody>
-          <a:bodyPr wrap="none" lIns="0" tIns="0" rIns="0" bIns="0" rtlCol="0" anchor="ctr"/>
+          <a:bodyPr wrap="none" lIns="0" tIns="0" rIns="0" bIns="0" rtlCol="0" anchor="t"/>
           <a:lstStyle/>
           <a:p>
             <a:pPr algn="l" indent="0" marL="0" eaLnBrk="1" latinLnBrk="0" hangingPunct="1">
@@ -37934,7 +37934,7 @@
           <a:ln/>
         </p:spPr>
         <p:txBody>
-          <a:bodyPr wrap="none" lIns="0" tIns="0" rIns="0" bIns="0" rtlCol="0" anchor="ctr"/>
+          <a:bodyPr wrap="none" lIns="0" tIns="0" rIns="0" bIns="0" rtlCol="0" anchor="t"/>
           <a:lstStyle/>
           <a:p>
             <a:pPr algn="l" indent="0" marL="0" eaLnBrk="1" latinLnBrk="0" hangingPunct="1">
@@ -38003,7 +38003,7 @@
           <a:ln/>
         </p:spPr>
         <p:txBody>
-          <a:bodyPr wrap="none" lIns="0" tIns="0" rIns="0" bIns="0" rtlCol="0" anchor="ctr"/>
+          <a:bodyPr wrap="none" lIns="0" tIns="0" rIns="0" bIns="0" rtlCol="0" anchor="t"/>
           <a:lstStyle/>
           <a:p>
             <a:pPr algn="l" indent="0" marL="0" eaLnBrk="1" latinLnBrk="0" hangingPunct="1">
@@ -38072,7 +38072,7 @@
           <a:ln/>
         </p:spPr>
         <p:txBody>
-          <a:bodyPr wrap="square" lIns="0" tIns="0" rIns="0" bIns="0" rtlCol="0" anchor="ctr"/>
+          <a:bodyPr wrap="square" lIns="0" tIns="0" rIns="0" bIns="0" rtlCol="0" anchor="t"/>
           <a:lstStyle/>
           <a:p>
             <a:pPr algn="l" indent="0" marL="0" eaLnBrk="1" latinLnBrk="0" hangingPunct="1">
@@ -38161,7 +38161,7 @@
           <a:ln/>
         </p:spPr>
         <p:txBody>
-          <a:bodyPr wrap="square" lIns="0" tIns="0" rIns="0" bIns="0" rtlCol="0" anchor="ctr"/>
+          <a:bodyPr wrap="square" lIns="0" tIns="0" rIns="0" bIns="0" rtlCol="0" anchor="t"/>
           <a:lstStyle/>
           <a:p>
             <a:pPr algn="l" indent="0" marL="0" eaLnBrk="1" latinLnBrk="0" hangingPunct="1">
@@ -38250,7 +38250,7 @@
           <a:ln/>
         </p:spPr>
         <p:txBody>
-          <a:bodyPr wrap="square" lIns="0" tIns="0" rIns="0" bIns="0" rtlCol="0" anchor="ctr"/>
+          <a:bodyPr wrap="square" lIns="0" tIns="0" rIns="0" bIns="0" rtlCol="0" anchor="t"/>
           <a:lstStyle/>
           <a:p>
             <a:pPr algn="l" indent="0" marL="0" eaLnBrk="1" latinLnBrk="0" hangingPunct="1">
@@ -38312,7 +38312,7 @@
           <a:ln/>
         </p:spPr>
         <p:txBody>
-          <a:bodyPr wrap="none" lIns="0" tIns="0" rIns="0" bIns="0" rtlCol="0" anchor="ctr"/>
+          <a:bodyPr wrap="none" lIns="0" tIns="0" rIns="0" bIns="0" rtlCol="0" anchor="t"/>
           <a:lstStyle/>
           <a:p>
             <a:pPr algn="l" indent="0" marL="0" eaLnBrk="1" latinLnBrk="0" hangingPunct="1">
@@ -38354,7 +38354,7 @@
           <a:ln/>
         </p:spPr>
         <p:txBody>
-          <a:bodyPr wrap="none" lIns="0" tIns="0" rIns="0" bIns="0" rtlCol="0" anchor="ctr"/>
+          <a:bodyPr wrap="none" lIns="0" tIns="0" rIns="0" bIns="0" rtlCol="0" anchor="t"/>
           <a:lstStyle/>
           <a:p>
             <a:pPr algn="r" indent="0" marL="0" eaLnBrk="1" latinLnBrk="0" hangingPunct="1">
@@ -38396,7 +38396,7 @@
           <a:ln/>
         </p:spPr>
         <p:txBody>
-          <a:bodyPr wrap="none" lIns="0" tIns="0" rIns="0" bIns="0" rtlCol="0" anchor="ctr"/>
+          <a:bodyPr wrap="none" lIns="0" tIns="0" rIns="0" bIns="0" rtlCol="0" anchor="t"/>
           <a:lstStyle/>
           <a:p>
             <a:pPr algn="l" indent="0" marL="0" eaLnBrk="1" latinLnBrk="0" hangingPunct="1">
@@ -38551,7 +38551,7 @@
           <a:ln/>
         </p:spPr>
         <p:txBody>
-          <a:bodyPr wrap="none" lIns="0" tIns="0" rIns="0" bIns="0" rtlCol="0" anchor="ctr"/>
+          <a:bodyPr wrap="none" lIns="0" tIns="0" rIns="0" bIns="0" rtlCol="0" anchor="t"/>
           <a:lstStyle/>
           <a:p>
             <a:pPr algn="ctr" indent="0" marL="0" eaLnBrk="1" latinLnBrk="0" hangingPunct="1">
@@ -38620,7 +38620,7 @@
           <a:ln/>
         </p:spPr>
         <p:txBody>
-          <a:bodyPr wrap="none" lIns="0" tIns="0" rIns="0" bIns="0" rtlCol="0" anchor="ctr"/>
+          <a:bodyPr wrap="none" lIns="0" tIns="0" rIns="0" bIns="0" rtlCol="0" anchor="t"/>
           <a:lstStyle/>
           <a:p>
             <a:pPr algn="ctr" indent="0" marL="0" eaLnBrk="1" latinLnBrk="0" hangingPunct="1">
@@ -38662,7 +38662,7 @@
           <a:ln/>
         </p:spPr>
         <p:txBody>
-          <a:bodyPr wrap="none" lIns="0" tIns="0" rIns="0" bIns="0" rtlCol="0" anchor="ctr"/>
+          <a:bodyPr wrap="none" lIns="0" tIns="0" rIns="0" bIns="0" rtlCol="0" anchor="t"/>
           <a:lstStyle/>
           <a:p>
             <a:pPr algn="ctr" indent="0" marL="0" eaLnBrk="1" latinLnBrk="0" hangingPunct="1">
@@ -38787,7 +38787,7 @@
           <a:ln/>
         </p:spPr>
         <p:txBody>
-          <a:bodyPr wrap="none" lIns="0" tIns="0" rIns="0" bIns="0" rtlCol="0" anchor="ctr"/>
+          <a:bodyPr wrap="none" lIns="0" tIns="0" rIns="0" bIns="0" rtlCol="0" anchor="t"/>
           <a:lstStyle/>
           <a:p>
             <a:pPr algn="ctr" indent="0" marL="0" eaLnBrk="1" latinLnBrk="0" hangingPunct="1">
@@ -38829,7 +38829,7 @@
           <a:ln/>
         </p:spPr>
         <p:txBody>
-          <a:bodyPr wrap="none" lIns="0" tIns="0" rIns="0" bIns="0" rtlCol="0" anchor="ctr"/>
+          <a:bodyPr wrap="none" lIns="0" tIns="0" rIns="0" bIns="0" rtlCol="0" anchor="t"/>
           <a:lstStyle/>
           <a:p>
             <a:pPr algn="ctr" indent="0" marL="0" eaLnBrk="1" latinLnBrk="0" hangingPunct="1">
@@ -38871,7 +38871,7 @@
           <a:ln/>
         </p:spPr>
         <p:txBody>
-          <a:bodyPr wrap="none" lIns="0" tIns="0" rIns="0" bIns="0" rtlCol="0" anchor="ctr"/>
+          <a:bodyPr wrap="none" lIns="0" tIns="0" rIns="0" bIns="0" rtlCol="0" anchor="t"/>
           <a:lstStyle/>
           <a:p>
             <a:pPr algn="just" indent="0" marL="0" eaLnBrk="1" latinLnBrk="0" hangingPunct="1">
@@ -38913,7 +38913,7 @@
           <a:ln/>
         </p:spPr>
         <p:txBody>
-          <a:bodyPr wrap="none" lIns="0" tIns="0" rIns="0" bIns="0" rtlCol="0" anchor="ctr"/>
+          <a:bodyPr wrap="none" lIns="0" tIns="0" rIns="0" bIns="0" rtlCol="0" anchor="t"/>
           <a:lstStyle/>
           <a:p>
             <a:pPr algn="l" indent="0" marL="0" eaLnBrk="1" latinLnBrk="0" hangingPunct="1">
@@ -38955,7 +38955,7 @@
           <a:ln/>
         </p:spPr>
         <p:txBody>
-          <a:bodyPr wrap="none" lIns="0" tIns="0" rIns="0" bIns="0" rtlCol="0" anchor="ctr"/>
+          <a:bodyPr wrap="none" lIns="0" tIns="0" rIns="0" bIns="0" rtlCol="0" anchor="t"/>
           <a:lstStyle/>
           <a:p>
             <a:pPr algn="just" indent="0" marL="0" eaLnBrk="1" latinLnBrk="0" hangingPunct="1">
@@ -38997,7 +38997,7 @@
           <a:ln/>
         </p:spPr>
         <p:txBody>
-          <a:bodyPr wrap="none" lIns="0" tIns="0" rIns="0" bIns="0" rtlCol="0" anchor="ctr"/>
+          <a:bodyPr wrap="none" lIns="0" tIns="0" rIns="0" bIns="0" rtlCol="0" anchor="t"/>
           <a:lstStyle/>
           <a:p>
             <a:pPr algn="l" indent="0" marL="0" eaLnBrk="1" latinLnBrk="0" hangingPunct="1">
@@ -39039,7 +39039,7 @@
           <a:ln/>
         </p:spPr>
         <p:txBody>
-          <a:bodyPr wrap="none" lIns="0" tIns="0" rIns="0" bIns="0" rtlCol="0" anchor="ctr"/>
+          <a:bodyPr wrap="none" lIns="0" tIns="0" rIns="0" bIns="0" rtlCol="0" anchor="t"/>
           <a:lstStyle/>
           <a:p>
             <a:pPr algn="just" indent="0" marL="0" eaLnBrk="1" latinLnBrk="0" hangingPunct="1">
@@ -39081,7 +39081,7 @@
           <a:ln/>
         </p:spPr>
         <p:txBody>
-          <a:bodyPr wrap="none" lIns="0" tIns="0" rIns="0" bIns="0" rtlCol="0" anchor="ctr"/>
+          <a:bodyPr wrap="none" lIns="0" tIns="0" rIns="0" bIns="0" rtlCol="0" anchor="t"/>
           <a:lstStyle/>
           <a:p>
             <a:pPr algn="l" indent="0" marL="0" eaLnBrk="1" latinLnBrk="0" hangingPunct="1">
@@ -39236,7 +39236,7 @@
           <a:ln/>
         </p:spPr>
         <p:txBody>
-          <a:bodyPr wrap="none" lIns="0" tIns="0" rIns="0" bIns="0" rtlCol="0" anchor="ctr"/>
+          <a:bodyPr wrap="none" lIns="0" tIns="0" rIns="0" bIns="0" rtlCol="0" anchor="t"/>
           <a:lstStyle/>
           <a:p>
             <a:pPr algn="l" indent="0" marL="0" eaLnBrk="1" latinLnBrk="0" hangingPunct="1">
@@ -39275,7 +39275,7 @@
           <a:ln/>
         </p:spPr>
         <p:txBody>
-          <a:bodyPr wrap="none" lIns="0" tIns="0" rIns="0" bIns="0" rtlCol="0" anchor="ctr"/>
+          <a:bodyPr wrap="none" lIns="0" tIns="0" rIns="0" bIns="0" rtlCol="0" anchor="t"/>
           <a:lstStyle/>
           <a:p>
             <a:pPr algn="l" indent="0" marL="0" eaLnBrk="1" latinLnBrk="0" hangingPunct="1">
@@ -39317,7 +39317,7 @@
           <a:ln/>
         </p:spPr>
         <p:txBody>
-          <a:bodyPr wrap="none" lIns="0" tIns="0" rIns="0" bIns="0" rtlCol="0" anchor="ctr"/>
+          <a:bodyPr wrap="none" lIns="0" tIns="0" rIns="0" bIns="0" rtlCol="0" anchor="t"/>
           <a:lstStyle/>
           <a:p>
             <a:pPr algn="l" indent="0" marL="0" eaLnBrk="1" latinLnBrk="0" hangingPunct="1">
@@ -39410,7 +39410,7 @@
           <a:ln/>
         </p:spPr>
         <p:txBody>
-          <a:bodyPr wrap="none" lIns="0" tIns="0" rIns="0" bIns="0" rtlCol="0" anchor="ctr"/>
+          <a:bodyPr wrap="none" lIns="0" tIns="0" rIns="0" bIns="0" rtlCol="0" anchor="t"/>
           <a:lstStyle/>
           <a:p>
             <a:pPr algn="l" indent="0" marL="0" eaLnBrk="1" latinLnBrk="0" hangingPunct="1">
@@ -39527,7 +39527,7 @@
           <a:ln/>
         </p:spPr>
         <p:txBody>
-          <a:bodyPr wrap="none" lIns="0" tIns="0" rIns="0" bIns="0" rtlCol="0" anchor="ctr"/>
+          <a:bodyPr wrap="none" lIns="0" tIns="0" rIns="0" bIns="0" rtlCol="0" anchor="t"/>
           <a:lstStyle/>
           <a:p>
             <a:pPr algn="l" indent="0" marL="0" eaLnBrk="1" latinLnBrk="0" hangingPunct="1">
@@ -39569,7 +39569,7 @@
           <a:ln/>
         </p:spPr>
         <p:txBody>
-          <a:bodyPr wrap="none" lIns="0" tIns="0" rIns="0" bIns="0" rtlCol="0" anchor="ctr"/>
+          <a:bodyPr wrap="none" lIns="0" tIns="0" rIns="0" bIns="0" rtlCol="0" anchor="t"/>
           <a:lstStyle/>
           <a:p>
             <a:pPr algn="l" indent="0" marL="0" eaLnBrk="1" latinLnBrk="0" hangingPunct="1">
@@ -39638,7 +39638,7 @@
           <a:ln/>
         </p:spPr>
         <p:txBody>
-          <a:bodyPr wrap="square" lIns="0" tIns="0" rIns="0" bIns="0" rtlCol="0" anchor="ctr"/>
+          <a:bodyPr wrap="square" lIns="0" tIns="0" rIns="0" bIns="0" rtlCol="0" anchor="t"/>
           <a:lstStyle/>
           <a:p>
             <a:pPr algn="just" marL="243840" indent="-243840" eaLnBrk="1" latinLnBrk="0" hangingPunct="1">
@@ -39681,7 +39681,7 @@
           <a:ln/>
         </p:spPr>
         <p:txBody>
-          <a:bodyPr wrap="square" lIns="0" tIns="0" rIns="0" bIns="0" rtlCol="0" anchor="ctr"/>
+          <a:bodyPr wrap="square" lIns="0" tIns="0" rIns="0" bIns="0" rtlCol="0" anchor="t"/>
           <a:lstStyle/>
           <a:p>
             <a:pPr algn="just" marL="243840" indent="-243840" eaLnBrk="1" latinLnBrk="0" hangingPunct="1">
@@ -39724,7 +39724,7 @@
           <a:ln/>
         </p:spPr>
         <p:txBody>
-          <a:bodyPr wrap="square" lIns="0" tIns="0" rIns="0" bIns="0" rtlCol="0" anchor="ctr"/>
+          <a:bodyPr wrap="square" lIns="0" tIns="0" rIns="0" bIns="0" rtlCol="0" anchor="t"/>
           <a:lstStyle/>
           <a:p>
             <a:pPr algn="just" marL="243840" indent="-243840" eaLnBrk="1" latinLnBrk="0" hangingPunct="1">
@@ -39767,7 +39767,7 @@
           <a:ln/>
         </p:spPr>
         <p:txBody>
-          <a:bodyPr wrap="none" lIns="0" tIns="0" rIns="0" bIns="0" rtlCol="0" anchor="ctr"/>
+          <a:bodyPr wrap="none" lIns="0" tIns="0" rIns="0" bIns="0" rtlCol="0" anchor="t"/>
           <a:lstStyle/>
           <a:p>
             <a:pPr algn="just" marL="243840" indent="-243840" eaLnBrk="1" latinLnBrk="0" hangingPunct="1">
@@ -39810,7 +39810,7 @@
           <a:ln/>
         </p:spPr>
         <p:txBody>
-          <a:bodyPr wrap="none" lIns="0" tIns="0" rIns="0" bIns="0" rtlCol="0" anchor="ctr"/>
+          <a:bodyPr wrap="none" lIns="0" tIns="0" rIns="0" bIns="0" rtlCol="0" anchor="t"/>
           <a:lstStyle/>
           <a:p>
             <a:pPr algn="l" indent="0" marL="0" eaLnBrk="1" latinLnBrk="0" hangingPunct="1">
@@ -39852,7 +39852,7 @@
           <a:ln/>
         </p:spPr>
         <p:txBody>
-          <a:bodyPr wrap="none" lIns="0" tIns="0" rIns="0" bIns="0" rtlCol="0" anchor="ctr"/>
+          <a:bodyPr wrap="none" lIns="0" tIns="0" rIns="0" bIns="0" rtlCol="0" anchor="t"/>
           <a:lstStyle/>
           <a:p>
             <a:pPr algn="l" indent="0" marL="0" eaLnBrk="1" latinLnBrk="0" hangingPunct="1">
@@ -39969,7 +39969,7 @@
           <a:ln/>
         </p:spPr>
         <p:txBody>
-          <a:bodyPr wrap="none" lIns="0" tIns="0" rIns="0" bIns="0" rtlCol="0" anchor="ctr"/>
+          <a:bodyPr wrap="none" lIns="0" tIns="0" rIns="0" bIns="0" rtlCol="0" anchor="t"/>
           <a:lstStyle/>
           <a:p>
             <a:pPr algn="l" indent="0" marL="0" eaLnBrk="1" latinLnBrk="0" hangingPunct="1">
@@ -40011,7 +40011,7 @@
           <a:ln/>
         </p:spPr>
         <p:txBody>
-          <a:bodyPr wrap="none" lIns="0" tIns="0" rIns="0" bIns="0" rtlCol="0" anchor="ctr"/>
+          <a:bodyPr wrap="none" lIns="0" tIns="0" rIns="0" bIns="0" rtlCol="0" anchor="t"/>
           <a:lstStyle/>
           <a:p>
             <a:pPr algn="l" indent="0" marL="0" eaLnBrk="1" latinLnBrk="0" hangingPunct="1">
@@ -40080,7 +40080,7 @@
           <a:ln/>
         </p:spPr>
         <p:txBody>
-          <a:bodyPr wrap="square" lIns="0" tIns="0" rIns="0" bIns="0" rtlCol="0" anchor="ctr"/>
+          <a:bodyPr wrap="square" lIns="0" tIns="0" rIns="0" bIns="0" rtlCol="0" anchor="t"/>
           <a:lstStyle/>
           <a:p>
             <a:pPr algn="just" marL="243840" indent="-243840" eaLnBrk="1" latinLnBrk="0" hangingPunct="1">
@@ -40123,7 +40123,7 @@
           <a:ln/>
         </p:spPr>
         <p:txBody>
-          <a:bodyPr wrap="square" lIns="0" tIns="0" rIns="0" bIns="0" rtlCol="0" anchor="ctr"/>
+          <a:bodyPr wrap="square" lIns="0" tIns="0" rIns="0" bIns="0" rtlCol="0" anchor="t"/>
           <a:lstStyle/>
           <a:p>
             <a:pPr algn="just" marL="243840" indent="-243840" eaLnBrk="1" latinLnBrk="0" hangingPunct="1">
@@ -40166,7 +40166,7 @@
           <a:ln/>
         </p:spPr>
         <p:txBody>
-          <a:bodyPr wrap="square" lIns="0" tIns="0" rIns="0" bIns="0" rtlCol="0" anchor="ctr"/>
+          <a:bodyPr wrap="square" lIns="0" tIns="0" rIns="0" bIns="0" rtlCol="0" anchor="t"/>
           <a:lstStyle/>
           <a:p>
             <a:pPr algn="just" marL="243840" indent="-243840" eaLnBrk="1" latinLnBrk="0" hangingPunct="1">
@@ -40209,7 +40209,7 @@
           <a:ln/>
         </p:spPr>
         <p:txBody>
-          <a:bodyPr wrap="none" lIns="0" tIns="0" rIns="0" bIns="0" rtlCol="0" anchor="ctr"/>
+          <a:bodyPr wrap="none" lIns="0" tIns="0" rIns="0" bIns="0" rtlCol="0" anchor="t"/>
           <a:lstStyle/>
           <a:p>
             <a:pPr algn="just" marL="243840" indent="-243840" eaLnBrk="1" latinLnBrk="0" hangingPunct="1">
@@ -40252,7 +40252,7 @@
           <a:ln/>
         </p:spPr>
         <p:txBody>
-          <a:bodyPr wrap="none" lIns="0" tIns="0" rIns="0" bIns="0" rtlCol="0" anchor="ctr"/>
+          <a:bodyPr wrap="none" lIns="0" tIns="0" rIns="0" bIns="0" rtlCol="0" anchor="t"/>
           <a:lstStyle/>
           <a:p>
             <a:pPr algn="l" indent="0" marL="0" eaLnBrk="1" latinLnBrk="0" hangingPunct="1">
@@ -40294,7 +40294,7 @@
           <a:ln/>
         </p:spPr>
         <p:txBody>
-          <a:bodyPr wrap="none" lIns="0" tIns="0" rIns="0" bIns="0" rtlCol="0" anchor="ctr"/>
+          <a:bodyPr wrap="none" lIns="0" tIns="0" rIns="0" bIns="0" rtlCol="0" anchor="t"/>
           <a:lstStyle/>
           <a:p>
             <a:pPr algn="l" indent="0" marL="0" eaLnBrk="1" latinLnBrk="0" hangingPunct="1">
@@ -40411,7 +40411,7 @@
           <a:ln/>
         </p:spPr>
         <p:txBody>
-          <a:bodyPr wrap="none" lIns="0" tIns="0" rIns="0" bIns="0" rtlCol="0" anchor="ctr"/>
+          <a:bodyPr wrap="none" lIns="0" tIns="0" rIns="0" bIns="0" rtlCol="0" anchor="t"/>
           <a:lstStyle/>
           <a:p>
             <a:pPr algn="l" indent="0" marL="0" eaLnBrk="1" latinLnBrk="0" hangingPunct="1">
@@ -40453,7 +40453,7 @@
           <a:ln/>
         </p:spPr>
         <p:txBody>
-          <a:bodyPr wrap="none" lIns="0" tIns="0" rIns="0" bIns="0" rtlCol="0" anchor="ctr"/>
+          <a:bodyPr wrap="none" lIns="0" tIns="0" rIns="0" bIns="0" rtlCol="0" anchor="t"/>
           <a:lstStyle/>
           <a:p>
             <a:pPr algn="l" indent="0" marL="0" eaLnBrk="1" latinLnBrk="0" hangingPunct="1">
@@ -40522,7 +40522,7 @@
           <a:ln/>
         </p:spPr>
         <p:txBody>
-          <a:bodyPr wrap="square" lIns="0" tIns="0" rIns="0" bIns="0" rtlCol="0" anchor="ctr"/>
+          <a:bodyPr wrap="square" lIns="0" tIns="0" rIns="0" bIns="0" rtlCol="0" anchor="t"/>
           <a:lstStyle/>
           <a:p>
             <a:pPr algn="just" marL="243840" indent="-243840" eaLnBrk="1" latinLnBrk="0" hangingPunct="1">
@@ -40565,7 +40565,7 @@
           <a:ln/>
         </p:spPr>
         <p:txBody>
-          <a:bodyPr wrap="square" lIns="0" tIns="0" rIns="0" bIns="0" rtlCol="0" anchor="ctr"/>
+          <a:bodyPr wrap="square" lIns="0" tIns="0" rIns="0" bIns="0" rtlCol="0" anchor="t"/>
           <a:lstStyle/>
           <a:p>
             <a:pPr algn="just" marL="243840" indent="-243840" eaLnBrk="1" latinLnBrk="0" hangingPunct="1">
@@ -40608,7 +40608,7 @@
           <a:ln/>
         </p:spPr>
         <p:txBody>
-          <a:bodyPr wrap="square" lIns="0" tIns="0" rIns="0" bIns="0" rtlCol="0" anchor="ctr"/>
+          <a:bodyPr wrap="square" lIns="0" tIns="0" rIns="0" bIns="0" rtlCol="0" anchor="t"/>
           <a:lstStyle/>
           <a:p>
             <a:pPr algn="just" marL="243840" indent="-243840" eaLnBrk="1" latinLnBrk="0" hangingPunct="1">
@@ -40651,7 +40651,7 @@
           <a:ln/>
         </p:spPr>
         <p:txBody>
-          <a:bodyPr wrap="none" lIns="0" tIns="0" rIns="0" bIns="0" rtlCol="0" anchor="ctr"/>
+          <a:bodyPr wrap="none" lIns="0" tIns="0" rIns="0" bIns="0" rtlCol="0" anchor="t"/>
           <a:lstStyle/>
           <a:p>
             <a:pPr algn="just" marL="243840" indent="-243840" eaLnBrk="1" latinLnBrk="0" hangingPunct="1">
@@ -40694,7 +40694,7 @@
           <a:ln/>
         </p:spPr>
         <p:txBody>
-          <a:bodyPr wrap="none" lIns="0" tIns="0" rIns="0" bIns="0" rtlCol="0" anchor="ctr"/>
+          <a:bodyPr wrap="none" lIns="0" tIns="0" rIns="0" bIns="0" rtlCol="0" anchor="t"/>
           <a:lstStyle/>
           <a:p>
             <a:pPr algn="l" indent="0" marL="0" eaLnBrk="1" latinLnBrk="0" hangingPunct="1">
@@ -40736,7 +40736,7 @@
           <a:ln/>
         </p:spPr>
         <p:txBody>
-          <a:bodyPr wrap="none" lIns="0" tIns="0" rIns="0" bIns="0" rtlCol="0" anchor="ctr"/>
+          <a:bodyPr wrap="none" lIns="0" tIns="0" rIns="0" bIns="0" rtlCol="0" anchor="t"/>
           <a:lstStyle/>
           <a:p>
             <a:pPr algn="l" indent="0" marL="0" eaLnBrk="1" latinLnBrk="0" hangingPunct="1">
@@ -40778,7 +40778,7 @@
           <a:ln/>
         </p:spPr>
         <p:txBody>
-          <a:bodyPr wrap="none" lIns="0" tIns="0" rIns="0" bIns="0" rtlCol="0" anchor="ctr"/>
+          <a:bodyPr wrap="none" lIns="0" tIns="0" rIns="0" bIns="0" rtlCol="0" anchor="t"/>
           <a:lstStyle/>
           <a:p>
             <a:pPr algn="l" indent="0" marL="0" eaLnBrk="1" latinLnBrk="0" hangingPunct="1">
@@ -40820,7 +40820,7 @@
           <a:ln/>
         </p:spPr>
         <p:txBody>
-          <a:bodyPr wrap="none" lIns="0" tIns="0" rIns="0" bIns="0" rtlCol="0" anchor="ctr"/>
+          <a:bodyPr wrap="none" lIns="0" tIns="0" rIns="0" bIns="0" rtlCol="0" anchor="t"/>
           <a:lstStyle/>
           <a:p>
             <a:pPr algn="r" indent="0" marL="0" eaLnBrk="1" latinLnBrk="0" hangingPunct="1">
@@ -40862,7 +40862,7 @@
           <a:ln/>
         </p:spPr>
         <p:txBody>
-          <a:bodyPr wrap="none" lIns="0" tIns="0" rIns="0" bIns="0" rtlCol="0" anchor="ctr"/>
+          <a:bodyPr wrap="none" lIns="0" tIns="0" rIns="0" bIns="0" rtlCol="0" anchor="t"/>
           <a:lstStyle/>
           <a:p>
             <a:pPr algn="l" indent="0" marL="0" eaLnBrk="1" latinLnBrk="0" hangingPunct="1">
@@ -41044,7 +41044,7 @@
           <a:ln/>
         </p:spPr>
         <p:txBody>
-          <a:bodyPr wrap="none" lIns="0" tIns="0" rIns="0" bIns="0" rtlCol="0" anchor="ctr"/>
+          <a:bodyPr wrap="none" lIns="0" tIns="0" rIns="0" bIns="0" rtlCol="0" anchor="t"/>
           <a:lstStyle/>
           <a:p>
             <a:pPr algn="l" indent="0" marL="0" eaLnBrk="1" latinLnBrk="0" hangingPunct="1">
@@ -41083,7 +41083,7 @@
           <a:ln/>
         </p:spPr>
         <p:txBody>
-          <a:bodyPr wrap="none" lIns="0" tIns="0" rIns="0" bIns="0" rtlCol="0" anchor="ctr"/>
+          <a:bodyPr wrap="none" lIns="0" tIns="0" rIns="0" bIns="0" rtlCol="0" anchor="t"/>
           <a:lstStyle/>
           <a:p>
             <a:pPr algn="l" indent="0" marL="0" eaLnBrk="1" latinLnBrk="0" hangingPunct="1">
@@ -41125,7 +41125,7 @@
           <a:ln/>
         </p:spPr>
         <p:txBody>
-          <a:bodyPr wrap="none" lIns="0" tIns="0" rIns="0" bIns="0" rtlCol="0" anchor="ctr"/>
+          <a:bodyPr wrap="none" lIns="0" tIns="0" rIns="0" bIns="0" rtlCol="0" anchor="t"/>
           <a:lstStyle/>
           <a:p>
             <a:pPr algn="l" indent="0" marL="0" eaLnBrk="1" latinLnBrk="0" hangingPunct="1">
@@ -41218,7 +41218,7 @@
           <a:ln/>
         </p:spPr>
         <p:txBody>
-          <a:bodyPr wrap="none" lIns="0" tIns="0" rIns="0" bIns="0" rtlCol="0" anchor="ctr"/>
+          <a:bodyPr wrap="none" lIns="0" tIns="0" rIns="0" bIns="0" rtlCol="0" anchor="t"/>
           <a:lstStyle/>
           <a:p>
             <a:pPr algn="l" indent="0" marL="0" eaLnBrk="1" latinLnBrk="0" hangingPunct="1">
@@ -41341,7 +41341,7 @@
           <a:ln/>
         </p:spPr>
         <p:txBody>
-          <a:bodyPr wrap="none" lIns="0" tIns="0" rIns="0" bIns="0" rtlCol="0" anchor="ctr"/>
+          <a:bodyPr wrap="none" lIns="0" tIns="0" rIns="0" bIns="0" rtlCol="0" anchor="t"/>
           <a:lstStyle/>
           <a:p>
             <a:pPr algn="l" indent="0" marL="0" eaLnBrk="1" latinLnBrk="0" hangingPunct="1">
@@ -41464,7 +41464,7 @@
           <a:ln/>
         </p:spPr>
         <p:txBody>
-          <a:bodyPr wrap="none" lIns="0" tIns="0" rIns="0" bIns="0" rtlCol="0" anchor="ctr"/>
+          <a:bodyPr wrap="none" lIns="0" tIns="0" rIns="0" bIns="0" rtlCol="0" anchor="t"/>
           <a:lstStyle/>
           <a:p>
             <a:pPr algn="ctr" indent="0" marL="0" eaLnBrk="1" latinLnBrk="0" hangingPunct="1">
@@ -41587,7 +41587,7 @@
           <a:ln/>
         </p:spPr>
         <p:txBody>
-          <a:bodyPr wrap="none" lIns="0" tIns="0" rIns="0" bIns="0" rtlCol="0" anchor="ctr"/>
+          <a:bodyPr wrap="none" lIns="0" tIns="0" rIns="0" bIns="0" rtlCol="0" anchor="t"/>
           <a:lstStyle/>
           <a:p>
             <a:pPr algn="ctr" indent="0" marL="0" eaLnBrk="1" latinLnBrk="0" hangingPunct="1">
@@ -41710,7 +41710,7 @@
           <a:ln/>
         </p:spPr>
         <p:txBody>
-          <a:bodyPr wrap="none" lIns="0" tIns="0" rIns="0" bIns="0" rtlCol="0" anchor="ctr"/>
+          <a:bodyPr wrap="none" lIns="0" tIns="0" rIns="0" bIns="0" rtlCol="0" anchor="t"/>
           <a:lstStyle/>
           <a:p>
             <a:pPr algn="l" indent="0" marL="0" eaLnBrk="1" latinLnBrk="0" hangingPunct="1">
@@ -41833,7 +41833,7 @@
           <a:ln/>
         </p:spPr>
         <p:txBody>
-          <a:bodyPr wrap="none" lIns="0" tIns="0" rIns="0" bIns="0" rtlCol="0" anchor="ctr"/>
+          <a:bodyPr wrap="none" lIns="0" tIns="0" rIns="0" bIns="0" rtlCol="0" anchor="t"/>
           <a:lstStyle/>
           <a:p>
             <a:pPr algn="ctr" indent="0" marL="0" eaLnBrk="1" latinLnBrk="0" hangingPunct="1">
@@ -41956,7 +41956,7 @@
           <a:ln/>
         </p:spPr>
         <p:txBody>
-          <a:bodyPr wrap="none" lIns="0" tIns="0" rIns="0" bIns="0" rtlCol="0" anchor="ctr"/>
+          <a:bodyPr wrap="none" lIns="0" tIns="0" rIns="0" bIns="0" rtlCol="0" anchor="t"/>
           <a:lstStyle/>
           <a:p>
             <a:pPr algn="ctr" indent="0" marL="0" eaLnBrk="1" latinLnBrk="0" hangingPunct="1">
@@ -42079,7 +42079,7 @@
           <a:ln/>
         </p:spPr>
         <p:txBody>
-          <a:bodyPr wrap="none" lIns="0" tIns="0" rIns="0" bIns="0" rtlCol="0" anchor="ctr"/>
+          <a:bodyPr wrap="none" lIns="0" tIns="0" rIns="0" bIns="0" rtlCol="0" anchor="t"/>
           <a:lstStyle/>
           <a:p>
             <a:pPr algn="l" indent="0" marL="0" eaLnBrk="1" latinLnBrk="0" hangingPunct="1">
@@ -42202,7 +42202,7 @@
           <a:ln/>
         </p:spPr>
         <p:txBody>
-          <a:bodyPr wrap="none" lIns="0" tIns="0" rIns="0" bIns="0" rtlCol="0" anchor="ctr"/>
+          <a:bodyPr wrap="none" lIns="0" tIns="0" rIns="0" bIns="0" rtlCol="0" anchor="t"/>
           <a:lstStyle/>
           <a:p>
             <a:pPr algn="ctr" indent="0" marL="0" eaLnBrk="1" latinLnBrk="0" hangingPunct="1">
@@ -42325,7 +42325,7 @@
           <a:ln/>
         </p:spPr>
         <p:txBody>
-          <a:bodyPr wrap="none" lIns="0" tIns="0" rIns="0" bIns="0" rtlCol="0" anchor="ctr"/>
+          <a:bodyPr wrap="none" lIns="0" tIns="0" rIns="0" bIns="0" rtlCol="0" anchor="t"/>
           <a:lstStyle/>
           <a:p>
             <a:pPr algn="ctr" indent="0" marL="0" eaLnBrk="1" latinLnBrk="0" hangingPunct="1">
@@ -42448,7 +42448,7 @@
           <a:ln/>
         </p:spPr>
         <p:txBody>
-          <a:bodyPr wrap="none" lIns="0" tIns="0" rIns="0" bIns="0" rtlCol="0" anchor="ctr"/>
+          <a:bodyPr wrap="none" lIns="0" tIns="0" rIns="0" bIns="0" rtlCol="0" anchor="t"/>
           <a:lstStyle/>
           <a:p>
             <a:pPr algn="l" indent="0" marL="0" eaLnBrk="1" latinLnBrk="0" hangingPunct="1">
@@ -42571,7 +42571,7 @@
           <a:ln/>
         </p:spPr>
         <p:txBody>
-          <a:bodyPr wrap="none" lIns="0" tIns="0" rIns="0" bIns="0" rtlCol="0" anchor="ctr"/>
+          <a:bodyPr wrap="none" lIns="0" tIns="0" rIns="0" bIns="0" rtlCol="0" anchor="t"/>
           <a:lstStyle/>
           <a:p>
             <a:pPr algn="ctr" indent="0" marL="0" eaLnBrk="1" latinLnBrk="0" hangingPunct="1">
@@ -42694,7 +42694,7 @@
           <a:ln/>
         </p:spPr>
         <p:txBody>
-          <a:bodyPr wrap="none" lIns="0" tIns="0" rIns="0" bIns="0" rtlCol="0" anchor="ctr"/>
+          <a:bodyPr wrap="none" lIns="0" tIns="0" rIns="0" bIns="0" rtlCol="0" anchor="t"/>
           <a:lstStyle/>
           <a:p>
             <a:pPr algn="ctr" indent="0" marL="0" eaLnBrk="1" latinLnBrk="0" hangingPunct="1">
@@ -42817,7 +42817,7 @@
           <a:ln/>
         </p:spPr>
         <p:txBody>
-          <a:bodyPr wrap="none" lIns="0" tIns="0" rIns="0" bIns="0" rtlCol="0" anchor="ctr"/>
+          <a:bodyPr wrap="none" lIns="0" tIns="0" rIns="0" bIns="0" rtlCol="0" anchor="t"/>
           <a:lstStyle/>
           <a:p>
             <a:pPr algn="l" indent="0" marL="0" eaLnBrk="1" latinLnBrk="0" hangingPunct="1">
@@ -42940,7 +42940,7 @@
           <a:ln/>
         </p:spPr>
         <p:txBody>
-          <a:bodyPr wrap="none" lIns="0" tIns="0" rIns="0" bIns="0" rtlCol="0" anchor="ctr"/>
+          <a:bodyPr wrap="none" lIns="0" tIns="0" rIns="0" bIns="0" rtlCol="0" anchor="t"/>
           <a:lstStyle/>
           <a:p>
             <a:pPr algn="ctr" indent="0" marL="0" eaLnBrk="1" latinLnBrk="0" hangingPunct="1">
@@ -43063,7 +43063,7 @@
           <a:ln/>
         </p:spPr>
         <p:txBody>
-          <a:bodyPr wrap="none" lIns="0" tIns="0" rIns="0" bIns="0" rtlCol="0" anchor="ctr"/>
+          <a:bodyPr wrap="none" lIns="0" tIns="0" rIns="0" bIns="0" rtlCol="0" anchor="t"/>
           <a:lstStyle/>
           <a:p>
             <a:pPr algn="ctr" indent="0" marL="0" eaLnBrk="1" latinLnBrk="0" hangingPunct="1">
@@ -43186,7 +43186,7 @@
           <a:ln/>
         </p:spPr>
         <p:txBody>
-          <a:bodyPr wrap="none" lIns="0" tIns="0" rIns="0" bIns="0" rtlCol="0" anchor="ctr"/>
+          <a:bodyPr wrap="none" lIns="0" tIns="0" rIns="0" bIns="0" rtlCol="0" anchor="t"/>
           <a:lstStyle/>
           <a:p>
             <a:pPr algn="l" indent="0" marL="0" eaLnBrk="1" latinLnBrk="0" hangingPunct="1">
@@ -43309,7 +43309,7 @@
           <a:ln/>
         </p:spPr>
         <p:txBody>
-          <a:bodyPr wrap="none" lIns="0" tIns="0" rIns="0" bIns="0" rtlCol="0" anchor="ctr"/>
+          <a:bodyPr wrap="none" lIns="0" tIns="0" rIns="0" bIns="0" rtlCol="0" anchor="t"/>
           <a:lstStyle/>
           <a:p>
             <a:pPr algn="ctr" indent="0" marL="0" eaLnBrk="1" latinLnBrk="0" hangingPunct="1">
@@ -43432,7 +43432,7 @@
           <a:ln/>
         </p:spPr>
         <p:txBody>
-          <a:bodyPr wrap="none" lIns="0" tIns="0" rIns="0" bIns="0" rtlCol="0" anchor="ctr"/>
+          <a:bodyPr wrap="none" lIns="0" tIns="0" rIns="0" bIns="0" rtlCol="0" anchor="t"/>
           <a:lstStyle/>
           <a:p>
             <a:pPr algn="ctr" indent="0" marL="0" eaLnBrk="1" latinLnBrk="0" hangingPunct="1">
@@ -43555,7 +43555,7 @@
           <a:ln/>
         </p:spPr>
         <p:txBody>
-          <a:bodyPr wrap="none" lIns="0" tIns="0" rIns="0" bIns="0" rtlCol="0" anchor="ctr"/>
+          <a:bodyPr wrap="none" lIns="0" tIns="0" rIns="0" bIns="0" rtlCol="0" anchor="t"/>
           <a:lstStyle/>
           <a:p>
             <a:pPr algn="l" indent="0" marL="0" eaLnBrk="1" latinLnBrk="0" hangingPunct="1">
@@ -43678,7 +43678,7 @@
           <a:ln/>
         </p:spPr>
         <p:txBody>
-          <a:bodyPr wrap="none" lIns="0" tIns="0" rIns="0" bIns="0" rtlCol="0" anchor="ctr"/>
+          <a:bodyPr wrap="none" lIns="0" tIns="0" rIns="0" bIns="0" rtlCol="0" anchor="t"/>
           <a:lstStyle/>
           <a:p>
             <a:pPr algn="ctr" indent="0" marL="0" eaLnBrk="1" latinLnBrk="0" hangingPunct="1">
@@ -43801,7 +43801,7 @@
           <a:ln/>
         </p:spPr>
         <p:txBody>
-          <a:bodyPr wrap="none" lIns="0" tIns="0" rIns="0" bIns="0" rtlCol="0" anchor="ctr"/>
+          <a:bodyPr wrap="none" lIns="0" tIns="0" rIns="0" bIns="0" rtlCol="0" anchor="t"/>
           <a:lstStyle/>
           <a:p>
             <a:pPr algn="ctr" indent="0" marL="0" eaLnBrk="1" latinLnBrk="0" hangingPunct="1">
@@ -43924,7 +43924,7 @@
           <a:ln/>
         </p:spPr>
         <p:txBody>
-          <a:bodyPr wrap="none" lIns="0" tIns="0" rIns="0" bIns="0" rtlCol="0" anchor="ctr"/>
+          <a:bodyPr wrap="none" lIns="0" tIns="0" rIns="0" bIns="0" rtlCol="0" anchor="t"/>
           <a:lstStyle/>
           <a:p>
             <a:pPr algn="l" indent="0" marL="0" eaLnBrk="1" latinLnBrk="0" hangingPunct="1">
@@ -44047,7 +44047,7 @@
           <a:ln/>
         </p:spPr>
         <p:txBody>
-          <a:bodyPr wrap="none" lIns="0" tIns="0" rIns="0" bIns="0" rtlCol="0" anchor="ctr"/>
+          <a:bodyPr wrap="none" lIns="0" tIns="0" rIns="0" bIns="0" rtlCol="0" anchor="t"/>
           <a:lstStyle/>
           <a:p>
             <a:pPr algn="ctr" indent="0" marL="0" eaLnBrk="1" latinLnBrk="0" hangingPunct="1">
@@ -44170,7 +44170,7 @@
           <a:ln/>
         </p:spPr>
         <p:txBody>
-          <a:bodyPr wrap="none" lIns="0" tIns="0" rIns="0" bIns="0" rtlCol="0" anchor="ctr"/>
+          <a:bodyPr wrap="none" lIns="0" tIns="0" rIns="0" bIns="0" rtlCol="0" anchor="t"/>
           <a:lstStyle/>
           <a:p>
             <a:pPr algn="ctr" indent="0" marL="0" eaLnBrk="1" latinLnBrk="0" hangingPunct="1">
@@ -44293,7 +44293,7 @@
           <a:ln/>
         </p:spPr>
         <p:txBody>
-          <a:bodyPr wrap="none" lIns="0" tIns="0" rIns="0" bIns="0" rtlCol="0" anchor="ctr"/>
+          <a:bodyPr wrap="none" lIns="0" tIns="0" rIns="0" bIns="0" rtlCol="0" anchor="t"/>
           <a:lstStyle/>
           <a:p>
             <a:pPr algn="l" indent="0" marL="0" eaLnBrk="1" latinLnBrk="0" hangingPunct="1">
@@ -44416,7 +44416,7 @@
           <a:ln/>
         </p:spPr>
         <p:txBody>
-          <a:bodyPr wrap="none" lIns="0" tIns="0" rIns="0" bIns="0" rtlCol="0" anchor="ctr"/>
+          <a:bodyPr wrap="none" lIns="0" tIns="0" rIns="0" bIns="0" rtlCol="0" anchor="t"/>
           <a:lstStyle/>
           <a:p>
             <a:pPr algn="ctr" indent="0" marL="0" eaLnBrk="1" latinLnBrk="0" hangingPunct="1">
@@ -44539,7 +44539,7 @@
           <a:ln/>
         </p:spPr>
         <p:txBody>
-          <a:bodyPr wrap="none" lIns="0" tIns="0" rIns="0" bIns="0" rtlCol="0" anchor="ctr"/>
+          <a:bodyPr wrap="none" lIns="0" tIns="0" rIns="0" bIns="0" rtlCol="0" anchor="t"/>
           <a:lstStyle/>
           <a:p>
             <a:pPr algn="ctr" indent="0" marL="0" eaLnBrk="1" latinLnBrk="0" hangingPunct="1">
@@ -44662,7 +44662,7 @@
           <a:ln/>
         </p:spPr>
         <p:txBody>
-          <a:bodyPr wrap="none" lIns="0" tIns="0" rIns="0" bIns="0" rtlCol="0" anchor="ctr"/>
+          <a:bodyPr wrap="none" lIns="0" tIns="0" rIns="0" bIns="0" rtlCol="0" anchor="t"/>
           <a:lstStyle/>
           <a:p>
             <a:pPr algn="l" indent="0" marL="0" eaLnBrk="1" latinLnBrk="0" hangingPunct="1">
@@ -44785,7 +44785,7 @@
           <a:ln/>
         </p:spPr>
         <p:txBody>
-          <a:bodyPr wrap="none" lIns="0" tIns="0" rIns="0" bIns="0" rtlCol="0" anchor="ctr"/>
+          <a:bodyPr wrap="none" lIns="0" tIns="0" rIns="0" bIns="0" rtlCol="0" anchor="t"/>
           <a:lstStyle/>
           <a:p>
             <a:pPr algn="ctr" indent="0" marL="0" eaLnBrk="1" latinLnBrk="0" hangingPunct="1">
@@ -44908,7 +44908,7 @@
           <a:ln/>
         </p:spPr>
         <p:txBody>
-          <a:bodyPr wrap="none" lIns="0" tIns="0" rIns="0" bIns="0" rtlCol="0" anchor="ctr"/>
+          <a:bodyPr wrap="none" lIns="0" tIns="0" rIns="0" bIns="0" rtlCol="0" anchor="t"/>
           <a:lstStyle/>
           <a:p>
             <a:pPr algn="ctr" indent="0" marL="0" eaLnBrk="1" latinLnBrk="0" hangingPunct="1">
@@ -44950,7 +44950,7 @@
           <a:ln/>
         </p:spPr>
         <p:txBody>
-          <a:bodyPr wrap="none" lIns="0" tIns="0" rIns="0" bIns="0" rtlCol="0" anchor="ctr"/>
+          <a:bodyPr wrap="none" lIns="0" tIns="0" rIns="0" bIns="0" rtlCol="0" anchor="t"/>
           <a:lstStyle/>
           <a:p>
             <a:pPr algn="l" indent="0" marL="0" eaLnBrk="1" latinLnBrk="0" hangingPunct="1">
@@ -45019,7 +45019,7 @@
           <a:ln/>
         </p:spPr>
         <p:txBody>
-          <a:bodyPr wrap="none" lIns="0" tIns="0" rIns="0" bIns="0" rtlCol="0" anchor="ctr"/>
+          <a:bodyPr wrap="none" lIns="0" tIns="0" rIns="0" bIns="0" rtlCol="0" anchor="t"/>
           <a:lstStyle/>
           <a:p>
             <a:pPr algn="l" indent="0" marL="0" eaLnBrk="1" latinLnBrk="0" hangingPunct="1">
@@ -45061,7 +45061,7 @@
           <a:ln/>
         </p:spPr>
         <p:txBody>
-          <a:bodyPr wrap="square" lIns="0" tIns="0" rIns="0" bIns="0" rtlCol="0" anchor="ctr"/>
+          <a:bodyPr wrap="square" lIns="0" tIns="0" rIns="0" bIns="0" rtlCol="0" anchor="t"/>
           <a:lstStyle/>
           <a:p>
             <a:pPr algn="just" indent="0" marL="0" eaLnBrk="1" latinLnBrk="0" hangingPunct="1">
@@ -45130,7 +45130,7 @@
           <a:ln/>
         </p:spPr>
         <p:txBody>
-          <a:bodyPr wrap="none" lIns="0" tIns="0" rIns="0" bIns="0" rtlCol="0" anchor="ctr"/>
+          <a:bodyPr wrap="none" lIns="0" tIns="0" rIns="0" bIns="0" rtlCol="0" anchor="t"/>
           <a:lstStyle/>
           <a:p>
             <a:pPr algn="l" indent="0" marL="0" eaLnBrk="1" latinLnBrk="0" hangingPunct="1">
@@ -45172,7 +45172,7 @@
           <a:ln/>
         </p:spPr>
         <p:txBody>
-          <a:bodyPr wrap="square" lIns="0" tIns="0" rIns="0" bIns="0" rtlCol="0" anchor="ctr"/>
+          <a:bodyPr wrap="square" lIns="0" tIns="0" rIns="0" bIns="0" rtlCol="0" anchor="t"/>
           <a:lstStyle/>
           <a:p>
             <a:pPr algn="just" indent="0" marL="0" eaLnBrk="1" latinLnBrk="0" hangingPunct="1">
@@ -45241,7 +45241,7 @@
           <a:ln/>
         </p:spPr>
         <p:txBody>
-          <a:bodyPr wrap="none" lIns="0" tIns="0" rIns="0" bIns="0" rtlCol="0" anchor="ctr"/>
+          <a:bodyPr wrap="none" lIns="0" tIns="0" rIns="0" bIns="0" rtlCol="0" anchor="t"/>
           <a:lstStyle/>
           <a:p>
             <a:pPr algn="l" indent="0" marL="0" eaLnBrk="1" latinLnBrk="0" hangingPunct="1">
@@ -45283,7 +45283,7 @@
           <a:ln/>
         </p:spPr>
         <p:txBody>
-          <a:bodyPr wrap="square" lIns="0" tIns="0" rIns="0" bIns="0" rtlCol="0" anchor="ctr"/>
+          <a:bodyPr wrap="square" lIns="0" tIns="0" rIns="0" bIns="0" rtlCol="0" anchor="t"/>
           <a:lstStyle/>
           <a:p>
             <a:pPr algn="just" indent="0" marL="0" eaLnBrk="1" latinLnBrk="0" hangingPunct="1">
@@ -45325,7 +45325,7 @@
           <a:ln/>
         </p:spPr>
         <p:txBody>
-          <a:bodyPr wrap="none" lIns="0" tIns="0" rIns="0" bIns="0" rtlCol="0" anchor="ctr"/>
+          <a:bodyPr wrap="none" lIns="0" tIns="0" rIns="0" bIns="0" rtlCol="0" anchor="t"/>
           <a:lstStyle/>
           <a:p>
             <a:pPr algn="l" indent="0" marL="0" eaLnBrk="1" latinLnBrk="0" hangingPunct="1">
@@ -45367,7 +45367,7 @@
           <a:ln/>
         </p:spPr>
         <p:txBody>
-          <a:bodyPr wrap="none" lIns="0" tIns="0" rIns="0" bIns="0" rtlCol="0" anchor="ctr"/>
+          <a:bodyPr wrap="none" lIns="0" tIns="0" rIns="0" bIns="0" rtlCol="0" anchor="t"/>
           <a:lstStyle/>
           <a:p>
             <a:pPr algn="r" indent="0" marL="0" eaLnBrk="1" latinLnBrk="0" hangingPunct="1">
@@ -45409,7 +45409,7 @@
           <a:ln/>
         </p:spPr>
         <p:txBody>
-          <a:bodyPr wrap="none" lIns="0" tIns="0" rIns="0" bIns="0" rtlCol="0" anchor="ctr"/>
+          <a:bodyPr wrap="none" lIns="0" tIns="0" rIns="0" bIns="0" rtlCol="0" anchor="t"/>
           <a:lstStyle/>
           <a:p>
             <a:pPr algn="l" indent="0" marL="0" eaLnBrk="1" latinLnBrk="0" hangingPunct="1">
@@ -45591,7 +45591,7 @@
           <a:ln/>
         </p:spPr>
         <p:txBody>
-          <a:bodyPr wrap="none" lIns="0" tIns="0" rIns="0" bIns="0" rtlCol="0" anchor="ctr"/>
+          <a:bodyPr wrap="none" lIns="0" tIns="0" rIns="0" bIns="0" rtlCol="0" anchor="t"/>
           <a:lstStyle/>
           <a:p>
             <a:pPr algn="l" indent="0" marL="0" eaLnBrk="1" latinLnBrk="0" hangingPunct="1">
@@ -45630,7 +45630,7 @@
           <a:ln/>
         </p:spPr>
         <p:txBody>
-          <a:bodyPr wrap="none" lIns="0" tIns="0" rIns="0" bIns="0" rtlCol="0" anchor="ctr"/>
+          <a:bodyPr wrap="none" lIns="0" tIns="0" rIns="0" bIns="0" rtlCol="0" anchor="t"/>
           <a:lstStyle/>
           <a:p>
             <a:pPr algn="l" indent="0" marL="0" eaLnBrk="1" latinLnBrk="0" hangingPunct="1">
@@ -45672,7 +45672,7 @@
           <a:ln/>
         </p:spPr>
         <p:txBody>
-          <a:bodyPr wrap="none" lIns="0" tIns="0" rIns="0" bIns="0" rtlCol="0" anchor="ctr"/>
+          <a:bodyPr wrap="none" lIns="0" tIns="0" rIns="0" bIns="0" rtlCol="0" anchor="t"/>
           <a:lstStyle/>
           <a:p>
             <a:pPr algn="l" indent="0" marL="0" eaLnBrk="1" latinLnBrk="0" hangingPunct="1">
@@ -45765,7 +45765,7 @@
           <a:ln/>
         </p:spPr>
         <p:txBody>
-          <a:bodyPr wrap="none" lIns="0" tIns="0" rIns="0" bIns="0" rtlCol="0" anchor="ctr"/>
+          <a:bodyPr wrap="none" lIns="0" tIns="0" rIns="0" bIns="0" rtlCol="0" anchor="t"/>
           <a:lstStyle/>
           <a:p>
             <a:pPr algn="l" indent="0" marL="0" eaLnBrk="1" latinLnBrk="0" hangingPunct="1">
@@ -45879,7 +45879,7 @@
           <a:ln/>
         </p:spPr>
         <p:txBody>
-          <a:bodyPr wrap="none" lIns="0" tIns="0" rIns="0" bIns="0" rtlCol="0" anchor="ctr"/>
+          <a:bodyPr wrap="none" lIns="0" tIns="0" rIns="0" bIns="0" rtlCol="0" anchor="t"/>
           <a:lstStyle/>
           <a:p>
             <a:pPr algn="ctr" indent="0" marL="0" eaLnBrk="1" latinLnBrk="0" hangingPunct="1">
@@ -45921,7 +45921,7 @@
           <a:ln/>
         </p:spPr>
         <p:txBody>
-          <a:bodyPr wrap="square" lIns="0" tIns="0" rIns="0" bIns="0" rtlCol="0" anchor="ctr"/>
+          <a:bodyPr wrap="square" lIns="0" tIns="0" rIns="0" bIns="0" rtlCol="0" anchor="t"/>
           <a:lstStyle/>
           <a:p>
             <a:pPr algn="just" marL="243840" indent="-243840" eaLnBrk="1" latinLnBrk="0" hangingPunct="1">
@@ -45964,7 +45964,7 @@
           <a:ln/>
         </p:spPr>
         <p:txBody>
-          <a:bodyPr wrap="none" lIns="0" tIns="0" rIns="0" bIns="0" rtlCol="0" anchor="ctr"/>
+          <a:bodyPr wrap="none" lIns="0" tIns="0" rIns="0" bIns="0" rtlCol="0" anchor="t"/>
           <a:lstStyle/>
           <a:p>
             <a:pPr algn="just" marL="243840" indent="-243840" eaLnBrk="1" latinLnBrk="0" hangingPunct="1">
@@ -46007,7 +46007,7 @@
           <a:ln/>
         </p:spPr>
         <p:txBody>
-          <a:bodyPr wrap="none" lIns="0" tIns="0" rIns="0" bIns="0" rtlCol="0" anchor="ctr"/>
+          <a:bodyPr wrap="none" lIns="0" tIns="0" rIns="0" bIns="0" rtlCol="0" anchor="t"/>
           <a:lstStyle/>
           <a:p>
             <a:pPr algn="just" marL="243840" indent="-243840" eaLnBrk="1" latinLnBrk="0" hangingPunct="1">
@@ -46050,7 +46050,7 @@
           <a:ln/>
         </p:spPr>
         <p:txBody>
-          <a:bodyPr wrap="none" lIns="0" tIns="0" rIns="0" bIns="0" rtlCol="0" anchor="ctr"/>
+          <a:bodyPr wrap="none" lIns="0" tIns="0" rIns="0" bIns="0" rtlCol="0" anchor="t"/>
           <a:lstStyle/>
           <a:p>
             <a:pPr algn="just" marL="243840" indent="-243840" eaLnBrk="1" latinLnBrk="0" hangingPunct="1">
@@ -46165,7 +46165,7 @@
           <a:ln/>
         </p:spPr>
         <p:txBody>
-          <a:bodyPr wrap="none" lIns="0" tIns="0" rIns="0" bIns="0" rtlCol="0" anchor="ctr"/>
+          <a:bodyPr wrap="none" lIns="0" tIns="0" rIns="0" bIns="0" rtlCol="0" anchor="t"/>
           <a:lstStyle/>
           <a:p>
             <a:pPr algn="ctr" indent="0" marL="0" eaLnBrk="1" latinLnBrk="0" hangingPunct="1">
@@ -46207,7 +46207,7 @@
           <a:ln/>
         </p:spPr>
         <p:txBody>
-          <a:bodyPr wrap="none" lIns="0" tIns="0" rIns="0" bIns="0" rtlCol="0" anchor="ctr"/>
+          <a:bodyPr wrap="none" lIns="0" tIns="0" rIns="0" bIns="0" rtlCol="0" anchor="t"/>
           <a:lstStyle/>
           <a:p>
             <a:pPr algn="just" marL="243840" indent="-243840" eaLnBrk="1" latinLnBrk="0" hangingPunct="1">
@@ -46250,7 +46250,7 @@
           <a:ln/>
         </p:spPr>
         <p:txBody>
-          <a:bodyPr wrap="none" lIns="0" tIns="0" rIns="0" bIns="0" rtlCol="0" anchor="ctr"/>
+          <a:bodyPr wrap="none" lIns="0" tIns="0" rIns="0" bIns="0" rtlCol="0" anchor="t"/>
           <a:lstStyle/>
           <a:p>
             <a:pPr algn="just" marL="243840" indent="-243840" eaLnBrk="1" latinLnBrk="0" hangingPunct="1">
@@ -46293,7 +46293,7 @@
           <a:ln/>
         </p:spPr>
         <p:txBody>
-          <a:bodyPr wrap="square" lIns="0" tIns="0" rIns="0" bIns="0" rtlCol="0" anchor="ctr"/>
+          <a:bodyPr wrap="square" lIns="0" tIns="0" rIns="0" bIns="0" rtlCol="0" anchor="t"/>
           <a:lstStyle/>
           <a:p>
             <a:pPr algn="just" marL="243840" indent="-243840" eaLnBrk="1" latinLnBrk="0" hangingPunct="1">
@@ -46336,7 +46336,7 @@
           <a:ln/>
         </p:spPr>
         <p:txBody>
-          <a:bodyPr wrap="none" lIns="0" tIns="0" rIns="0" bIns="0" rtlCol="0" anchor="ctr"/>
+          <a:bodyPr wrap="none" lIns="0" tIns="0" rIns="0" bIns="0" rtlCol="0" anchor="t"/>
           <a:lstStyle/>
           <a:p>
             <a:pPr algn="just" marL="243840" indent="-243840" eaLnBrk="1" latinLnBrk="0" hangingPunct="1">
@@ -46433,7 +46433,7 @@
           <a:ln/>
         </p:spPr>
         <p:txBody>
-          <a:bodyPr wrap="none" lIns="0" tIns="0" rIns="0" bIns="0" rtlCol="0" anchor="ctr"/>
+          <a:bodyPr wrap="none" lIns="0" tIns="0" rIns="0" bIns="0" rtlCol="0" anchor="t"/>
           <a:lstStyle/>
           <a:p>
             <a:pPr algn="just" indent="0" marL="0" eaLnBrk="1" latinLnBrk="0" hangingPunct="1">
@@ -46529,7 +46529,7 @@
           <a:ln/>
         </p:spPr>
         <p:txBody>
-          <a:bodyPr wrap="none" lIns="0" tIns="0" rIns="0" bIns="0" rtlCol="0" anchor="ctr"/>
+          <a:bodyPr wrap="none" lIns="0" tIns="0" rIns="0" bIns="0" rtlCol="0" anchor="t"/>
           <a:lstStyle/>
           <a:p>
             <a:pPr algn="just" indent="0" marL="0" eaLnBrk="1" latinLnBrk="0" hangingPunct="1">
@@ -46598,7 +46598,7 @@
           <a:ln/>
         </p:spPr>
         <p:txBody>
-          <a:bodyPr wrap="none" lIns="0" tIns="0" rIns="0" bIns="0" rtlCol="0" anchor="ctr"/>
+          <a:bodyPr wrap="none" lIns="0" tIns="0" rIns="0" bIns="0" rtlCol="0" anchor="t"/>
           <a:lstStyle/>
           <a:p>
             <a:pPr algn="ctr" indent="0" marL="0" eaLnBrk="1" latinLnBrk="0" hangingPunct="1">
@@ -46640,7 +46640,7 @@
           <a:ln/>
         </p:spPr>
         <p:txBody>
-          <a:bodyPr wrap="none" lIns="0" tIns="0" rIns="0" bIns="0" rtlCol="0" anchor="ctr"/>
+          <a:bodyPr wrap="none" lIns="0" tIns="0" rIns="0" bIns="0" rtlCol="0" anchor="t"/>
           <a:lstStyle/>
           <a:p>
             <a:pPr algn="l" indent="0" marL="0" eaLnBrk="1" latinLnBrk="0" hangingPunct="1">
@@ -46682,7 +46682,7 @@
           <a:ln/>
         </p:spPr>
         <p:txBody>
-          <a:bodyPr wrap="none" lIns="0" tIns="0" rIns="0" bIns="0" rtlCol="0" anchor="ctr"/>
+          <a:bodyPr wrap="none" lIns="0" tIns="0" rIns="0" bIns="0" rtlCol="0" anchor="t"/>
           <a:lstStyle/>
           <a:p>
             <a:pPr algn="r" indent="0" marL="0" eaLnBrk="1" latinLnBrk="0" hangingPunct="1">
@@ -46724,7 +46724,7 @@
           <a:ln/>
         </p:spPr>
         <p:txBody>
-          <a:bodyPr wrap="none" lIns="0" tIns="0" rIns="0" bIns="0" rtlCol="0" anchor="ctr"/>
+          <a:bodyPr wrap="none" lIns="0" tIns="0" rIns="0" bIns="0" rtlCol="0" anchor="t"/>
           <a:lstStyle/>
           <a:p>
             <a:pPr algn="l" indent="0" marL="0" eaLnBrk="1" latinLnBrk="0" hangingPunct="1">
@@ -46906,7 +46906,7 @@
           <a:ln/>
         </p:spPr>
         <p:txBody>
-          <a:bodyPr wrap="none" lIns="0" tIns="0" rIns="0" bIns="0" rtlCol="0" anchor="ctr"/>
+          <a:bodyPr wrap="none" lIns="0" tIns="0" rIns="0" bIns="0" rtlCol="0" anchor="t"/>
           <a:lstStyle/>
           <a:p>
             <a:pPr algn="l" indent="0" marL="0" eaLnBrk="1" latinLnBrk="0" hangingPunct="1">
@@ -46945,7 +46945,7 @@
           <a:ln/>
         </p:spPr>
         <p:txBody>
-          <a:bodyPr wrap="none" lIns="0" tIns="0" rIns="0" bIns="0" rtlCol="0" anchor="ctr"/>
+          <a:bodyPr wrap="none" lIns="0" tIns="0" rIns="0" bIns="0" rtlCol="0" anchor="t"/>
           <a:lstStyle/>
           <a:p>
             <a:pPr algn="l" indent="0" marL="0" eaLnBrk="1" latinLnBrk="0" hangingPunct="1">
@@ -46987,7 +46987,7 @@
           <a:ln/>
         </p:spPr>
         <p:txBody>
-          <a:bodyPr wrap="none" lIns="0" tIns="0" rIns="0" bIns="0" rtlCol="0" anchor="ctr"/>
+          <a:bodyPr wrap="none" lIns="0" tIns="0" rIns="0" bIns="0" rtlCol="0" anchor="t"/>
           <a:lstStyle/>
           <a:p>
             <a:pPr algn="l" indent="0" marL="0" eaLnBrk="1" latinLnBrk="0" hangingPunct="1">
@@ -47080,7 +47080,7 @@
           <a:ln/>
         </p:spPr>
         <p:txBody>
-          <a:bodyPr wrap="none" lIns="0" tIns="0" rIns="0" bIns="0" rtlCol="0" anchor="ctr"/>
+          <a:bodyPr wrap="none" lIns="0" tIns="0" rIns="0" bIns="0" rtlCol="0" anchor="t"/>
           <a:lstStyle/>
           <a:p>
             <a:pPr algn="l" indent="0" marL="0" eaLnBrk="1" latinLnBrk="0" hangingPunct="1">
@@ -47197,7 +47197,7 @@
           <a:ln/>
         </p:spPr>
         <p:txBody>
-          <a:bodyPr wrap="none" lIns="0" tIns="0" rIns="0" bIns="0" rtlCol="0" anchor="ctr"/>
+          <a:bodyPr wrap="none" lIns="0" tIns="0" rIns="0" bIns="0" rtlCol="0" anchor="t"/>
           <a:lstStyle/>
           <a:p>
             <a:pPr algn="l" indent="0" marL="0" eaLnBrk="1" latinLnBrk="0" hangingPunct="1">
@@ -47239,7 +47239,7 @@
           <a:ln/>
         </p:spPr>
         <p:txBody>
-          <a:bodyPr wrap="none" lIns="0" tIns="0" rIns="0" bIns="0" rtlCol="0" anchor="ctr"/>
+          <a:bodyPr wrap="none" lIns="0" tIns="0" rIns="0" bIns="0" rtlCol="0" anchor="t"/>
           <a:lstStyle/>
           <a:p>
             <a:pPr algn="l" indent="0" marL="0" eaLnBrk="1" latinLnBrk="0" hangingPunct="1">
@@ -47308,7 +47308,7 @@
           <a:ln/>
         </p:spPr>
         <p:txBody>
-          <a:bodyPr wrap="none" lIns="0" tIns="0" rIns="0" bIns="0" rtlCol="0" anchor="ctr"/>
+          <a:bodyPr wrap="none" lIns="0" tIns="0" rIns="0" bIns="0" rtlCol="0" anchor="t"/>
           <a:lstStyle/>
           <a:p>
             <a:pPr algn="just" marL="243840" indent="-243840" eaLnBrk="1" latinLnBrk="0" hangingPunct="1">
@@ -47351,7 +47351,7 @@
           <a:ln/>
         </p:spPr>
         <p:txBody>
-          <a:bodyPr wrap="none" lIns="0" tIns="0" rIns="0" bIns="0" rtlCol="0" anchor="ctr"/>
+          <a:bodyPr wrap="none" lIns="0" tIns="0" rIns="0" bIns="0" rtlCol="0" anchor="t"/>
           <a:lstStyle/>
           <a:p>
             <a:pPr algn="just" marL="243840" indent="-243840" eaLnBrk="1" latinLnBrk="0" hangingPunct="1">
@@ -47394,7 +47394,7 @@
           <a:ln/>
         </p:spPr>
         <p:txBody>
-          <a:bodyPr wrap="none" lIns="0" tIns="0" rIns="0" bIns="0" rtlCol="0" anchor="ctr"/>
+          <a:bodyPr wrap="none" lIns="0" tIns="0" rIns="0" bIns="0" rtlCol="0" anchor="t"/>
           <a:lstStyle/>
           <a:p>
             <a:pPr algn="just" marL="243840" indent="-243840" eaLnBrk="1" latinLnBrk="0" hangingPunct="1">
@@ -47437,7 +47437,7 @@
           <a:ln/>
         </p:spPr>
         <p:txBody>
-          <a:bodyPr wrap="none" lIns="0" tIns="0" rIns="0" bIns="0" rtlCol="0" anchor="ctr"/>
+          <a:bodyPr wrap="none" lIns="0" tIns="0" rIns="0" bIns="0" rtlCol="0" anchor="t"/>
           <a:lstStyle/>
           <a:p>
             <a:pPr algn="just" marL="243840" indent="-243840" eaLnBrk="1" latinLnBrk="0" hangingPunct="1">
@@ -47480,7 +47480,7 @@
           <a:ln/>
         </p:spPr>
         <p:txBody>
-          <a:bodyPr wrap="none" lIns="0" tIns="0" rIns="0" bIns="0" rtlCol="0" anchor="ctr"/>
+          <a:bodyPr wrap="none" lIns="0" tIns="0" rIns="0" bIns="0" rtlCol="0" anchor="t"/>
           <a:lstStyle/>
           <a:p>
             <a:pPr algn="l" indent="0" marL="0" eaLnBrk="1" latinLnBrk="0" hangingPunct="1">
@@ -47522,7 +47522,7 @@
           <a:ln/>
         </p:spPr>
         <p:txBody>
-          <a:bodyPr wrap="square" lIns="0" tIns="0" rIns="0" bIns="0" rtlCol="0" anchor="ctr"/>
+          <a:bodyPr wrap="square" lIns="0" tIns="0" rIns="0" bIns="0" rtlCol="0" anchor="t"/>
           <a:lstStyle/>
           <a:p>
             <a:pPr algn="l" indent="0" marL="0" eaLnBrk="1" latinLnBrk="0" hangingPunct="1">
@@ -47639,7 +47639,7 @@
           <a:ln/>
         </p:spPr>
         <p:txBody>
-          <a:bodyPr wrap="none" lIns="0" tIns="0" rIns="0" bIns="0" rtlCol="0" anchor="ctr"/>
+          <a:bodyPr wrap="none" lIns="0" tIns="0" rIns="0" bIns="0" rtlCol="0" anchor="t"/>
           <a:lstStyle/>
           <a:p>
             <a:pPr algn="l" indent="0" marL="0" eaLnBrk="1" latinLnBrk="0" hangingPunct="1">
@@ -47681,7 +47681,7 @@
           <a:ln/>
         </p:spPr>
         <p:txBody>
-          <a:bodyPr wrap="none" lIns="0" tIns="0" rIns="0" bIns="0" rtlCol="0" anchor="ctr"/>
+          <a:bodyPr wrap="none" lIns="0" tIns="0" rIns="0" bIns="0" rtlCol="0" anchor="t"/>
           <a:lstStyle/>
           <a:p>
             <a:pPr algn="l" indent="0" marL="0" eaLnBrk="1" latinLnBrk="0" hangingPunct="1">
@@ -47750,7 +47750,7 @@
           <a:ln/>
         </p:spPr>
         <p:txBody>
-          <a:bodyPr wrap="none" lIns="0" tIns="0" rIns="0" bIns="0" rtlCol="0" anchor="ctr"/>
+          <a:bodyPr wrap="none" lIns="0" tIns="0" rIns="0" bIns="0" rtlCol="0" anchor="t"/>
           <a:lstStyle/>
           <a:p>
             <a:pPr algn="just" marL="243840" indent="-243840" eaLnBrk="1" latinLnBrk="0" hangingPunct="1">
@@ -47793,7 +47793,7 @@
           <a:ln/>
         </p:spPr>
         <p:txBody>
-          <a:bodyPr wrap="none" lIns="0" tIns="0" rIns="0" bIns="0" rtlCol="0" anchor="ctr"/>
+          <a:bodyPr wrap="none" lIns="0" tIns="0" rIns="0" bIns="0" rtlCol="0" anchor="t"/>
           <a:lstStyle/>
           <a:p>
             <a:pPr algn="just" marL="243840" indent="-243840" eaLnBrk="1" latinLnBrk="0" hangingPunct="1">
@@ -47836,7 +47836,7 @@
           <a:ln/>
         </p:spPr>
         <p:txBody>
-          <a:bodyPr wrap="none" lIns="0" tIns="0" rIns="0" bIns="0" rtlCol="0" anchor="ctr"/>
+          <a:bodyPr wrap="none" lIns="0" tIns="0" rIns="0" bIns="0" rtlCol="0" anchor="t"/>
           <a:lstStyle/>
           <a:p>
             <a:pPr algn="just" marL="243840" indent="-243840" eaLnBrk="1" latinLnBrk="0" hangingPunct="1">
@@ -47879,7 +47879,7 @@
           <a:ln/>
         </p:spPr>
         <p:txBody>
-          <a:bodyPr wrap="none" lIns="0" tIns="0" rIns="0" bIns="0" rtlCol="0" anchor="ctr"/>
+          <a:bodyPr wrap="none" lIns="0" tIns="0" rIns="0" bIns="0" rtlCol="0" anchor="t"/>
           <a:lstStyle/>
           <a:p>
             <a:pPr algn="just" marL="243840" indent="-243840" eaLnBrk="1" latinLnBrk="0" hangingPunct="1">
@@ -47922,7 +47922,7 @@
           <a:ln/>
         </p:spPr>
         <p:txBody>
-          <a:bodyPr wrap="none" lIns="0" tIns="0" rIns="0" bIns="0" rtlCol="0" anchor="ctr"/>
+          <a:bodyPr wrap="none" lIns="0" tIns="0" rIns="0" bIns="0" rtlCol="0" anchor="t"/>
           <a:lstStyle/>
           <a:p>
             <a:pPr algn="l" indent="0" marL="0" eaLnBrk="1" latinLnBrk="0" hangingPunct="1">
@@ -47964,7 +47964,7 @@
           <a:ln/>
         </p:spPr>
         <p:txBody>
-          <a:bodyPr wrap="square" lIns="0" tIns="0" rIns="0" bIns="0" rtlCol="0" anchor="ctr"/>
+          <a:bodyPr wrap="square" lIns="0" tIns="0" rIns="0" bIns="0" rtlCol="0" anchor="t"/>
           <a:lstStyle/>
           <a:p>
             <a:pPr algn="l" indent="0" marL="0" eaLnBrk="1" latinLnBrk="0" hangingPunct="1">
@@ -48081,7 +48081,7 @@
           <a:ln/>
         </p:spPr>
         <p:txBody>
-          <a:bodyPr wrap="none" lIns="0" tIns="0" rIns="0" bIns="0" rtlCol="0" anchor="ctr"/>
+          <a:bodyPr wrap="none" lIns="0" tIns="0" rIns="0" bIns="0" rtlCol="0" anchor="t"/>
           <a:lstStyle/>
           <a:p>
             <a:pPr algn="l" indent="0" marL="0" eaLnBrk="1" latinLnBrk="0" hangingPunct="1">
@@ -48123,7 +48123,7 @@
           <a:ln/>
         </p:spPr>
         <p:txBody>
-          <a:bodyPr wrap="none" lIns="0" tIns="0" rIns="0" bIns="0" rtlCol="0" anchor="ctr"/>
+          <a:bodyPr wrap="none" lIns="0" tIns="0" rIns="0" bIns="0" rtlCol="0" anchor="t"/>
           <a:lstStyle/>
           <a:p>
             <a:pPr algn="l" indent="0" marL="0" eaLnBrk="1" latinLnBrk="0" hangingPunct="1">
@@ -48192,7 +48192,7 @@
           <a:ln/>
         </p:spPr>
         <p:txBody>
-          <a:bodyPr wrap="none" lIns="0" tIns="0" rIns="0" bIns="0" rtlCol="0" anchor="ctr"/>
+          <a:bodyPr wrap="none" lIns="0" tIns="0" rIns="0" bIns="0" rtlCol="0" anchor="t"/>
           <a:lstStyle/>
           <a:p>
             <a:pPr algn="just" marL="243840" indent="-243840" eaLnBrk="1" latinLnBrk="0" hangingPunct="1">
@@ -48235,7 +48235,7 @@
           <a:ln/>
         </p:spPr>
         <p:txBody>
-          <a:bodyPr wrap="none" lIns="0" tIns="0" rIns="0" bIns="0" rtlCol="0" anchor="ctr"/>
+          <a:bodyPr wrap="none" lIns="0" tIns="0" rIns="0" bIns="0" rtlCol="0" anchor="t"/>
           <a:lstStyle/>
           <a:p>
             <a:pPr algn="just" marL="243840" indent="-243840" eaLnBrk="1" latinLnBrk="0" hangingPunct="1">
@@ -48278,7 +48278,7 @@
           <a:ln/>
         </p:spPr>
         <p:txBody>
-          <a:bodyPr wrap="none" lIns="0" tIns="0" rIns="0" bIns="0" rtlCol="0" anchor="ctr"/>
+          <a:bodyPr wrap="none" lIns="0" tIns="0" rIns="0" bIns="0" rtlCol="0" anchor="t"/>
           <a:lstStyle/>
           <a:p>
             <a:pPr algn="just" marL="243840" indent="-243840" eaLnBrk="1" latinLnBrk="0" hangingPunct="1">
@@ -48321,7 +48321,7 @@
           <a:ln/>
         </p:spPr>
         <p:txBody>
-          <a:bodyPr wrap="none" lIns="0" tIns="0" rIns="0" bIns="0" rtlCol="0" anchor="ctr"/>
+          <a:bodyPr wrap="none" lIns="0" tIns="0" rIns="0" bIns="0" rtlCol="0" anchor="t"/>
           <a:lstStyle/>
           <a:p>
             <a:pPr algn="just" marL="243840" indent="-243840" eaLnBrk="1" latinLnBrk="0" hangingPunct="1">
@@ -48364,7 +48364,7 @@
           <a:ln/>
         </p:spPr>
         <p:txBody>
-          <a:bodyPr wrap="none" lIns="0" tIns="0" rIns="0" bIns="0" rtlCol="0" anchor="ctr"/>
+          <a:bodyPr wrap="none" lIns="0" tIns="0" rIns="0" bIns="0" rtlCol="0" anchor="t"/>
           <a:lstStyle/>
           <a:p>
             <a:pPr algn="l" indent="0" marL="0" eaLnBrk="1" latinLnBrk="0" hangingPunct="1">
@@ -48406,7 +48406,7 @@
           <a:ln/>
         </p:spPr>
         <p:txBody>
-          <a:bodyPr wrap="square" lIns="0" tIns="0" rIns="0" bIns="0" rtlCol="0" anchor="ctr"/>
+          <a:bodyPr wrap="square" lIns="0" tIns="0" rIns="0" bIns="0" rtlCol="0" anchor="t"/>
           <a:lstStyle/>
           <a:p>
             <a:pPr algn="l" indent="0" marL="0" eaLnBrk="1" latinLnBrk="0" hangingPunct="1">
@@ -48475,7 +48475,7 @@
           <a:ln/>
         </p:spPr>
         <p:txBody>
-          <a:bodyPr wrap="none" lIns="0" tIns="0" rIns="0" bIns="0" rtlCol="0" anchor="ctr"/>
+          <a:bodyPr wrap="none" lIns="0" tIns="0" rIns="0" bIns="0" rtlCol="0" anchor="t"/>
           <a:lstStyle/>
           <a:p>
             <a:pPr algn="ctr" indent="0" marL="0" eaLnBrk="1" latinLnBrk="0" hangingPunct="1">
@@ -48517,7 +48517,7 @@
           <a:ln/>
         </p:spPr>
         <p:txBody>
-          <a:bodyPr wrap="none" lIns="0" tIns="0" rIns="0" bIns="0" rtlCol="0" anchor="ctr"/>
+          <a:bodyPr wrap="none" lIns="0" tIns="0" rIns="0" bIns="0" rtlCol="0" anchor="t"/>
           <a:lstStyle/>
           <a:p>
             <a:pPr algn="l" indent="0" marL="0" eaLnBrk="1" latinLnBrk="0" hangingPunct="1">
@@ -48559,7 +48559,7 @@
           <a:ln/>
         </p:spPr>
         <p:txBody>
-          <a:bodyPr wrap="none" lIns="0" tIns="0" rIns="0" bIns="0" rtlCol="0" anchor="ctr"/>
+          <a:bodyPr wrap="none" lIns="0" tIns="0" rIns="0" bIns="0" rtlCol="0" anchor="t"/>
           <a:lstStyle/>
           <a:p>
             <a:pPr algn="r" indent="0" marL="0" eaLnBrk="1" latinLnBrk="0" hangingPunct="1">
@@ -48601,7 +48601,7 @@
           <a:ln/>
         </p:spPr>
         <p:txBody>
-          <a:bodyPr wrap="none" lIns="0" tIns="0" rIns="0" bIns="0" rtlCol="0" anchor="ctr"/>
+          <a:bodyPr wrap="none" lIns="0" tIns="0" rIns="0" bIns="0" rtlCol="0" anchor="t"/>
           <a:lstStyle/>
           <a:p>
             <a:pPr algn="l" indent="0" marL="0" eaLnBrk="1" latinLnBrk="0" hangingPunct="1">
@@ -48783,7 +48783,7 @@
           <a:ln/>
         </p:spPr>
         <p:txBody>
-          <a:bodyPr wrap="none" lIns="0" tIns="0" rIns="0" bIns="0" rtlCol="0" anchor="ctr"/>
+          <a:bodyPr wrap="none" lIns="0" tIns="0" rIns="0" bIns="0" rtlCol="0" anchor="t"/>
           <a:lstStyle/>
           <a:p>
             <a:pPr algn="l" indent="0" marL="0" eaLnBrk="1" latinLnBrk="0" hangingPunct="1">
@@ -48822,7 +48822,7 @@
           <a:ln/>
         </p:spPr>
         <p:txBody>
-          <a:bodyPr wrap="none" lIns="0" tIns="0" rIns="0" bIns="0" rtlCol="0" anchor="ctr"/>
+          <a:bodyPr wrap="none" lIns="0" tIns="0" rIns="0" bIns="0" rtlCol="0" anchor="t"/>
           <a:lstStyle/>
           <a:p>
             <a:pPr algn="l" indent="0" marL="0" eaLnBrk="1" latinLnBrk="0" hangingPunct="1">
@@ -48864,7 +48864,7 @@
           <a:ln/>
         </p:spPr>
         <p:txBody>
-          <a:bodyPr wrap="none" lIns="0" tIns="0" rIns="0" bIns="0" rtlCol="0" anchor="ctr"/>
+          <a:bodyPr wrap="none" lIns="0" tIns="0" rIns="0" bIns="0" rtlCol="0" anchor="t"/>
           <a:lstStyle/>
           <a:p>
             <a:pPr algn="l" indent="0" marL="0" eaLnBrk="1" latinLnBrk="0" hangingPunct="1">
@@ -48957,7 +48957,7 @@
           <a:ln/>
         </p:spPr>
         <p:txBody>
-          <a:bodyPr wrap="square" lIns="0" tIns="0" rIns="0" bIns="0" rtlCol="0" anchor="ctr"/>
+          <a:bodyPr wrap="square" lIns="0" tIns="0" rIns="0" bIns="0" rtlCol="0" anchor="t"/>
           <a:lstStyle/>
           <a:p>
             <a:pPr algn="l" indent="0" marL="0" eaLnBrk="1" latinLnBrk="0" hangingPunct="1">
@@ -49077,7 +49077,7 @@
           <a:ln/>
         </p:spPr>
         <p:txBody>
-          <a:bodyPr wrap="none" lIns="0" tIns="0" rIns="0" bIns="0" rtlCol="0" anchor="ctr"/>
+          <a:bodyPr wrap="none" lIns="0" tIns="0" rIns="0" bIns="0" rtlCol="0" anchor="t"/>
           <a:lstStyle/>
           <a:p>
             <a:pPr algn="l" indent="0" marL="0" eaLnBrk="1" latinLnBrk="0" hangingPunct="1">
@@ -49143,7 +49143,7 @@
           <a:ln/>
         </p:spPr>
         <p:txBody>
-          <a:bodyPr wrap="square" lIns="0" tIns="0" rIns="0" bIns="0" rtlCol="0" anchor="ctr"/>
+          <a:bodyPr wrap="square" lIns="0" tIns="0" rIns="0" bIns="0" rtlCol="0" anchor="t"/>
           <a:lstStyle/>
           <a:p>
             <a:pPr algn="just" indent="0" marL="0" eaLnBrk="1" latinLnBrk="0" hangingPunct="1">
@@ -49185,7 +49185,7 @@
           <a:ln/>
         </p:spPr>
         <p:txBody>
-          <a:bodyPr wrap="none" lIns="0" tIns="0" rIns="0" bIns="0" rtlCol="0" anchor="ctr"/>
+          <a:bodyPr wrap="none" lIns="0" tIns="0" rIns="0" bIns="0" rtlCol="0" anchor="t"/>
           <a:lstStyle/>
           <a:p>
             <a:pPr algn="l" indent="0" marL="0" eaLnBrk="1" latinLnBrk="0" hangingPunct="1">
@@ -49329,7 +49329,7 @@
           <a:ln/>
         </p:spPr>
         <p:txBody>
-          <a:bodyPr wrap="none" lIns="0" tIns="0" rIns="0" bIns="0" rtlCol="0" anchor="ctr"/>
+          <a:bodyPr wrap="none" lIns="0" tIns="0" rIns="0" bIns="0" rtlCol="0" anchor="t"/>
           <a:lstStyle/>
           <a:p>
             <a:pPr algn="l" indent="0" marL="0" eaLnBrk="1" latinLnBrk="0" hangingPunct="1">
@@ -49395,7 +49395,7 @@
           <a:ln/>
         </p:spPr>
         <p:txBody>
-          <a:bodyPr wrap="square" lIns="0" tIns="0" rIns="0" bIns="0" rtlCol="0" anchor="ctr"/>
+          <a:bodyPr wrap="square" lIns="0" tIns="0" rIns="0" bIns="0" rtlCol="0" anchor="t"/>
           <a:lstStyle/>
           <a:p>
             <a:pPr algn="just" indent="0" marL="0" eaLnBrk="1" latinLnBrk="0" hangingPunct="1">
@@ -49437,7 +49437,7 @@
           <a:ln/>
         </p:spPr>
         <p:txBody>
-          <a:bodyPr wrap="none" lIns="0" tIns="0" rIns="0" bIns="0" rtlCol="0" anchor="ctr"/>
+          <a:bodyPr wrap="none" lIns="0" tIns="0" rIns="0" bIns="0" rtlCol="0" anchor="t"/>
           <a:lstStyle/>
           <a:p>
             <a:pPr algn="l" indent="0" marL="0" eaLnBrk="1" latinLnBrk="0" hangingPunct="1">
@@ -49581,7 +49581,7 @@
           <a:ln/>
         </p:spPr>
         <p:txBody>
-          <a:bodyPr wrap="none" lIns="0" tIns="0" rIns="0" bIns="0" rtlCol="0" anchor="ctr"/>
+          <a:bodyPr wrap="none" lIns="0" tIns="0" rIns="0" bIns="0" rtlCol="0" anchor="t"/>
           <a:lstStyle/>
           <a:p>
             <a:pPr algn="l" indent="0" marL="0" eaLnBrk="1" latinLnBrk="0" hangingPunct="1">
@@ -49647,7 +49647,7 @@
           <a:ln/>
         </p:spPr>
         <p:txBody>
-          <a:bodyPr wrap="square" lIns="0" tIns="0" rIns="0" bIns="0" rtlCol="0" anchor="ctr"/>
+          <a:bodyPr wrap="square" lIns="0" tIns="0" rIns="0" bIns="0" rtlCol="0" anchor="t"/>
           <a:lstStyle/>
           <a:p>
             <a:pPr algn="just" indent="0" marL="0" eaLnBrk="1" latinLnBrk="0" hangingPunct="1">
@@ -49689,7 +49689,7 @@
           <a:ln/>
         </p:spPr>
         <p:txBody>
-          <a:bodyPr wrap="none" lIns="0" tIns="0" rIns="0" bIns="0" rtlCol="0" anchor="ctr"/>
+          <a:bodyPr wrap="none" lIns="0" tIns="0" rIns="0" bIns="0" rtlCol="0" anchor="t"/>
           <a:lstStyle/>
           <a:p>
             <a:pPr algn="l" indent="0" marL="0" eaLnBrk="1" latinLnBrk="0" hangingPunct="1">
@@ -49833,7 +49833,7 @@
           <a:ln/>
         </p:spPr>
         <p:txBody>
-          <a:bodyPr wrap="none" lIns="0" tIns="0" rIns="0" bIns="0" rtlCol="0" anchor="ctr"/>
+          <a:bodyPr wrap="none" lIns="0" tIns="0" rIns="0" bIns="0" rtlCol="0" anchor="t"/>
           <a:lstStyle/>
           <a:p>
             <a:pPr algn="l" indent="0" marL="0" eaLnBrk="1" latinLnBrk="0" hangingPunct="1">
@@ -49899,7 +49899,7 @@
           <a:ln/>
         </p:spPr>
         <p:txBody>
-          <a:bodyPr wrap="square" lIns="0" tIns="0" rIns="0" bIns="0" rtlCol="0" anchor="ctr"/>
+          <a:bodyPr wrap="square" lIns="0" tIns="0" rIns="0" bIns="0" rtlCol="0" anchor="t"/>
           <a:lstStyle/>
           <a:p>
             <a:pPr algn="just" indent="0" marL="0" eaLnBrk="1" latinLnBrk="0" hangingPunct="1">
@@ -49941,7 +49941,7 @@
           <a:ln/>
         </p:spPr>
         <p:txBody>
-          <a:bodyPr wrap="none" lIns="0" tIns="0" rIns="0" bIns="0" rtlCol="0" anchor="ctr"/>
+          <a:bodyPr wrap="none" lIns="0" tIns="0" rIns="0" bIns="0" rtlCol="0" anchor="t"/>
           <a:lstStyle/>
           <a:p>
             <a:pPr algn="l" indent="0" marL="0" eaLnBrk="1" latinLnBrk="0" hangingPunct="1">
@@ -50031,7 +50031,7 @@
           <a:ln/>
         </p:spPr>
         <p:txBody>
-          <a:bodyPr wrap="none" lIns="0" tIns="0" rIns="0" bIns="0" rtlCol="0" anchor="ctr"/>
+          <a:bodyPr wrap="none" lIns="0" tIns="0" rIns="0" bIns="0" rtlCol="0" anchor="t"/>
           <a:lstStyle/>
           <a:p>
             <a:pPr algn="l" indent="0" marL="0" eaLnBrk="1" latinLnBrk="0" hangingPunct="1">
@@ -50073,7 +50073,7 @@
           <a:ln/>
         </p:spPr>
         <p:txBody>
-          <a:bodyPr wrap="none" lIns="0" tIns="0" rIns="0" bIns="0" rtlCol="0" anchor="ctr"/>
+          <a:bodyPr wrap="none" lIns="0" tIns="0" rIns="0" bIns="0" rtlCol="0" anchor="t"/>
           <a:lstStyle/>
           <a:p>
             <a:pPr algn="r" indent="0" marL="0" eaLnBrk="1" latinLnBrk="0" hangingPunct="1">
@@ -50115,7 +50115,7 @@
           <a:ln/>
         </p:spPr>
         <p:txBody>
-          <a:bodyPr wrap="none" lIns="0" tIns="0" rIns="0" bIns="0" rtlCol="0" anchor="ctr"/>
+          <a:bodyPr wrap="none" lIns="0" tIns="0" rIns="0" bIns="0" rtlCol="0" anchor="t"/>
           <a:lstStyle/>
           <a:p>
             <a:pPr algn="l" indent="0" marL="0" eaLnBrk="1" latinLnBrk="0" hangingPunct="1">
@@ -50270,7 +50270,7 @@
           <a:ln/>
         </p:spPr>
         <p:txBody>
-          <a:bodyPr wrap="none" lIns="0" tIns="0" rIns="0" bIns="0" rtlCol="0" anchor="ctr"/>
+          <a:bodyPr wrap="none" lIns="0" tIns="0" rIns="0" bIns="0" rtlCol="0" anchor="t"/>
           <a:lstStyle/>
           <a:p>
             <a:pPr algn="ctr" indent="0" marL="0" eaLnBrk="1" latinLnBrk="0" hangingPunct="1">
@@ -50339,7 +50339,7 @@
           <a:ln/>
         </p:spPr>
         <p:txBody>
-          <a:bodyPr wrap="none" lIns="0" tIns="0" rIns="0" bIns="0" rtlCol="0" anchor="ctr"/>
+          <a:bodyPr wrap="none" lIns="0" tIns="0" rIns="0" bIns="0" rtlCol="0" anchor="t"/>
           <a:lstStyle/>
           <a:p>
             <a:pPr algn="ctr" indent="0" marL="0" eaLnBrk="1" latinLnBrk="0" hangingPunct="1">
@@ -50381,7 +50381,7 @@
           <a:ln/>
         </p:spPr>
         <p:txBody>
-          <a:bodyPr wrap="none" lIns="0" tIns="0" rIns="0" bIns="0" rtlCol="0" anchor="ctr"/>
+          <a:bodyPr wrap="none" lIns="0" tIns="0" rIns="0" bIns="0" rtlCol="0" anchor="t"/>
           <a:lstStyle/>
           <a:p>
             <a:pPr algn="ctr" indent="0" marL="0" eaLnBrk="1" latinLnBrk="0" hangingPunct="1">

--- a/output/北京科技大学_WebSlide科研汇报示例.pptx
+++ b/output/北京科技大学_WebSlide科研汇报示例.pptx
@@ -3641,7 +3641,7 @@
             <a:r>
               <a:rPr lang="zh-CN" altLang="en-US" sz="1600" dirty="0">
                 <a:solidFill>
-                  <a:srgbClr val="6B8598"/>
+                  <a:srgbClr val="000000"/>
                 </a:solidFill>
                 <a:latin typeface="Microsoft YaHei" pitchFamily="34" charset="0"/>
                 <a:ea typeface="Microsoft YaHei" pitchFamily="34" charset="-122"/>
@@ -3683,7 +3683,7 @@
             <a:r>
               <a:rPr lang="zh-CN" altLang="en-US" sz="1800" b="1" dirty="0">
                 <a:solidFill>
-                  <a:srgbClr val="12374E"/>
+                  <a:srgbClr val="000000"/>
                 </a:solidFill>
                 <a:latin typeface="Microsoft YaHei" pitchFamily="34" charset="0"/>
                 <a:ea typeface="Microsoft YaHei" pitchFamily="34" charset="-122"/>
@@ -3725,7 +3725,7 @@
             <a:r>
               <a:rPr lang="zh-CN" altLang="en-US" sz="1600" dirty="0">
                 <a:solidFill>
-                  <a:srgbClr val="6B8598"/>
+                  <a:srgbClr val="000000"/>
                 </a:solidFill>
                 <a:latin typeface="Microsoft YaHei" pitchFamily="34" charset="0"/>
                 <a:ea typeface="Microsoft YaHei" pitchFamily="34" charset="-122"/>
@@ -3767,7 +3767,7 @@
             <a:r>
               <a:rPr lang="zh-CN" altLang="en-US" sz="1800" b="1" dirty="0">
                 <a:solidFill>
-                  <a:srgbClr val="12374E"/>
+                  <a:srgbClr val="000000"/>
                 </a:solidFill>
                 <a:latin typeface="Microsoft YaHei" pitchFamily="34" charset="0"/>
                 <a:ea typeface="Microsoft YaHei" pitchFamily="34" charset="-122"/>
@@ -3809,7 +3809,7 @@
             <a:r>
               <a:rPr lang="zh-CN" altLang="en-US" sz="1600" dirty="0">
                 <a:solidFill>
-                  <a:srgbClr val="6B8598"/>
+                  <a:srgbClr val="000000"/>
                 </a:solidFill>
                 <a:latin typeface="Microsoft YaHei" pitchFamily="34" charset="0"/>
                 <a:ea typeface="Microsoft YaHei" pitchFamily="34" charset="-122"/>
@@ -3851,7 +3851,7 @@
             <a:r>
               <a:rPr lang="zh-CN" altLang="en-US" sz="1800" b="1" dirty="0">
                 <a:solidFill>
-                  <a:srgbClr val="12374E"/>
+                  <a:srgbClr val="000000"/>
                 </a:solidFill>
                 <a:latin typeface="Microsoft YaHei" pitchFamily="34" charset="0"/>
                 <a:ea typeface="Microsoft YaHei" pitchFamily="34" charset="-122"/>
@@ -4180,7 +4180,7 @@
             <a:r>
               <a:rPr lang="zh-CN" altLang="en-US" sz="1600" dirty="0">
                 <a:solidFill>
-                  <a:srgbClr val="12374E"/>
+                  <a:srgbClr val="000000"/>
                 </a:solidFill>
                 <a:latin typeface="Microsoft YaHei" pitchFamily="34" charset="0"/>
                 <a:ea typeface="Microsoft YaHei" pitchFamily="34" charset="-122"/>
@@ -4292,7 +4292,7 @@
             <a:r>
               <a:rPr lang="zh-CN" altLang="en-US" sz="1600" dirty="0">
                 <a:solidFill>
-                  <a:srgbClr val="12374E"/>
+                  <a:srgbClr val="000000"/>
                 </a:solidFill>
                 <a:latin typeface="Microsoft YaHei" pitchFamily="34" charset="0"/>
                 <a:ea typeface="Microsoft YaHei" pitchFamily="34" charset="-122"/>
@@ -4335,7 +4335,7 @@
             <a:r>
               <a:rPr lang="zh-CN" altLang="en-US" sz="1600" dirty="0">
                 <a:solidFill>
-                  <a:srgbClr val="12374E"/>
+                  <a:srgbClr val="000000"/>
                 </a:solidFill>
                 <a:latin typeface="Microsoft YaHei" pitchFamily="34" charset="0"/>
                 <a:ea typeface="Microsoft YaHei" pitchFamily="34" charset="-122"/>
@@ -4378,7 +4378,7 @@
             <a:r>
               <a:rPr lang="zh-CN" altLang="en-US" sz="1600" dirty="0">
                 <a:solidFill>
-                  <a:srgbClr val="12374E"/>
+                  <a:srgbClr val="000000"/>
                 </a:solidFill>
                 <a:latin typeface="Microsoft YaHei" pitchFamily="34" charset="0"/>
                 <a:ea typeface="Microsoft YaHei" pitchFamily="34" charset="-122"/>
@@ -4490,7 +4490,7 @@
             <a:r>
               <a:rPr lang="zh-CN" altLang="en-US" sz="1600" dirty="0">
                 <a:solidFill>
-                  <a:srgbClr val="12374E"/>
+                  <a:srgbClr val="000000"/>
                 </a:solidFill>
                 <a:latin typeface="Microsoft YaHei" pitchFamily="34" charset="0"/>
                 <a:ea typeface="Microsoft YaHei" pitchFamily="34" charset="-122"/>
@@ -4533,7 +4533,7 @@
             <a:r>
               <a:rPr lang="zh-CN" altLang="en-US" sz="1600" dirty="0">
                 <a:solidFill>
-                  <a:srgbClr val="12374E"/>
+                  <a:srgbClr val="000000"/>
                 </a:solidFill>
                 <a:latin typeface="Microsoft YaHei" pitchFamily="34" charset="0"/>
                 <a:ea typeface="Microsoft YaHei" pitchFamily="34" charset="-122"/>
@@ -4576,7 +4576,7 @@
             <a:r>
               <a:rPr lang="zh-CN" altLang="en-US" sz="1600" dirty="0">
                 <a:solidFill>
-                  <a:srgbClr val="12374E"/>
+                  <a:srgbClr val="000000"/>
                 </a:solidFill>
                 <a:latin typeface="Microsoft YaHei" pitchFamily="34" charset="0"/>
                 <a:ea typeface="Microsoft YaHei" pitchFamily="34" charset="-122"/>
@@ -4715,7 +4715,7 @@
             <a:r>
               <a:rPr lang="zh-CN" altLang="en-US" sz="1600" dirty="0">
                 <a:solidFill>
-                  <a:srgbClr val="12374E"/>
+                  <a:srgbClr val="000000"/>
                 </a:solidFill>
                 <a:latin typeface="Microsoft YaHei" pitchFamily="34" charset="0"/>
                 <a:ea typeface="Microsoft YaHei" pitchFamily="34" charset="-122"/>
@@ -4758,7 +4758,7 @@
             <a:r>
               <a:rPr lang="zh-CN" altLang="en-US" sz="1600" dirty="0">
                 <a:solidFill>
-                  <a:srgbClr val="12374E"/>
+                  <a:srgbClr val="000000"/>
                 </a:solidFill>
                 <a:latin typeface="Microsoft YaHei" pitchFamily="34" charset="0"/>
                 <a:ea typeface="Microsoft YaHei" pitchFamily="34" charset="-122"/>
@@ -4801,7 +4801,7 @@
             <a:r>
               <a:rPr lang="zh-CN" altLang="en-US" sz="1600" dirty="0">
                 <a:solidFill>
-                  <a:srgbClr val="12374E"/>
+                  <a:srgbClr val="000000"/>
                 </a:solidFill>
                 <a:latin typeface="Microsoft YaHei" pitchFamily="34" charset="0"/>
                 <a:ea typeface="Microsoft YaHei" pitchFamily="34" charset="-122"/>
@@ -4913,7 +4913,7 @@
             <a:r>
               <a:rPr lang="zh-CN" altLang="en-US" sz="1600" dirty="0">
                 <a:solidFill>
-                  <a:srgbClr val="12374E"/>
+                  <a:srgbClr val="000000"/>
                 </a:solidFill>
                 <a:latin typeface="Microsoft YaHei" pitchFamily="34" charset="0"/>
                 <a:ea typeface="Microsoft YaHei" pitchFamily="34" charset="-122"/>
@@ -4956,7 +4956,7 @@
             <a:r>
               <a:rPr lang="zh-CN" altLang="en-US" sz="1600" dirty="0">
                 <a:solidFill>
-                  <a:srgbClr val="12374E"/>
+                  <a:srgbClr val="000000"/>
                 </a:solidFill>
                 <a:latin typeface="Microsoft YaHei" pitchFamily="34" charset="0"/>
                 <a:ea typeface="Microsoft YaHei" pitchFamily="34" charset="-122"/>
@@ -4999,7 +4999,7 @@
             <a:r>
               <a:rPr lang="zh-CN" altLang="en-US" sz="1600" dirty="0">
                 <a:solidFill>
-                  <a:srgbClr val="12374E"/>
+                  <a:srgbClr val="000000"/>
                 </a:solidFill>
                 <a:latin typeface="Microsoft YaHei" pitchFamily="34" charset="0"/>
                 <a:ea typeface="Microsoft YaHei" pitchFamily="34" charset="-122"/>
@@ -5152,11 +5152,11 @@
             <a:avLst/>
           </a:prstGeom>
           <a:solidFill>
-            <a:srgbClr val="D8E2E9"/>
-          </a:solidFill>
-          <a:ln w="12700">
-            <a:solidFill>
-              <a:srgbClr val="D8E2E9">
+            <a:srgbClr val="CCDEEA"/>
+          </a:solidFill>
+          <a:ln w="12700">
+            <a:solidFill>
+              <a:srgbClr val="CCDEEA">
                 <a:alpha val="0"/>
               </a:srgbClr>
             </a:solidFill>
@@ -5481,7 +5481,7 @@
             <a:r>
               <a:rPr lang="zh-CN" altLang="en-US" sz="1600" dirty="0">
                 <a:solidFill>
-                  <a:srgbClr val="12374E"/>
+                  <a:srgbClr val="000000"/>
                 </a:solidFill>
                 <a:latin typeface="Microsoft YaHei" pitchFamily="34" charset="0"/>
                 <a:ea typeface="Microsoft YaHei" pitchFamily="34" charset="-122"/>
@@ -5638,7 +5638,7 @@
             <a:r>
               <a:rPr lang="zh-CN" altLang="en-US" sz="1600" dirty="0">
                 <a:solidFill>
-                  <a:srgbClr val="12374E"/>
+                  <a:srgbClr val="000000"/>
                 </a:solidFill>
                 <a:latin typeface="Microsoft YaHei" pitchFamily="34" charset="0"/>
                 <a:ea typeface="Microsoft YaHei" pitchFamily="34" charset="-122"/>
@@ -5681,7 +5681,7 @@
             <a:r>
               <a:rPr lang="zh-CN" altLang="en-US" sz="1600" dirty="0">
                 <a:solidFill>
-                  <a:srgbClr val="12374E"/>
+                  <a:srgbClr val="000000"/>
                 </a:solidFill>
                 <a:latin typeface="Microsoft YaHei" pitchFamily="34" charset="0"/>
                 <a:ea typeface="Microsoft YaHei" pitchFamily="34" charset="-122"/>
@@ -5724,7 +5724,7 @@
             <a:r>
               <a:rPr lang="zh-CN" altLang="en-US" sz="1600" dirty="0">
                 <a:solidFill>
-                  <a:srgbClr val="12374E"/>
+                  <a:srgbClr val="000000"/>
                 </a:solidFill>
                 <a:latin typeface="Microsoft YaHei" pitchFamily="34" charset="0"/>
                 <a:ea typeface="Microsoft YaHei" pitchFamily="34" charset="-122"/>
@@ -5860,7 +5860,7 @@
             <a:r>
               <a:rPr lang="zh-CN" altLang="en-US" sz="1600" dirty="0">
                 <a:solidFill>
-                  <a:srgbClr val="12374E"/>
+                  <a:srgbClr val="000000"/>
                 </a:solidFill>
                 <a:latin typeface="Microsoft YaHei" pitchFamily="34" charset="0"/>
                 <a:ea typeface="Microsoft YaHei" pitchFamily="34" charset="-122"/>
@@ -5903,7 +5903,7 @@
             <a:r>
               <a:rPr lang="zh-CN" altLang="en-US" sz="1600" dirty="0">
                 <a:solidFill>
-                  <a:srgbClr val="12374E"/>
+                  <a:srgbClr val="000000"/>
                 </a:solidFill>
                 <a:latin typeface="Microsoft YaHei" pitchFamily="34" charset="0"/>
                 <a:ea typeface="Microsoft YaHei" pitchFamily="34" charset="-122"/>
@@ -5946,7 +5946,7 @@
             <a:r>
               <a:rPr lang="zh-CN" altLang="en-US" sz="1600" dirty="0">
                 <a:solidFill>
-                  <a:srgbClr val="12374E"/>
+                  <a:srgbClr val="000000"/>
                 </a:solidFill>
                 <a:latin typeface="Microsoft YaHei" pitchFamily="34" charset="0"/>
                 <a:ea typeface="Microsoft YaHei" pitchFamily="34" charset="-122"/>
@@ -6079,7 +6079,7 @@
             <a:r>
               <a:rPr lang="zh-CN" altLang="en-US" sz="1600" dirty="0">
                 <a:solidFill>
-                  <a:srgbClr val="12374E"/>
+                  <a:srgbClr val="000000"/>
                 </a:solidFill>
                 <a:latin typeface="Microsoft YaHei" pitchFamily="34" charset="0"/>
                 <a:ea typeface="Microsoft YaHei" pitchFamily="34" charset="-122"/>
@@ -6122,7 +6122,7 @@
             <a:r>
               <a:rPr lang="zh-CN" altLang="en-US" sz="1600" dirty="0">
                 <a:solidFill>
-                  <a:srgbClr val="12374E"/>
+                  <a:srgbClr val="000000"/>
                 </a:solidFill>
                 <a:latin typeface="Microsoft YaHei" pitchFamily="34" charset="0"/>
                 <a:ea typeface="Microsoft YaHei" pitchFamily="34" charset="-122"/>
@@ -6165,7 +6165,7 @@
             <a:r>
               <a:rPr lang="zh-CN" altLang="en-US" sz="1600" dirty="0">
                 <a:solidFill>
-                  <a:srgbClr val="12374E"/>
+                  <a:srgbClr val="000000"/>
                 </a:solidFill>
                 <a:latin typeface="Microsoft YaHei" pitchFamily="34" charset="0"/>
                 <a:ea typeface="Microsoft YaHei" pitchFamily="34" charset="-122"/>
@@ -6324,7 +6324,7 @@
             <a:r>
               <a:rPr lang="zh-CN" altLang="en-US" sz="1800" b="1" dirty="0">
                 <a:solidFill>
-                  <a:srgbClr val="12374E"/>
+                  <a:srgbClr val="000000"/>
                 </a:solidFill>
                 <a:latin typeface="Microsoft YaHei" pitchFamily="34" charset="0"/>
                 <a:ea typeface="Microsoft YaHei" pitchFamily="34" charset="-122"/>
@@ -6394,7 +6394,7 @@
             <a:r>
               <a:rPr lang="zh-CN" altLang="en-US" sz="1600" dirty="0">
                 <a:solidFill>
-                  <a:srgbClr val="12374E"/>
+                  <a:srgbClr val="000000"/>
                 </a:solidFill>
                 <a:latin typeface="Microsoft YaHei" pitchFamily="34" charset="0"/>
                 <a:ea typeface="Microsoft YaHei" pitchFamily="34" charset="-122"/>
@@ -6437,7 +6437,7 @@
             <a:r>
               <a:rPr lang="zh-CN" altLang="en-US" sz="1600" dirty="0">
                 <a:solidFill>
-                  <a:srgbClr val="12374E"/>
+                  <a:srgbClr val="000000"/>
                 </a:solidFill>
                 <a:latin typeface="Microsoft YaHei" pitchFamily="34" charset="0"/>
                 <a:ea typeface="Microsoft YaHei" pitchFamily="34" charset="-122"/>
@@ -6480,7 +6480,7 @@
             <a:r>
               <a:rPr lang="zh-CN" altLang="en-US" sz="1600" dirty="0">
                 <a:solidFill>
-                  <a:srgbClr val="12374E"/>
+                  <a:srgbClr val="000000"/>
                 </a:solidFill>
                 <a:latin typeface="Microsoft YaHei" pitchFamily="34" charset="0"/>
                 <a:ea typeface="Microsoft YaHei" pitchFamily="34" charset="-122"/>
@@ -6633,11 +6633,11 @@
             <a:avLst/>
           </a:prstGeom>
           <a:solidFill>
-            <a:srgbClr val="D8E2E9"/>
-          </a:solidFill>
-          <a:ln w="12700">
-            <a:solidFill>
-              <a:srgbClr val="D8E2E9">
+            <a:srgbClr val="CCDEEA"/>
+          </a:solidFill>
+          <a:ln w="12700">
+            <a:solidFill>
+              <a:srgbClr val="CCDEEA">
                 <a:alpha val="0"/>
               </a:srgbClr>
             </a:solidFill>
@@ -6962,7 +6962,7 @@
             <a:r>
               <a:rPr lang="zh-CN" altLang="en-US" sz="1600" dirty="0">
                 <a:solidFill>
-                  <a:srgbClr val="12374E"/>
+                  <a:srgbClr val="000000"/>
                 </a:solidFill>
                 <a:latin typeface="Microsoft YaHei" pitchFamily="34" charset="0"/>
                 <a:ea typeface="Microsoft YaHei" pitchFamily="34" charset="-122"/>
@@ -7074,7 +7074,7 @@
             <a:r>
               <a:rPr lang="zh-CN" altLang="en-US" sz="1600" dirty="0">
                 <a:solidFill>
-                  <a:srgbClr val="12374E"/>
+                  <a:srgbClr val="000000"/>
                 </a:solidFill>
                 <a:latin typeface="Microsoft YaHei" pitchFamily="34" charset="0"/>
                 <a:ea typeface="Microsoft YaHei" pitchFamily="34" charset="-122"/>
@@ -7117,7 +7117,7 @@
             <a:r>
               <a:rPr lang="zh-CN" altLang="en-US" sz="1600" dirty="0">
                 <a:solidFill>
-                  <a:srgbClr val="12374E"/>
+                  <a:srgbClr val="000000"/>
                 </a:solidFill>
                 <a:latin typeface="Microsoft YaHei" pitchFamily="34" charset="0"/>
                 <a:ea typeface="Microsoft YaHei" pitchFamily="34" charset="-122"/>
@@ -7160,7 +7160,7 @@
             <a:r>
               <a:rPr lang="zh-CN" altLang="en-US" sz="1600" dirty="0">
                 <a:solidFill>
-                  <a:srgbClr val="12374E"/>
+                  <a:srgbClr val="000000"/>
                 </a:solidFill>
                 <a:latin typeface="Microsoft YaHei" pitchFamily="34" charset="0"/>
                 <a:ea typeface="Microsoft YaHei" pitchFamily="34" charset="-122"/>
@@ -7256,7 +7256,7 @@
             <a:r>
               <a:rPr lang="zh-CN" altLang="en-US" sz="1600" dirty="0">
                 <a:solidFill>
-                  <a:srgbClr val="12374E"/>
+                  <a:srgbClr val="000000"/>
                 </a:solidFill>
                 <a:latin typeface="Microsoft YaHei" pitchFamily="34" charset="0"/>
                 <a:ea typeface="Microsoft YaHei" pitchFamily="34" charset="-122"/>
@@ -7298,7 +7298,7 @@
             <a:r>
               <a:rPr lang="zh-CN" altLang="en-US" sz="1600" dirty="0">
                 <a:solidFill>
-                  <a:srgbClr val="12374E"/>
+                  <a:srgbClr val="000000"/>
                 </a:solidFill>
                 <a:latin typeface="Microsoft YaHei" pitchFamily="34" charset="0"/>
                 <a:ea typeface="Microsoft YaHei" pitchFamily="34" charset="-122"/>
@@ -7340,7 +7340,7 @@
             <a:r>
               <a:rPr lang="zh-CN" altLang="en-US" sz="1600" dirty="0">
                 <a:solidFill>
-                  <a:srgbClr val="12374E"/>
+                  <a:srgbClr val="000000"/>
                 </a:solidFill>
                 <a:latin typeface="Microsoft YaHei" pitchFamily="34" charset="0"/>
                 <a:ea typeface="Microsoft YaHei" pitchFamily="34" charset="-122"/>
@@ -7382,7 +7382,7 @@
             <a:r>
               <a:rPr lang="zh-CN" altLang="en-US" sz="1600" dirty="0">
                 <a:solidFill>
-                  <a:srgbClr val="12374E"/>
+                  <a:srgbClr val="000000"/>
                 </a:solidFill>
                 <a:latin typeface="Microsoft YaHei" pitchFamily="34" charset="0"/>
                 <a:ea typeface="Microsoft YaHei" pitchFamily="34" charset="-122"/>
@@ -7557,7 +7557,7 @@
             <a:r>
               <a:rPr lang="zh-CN" altLang="en-US" sz="1600" dirty="0">
                 <a:solidFill>
-                  <a:srgbClr val="12374E"/>
+                  <a:srgbClr val="000000"/>
                 </a:solidFill>
                 <a:latin typeface="Microsoft YaHei" pitchFamily="34" charset="0"/>
                 <a:ea typeface="Microsoft YaHei" pitchFamily="34" charset="-122"/>
@@ -7600,7 +7600,7 @@
             <a:r>
               <a:rPr lang="zh-CN" altLang="en-US" sz="1600" dirty="0">
                 <a:solidFill>
-                  <a:srgbClr val="12374E"/>
+                  <a:srgbClr val="000000"/>
                 </a:solidFill>
                 <a:latin typeface="Microsoft YaHei" pitchFamily="34" charset="0"/>
                 <a:ea typeface="Microsoft YaHei" pitchFamily="34" charset="-122"/>
@@ -7643,7 +7643,7 @@
             <a:r>
               <a:rPr lang="zh-CN" altLang="en-US" sz="1600" dirty="0">
                 <a:solidFill>
-                  <a:srgbClr val="12374E"/>
+                  <a:srgbClr val="000000"/>
                 </a:solidFill>
                 <a:latin typeface="Microsoft YaHei" pitchFamily="34" charset="0"/>
                 <a:ea typeface="Microsoft YaHei" pitchFamily="34" charset="-122"/>
@@ -7670,11 +7670,11 @@
             <a:avLst/>
           </a:prstGeom>
           <a:solidFill>
-            <a:srgbClr val="9EA8AE"/>
-          </a:solidFill>
-          <a:ln w="12700">
-            <a:solidFill>
-              <a:srgbClr val="9EA8AE">
+            <a:srgbClr val="777777"/>
+          </a:solidFill>
+          <a:ln w="12700">
+            <a:solidFill>
+              <a:srgbClr val="777777">
                 <a:alpha val="0"/>
               </a:srgbClr>
             </a:solidFill>
@@ -7755,7 +7755,7 @@
             <a:r>
               <a:rPr lang="zh-CN" altLang="en-US" sz="1600" dirty="0">
                 <a:solidFill>
-                  <a:srgbClr val="12374E"/>
+                  <a:srgbClr val="000000"/>
                 </a:solidFill>
                 <a:latin typeface="Microsoft YaHei" pitchFamily="34" charset="0"/>
                 <a:ea typeface="Microsoft YaHei" pitchFamily="34" charset="-122"/>
@@ -7798,7 +7798,7 @@
             <a:r>
               <a:rPr lang="zh-CN" altLang="en-US" sz="1600" dirty="0">
                 <a:solidFill>
-                  <a:srgbClr val="12374E"/>
+                  <a:srgbClr val="000000"/>
                 </a:solidFill>
                 <a:latin typeface="Microsoft YaHei" pitchFamily="34" charset="0"/>
                 <a:ea typeface="Microsoft YaHei" pitchFamily="34" charset="-122"/>
@@ -7841,7 +7841,7 @@
             <a:r>
               <a:rPr lang="zh-CN" altLang="en-US" sz="1600" dirty="0">
                 <a:solidFill>
-                  <a:srgbClr val="12374E"/>
+                  <a:srgbClr val="000000"/>
                 </a:solidFill>
                 <a:latin typeface="Microsoft YaHei" pitchFamily="34" charset="0"/>
                 <a:ea typeface="Microsoft YaHei" pitchFamily="34" charset="-122"/>
@@ -7994,11 +7994,11 @@
             <a:avLst/>
           </a:prstGeom>
           <a:solidFill>
-            <a:srgbClr val="D8E2E9"/>
-          </a:solidFill>
-          <a:ln w="12700">
-            <a:solidFill>
-              <a:srgbClr val="D8E2E9">
+            <a:srgbClr val="CCDEEA"/>
+          </a:solidFill>
+          <a:ln w="12700">
+            <a:solidFill>
+              <a:srgbClr val="CCDEEA">
                 <a:alpha val="0"/>
               </a:srgbClr>
             </a:solidFill>
@@ -8323,7 +8323,7 @@
             <a:r>
               <a:rPr lang="zh-CN" altLang="en-US" sz="1600" dirty="0">
                 <a:solidFill>
-                  <a:srgbClr val="12374E"/>
+                  <a:srgbClr val="000000"/>
                 </a:solidFill>
                 <a:latin typeface="Microsoft YaHei" pitchFamily="34" charset="0"/>
                 <a:ea typeface="Microsoft YaHei" pitchFamily="34" charset="-122"/>
@@ -8381,7 +8381,7 @@
           </a:solidFill>
           <a:ln w="15240">
             <a:solidFill>
-              <a:srgbClr val="A4BDCE"/>
+              <a:srgbClr val="CCDEEA"/>
             </a:solidFill>
             <a:prstDash val="solid"/>
           </a:ln>
@@ -8417,7 +8417,7 @@
             <a:r>
               <a:rPr lang="zh-CN" altLang="en-US" sz="3240" dirty="0">
                 <a:solidFill>
-                  <a:srgbClr val="63849A"/>
+                  <a:srgbClr val="777777"/>
                 </a:solidFill>
                 <a:latin typeface="Microsoft YaHei" pitchFamily="34" charset="0"/>
                 <a:ea typeface="Microsoft YaHei" pitchFamily="34" charset="-122"/>
@@ -8459,7 +8459,7 @@
             <a:r>
               <a:rPr lang="zh-CN" altLang="en-US" sz="1400" dirty="0">
                 <a:solidFill>
-                  <a:srgbClr val="63849A"/>
+                  <a:srgbClr val="777777"/>
                 </a:solidFill>
                 <a:latin typeface="Microsoft YaHei" pitchFamily="34" charset="0"/>
                 <a:ea typeface="Microsoft YaHei" pitchFamily="34" charset="-122"/>
@@ -8501,7 +8501,7 @@
             <a:r>
               <a:rPr lang="zh-CN" altLang="en-US" sz="1200" dirty="0">
                 <a:solidFill>
-                  <a:srgbClr val="63849A"/>
+                  <a:srgbClr val="777777"/>
                 </a:solidFill>
                 <a:latin typeface="Microsoft YaHei" pitchFamily="34" charset="0"/>
                 <a:ea typeface="Microsoft YaHei" pitchFamily="34" charset="-122"/>
@@ -8585,7 +8585,7 @@
             <a:r>
               <a:rPr lang="zh-CN" altLang="en-US" sz="1200" dirty="0">
                 <a:solidFill>
-                  <a:srgbClr val="12374E"/>
+                  <a:srgbClr val="000000"/>
                 </a:solidFill>
                 <a:latin typeface="Microsoft YaHei" pitchFamily="34" charset="0"/>
                 <a:ea typeface="Microsoft YaHei" pitchFamily="34" charset="-122"/>
@@ -8724,7 +8724,7 @@
             <a:r>
               <a:rPr lang="zh-CN" altLang="en-US" sz="1600" dirty="0">
                 <a:solidFill>
-                  <a:srgbClr val="12374E"/>
+                  <a:srgbClr val="000000"/>
                 </a:solidFill>
                 <a:latin typeface="Microsoft YaHei" pitchFamily="34" charset="0"/>
                 <a:ea typeface="Microsoft YaHei" pitchFamily="34" charset="-122"/>
@@ -8767,7 +8767,7 @@
             <a:r>
               <a:rPr lang="zh-CN" altLang="en-US" sz="1600" dirty="0">
                 <a:solidFill>
-                  <a:srgbClr val="12374E"/>
+                  <a:srgbClr val="000000"/>
                 </a:solidFill>
                 <a:latin typeface="Microsoft YaHei" pitchFamily="34" charset="0"/>
                 <a:ea typeface="Microsoft YaHei" pitchFamily="34" charset="-122"/>
@@ -8810,7 +8810,7 @@
             <a:r>
               <a:rPr lang="zh-CN" altLang="en-US" sz="1600" dirty="0">
                 <a:solidFill>
-                  <a:srgbClr val="12374E"/>
+                  <a:srgbClr val="000000"/>
                 </a:solidFill>
                 <a:latin typeface="Microsoft YaHei" pitchFamily="34" charset="0"/>
                 <a:ea typeface="Microsoft YaHei" pitchFamily="34" charset="-122"/>
@@ -8853,7 +8853,7 @@
             <a:r>
               <a:rPr lang="zh-CN" altLang="en-US" sz="1600" dirty="0">
                 <a:solidFill>
-                  <a:srgbClr val="12374E"/>
+                  <a:srgbClr val="000000"/>
                 </a:solidFill>
                 <a:latin typeface="Microsoft YaHei" pitchFamily="34" charset="0"/>
                 <a:ea typeface="Microsoft YaHei" pitchFamily="34" charset="-122"/>
@@ -8895,7 +8895,7 @@
             <a:r>
               <a:rPr lang="zh-CN" altLang="en-US" sz="1600" b="1" dirty="0">
                 <a:solidFill>
-                  <a:srgbClr val="12374E"/>
+                  <a:srgbClr val="000000"/>
                 </a:solidFill>
                 <a:latin typeface="Microsoft YaHei" pitchFamily="34" charset="0"/>
                 <a:ea typeface="Microsoft YaHei" pitchFamily="34" charset="-122"/>
@@ -8937,7 +8937,7 @@
             <a:r>
               <a:rPr lang="zh-CN" altLang="en-US" sz="1400" dirty="0">
                 <a:solidFill>
-                  <a:srgbClr val="12374E"/>
+                  <a:srgbClr val="000000"/>
                 </a:solidFill>
                 <a:latin typeface="Microsoft YaHei" pitchFamily="34" charset="0"/>
                 <a:ea typeface="Microsoft YaHei" pitchFamily="34" charset="-122"/>
@@ -9132,11 +9132,11 @@
             <a:avLst/>
           </a:prstGeom>
           <a:solidFill>
-            <a:srgbClr val="D8E2E9"/>
-          </a:solidFill>
-          <a:ln w="12700">
-            <a:solidFill>
-              <a:srgbClr val="D8E2E9">
+            <a:srgbClr val="CCDEEA"/>
+          </a:solidFill>
+          <a:ln w="12700">
+            <a:solidFill>
+              <a:srgbClr val="CCDEEA">
                 <a:alpha val="0"/>
               </a:srgbClr>
             </a:solidFill>
@@ -9461,7 +9461,7 @@
             <a:r>
               <a:rPr lang="zh-CN" altLang="en-US" sz="1600" dirty="0">
                 <a:solidFill>
-                  <a:srgbClr val="12374E"/>
+                  <a:srgbClr val="000000"/>
                 </a:solidFill>
                 <a:latin typeface="Microsoft YaHei" pitchFamily="34" charset="0"/>
                 <a:ea typeface="Microsoft YaHei" pitchFamily="34" charset="-122"/>
@@ -9759,7 +9759,7 @@
             <a:r>
               <a:rPr lang="zh-CN" altLang="en-US" sz="1600" dirty="0">
                 <a:solidFill>
-                  <a:srgbClr val="12374E"/>
+                  <a:srgbClr val="000000"/>
                 </a:solidFill>
                 <a:latin typeface="Microsoft YaHei" pitchFamily="34" charset="0"/>
                 <a:ea typeface="Microsoft YaHei" pitchFamily="34" charset="-122"/>
@@ -9802,7 +9802,7 @@
             <a:r>
               <a:rPr lang="zh-CN" altLang="en-US" sz="1600" dirty="0">
                 <a:solidFill>
-                  <a:srgbClr val="12374E"/>
+                  <a:srgbClr val="000000"/>
                 </a:solidFill>
                 <a:latin typeface="Microsoft YaHei" pitchFamily="34" charset="0"/>
                 <a:ea typeface="Microsoft YaHei" pitchFamily="34" charset="-122"/>
@@ -9845,7 +9845,7 @@
             <a:r>
               <a:rPr lang="zh-CN" altLang="en-US" sz="1600" dirty="0">
                 <a:solidFill>
-                  <a:srgbClr val="12374E"/>
+                  <a:srgbClr val="000000"/>
                 </a:solidFill>
                 <a:latin typeface="Microsoft YaHei" pitchFamily="34" charset="0"/>
                 <a:ea typeface="Microsoft YaHei" pitchFamily="34" charset="-122"/>
@@ -9957,7 +9957,7 @@
             <a:r>
               <a:rPr lang="zh-CN" altLang="en-US" sz="1600" dirty="0">
                 <a:solidFill>
-                  <a:srgbClr val="12374E"/>
+                  <a:srgbClr val="000000"/>
                 </a:solidFill>
                 <a:latin typeface="Microsoft YaHei" pitchFamily="34" charset="0"/>
                 <a:ea typeface="Microsoft YaHei" pitchFamily="34" charset="-122"/>
@@ -10000,7 +10000,7 @@
             <a:r>
               <a:rPr lang="zh-CN" altLang="en-US" sz="1600" dirty="0">
                 <a:solidFill>
-                  <a:srgbClr val="12374E"/>
+                  <a:srgbClr val="000000"/>
                 </a:solidFill>
                 <a:latin typeface="Microsoft YaHei" pitchFamily="34" charset="0"/>
                 <a:ea typeface="Microsoft YaHei" pitchFamily="34" charset="-122"/>
@@ -10043,7 +10043,7 @@
             <a:r>
               <a:rPr lang="zh-CN" altLang="en-US" sz="1600" dirty="0">
                 <a:solidFill>
-                  <a:srgbClr val="12374E"/>
+                  <a:srgbClr val="000000"/>
                 </a:solidFill>
                 <a:latin typeface="Microsoft YaHei" pitchFamily="34" charset="0"/>
                 <a:ea typeface="Microsoft YaHei" pitchFamily="34" charset="-122"/>
@@ -10265,11 +10265,11 @@
             <a:avLst/>
           </a:prstGeom>
           <a:solidFill>
-            <a:srgbClr val="D8E2E9"/>
-          </a:solidFill>
-          <a:ln w="12700">
-            <a:solidFill>
-              <a:srgbClr val="D8E2E9">
+            <a:srgbClr val="CCDEEA"/>
+          </a:solidFill>
+          <a:ln w="12700">
+            <a:solidFill>
+              <a:srgbClr val="CCDEEA">
                 <a:alpha val="0"/>
               </a:srgbClr>
             </a:solidFill>
@@ -10594,7 +10594,7 @@
             <a:r>
               <a:rPr lang="zh-CN" altLang="en-US" sz="1600" dirty="0">
                 <a:solidFill>
-                  <a:srgbClr val="12374E"/>
+                  <a:srgbClr val="000000"/>
                 </a:solidFill>
                 <a:latin typeface="Microsoft YaHei" pitchFamily="34" charset="0"/>
                 <a:ea typeface="Microsoft YaHei" pitchFamily="34" charset="-122"/>
@@ -10729,7 +10729,7 @@
             <a:r>
               <a:rPr lang="zh-CN" altLang="en-US" sz="1200" dirty="0">
                 <a:solidFill>
-                  <a:srgbClr val="12374E"/>
+                  <a:srgbClr val="000000"/>
                 </a:solidFill>
                 <a:latin typeface="Microsoft YaHei" pitchFamily="34" charset="0"/>
                 <a:ea typeface="Microsoft YaHei" pitchFamily="34" charset="-122"/>
@@ -10840,7 +10840,7 @@
             <a:r>
               <a:rPr lang="zh-CN" altLang="en-US" sz="1600" dirty="0">
                 <a:solidFill>
-                  <a:srgbClr val="12374E"/>
+                  <a:srgbClr val="000000"/>
                 </a:solidFill>
                 <a:latin typeface="Microsoft YaHei" pitchFamily="34" charset="0"/>
                 <a:ea typeface="Microsoft YaHei" pitchFamily="34" charset="-122"/>
@@ -10867,11 +10867,11 @@
             <a:avLst/>
           </a:prstGeom>
           <a:solidFill>
-            <a:srgbClr val="9EA8AE"/>
-          </a:solidFill>
-          <a:ln w="12700">
-            <a:solidFill>
-              <a:srgbClr val="9EA8AE">
+            <a:srgbClr val="777777"/>
+          </a:solidFill>
+          <a:ln w="12700">
+            <a:solidFill>
+              <a:srgbClr val="777777">
                 <a:alpha val="0"/>
               </a:srgbClr>
             </a:solidFill>
@@ -10951,7 +10951,7 @@
             <a:r>
               <a:rPr lang="zh-CN" altLang="en-US" sz="1600" dirty="0">
                 <a:solidFill>
-                  <a:srgbClr val="12374E"/>
+                  <a:srgbClr val="000000"/>
                 </a:solidFill>
                 <a:latin typeface="Microsoft YaHei" pitchFamily="34" charset="0"/>
                 <a:ea typeface="Microsoft YaHei" pitchFamily="34" charset="-122"/>
@@ -10978,11 +10978,11 @@
             <a:avLst/>
           </a:prstGeom>
           <a:solidFill>
-            <a:srgbClr val="9EA8AE"/>
-          </a:solidFill>
-          <a:ln w="12700">
-            <a:solidFill>
-              <a:srgbClr val="9EA8AE">
+            <a:srgbClr val="777777"/>
+          </a:solidFill>
+          <a:ln w="12700">
+            <a:solidFill>
+              <a:srgbClr val="777777">
                 <a:alpha val="0"/>
               </a:srgbClr>
             </a:solidFill>
@@ -11062,7 +11062,7 @@
             <a:r>
               <a:rPr lang="zh-CN" altLang="en-US" sz="1600" dirty="0">
                 <a:solidFill>
-                  <a:srgbClr val="12374E"/>
+                  <a:srgbClr val="000000"/>
                 </a:solidFill>
                 <a:latin typeface="Microsoft YaHei" pitchFamily="34" charset="0"/>
                 <a:ea typeface="Microsoft YaHei" pitchFamily="34" charset="-122"/>
@@ -11215,11 +11215,11 @@
             <a:avLst/>
           </a:prstGeom>
           <a:solidFill>
-            <a:srgbClr val="D8E2E9"/>
-          </a:solidFill>
-          <a:ln w="12700">
-            <a:solidFill>
-              <a:srgbClr val="D8E2E9">
+            <a:srgbClr val="CCDEEA"/>
+          </a:solidFill>
+          <a:ln w="12700">
+            <a:solidFill>
+              <a:srgbClr val="CCDEEA">
                 <a:alpha val="0"/>
               </a:srgbClr>
             </a:solidFill>
@@ -11544,7 +11544,7 @@
             <a:r>
               <a:rPr lang="zh-CN" altLang="en-US" sz="1600" dirty="0">
                 <a:solidFill>
-                  <a:srgbClr val="12374E"/>
+                  <a:srgbClr val="000000"/>
                 </a:solidFill>
                 <a:latin typeface="Microsoft YaHei" pitchFamily="34" charset="0"/>
                 <a:ea typeface="Microsoft YaHei" pitchFamily="34" charset="-122"/>
@@ -11679,7 +11679,7 @@
             <a:r>
               <a:rPr lang="zh-CN" altLang="en-US" sz="1200" dirty="0">
                 <a:solidFill>
-                  <a:srgbClr val="12374E"/>
+                  <a:srgbClr val="000000"/>
                 </a:solidFill>
                 <a:latin typeface="Microsoft YaHei" pitchFamily="34" charset="0"/>
                 <a:ea typeface="Microsoft YaHei" pitchFamily="34" charset="-122"/>
@@ -11814,7 +11814,7 @@
             <a:r>
               <a:rPr lang="zh-CN" altLang="en-US" sz="1200" dirty="0">
                 <a:solidFill>
-                  <a:srgbClr val="12374E"/>
+                  <a:srgbClr val="000000"/>
                 </a:solidFill>
                 <a:latin typeface="Microsoft YaHei" pitchFamily="34" charset="0"/>
                 <a:ea typeface="Microsoft YaHei" pitchFamily="34" charset="-122"/>
@@ -12036,11 +12036,11 @@
             <a:avLst/>
           </a:prstGeom>
           <a:solidFill>
-            <a:srgbClr val="D8E2E9"/>
-          </a:solidFill>
-          <a:ln w="12700">
-            <a:solidFill>
-              <a:srgbClr val="D8E2E9">
+            <a:srgbClr val="CCDEEA"/>
+          </a:solidFill>
+          <a:ln w="12700">
+            <a:solidFill>
+              <a:srgbClr val="CCDEEA">
                 <a:alpha val="0"/>
               </a:srgbClr>
             </a:solidFill>
@@ -12365,7 +12365,7 @@
             <a:r>
               <a:rPr lang="zh-CN" altLang="en-US" sz="1600" dirty="0">
                 <a:solidFill>
-                  <a:srgbClr val="12374E"/>
+                  <a:srgbClr val="000000"/>
                 </a:solidFill>
                 <a:latin typeface="Microsoft YaHei" pitchFamily="34" charset="0"/>
                 <a:ea typeface="Microsoft YaHei" pitchFamily="34" charset="-122"/>
@@ -13637,7 +13637,7 @@
             <a:r>
               <a:rPr lang="zh-CN" altLang="en-US" sz="1200" dirty="0">
                 <a:solidFill>
-                  <a:srgbClr val="12374E"/>
+                  <a:srgbClr val="000000"/>
                 </a:solidFill>
                 <a:latin typeface="Microsoft YaHei" pitchFamily="34" charset="0"/>
                 <a:ea typeface="Microsoft YaHei" pitchFamily="34" charset="-122"/>
@@ -13733,7 +13733,7 @@
             <a:r>
               <a:rPr lang="zh-CN" altLang="en-US" sz="1200" dirty="0">
                 <a:solidFill>
-                  <a:srgbClr val="12374E"/>
+                  <a:srgbClr val="000000"/>
                 </a:solidFill>
                 <a:latin typeface="Microsoft YaHei" pitchFamily="34" charset="0"/>
                 <a:ea typeface="Microsoft YaHei" pitchFamily="34" charset="-122"/>
@@ -13856,7 +13856,7 @@
             <a:r>
               <a:rPr lang="zh-CN" altLang="en-US" sz="1200" dirty="0">
                 <a:solidFill>
-                  <a:srgbClr val="12374E"/>
+                  <a:srgbClr val="000000"/>
                 </a:solidFill>
                 <a:latin typeface="Microsoft YaHei" pitchFamily="34" charset="0"/>
                 <a:ea typeface="Microsoft YaHei" pitchFamily="34" charset="-122"/>
@@ -13952,7 +13952,7 @@
             <a:r>
               <a:rPr lang="zh-CN" altLang="en-US" sz="1200" dirty="0">
                 <a:solidFill>
-                  <a:srgbClr val="12374E"/>
+                  <a:srgbClr val="000000"/>
                 </a:solidFill>
                 <a:latin typeface="Microsoft YaHei" pitchFamily="34" charset="0"/>
                 <a:ea typeface="Microsoft YaHei" pitchFamily="34" charset="-122"/>
@@ -14075,7 +14075,7 @@
             <a:r>
               <a:rPr lang="zh-CN" altLang="en-US" sz="1200" dirty="0">
                 <a:solidFill>
-                  <a:srgbClr val="12374E"/>
+                  <a:srgbClr val="000000"/>
                 </a:solidFill>
                 <a:latin typeface="Microsoft YaHei" pitchFamily="34" charset="0"/>
                 <a:ea typeface="Microsoft YaHei" pitchFamily="34" charset="-122"/>
@@ -14171,7 +14171,7 @@
             <a:r>
               <a:rPr lang="zh-CN" altLang="en-US" sz="1200" dirty="0">
                 <a:solidFill>
-                  <a:srgbClr val="12374E"/>
+                  <a:srgbClr val="000000"/>
                 </a:solidFill>
                 <a:latin typeface="Microsoft YaHei" pitchFamily="34" charset="0"/>
                 <a:ea typeface="Microsoft YaHei" pitchFamily="34" charset="-122"/>
@@ -14267,7 +14267,7 @@
             <a:r>
               <a:rPr lang="zh-CN" altLang="en-US" sz="1200" dirty="0">
                 <a:solidFill>
-                  <a:srgbClr val="12374E"/>
+                  <a:srgbClr val="000000"/>
                 </a:solidFill>
                 <a:latin typeface="Microsoft YaHei" pitchFamily="34" charset="0"/>
                 <a:ea typeface="Microsoft YaHei" pitchFamily="34" charset="-122"/>
@@ -14390,7 +14390,7 @@
             <a:r>
               <a:rPr lang="zh-CN" altLang="en-US" sz="1200" dirty="0">
                 <a:solidFill>
-                  <a:srgbClr val="12374E"/>
+                  <a:srgbClr val="000000"/>
                 </a:solidFill>
                 <a:latin typeface="Microsoft YaHei" pitchFamily="34" charset="0"/>
                 <a:ea typeface="Microsoft YaHei" pitchFamily="34" charset="-122"/>
@@ -14486,7 +14486,7 @@
             <a:r>
               <a:rPr lang="zh-CN" altLang="en-US" sz="1200" dirty="0">
                 <a:solidFill>
-                  <a:srgbClr val="12374E"/>
+                  <a:srgbClr val="000000"/>
                 </a:solidFill>
                 <a:latin typeface="Microsoft YaHei" pitchFamily="34" charset="0"/>
                 <a:ea typeface="Microsoft YaHei" pitchFamily="34" charset="-122"/>
@@ -14609,7 +14609,7 @@
             <a:r>
               <a:rPr lang="zh-CN" altLang="en-US" sz="1200" dirty="0">
                 <a:solidFill>
-                  <a:srgbClr val="12374E"/>
+                  <a:srgbClr val="000000"/>
                 </a:solidFill>
                 <a:latin typeface="Microsoft YaHei" pitchFamily="34" charset="0"/>
                 <a:ea typeface="Microsoft YaHei" pitchFamily="34" charset="-122"/>
@@ -14705,7 +14705,7 @@
             <a:r>
               <a:rPr lang="zh-CN" altLang="en-US" sz="1200" dirty="0">
                 <a:solidFill>
-                  <a:srgbClr val="12374E"/>
+                  <a:srgbClr val="000000"/>
                 </a:solidFill>
                 <a:latin typeface="Microsoft YaHei" pitchFamily="34" charset="0"/>
                 <a:ea typeface="Microsoft YaHei" pitchFamily="34" charset="-122"/>
@@ -14828,7 +14828,7 @@
             <a:r>
               <a:rPr lang="zh-CN" altLang="en-US" sz="1200" dirty="0">
                 <a:solidFill>
-                  <a:srgbClr val="12374E"/>
+                  <a:srgbClr val="000000"/>
                 </a:solidFill>
                 <a:latin typeface="Microsoft YaHei" pitchFamily="34" charset="0"/>
                 <a:ea typeface="Microsoft YaHei" pitchFamily="34" charset="-122"/>
@@ -14924,7 +14924,7 @@
             <a:r>
               <a:rPr lang="zh-CN" altLang="en-US" sz="1200" dirty="0">
                 <a:solidFill>
-                  <a:srgbClr val="12374E"/>
+                  <a:srgbClr val="000000"/>
                 </a:solidFill>
                 <a:latin typeface="Microsoft YaHei" pitchFamily="34" charset="0"/>
                 <a:ea typeface="Microsoft YaHei" pitchFamily="34" charset="-122"/>
@@ -15020,7 +15020,7 @@
             <a:r>
               <a:rPr lang="zh-CN" altLang="en-US" sz="1200" dirty="0">
                 <a:solidFill>
-                  <a:srgbClr val="12374E"/>
+                  <a:srgbClr val="000000"/>
                 </a:solidFill>
                 <a:latin typeface="Microsoft YaHei" pitchFamily="34" charset="0"/>
                 <a:ea typeface="Microsoft YaHei" pitchFamily="34" charset="-122"/>
@@ -15143,7 +15143,7 @@
             <a:r>
               <a:rPr lang="zh-CN" altLang="en-US" sz="1200" dirty="0">
                 <a:solidFill>
-                  <a:srgbClr val="12374E"/>
+                  <a:srgbClr val="000000"/>
                 </a:solidFill>
                 <a:latin typeface="Microsoft YaHei" pitchFamily="34" charset="0"/>
                 <a:ea typeface="Microsoft YaHei" pitchFamily="34" charset="-122"/>
@@ -15239,7 +15239,7 @@
             <a:r>
               <a:rPr lang="zh-CN" altLang="en-US" sz="1200" dirty="0">
                 <a:solidFill>
-                  <a:srgbClr val="12374E"/>
+                  <a:srgbClr val="000000"/>
                 </a:solidFill>
                 <a:latin typeface="Microsoft YaHei" pitchFamily="34" charset="0"/>
                 <a:ea typeface="Microsoft YaHei" pitchFamily="34" charset="-122"/>
@@ -15362,7 +15362,7 @@
             <a:r>
               <a:rPr lang="zh-CN" altLang="en-US" sz="1200" dirty="0">
                 <a:solidFill>
-                  <a:srgbClr val="12374E"/>
+                  <a:srgbClr val="000000"/>
                 </a:solidFill>
                 <a:latin typeface="Microsoft YaHei" pitchFamily="34" charset="0"/>
                 <a:ea typeface="Microsoft YaHei" pitchFamily="34" charset="-122"/>
@@ -15458,7 +15458,7 @@
             <a:r>
               <a:rPr lang="zh-CN" altLang="en-US" sz="1200" dirty="0">
                 <a:solidFill>
-                  <a:srgbClr val="12374E"/>
+                  <a:srgbClr val="000000"/>
                 </a:solidFill>
                 <a:latin typeface="Microsoft YaHei" pitchFamily="34" charset="0"/>
                 <a:ea typeface="Microsoft YaHei" pitchFamily="34" charset="-122"/>
@@ -15581,7 +15581,7 @@
             <a:r>
               <a:rPr lang="zh-CN" altLang="en-US" sz="1200" dirty="0">
                 <a:solidFill>
-                  <a:srgbClr val="12374E"/>
+                  <a:srgbClr val="000000"/>
                 </a:solidFill>
                 <a:latin typeface="Microsoft YaHei" pitchFamily="34" charset="0"/>
                 <a:ea typeface="Microsoft YaHei" pitchFamily="34" charset="-122"/>
@@ -15677,7 +15677,7 @@
             <a:r>
               <a:rPr lang="zh-CN" altLang="en-US" sz="1200" dirty="0">
                 <a:solidFill>
-                  <a:srgbClr val="12374E"/>
+                  <a:srgbClr val="000000"/>
                 </a:solidFill>
                 <a:latin typeface="Microsoft YaHei" pitchFamily="34" charset="0"/>
                 <a:ea typeface="Microsoft YaHei" pitchFamily="34" charset="-122"/>
@@ -15773,7 +15773,7 @@
             <a:r>
               <a:rPr lang="zh-CN" altLang="en-US" sz="1200" dirty="0">
                 <a:solidFill>
-                  <a:srgbClr val="12374E"/>
+                  <a:srgbClr val="000000"/>
                 </a:solidFill>
                 <a:latin typeface="Microsoft YaHei" pitchFamily="34" charset="0"/>
                 <a:ea typeface="Microsoft YaHei" pitchFamily="34" charset="-122"/>
@@ -15896,7 +15896,7 @@
             <a:r>
               <a:rPr lang="zh-CN" altLang="en-US" sz="1200" dirty="0">
                 <a:solidFill>
-                  <a:srgbClr val="12374E"/>
+                  <a:srgbClr val="000000"/>
                 </a:solidFill>
                 <a:latin typeface="Microsoft YaHei" pitchFamily="34" charset="0"/>
                 <a:ea typeface="Microsoft YaHei" pitchFamily="34" charset="-122"/>
@@ -15992,7 +15992,7 @@
             <a:r>
               <a:rPr lang="zh-CN" altLang="en-US" sz="1200" dirty="0">
                 <a:solidFill>
-                  <a:srgbClr val="12374E"/>
+                  <a:srgbClr val="000000"/>
                 </a:solidFill>
                 <a:latin typeface="Microsoft YaHei" pitchFamily="34" charset="0"/>
                 <a:ea typeface="Microsoft YaHei" pitchFamily="34" charset="-122"/>
@@ -16115,7 +16115,7 @@
             <a:r>
               <a:rPr lang="zh-CN" altLang="en-US" sz="1200" dirty="0">
                 <a:solidFill>
-                  <a:srgbClr val="12374E"/>
+                  <a:srgbClr val="000000"/>
                 </a:solidFill>
                 <a:latin typeface="Microsoft YaHei" pitchFamily="34" charset="0"/>
                 <a:ea typeface="Microsoft YaHei" pitchFamily="34" charset="-122"/>
@@ -16211,7 +16211,7 @@
             <a:r>
               <a:rPr lang="zh-CN" altLang="en-US" sz="1200" dirty="0">
                 <a:solidFill>
-                  <a:srgbClr val="12374E"/>
+                  <a:srgbClr val="000000"/>
                 </a:solidFill>
                 <a:latin typeface="Microsoft YaHei" pitchFamily="34" charset="0"/>
                 <a:ea typeface="Microsoft YaHei" pitchFamily="34" charset="-122"/>
@@ -16334,7 +16334,7 @@
             <a:r>
               <a:rPr lang="zh-CN" altLang="en-US" sz="1200" dirty="0">
                 <a:solidFill>
-                  <a:srgbClr val="12374E"/>
+                  <a:srgbClr val="000000"/>
                 </a:solidFill>
                 <a:latin typeface="Microsoft YaHei" pitchFamily="34" charset="0"/>
                 <a:ea typeface="Microsoft YaHei" pitchFamily="34" charset="-122"/>
@@ -16430,7 +16430,7 @@
             <a:r>
               <a:rPr lang="zh-CN" altLang="en-US" sz="1200" dirty="0">
                 <a:solidFill>
-                  <a:srgbClr val="12374E"/>
+                  <a:srgbClr val="000000"/>
                 </a:solidFill>
                 <a:latin typeface="Microsoft YaHei" pitchFamily="34" charset="0"/>
                 <a:ea typeface="Microsoft YaHei" pitchFamily="34" charset="-122"/>
@@ -16526,7 +16526,7 @@
             <a:r>
               <a:rPr lang="zh-CN" altLang="en-US" sz="1200" dirty="0">
                 <a:solidFill>
-                  <a:srgbClr val="12374E"/>
+                  <a:srgbClr val="000000"/>
                 </a:solidFill>
                 <a:latin typeface="Microsoft YaHei" pitchFamily="34" charset="0"/>
                 <a:ea typeface="Microsoft YaHei" pitchFamily="34" charset="-122"/>
@@ -16649,7 +16649,7 @@
             <a:r>
               <a:rPr lang="zh-CN" altLang="en-US" sz="1200" dirty="0">
                 <a:solidFill>
-                  <a:srgbClr val="12374E"/>
+                  <a:srgbClr val="000000"/>
                 </a:solidFill>
                 <a:latin typeface="Microsoft YaHei" pitchFamily="34" charset="0"/>
                 <a:ea typeface="Microsoft YaHei" pitchFamily="34" charset="-122"/>
@@ -16745,7 +16745,7 @@
             <a:r>
               <a:rPr lang="zh-CN" altLang="en-US" sz="1200" dirty="0">
                 <a:solidFill>
-                  <a:srgbClr val="12374E"/>
+                  <a:srgbClr val="000000"/>
                 </a:solidFill>
                 <a:latin typeface="Microsoft YaHei" pitchFamily="34" charset="0"/>
                 <a:ea typeface="Microsoft YaHei" pitchFamily="34" charset="-122"/>
@@ -16868,7 +16868,7 @@
             <a:r>
               <a:rPr lang="zh-CN" altLang="en-US" sz="1200" dirty="0">
                 <a:solidFill>
-                  <a:srgbClr val="12374E"/>
+                  <a:srgbClr val="000000"/>
                 </a:solidFill>
                 <a:latin typeface="Microsoft YaHei" pitchFamily="34" charset="0"/>
                 <a:ea typeface="Microsoft YaHei" pitchFamily="34" charset="-122"/>
@@ -16964,7 +16964,7 @@
             <a:r>
               <a:rPr lang="zh-CN" altLang="en-US" sz="1200" dirty="0">
                 <a:solidFill>
-                  <a:srgbClr val="12374E"/>
+                  <a:srgbClr val="000000"/>
                 </a:solidFill>
                 <a:latin typeface="Microsoft YaHei" pitchFamily="34" charset="0"/>
                 <a:ea typeface="Microsoft YaHei" pitchFamily="34" charset="-122"/>
@@ -17087,7 +17087,7 @@
             <a:r>
               <a:rPr lang="zh-CN" altLang="en-US" sz="1200" dirty="0">
                 <a:solidFill>
-                  <a:srgbClr val="12374E"/>
+                  <a:srgbClr val="000000"/>
                 </a:solidFill>
                 <a:latin typeface="Microsoft YaHei" pitchFamily="34" charset="0"/>
                 <a:ea typeface="Microsoft YaHei" pitchFamily="34" charset="-122"/>
@@ -17183,7 +17183,7 @@
             <a:r>
               <a:rPr lang="zh-CN" altLang="en-US" sz="1200" dirty="0">
                 <a:solidFill>
-                  <a:srgbClr val="12374E"/>
+                  <a:srgbClr val="000000"/>
                 </a:solidFill>
                 <a:latin typeface="Microsoft YaHei" pitchFamily="34" charset="0"/>
                 <a:ea typeface="Microsoft YaHei" pitchFamily="34" charset="-122"/>
@@ -17279,7 +17279,7 @@
             <a:r>
               <a:rPr lang="zh-CN" altLang="en-US" sz="1200" dirty="0">
                 <a:solidFill>
-                  <a:srgbClr val="12374E"/>
+                  <a:srgbClr val="000000"/>
                 </a:solidFill>
                 <a:latin typeface="Microsoft YaHei" pitchFamily="34" charset="0"/>
                 <a:ea typeface="Microsoft YaHei" pitchFamily="34" charset="-122"/>
@@ -17402,7 +17402,7 @@
             <a:r>
               <a:rPr lang="zh-CN" altLang="en-US" sz="1200" dirty="0">
                 <a:solidFill>
-                  <a:srgbClr val="12374E"/>
+                  <a:srgbClr val="000000"/>
                 </a:solidFill>
                 <a:latin typeface="Microsoft YaHei" pitchFamily="34" charset="0"/>
                 <a:ea typeface="Microsoft YaHei" pitchFamily="34" charset="-122"/>
@@ -17498,7 +17498,7 @@
             <a:r>
               <a:rPr lang="zh-CN" altLang="en-US" sz="1200" dirty="0">
                 <a:solidFill>
-                  <a:srgbClr val="12374E"/>
+                  <a:srgbClr val="000000"/>
                 </a:solidFill>
                 <a:latin typeface="Microsoft YaHei" pitchFamily="34" charset="0"/>
                 <a:ea typeface="Microsoft YaHei" pitchFamily="34" charset="-122"/>
@@ -17621,7 +17621,7 @@
             <a:r>
               <a:rPr lang="zh-CN" altLang="en-US" sz="1200" dirty="0">
                 <a:solidFill>
-                  <a:srgbClr val="12374E"/>
+                  <a:srgbClr val="000000"/>
                 </a:solidFill>
                 <a:latin typeface="Microsoft YaHei" pitchFamily="34" charset="0"/>
                 <a:ea typeface="Microsoft YaHei" pitchFamily="34" charset="-122"/>
@@ -17717,7 +17717,7 @@
             <a:r>
               <a:rPr lang="zh-CN" altLang="en-US" sz="1200" dirty="0">
                 <a:solidFill>
-                  <a:srgbClr val="12374E"/>
+                  <a:srgbClr val="000000"/>
                 </a:solidFill>
                 <a:latin typeface="Microsoft YaHei" pitchFamily="34" charset="0"/>
                 <a:ea typeface="Microsoft YaHei" pitchFamily="34" charset="-122"/>
@@ -17840,7 +17840,7 @@
             <a:r>
               <a:rPr lang="zh-CN" altLang="en-US" sz="1200" dirty="0">
                 <a:solidFill>
-                  <a:srgbClr val="12374E"/>
+                  <a:srgbClr val="000000"/>
                 </a:solidFill>
                 <a:latin typeface="Microsoft YaHei" pitchFamily="34" charset="0"/>
                 <a:ea typeface="Microsoft YaHei" pitchFamily="34" charset="-122"/>
@@ -17936,7 +17936,7 @@
             <a:r>
               <a:rPr lang="zh-CN" altLang="en-US" sz="1200" dirty="0">
                 <a:solidFill>
-                  <a:srgbClr val="12374E"/>
+                  <a:srgbClr val="000000"/>
                 </a:solidFill>
                 <a:latin typeface="Microsoft YaHei" pitchFamily="34" charset="0"/>
                 <a:ea typeface="Microsoft YaHei" pitchFamily="34" charset="-122"/>
@@ -18032,7 +18032,7 @@
             <a:r>
               <a:rPr lang="zh-CN" altLang="en-US" sz="1200" dirty="0">
                 <a:solidFill>
-                  <a:srgbClr val="12374E"/>
+                  <a:srgbClr val="000000"/>
                 </a:solidFill>
                 <a:latin typeface="Microsoft YaHei" pitchFamily="34" charset="0"/>
                 <a:ea typeface="Microsoft YaHei" pitchFamily="34" charset="-122"/>
@@ -18155,7 +18155,7 @@
             <a:r>
               <a:rPr lang="zh-CN" altLang="en-US" sz="1200" dirty="0">
                 <a:solidFill>
-                  <a:srgbClr val="12374E"/>
+                  <a:srgbClr val="000000"/>
                 </a:solidFill>
                 <a:latin typeface="Microsoft YaHei" pitchFamily="34" charset="0"/>
                 <a:ea typeface="Microsoft YaHei" pitchFamily="34" charset="-122"/>
@@ -18251,7 +18251,7 @@
             <a:r>
               <a:rPr lang="zh-CN" altLang="en-US" sz="1200" dirty="0">
                 <a:solidFill>
-                  <a:srgbClr val="12374E"/>
+                  <a:srgbClr val="000000"/>
                 </a:solidFill>
                 <a:latin typeface="Microsoft YaHei" pitchFamily="34" charset="0"/>
                 <a:ea typeface="Microsoft YaHei" pitchFamily="34" charset="-122"/>
@@ -18374,7 +18374,7 @@
             <a:r>
               <a:rPr lang="zh-CN" altLang="en-US" sz="1200" dirty="0">
                 <a:solidFill>
-                  <a:srgbClr val="12374E"/>
+                  <a:srgbClr val="000000"/>
                 </a:solidFill>
                 <a:latin typeface="Microsoft YaHei" pitchFamily="34" charset="0"/>
                 <a:ea typeface="Microsoft YaHei" pitchFamily="34" charset="-122"/>
@@ -18470,7 +18470,7 @@
             <a:r>
               <a:rPr lang="zh-CN" altLang="en-US" sz="1200" dirty="0">
                 <a:solidFill>
-                  <a:srgbClr val="12374E"/>
+                  <a:srgbClr val="000000"/>
                 </a:solidFill>
                 <a:latin typeface="Microsoft YaHei" pitchFamily="34" charset="0"/>
                 <a:ea typeface="Microsoft YaHei" pitchFamily="34" charset="-122"/>
@@ -18593,7 +18593,7 @@
             <a:r>
               <a:rPr lang="zh-CN" altLang="en-US" sz="1200" dirty="0">
                 <a:solidFill>
-                  <a:srgbClr val="12374E"/>
+                  <a:srgbClr val="000000"/>
                 </a:solidFill>
                 <a:latin typeface="Microsoft YaHei" pitchFamily="34" charset="0"/>
                 <a:ea typeface="Microsoft YaHei" pitchFamily="34" charset="-122"/>
@@ -18689,7 +18689,7 @@
             <a:r>
               <a:rPr lang="zh-CN" altLang="en-US" sz="1200" dirty="0">
                 <a:solidFill>
-                  <a:srgbClr val="12374E"/>
+                  <a:srgbClr val="000000"/>
                 </a:solidFill>
                 <a:latin typeface="Microsoft YaHei" pitchFamily="34" charset="0"/>
                 <a:ea typeface="Microsoft YaHei" pitchFamily="34" charset="-122"/>
@@ -18785,7 +18785,7 @@
             <a:r>
               <a:rPr lang="zh-CN" altLang="en-US" sz="1200" dirty="0">
                 <a:solidFill>
-                  <a:srgbClr val="12374E"/>
+                  <a:srgbClr val="000000"/>
                 </a:solidFill>
                 <a:latin typeface="Microsoft YaHei" pitchFamily="34" charset="0"/>
                 <a:ea typeface="Microsoft YaHei" pitchFamily="34" charset="-122"/>
@@ -18908,7 +18908,7 @@
             <a:r>
               <a:rPr lang="zh-CN" altLang="en-US" sz="1200" dirty="0">
                 <a:solidFill>
-                  <a:srgbClr val="12374E"/>
+                  <a:srgbClr val="000000"/>
                 </a:solidFill>
                 <a:latin typeface="Microsoft YaHei" pitchFamily="34" charset="0"/>
                 <a:ea typeface="Microsoft YaHei" pitchFamily="34" charset="-122"/>
@@ -19004,7 +19004,7 @@
             <a:r>
               <a:rPr lang="zh-CN" altLang="en-US" sz="1200" dirty="0">
                 <a:solidFill>
-                  <a:srgbClr val="12374E"/>
+                  <a:srgbClr val="000000"/>
                 </a:solidFill>
                 <a:latin typeface="Microsoft YaHei" pitchFamily="34" charset="0"/>
                 <a:ea typeface="Microsoft YaHei" pitchFamily="34" charset="-122"/>
@@ -19127,7 +19127,7 @@
             <a:r>
               <a:rPr lang="zh-CN" altLang="en-US" sz="1200" dirty="0">
                 <a:solidFill>
-                  <a:srgbClr val="12374E"/>
+                  <a:srgbClr val="000000"/>
                 </a:solidFill>
                 <a:latin typeface="Microsoft YaHei" pitchFamily="34" charset="0"/>
                 <a:ea typeface="Microsoft YaHei" pitchFamily="34" charset="-122"/>
@@ -19223,7 +19223,7 @@
             <a:r>
               <a:rPr lang="zh-CN" altLang="en-US" sz="1200" dirty="0">
                 <a:solidFill>
-                  <a:srgbClr val="12374E"/>
+                  <a:srgbClr val="000000"/>
                 </a:solidFill>
                 <a:latin typeface="Microsoft YaHei" pitchFamily="34" charset="0"/>
                 <a:ea typeface="Microsoft YaHei" pitchFamily="34" charset="-122"/>
@@ -19346,7 +19346,7 @@
             <a:r>
               <a:rPr lang="zh-CN" altLang="en-US" sz="1200" dirty="0">
                 <a:solidFill>
-                  <a:srgbClr val="12374E"/>
+                  <a:srgbClr val="000000"/>
                 </a:solidFill>
                 <a:latin typeface="Microsoft YaHei" pitchFamily="34" charset="0"/>
                 <a:ea typeface="Microsoft YaHei" pitchFamily="34" charset="-122"/>
@@ -19442,7 +19442,7 @@
             <a:r>
               <a:rPr lang="zh-CN" altLang="en-US" sz="1200" dirty="0">
                 <a:solidFill>
-                  <a:srgbClr val="12374E"/>
+                  <a:srgbClr val="000000"/>
                 </a:solidFill>
                 <a:latin typeface="Microsoft YaHei" pitchFamily="34" charset="0"/>
                 <a:ea typeface="Microsoft YaHei" pitchFamily="34" charset="-122"/>
@@ -19538,7 +19538,7 @@
             <a:r>
               <a:rPr lang="zh-CN" altLang="en-US" sz="1200" dirty="0">
                 <a:solidFill>
-                  <a:srgbClr val="12374E"/>
+                  <a:srgbClr val="000000"/>
                 </a:solidFill>
                 <a:latin typeface="Microsoft YaHei" pitchFamily="34" charset="0"/>
                 <a:ea typeface="Microsoft YaHei" pitchFamily="34" charset="-122"/>
@@ -19842,11 +19842,11 @@
             <a:avLst/>
           </a:prstGeom>
           <a:solidFill>
-            <a:srgbClr val="D8E2E9"/>
-          </a:solidFill>
-          <a:ln w="12700">
-            <a:solidFill>
-              <a:srgbClr val="D8E2E9">
+            <a:srgbClr val="CCDEEA"/>
+          </a:solidFill>
+          <a:ln w="12700">
+            <a:solidFill>
+              <a:srgbClr val="CCDEEA">
                 <a:alpha val="0"/>
               </a:srgbClr>
             </a:solidFill>
@@ -19886,9 +19886,213 @@
           <a:chExt cx="0" cy="0"/>
         </a:xfrm>
       </p:grpSpPr>
+      <p:sp>
+        <p:nvSpPr>
+          <p:cNvPr id="2" name="Shape 0"/>
+          <p:cNvSpPr/>
+          <p:nvPr/>
+        </p:nvSpPr>
+        <p:spPr>
+          <a:xfrm>
+            <a:off x="0" y="0"/>
+            <a:ext cx="9753600" cy="53340"/>
+          </a:xfrm>
+          <a:prstGeom prst="rect">
+            <a:avLst/>
+          </a:prstGeom>
+          <a:solidFill>
+            <a:srgbClr val="005B94"/>
+          </a:solidFill>
+          <a:ln w="12700">
+            <a:solidFill>
+              <a:srgbClr val="005B94">
+                <a:alpha val="0"/>
+              </a:srgbClr>
+            </a:solidFill>
+            <a:prstDash val="solid"/>
+          </a:ln>
+        </p:spPr>
+      </p:sp>
+      <p:sp>
+        <p:nvSpPr>
+          <p:cNvPr id="3" name="Shape 1"/>
+          <p:cNvSpPr/>
+          <p:nvPr/>
+        </p:nvSpPr>
+        <p:spPr>
+          <a:xfrm>
+            <a:off x="9753600" y="0"/>
+            <a:ext cx="2438400" cy="53340"/>
+          </a:xfrm>
+          <a:prstGeom prst="rect">
+            <a:avLst/>
+          </a:prstGeom>
+          <a:solidFill>
+            <a:srgbClr val="2BA3C0"/>
+          </a:solidFill>
+          <a:ln w="12700">
+            <a:solidFill>
+              <a:srgbClr val="2BA3C0">
+                <a:alpha val="0"/>
+              </a:srgbClr>
+            </a:solidFill>
+            <a:prstDash val="solid"/>
+          </a:ln>
+        </p:spPr>
+      </p:sp>
+      <p:sp>
+        <p:nvSpPr>
+          <p:cNvPr id="4" name="Shape 2"/>
+          <p:cNvSpPr/>
+          <p:nvPr/>
+        </p:nvSpPr>
+        <p:spPr>
+          <a:xfrm>
+            <a:off x="441960" y="259080"/>
+            <a:ext cx="289560" cy="228600"/>
+          </a:xfrm>
+          <a:prstGeom prst="rect">
+            <a:avLst/>
+          </a:prstGeom>
+          <a:solidFill>
+            <a:srgbClr val="EEF5F9"/>
+          </a:solidFill>
+          <a:ln w="12700">
+            <a:solidFill>
+              <a:srgbClr val="EEF5F9">
+                <a:alpha val="0"/>
+              </a:srgbClr>
+            </a:solidFill>
+            <a:prstDash val="solid"/>
+          </a:ln>
+        </p:spPr>
+      </p:sp>
+      <p:sp>
+        <p:nvSpPr>
+          <p:cNvPr id="5" name="Text 3"/>
+          <p:cNvSpPr/>
+          <p:nvPr/>
+        </p:nvSpPr>
+        <p:spPr>
+          <a:xfrm>
+            <a:off x="480060" y="259080"/>
+            <a:ext cx="213360" cy="228600"/>
+          </a:xfrm>
+          <a:prstGeom prst="rect">
+            <a:avLst/>
+          </a:prstGeom>
+          <a:noFill/>
+          <a:ln/>
+        </p:spPr>
+        <p:txBody>
+          <a:bodyPr wrap="none" lIns="0" tIns="0" rIns="0" bIns="0" rtlCol="0" anchor="t"/>
+          <a:lstStyle/>
+          <a:p>
+            <a:pPr algn="l" indent="0" marL="0" eaLnBrk="1" latinLnBrk="0" hangingPunct="1">
+              <a:buNone/>
+            </a:pPr>
+            <a:r>
+              <a:rPr lang="zh-CN" altLang="en-US" sz="1200" b="1" dirty="0">
+                <a:solidFill>
+                  <a:srgbClr val="005B94"/>
+                </a:solidFill>
+                <a:latin typeface="Arial" pitchFamily="34" charset="0"/>
+                <a:ea typeface="Arial" pitchFamily="34" charset="-122"/>
+                <a:cs typeface="Arial" pitchFamily="34" charset="-120"/>
+              </a:rPr>
+              <a:t>02</a:t>
+            </a:r>
+            <a:endParaRPr lang="zh-CN" sz="1200" dirty="0"/>
+          </a:p>
+        </p:txBody>
+      </p:sp>
+      <p:sp>
+        <p:nvSpPr>
+          <p:cNvPr id="6" name="Text 4"/>
+          <p:cNvSpPr/>
+          <p:nvPr/>
+        </p:nvSpPr>
+        <p:spPr>
+          <a:xfrm>
+            <a:off x="838200" y="235625"/>
+            <a:ext cx="9768840" cy="275511"/>
+          </a:xfrm>
+          <a:prstGeom prst="rect">
+            <a:avLst/>
+          </a:prstGeom>
+          <a:noFill/>
+          <a:ln/>
+        </p:spPr>
+        <p:txBody>
+          <a:bodyPr wrap="none" lIns="0" tIns="0" rIns="0" bIns="0" rtlCol="0" anchor="t"/>
+          <a:lstStyle/>
+          <a:p>
+            <a:pPr algn="l" indent="0" marL="0" eaLnBrk="1" latinLnBrk="0" hangingPunct="1">
+              <a:lnSpc>
+                <a:spcPts val="2170"/>
+              </a:lnSpc>
+              <a:buNone/>
+            </a:pPr>
+            <a:r>
+              <a:rPr lang="zh-CN" altLang="en-US" sz="1400" b="1" dirty="0">
+                <a:solidFill>
+                  <a:srgbClr val="005B94"/>
+                </a:solidFill>
+                <a:latin typeface="Microsoft YaHei" pitchFamily="34" charset="0"/>
+                <a:ea typeface="Microsoft YaHei" pitchFamily="34" charset="-122"/>
+                <a:cs typeface="Microsoft YaHei" pitchFamily="34" charset="-120"/>
+              </a:rPr>
+              <a:t>模块与内容</a:t>
+            </a:r>
+            <a:endParaRPr lang="zh-CN" sz="1400" dirty="0"/>
+          </a:p>
+        </p:txBody>
+      </p:sp>
+      <p:sp>
+        <p:nvSpPr>
+          <p:cNvPr id="7" name="Text 5"/>
+          <p:cNvSpPr/>
+          <p:nvPr/>
+        </p:nvSpPr>
+        <p:spPr>
+          <a:xfrm>
+            <a:off x="441960" y="609600"/>
+            <a:ext cx="10165080" cy="433864"/>
+          </a:xfrm>
+          <a:prstGeom prst="rect">
+            <a:avLst/>
+          </a:prstGeom>
+          <a:noFill/>
+          <a:ln/>
+        </p:spPr>
+        <p:txBody>
+          <a:bodyPr wrap="none" lIns="0" tIns="0" rIns="0" bIns="0" rtlCol="0" anchor="t"/>
+          <a:lstStyle/>
+          <a:p>
+            <a:pPr algn="l" indent="0" marL="0" eaLnBrk="1" latinLnBrk="0" hangingPunct="1">
+              <a:lnSpc>
+                <a:spcPts val="3416"/>
+              </a:lnSpc>
+              <a:buNone/>
+            </a:pPr>
+            <a:r>
+              <a:rPr lang="zh-CN" altLang="en-US" sz="2800" b="1" dirty="0">
+                <a:solidFill>
+                  <a:srgbClr val="005B94"/>
+                </a:solidFill>
+                <a:latin typeface="Microsoft YaHei" pitchFamily="34" charset="0"/>
+                <a:ea typeface="Microsoft YaHei" pitchFamily="34" charset="-122"/>
+                <a:cs typeface="Microsoft YaHei" pitchFamily="34" charset="-120"/>
+              </a:rPr>
+              <a:t>目标函数与参数更新</a:t>
+            </a:r>
+            <a:endParaRPr lang="zh-CN" sz="2800" dirty="0"/>
+          </a:p>
+        </p:txBody>
+      </p:sp>
       <p:pic>
         <p:nvPicPr>
-          <p:cNvPr id="2" name="Image 0" descr="preencoded.png">    </p:cNvPr>
+          <p:cNvPr id="8" name="Image 0" descr="preencoded.png">    </p:cNvPr>
           <p:cNvPicPr>
             <a:picLocks noChangeAspect="1"/>
           </p:cNvPicPr>
@@ -19902,8 +20106,8 @@
         </p:blipFill>
         <p:spPr>
           <a:xfrm>
-            <a:off x="0" y="0"/>
-            <a:ext cx="12192000" cy="6858000"/>
+            <a:off x="10835640" y="201930"/>
+            <a:ext cx="914400" cy="914400"/>
           </a:xfrm>
           <a:prstGeom prst="rect">
             <a:avLst/>
@@ -19912,14 +20116,41 @@
       </p:pic>
       <p:sp>
         <p:nvSpPr>
-          <p:cNvPr id="3" name="Text 0"/>
-          <p:cNvSpPr/>
-          <p:nvPr/>
-        </p:nvSpPr>
-        <p:spPr>
-          <a:xfrm>
-            <a:off x="480060" y="259080"/>
-            <a:ext cx="213360" cy="228600"/>
+          <p:cNvPr id="9" name="Shape 6"/>
+          <p:cNvSpPr/>
+          <p:nvPr/>
+        </p:nvSpPr>
+        <p:spPr>
+          <a:xfrm>
+            <a:off x="441960" y="1264920"/>
+            <a:ext cx="11308080" cy="15240"/>
+          </a:xfrm>
+          <a:prstGeom prst="rect">
+            <a:avLst/>
+          </a:prstGeom>
+          <a:solidFill>
+            <a:srgbClr val="005B94"/>
+          </a:solidFill>
+          <a:ln w="12700">
+            <a:solidFill>
+              <a:srgbClr val="005B94">
+                <a:alpha val="0"/>
+              </a:srgbClr>
+            </a:solidFill>
+            <a:prstDash val="solid"/>
+          </a:ln>
+        </p:spPr>
+      </p:sp>
+      <p:sp>
+        <p:nvSpPr>
+          <p:cNvPr id="10" name="Text 7"/>
+          <p:cNvSpPr/>
+          <p:nvPr/>
+        </p:nvSpPr>
+        <p:spPr>
+          <a:xfrm>
+            <a:off x="441960" y="1463040"/>
+            <a:ext cx="11308080" cy="314920"/>
           </a:xfrm>
           <a:prstGeom prst="rect">
             <a:avLst/>
@@ -19932,33 +20163,90 @@
           <a:lstStyle/>
           <a:p>
             <a:pPr algn="l" indent="0" marL="0" eaLnBrk="1" latinLnBrk="0" hangingPunct="1">
-              <a:buNone/>
-            </a:pPr>
-            <a:r>
-              <a:rPr lang="zh-CN" altLang="en-US" sz="1200" b="1" dirty="0">
-                <a:solidFill>
-                  <a:srgbClr val="005B94"/>
-                </a:solidFill>
-                <a:latin typeface="Arial" pitchFamily="34" charset="0"/>
-                <a:ea typeface="Arial" pitchFamily="34" charset="-122"/>
-                <a:cs typeface="Arial" pitchFamily="34" charset="-120"/>
-              </a:rPr>
-              <a:t>02</a:t>
-            </a:r>
-            <a:endParaRPr lang="zh-CN" sz="1200" dirty="0"/>
-          </a:p>
-        </p:txBody>
-      </p:sp>
-      <p:sp>
-        <p:nvSpPr>
-          <p:cNvPr id="4" name="Text 1"/>
-          <p:cNvSpPr/>
-          <p:nvPr/>
-        </p:nvSpPr>
-        <p:spPr>
-          <a:xfrm>
-            <a:off x="838200" y="235625"/>
-            <a:ext cx="9768840" cy="275511"/>
+              <a:lnSpc>
+                <a:spcPts val="2480"/>
+              </a:lnSpc>
+              <a:buNone/>
+            </a:pPr>
+            <a:r>
+              <a:rPr lang="zh-CN" altLang="en-US" sz="1600" dirty="0">
+                <a:solidFill>
+                  <a:srgbClr val="000000"/>
+                </a:solidFill>
+                <a:latin typeface="Microsoft YaHei" pitchFamily="34" charset="0"/>
+                <a:ea typeface="Microsoft YaHei" pitchFamily="34" charset="-122"/>
+                <a:cs typeface="Microsoft YaHei" pitchFamily="34" charset="-120"/>
+              </a:rPr>
+              <a:t>以带 L2 正则项的线性回归为例，先给出优化目标，再说明参数更新与各符号含义。</a:t>
+            </a:r>
+            <a:endParaRPr lang="zh-CN" sz="1600" dirty="0"/>
+          </a:p>
+        </p:txBody>
+      </p:sp>
+      <p:sp>
+        <p:nvSpPr>
+          <p:cNvPr id="11" name="Shape 8"/>
+          <p:cNvSpPr/>
+          <p:nvPr/>
+        </p:nvSpPr>
+        <p:spPr>
+          <a:xfrm>
+            <a:off x="441960" y="1950720"/>
+            <a:ext cx="6873240" cy="2131338"/>
+          </a:xfrm>
+          <a:prstGeom prst="rect">
+            <a:avLst/>
+          </a:prstGeom>
+          <a:solidFill>
+            <a:srgbClr val="EEF5F9"/>
+          </a:solidFill>
+          <a:ln w="12700">
+            <a:solidFill>
+              <a:srgbClr val="EEF5F9">
+                <a:alpha val="0"/>
+              </a:srgbClr>
+            </a:solidFill>
+            <a:prstDash val="solid"/>
+          </a:ln>
+        </p:spPr>
+      </p:sp>
+      <p:sp>
+        <p:nvSpPr>
+          <p:cNvPr id="12" name="Shape 9"/>
+          <p:cNvSpPr/>
+          <p:nvPr/>
+        </p:nvSpPr>
+        <p:spPr>
+          <a:xfrm>
+            <a:off x="441960" y="1950720"/>
+            <a:ext cx="6873240" cy="449580"/>
+          </a:xfrm>
+          <a:prstGeom prst="rect">
+            <a:avLst/>
+          </a:prstGeom>
+          <a:solidFill>
+            <a:srgbClr val="005B94"/>
+          </a:solidFill>
+          <a:ln w="12700">
+            <a:solidFill>
+              <a:srgbClr val="005B94">
+                <a:alpha val="0"/>
+              </a:srgbClr>
+            </a:solidFill>
+            <a:prstDash val="solid"/>
+          </a:ln>
+        </p:spPr>
+      </p:sp>
+      <p:sp>
+        <p:nvSpPr>
+          <p:cNvPr id="13" name="Text 10"/>
+          <p:cNvSpPr/>
+          <p:nvPr/>
+        </p:nvSpPr>
+        <p:spPr>
+          <a:xfrm>
+            <a:off x="594360" y="2026920"/>
+            <a:ext cx="6568440" cy="297180"/>
           </a:xfrm>
           <a:prstGeom prst="rect">
             <a:avLst/>
@@ -19972,70 +20260,28 @@
           <a:p>
             <a:pPr algn="l" indent="0" marL="0" eaLnBrk="1" latinLnBrk="0" hangingPunct="1">
               <a:lnSpc>
-                <a:spcPts val="2170"/>
-              </a:lnSpc>
-              <a:buNone/>
-            </a:pPr>
-            <a:r>
-              <a:rPr lang="zh-CN" altLang="en-US" sz="1400" b="1" dirty="0">
-                <a:solidFill>
-                  <a:srgbClr val="40647D"/>
-                </a:solidFill>
-                <a:latin typeface="Microsoft YaHei" pitchFamily="34" charset="0"/>
-                <a:ea typeface="Microsoft YaHei" pitchFamily="34" charset="-122"/>
-                <a:cs typeface="Microsoft YaHei" pitchFamily="34" charset="-120"/>
-              </a:rPr>
-              <a:t>模块与内容</a:t>
-            </a:r>
-            <a:endParaRPr lang="zh-CN" sz="1400" dirty="0"/>
-          </a:p>
-        </p:txBody>
-      </p:sp>
-      <p:sp>
-        <p:nvSpPr>
-          <p:cNvPr id="5" name="Text 2"/>
-          <p:cNvSpPr/>
-          <p:nvPr/>
-        </p:nvSpPr>
-        <p:spPr>
-          <a:xfrm>
-            <a:off x="441960" y="609600"/>
-            <a:ext cx="10165080" cy="433864"/>
-          </a:xfrm>
-          <a:prstGeom prst="rect">
-            <a:avLst/>
-          </a:prstGeom>
-          <a:noFill/>
-          <a:ln/>
-        </p:spPr>
-        <p:txBody>
-          <a:bodyPr wrap="none" lIns="0" tIns="0" rIns="0" bIns="0" rtlCol="0" anchor="t"/>
-          <a:lstStyle/>
-          <a:p>
-            <a:pPr algn="l" indent="0" marL="0" eaLnBrk="1" latinLnBrk="0" hangingPunct="1">
-              <a:lnSpc>
-                <a:spcPts val="3416"/>
-              </a:lnSpc>
-              <a:buNone/>
-            </a:pPr>
-            <a:r>
-              <a:rPr lang="zh-CN" altLang="en-US" sz="2800" b="1" dirty="0">
-                <a:solidFill>
-                  <a:srgbClr val="005B94"/>
-                </a:solidFill>
-                <a:latin typeface="Microsoft YaHei" pitchFamily="34" charset="0"/>
-                <a:ea typeface="Microsoft YaHei" pitchFamily="34" charset="-122"/>
-                <a:cs typeface="Microsoft YaHei" pitchFamily="34" charset="-120"/>
-              </a:rPr>
-              <a:t>目标函数与参数更新</a:t>
-            </a:r>
-            <a:endParaRPr lang="zh-CN" sz="2800" dirty="0"/>
+                <a:spcPts val="2340"/>
+              </a:lnSpc>
+              <a:buNone/>
+            </a:pPr>
+            <a:r>
+              <a:rPr lang="zh-CN" altLang="en-US" sz="1800" b="1" dirty="0">
+                <a:solidFill>
+                  <a:srgbClr val="FFFFFF"/>
+                </a:solidFill>
+                <a:latin typeface="Microsoft YaHei" pitchFamily="34" charset="0"/>
+                <a:ea typeface="Microsoft YaHei" pitchFamily="34" charset="-122"/>
+                <a:cs typeface="Microsoft YaHei" pitchFamily="34" charset="-120"/>
+              </a:rPr>
+              <a:t>带正则项的平方误差目标</a:t>
+            </a:r>
+            <a:endParaRPr lang="zh-CN" sz="1800" dirty="0"/>
           </a:p>
         </p:txBody>
       </p:sp>
       <p:pic>
         <p:nvPicPr>
-          <p:cNvPr id="6" name="Image 1" descr="preencoded.png">    </p:cNvPr>
+          <p:cNvPr id="14" name="Image 1" descr="preencoded.png">    </p:cNvPr>
           <p:cNvPicPr>
             <a:picLocks noChangeAspect="1"/>
           </p:cNvPicPr>
@@ -20049,8 +20295,8 @@
         </p:blipFill>
         <p:spPr>
           <a:xfrm>
-            <a:off x="10835640" y="201930"/>
-            <a:ext cx="914400" cy="914400"/>
+            <a:off x="441960" y="2491740"/>
+            <a:ext cx="6873240" cy="787598"/>
           </a:xfrm>
           <a:prstGeom prst="rect">
             <a:avLst/>
@@ -20059,14 +20305,152 @@
       </p:pic>
       <p:sp>
         <p:nvSpPr>
-          <p:cNvPr id="7" name="Text 3"/>
-          <p:cNvSpPr/>
-          <p:nvPr/>
-        </p:nvSpPr>
-        <p:spPr>
-          <a:xfrm>
-            <a:off x="441960" y="1463040"/>
-            <a:ext cx="11308080" cy="314920"/>
+          <p:cNvPr id="15" name="Text 11"/>
+          <p:cNvSpPr/>
+          <p:nvPr/>
+        </p:nvSpPr>
+        <p:spPr>
+          <a:xfrm>
+            <a:off x="594360" y="3370778"/>
+            <a:ext cx="6568440" cy="294680"/>
+          </a:xfrm>
+          <a:prstGeom prst="rect">
+            <a:avLst/>
+          </a:prstGeom>
+          <a:noFill/>
+          <a:ln/>
+        </p:spPr>
+        <p:txBody>
+          <a:bodyPr wrap="none" lIns="0" tIns="0" rIns="0" bIns="0" rtlCol="0" anchor="t"/>
+          <a:lstStyle/>
+          <a:p>
+            <a:pPr algn="just" indent="0" marL="0" eaLnBrk="1" latinLnBrk="0" hangingPunct="1">
+              <a:lnSpc>
+                <a:spcPts val="2320"/>
+              </a:lnSpc>
+              <a:buNone/>
+            </a:pPr>
+            <a:r>
+              <a:rPr lang="zh-CN" altLang="en-US" sz="1600" dirty="0">
+                <a:solidFill>
+                  <a:srgbClr val="000000"/>
+                </a:solidFill>
+                <a:latin typeface="Microsoft YaHei" pitchFamily="34" charset="0"/>
+                <a:ea typeface="Microsoft YaHei" pitchFamily="34" charset="-122"/>
+                <a:cs typeface="Microsoft YaHei" pitchFamily="34" charset="-120"/>
+              </a:rPr>
+              <a:t>平方误差衡量拟合偏差，L2 正则项约束参数规模。</a:t>
+            </a:r>
+            <a:endParaRPr lang="zh-CN" sz="1600" dirty="0"/>
+          </a:p>
+        </p:txBody>
+      </p:sp>
+      <p:sp>
+        <p:nvSpPr>
+          <p:cNvPr id="16" name="Text 12"/>
+          <p:cNvSpPr/>
+          <p:nvPr/>
+        </p:nvSpPr>
+        <p:spPr>
+          <a:xfrm>
+            <a:off x="594360" y="3741658"/>
+            <a:ext cx="6568440" cy="294680"/>
+          </a:xfrm>
+          <a:prstGeom prst="rect">
+            <a:avLst/>
+          </a:prstGeom>
+          <a:noFill/>
+          <a:ln/>
+        </p:spPr>
+        <p:txBody>
+          <a:bodyPr wrap="none" lIns="0" tIns="0" rIns="0" bIns="0" rtlCol="0" anchor="t"/>
+          <a:lstStyle/>
+          <a:p>
+            <a:pPr algn="just" indent="0" marL="0" eaLnBrk="1" latinLnBrk="0" hangingPunct="1">
+              <a:lnSpc>
+                <a:spcPts val="2320"/>
+              </a:lnSpc>
+              <a:buNone/>
+            </a:pPr>
+            <a:r>
+              <a:rPr lang="zh-CN" altLang="en-US" sz="1600" dirty="0">
+                <a:solidFill>
+                  <a:srgbClr val="000000"/>
+                </a:solidFill>
+                <a:latin typeface="Microsoft YaHei" pitchFamily="34" charset="0"/>
+                <a:ea typeface="Microsoft YaHei" pitchFamily="34" charset="-122"/>
+                <a:cs typeface="Microsoft YaHei" pitchFamily="34" charset="-120"/>
+              </a:rPr>
+              <a:t>本式将全部参数纳入正则化。</a:t>
+            </a:r>
+            <a:endParaRPr lang="zh-CN" sz="1600" dirty="0"/>
+          </a:p>
+        </p:txBody>
+      </p:sp>
+      <p:sp>
+        <p:nvSpPr>
+          <p:cNvPr id="17" name="Shape 13"/>
+          <p:cNvSpPr/>
+          <p:nvPr/>
+        </p:nvSpPr>
+        <p:spPr>
+          <a:xfrm>
+            <a:off x="441960" y="4234458"/>
+            <a:ext cx="6873240" cy="1937742"/>
+          </a:xfrm>
+          <a:prstGeom prst="rect">
+            <a:avLst/>
+          </a:prstGeom>
+          <a:solidFill>
+            <a:srgbClr val="EEF5F9"/>
+          </a:solidFill>
+          <a:ln w="12700">
+            <a:solidFill>
+              <a:srgbClr val="EEF5F9">
+                <a:alpha val="0"/>
+              </a:srgbClr>
+            </a:solidFill>
+            <a:prstDash val="solid"/>
+          </a:ln>
+        </p:spPr>
+      </p:sp>
+      <p:sp>
+        <p:nvSpPr>
+          <p:cNvPr id="18" name="Shape 14"/>
+          <p:cNvSpPr/>
+          <p:nvPr/>
+        </p:nvSpPr>
+        <p:spPr>
+          <a:xfrm>
+            <a:off x="441960" y="4234458"/>
+            <a:ext cx="6873240" cy="449580"/>
+          </a:xfrm>
+          <a:prstGeom prst="rect">
+            <a:avLst/>
+          </a:prstGeom>
+          <a:solidFill>
+            <a:srgbClr val="005B94"/>
+          </a:solidFill>
+          <a:ln w="12700">
+            <a:solidFill>
+              <a:srgbClr val="005B94">
+                <a:alpha val="0"/>
+              </a:srgbClr>
+            </a:solidFill>
+            <a:prstDash val="solid"/>
+          </a:ln>
+        </p:spPr>
+      </p:sp>
+      <p:sp>
+        <p:nvSpPr>
+          <p:cNvPr id="19" name="Text 15"/>
+          <p:cNvSpPr/>
+          <p:nvPr/>
+        </p:nvSpPr>
+        <p:spPr>
+          <a:xfrm>
+            <a:off x="594360" y="4310658"/>
+            <a:ext cx="6568440" cy="297180"/>
           </a:xfrm>
           <a:prstGeom prst="rect">
             <a:avLst/>
@@ -20080,48 +20464,6 @@
           <a:p>
             <a:pPr algn="l" indent="0" marL="0" eaLnBrk="1" latinLnBrk="0" hangingPunct="1">
               <a:lnSpc>
-                <a:spcPts val="2480"/>
-              </a:lnSpc>
-              <a:buNone/>
-            </a:pPr>
-            <a:r>
-              <a:rPr lang="zh-CN" altLang="en-US" sz="1600" dirty="0">
-                <a:solidFill>
-                  <a:srgbClr val="12374E"/>
-                </a:solidFill>
-                <a:latin typeface="Microsoft YaHei" pitchFamily="34" charset="0"/>
-                <a:ea typeface="Microsoft YaHei" pitchFamily="34" charset="-122"/>
-                <a:cs typeface="Microsoft YaHei" pitchFamily="34" charset="-120"/>
-              </a:rPr>
-              <a:t>以带 L2 正则项的线性回归为例，先给出优化目标，再说明参数更新与各符号含义。</a:t>
-            </a:r>
-            <a:endParaRPr lang="zh-CN" sz="1600" dirty="0"/>
-          </a:p>
-        </p:txBody>
-      </p:sp>
-      <p:sp>
-        <p:nvSpPr>
-          <p:cNvPr id="8" name="Text 4"/>
-          <p:cNvSpPr/>
-          <p:nvPr/>
-        </p:nvSpPr>
-        <p:spPr>
-          <a:xfrm>
-            <a:off x="609600" y="2021800"/>
-            <a:ext cx="6534745" cy="297180"/>
-          </a:xfrm>
-          <a:prstGeom prst="rect">
-            <a:avLst/>
-          </a:prstGeom>
-          <a:noFill/>
-          <a:ln/>
-        </p:spPr>
-        <p:txBody>
-          <a:bodyPr wrap="none" lIns="0" tIns="0" rIns="0" bIns="0" rtlCol="0" anchor="t"/>
-          <a:lstStyle/>
-          <a:p>
-            <a:pPr algn="l" indent="0" marL="0" eaLnBrk="1" latinLnBrk="0" hangingPunct="1">
-              <a:lnSpc>
                 <a:spcPts val="2340"/>
               </a:lnSpc>
               <a:buNone/>
@@ -20135,7 +20477,7 @@
                 <a:ea typeface="Microsoft YaHei" pitchFamily="34" charset="-122"/>
                 <a:cs typeface="Microsoft YaHei" pitchFamily="34" charset="-120"/>
               </a:rPr>
-              <a:t>带正则项的平方误差目标</a:t>
+              <a:t>梯度下降更新</a:t>
             </a:r>
             <a:endParaRPr lang="zh-CN" sz="1800" dirty="0"/>
           </a:p>
@@ -20143,7 +20485,7 @@
       </p:sp>
       <p:pic>
         <p:nvPicPr>
-          <p:cNvPr id="9" name="Image 2" descr="preencoded.png">    </p:cNvPr>
+          <p:cNvPr id="20" name="Image 2" descr="preencoded.png">    </p:cNvPr>
           <p:cNvPicPr>
             <a:picLocks noChangeAspect="1"/>
           </p:cNvPicPr>
@@ -20157,8 +20499,8 @@
         </p:blipFill>
         <p:spPr>
           <a:xfrm>
-            <a:off x="2062520" y="2562820"/>
-            <a:ext cx="3141107" cy="629245"/>
+            <a:off x="441960" y="4775478"/>
+            <a:ext cx="6873240" cy="596265"/>
           </a:xfrm>
           <a:prstGeom prst="rect">
             <a:avLst/>
@@ -20167,89 +20509,138 @@
       </p:pic>
       <p:sp>
         <p:nvSpPr>
-          <p:cNvPr id="10" name="Text 5"/>
-          <p:cNvSpPr/>
-          <p:nvPr/>
-        </p:nvSpPr>
-        <p:spPr>
-          <a:xfrm>
-            <a:off x="617220" y="3344466"/>
-            <a:ext cx="6570305" cy="609600"/>
-          </a:xfrm>
-          <a:prstGeom prst="rect">
-            <a:avLst/>
-          </a:prstGeom>
-          <a:noFill/>
-          <a:ln/>
-        </p:spPr>
-        <p:txBody>
-          <a:bodyPr wrap="square" lIns="0" tIns="0" rIns="0" bIns="0" rtlCol="0" anchor="t"/>
+          <p:cNvPr id="21" name="Text 16"/>
+          <p:cNvSpPr/>
+          <p:nvPr/>
+        </p:nvSpPr>
+        <p:spPr>
+          <a:xfrm>
+            <a:off x="594360" y="5463183"/>
+            <a:ext cx="6568440" cy="294680"/>
+          </a:xfrm>
+          <a:prstGeom prst="rect">
+            <a:avLst/>
+          </a:prstGeom>
+          <a:noFill/>
+          <a:ln/>
+        </p:spPr>
+        <p:txBody>
+          <a:bodyPr wrap="none" lIns="0" tIns="0" rIns="0" bIns="0" rtlCol="0" anchor="t"/>
+          <a:lstStyle/>
+          <a:p>
+            <a:pPr algn="just" indent="0" marL="0" eaLnBrk="1" latinLnBrk="0" hangingPunct="1">
+              <a:lnSpc>
+                <a:spcPts val="2320"/>
+              </a:lnSpc>
+              <a:buNone/>
+            </a:pPr>
+            <a:r>
+              <a:rPr lang="zh-CN" altLang="en-US" sz="1600" dirty="0">
+                <a:solidFill>
+                  <a:srgbClr val="000000"/>
+                </a:solidFill>
+                <a:latin typeface="Microsoft YaHei" pitchFamily="34" charset="0"/>
+                <a:ea typeface="Microsoft YaHei" pitchFamily="34" charset="-122"/>
+                <a:cs typeface="Microsoft YaHei" pitchFamily="34" charset="-120"/>
+              </a:rPr>
+              <a:t>每轮用当前参数计算梯度，再沿负梯度方向更新。</a:t>
+            </a:r>
+            <a:endParaRPr lang="zh-CN" sz="1600" dirty="0"/>
+          </a:p>
+        </p:txBody>
+      </p:sp>
+      <p:sp>
+        <p:nvSpPr>
+          <p:cNvPr id="22" name="Text 17"/>
+          <p:cNvSpPr/>
+          <p:nvPr/>
+        </p:nvSpPr>
+        <p:spPr>
+          <a:xfrm>
+            <a:off x="594360" y="5834063"/>
+            <a:ext cx="6568440" cy="294680"/>
+          </a:xfrm>
+          <a:prstGeom prst="rect">
+            <a:avLst/>
+          </a:prstGeom>
+          <a:noFill/>
+          <a:ln/>
+        </p:spPr>
+        <p:txBody>
+          <a:bodyPr wrap="none" lIns="0" tIns="0" rIns="0" bIns="0" rtlCol="0" anchor="t"/>
+          <a:lstStyle/>
+          <a:p>
+            <a:pPr algn="just" indent="0" marL="0" eaLnBrk="1" latinLnBrk="0" hangingPunct="1">
+              <a:lnSpc>
+                <a:spcPts val="2320"/>
+              </a:lnSpc>
+              <a:buNone/>
+            </a:pPr>
+            <a:r>
+              <a:rPr lang="zh-CN" altLang="en-US" sz="1600" dirty="0">
+                <a:solidFill>
+                  <a:srgbClr val="000000"/>
+                </a:solidFill>
+                <a:latin typeface="Microsoft YaHei" pitchFamily="34" charset="0"/>
+                <a:ea typeface="Microsoft YaHei" pitchFamily="34" charset="-122"/>
+                <a:cs typeface="Microsoft YaHei" pitchFamily="34" charset="-120"/>
+              </a:rPr>
+              <a:t>学习率 α 控制步长，停止条件由实验设定。</a:t>
+            </a:r>
+            <a:endParaRPr lang="zh-CN" sz="1600" dirty="0"/>
+          </a:p>
+        </p:txBody>
+      </p:sp>
+      <p:sp>
+        <p:nvSpPr>
+          <p:cNvPr id="23" name="Shape 18"/>
+          <p:cNvSpPr/>
+          <p:nvPr/>
+        </p:nvSpPr>
+        <p:spPr>
+          <a:xfrm>
+            <a:off x="7589520" y="1950720"/>
+            <a:ext cx="4160520" cy="2286000"/>
+          </a:xfrm>
+          <a:prstGeom prst="rect">
+            <a:avLst/>
+          </a:prstGeom>
+          <a:solidFill>
+            <a:srgbClr val="FFFFFF"/>
+          </a:solidFill>
+          <a:ln w="12700">
+            <a:solidFill>
+              <a:srgbClr val="FFFFFF">
+                <a:alpha val="0"/>
+              </a:srgbClr>
+            </a:solidFill>
+            <a:prstDash val="solid"/>
+          </a:ln>
+        </p:spPr>
+      </p:sp>
+      <p:sp>
+        <p:nvSpPr>
+          <p:cNvPr id="24" name="Text 19"/>
+          <p:cNvSpPr/>
+          <p:nvPr/>
+        </p:nvSpPr>
+        <p:spPr>
+          <a:xfrm>
+            <a:off x="7711440" y="1950720"/>
+            <a:ext cx="3916680" cy="297180"/>
+          </a:xfrm>
+          <a:prstGeom prst="rect">
+            <a:avLst/>
+          </a:prstGeom>
+          <a:noFill/>
+          <a:ln/>
+        </p:spPr>
+        <p:txBody>
+          <a:bodyPr wrap="none" lIns="0" tIns="0" rIns="0" bIns="0" rtlCol="0" anchor="t"/>
           <a:lstStyle/>
           <a:p>
             <a:pPr algn="l" indent="0" marL="0" eaLnBrk="1" latinLnBrk="0" hangingPunct="1">
               <a:lnSpc>
-                <a:spcPts val="2400"/>
-              </a:lnSpc>
-              <a:buNone/>
-            </a:pPr>
-            <a:r>
-              <a:rPr lang="zh-CN" altLang="en-US" sz="1600" dirty="0">
-                <a:solidFill>
-                  <a:srgbClr val="12374E"/>
-                </a:solidFill>
-                <a:latin typeface="Microsoft YaHei" pitchFamily="34" charset="0"/>
-                <a:ea typeface="Microsoft YaHei" pitchFamily="34" charset="-122"/>
-                <a:cs typeface="Microsoft YaHei" pitchFamily="34" charset="-120"/>
-              </a:rPr>
-              <a:t>平方误差衡量拟合偏差，L2 正则项约束参数规模。</a:t>
-            </a:r>
-            <a:endParaRPr lang="zh-CN" sz="1600" dirty="0"/>
-          </a:p>
-          <a:p>
-            <a:pPr algn="l" indent="0" marL="0" eaLnBrk="1" latinLnBrk="0" hangingPunct="1">
-              <a:lnSpc>
-                <a:spcPts val="2400"/>
-              </a:lnSpc>
-              <a:buNone/>
-            </a:pPr>
-            <a:r>
-              <a:rPr lang="zh-CN" altLang="en-US" sz="1600" dirty="0">
-                <a:solidFill>
-                  <a:srgbClr val="12374E"/>
-                </a:solidFill>
-                <a:latin typeface="Microsoft YaHei" pitchFamily="34" charset="0"/>
-                <a:ea typeface="Microsoft YaHei" pitchFamily="34" charset="-122"/>
-                <a:cs typeface="Microsoft YaHei" pitchFamily="34" charset="-120"/>
-              </a:rPr>
-              <a:t>本式将全部参数纳入正则化。</a:t>
-            </a:r>
-            <a:endParaRPr lang="zh-CN" sz="1600" dirty="0"/>
-          </a:p>
-        </p:txBody>
-      </p:sp>
-      <p:sp>
-        <p:nvSpPr>
-          <p:cNvPr id="11" name="Text 6"/>
-          <p:cNvSpPr/>
-          <p:nvPr/>
-        </p:nvSpPr>
-        <p:spPr>
-          <a:xfrm>
-            <a:off x="609600" y="4308277"/>
-            <a:ext cx="6534745" cy="297180"/>
-          </a:xfrm>
-          <a:prstGeom prst="rect">
-            <a:avLst/>
-          </a:prstGeom>
-          <a:noFill/>
-          <a:ln/>
-        </p:spPr>
-        <p:txBody>
-          <a:bodyPr wrap="none" lIns="0" tIns="0" rIns="0" bIns="0" rtlCol="0" anchor="t"/>
-          <a:lstStyle/>
-          <a:p>
-            <a:pPr algn="l" indent="0" marL="0" eaLnBrk="1" latinLnBrk="0" hangingPunct="1">
-              <a:lnSpc>
                 <a:spcPts val="2340"/>
               </a:lnSpc>
               <a:buNone/>
@@ -20257,21 +20648,48 @@
             <a:r>
               <a:rPr lang="zh-CN" altLang="en-US" sz="1800" b="1" dirty="0">
                 <a:solidFill>
-                  <a:srgbClr val="FFFFFF"/>
-                </a:solidFill>
-                <a:latin typeface="Microsoft YaHei" pitchFamily="34" charset="0"/>
-                <a:ea typeface="Microsoft YaHei" pitchFamily="34" charset="-122"/>
-                <a:cs typeface="Microsoft YaHei" pitchFamily="34" charset="-120"/>
-              </a:rPr>
-              <a:t>梯度下降更新</a:t>
+                  <a:srgbClr val="005B94"/>
+                </a:solidFill>
+                <a:latin typeface="Microsoft YaHei" pitchFamily="34" charset="0"/>
+                <a:ea typeface="Microsoft YaHei" pitchFamily="34" charset="-122"/>
+                <a:cs typeface="Microsoft YaHei" pitchFamily="34" charset="-120"/>
+              </a:rPr>
+              <a:t>符号说明</a:t>
             </a:r>
             <a:endParaRPr lang="zh-CN" sz="1800" dirty="0"/>
           </a:p>
         </p:txBody>
+      </p:sp>
+      <p:sp>
+        <p:nvSpPr>
+          <p:cNvPr id="25" name="Shape 20"/>
+          <p:cNvSpPr/>
+          <p:nvPr/>
+        </p:nvSpPr>
+        <p:spPr>
+          <a:xfrm>
+            <a:off x="7589520" y="2324100"/>
+            <a:ext cx="832009" cy="291822"/>
+          </a:xfrm>
+          <a:prstGeom prst="rect">
+            <a:avLst/>
+          </a:prstGeom>
+          <a:solidFill>
+            <a:srgbClr val="FFFFFF"/>
+          </a:solidFill>
+          <a:ln w="12700">
+            <a:solidFill>
+              <a:srgbClr val="FFFFFF">
+                <a:alpha val="0"/>
+              </a:srgbClr>
+            </a:solidFill>
+            <a:prstDash val="solid"/>
+          </a:ln>
+        </p:spPr>
       </p:sp>
       <p:pic>
         <p:nvPicPr>
-          <p:cNvPr id="12" name="Image 3" descr="preencoded.png">    </p:cNvPr>
+          <p:cNvPr id="26" name="Image 3" descr="preencoded.png">    </p:cNvPr>
           <p:cNvPicPr>
             <a:picLocks noChangeAspect="1"/>
           </p:cNvPicPr>
@@ -20285,8 +20703,8 @@
         </p:blipFill>
         <p:spPr>
           <a:xfrm>
-            <a:off x="2787848" y="5022890"/>
-            <a:ext cx="1690449" cy="188119"/>
+            <a:off x="7711440" y="2336721"/>
+            <a:ext cx="156091" cy="266581"/>
           </a:xfrm>
           <a:prstGeom prst="rect">
             <a:avLst/>
@@ -20295,136 +20713,103 @@
       </p:pic>
       <p:sp>
         <p:nvSpPr>
-          <p:cNvPr id="13" name="Text 7"/>
-          <p:cNvSpPr/>
-          <p:nvPr/>
-        </p:nvSpPr>
-        <p:spPr>
-          <a:xfrm>
-            <a:off x="617220" y="5489377"/>
-            <a:ext cx="6570305" cy="632460"/>
-          </a:xfrm>
-          <a:prstGeom prst="rect">
-            <a:avLst/>
-          </a:prstGeom>
-          <a:noFill/>
-          <a:ln/>
-        </p:spPr>
-        <p:txBody>
-          <a:bodyPr wrap="square" lIns="0" tIns="0" rIns="0" bIns="0" rtlCol="0" anchor="t"/>
+          <p:cNvPr id="27" name="Shape 21"/>
+          <p:cNvSpPr/>
+          <p:nvPr/>
+        </p:nvSpPr>
+        <p:spPr>
+          <a:xfrm>
+            <a:off x="8421529" y="2324100"/>
+            <a:ext cx="3328511" cy="291822"/>
+          </a:xfrm>
+          <a:prstGeom prst="rect">
+            <a:avLst/>
+          </a:prstGeom>
+          <a:solidFill>
+            <a:srgbClr val="FFFFFF"/>
+          </a:solidFill>
+          <a:ln w="12700">
+            <a:solidFill>
+              <a:srgbClr val="FFFFFF">
+                <a:alpha val="0"/>
+              </a:srgbClr>
+            </a:solidFill>
+            <a:prstDash val="solid"/>
+          </a:ln>
+        </p:spPr>
+      </p:sp>
+      <p:sp>
+        <p:nvSpPr>
+          <p:cNvPr id="28" name="Text 22"/>
+          <p:cNvSpPr/>
+          <p:nvPr/>
+        </p:nvSpPr>
+        <p:spPr>
+          <a:xfrm>
+            <a:off x="8543449" y="2336721"/>
+            <a:ext cx="3084671" cy="266581"/>
+          </a:xfrm>
+          <a:prstGeom prst="rect">
+            <a:avLst/>
+          </a:prstGeom>
+          <a:noFill/>
+          <a:ln/>
+        </p:spPr>
+        <p:txBody>
+          <a:bodyPr wrap="none" lIns="0" tIns="0" rIns="0" bIns="0" rtlCol="0" anchor="t"/>
           <a:lstStyle/>
           <a:p>
             <a:pPr algn="l" indent="0" marL="0" eaLnBrk="1" latinLnBrk="0" hangingPunct="1">
               <a:lnSpc>
-                <a:spcPts val="2400"/>
-              </a:lnSpc>
-              <a:buNone/>
-            </a:pPr>
-            <a:r>
-              <a:rPr lang="zh-CN" altLang="en-US" sz="1600" dirty="0">
-                <a:solidFill>
-                  <a:srgbClr val="12374E"/>
-                </a:solidFill>
-                <a:latin typeface="Microsoft YaHei" pitchFamily="34" charset="0"/>
-                <a:ea typeface="Microsoft YaHei" pitchFamily="34" charset="-122"/>
-                <a:cs typeface="Microsoft YaHei" pitchFamily="34" charset="-120"/>
-              </a:rPr>
-              <a:t>每轮用当前参数计算梯度，再沿负梯度方向更新。</a:t>
-            </a:r>
-            <a:r>
-              <a:rPr lang="zh-CN" altLang="en-US" sz="1600" dirty="0">
-                <a:solidFill>
-                  <a:srgbClr val="12374E"/>
-                </a:solidFill>
-                <a:latin typeface="Microsoft YaHei" pitchFamily="34" charset="0"/>
-                <a:ea typeface="Microsoft YaHei" pitchFamily="34" charset="-122"/>
-                <a:cs typeface="Microsoft YaHei" pitchFamily="34" charset="-120"/>
-              </a:rPr>
-              <a:t>
-</a:t>
-            </a:r>
-            <a:r>
-              <a:rPr lang="zh-CN" altLang="en-US" sz="1600" dirty="0">
-                <a:solidFill>
-                  <a:srgbClr val="12374E"/>
-                </a:solidFill>
-                <a:latin typeface="Microsoft YaHei" pitchFamily="34" charset="0"/>
-                <a:ea typeface="Microsoft YaHei" pitchFamily="34" charset="-122"/>
-                <a:cs typeface="Microsoft YaHei" pitchFamily="34" charset="-120"/>
-              </a:rPr>
-              <a:t>学习率 </a:t>
-            </a:r>
-            <a:r>
-              <a:rPr lang="zh-CN" altLang="en-US" sz="1600" i="1" dirty="0">
-                <a:solidFill>
-                  <a:srgbClr val="12374E"/>
-                </a:solidFill>
-                <a:latin typeface="Cambria Math" pitchFamily="34" charset="0"/>
-                <a:ea typeface="Cambria Math" pitchFamily="34" charset="-122"/>
-                <a:cs typeface="Cambria Math" pitchFamily="34" charset="-120"/>
-              </a:rPr>
-              <a:t>α</a:t>
-            </a:r>
-            <a:r>
-              <a:rPr lang="zh-CN" altLang="en-US" sz="1600" dirty="0">
-                <a:solidFill>
-                  <a:srgbClr val="12374E"/>
-                </a:solidFill>
-                <a:latin typeface="Microsoft YaHei" pitchFamily="34" charset="0"/>
-                <a:ea typeface="Microsoft YaHei" pitchFamily="34" charset="-122"/>
-                <a:cs typeface="Microsoft YaHei" pitchFamily="34" charset="-120"/>
-              </a:rPr>
-              <a:t> 控制步长，停止条件由实验设定。</a:t>
-            </a:r>
-            <a:endParaRPr lang="zh-CN" sz="1600" dirty="0"/>
-          </a:p>
-        </p:txBody>
-      </p:sp>
-      <p:sp>
-        <p:nvSpPr>
-          <p:cNvPr id="14" name="Text 8"/>
-          <p:cNvSpPr/>
-          <p:nvPr/>
-        </p:nvSpPr>
-        <p:spPr>
-          <a:xfrm>
-            <a:off x="7853005" y="1945600"/>
-            <a:ext cx="3897035" cy="330041"/>
-          </a:xfrm>
-          <a:prstGeom prst="rect">
-            <a:avLst/>
-          </a:prstGeom>
-          <a:noFill/>
-          <a:ln/>
-        </p:spPr>
-        <p:txBody>
-          <a:bodyPr wrap="none" lIns="0" tIns="0" rIns="0" bIns="0" rtlCol="0" anchor="t"/>
-          <a:lstStyle/>
-          <a:p>
-            <a:pPr algn="l" indent="0" marL="0" eaLnBrk="1" latinLnBrk="0" hangingPunct="1">
-              <a:lnSpc>
-                <a:spcPts val="2600"/>
-              </a:lnSpc>
-              <a:buNone/>
-            </a:pPr>
-            <a:r>
-              <a:rPr lang="zh-CN" altLang="en-US" sz="2000" b="1" dirty="0">
-                <a:solidFill>
-                  <a:srgbClr val="005B94"/>
-                </a:solidFill>
-                <a:latin typeface="Microsoft YaHei" pitchFamily="34" charset="0"/>
-                <a:ea typeface="Microsoft YaHei" pitchFamily="34" charset="-122"/>
-                <a:cs typeface="Microsoft YaHei" pitchFamily="34" charset="-120"/>
-              </a:rPr>
-              <a:t>符号说明</a:t>
-            </a:r>
-            <a:endParaRPr lang="zh-CN" sz="2000" dirty="0"/>
-          </a:p>
-        </p:txBody>
+                <a:spcPts val="2100"/>
+              </a:lnSpc>
+              <a:buNone/>
+            </a:pPr>
+            <a:r>
+              <a:rPr lang="zh-CN" altLang="en-US" sz="1400" dirty="0">
+                <a:solidFill>
+                  <a:srgbClr val="000000"/>
+                </a:solidFill>
+                <a:latin typeface="Microsoft YaHei" pitchFamily="34" charset="0"/>
+                <a:ea typeface="Microsoft YaHei" pitchFamily="34" charset="-122"/>
+                <a:cs typeface="Microsoft YaHei" pitchFamily="34" charset="-120"/>
+              </a:rPr>
+              <a:t>训练样本数，用于误差项归一化</a:t>
+            </a:r>
+            <a:endParaRPr lang="zh-CN" sz="1400" dirty="0"/>
+          </a:p>
+        </p:txBody>
+      </p:sp>
+      <p:sp>
+        <p:nvSpPr>
+          <p:cNvPr id="29" name="Shape 23"/>
+          <p:cNvSpPr/>
+          <p:nvPr/>
+        </p:nvSpPr>
+        <p:spPr>
+          <a:xfrm>
+            <a:off x="7589520" y="2615922"/>
+            <a:ext cx="832009" cy="291822"/>
+          </a:xfrm>
+          <a:prstGeom prst="rect">
+            <a:avLst/>
+          </a:prstGeom>
+          <a:solidFill>
+            <a:srgbClr val="FFFFFF"/>
+          </a:solidFill>
+          <a:ln w="12700">
+            <a:solidFill>
+              <a:srgbClr val="FFFFFF">
+                <a:alpha val="0"/>
+              </a:srgbClr>
+            </a:solidFill>
+            <a:prstDash val="solid"/>
+          </a:ln>
+        </p:spPr>
       </p:sp>
       <p:pic>
         <p:nvPicPr>
-          <p:cNvPr id="15" name="Image 4" descr="preencoded.png">    </p:cNvPr>
+          <p:cNvPr id="30" name="Image 4" descr="preencoded.png">    </p:cNvPr>
           <p:cNvPicPr>
             <a:picLocks noChangeAspect="1"/>
           </p:cNvPicPr>
@@ -20438,8 +20823,8 @@
         </p:blipFill>
         <p:spPr>
           <a:xfrm>
-            <a:off x="7853005" y="2438281"/>
-            <a:ext cx="165497" cy="98108"/>
+            <a:off x="7711440" y="2628543"/>
+            <a:ext cx="401122" cy="266581"/>
           </a:xfrm>
           <a:prstGeom prst="rect">
             <a:avLst/>
@@ -20448,14 +20833,41 @@
       </p:pic>
       <p:sp>
         <p:nvSpPr>
-          <p:cNvPr id="16" name="Text 9"/>
-          <p:cNvSpPr/>
-          <p:nvPr/>
-        </p:nvSpPr>
-        <p:spPr>
-          <a:xfrm>
-            <a:off x="8660725" y="2367082"/>
-            <a:ext cx="3089315" cy="223480"/>
+          <p:cNvPr id="31" name="Shape 24"/>
+          <p:cNvSpPr/>
+          <p:nvPr/>
+        </p:nvSpPr>
+        <p:spPr>
+          <a:xfrm>
+            <a:off x="8421529" y="2615922"/>
+            <a:ext cx="3328511" cy="291822"/>
+          </a:xfrm>
+          <a:prstGeom prst="rect">
+            <a:avLst/>
+          </a:prstGeom>
+          <a:solidFill>
+            <a:srgbClr val="FFFFFF"/>
+          </a:solidFill>
+          <a:ln w="12700">
+            <a:solidFill>
+              <a:srgbClr val="FFFFFF">
+                <a:alpha val="0"/>
+              </a:srgbClr>
+            </a:solidFill>
+            <a:prstDash val="solid"/>
+          </a:ln>
+        </p:spPr>
+      </p:sp>
+      <p:sp>
+        <p:nvSpPr>
+          <p:cNvPr id="32" name="Text 25"/>
+          <p:cNvSpPr/>
+          <p:nvPr/>
+        </p:nvSpPr>
+        <p:spPr>
+          <a:xfrm>
+            <a:off x="8543449" y="2628543"/>
+            <a:ext cx="3084671" cy="266581"/>
           </a:xfrm>
           <a:prstGeom prst="rect">
             <a:avLst/>
@@ -20469,28 +20881,55 @@
           <a:p>
             <a:pPr algn="l" indent="0" marL="0" eaLnBrk="1" latinLnBrk="0" hangingPunct="1">
               <a:lnSpc>
-                <a:spcPts val="1680"/>
-              </a:lnSpc>
-              <a:buNone/>
-            </a:pPr>
-            <a:r>
-              <a:rPr lang="zh-CN" altLang="en-US" sz="1200" dirty="0">
-                <a:solidFill>
-                  <a:srgbClr val="526B7D"/>
-                </a:solidFill>
-                <a:latin typeface="Microsoft YaHei" pitchFamily="34" charset="0"/>
-                <a:ea typeface="Microsoft YaHei" pitchFamily="34" charset="-122"/>
-                <a:cs typeface="Microsoft YaHei" pitchFamily="34" charset="-120"/>
-              </a:rPr>
-              <a:t>训练样本数，用于误差项归一化</a:t>
-            </a:r>
-            <a:endParaRPr lang="zh-CN" sz="1200" dirty="0"/>
-          </a:p>
-        </p:txBody>
+                <a:spcPts val="2100"/>
+              </a:lnSpc>
+              <a:buNone/>
+            </a:pPr>
+            <a:r>
+              <a:rPr lang="zh-CN" altLang="en-US" sz="1400" dirty="0">
+                <a:solidFill>
+                  <a:srgbClr val="000000"/>
+                </a:solidFill>
+                <a:latin typeface="Microsoft YaHei" pitchFamily="34" charset="0"/>
+                <a:ea typeface="Microsoft YaHei" pitchFamily="34" charset="-122"/>
+                <a:cs typeface="Microsoft YaHei" pitchFamily="34" charset="-120"/>
+              </a:rPr>
+              <a:t>第 i 个输入样本与对应的目标值</a:t>
+            </a:r>
+            <a:endParaRPr lang="zh-CN" sz="1400" dirty="0"/>
+          </a:p>
+        </p:txBody>
+      </p:sp>
+      <p:sp>
+        <p:nvSpPr>
+          <p:cNvPr id="33" name="Shape 26"/>
+          <p:cNvSpPr/>
+          <p:nvPr/>
+        </p:nvSpPr>
+        <p:spPr>
+          <a:xfrm>
+            <a:off x="7589520" y="2907744"/>
+            <a:ext cx="832009" cy="291822"/>
+          </a:xfrm>
+          <a:prstGeom prst="rect">
+            <a:avLst/>
+          </a:prstGeom>
+          <a:solidFill>
+            <a:srgbClr val="FFFFFF"/>
+          </a:solidFill>
+          <a:ln w="12700">
+            <a:solidFill>
+              <a:srgbClr val="FFFFFF">
+                <a:alpha val="0"/>
+              </a:srgbClr>
+            </a:solidFill>
+            <a:prstDash val="solid"/>
+          </a:ln>
+        </p:spPr>
       </p:sp>
       <p:pic>
         <p:nvPicPr>
-          <p:cNvPr id="17" name="Image 5" descr="preencoded.png">    </p:cNvPr>
+          <p:cNvPr id="34" name="Image 5" descr="preencoded.png">    </p:cNvPr>
           <p:cNvPicPr>
             <a:picLocks noChangeAspect="1"/>
           </p:cNvPicPr>
@@ -20504,8 +20943,8 @@
         </p:blipFill>
         <p:spPr>
           <a:xfrm>
-            <a:off x="7853005" y="2701885"/>
-            <a:ext cx="424339" cy="139779"/>
+            <a:off x="7711440" y="2920365"/>
+            <a:ext cx="88344" cy="266581"/>
           </a:xfrm>
           <a:prstGeom prst="rect">
             <a:avLst/>
@@ -20514,14 +20953,41 @@
       </p:pic>
       <p:sp>
         <p:nvSpPr>
-          <p:cNvPr id="18" name="Text 10"/>
-          <p:cNvSpPr/>
-          <p:nvPr/>
-        </p:nvSpPr>
-        <p:spPr>
-          <a:xfrm>
-            <a:off x="8660725" y="2651522"/>
-            <a:ext cx="3089315" cy="228600"/>
+          <p:cNvPr id="35" name="Shape 27"/>
+          <p:cNvSpPr/>
+          <p:nvPr/>
+        </p:nvSpPr>
+        <p:spPr>
+          <a:xfrm>
+            <a:off x="8421529" y="2907744"/>
+            <a:ext cx="3328511" cy="291822"/>
+          </a:xfrm>
+          <a:prstGeom prst="rect">
+            <a:avLst/>
+          </a:prstGeom>
+          <a:solidFill>
+            <a:srgbClr val="FFFFFF"/>
+          </a:solidFill>
+          <a:ln w="12700">
+            <a:solidFill>
+              <a:srgbClr val="FFFFFF">
+                <a:alpha val="0"/>
+              </a:srgbClr>
+            </a:solidFill>
+            <a:prstDash val="solid"/>
+          </a:ln>
+        </p:spPr>
+      </p:sp>
+      <p:sp>
+        <p:nvSpPr>
+          <p:cNvPr id="36" name="Text 28"/>
+          <p:cNvSpPr/>
+          <p:nvPr/>
+        </p:nvSpPr>
+        <p:spPr>
+          <a:xfrm>
+            <a:off x="8543449" y="2920365"/>
+            <a:ext cx="3084671" cy="266581"/>
           </a:xfrm>
           <a:prstGeom prst="rect">
             <a:avLst/>
@@ -20535,50 +21001,55 @@
           <a:p>
             <a:pPr algn="l" indent="0" marL="0" eaLnBrk="1" latinLnBrk="0" hangingPunct="1">
               <a:lnSpc>
-                <a:spcPts val="1680"/>
-              </a:lnSpc>
-              <a:buNone/>
-            </a:pPr>
-            <a:r>
-              <a:rPr lang="zh-CN" altLang="en-US" sz="1200" dirty="0">
-                <a:solidFill>
-                  <a:srgbClr val="526B7D"/>
-                </a:solidFill>
-                <a:latin typeface="Microsoft YaHei" pitchFamily="34" charset="0"/>
-                <a:ea typeface="Microsoft YaHei" pitchFamily="34" charset="-122"/>
-                <a:cs typeface="Microsoft YaHei" pitchFamily="34" charset="-120"/>
-              </a:rPr>
-              <a:t>第 </a:t>
-            </a:r>
-            <a:r>
-              <a:rPr lang="zh-CN" altLang="en-US" sz="1200" i="1" dirty="0">
-                <a:solidFill>
-                  <a:srgbClr val="526B7D"/>
-                </a:solidFill>
-                <a:latin typeface="Cambria Math" pitchFamily="34" charset="0"/>
-                <a:ea typeface="Cambria Math" pitchFamily="34" charset="-122"/>
-                <a:cs typeface="Cambria Math" pitchFamily="34" charset="-120"/>
-              </a:rPr>
-              <a:t>i</a:t>
-            </a:r>
-            <a:r>
-              <a:rPr lang="zh-CN" altLang="en-US" sz="1200" dirty="0">
-                <a:solidFill>
-                  <a:srgbClr val="526B7D"/>
-                </a:solidFill>
-                <a:latin typeface="Microsoft YaHei" pitchFamily="34" charset="0"/>
-                <a:ea typeface="Microsoft YaHei" pitchFamily="34" charset="-122"/>
-                <a:cs typeface="Microsoft YaHei" pitchFamily="34" charset="-120"/>
-              </a:rPr>
-              <a:t> 个输入样本与对应的目标值</a:t>
-            </a:r>
-            <a:endParaRPr lang="zh-CN" sz="1200" dirty="0"/>
-          </a:p>
-        </p:txBody>
+                <a:spcPts val="2100"/>
+              </a:lnSpc>
+              <a:buNone/>
+            </a:pPr>
+            <a:r>
+              <a:rPr lang="zh-CN" altLang="en-US" sz="1400" dirty="0">
+                <a:solidFill>
+                  <a:srgbClr val="000000"/>
+                </a:solidFill>
+                <a:latin typeface="Microsoft YaHei" pitchFamily="34" charset="0"/>
+                <a:ea typeface="Microsoft YaHei" pitchFamily="34" charset="-122"/>
+                <a:cs typeface="Microsoft YaHei" pitchFamily="34" charset="-120"/>
+              </a:rPr>
+              <a:t>待优化的参数，与输入维度一致</a:t>
+            </a:r>
+            <a:endParaRPr lang="zh-CN" sz="1400" dirty="0"/>
+          </a:p>
+        </p:txBody>
+      </p:sp>
+      <p:sp>
+        <p:nvSpPr>
+          <p:cNvPr id="37" name="Shape 29"/>
+          <p:cNvSpPr/>
+          <p:nvPr/>
+        </p:nvSpPr>
+        <p:spPr>
+          <a:xfrm>
+            <a:off x="7589520" y="3199567"/>
+            <a:ext cx="832009" cy="291822"/>
+          </a:xfrm>
+          <a:prstGeom prst="rect">
+            <a:avLst/>
+          </a:prstGeom>
+          <a:solidFill>
+            <a:srgbClr val="FFFFFF"/>
+          </a:solidFill>
+          <a:ln w="12700">
+            <a:solidFill>
+              <a:srgbClr val="FFFFFF">
+                <a:alpha val="0"/>
+              </a:srgbClr>
+            </a:solidFill>
+            <a:prstDash val="solid"/>
+          </a:ln>
+        </p:spPr>
       </p:sp>
       <p:pic>
         <p:nvPicPr>
-          <p:cNvPr id="19" name="Image 6" descr="preencoded.png">    </p:cNvPr>
+          <p:cNvPr id="38" name="Image 6" descr="preencoded.png">    </p:cNvPr>
           <p:cNvPicPr>
             <a:picLocks noChangeAspect="1"/>
           </p:cNvPicPr>
@@ -20592,8 +21063,8 @@
         </p:blipFill>
         <p:spPr>
           <a:xfrm>
-            <a:off x="7853005" y="2990969"/>
-            <a:ext cx="91440" cy="140613"/>
+            <a:off x="7711440" y="3212187"/>
+            <a:ext cx="103703" cy="266581"/>
           </a:xfrm>
           <a:prstGeom prst="rect">
             <a:avLst/>
@@ -20602,14 +21073,41 @@
       </p:pic>
       <p:sp>
         <p:nvSpPr>
-          <p:cNvPr id="20" name="Text 11"/>
-          <p:cNvSpPr/>
-          <p:nvPr/>
-        </p:nvSpPr>
-        <p:spPr>
-          <a:xfrm>
-            <a:off x="8660725" y="2941082"/>
-            <a:ext cx="3089315" cy="223480"/>
+          <p:cNvPr id="39" name="Shape 30"/>
+          <p:cNvSpPr/>
+          <p:nvPr/>
+        </p:nvSpPr>
+        <p:spPr>
+          <a:xfrm>
+            <a:off x="8421529" y="3199567"/>
+            <a:ext cx="3328511" cy="291822"/>
+          </a:xfrm>
+          <a:prstGeom prst="rect">
+            <a:avLst/>
+          </a:prstGeom>
+          <a:solidFill>
+            <a:srgbClr val="FFFFFF"/>
+          </a:solidFill>
+          <a:ln w="12700">
+            <a:solidFill>
+              <a:srgbClr val="FFFFFF">
+                <a:alpha val="0"/>
+              </a:srgbClr>
+            </a:solidFill>
+            <a:prstDash val="solid"/>
+          </a:ln>
+        </p:spPr>
+      </p:sp>
+      <p:sp>
+        <p:nvSpPr>
+          <p:cNvPr id="40" name="Text 31"/>
+          <p:cNvSpPr/>
+          <p:nvPr/>
+        </p:nvSpPr>
+        <p:spPr>
+          <a:xfrm>
+            <a:off x="8543449" y="3212187"/>
+            <a:ext cx="3084671" cy="266581"/>
           </a:xfrm>
           <a:prstGeom prst="rect">
             <a:avLst/>
@@ -20623,28 +21121,55 @@
           <a:p>
             <a:pPr algn="l" indent="0" marL="0" eaLnBrk="1" latinLnBrk="0" hangingPunct="1">
               <a:lnSpc>
-                <a:spcPts val="1680"/>
-              </a:lnSpc>
-              <a:buNone/>
-            </a:pPr>
-            <a:r>
-              <a:rPr lang="zh-CN" altLang="en-US" sz="1200" dirty="0">
-                <a:solidFill>
-                  <a:srgbClr val="526B7D"/>
-                </a:solidFill>
-                <a:latin typeface="Microsoft YaHei" pitchFamily="34" charset="0"/>
-                <a:ea typeface="Microsoft YaHei" pitchFamily="34" charset="-122"/>
-                <a:cs typeface="Microsoft YaHei" pitchFamily="34" charset="-120"/>
-              </a:rPr>
-              <a:t>待优化的参数，与输入维度一致</a:t>
-            </a:r>
-            <a:endParaRPr lang="zh-CN" sz="1200" dirty="0"/>
-          </a:p>
-        </p:txBody>
+                <a:spcPts val="2100"/>
+              </a:lnSpc>
+              <a:buNone/>
+            </a:pPr>
+            <a:r>
+              <a:rPr lang="zh-CN" altLang="en-US" sz="1400" dirty="0">
+                <a:solidFill>
+                  <a:srgbClr val="000000"/>
+                </a:solidFill>
+                <a:latin typeface="Microsoft YaHei" pitchFamily="34" charset="0"/>
+                <a:ea typeface="Microsoft YaHei" pitchFamily="34" charset="-122"/>
+                <a:cs typeface="Microsoft YaHei" pitchFamily="34" charset="-120"/>
+              </a:rPr>
+              <a:t>正则化强度，λ ≥ 0；控制参数约束</a:t>
+            </a:r>
+            <a:endParaRPr lang="zh-CN" sz="1400" dirty="0"/>
+          </a:p>
+        </p:txBody>
+      </p:sp>
+      <p:sp>
+        <p:nvSpPr>
+          <p:cNvPr id="41" name="Shape 32"/>
+          <p:cNvSpPr/>
+          <p:nvPr/>
+        </p:nvSpPr>
+        <p:spPr>
+          <a:xfrm>
+            <a:off x="7589520" y="3491389"/>
+            <a:ext cx="832009" cy="291822"/>
+          </a:xfrm>
+          <a:prstGeom prst="rect">
+            <a:avLst/>
+          </a:prstGeom>
+          <a:solidFill>
+            <a:srgbClr val="FFFFFF"/>
+          </a:solidFill>
+          <a:ln w="12700">
+            <a:solidFill>
+              <a:srgbClr val="FFFFFF">
+                <a:alpha val="0"/>
+              </a:srgbClr>
+            </a:solidFill>
+            <a:prstDash val="solid"/>
+          </a:ln>
+        </p:spPr>
       </p:sp>
       <p:pic>
         <p:nvPicPr>
-          <p:cNvPr id="21" name="Image 7" descr="preencoded.png">    </p:cNvPr>
+          <p:cNvPr id="42" name="Image 7" descr="preencoded.png">    </p:cNvPr>
           <p:cNvPicPr>
             <a:picLocks noChangeAspect="1"/>
           </p:cNvPicPr>
@@ -20658,8 +21183,8 @@
         </p:blipFill>
         <p:spPr>
           <a:xfrm>
-            <a:off x="7853005" y="3273981"/>
-            <a:ext cx="102156" cy="143470"/>
+            <a:off x="7711440" y="3504009"/>
+            <a:ext cx="114419" cy="266581"/>
           </a:xfrm>
           <a:prstGeom prst="rect">
             <a:avLst/>
@@ -20668,14 +21193,41 @@
       </p:pic>
       <p:sp>
         <p:nvSpPr>
-          <p:cNvPr id="22" name="Text 12"/>
-          <p:cNvSpPr/>
-          <p:nvPr/>
-        </p:nvSpPr>
-        <p:spPr>
-          <a:xfrm>
-            <a:off x="8660725" y="3225522"/>
-            <a:ext cx="3089315" cy="228600"/>
+          <p:cNvPr id="43" name="Shape 33"/>
+          <p:cNvSpPr/>
+          <p:nvPr/>
+        </p:nvSpPr>
+        <p:spPr>
+          <a:xfrm>
+            <a:off x="8421529" y="3491389"/>
+            <a:ext cx="3328511" cy="291822"/>
+          </a:xfrm>
+          <a:prstGeom prst="rect">
+            <a:avLst/>
+          </a:prstGeom>
+          <a:solidFill>
+            <a:srgbClr val="FFFFFF"/>
+          </a:solidFill>
+          <a:ln w="12700">
+            <a:solidFill>
+              <a:srgbClr val="FFFFFF">
+                <a:alpha val="0"/>
+              </a:srgbClr>
+            </a:solidFill>
+            <a:prstDash val="solid"/>
+          </a:ln>
+        </p:spPr>
+      </p:sp>
+      <p:sp>
+        <p:nvSpPr>
+          <p:cNvPr id="44" name="Text 34"/>
+          <p:cNvSpPr/>
+          <p:nvPr/>
+        </p:nvSpPr>
+        <p:spPr>
+          <a:xfrm>
+            <a:off x="8543449" y="3504009"/>
+            <a:ext cx="3084671" cy="266581"/>
           </a:xfrm>
           <a:prstGeom prst="rect">
             <a:avLst/>
@@ -20689,50 +21241,55 @@
           <a:p>
             <a:pPr algn="l" indent="0" marL="0" eaLnBrk="1" latinLnBrk="0" hangingPunct="1">
               <a:lnSpc>
-                <a:spcPts val="1680"/>
-              </a:lnSpc>
-              <a:buNone/>
-            </a:pPr>
-            <a:r>
-              <a:rPr lang="zh-CN" altLang="en-US" sz="1200" dirty="0">
-                <a:solidFill>
-                  <a:srgbClr val="526B7D"/>
-                </a:solidFill>
-                <a:latin typeface="Microsoft YaHei" pitchFamily="34" charset="0"/>
-                <a:ea typeface="Microsoft YaHei" pitchFamily="34" charset="-122"/>
-                <a:cs typeface="Microsoft YaHei" pitchFamily="34" charset="-120"/>
-              </a:rPr>
-              <a:t>正则化强度，</a:t>
-            </a:r>
-            <a:r>
-              <a:rPr lang="zh-CN" altLang="en-US" sz="1200" i="1" dirty="0">
-                <a:solidFill>
-                  <a:srgbClr val="526B7D"/>
-                </a:solidFill>
-                <a:latin typeface="Cambria Math" pitchFamily="34" charset="0"/>
-                <a:ea typeface="Cambria Math" pitchFamily="34" charset="-122"/>
-                <a:cs typeface="Cambria Math" pitchFamily="34" charset="-120"/>
-              </a:rPr>
-              <a:t>λ</a:t>
-            </a:r>
-            <a:r>
-              <a:rPr lang="zh-CN" altLang="en-US" sz="1200" dirty="0">
-                <a:solidFill>
-                  <a:srgbClr val="526B7D"/>
-                </a:solidFill>
-                <a:latin typeface="Microsoft YaHei" pitchFamily="34" charset="0"/>
-                <a:ea typeface="Microsoft YaHei" pitchFamily="34" charset="-122"/>
-                <a:cs typeface="Microsoft YaHei" pitchFamily="34" charset="-120"/>
-              </a:rPr>
-              <a:t> ≥ 0；控制参数约束</a:t>
-            </a:r>
-            <a:endParaRPr lang="zh-CN" sz="1200" dirty="0"/>
-          </a:p>
-        </p:txBody>
+                <a:spcPts val="2100"/>
+              </a:lnSpc>
+              <a:buNone/>
+            </a:pPr>
+            <a:r>
+              <a:rPr lang="zh-CN" altLang="en-US" sz="1400" dirty="0">
+                <a:solidFill>
+                  <a:srgbClr val="000000"/>
+                </a:solidFill>
+                <a:latin typeface="Microsoft YaHei" pitchFamily="34" charset="0"/>
+                <a:ea typeface="Microsoft YaHei" pitchFamily="34" charset="-122"/>
+                <a:cs typeface="Microsoft YaHei" pitchFamily="34" charset="-120"/>
+              </a:rPr>
+              <a:t>学习率，α &gt; 0；结合损失变化选择</a:t>
+            </a:r>
+            <a:endParaRPr lang="zh-CN" sz="1400" dirty="0"/>
+          </a:p>
+        </p:txBody>
+      </p:sp>
+      <p:sp>
+        <p:nvSpPr>
+          <p:cNvPr id="45" name="Shape 35"/>
+          <p:cNvSpPr/>
+          <p:nvPr/>
+        </p:nvSpPr>
+        <p:spPr>
+          <a:xfrm>
+            <a:off x="7589520" y="3783211"/>
+            <a:ext cx="832009" cy="291822"/>
+          </a:xfrm>
+          <a:prstGeom prst="rect">
+            <a:avLst/>
+          </a:prstGeom>
+          <a:solidFill>
+            <a:srgbClr val="FFFFFF"/>
+          </a:solidFill>
+          <a:ln w="12700">
+            <a:solidFill>
+              <a:srgbClr val="FFFFFF">
+                <a:alpha val="0"/>
+              </a:srgbClr>
+            </a:solidFill>
+            <a:prstDash val="solid"/>
+          </a:ln>
+        </p:spPr>
       </p:sp>
       <p:pic>
         <p:nvPicPr>
-          <p:cNvPr id="23" name="Image 8" descr="preencoded.png">    </p:cNvPr>
+          <p:cNvPr id="46" name="Image 8" descr="preencoded.png">    </p:cNvPr>
           <p:cNvPicPr>
             <a:picLocks noChangeAspect="1"/>
           </p:cNvPicPr>
@@ -20746,8 +21303,8 @@
         </p:blipFill>
         <p:spPr>
           <a:xfrm>
-            <a:off x="7853005" y="3586282"/>
-            <a:ext cx="107871" cy="97988"/>
+            <a:off x="7711440" y="3795832"/>
+            <a:ext cx="64294" cy="266581"/>
           </a:xfrm>
           <a:prstGeom prst="rect">
             <a:avLst/>
@@ -20756,14 +21313,41 @@
       </p:pic>
       <p:sp>
         <p:nvSpPr>
-          <p:cNvPr id="24" name="Text 13"/>
-          <p:cNvSpPr/>
-          <p:nvPr/>
-        </p:nvSpPr>
-        <p:spPr>
-          <a:xfrm>
-            <a:off x="8660725" y="3515082"/>
-            <a:ext cx="3089315" cy="228600"/>
+          <p:cNvPr id="47" name="Shape 36"/>
+          <p:cNvSpPr/>
+          <p:nvPr/>
+        </p:nvSpPr>
+        <p:spPr>
+          <a:xfrm>
+            <a:off x="8421529" y="3783211"/>
+            <a:ext cx="3328511" cy="291822"/>
+          </a:xfrm>
+          <a:prstGeom prst="rect">
+            <a:avLst/>
+          </a:prstGeom>
+          <a:solidFill>
+            <a:srgbClr val="FFFFFF"/>
+          </a:solidFill>
+          <a:ln w="12700">
+            <a:solidFill>
+              <a:srgbClr val="FFFFFF">
+                <a:alpha val="0"/>
+              </a:srgbClr>
+            </a:solidFill>
+            <a:prstDash val="solid"/>
+          </a:ln>
+        </p:spPr>
+      </p:sp>
+      <p:sp>
+        <p:nvSpPr>
+          <p:cNvPr id="48" name="Text 37"/>
+          <p:cNvSpPr/>
+          <p:nvPr/>
+        </p:nvSpPr>
+        <p:spPr>
+          <a:xfrm>
+            <a:off x="8543449" y="3795832"/>
+            <a:ext cx="3084671" cy="266581"/>
           </a:xfrm>
           <a:prstGeom prst="rect">
             <a:avLst/>
@@ -20777,6 +21361,144 @@
           <a:p>
             <a:pPr algn="l" indent="0" marL="0" eaLnBrk="1" latinLnBrk="0" hangingPunct="1">
               <a:lnSpc>
+                <a:spcPts val="2100"/>
+              </a:lnSpc>
+              <a:buNone/>
+            </a:pPr>
+            <a:r>
+              <a:rPr lang="zh-CN" altLang="en-US" sz="1400" dirty="0">
+                <a:solidFill>
+                  <a:srgbClr val="000000"/>
+                </a:solidFill>
+                <a:latin typeface="Microsoft YaHei" pitchFamily="34" charset="0"/>
+                <a:ea typeface="Microsoft YaHei" pitchFamily="34" charset="-122"/>
+                <a:cs typeface="Microsoft YaHei" pitchFamily="34" charset="-120"/>
+              </a:rPr>
+              <a:t>迭代序号，由初始参数开始计数</a:t>
+            </a:r>
+            <a:endParaRPr lang="zh-CN" sz="1400" dirty="0"/>
+          </a:p>
+        </p:txBody>
+      </p:sp>
+      <p:sp>
+        <p:nvSpPr>
+          <p:cNvPr id="49" name="Shape 38"/>
+          <p:cNvSpPr/>
+          <p:nvPr/>
+        </p:nvSpPr>
+        <p:spPr>
+          <a:xfrm>
+            <a:off x="7589520" y="4373880"/>
+            <a:ext cx="4160520" cy="1798320"/>
+          </a:xfrm>
+          <a:prstGeom prst="rect">
+            <a:avLst/>
+          </a:prstGeom>
+          <a:solidFill>
+            <a:srgbClr val="EEF5F9"/>
+          </a:solidFill>
+          <a:ln w="12700">
+            <a:solidFill>
+              <a:srgbClr val="EEF5F9">
+                <a:alpha val="0"/>
+              </a:srgbClr>
+            </a:solidFill>
+            <a:prstDash val="solid"/>
+          </a:ln>
+        </p:spPr>
+      </p:sp>
+      <p:sp>
+        <p:nvSpPr>
+          <p:cNvPr id="50" name="Text 39"/>
+          <p:cNvSpPr/>
+          <p:nvPr/>
+        </p:nvSpPr>
+        <p:spPr>
+          <a:xfrm>
+            <a:off x="7726680" y="4480560"/>
+            <a:ext cx="3886200" cy="297180"/>
+          </a:xfrm>
+          <a:prstGeom prst="rect">
+            <a:avLst/>
+          </a:prstGeom>
+          <a:noFill/>
+          <a:ln/>
+        </p:spPr>
+        <p:txBody>
+          <a:bodyPr wrap="none" lIns="0" tIns="0" rIns="0" bIns="0" rtlCol="0" anchor="t"/>
+          <a:lstStyle/>
+          <a:p>
+            <a:pPr algn="l" indent="0" marL="0" eaLnBrk="1" latinLnBrk="0" hangingPunct="1">
+              <a:lnSpc>
+                <a:spcPts val="2340"/>
+              </a:lnSpc>
+              <a:buNone/>
+            </a:pPr>
+            <a:r>
+              <a:rPr lang="zh-CN" altLang="en-US" sz="1800" b="1" dirty="0">
+                <a:solidFill>
+                  <a:srgbClr val="005B94"/>
+                </a:solidFill>
+                <a:latin typeface="Microsoft YaHei" pitchFamily="34" charset="0"/>
+                <a:ea typeface="Microsoft YaHei" pitchFamily="34" charset="-122"/>
+                <a:cs typeface="Microsoft YaHei" pitchFamily="34" charset="-120"/>
+              </a:rPr>
+              <a:t>字体样式说明</a:t>
+            </a:r>
+            <a:endParaRPr lang="zh-CN" sz="1800" dirty="0"/>
+          </a:p>
+        </p:txBody>
+      </p:sp>
+      <p:sp>
+        <p:nvSpPr>
+          <p:cNvPr id="51" name="Shape 40"/>
+          <p:cNvSpPr/>
+          <p:nvPr/>
+        </p:nvSpPr>
+        <p:spPr>
+          <a:xfrm>
+            <a:off x="7726680" y="4823460"/>
+            <a:ext cx="1049179" cy="246221"/>
+          </a:xfrm>
+          <a:prstGeom prst="rect">
+            <a:avLst/>
+          </a:prstGeom>
+          <a:solidFill>
+            <a:srgbClr val="FFFFFF"/>
+          </a:solidFill>
+          <a:ln w="12700">
+            <a:solidFill>
+              <a:srgbClr val="FFFFFF">
+                <a:alpha val="0"/>
+              </a:srgbClr>
+            </a:solidFill>
+            <a:prstDash val="solid"/>
+          </a:ln>
+        </p:spPr>
+      </p:sp>
+      <p:sp>
+        <p:nvSpPr>
+          <p:cNvPr id="52" name="Text 41"/>
+          <p:cNvSpPr/>
+          <p:nvPr/>
+        </p:nvSpPr>
+        <p:spPr>
+          <a:xfrm>
+            <a:off x="7726680" y="4836081"/>
+            <a:ext cx="972979" cy="213360"/>
+          </a:xfrm>
+          <a:prstGeom prst="rect">
+            <a:avLst/>
+          </a:prstGeom>
+          <a:noFill/>
+          <a:ln/>
+        </p:spPr>
+        <p:txBody>
+          <a:bodyPr wrap="none" lIns="0" tIns="0" rIns="0" bIns="0" rtlCol="0" anchor="t"/>
+          <a:lstStyle/>
+          <a:p>
+            <a:pPr algn="l" indent="0" marL="0" eaLnBrk="1" latinLnBrk="0" hangingPunct="1">
+              <a:lnSpc>
                 <a:spcPts val="1680"/>
               </a:lnSpc>
               <a:buNone/>
@@ -20784,43 +21506,48 @@
             <a:r>
               <a:rPr lang="zh-CN" altLang="en-US" sz="1200" dirty="0">
                 <a:solidFill>
-                  <a:srgbClr val="526B7D"/>
-                </a:solidFill>
-                <a:latin typeface="Microsoft YaHei" pitchFamily="34" charset="0"/>
-                <a:ea typeface="Microsoft YaHei" pitchFamily="34" charset="-122"/>
-                <a:cs typeface="Microsoft YaHei" pitchFamily="34" charset="-120"/>
-              </a:rPr>
-              <a:t>学习率，</a:t>
-            </a:r>
-            <a:r>
-              <a:rPr lang="zh-CN" altLang="en-US" sz="1200" i="1" dirty="0">
-                <a:solidFill>
-                  <a:srgbClr val="526B7D"/>
-                </a:solidFill>
-                <a:latin typeface="Cambria Math" pitchFamily="34" charset="0"/>
-                <a:ea typeface="Cambria Math" pitchFamily="34" charset="-122"/>
-                <a:cs typeface="Cambria Math" pitchFamily="34" charset="-120"/>
-              </a:rPr>
-              <a:t>α</a:t>
-            </a:r>
-            <a:r>
-              <a:rPr lang="zh-CN" altLang="en-US" sz="1200" dirty="0">
-                <a:solidFill>
-                  <a:srgbClr val="526B7D"/>
-                </a:solidFill>
-                <a:latin typeface="Microsoft YaHei" pitchFamily="34" charset="0"/>
-                <a:ea typeface="Microsoft YaHei" pitchFamily="34" charset="-122"/>
-                <a:cs typeface="Microsoft YaHei" pitchFamily="34" charset="-120"/>
-              </a:rPr>
-              <a:t> &gt; 0；结合损失变化选择</a:t>
+                  <a:srgbClr val="000000"/>
+                </a:solidFill>
+                <a:latin typeface="Microsoft YaHei" pitchFamily="34" charset="0"/>
+                <a:ea typeface="Microsoft YaHei" pitchFamily="34" charset="-122"/>
+                <a:cs typeface="Microsoft YaHei" pitchFamily="34" charset="-120"/>
+              </a:rPr>
+              <a:t>常规斜体</a:t>
             </a:r>
             <a:endParaRPr lang="zh-CN" sz="1200" dirty="0"/>
           </a:p>
         </p:txBody>
+      </p:sp>
+      <p:sp>
+        <p:nvSpPr>
+          <p:cNvPr id="53" name="Shape 42"/>
+          <p:cNvSpPr/>
+          <p:nvPr/>
+        </p:nvSpPr>
+        <p:spPr>
+          <a:xfrm>
+            <a:off x="8775859" y="4823460"/>
+            <a:ext cx="1049179" cy="246221"/>
+          </a:xfrm>
+          <a:prstGeom prst="rect">
+            <a:avLst/>
+          </a:prstGeom>
+          <a:solidFill>
+            <a:srgbClr val="FFFFFF"/>
+          </a:solidFill>
+          <a:ln w="12700">
+            <a:solidFill>
+              <a:srgbClr val="FFFFFF">
+                <a:alpha val="0"/>
+              </a:srgbClr>
+            </a:solidFill>
+            <a:prstDash val="solid"/>
+          </a:ln>
+        </p:spPr>
       </p:sp>
       <p:pic>
         <p:nvPicPr>
-          <p:cNvPr id="25" name="Image 9" descr="preencoded.png">    </p:cNvPr>
+          <p:cNvPr id="54" name="Image 9" descr="preencoded.png">    </p:cNvPr>
           <p:cNvPicPr>
             <a:picLocks noChangeAspect="1"/>
           </p:cNvPicPr>
@@ -20834,8 +21561,8 @@
         </p:blipFill>
         <p:spPr>
           <a:xfrm>
-            <a:off x="7853005" y="3864412"/>
-            <a:ext cx="65484" cy="120848"/>
+            <a:off x="8775859" y="4836081"/>
+            <a:ext cx="325041" cy="220980"/>
           </a:xfrm>
           <a:prstGeom prst="rect">
             <a:avLst/>
@@ -20844,14 +21571,41 @@
       </p:pic>
       <p:sp>
         <p:nvSpPr>
-          <p:cNvPr id="26" name="Text 14"/>
-          <p:cNvSpPr/>
-          <p:nvPr/>
-        </p:nvSpPr>
-        <p:spPr>
-          <a:xfrm>
-            <a:off x="8660725" y="3804642"/>
-            <a:ext cx="3089315" cy="223480"/>
+          <p:cNvPr id="55" name="Shape 43"/>
+          <p:cNvSpPr/>
+          <p:nvPr/>
+        </p:nvSpPr>
+        <p:spPr>
+          <a:xfrm>
+            <a:off x="9825038" y="4823460"/>
+            <a:ext cx="1787843" cy="246221"/>
+          </a:xfrm>
+          <a:prstGeom prst="rect">
+            <a:avLst/>
+          </a:prstGeom>
+          <a:solidFill>
+            <a:srgbClr val="FFFFFF"/>
+          </a:solidFill>
+          <a:ln w="12700">
+            <a:solidFill>
+              <a:srgbClr val="FFFFFF">
+                <a:alpha val="0"/>
+              </a:srgbClr>
+            </a:solidFill>
+            <a:prstDash val="solid"/>
+          </a:ln>
+        </p:spPr>
+      </p:sp>
+      <p:sp>
+        <p:nvSpPr>
+          <p:cNvPr id="56" name="Text 44"/>
+          <p:cNvSpPr/>
+          <p:nvPr/>
+        </p:nvSpPr>
+        <p:spPr>
+          <a:xfrm>
+            <a:off x="9825038" y="4836081"/>
+            <a:ext cx="1711643" cy="213360"/>
           </a:xfrm>
           <a:prstGeom prst="rect">
             <a:avLst/>
@@ -20872,13 +21626,13 @@
             <a:r>
               <a:rPr lang="zh-CN" altLang="en-US" sz="1200" dirty="0">
                 <a:solidFill>
-                  <a:srgbClr val="526B7D"/>
-                </a:solidFill>
-                <a:latin typeface="Microsoft YaHei" pitchFamily="34" charset="0"/>
-                <a:ea typeface="Microsoft YaHei" pitchFamily="34" charset="-122"/>
-                <a:cs typeface="Microsoft YaHei" pitchFamily="34" charset="-120"/>
-              </a:rPr>
-              <a:t>迭代序号，由初始参数开始计数</a:t>
+                  <a:srgbClr val="000000"/>
+                </a:solidFill>
+                <a:latin typeface="Microsoft YaHei" pitchFamily="34" charset="0"/>
+                <a:ea typeface="Microsoft YaHei" pitchFamily="34" charset="-122"/>
+                <a:cs typeface="Microsoft YaHei" pitchFamily="34" charset="-120"/>
+              </a:rPr>
+              <a:t>标量、参数</a:t>
             </a:r>
             <a:endParaRPr lang="zh-CN" sz="1200" dirty="0"/>
           </a:p>
@@ -20886,14 +21640,41 @@
       </p:sp>
       <p:sp>
         <p:nvSpPr>
-          <p:cNvPr id="27" name="Text 15"/>
-          <p:cNvSpPr/>
-          <p:nvPr/>
-        </p:nvSpPr>
-        <p:spPr>
-          <a:xfrm>
-            <a:off x="7997785" y="4373880"/>
-            <a:ext cx="3607475" cy="297180"/>
+          <p:cNvPr id="57" name="Shape 45"/>
+          <p:cNvSpPr/>
+          <p:nvPr/>
+        </p:nvSpPr>
+        <p:spPr>
+          <a:xfrm>
+            <a:off x="7726680" y="5069681"/>
+            <a:ext cx="1049179" cy="246221"/>
+          </a:xfrm>
+          <a:prstGeom prst="rect">
+            <a:avLst/>
+          </a:prstGeom>
+          <a:solidFill>
+            <a:srgbClr val="FFFFFF"/>
+          </a:solidFill>
+          <a:ln w="12700">
+            <a:solidFill>
+              <a:srgbClr val="FFFFFF">
+                <a:alpha val="0"/>
+              </a:srgbClr>
+            </a:solidFill>
+            <a:prstDash val="solid"/>
+          </a:ln>
+        </p:spPr>
+      </p:sp>
+      <p:sp>
+        <p:nvSpPr>
+          <p:cNvPr id="58" name="Text 46"/>
+          <p:cNvSpPr/>
+          <p:nvPr/>
+        </p:nvSpPr>
+        <p:spPr>
+          <a:xfrm>
+            <a:off x="7726680" y="5082302"/>
+            <a:ext cx="972979" cy="213360"/>
           </a:xfrm>
           <a:prstGeom prst="rect">
             <a:avLst/>
@@ -20907,70 +21688,55 @@
           <a:p>
             <a:pPr algn="l" indent="0" marL="0" eaLnBrk="1" latinLnBrk="0" hangingPunct="1">
               <a:lnSpc>
-                <a:spcPts val="2340"/>
-              </a:lnSpc>
-              <a:buNone/>
-            </a:pPr>
-            <a:r>
-              <a:rPr lang="zh-CN" altLang="en-US" sz="1800" b="1" dirty="0">
-                <a:solidFill>
-                  <a:srgbClr val="005B94"/>
-                </a:solidFill>
-                <a:latin typeface="Microsoft YaHei" pitchFamily="34" charset="0"/>
-                <a:ea typeface="Microsoft YaHei" pitchFamily="34" charset="-122"/>
-                <a:cs typeface="Microsoft YaHei" pitchFamily="34" charset="-120"/>
-              </a:rPr>
-              <a:t>字体样式说明</a:t>
-            </a:r>
-            <a:endParaRPr lang="zh-CN" sz="1800" dirty="0"/>
-          </a:p>
-        </p:txBody>
-      </p:sp>
-      <p:sp>
-        <p:nvSpPr>
-          <p:cNvPr id="28" name="Text 16"/>
-          <p:cNvSpPr/>
-          <p:nvPr/>
-        </p:nvSpPr>
-        <p:spPr>
-          <a:xfrm>
-            <a:off x="7997785" y="4732020"/>
-            <a:ext cx="746760" cy="213360"/>
-          </a:xfrm>
-          <a:prstGeom prst="rect">
-            <a:avLst/>
-          </a:prstGeom>
-          <a:noFill/>
-          <a:ln/>
-        </p:spPr>
-        <p:txBody>
-          <a:bodyPr wrap="none" lIns="0" tIns="0" rIns="0" bIns="0" rtlCol="0" anchor="t"/>
-          <a:lstStyle/>
-          <a:p>
-            <a:pPr algn="l" indent="0" marL="0" eaLnBrk="1" latinLnBrk="0" hangingPunct="1">
-              <a:lnSpc>
                 <a:spcPts val="1680"/>
               </a:lnSpc>
               <a:buNone/>
             </a:pPr>
             <a:r>
-              <a:rPr lang="zh-CN" altLang="en-US" sz="1200" b="1" dirty="0">
-                <a:solidFill>
-                  <a:srgbClr val="12374E"/>
-                </a:solidFill>
-                <a:latin typeface="Microsoft YaHei" pitchFamily="34" charset="0"/>
-                <a:ea typeface="Microsoft YaHei" pitchFamily="34" charset="-122"/>
-                <a:cs typeface="Microsoft YaHei" pitchFamily="34" charset="-120"/>
-              </a:rPr>
-              <a:t>常规斜体</a:t>
+              <a:rPr lang="zh-CN" altLang="en-US" sz="1200" dirty="0">
+                <a:solidFill>
+                  <a:srgbClr val="000000"/>
+                </a:solidFill>
+                <a:latin typeface="Microsoft YaHei" pitchFamily="34" charset="0"/>
+                <a:ea typeface="Microsoft YaHei" pitchFamily="34" charset="-122"/>
+                <a:cs typeface="Microsoft YaHei" pitchFamily="34" charset="-120"/>
+              </a:rPr>
+              <a:t>粗斜体</a:t>
             </a:r>
             <a:endParaRPr lang="zh-CN" sz="1200" dirty="0"/>
           </a:p>
         </p:txBody>
+      </p:sp>
+      <p:sp>
+        <p:nvSpPr>
+          <p:cNvPr id="59" name="Shape 47"/>
+          <p:cNvSpPr/>
+          <p:nvPr/>
+        </p:nvSpPr>
+        <p:spPr>
+          <a:xfrm>
+            <a:off x="8775859" y="5069681"/>
+            <a:ext cx="1049179" cy="246221"/>
+          </a:xfrm>
+          <a:prstGeom prst="rect">
+            <a:avLst/>
+          </a:prstGeom>
+          <a:solidFill>
+            <a:srgbClr val="FFFFFF"/>
+          </a:solidFill>
+          <a:ln w="12700">
+            <a:solidFill>
+              <a:srgbClr val="FFFFFF">
+                <a:alpha val="0"/>
+              </a:srgbClr>
+            </a:solidFill>
+            <a:prstDash val="solid"/>
+          </a:ln>
+        </p:spPr>
       </p:sp>
       <p:pic>
         <p:nvPicPr>
-          <p:cNvPr id="29" name="Image 10" descr="preencoded.png">    </p:cNvPr>
+          <p:cNvPr id="60" name="Image 10" descr="preencoded.png">    </p:cNvPr>
           <p:cNvPicPr>
             <a:picLocks noChangeAspect="1"/>
           </p:cNvPicPr>
@@ -20984,8 +21750,8 @@
         </p:blipFill>
         <p:spPr>
           <a:xfrm>
-            <a:off x="8835985" y="4791313"/>
-            <a:ext cx="349210" cy="108347"/>
+            <a:off x="8775859" y="5082302"/>
+            <a:ext cx="100489" cy="220980"/>
           </a:xfrm>
           <a:prstGeom prst="rect">
             <a:avLst/>
@@ -20994,14 +21760,41 @@
       </p:pic>
       <p:sp>
         <p:nvSpPr>
-          <p:cNvPr id="30" name="Text 17"/>
-          <p:cNvSpPr/>
-          <p:nvPr/>
-        </p:nvSpPr>
-        <p:spPr>
-          <a:xfrm>
-            <a:off x="9689425" y="4732020"/>
-            <a:ext cx="1915835" cy="213360"/>
+          <p:cNvPr id="61" name="Shape 48"/>
+          <p:cNvSpPr/>
+          <p:nvPr/>
+        </p:nvSpPr>
+        <p:spPr>
+          <a:xfrm>
+            <a:off x="9825038" y="5069681"/>
+            <a:ext cx="1787843" cy="246221"/>
+          </a:xfrm>
+          <a:prstGeom prst="rect">
+            <a:avLst/>
+          </a:prstGeom>
+          <a:solidFill>
+            <a:srgbClr val="FFFFFF"/>
+          </a:solidFill>
+          <a:ln w="12700">
+            <a:solidFill>
+              <a:srgbClr val="FFFFFF">
+                <a:alpha val="0"/>
+              </a:srgbClr>
+            </a:solidFill>
+            <a:prstDash val="solid"/>
+          </a:ln>
+        </p:spPr>
+      </p:sp>
+      <p:sp>
+        <p:nvSpPr>
+          <p:cNvPr id="62" name="Text 49"/>
+          <p:cNvSpPr/>
+          <p:nvPr/>
+        </p:nvSpPr>
+        <p:spPr>
+          <a:xfrm>
+            <a:off x="9825038" y="5082302"/>
+            <a:ext cx="1711643" cy="213360"/>
           </a:xfrm>
           <a:prstGeom prst="rect">
             <a:avLst/>
@@ -21022,13 +21815,13 @@
             <a:r>
               <a:rPr lang="zh-CN" altLang="en-US" sz="1200" dirty="0">
                 <a:solidFill>
-                  <a:srgbClr val="12374E"/>
-                </a:solidFill>
-                <a:latin typeface="Microsoft YaHei" pitchFamily="34" charset="0"/>
-                <a:ea typeface="Microsoft YaHei" pitchFamily="34" charset="-122"/>
-                <a:cs typeface="Microsoft YaHei" pitchFamily="34" charset="-120"/>
-              </a:rPr>
-              <a:t>标量、参数</a:t>
+                  <a:srgbClr val="000000"/>
+                </a:solidFill>
+                <a:latin typeface="Microsoft YaHei" pitchFamily="34" charset="0"/>
+                <a:ea typeface="Microsoft YaHei" pitchFamily="34" charset="-122"/>
+                <a:cs typeface="Microsoft YaHei" pitchFamily="34" charset="-120"/>
+              </a:rPr>
+              <a:t>向量</a:t>
             </a:r>
             <a:endParaRPr lang="zh-CN" sz="1200" dirty="0"/>
           </a:p>
@@ -21036,14 +21829,41 @@
       </p:sp>
       <p:sp>
         <p:nvSpPr>
-          <p:cNvPr id="31" name="Text 18"/>
-          <p:cNvSpPr/>
-          <p:nvPr/>
-        </p:nvSpPr>
-        <p:spPr>
-          <a:xfrm>
-            <a:off x="7997785" y="5006340"/>
-            <a:ext cx="746760" cy="213360"/>
+          <p:cNvPr id="63" name="Shape 50"/>
+          <p:cNvSpPr/>
+          <p:nvPr/>
+        </p:nvSpPr>
+        <p:spPr>
+          <a:xfrm>
+            <a:off x="7726680" y="5315903"/>
+            <a:ext cx="1049179" cy="238601"/>
+          </a:xfrm>
+          <a:prstGeom prst="rect">
+            <a:avLst/>
+          </a:prstGeom>
+          <a:solidFill>
+            <a:srgbClr val="FFFFFF"/>
+          </a:solidFill>
+          <a:ln w="12700">
+            <a:solidFill>
+              <a:srgbClr val="FFFFFF">
+                <a:alpha val="0"/>
+              </a:srgbClr>
+            </a:solidFill>
+            <a:prstDash val="solid"/>
+          </a:ln>
+        </p:spPr>
+      </p:sp>
+      <p:sp>
+        <p:nvSpPr>
+          <p:cNvPr id="64" name="Text 51"/>
+          <p:cNvSpPr/>
+          <p:nvPr/>
+        </p:nvSpPr>
+        <p:spPr>
+          <a:xfrm>
+            <a:off x="7726680" y="5328523"/>
+            <a:ext cx="972979" cy="213360"/>
           </a:xfrm>
           <a:prstGeom prst="rect">
             <a:avLst/>
@@ -21062,23 +21882,50 @@
               <a:buNone/>
             </a:pPr>
             <a:r>
-              <a:rPr lang="zh-CN" altLang="en-US" sz="1200" b="1" dirty="0">
-                <a:solidFill>
-                  <a:srgbClr val="12374E"/>
-                </a:solidFill>
-                <a:latin typeface="Microsoft YaHei" pitchFamily="34" charset="0"/>
-                <a:ea typeface="Microsoft YaHei" pitchFamily="34" charset="-122"/>
-                <a:cs typeface="Microsoft YaHei" pitchFamily="34" charset="-120"/>
-              </a:rPr>
-              <a:t>粗斜体</a:t>
+              <a:rPr lang="zh-CN" altLang="en-US" sz="1200" dirty="0">
+                <a:solidFill>
+                  <a:srgbClr val="000000"/>
+                </a:solidFill>
+                <a:latin typeface="Microsoft YaHei" pitchFamily="34" charset="0"/>
+                <a:ea typeface="Microsoft YaHei" pitchFamily="34" charset="-122"/>
+                <a:cs typeface="Microsoft YaHei" pitchFamily="34" charset="-120"/>
+              </a:rPr>
+              <a:t>粗正体</a:t>
             </a:r>
             <a:endParaRPr lang="zh-CN" sz="1200" dirty="0"/>
           </a:p>
         </p:txBody>
+      </p:sp>
+      <p:sp>
+        <p:nvSpPr>
+          <p:cNvPr id="65" name="Shape 52"/>
+          <p:cNvSpPr/>
+          <p:nvPr/>
+        </p:nvSpPr>
+        <p:spPr>
+          <a:xfrm>
+            <a:off x="8775859" y="5315903"/>
+            <a:ext cx="1049179" cy="238601"/>
+          </a:xfrm>
+          <a:prstGeom prst="rect">
+            <a:avLst/>
+          </a:prstGeom>
+          <a:solidFill>
+            <a:srgbClr val="FFFFFF"/>
+          </a:solidFill>
+          <a:ln w="12700">
+            <a:solidFill>
+              <a:srgbClr val="FFFFFF">
+                <a:alpha val="0"/>
+              </a:srgbClr>
+            </a:solidFill>
+            <a:prstDash val="solid"/>
+          </a:ln>
+        </p:spPr>
       </p:sp>
       <p:pic>
         <p:nvPicPr>
-          <p:cNvPr id="32" name="Image 11" descr="preencoded.png">    </p:cNvPr>
+          <p:cNvPr id="66" name="Image 11" descr="preencoded.png">    </p:cNvPr>
           <p:cNvPicPr>
             <a:picLocks noChangeAspect="1"/>
           </p:cNvPicPr>
@@ -21092,8 +21939,8 @@
         </p:blipFill>
         <p:spPr>
           <a:xfrm>
-            <a:off x="8835985" y="5075396"/>
-            <a:ext cx="97274" cy="88821"/>
+            <a:off x="8775859" y="5328523"/>
+            <a:ext cx="132517" cy="213360"/>
           </a:xfrm>
           <a:prstGeom prst="rect">
             <a:avLst/>
@@ -21102,14 +21949,41 @@
       </p:pic>
       <p:sp>
         <p:nvSpPr>
-          <p:cNvPr id="33" name="Text 19"/>
-          <p:cNvSpPr/>
-          <p:nvPr/>
-        </p:nvSpPr>
-        <p:spPr>
-          <a:xfrm>
-            <a:off x="9689425" y="5006340"/>
-            <a:ext cx="1915835" cy="213360"/>
+          <p:cNvPr id="67" name="Shape 53"/>
+          <p:cNvSpPr/>
+          <p:nvPr/>
+        </p:nvSpPr>
+        <p:spPr>
+          <a:xfrm>
+            <a:off x="9825038" y="5315903"/>
+            <a:ext cx="1787843" cy="238601"/>
+          </a:xfrm>
+          <a:prstGeom prst="rect">
+            <a:avLst/>
+          </a:prstGeom>
+          <a:solidFill>
+            <a:srgbClr val="FFFFFF"/>
+          </a:solidFill>
+          <a:ln w="12700">
+            <a:solidFill>
+              <a:srgbClr val="FFFFFF">
+                <a:alpha val="0"/>
+              </a:srgbClr>
+            </a:solidFill>
+            <a:prstDash val="solid"/>
+          </a:ln>
+        </p:spPr>
+      </p:sp>
+      <p:sp>
+        <p:nvSpPr>
+          <p:cNvPr id="68" name="Text 54"/>
+          <p:cNvSpPr/>
+          <p:nvPr/>
+        </p:nvSpPr>
+        <p:spPr>
+          <a:xfrm>
+            <a:off x="9825038" y="5328523"/>
+            <a:ext cx="1711643" cy="213360"/>
           </a:xfrm>
           <a:prstGeom prst="rect">
             <a:avLst/>
@@ -21130,13 +22004,13 @@
             <a:r>
               <a:rPr lang="zh-CN" altLang="en-US" sz="1200" dirty="0">
                 <a:solidFill>
-                  <a:srgbClr val="12374E"/>
-                </a:solidFill>
-                <a:latin typeface="Microsoft YaHei" pitchFamily="34" charset="0"/>
-                <a:ea typeface="Microsoft YaHei" pitchFamily="34" charset="-122"/>
-                <a:cs typeface="Microsoft YaHei" pitchFamily="34" charset="-120"/>
-              </a:rPr>
-              <a:t>向量</a:t>
+                  <a:srgbClr val="000000"/>
+                </a:solidFill>
+                <a:latin typeface="Microsoft YaHei" pitchFamily="34" charset="0"/>
+                <a:ea typeface="Microsoft YaHei" pitchFamily="34" charset="-122"/>
+                <a:cs typeface="Microsoft YaHei" pitchFamily="34" charset="-120"/>
+              </a:rPr>
+              <a:t>矩阵</a:t>
             </a:r>
             <a:endParaRPr lang="zh-CN" sz="1200" dirty="0"/>
           </a:p>
@@ -21144,14 +22018,41 @@
       </p:sp>
       <p:sp>
         <p:nvSpPr>
-          <p:cNvPr id="34" name="Text 20"/>
-          <p:cNvSpPr/>
-          <p:nvPr/>
-        </p:nvSpPr>
-        <p:spPr>
-          <a:xfrm>
-            <a:off x="7997785" y="5280660"/>
-            <a:ext cx="746760" cy="213360"/>
+          <p:cNvPr id="69" name="Shape 55"/>
+          <p:cNvSpPr/>
+          <p:nvPr/>
+        </p:nvSpPr>
+        <p:spPr>
+          <a:xfrm>
+            <a:off x="7726680" y="5554504"/>
+            <a:ext cx="1049179" cy="238601"/>
+          </a:xfrm>
+          <a:prstGeom prst="rect">
+            <a:avLst/>
+          </a:prstGeom>
+          <a:solidFill>
+            <a:srgbClr val="FFFFFF"/>
+          </a:solidFill>
+          <a:ln w="12700">
+            <a:solidFill>
+              <a:srgbClr val="FFFFFF">
+                <a:alpha val="0"/>
+              </a:srgbClr>
+            </a:solidFill>
+            <a:prstDash val="solid"/>
+          </a:ln>
+        </p:spPr>
+      </p:sp>
+      <p:sp>
+        <p:nvSpPr>
+          <p:cNvPr id="70" name="Text 56"/>
+          <p:cNvSpPr/>
+          <p:nvPr/>
+        </p:nvSpPr>
+        <p:spPr>
+          <a:xfrm>
+            <a:off x="7726680" y="5567124"/>
+            <a:ext cx="972979" cy="213360"/>
           </a:xfrm>
           <a:prstGeom prst="rect">
             <a:avLst/>
@@ -21170,23 +22071,50 @@
               <a:buNone/>
             </a:pPr>
             <a:r>
-              <a:rPr lang="zh-CN" altLang="en-US" sz="1200" b="1" dirty="0">
-                <a:solidFill>
-                  <a:srgbClr val="12374E"/>
-                </a:solidFill>
-                <a:latin typeface="Microsoft YaHei" pitchFamily="34" charset="0"/>
-                <a:ea typeface="Microsoft YaHei" pitchFamily="34" charset="-122"/>
-                <a:cs typeface="Microsoft YaHei" pitchFamily="34" charset="-120"/>
-              </a:rPr>
-              <a:t>粗正体</a:t>
+              <a:rPr lang="zh-CN" altLang="en-US" sz="1200" dirty="0">
+                <a:solidFill>
+                  <a:srgbClr val="000000"/>
+                </a:solidFill>
+                <a:latin typeface="Microsoft YaHei" pitchFamily="34" charset="0"/>
+                <a:ea typeface="Microsoft YaHei" pitchFamily="34" charset="-122"/>
+                <a:cs typeface="Microsoft YaHei" pitchFamily="34" charset="-120"/>
+              </a:rPr>
+              <a:t>常规正体</a:t>
             </a:r>
             <a:endParaRPr lang="zh-CN" sz="1200" dirty="0"/>
           </a:p>
         </p:txBody>
+      </p:sp>
+      <p:sp>
+        <p:nvSpPr>
+          <p:cNvPr id="71" name="Shape 57"/>
+          <p:cNvSpPr/>
+          <p:nvPr/>
+        </p:nvSpPr>
+        <p:spPr>
+          <a:xfrm>
+            <a:off x="8775859" y="5554504"/>
+            <a:ext cx="1049179" cy="238601"/>
+          </a:xfrm>
+          <a:prstGeom prst="rect">
+            <a:avLst/>
+          </a:prstGeom>
+          <a:solidFill>
+            <a:srgbClr val="FFFFFF"/>
+          </a:solidFill>
+          <a:ln w="12700">
+            <a:solidFill>
+              <a:srgbClr val="FFFFFF">
+                <a:alpha val="0"/>
+              </a:srgbClr>
+            </a:solidFill>
+            <a:prstDash val="solid"/>
+          </a:ln>
+        </p:spPr>
       </p:sp>
       <p:pic>
         <p:nvPicPr>
-          <p:cNvPr id="35" name="Image 12" descr="preencoded.png">    </p:cNvPr>
+          <p:cNvPr id="72" name="Image 12" descr="preencoded.png">    </p:cNvPr>
           <p:cNvPicPr>
             <a:picLocks noChangeAspect="1"/>
           </p:cNvPicPr>
@@ -21200,8 +22128,8 @@
         </p:blipFill>
         <p:spPr>
           <a:xfrm>
-            <a:off x="8835985" y="5331857"/>
-            <a:ext cx="137041" cy="124420"/>
+            <a:off x="8775859" y="5567124"/>
+            <a:ext cx="576620" cy="213360"/>
           </a:xfrm>
           <a:prstGeom prst="rect">
             <a:avLst/>
@@ -21210,14 +22138,41 @@
       </p:pic>
       <p:sp>
         <p:nvSpPr>
-          <p:cNvPr id="36" name="Text 21"/>
-          <p:cNvSpPr/>
-          <p:nvPr/>
-        </p:nvSpPr>
-        <p:spPr>
-          <a:xfrm>
-            <a:off x="9689425" y="5280660"/>
-            <a:ext cx="1915835" cy="213360"/>
+          <p:cNvPr id="73" name="Shape 58"/>
+          <p:cNvSpPr/>
+          <p:nvPr/>
+        </p:nvSpPr>
+        <p:spPr>
+          <a:xfrm>
+            <a:off x="9825038" y="5554504"/>
+            <a:ext cx="1787843" cy="238601"/>
+          </a:xfrm>
+          <a:prstGeom prst="rect">
+            <a:avLst/>
+          </a:prstGeom>
+          <a:solidFill>
+            <a:srgbClr val="FFFFFF"/>
+          </a:solidFill>
+          <a:ln w="12700">
+            <a:solidFill>
+              <a:srgbClr val="FFFFFF">
+                <a:alpha val="0"/>
+              </a:srgbClr>
+            </a:solidFill>
+            <a:prstDash val="solid"/>
+          </a:ln>
+        </p:spPr>
+      </p:sp>
+      <p:sp>
+        <p:nvSpPr>
+          <p:cNvPr id="74" name="Text 59"/>
+          <p:cNvSpPr/>
+          <p:nvPr/>
+        </p:nvSpPr>
+        <p:spPr>
+          <a:xfrm>
+            <a:off x="9825038" y="5567124"/>
+            <a:ext cx="1711643" cy="213360"/>
           </a:xfrm>
           <a:prstGeom prst="rect">
             <a:avLst/>
@@ -21238,13 +22193,13 @@
             <a:r>
               <a:rPr lang="zh-CN" altLang="en-US" sz="1200" dirty="0">
                 <a:solidFill>
-                  <a:srgbClr val="12374E"/>
-                </a:solidFill>
-                <a:latin typeface="Microsoft YaHei" pitchFamily="34" charset="0"/>
-                <a:ea typeface="Microsoft YaHei" pitchFamily="34" charset="-122"/>
-                <a:cs typeface="Microsoft YaHei" pitchFamily="34" charset="-120"/>
-              </a:rPr>
-              <a:t>矩阵</a:t>
+                  <a:srgbClr val="000000"/>
+                </a:solidFill>
+                <a:latin typeface="Microsoft YaHei" pitchFamily="34" charset="0"/>
+                <a:ea typeface="Microsoft YaHei" pitchFamily="34" charset="-122"/>
+                <a:cs typeface="Microsoft YaHei" pitchFamily="34" charset="-120"/>
+              </a:rPr>
+              <a:t>数字、单位、函数</a:t>
             </a:r>
             <a:endParaRPr lang="zh-CN" sz="1200" dirty="0"/>
           </a:p>
@@ -21252,14 +22207,14 @@
       </p:sp>
       <p:sp>
         <p:nvSpPr>
-          <p:cNvPr id="37" name="Text 22"/>
-          <p:cNvSpPr/>
-          <p:nvPr/>
-        </p:nvSpPr>
-        <p:spPr>
-          <a:xfrm>
-            <a:off x="7997785" y="5554980"/>
-            <a:ext cx="746760" cy="213360"/>
+          <p:cNvPr id="75" name="Text 60"/>
+          <p:cNvSpPr/>
+          <p:nvPr/>
+        </p:nvSpPr>
+        <p:spPr>
+          <a:xfrm>
+            <a:off x="7726680" y="5838825"/>
+            <a:ext cx="3886200" cy="228600"/>
           </a:xfrm>
           <a:prstGeom prst="rect">
             <a:avLst/>
@@ -21273,59 +22228,35 @@
           <a:p>
             <a:pPr algn="l" indent="0" marL="0" eaLnBrk="1" latinLnBrk="0" hangingPunct="1">
               <a:lnSpc>
-                <a:spcPts val="1680"/>
-              </a:lnSpc>
-              <a:buNone/>
-            </a:pPr>
-            <a:r>
-              <a:rPr lang="zh-CN" altLang="en-US" sz="1200" b="1" dirty="0">
-                <a:solidFill>
-                  <a:srgbClr val="12374E"/>
-                </a:solidFill>
-                <a:latin typeface="Microsoft YaHei" pitchFamily="34" charset="0"/>
-                <a:ea typeface="Microsoft YaHei" pitchFamily="34" charset="-122"/>
-                <a:cs typeface="Microsoft YaHei" pitchFamily="34" charset="-120"/>
-              </a:rPr>
-              <a:t>常规正体</a:t>
+                <a:spcPts val="1800"/>
+              </a:lnSpc>
+              <a:buNone/>
+            </a:pPr>
+            <a:r>
+              <a:rPr lang="zh-CN" altLang="en-US" sz="1200" dirty="0">
+                <a:solidFill>
+                  <a:srgbClr val="617B8B"/>
+                </a:solidFill>
+                <a:latin typeface="Microsoft YaHei" pitchFamily="34" charset="0"/>
+                <a:ea typeface="Microsoft YaHei" pitchFamily="34" charset="-122"/>
+                <a:cs typeface="Microsoft YaHei" pitchFamily="34" charset="-120"/>
+              </a:rPr>
+              <a:t>标题加粗，正文保持常规字重。</a:t>
             </a:r>
             <a:endParaRPr lang="zh-CN" sz="1200" dirty="0"/>
           </a:p>
         </p:txBody>
       </p:sp>
-      <p:pic>
-        <p:nvPicPr>
-          <p:cNvPr id="38" name="Image 13" descr="preencoded.png">    </p:cNvPr>
-          <p:cNvPicPr>
-            <a:picLocks noChangeAspect="1"/>
-          </p:cNvPicPr>
-          <p:nvPr/>
-        </p:nvPicPr>
-        <p:blipFill>
-          <a:blip r:embed="rId14"/>
-          <a:stretch>
-            <a:fillRect/>
-          </a:stretch>
-        </p:blipFill>
-        <p:spPr>
-          <a:xfrm>
-            <a:off x="8835985" y="5596533"/>
-            <a:ext cx="629126" cy="143828"/>
-          </a:xfrm>
-          <a:prstGeom prst="rect">
-            <a:avLst/>
-          </a:prstGeom>
-        </p:spPr>
-      </p:pic>
-      <p:sp>
-        <p:nvSpPr>
-          <p:cNvPr id="39" name="Text 23"/>
-          <p:cNvSpPr/>
-          <p:nvPr/>
-        </p:nvSpPr>
-        <p:spPr>
-          <a:xfrm>
-            <a:off x="9689425" y="5554980"/>
-            <a:ext cx="1915835" cy="213360"/>
+      <p:sp>
+        <p:nvSpPr>
+          <p:cNvPr id="76" name="Text 61"/>
+          <p:cNvSpPr/>
+          <p:nvPr/>
+        </p:nvSpPr>
+        <p:spPr>
+          <a:xfrm>
+            <a:off x="441960" y="6485334"/>
+            <a:ext cx="2971800" cy="181332"/>
           </a:xfrm>
           <a:prstGeom prst="rect">
             <a:avLst/>
@@ -21339,90 +22270,6 @@
           <a:p>
             <a:pPr algn="l" indent="0" marL="0" eaLnBrk="1" latinLnBrk="0" hangingPunct="1">
               <a:lnSpc>
-                <a:spcPts val="1680"/>
-              </a:lnSpc>
-              <a:buNone/>
-            </a:pPr>
-            <a:r>
-              <a:rPr lang="zh-CN" altLang="en-US" sz="1200" dirty="0">
-                <a:solidFill>
-                  <a:srgbClr val="12374E"/>
-                </a:solidFill>
-                <a:latin typeface="Microsoft YaHei" pitchFamily="34" charset="0"/>
-                <a:ea typeface="Microsoft YaHei" pitchFamily="34" charset="-122"/>
-                <a:cs typeface="Microsoft YaHei" pitchFamily="34" charset="-120"/>
-              </a:rPr>
-              <a:t>数字、单位、函数</a:t>
-            </a:r>
-            <a:endParaRPr lang="zh-CN" sz="1200" dirty="0"/>
-          </a:p>
-        </p:txBody>
-      </p:sp>
-      <p:sp>
-        <p:nvSpPr>
-          <p:cNvPr id="40" name="Text 24"/>
-          <p:cNvSpPr/>
-          <p:nvPr/>
-        </p:nvSpPr>
-        <p:spPr>
-          <a:xfrm>
-            <a:off x="7997785" y="5844540"/>
-            <a:ext cx="3607475" cy="213360"/>
-          </a:xfrm>
-          <a:prstGeom prst="rect">
-            <a:avLst/>
-          </a:prstGeom>
-          <a:noFill/>
-          <a:ln/>
-        </p:spPr>
-        <p:txBody>
-          <a:bodyPr wrap="none" lIns="0" tIns="0" rIns="0" bIns="0" rtlCol="0" anchor="t"/>
-          <a:lstStyle/>
-          <a:p>
-            <a:pPr algn="l" indent="0" marL="0" eaLnBrk="1" latinLnBrk="0" hangingPunct="1">
-              <a:lnSpc>
-                <a:spcPts val="1680"/>
-              </a:lnSpc>
-              <a:buNone/>
-            </a:pPr>
-            <a:r>
-              <a:rPr lang="zh-CN" altLang="en-US" sz="1200" dirty="0">
-                <a:solidFill>
-                  <a:srgbClr val="12374E"/>
-                </a:solidFill>
-                <a:latin typeface="Microsoft YaHei" pitchFamily="34" charset="0"/>
-                <a:ea typeface="Microsoft YaHei" pitchFamily="34" charset="-122"/>
-                <a:cs typeface="Microsoft YaHei" pitchFamily="34" charset="-120"/>
-              </a:rPr>
-              <a:t>标题加粗，正文保持常规字重。</a:t>
-            </a:r>
-            <a:endParaRPr lang="zh-CN" sz="1200" dirty="0"/>
-          </a:p>
-        </p:txBody>
-      </p:sp>
-      <p:sp>
-        <p:nvSpPr>
-          <p:cNvPr id="41" name="Text 25"/>
-          <p:cNvSpPr/>
-          <p:nvPr/>
-        </p:nvSpPr>
-        <p:spPr>
-          <a:xfrm>
-            <a:off x="441960" y="6489144"/>
-            <a:ext cx="2286000" cy="181332"/>
-          </a:xfrm>
-          <a:prstGeom prst="rect">
-            <a:avLst/>
-          </a:prstGeom>
-          <a:noFill/>
-          <a:ln/>
-        </p:spPr>
-        <p:txBody>
-          <a:bodyPr wrap="none" lIns="0" tIns="0" rIns="0" bIns="0" rtlCol="0" anchor="t"/>
-          <a:lstStyle/>
-          <a:p>
-            <a:pPr algn="l" indent="0" marL="0" eaLnBrk="1" latinLnBrk="0" hangingPunct="1">
-              <a:lnSpc>
                 <a:spcPts val="1428"/>
               </a:lnSpc>
               <a:buNone/>
@@ -21444,16 +22291,16 @@
       </p:sp>
       <p:sp>
         <p:nvSpPr>
-          <p:cNvPr id="42" name="Text 26">
-            <a:hlinkClick r:id="rId15" tooltip="" action="ppaction://hlinksldjump"/>
+          <p:cNvPr id="77" name="Text 62">
+            <a:hlinkClick r:id="rId14" tooltip="" action="ppaction://hlinksldjump"/>
           </p:cNvPr>
           <p:cNvSpPr/>
           <p:nvPr/>
         </p:nvSpPr>
         <p:spPr>
           <a:xfrm>
-            <a:off x="2910840" y="6492478"/>
-            <a:ext cx="8212455" cy="174784"/>
+            <a:off x="3596640" y="6485334"/>
+            <a:ext cx="7534632" cy="181332"/>
           </a:xfrm>
           <a:prstGeom prst="rect">
             <a:avLst/>
@@ -21467,7 +22314,7 @@
           <a:p>
             <a:pPr algn="r" indent="0" marL="0" eaLnBrk="1" latinLnBrk="0" hangingPunct="1">
               <a:lnSpc>
-                <a:spcPts val="1377"/>
+                <a:spcPts val="1428"/>
               </a:lnSpc>
               <a:buNone/>
             </a:pPr>
@@ -21479,7 +22326,7 @@
                 <a:latin typeface="Microsoft YaHei" pitchFamily="34" charset="0"/>
                 <a:ea typeface="Microsoft YaHei" pitchFamily="34" charset="-122"/>
                 <a:cs typeface="Microsoft YaHei" pitchFamily="34" charset="-120"/>
-                <a:hlinkClick r:id="rId15" action="ppaction://hlinksldjump" tooltip="">
+                <a:hlinkClick r:id="rId14" action="ppaction://hlinksldjump" tooltip="">
                   <a:extLst>
                     <a:ext uri="{A12FA001-AC4F-418D-AE19-62706E023703}">
                       <ahyp:hlinkClr xmlns:ahyp="http://schemas.microsoft.com/office/drawing/2018/hyperlinkcolor" val="tx"/>
@@ -21495,14 +22342,14 @@
       </p:sp>
       <p:sp>
         <p:nvSpPr>
-          <p:cNvPr id="43" name="Text 27"/>
-          <p:cNvSpPr/>
-          <p:nvPr/>
-        </p:nvSpPr>
-        <p:spPr>
-          <a:xfrm>
-            <a:off x="11306175" y="6489144"/>
-            <a:ext cx="443865" cy="181332"/>
+          <p:cNvPr id="78" name="Text 63"/>
+          <p:cNvSpPr/>
+          <p:nvPr/>
+        </p:nvSpPr>
+        <p:spPr>
+          <a:xfrm>
+            <a:off x="11314152" y="6485334"/>
+            <a:ext cx="435888" cy="181332"/>
           </a:xfrm>
           <a:prstGeom prst="rect">
             <a:avLst/>
@@ -21521,17 +22368,6 @@
               <a:buNone/>
             </a:pPr>
             <a:r>
-              <a:rPr lang="zh-CN" altLang="en-US" sz="1020" b="1" dirty="0">
-                <a:solidFill>
-                  <a:srgbClr val="005B94"/>
-                </a:solidFill>
-                <a:latin typeface="Microsoft YaHei" pitchFamily="34" charset="0"/>
-                <a:ea typeface="Microsoft YaHei" pitchFamily="34" charset="-122"/>
-                <a:cs typeface="Microsoft YaHei" pitchFamily="34" charset="-120"/>
-              </a:rPr>
-              <a:t>18</a:t>
-            </a:r>
-            <a:r>
               <a:rPr lang="zh-CN" altLang="en-US" sz="1020" dirty="0">
                 <a:solidFill>
                   <a:srgbClr val="617B8B"/>
@@ -21540,22 +22376,38 @@
                 <a:ea typeface="Microsoft YaHei" pitchFamily="34" charset="-122"/>
                 <a:cs typeface="Microsoft YaHei" pitchFamily="34" charset="-120"/>
               </a:rPr>
-              <a:t> / </a:t>
-            </a:r>
-            <a:r>
-              <a:rPr lang="zh-CN" altLang="en-US" sz="1020" dirty="0">
-                <a:solidFill>
-                  <a:srgbClr val="617B8B"/>
-                </a:solidFill>
-                <a:latin typeface="Microsoft YaHei" pitchFamily="34" charset="0"/>
-                <a:ea typeface="Microsoft YaHei" pitchFamily="34" charset="-122"/>
-                <a:cs typeface="Microsoft YaHei" pitchFamily="34" charset="-120"/>
-              </a:rPr>
-              <a:t>30</a:t>
+              <a:t>18 / 30</a:t>
             </a:r>
             <a:endParaRPr lang="zh-CN" sz="1020" dirty="0"/>
           </a:p>
         </p:txBody>
+      </p:sp>
+      <p:sp>
+        <p:nvSpPr>
+          <p:cNvPr id="79" name="Shape 64"/>
+          <p:cNvSpPr/>
+          <p:nvPr/>
+        </p:nvSpPr>
+        <p:spPr>
+          <a:xfrm>
+            <a:off x="441960" y="6355080"/>
+            <a:ext cx="11308080" cy="7620"/>
+          </a:xfrm>
+          <a:prstGeom prst="rect">
+            <a:avLst/>
+          </a:prstGeom>
+          <a:solidFill>
+            <a:srgbClr val="CCDEEA"/>
+          </a:solidFill>
+          <a:ln w="12700">
+            <a:solidFill>
+              <a:srgbClr val="CCDEEA">
+                <a:alpha val="0"/>
+              </a:srgbClr>
+            </a:solidFill>
+            <a:prstDash val="solid"/>
+          </a:ln>
+        </p:spPr>
       </p:sp>
     </p:spTree>
   </p:cSld>
@@ -21874,7 +22726,7 @@
             <a:r>
               <a:rPr lang="zh-CN" altLang="en-US" sz="1600" dirty="0">
                 <a:solidFill>
-                  <a:srgbClr val="12374E"/>
+                  <a:srgbClr val="000000"/>
                 </a:solidFill>
                 <a:latin typeface="Microsoft YaHei" pitchFamily="34" charset="0"/>
                 <a:ea typeface="Microsoft YaHei" pitchFamily="34" charset="-122"/>
@@ -22012,7 +22864,7 @@
             <a:r>
               <a:rPr lang="zh-CN" altLang="en-US" sz="1400" dirty="0">
                 <a:solidFill>
-                  <a:srgbClr val="12374E"/>
+                  <a:srgbClr val="000000"/>
                 </a:solidFill>
                 <a:latin typeface="Cascadia Mono" pitchFamily="34" charset="0"/>
                 <a:ea typeface="Cascadia Mono" pitchFamily="34" charset="-122"/>
@@ -22054,7 +22906,7 @@
             <a:r>
               <a:rPr lang="zh-CN" altLang="en-US" sz="1400" dirty="0">
                 <a:solidFill>
-                  <a:srgbClr val="12374E"/>
+                  <a:srgbClr val="000000"/>
                 </a:solidFill>
                 <a:latin typeface="Cascadia Mono" pitchFamily="34" charset="0"/>
                 <a:ea typeface="Cascadia Mono" pitchFamily="34" charset="-122"/>
@@ -22096,7 +22948,7 @@
             <a:r>
               <a:rPr lang="zh-CN" altLang="en-US" sz="1400" dirty="0">
                 <a:solidFill>
-                  <a:srgbClr val="12374E"/>
+                  <a:srgbClr val="000000"/>
                 </a:solidFill>
                 <a:latin typeface="Cascadia Mono" pitchFamily="34" charset="0"/>
                 <a:ea typeface="Cascadia Mono" pitchFamily="34" charset="-122"/>
@@ -22138,7 +22990,7 @@
             <a:r>
               <a:rPr lang="zh-CN" altLang="en-US" sz="1400" dirty="0">
                 <a:solidFill>
-                  <a:srgbClr val="12374E"/>
+                  <a:srgbClr val="000000"/>
                 </a:solidFill>
                 <a:latin typeface="Cascadia Mono" pitchFamily="34" charset="0"/>
                 <a:ea typeface="Cascadia Mono" pitchFamily="34" charset="-122"/>
@@ -22180,7 +23032,7 @@
             <a:r>
               <a:rPr lang="zh-CN" altLang="en-US" sz="1400" dirty="0">
                 <a:solidFill>
-                  <a:srgbClr val="12374E"/>
+                  <a:srgbClr val="000000"/>
                 </a:solidFill>
                 <a:latin typeface="Cascadia Mono" pitchFamily="34" charset="0"/>
                 <a:ea typeface="Cascadia Mono" pitchFamily="34" charset="-122"/>
@@ -22222,7 +23074,7 @@
             <a:r>
               <a:rPr lang="zh-CN" altLang="en-US" sz="1400" dirty="0">
                 <a:solidFill>
-                  <a:srgbClr val="12374E"/>
+                  <a:srgbClr val="000000"/>
                 </a:solidFill>
                 <a:latin typeface="Cascadia Mono" pitchFamily="34" charset="0"/>
                 <a:ea typeface="Cascadia Mono" pitchFamily="34" charset="-122"/>
@@ -22264,7 +23116,7 @@
             <a:r>
               <a:rPr lang="zh-CN" altLang="en-US" sz="1400" dirty="0">
                 <a:solidFill>
-                  <a:srgbClr val="12374E"/>
+                  <a:srgbClr val="000000"/>
                 </a:solidFill>
                 <a:latin typeface="Cascadia Mono" pitchFamily="34" charset="0"/>
                 <a:ea typeface="Cascadia Mono" pitchFamily="34" charset="-122"/>
@@ -22306,7 +23158,7 @@
             <a:r>
               <a:rPr lang="zh-CN" altLang="en-US" sz="1400" dirty="0">
                 <a:solidFill>
-                  <a:srgbClr val="12374E"/>
+                  <a:srgbClr val="000000"/>
                 </a:solidFill>
                 <a:latin typeface="Cascadia Mono" pitchFamily="34" charset="0"/>
                 <a:ea typeface="Cascadia Mono" pitchFamily="34" charset="-122"/>
@@ -22348,7 +23200,7 @@
             <a:r>
               <a:rPr lang="zh-CN" altLang="en-US" sz="1400" dirty="0">
                 <a:solidFill>
-                  <a:srgbClr val="12374E"/>
+                  <a:srgbClr val="000000"/>
                 </a:solidFill>
                 <a:latin typeface="Cascadia Mono" pitchFamily="34" charset="0"/>
                 <a:ea typeface="Cascadia Mono" pitchFamily="34" charset="-122"/>
@@ -22459,7 +23311,7 @@
             <a:r>
               <a:rPr lang="zh-CN" altLang="en-US" sz="1600" dirty="0">
                 <a:solidFill>
-                  <a:srgbClr val="12374E"/>
+                  <a:srgbClr val="000000"/>
                 </a:solidFill>
                 <a:latin typeface="Microsoft YaHei" pitchFamily="34" charset="0"/>
                 <a:ea typeface="Microsoft YaHei" pitchFamily="34" charset="-122"/>
@@ -22486,11 +23338,11 @@
             <a:avLst/>
           </a:prstGeom>
           <a:solidFill>
-            <a:srgbClr val="9EA8AE"/>
-          </a:solidFill>
-          <a:ln w="12700">
-            <a:solidFill>
-              <a:srgbClr val="9EA8AE">
+            <a:srgbClr val="777777"/>
+          </a:solidFill>
+          <a:ln w="12700">
+            <a:solidFill>
+              <a:srgbClr val="777777">
                 <a:alpha val="0"/>
               </a:srgbClr>
             </a:solidFill>
@@ -22570,7 +23422,7 @@
             <a:r>
               <a:rPr lang="zh-CN" altLang="en-US" sz="1600" dirty="0">
                 <a:solidFill>
-                  <a:srgbClr val="12374E"/>
+                  <a:srgbClr val="000000"/>
                 </a:solidFill>
                 <a:latin typeface="Microsoft YaHei" pitchFamily="34" charset="0"/>
                 <a:ea typeface="Microsoft YaHei" pitchFamily="34" charset="-122"/>
@@ -22597,11 +23449,11 @@
             <a:avLst/>
           </a:prstGeom>
           <a:solidFill>
-            <a:srgbClr val="9EA8AE"/>
-          </a:solidFill>
-          <a:ln w="12700">
-            <a:solidFill>
-              <a:srgbClr val="9EA8AE">
+            <a:srgbClr val="777777"/>
+          </a:solidFill>
+          <a:ln w="12700">
+            <a:solidFill>
+              <a:srgbClr val="777777">
                 <a:alpha val="0"/>
               </a:srgbClr>
             </a:solidFill>
@@ -22681,7 +23533,7 @@
             <a:r>
               <a:rPr lang="zh-CN" altLang="en-US" sz="1600" dirty="0">
                 <a:solidFill>
-                  <a:srgbClr val="12374E"/>
+                  <a:srgbClr val="000000"/>
                 </a:solidFill>
                 <a:latin typeface="Microsoft YaHei" pitchFamily="34" charset="0"/>
                 <a:ea typeface="Microsoft YaHei" pitchFamily="34" charset="-122"/>
@@ -22834,11 +23686,11 @@
             <a:avLst/>
           </a:prstGeom>
           <a:solidFill>
-            <a:srgbClr val="D8E2E9"/>
-          </a:solidFill>
-          <a:ln w="12700">
-            <a:solidFill>
-              <a:srgbClr val="D8E2E9">
+            <a:srgbClr val="CCDEEA"/>
+          </a:solidFill>
+          <a:ln w="12700">
+            <a:solidFill>
+              <a:srgbClr val="CCDEEA">
                 <a:alpha val="0"/>
               </a:srgbClr>
             </a:solidFill>
@@ -23163,7 +24015,7 @@
             <a:r>
               <a:rPr lang="zh-CN" altLang="en-US" sz="1600" dirty="0">
                 <a:solidFill>
-                  <a:srgbClr val="12374E"/>
+                  <a:srgbClr val="000000"/>
                 </a:solidFill>
                 <a:latin typeface="Microsoft YaHei" pitchFamily="34" charset="0"/>
                 <a:ea typeface="Microsoft YaHei" pitchFamily="34" charset="-122"/>
@@ -23284,7 +24136,7 @@
             <a:r>
               <a:rPr lang="zh-CN" altLang="en-US" sz="1600" dirty="0">
                 <a:solidFill>
-                  <a:srgbClr val="12374E"/>
+                  <a:srgbClr val="000000"/>
                 </a:solidFill>
                 <a:latin typeface="Microsoft YaHei" pitchFamily="34" charset="0"/>
                 <a:ea typeface="Microsoft YaHei" pitchFamily="34" charset="-122"/>
@@ -23327,7 +24179,7 @@
             <a:r>
               <a:rPr lang="zh-CN" altLang="en-US" sz="1600" dirty="0">
                 <a:solidFill>
-                  <a:srgbClr val="12374E"/>
+                  <a:srgbClr val="000000"/>
                 </a:solidFill>
                 <a:latin typeface="Microsoft YaHei" pitchFamily="34" charset="0"/>
                 <a:ea typeface="Microsoft YaHei" pitchFamily="34" charset="-122"/>
@@ -23370,7 +24222,7 @@
             <a:r>
               <a:rPr lang="zh-CN" altLang="en-US" sz="1600" dirty="0">
                 <a:solidFill>
-                  <a:srgbClr val="12374E"/>
+                  <a:srgbClr val="000000"/>
                 </a:solidFill>
                 <a:latin typeface="Microsoft YaHei" pitchFamily="34" charset="0"/>
                 <a:ea typeface="Microsoft YaHei" pitchFamily="34" charset="-122"/>
@@ -23533,7 +24385,7 @@
             <a:r>
               <a:rPr lang="zh-CN" altLang="en-US" sz="1600" dirty="0">
                 <a:solidFill>
-                  <a:srgbClr val="12374E"/>
+                  <a:srgbClr val="000000"/>
                 </a:solidFill>
                 <a:latin typeface="Microsoft YaHei" pitchFamily="34" charset="0"/>
                 <a:ea typeface="Microsoft YaHei" pitchFamily="34" charset="-122"/>
@@ -23576,7 +24428,7 @@
             <a:r>
               <a:rPr lang="zh-CN" altLang="en-US" sz="1600" dirty="0">
                 <a:solidFill>
-                  <a:srgbClr val="12374E"/>
+                  <a:srgbClr val="000000"/>
                 </a:solidFill>
                 <a:latin typeface="Microsoft YaHei" pitchFamily="34" charset="0"/>
                 <a:ea typeface="Microsoft YaHei" pitchFamily="34" charset="-122"/>
@@ -23619,7 +24471,7 @@
             <a:r>
               <a:rPr lang="zh-CN" altLang="en-US" sz="1600" dirty="0">
                 <a:solidFill>
-                  <a:srgbClr val="12374E"/>
+                  <a:srgbClr val="000000"/>
                 </a:solidFill>
                 <a:latin typeface="Microsoft YaHei" pitchFamily="34" charset="0"/>
                 <a:ea typeface="Microsoft YaHei" pitchFamily="34" charset="-122"/>
@@ -23782,7 +24634,7 @@
             <a:r>
               <a:rPr lang="zh-CN" altLang="en-US" sz="1600" dirty="0">
                 <a:solidFill>
-                  <a:srgbClr val="12374E"/>
+                  <a:srgbClr val="000000"/>
                 </a:solidFill>
                 <a:latin typeface="Microsoft YaHei" pitchFamily="34" charset="0"/>
                 <a:ea typeface="Microsoft YaHei" pitchFamily="34" charset="-122"/>
@@ -23825,7 +24677,7 @@
             <a:r>
               <a:rPr lang="zh-CN" altLang="en-US" sz="1600" dirty="0">
                 <a:solidFill>
-                  <a:srgbClr val="12374E"/>
+                  <a:srgbClr val="000000"/>
                 </a:solidFill>
                 <a:latin typeface="Microsoft YaHei" pitchFamily="34" charset="0"/>
                 <a:ea typeface="Microsoft YaHei" pitchFamily="34" charset="-122"/>
@@ -23868,7 +24720,7 @@
             <a:r>
               <a:rPr lang="zh-CN" altLang="en-US" sz="1600" dirty="0">
                 <a:solidFill>
-                  <a:srgbClr val="12374E"/>
+                  <a:srgbClr val="000000"/>
                 </a:solidFill>
                 <a:latin typeface="Microsoft YaHei" pitchFamily="34" charset="0"/>
                 <a:ea typeface="Microsoft YaHei" pitchFamily="34" charset="-122"/>
@@ -24031,7 +24883,7 @@
             <a:r>
               <a:rPr lang="zh-CN" altLang="en-US" sz="1600" dirty="0">
                 <a:solidFill>
-                  <a:srgbClr val="12374E"/>
+                  <a:srgbClr val="000000"/>
                 </a:solidFill>
                 <a:latin typeface="Microsoft YaHei" pitchFamily="34" charset="0"/>
                 <a:ea typeface="Microsoft YaHei" pitchFamily="34" charset="-122"/>
@@ -24074,7 +24926,7 @@
             <a:r>
               <a:rPr lang="zh-CN" altLang="en-US" sz="1600" dirty="0">
                 <a:solidFill>
-                  <a:srgbClr val="12374E"/>
+                  <a:srgbClr val="000000"/>
                 </a:solidFill>
                 <a:latin typeface="Microsoft YaHei" pitchFamily="34" charset="0"/>
                 <a:ea typeface="Microsoft YaHei" pitchFamily="34" charset="-122"/>
@@ -24117,7 +24969,7 @@
             <a:r>
               <a:rPr lang="zh-CN" altLang="en-US" sz="1600" dirty="0">
                 <a:solidFill>
-                  <a:srgbClr val="12374E"/>
+                  <a:srgbClr val="000000"/>
                 </a:solidFill>
                 <a:latin typeface="Microsoft YaHei" pitchFamily="34" charset="0"/>
                 <a:ea typeface="Microsoft YaHei" pitchFamily="34" charset="-122"/>
@@ -24270,11 +25122,11 @@
             <a:avLst/>
           </a:prstGeom>
           <a:solidFill>
-            <a:srgbClr val="D8E2E9"/>
-          </a:solidFill>
-          <a:ln w="12700">
-            <a:solidFill>
-              <a:srgbClr val="D8E2E9">
+            <a:srgbClr val="CCDEEA"/>
+          </a:solidFill>
+          <a:ln w="12700">
+            <a:solidFill>
+              <a:srgbClr val="CCDEEA">
                 <a:alpha val="0"/>
               </a:srgbClr>
             </a:solidFill>
@@ -24467,7 +25319,7 @@
             <a:r>
               <a:rPr lang="zh-CN" altLang="en-US" sz="3360" b="1" dirty="0">
                 <a:solidFill>
-                  <a:srgbClr val="12374E"/>
+                  <a:srgbClr val="000000"/>
                 </a:solidFill>
                 <a:latin typeface="Microsoft YaHei" pitchFamily="34" charset="0"/>
                 <a:ea typeface="Microsoft YaHei" pitchFamily="34" charset="-122"/>
@@ -24838,7 +25690,7 @@
             <a:r>
               <a:rPr lang="zh-CN" altLang="en-US" sz="1600" dirty="0">
                 <a:solidFill>
-                  <a:srgbClr val="12374E"/>
+                  <a:srgbClr val="000000"/>
                 </a:solidFill>
                 <a:latin typeface="Microsoft YaHei" pitchFamily="34" charset="0"/>
                 <a:ea typeface="Microsoft YaHei" pitchFamily="34" charset="-122"/>
@@ -24977,7 +25829,7 @@
             <a:r>
               <a:rPr lang="zh-CN" altLang="en-US" sz="1600" dirty="0">
                 <a:solidFill>
-                  <a:srgbClr val="12374E"/>
+                  <a:srgbClr val="000000"/>
                 </a:solidFill>
                 <a:latin typeface="Microsoft YaHei" pitchFamily="34" charset="0"/>
                 <a:ea typeface="Microsoft YaHei" pitchFamily="34" charset="-122"/>
@@ -25020,7 +25872,7 @@
             <a:r>
               <a:rPr lang="zh-CN" altLang="en-US" sz="1600" dirty="0">
                 <a:solidFill>
-                  <a:srgbClr val="12374E"/>
+                  <a:srgbClr val="000000"/>
                 </a:solidFill>
                 <a:latin typeface="Microsoft YaHei" pitchFamily="34" charset="0"/>
                 <a:ea typeface="Microsoft YaHei" pitchFamily="34" charset="-122"/>
@@ -25063,7 +25915,7 @@
             <a:r>
               <a:rPr lang="zh-CN" altLang="en-US" sz="1600" dirty="0">
                 <a:solidFill>
-                  <a:srgbClr val="12374E"/>
+                  <a:srgbClr val="000000"/>
                 </a:solidFill>
                 <a:latin typeface="Microsoft YaHei" pitchFamily="34" charset="0"/>
                 <a:ea typeface="Microsoft YaHei" pitchFamily="34" charset="-122"/>
@@ -25106,7 +25958,7 @@
             <a:r>
               <a:rPr lang="zh-CN" altLang="en-US" sz="1600" dirty="0">
                 <a:solidFill>
-                  <a:srgbClr val="12374E"/>
+                  <a:srgbClr val="000000"/>
                 </a:solidFill>
                 <a:latin typeface="Microsoft YaHei" pitchFamily="34" charset="0"/>
                 <a:ea typeface="Microsoft YaHei" pitchFamily="34" charset="-122"/>
@@ -25245,7 +26097,7 @@
             <a:r>
               <a:rPr lang="zh-CN" altLang="en-US" sz="1600" dirty="0">
                 <a:solidFill>
-                  <a:srgbClr val="12374E"/>
+                  <a:srgbClr val="000000"/>
                 </a:solidFill>
                 <a:latin typeface="Microsoft YaHei" pitchFamily="34" charset="0"/>
                 <a:ea typeface="Microsoft YaHei" pitchFamily="34" charset="-122"/>
@@ -25288,7 +26140,7 @@
             <a:r>
               <a:rPr lang="zh-CN" altLang="en-US" sz="1600" dirty="0">
                 <a:solidFill>
-                  <a:srgbClr val="12374E"/>
+                  <a:srgbClr val="000000"/>
                 </a:solidFill>
                 <a:latin typeface="Microsoft YaHei" pitchFamily="34" charset="0"/>
                 <a:ea typeface="Microsoft YaHei" pitchFamily="34" charset="-122"/>
@@ -25331,7 +26183,7 @@
             <a:r>
               <a:rPr lang="zh-CN" altLang="en-US" sz="1600" dirty="0">
                 <a:solidFill>
-                  <a:srgbClr val="12374E"/>
+                  <a:srgbClr val="000000"/>
                 </a:solidFill>
                 <a:latin typeface="Microsoft YaHei" pitchFamily="34" charset="0"/>
                 <a:ea typeface="Microsoft YaHei" pitchFamily="34" charset="-122"/>
@@ -25374,7 +26226,7 @@
             <a:r>
               <a:rPr lang="zh-CN" altLang="en-US" sz="1600" dirty="0">
                 <a:solidFill>
-                  <a:srgbClr val="12374E"/>
+                  <a:srgbClr val="000000"/>
                 </a:solidFill>
                 <a:latin typeface="Microsoft YaHei" pitchFamily="34" charset="0"/>
                 <a:ea typeface="Microsoft YaHei" pitchFamily="34" charset="-122"/>
@@ -25513,7 +26365,7 @@
             <a:r>
               <a:rPr lang="zh-CN" altLang="en-US" sz="1600" dirty="0">
                 <a:solidFill>
-                  <a:srgbClr val="12374E"/>
+                  <a:srgbClr val="000000"/>
                 </a:solidFill>
                 <a:latin typeface="Microsoft YaHei" pitchFamily="34" charset="0"/>
                 <a:ea typeface="Microsoft YaHei" pitchFamily="34" charset="-122"/>
@@ -25556,7 +26408,7 @@
             <a:r>
               <a:rPr lang="zh-CN" altLang="en-US" sz="1600" dirty="0">
                 <a:solidFill>
-                  <a:srgbClr val="12374E"/>
+                  <a:srgbClr val="000000"/>
                 </a:solidFill>
                 <a:latin typeface="Microsoft YaHei" pitchFamily="34" charset="0"/>
                 <a:ea typeface="Microsoft YaHei" pitchFamily="34" charset="-122"/>
@@ -25599,7 +26451,7 @@
             <a:r>
               <a:rPr lang="zh-CN" altLang="en-US" sz="1600" dirty="0">
                 <a:solidFill>
-                  <a:srgbClr val="12374E"/>
+                  <a:srgbClr val="000000"/>
                 </a:solidFill>
                 <a:latin typeface="Microsoft YaHei" pitchFamily="34" charset="0"/>
                 <a:ea typeface="Microsoft YaHei" pitchFamily="34" charset="-122"/>
@@ -25642,7 +26494,7 @@
             <a:r>
               <a:rPr lang="zh-CN" altLang="en-US" sz="1600" dirty="0">
                 <a:solidFill>
-                  <a:srgbClr val="12374E"/>
+                  <a:srgbClr val="000000"/>
                 </a:solidFill>
                 <a:latin typeface="Microsoft YaHei" pitchFamily="34" charset="0"/>
                 <a:ea typeface="Microsoft YaHei" pitchFamily="34" charset="-122"/>
@@ -25864,11 +26716,11 @@
             <a:avLst/>
           </a:prstGeom>
           <a:solidFill>
-            <a:srgbClr val="D8E2E9"/>
-          </a:solidFill>
-          <a:ln w="12700">
-            <a:solidFill>
-              <a:srgbClr val="D8E2E9">
+            <a:srgbClr val="CCDEEA"/>
+          </a:solidFill>
+          <a:ln w="12700">
+            <a:solidFill>
+              <a:srgbClr val="CCDEEA">
                 <a:alpha val="0"/>
               </a:srgbClr>
             </a:solidFill>
@@ -26193,7 +27045,7 @@
             <a:r>
               <a:rPr lang="zh-CN" altLang="en-US" sz="1600" dirty="0">
                 <a:solidFill>
-                  <a:srgbClr val="12374E"/>
+                  <a:srgbClr val="000000"/>
                 </a:solidFill>
                 <a:latin typeface="Microsoft YaHei" pitchFamily="34" charset="0"/>
                 <a:ea typeface="Microsoft YaHei" pitchFamily="34" charset="-122"/>
@@ -26368,7 +27220,7 @@
             <a:r>
               <a:rPr lang="zh-CN" altLang="en-US" sz="1600" dirty="0">
                 <a:solidFill>
-                  <a:srgbClr val="12374E"/>
+                  <a:srgbClr val="000000"/>
                 </a:solidFill>
                 <a:latin typeface="Microsoft YaHei" pitchFamily="34" charset="0"/>
                 <a:ea typeface="Microsoft YaHei" pitchFamily="34" charset="-122"/>
@@ -26411,7 +27263,7 @@
             <a:r>
               <a:rPr lang="zh-CN" altLang="en-US" sz="1600" dirty="0">
                 <a:solidFill>
-                  <a:srgbClr val="12374E"/>
+                  <a:srgbClr val="000000"/>
                 </a:solidFill>
                 <a:latin typeface="Microsoft YaHei" pitchFamily="34" charset="0"/>
                 <a:ea typeface="Microsoft YaHei" pitchFamily="34" charset="-122"/>
@@ -26454,7 +27306,7 @@
             <a:r>
               <a:rPr lang="zh-CN" altLang="en-US" sz="1600" dirty="0">
                 <a:solidFill>
-                  <a:srgbClr val="12374E"/>
+                  <a:srgbClr val="000000"/>
                 </a:solidFill>
                 <a:latin typeface="Microsoft YaHei" pitchFamily="34" charset="0"/>
                 <a:ea typeface="Microsoft YaHei" pitchFamily="34" charset="-122"/>
@@ -26497,7 +27349,7 @@
             <a:r>
               <a:rPr lang="zh-CN" altLang="en-US" sz="1600" dirty="0">
                 <a:solidFill>
-                  <a:srgbClr val="12374E"/>
+                  <a:srgbClr val="000000"/>
                 </a:solidFill>
                 <a:latin typeface="Microsoft YaHei" pitchFamily="34" charset="0"/>
                 <a:ea typeface="Microsoft YaHei" pitchFamily="34" charset="-122"/>
@@ -26524,11 +27376,11 @@
             <a:avLst/>
           </a:prstGeom>
           <a:solidFill>
-            <a:srgbClr val="9EA8AE"/>
-          </a:solidFill>
-          <a:ln w="12700">
-            <a:solidFill>
-              <a:srgbClr val="9EA8AE">
+            <a:srgbClr val="777777"/>
+          </a:solidFill>
+          <a:ln w="12700">
+            <a:solidFill>
+              <a:srgbClr val="777777">
                 <a:alpha val="0"/>
               </a:srgbClr>
             </a:solidFill>
@@ -26609,7 +27461,7 @@
             <a:r>
               <a:rPr lang="zh-CN" altLang="en-US" sz="1600" dirty="0">
                 <a:solidFill>
-                  <a:srgbClr val="12374E"/>
+                  <a:srgbClr val="000000"/>
                 </a:solidFill>
                 <a:latin typeface="Microsoft YaHei" pitchFamily="34" charset="0"/>
                 <a:ea typeface="Microsoft YaHei" pitchFamily="34" charset="-122"/>
@@ -26652,7 +27504,7 @@
             <a:r>
               <a:rPr lang="zh-CN" altLang="en-US" sz="1600" dirty="0">
                 <a:solidFill>
-                  <a:srgbClr val="12374E"/>
+                  <a:srgbClr val="000000"/>
                 </a:solidFill>
                 <a:latin typeface="Microsoft YaHei" pitchFamily="34" charset="0"/>
                 <a:ea typeface="Microsoft YaHei" pitchFamily="34" charset="-122"/>
@@ -26695,7 +27547,7 @@
             <a:r>
               <a:rPr lang="zh-CN" altLang="en-US" sz="1600" dirty="0">
                 <a:solidFill>
-                  <a:srgbClr val="12374E"/>
+                  <a:srgbClr val="000000"/>
                 </a:solidFill>
                 <a:latin typeface="Microsoft YaHei" pitchFamily="34" charset="0"/>
                 <a:ea typeface="Microsoft YaHei" pitchFamily="34" charset="-122"/>
@@ -26738,7 +27590,7 @@
             <a:r>
               <a:rPr lang="zh-CN" altLang="en-US" sz="1600" dirty="0">
                 <a:solidFill>
-                  <a:srgbClr val="12374E"/>
+                  <a:srgbClr val="000000"/>
                 </a:solidFill>
                 <a:latin typeface="Microsoft YaHei" pitchFamily="34" charset="0"/>
                 <a:ea typeface="Microsoft YaHei" pitchFamily="34" charset="-122"/>
@@ -26960,11 +27812,11 @@
             <a:avLst/>
           </a:prstGeom>
           <a:solidFill>
-            <a:srgbClr val="D8E2E9"/>
-          </a:solidFill>
-          <a:ln w="12700">
-            <a:solidFill>
-              <a:srgbClr val="D8E2E9">
+            <a:srgbClr val="CCDEEA"/>
+          </a:solidFill>
+          <a:ln w="12700">
+            <a:solidFill>
+              <a:srgbClr val="CCDEEA">
                 <a:alpha val="0"/>
               </a:srgbClr>
             </a:solidFill>
@@ -27289,7 +28141,7 @@
             <a:r>
               <a:rPr lang="zh-CN" altLang="en-US" sz="1600" dirty="0">
                 <a:solidFill>
-                  <a:srgbClr val="12374E"/>
+                  <a:srgbClr val="000000"/>
                 </a:solidFill>
                 <a:latin typeface="Microsoft YaHei" pitchFamily="34" charset="0"/>
                 <a:ea typeface="Microsoft YaHei" pitchFamily="34" charset="-122"/>
@@ -27446,7 +28298,7 @@
             <a:r>
               <a:rPr lang="zh-CN" altLang="en-US" sz="1600" dirty="0">
                 <a:solidFill>
-                  <a:srgbClr val="12374E"/>
+                  <a:srgbClr val="000000"/>
                 </a:solidFill>
                 <a:latin typeface="Microsoft YaHei" pitchFamily="34" charset="0"/>
                 <a:ea typeface="Microsoft YaHei" pitchFamily="34" charset="-122"/>
@@ -27489,7 +28341,7 @@
             <a:r>
               <a:rPr lang="zh-CN" altLang="en-US" sz="1600" dirty="0">
                 <a:solidFill>
-                  <a:srgbClr val="12374E"/>
+                  <a:srgbClr val="000000"/>
                 </a:solidFill>
                 <a:latin typeface="Microsoft YaHei" pitchFamily="34" charset="0"/>
                 <a:ea typeface="Microsoft YaHei" pitchFamily="34" charset="-122"/>
@@ -27532,7 +28384,7 @@
             <a:r>
               <a:rPr lang="zh-CN" altLang="en-US" sz="1600" dirty="0">
                 <a:solidFill>
-                  <a:srgbClr val="12374E"/>
+                  <a:srgbClr val="000000"/>
                 </a:solidFill>
                 <a:latin typeface="Microsoft YaHei" pitchFamily="34" charset="0"/>
                 <a:ea typeface="Microsoft YaHei" pitchFamily="34" charset="-122"/>
@@ -27575,7 +28427,7 @@
             <a:r>
               <a:rPr lang="zh-CN" altLang="en-US" sz="1600" dirty="0">
                 <a:solidFill>
-                  <a:srgbClr val="12374E"/>
+                  <a:srgbClr val="000000"/>
                 </a:solidFill>
                 <a:latin typeface="Microsoft YaHei" pitchFamily="34" charset="0"/>
                 <a:ea typeface="Microsoft YaHei" pitchFamily="34" charset="-122"/>
@@ -27732,7 +28584,7 @@
             <a:r>
               <a:rPr lang="zh-CN" altLang="en-US" sz="1600" dirty="0">
                 <a:solidFill>
-                  <a:srgbClr val="12374E"/>
+                  <a:srgbClr val="000000"/>
                 </a:solidFill>
                 <a:latin typeface="Microsoft YaHei" pitchFamily="34" charset="0"/>
                 <a:ea typeface="Microsoft YaHei" pitchFamily="34" charset="-122"/>
@@ -27775,7 +28627,7 @@
             <a:r>
               <a:rPr lang="zh-CN" altLang="en-US" sz="1600" dirty="0">
                 <a:solidFill>
-                  <a:srgbClr val="12374E"/>
+                  <a:srgbClr val="000000"/>
                 </a:solidFill>
                 <a:latin typeface="Microsoft YaHei" pitchFamily="34" charset="0"/>
                 <a:ea typeface="Microsoft YaHei" pitchFamily="34" charset="-122"/>
@@ -27818,7 +28670,7 @@
             <a:r>
               <a:rPr lang="zh-CN" altLang="en-US" sz="1600" dirty="0">
                 <a:solidFill>
-                  <a:srgbClr val="12374E"/>
+                  <a:srgbClr val="000000"/>
                 </a:solidFill>
                 <a:latin typeface="Microsoft YaHei" pitchFamily="34" charset="0"/>
                 <a:ea typeface="Microsoft YaHei" pitchFamily="34" charset="-122"/>
@@ -27861,7 +28713,7 @@
             <a:r>
               <a:rPr lang="zh-CN" altLang="en-US" sz="1600" dirty="0">
                 <a:solidFill>
-                  <a:srgbClr val="12374E"/>
+                  <a:srgbClr val="000000"/>
                 </a:solidFill>
                 <a:latin typeface="Microsoft YaHei" pitchFamily="34" charset="0"/>
                 <a:ea typeface="Microsoft YaHei" pitchFamily="34" charset="-122"/>
@@ -27972,7 +28824,7 @@
             <a:r>
               <a:rPr lang="zh-CN" altLang="en-US" sz="1400" dirty="0">
                 <a:solidFill>
-                  <a:srgbClr val="12374E"/>
+                  <a:srgbClr val="000000"/>
                 </a:solidFill>
                 <a:latin typeface="Microsoft YaHei" pitchFamily="34" charset="0"/>
                 <a:ea typeface="Microsoft YaHei" pitchFamily="34" charset="-122"/>
@@ -27999,11 +28851,11 @@
             <a:avLst/>
           </a:prstGeom>
           <a:solidFill>
-            <a:srgbClr val="9EA8AE"/>
-          </a:solidFill>
-          <a:ln w="12700">
-            <a:solidFill>
-              <a:srgbClr val="9EA8AE">
+            <a:srgbClr val="777777"/>
+          </a:solidFill>
+          <a:ln w="12700">
+            <a:solidFill>
+              <a:srgbClr val="777777">
                 <a:alpha val="0"/>
               </a:srgbClr>
             </a:solidFill>
@@ -28083,7 +28935,7 @@
             <a:r>
               <a:rPr lang="zh-CN" altLang="en-US" sz="1400" dirty="0">
                 <a:solidFill>
-                  <a:srgbClr val="12374E"/>
+                  <a:srgbClr val="000000"/>
                 </a:solidFill>
                 <a:latin typeface="Microsoft YaHei" pitchFamily="34" charset="0"/>
                 <a:ea typeface="Microsoft YaHei" pitchFamily="34" charset="-122"/>
@@ -28110,11 +28962,11 @@
             <a:avLst/>
           </a:prstGeom>
           <a:solidFill>
-            <a:srgbClr val="9EA8AE"/>
-          </a:solidFill>
-          <a:ln w="12700">
-            <a:solidFill>
-              <a:srgbClr val="9EA8AE">
+            <a:srgbClr val="777777"/>
+          </a:solidFill>
+          <a:ln w="12700">
+            <a:solidFill>
+              <a:srgbClr val="777777">
                 <a:alpha val="0"/>
               </a:srgbClr>
             </a:solidFill>
@@ -28194,7 +29046,7 @@
             <a:r>
               <a:rPr lang="zh-CN" altLang="en-US" sz="1400" dirty="0">
                 <a:solidFill>
-                  <a:srgbClr val="12374E"/>
+                  <a:srgbClr val="000000"/>
                 </a:solidFill>
                 <a:latin typeface="Microsoft YaHei" pitchFamily="34" charset="0"/>
                 <a:ea typeface="Microsoft YaHei" pitchFamily="34" charset="-122"/>
@@ -28347,11 +29199,11 @@
             <a:avLst/>
           </a:prstGeom>
           <a:solidFill>
-            <a:srgbClr val="D8E2E9"/>
-          </a:solidFill>
-          <a:ln w="12700">
-            <a:solidFill>
-              <a:srgbClr val="D8E2E9">
+            <a:srgbClr val="CCDEEA"/>
+          </a:solidFill>
+          <a:ln w="12700">
+            <a:solidFill>
+              <a:srgbClr val="CCDEEA">
                 <a:alpha val="0"/>
               </a:srgbClr>
             </a:solidFill>
@@ -28676,7 +29528,7 @@
             <a:r>
               <a:rPr lang="zh-CN" altLang="en-US" sz="1600" dirty="0">
                 <a:solidFill>
-                  <a:srgbClr val="12374E"/>
+                  <a:srgbClr val="000000"/>
                 </a:solidFill>
                 <a:latin typeface="Microsoft YaHei" pitchFamily="34" charset="0"/>
                 <a:ea typeface="Microsoft YaHei" pitchFamily="34" charset="-122"/>
@@ -28829,7 +29681,7 @@
             <a:r>
               <a:rPr lang="zh-CN" altLang="en-US" sz="1600" dirty="0">
                 <a:solidFill>
-                  <a:srgbClr val="12374E"/>
+                  <a:srgbClr val="000000"/>
                 </a:solidFill>
                 <a:latin typeface="Microsoft YaHei" pitchFamily="34" charset="0"/>
                 <a:ea typeface="Microsoft YaHei" pitchFamily="34" charset="-122"/>
@@ -28940,7 +29792,7 @@
             <a:r>
               <a:rPr lang="zh-CN" altLang="en-US" sz="1600" dirty="0">
                 <a:solidFill>
-                  <a:srgbClr val="12374E"/>
+                  <a:srgbClr val="000000"/>
                 </a:solidFill>
                 <a:latin typeface="Microsoft YaHei" pitchFamily="34" charset="0"/>
                 <a:ea typeface="Microsoft YaHei" pitchFamily="34" charset="-122"/>
@@ -29051,7 +29903,7 @@
             <a:r>
               <a:rPr lang="zh-CN" altLang="en-US" sz="1600" dirty="0">
                 <a:solidFill>
-                  <a:srgbClr val="12374E"/>
+                  <a:srgbClr val="000000"/>
                 </a:solidFill>
                 <a:latin typeface="Microsoft YaHei" pitchFamily="34" charset="0"/>
                 <a:ea typeface="Microsoft YaHei" pitchFamily="34" charset="-122"/>
@@ -29477,7 +30329,7 @@
             <a:r>
               <a:rPr lang="zh-CN" altLang="en-US" sz="1400" b="1" dirty="0">
                 <a:solidFill>
-                  <a:srgbClr val="12374E"/>
+                  <a:srgbClr val="000000"/>
                 </a:solidFill>
                 <a:latin typeface="Microsoft YaHei" pitchFamily="34" charset="0"/>
                 <a:ea typeface="Microsoft YaHei" pitchFamily="34" charset="-122"/>
@@ -29573,7 +30425,7 @@
             <a:r>
               <a:rPr lang="zh-CN" altLang="en-US" sz="1400" dirty="0">
                 <a:solidFill>
-                  <a:srgbClr val="12374E"/>
+                  <a:srgbClr val="000000"/>
                 </a:solidFill>
                 <a:latin typeface="Microsoft YaHei" pitchFamily="34" charset="0"/>
                 <a:ea typeface="Microsoft YaHei" pitchFamily="34" charset="-122"/>
@@ -29593,7 +30445,7 @@
             <a:r>
               <a:rPr lang="zh-CN" altLang="en-US" sz="1400" dirty="0">
                 <a:solidFill>
-                  <a:srgbClr val="12374E"/>
+                  <a:srgbClr val="000000"/>
                 </a:solidFill>
                 <a:latin typeface="Microsoft YaHei" pitchFamily="34" charset="0"/>
                 <a:ea typeface="Microsoft YaHei" pitchFamily="34" charset="-122"/>
@@ -29689,7 +30541,7 @@
             <a:r>
               <a:rPr lang="zh-CN" altLang="en-US" sz="1400" dirty="0">
                 <a:solidFill>
-                  <a:srgbClr val="12374E"/>
+                  <a:srgbClr val="000000"/>
                 </a:solidFill>
                 <a:latin typeface="Microsoft YaHei" pitchFamily="34" charset="0"/>
                 <a:ea typeface="Microsoft YaHei" pitchFamily="34" charset="-122"/>
@@ -29709,7 +30561,7 @@
             <a:r>
               <a:rPr lang="zh-CN" altLang="en-US" sz="1400" dirty="0">
                 <a:solidFill>
-                  <a:srgbClr val="12374E"/>
+                  <a:srgbClr val="000000"/>
                 </a:solidFill>
                 <a:latin typeface="Microsoft YaHei" pitchFamily="34" charset="0"/>
                 <a:ea typeface="Microsoft YaHei" pitchFamily="34" charset="-122"/>
@@ -29805,7 +30657,7 @@
             <a:r>
               <a:rPr lang="zh-CN" altLang="en-US" sz="1400" b="1" dirty="0">
                 <a:solidFill>
-                  <a:srgbClr val="12374E"/>
+                  <a:srgbClr val="000000"/>
                 </a:solidFill>
                 <a:latin typeface="Microsoft YaHei" pitchFamily="34" charset="0"/>
                 <a:ea typeface="Microsoft YaHei" pitchFamily="34" charset="-122"/>
@@ -29901,7 +30753,7 @@
             <a:r>
               <a:rPr lang="zh-CN" altLang="en-US" sz="1400" dirty="0">
                 <a:solidFill>
-                  <a:srgbClr val="12374E"/>
+                  <a:srgbClr val="000000"/>
                 </a:solidFill>
                 <a:latin typeface="Microsoft YaHei" pitchFamily="34" charset="0"/>
                 <a:ea typeface="Microsoft YaHei" pitchFamily="34" charset="-122"/>
@@ -29921,7 +30773,7 @@
             <a:r>
               <a:rPr lang="zh-CN" altLang="en-US" sz="1400" dirty="0">
                 <a:solidFill>
-                  <a:srgbClr val="12374E"/>
+                  <a:srgbClr val="000000"/>
                 </a:solidFill>
                 <a:latin typeface="Microsoft YaHei" pitchFamily="34" charset="0"/>
                 <a:ea typeface="Microsoft YaHei" pitchFamily="34" charset="-122"/>
@@ -30017,7 +30869,7 @@
             <a:r>
               <a:rPr lang="zh-CN" altLang="en-US" sz="1400" dirty="0">
                 <a:solidFill>
-                  <a:srgbClr val="12374E"/>
+                  <a:srgbClr val="000000"/>
                 </a:solidFill>
                 <a:latin typeface="Microsoft YaHei" pitchFamily="34" charset="0"/>
                 <a:ea typeface="Microsoft YaHei" pitchFamily="34" charset="-122"/>
@@ -30037,7 +30889,7 @@
             <a:r>
               <a:rPr lang="zh-CN" altLang="en-US" sz="1400" dirty="0">
                 <a:solidFill>
-                  <a:srgbClr val="12374E"/>
+                  <a:srgbClr val="000000"/>
                 </a:solidFill>
                 <a:latin typeface="Microsoft YaHei" pitchFamily="34" charset="0"/>
                 <a:ea typeface="Microsoft YaHei" pitchFamily="34" charset="-122"/>
@@ -30133,7 +30985,7 @@
             <a:r>
               <a:rPr lang="zh-CN" altLang="en-US" sz="1400" b="1" dirty="0">
                 <a:solidFill>
-                  <a:srgbClr val="12374E"/>
+                  <a:srgbClr val="000000"/>
                 </a:solidFill>
                 <a:latin typeface="Microsoft YaHei" pitchFamily="34" charset="0"/>
                 <a:ea typeface="Microsoft YaHei" pitchFamily="34" charset="-122"/>
@@ -30229,7 +31081,7 @@
             <a:r>
               <a:rPr lang="zh-CN" altLang="en-US" sz="1400" dirty="0">
                 <a:solidFill>
-                  <a:srgbClr val="12374E"/>
+                  <a:srgbClr val="000000"/>
                 </a:solidFill>
                 <a:latin typeface="Microsoft YaHei" pitchFamily="34" charset="0"/>
                 <a:ea typeface="Microsoft YaHei" pitchFamily="34" charset="-122"/>
@@ -30249,7 +31101,7 @@
             <a:r>
               <a:rPr lang="zh-CN" altLang="en-US" sz="1400" dirty="0">
                 <a:solidFill>
-                  <a:srgbClr val="12374E"/>
+                  <a:srgbClr val="000000"/>
                 </a:solidFill>
                 <a:latin typeface="Microsoft YaHei" pitchFamily="34" charset="0"/>
                 <a:ea typeface="Microsoft YaHei" pitchFamily="34" charset="-122"/>
@@ -30345,7 +31197,7 @@
             <a:r>
               <a:rPr lang="zh-CN" altLang="en-US" sz="1400" dirty="0">
                 <a:solidFill>
-                  <a:srgbClr val="12374E"/>
+                  <a:srgbClr val="000000"/>
                 </a:solidFill>
                 <a:latin typeface="Microsoft YaHei" pitchFamily="34" charset="0"/>
                 <a:ea typeface="Microsoft YaHei" pitchFamily="34" charset="-122"/>
@@ -30365,7 +31217,7 @@
             <a:r>
               <a:rPr lang="zh-CN" altLang="en-US" sz="1400" dirty="0">
                 <a:solidFill>
-                  <a:srgbClr val="12374E"/>
+                  <a:srgbClr val="000000"/>
                 </a:solidFill>
                 <a:latin typeface="Microsoft YaHei" pitchFamily="34" charset="0"/>
                 <a:ea typeface="Microsoft YaHei" pitchFamily="34" charset="-122"/>
@@ -30461,7 +31313,7 @@
             <a:r>
               <a:rPr lang="zh-CN" altLang="en-US" sz="1400" b="1" dirty="0">
                 <a:solidFill>
-                  <a:srgbClr val="12374E"/>
+                  <a:srgbClr val="000000"/>
                 </a:solidFill>
                 <a:latin typeface="Microsoft YaHei" pitchFamily="34" charset="0"/>
                 <a:ea typeface="Microsoft YaHei" pitchFamily="34" charset="-122"/>
@@ -30557,7 +31409,7 @@
             <a:r>
               <a:rPr lang="zh-CN" altLang="en-US" sz="1400" dirty="0">
                 <a:solidFill>
-                  <a:srgbClr val="12374E"/>
+                  <a:srgbClr val="000000"/>
                 </a:solidFill>
                 <a:latin typeface="Microsoft YaHei" pitchFamily="34" charset="0"/>
                 <a:ea typeface="Microsoft YaHei" pitchFamily="34" charset="-122"/>
@@ -30577,7 +31429,7 @@
             <a:r>
               <a:rPr lang="zh-CN" altLang="en-US" sz="1400" dirty="0">
                 <a:solidFill>
-                  <a:srgbClr val="12374E"/>
+                  <a:srgbClr val="000000"/>
                 </a:solidFill>
                 <a:latin typeface="Microsoft YaHei" pitchFamily="34" charset="0"/>
                 <a:ea typeface="Microsoft YaHei" pitchFamily="34" charset="-122"/>
@@ -30673,7 +31525,7 @@
             <a:r>
               <a:rPr lang="zh-CN" altLang="en-US" sz="1400" dirty="0">
                 <a:solidFill>
-                  <a:srgbClr val="12374E"/>
+                  <a:srgbClr val="000000"/>
                 </a:solidFill>
                 <a:latin typeface="Microsoft YaHei" pitchFamily="34" charset="0"/>
                 <a:ea typeface="Microsoft YaHei" pitchFamily="34" charset="-122"/>
@@ -30693,7 +31545,7 @@
             <a:r>
               <a:rPr lang="zh-CN" altLang="en-US" sz="1400" dirty="0">
                 <a:solidFill>
-                  <a:srgbClr val="12374E"/>
+                  <a:srgbClr val="000000"/>
                 </a:solidFill>
                 <a:latin typeface="Microsoft YaHei" pitchFamily="34" charset="0"/>
                 <a:ea typeface="Microsoft YaHei" pitchFamily="34" charset="-122"/>
@@ -30789,7 +31641,7 @@
             <a:r>
               <a:rPr lang="zh-CN" altLang="en-US" sz="1600" dirty="0">
                 <a:solidFill>
-                  <a:srgbClr val="12374E"/>
+                  <a:srgbClr val="000000"/>
                 </a:solidFill>
                 <a:latin typeface="Microsoft YaHei" pitchFamily="34" charset="0"/>
                 <a:ea typeface="Microsoft YaHei" pitchFamily="34" charset="-122"/>
@@ -30831,7 +31683,7 @@
             <a:r>
               <a:rPr lang="zh-CN" altLang="en-US" sz="1600" dirty="0">
                 <a:solidFill>
-                  <a:srgbClr val="12374E"/>
+                  <a:srgbClr val="000000"/>
                 </a:solidFill>
                 <a:latin typeface="Microsoft YaHei" pitchFamily="34" charset="0"/>
                 <a:ea typeface="Microsoft YaHei" pitchFamily="34" charset="-122"/>
@@ -30984,11 +31836,11 @@
             <a:avLst/>
           </a:prstGeom>
           <a:solidFill>
-            <a:srgbClr val="D8E2E9"/>
-          </a:solidFill>
-          <a:ln w="12700">
-            <a:solidFill>
-              <a:srgbClr val="D8E2E9">
+            <a:srgbClr val="CCDEEA"/>
+          </a:solidFill>
+          <a:ln w="12700">
+            <a:solidFill>
+              <a:srgbClr val="CCDEEA">
                 <a:alpha val="0"/>
               </a:srgbClr>
             </a:solidFill>
@@ -31181,7 +32033,7 @@
             <a:r>
               <a:rPr lang="zh-CN" altLang="en-US" sz="3360" b="1" dirty="0">
                 <a:solidFill>
-                  <a:srgbClr val="12374E"/>
+                  <a:srgbClr val="000000"/>
                 </a:solidFill>
                 <a:latin typeface="Microsoft YaHei" pitchFamily="34" charset="0"/>
                 <a:ea typeface="Microsoft YaHei" pitchFamily="34" charset="-122"/>
@@ -31552,7 +32404,7 @@
             <a:r>
               <a:rPr lang="zh-CN" altLang="en-US" sz="1600" dirty="0">
                 <a:solidFill>
-                  <a:srgbClr val="12374E"/>
+                  <a:srgbClr val="000000"/>
                 </a:solidFill>
                 <a:latin typeface="Microsoft YaHei" pitchFamily="34" charset="0"/>
                 <a:ea typeface="Microsoft YaHei" pitchFamily="34" charset="-122"/>
@@ -31685,7 +32537,7 @@
             <a:r>
               <a:rPr lang="zh-CN" altLang="en-US" sz="1600" dirty="0">
                 <a:solidFill>
-                  <a:srgbClr val="12374E"/>
+                  <a:srgbClr val="000000"/>
                 </a:solidFill>
                 <a:latin typeface="Microsoft YaHei" pitchFamily="34" charset="0"/>
                 <a:ea typeface="Microsoft YaHei" pitchFamily="34" charset="-122"/>
@@ -31728,7 +32580,7 @@
             <a:r>
               <a:rPr lang="zh-CN" altLang="en-US" sz="1600" dirty="0">
                 <a:solidFill>
-                  <a:srgbClr val="12374E"/>
+                  <a:srgbClr val="000000"/>
                 </a:solidFill>
                 <a:latin typeface="Microsoft YaHei" pitchFamily="34" charset="0"/>
                 <a:ea typeface="Microsoft YaHei" pitchFamily="34" charset="-122"/>
@@ -31771,7 +32623,7 @@
             <a:r>
               <a:rPr lang="zh-CN" altLang="en-US" sz="1600" dirty="0">
                 <a:solidFill>
-                  <a:srgbClr val="12374E"/>
+                  <a:srgbClr val="000000"/>
                 </a:solidFill>
                 <a:latin typeface="Microsoft YaHei" pitchFamily="34" charset="0"/>
                 <a:ea typeface="Microsoft YaHei" pitchFamily="34" charset="-122"/>
@@ -31814,7 +32666,7 @@
             <a:r>
               <a:rPr lang="zh-CN" altLang="en-US" sz="1600" dirty="0">
                 <a:solidFill>
-                  <a:srgbClr val="12374E"/>
+                  <a:srgbClr val="000000"/>
                 </a:solidFill>
                 <a:latin typeface="Microsoft YaHei" pitchFamily="34" charset="0"/>
                 <a:ea typeface="Microsoft YaHei" pitchFamily="34" charset="-122"/>
@@ -31947,7 +32799,7 @@
             <a:r>
               <a:rPr lang="zh-CN" altLang="en-US" sz="1600" dirty="0">
                 <a:solidFill>
-                  <a:srgbClr val="12374E"/>
+                  <a:srgbClr val="000000"/>
                 </a:solidFill>
                 <a:latin typeface="Microsoft YaHei" pitchFamily="34" charset="0"/>
                 <a:ea typeface="Microsoft YaHei" pitchFamily="34" charset="-122"/>
@@ -31990,7 +32842,7 @@
             <a:r>
               <a:rPr lang="zh-CN" altLang="en-US" sz="1600" dirty="0">
                 <a:solidFill>
-                  <a:srgbClr val="12374E"/>
+                  <a:srgbClr val="000000"/>
                 </a:solidFill>
                 <a:latin typeface="Microsoft YaHei" pitchFamily="34" charset="0"/>
                 <a:ea typeface="Microsoft YaHei" pitchFamily="34" charset="-122"/>
@@ -32033,7 +32885,7 @@
             <a:r>
               <a:rPr lang="zh-CN" altLang="en-US" sz="1600" dirty="0">
                 <a:solidFill>
-                  <a:srgbClr val="12374E"/>
+                  <a:srgbClr val="000000"/>
                 </a:solidFill>
                 <a:latin typeface="Microsoft YaHei" pitchFamily="34" charset="0"/>
                 <a:ea typeface="Microsoft YaHei" pitchFamily="34" charset="-122"/>
@@ -32076,7 +32928,7 @@
             <a:r>
               <a:rPr lang="zh-CN" altLang="en-US" sz="1600" dirty="0">
                 <a:solidFill>
-                  <a:srgbClr val="12374E"/>
+                  <a:srgbClr val="000000"/>
                 </a:solidFill>
                 <a:latin typeface="Microsoft YaHei" pitchFamily="34" charset="0"/>
                 <a:ea typeface="Microsoft YaHei" pitchFamily="34" charset="-122"/>
@@ -32209,7 +33061,7 @@
             <a:r>
               <a:rPr lang="zh-CN" altLang="en-US" sz="1600" dirty="0">
                 <a:solidFill>
-                  <a:srgbClr val="12374E"/>
+                  <a:srgbClr val="000000"/>
                 </a:solidFill>
                 <a:latin typeface="Microsoft YaHei" pitchFamily="34" charset="0"/>
                 <a:ea typeface="Microsoft YaHei" pitchFamily="34" charset="-122"/>
@@ -32252,7 +33104,7 @@
             <a:r>
               <a:rPr lang="zh-CN" altLang="en-US" sz="1600" dirty="0">
                 <a:solidFill>
-                  <a:srgbClr val="12374E"/>
+                  <a:srgbClr val="000000"/>
                 </a:solidFill>
                 <a:latin typeface="Microsoft YaHei" pitchFamily="34" charset="0"/>
                 <a:ea typeface="Microsoft YaHei" pitchFamily="34" charset="-122"/>
@@ -32295,7 +33147,7 @@
             <a:r>
               <a:rPr lang="zh-CN" altLang="en-US" sz="1600" dirty="0">
                 <a:solidFill>
-                  <a:srgbClr val="12374E"/>
+                  <a:srgbClr val="000000"/>
                 </a:solidFill>
                 <a:latin typeface="Microsoft YaHei" pitchFamily="34" charset="0"/>
                 <a:ea typeface="Microsoft YaHei" pitchFamily="34" charset="-122"/>
@@ -32338,7 +33190,7 @@
             <a:r>
               <a:rPr lang="zh-CN" altLang="en-US" sz="1600" dirty="0">
                 <a:solidFill>
-                  <a:srgbClr val="12374E"/>
+                  <a:srgbClr val="000000"/>
                 </a:solidFill>
                 <a:latin typeface="Microsoft YaHei" pitchFamily="34" charset="0"/>
                 <a:ea typeface="Microsoft YaHei" pitchFamily="34" charset="-122"/>
@@ -32560,11 +33412,11 @@
             <a:avLst/>
           </a:prstGeom>
           <a:solidFill>
-            <a:srgbClr val="D8E2E9"/>
-          </a:solidFill>
-          <a:ln w="12700">
-            <a:solidFill>
-              <a:srgbClr val="D8E2E9">
+            <a:srgbClr val="CCDEEA"/>
+          </a:solidFill>
+          <a:ln w="12700">
+            <a:solidFill>
+              <a:srgbClr val="CCDEEA">
                 <a:alpha val="0"/>
               </a:srgbClr>
             </a:solidFill>
@@ -32889,7 +33741,7 @@
             <a:r>
               <a:rPr lang="zh-CN" altLang="en-US" sz="1600" dirty="0">
                 <a:solidFill>
-                  <a:srgbClr val="12374E"/>
+                  <a:srgbClr val="000000"/>
                 </a:solidFill>
                 <a:latin typeface="Microsoft YaHei" pitchFamily="34" charset="0"/>
                 <a:ea typeface="Microsoft YaHei" pitchFamily="34" charset="-122"/>
@@ -33001,7 +33853,7 @@
             <a:r>
               <a:rPr lang="zh-CN" altLang="en-US" sz="1600" dirty="0">
                 <a:solidFill>
-                  <a:srgbClr val="12374E"/>
+                  <a:srgbClr val="000000"/>
                 </a:solidFill>
                 <a:latin typeface="Microsoft YaHei" pitchFamily="34" charset="0"/>
                 <a:ea typeface="Microsoft YaHei" pitchFamily="34" charset="-122"/>
@@ -33044,7 +33896,7 @@
             <a:r>
               <a:rPr lang="zh-CN" altLang="en-US" sz="1600" dirty="0">
                 <a:solidFill>
-                  <a:srgbClr val="12374E"/>
+                  <a:srgbClr val="000000"/>
                 </a:solidFill>
                 <a:latin typeface="Microsoft YaHei" pitchFamily="34" charset="0"/>
                 <a:ea typeface="Microsoft YaHei" pitchFamily="34" charset="-122"/>
@@ -33087,7 +33939,7 @@
             <a:r>
               <a:rPr lang="zh-CN" altLang="en-US" sz="1600" dirty="0">
                 <a:solidFill>
-                  <a:srgbClr val="12374E"/>
+                  <a:srgbClr val="000000"/>
                 </a:solidFill>
                 <a:latin typeface="Microsoft YaHei" pitchFamily="34" charset="0"/>
                 <a:ea typeface="Microsoft YaHei" pitchFamily="34" charset="-122"/>
@@ -33130,7 +33982,7 @@
             <a:r>
               <a:rPr lang="zh-CN" altLang="en-US" sz="1600" dirty="0">
                 <a:solidFill>
-                  <a:srgbClr val="12374E"/>
+                  <a:srgbClr val="000000"/>
                 </a:solidFill>
                 <a:latin typeface="Microsoft YaHei" pitchFamily="34" charset="0"/>
                 <a:ea typeface="Microsoft YaHei" pitchFamily="34" charset="-122"/>
@@ -33242,7 +34094,7 @@
             <a:r>
               <a:rPr lang="zh-CN" altLang="en-US" sz="1600" dirty="0">
                 <a:solidFill>
-                  <a:srgbClr val="12374E"/>
+                  <a:srgbClr val="000000"/>
                 </a:solidFill>
                 <a:latin typeface="Microsoft YaHei" pitchFamily="34" charset="0"/>
                 <a:ea typeface="Microsoft YaHei" pitchFamily="34" charset="-122"/>
@@ -33285,7 +34137,7 @@
             <a:r>
               <a:rPr lang="zh-CN" altLang="en-US" sz="1600" dirty="0">
                 <a:solidFill>
-                  <a:srgbClr val="12374E"/>
+                  <a:srgbClr val="000000"/>
                 </a:solidFill>
                 <a:latin typeface="Microsoft YaHei" pitchFamily="34" charset="0"/>
                 <a:ea typeface="Microsoft YaHei" pitchFamily="34" charset="-122"/>
@@ -33328,7 +34180,7 @@
             <a:r>
               <a:rPr lang="zh-CN" altLang="en-US" sz="1600" dirty="0">
                 <a:solidFill>
-                  <a:srgbClr val="12374E"/>
+                  <a:srgbClr val="000000"/>
                 </a:solidFill>
                 <a:latin typeface="Microsoft YaHei" pitchFamily="34" charset="0"/>
                 <a:ea typeface="Microsoft YaHei" pitchFamily="34" charset="-122"/>
@@ -33371,7 +34223,7 @@
             <a:r>
               <a:rPr lang="zh-CN" altLang="en-US" sz="1600" dirty="0">
                 <a:solidFill>
-                  <a:srgbClr val="12374E"/>
+                  <a:srgbClr val="000000"/>
                 </a:solidFill>
                 <a:latin typeface="Microsoft YaHei" pitchFamily="34" charset="0"/>
                 <a:ea typeface="Microsoft YaHei" pitchFamily="34" charset="-122"/>
@@ -33483,7 +34335,7 @@
             <a:r>
               <a:rPr lang="zh-CN" altLang="en-US" sz="1600" dirty="0">
                 <a:solidFill>
-                  <a:srgbClr val="12374E"/>
+                  <a:srgbClr val="000000"/>
                 </a:solidFill>
                 <a:latin typeface="Microsoft YaHei" pitchFamily="34" charset="0"/>
                 <a:ea typeface="Microsoft YaHei" pitchFamily="34" charset="-122"/>
@@ -33526,7 +34378,7 @@
             <a:r>
               <a:rPr lang="zh-CN" altLang="en-US" sz="1600" dirty="0">
                 <a:solidFill>
-                  <a:srgbClr val="12374E"/>
+                  <a:srgbClr val="000000"/>
                 </a:solidFill>
                 <a:latin typeface="Microsoft YaHei" pitchFamily="34" charset="0"/>
                 <a:ea typeface="Microsoft YaHei" pitchFamily="34" charset="-122"/>
@@ -33569,7 +34421,7 @@
             <a:r>
               <a:rPr lang="zh-CN" altLang="en-US" sz="1600" dirty="0">
                 <a:solidFill>
-                  <a:srgbClr val="12374E"/>
+                  <a:srgbClr val="000000"/>
                 </a:solidFill>
                 <a:latin typeface="Microsoft YaHei" pitchFamily="34" charset="0"/>
                 <a:ea typeface="Microsoft YaHei" pitchFamily="34" charset="-122"/>
@@ -33612,7 +34464,7 @@
             <a:r>
               <a:rPr lang="zh-CN" altLang="en-US" sz="1600" dirty="0">
                 <a:solidFill>
-                  <a:srgbClr val="12374E"/>
+                  <a:srgbClr val="000000"/>
                 </a:solidFill>
                 <a:latin typeface="Microsoft YaHei" pitchFamily="34" charset="0"/>
                 <a:ea typeface="Microsoft YaHei" pitchFamily="34" charset="-122"/>
@@ -33723,7 +34575,7 @@
             <a:r>
               <a:rPr lang="zh-CN" altLang="en-US" sz="1400" dirty="0">
                 <a:solidFill>
-                  <a:srgbClr val="12374E"/>
+                  <a:srgbClr val="000000"/>
                 </a:solidFill>
                 <a:latin typeface="Microsoft YaHei" pitchFamily="34" charset="0"/>
                 <a:ea typeface="Microsoft YaHei" pitchFamily="34" charset="-122"/>
@@ -33750,11 +34602,11 @@
             <a:avLst/>
           </a:prstGeom>
           <a:solidFill>
-            <a:srgbClr val="9EA8AE"/>
-          </a:solidFill>
-          <a:ln w="12700">
-            <a:solidFill>
-              <a:srgbClr val="9EA8AE">
+            <a:srgbClr val="777777"/>
+          </a:solidFill>
+          <a:ln w="12700">
+            <a:solidFill>
+              <a:srgbClr val="777777">
                 <a:alpha val="0"/>
               </a:srgbClr>
             </a:solidFill>
@@ -33861,7 +34713,7 @@
             <a:r>
               <a:rPr lang="zh-CN" altLang="en-US" sz="1400" dirty="0">
                 <a:solidFill>
-                  <a:srgbClr val="12374E"/>
+                  <a:srgbClr val="000000"/>
                 </a:solidFill>
                 <a:latin typeface="Microsoft YaHei" pitchFamily="34" charset="0"/>
                 <a:ea typeface="Microsoft YaHei" pitchFamily="34" charset="-122"/>
@@ -33888,11 +34740,11 @@
             <a:avLst/>
           </a:prstGeom>
           <a:solidFill>
-            <a:srgbClr val="9EA8AE"/>
-          </a:solidFill>
-          <a:ln w="12700">
-            <a:solidFill>
-              <a:srgbClr val="9EA8AE">
+            <a:srgbClr val="777777"/>
+          </a:solidFill>
+          <a:ln w="12700">
+            <a:solidFill>
+              <a:srgbClr val="777777">
                 <a:alpha val="0"/>
               </a:srgbClr>
             </a:solidFill>
@@ -33999,7 +34851,7 @@
             <a:r>
               <a:rPr lang="zh-CN" altLang="en-US" sz="1400" dirty="0">
                 <a:solidFill>
-                  <a:srgbClr val="12374E"/>
+                  <a:srgbClr val="000000"/>
                 </a:solidFill>
                 <a:latin typeface="Microsoft YaHei" pitchFamily="34" charset="0"/>
                 <a:ea typeface="Microsoft YaHei" pitchFamily="34" charset="-122"/>
@@ -34230,11 +35082,11 @@
             <a:avLst/>
           </a:prstGeom>
           <a:solidFill>
-            <a:srgbClr val="D8E2E9"/>
-          </a:solidFill>
-          <a:ln w="12700">
-            <a:solidFill>
-              <a:srgbClr val="D8E2E9">
+            <a:srgbClr val="CCDEEA"/>
+          </a:solidFill>
+          <a:ln w="12700">
+            <a:solidFill>
+              <a:srgbClr val="CCDEEA">
                 <a:alpha val="0"/>
               </a:srgbClr>
             </a:solidFill>
@@ -34367,7 +35219,7 @@
             <a:r>
               <a:rPr lang="zh-CN" altLang="en-US" sz="1400" b="1" dirty="0">
                 <a:solidFill>
-                  <a:srgbClr val="40647D"/>
+                  <a:srgbClr val="005B94"/>
                 </a:solidFill>
                 <a:latin typeface="Microsoft YaHei" pitchFamily="34" charset="0"/>
                 <a:ea typeface="Microsoft YaHei" pitchFamily="34" charset="-122"/>
@@ -34475,7 +35327,7 @@
             <a:r>
               <a:rPr lang="zh-CN" altLang="en-US" sz="1600" dirty="0">
                 <a:solidFill>
-                  <a:srgbClr val="12374E"/>
+                  <a:srgbClr val="000000"/>
                 </a:solidFill>
                 <a:latin typeface="Microsoft YaHei" pitchFamily="34" charset="0"/>
                 <a:ea typeface="Microsoft YaHei" pitchFamily="34" charset="-122"/>
@@ -34559,7 +35411,7 @@
             <a:r>
               <a:rPr lang="zh-CN" altLang="en-US" sz="1200" dirty="0">
                 <a:solidFill>
-                  <a:srgbClr val="12374E"/>
+                  <a:srgbClr val="000000"/>
                 </a:solidFill>
                 <a:latin typeface="Microsoft YaHei" pitchFamily="34" charset="0"/>
                 <a:ea typeface="Microsoft YaHei" pitchFamily="34" charset="-122"/>
@@ -34643,7 +35495,7 @@
             <a:r>
               <a:rPr lang="zh-CN" altLang="en-US" sz="1200" dirty="0">
                 <a:solidFill>
-                  <a:srgbClr val="12374E"/>
+                  <a:srgbClr val="000000"/>
                 </a:solidFill>
                 <a:latin typeface="Microsoft YaHei" pitchFamily="34" charset="0"/>
                 <a:ea typeface="Microsoft YaHei" pitchFamily="34" charset="-122"/>
@@ -34727,7 +35579,7 @@
             <a:r>
               <a:rPr lang="zh-CN" altLang="en-US" sz="1200" dirty="0">
                 <a:solidFill>
-                  <a:srgbClr val="12374E"/>
+                  <a:srgbClr val="000000"/>
                 </a:solidFill>
                 <a:latin typeface="Microsoft YaHei" pitchFamily="34" charset="0"/>
                 <a:ea typeface="Microsoft YaHei" pitchFamily="34" charset="-122"/>
@@ -34811,7 +35663,7 @@
             <a:r>
               <a:rPr lang="zh-CN" altLang="en-US" sz="1200" dirty="0">
                 <a:solidFill>
-                  <a:srgbClr val="12374E"/>
+                  <a:srgbClr val="000000"/>
                 </a:solidFill>
                 <a:latin typeface="Microsoft YaHei" pitchFamily="34" charset="0"/>
                 <a:ea typeface="Microsoft YaHei" pitchFamily="34" charset="-122"/>
@@ -34895,7 +35747,7 @@
             <a:r>
               <a:rPr lang="zh-CN" altLang="en-US" sz="1200" dirty="0">
                 <a:solidFill>
-                  <a:srgbClr val="12374E"/>
+                  <a:srgbClr val="000000"/>
                 </a:solidFill>
                 <a:latin typeface="Microsoft YaHei" pitchFamily="34" charset="0"/>
                 <a:ea typeface="Microsoft YaHei" pitchFamily="34" charset="-122"/>
@@ -34979,7 +35831,7 @@
             <a:r>
               <a:rPr lang="zh-CN" altLang="en-US" sz="1200" dirty="0">
                 <a:solidFill>
-                  <a:srgbClr val="12374E"/>
+                  <a:srgbClr val="000000"/>
                 </a:solidFill>
                 <a:latin typeface="Microsoft YaHei" pitchFamily="34" charset="0"/>
                 <a:ea typeface="Microsoft YaHei" pitchFamily="34" charset="-122"/>
@@ -35063,7 +35915,7 @@
             <a:r>
               <a:rPr lang="zh-CN" altLang="en-US" sz="1200" dirty="0">
                 <a:solidFill>
-                  <a:srgbClr val="12374E"/>
+                  <a:srgbClr val="000000"/>
                 </a:solidFill>
                 <a:latin typeface="Microsoft YaHei" pitchFamily="34" charset="0"/>
                 <a:ea typeface="Microsoft YaHei" pitchFamily="34" charset="-122"/>
@@ -35147,7 +35999,7 @@
             <a:r>
               <a:rPr lang="zh-CN" altLang="en-US" sz="1200" dirty="0">
                 <a:solidFill>
-                  <a:srgbClr val="12374E"/>
+                  <a:srgbClr val="000000"/>
                 </a:solidFill>
                 <a:latin typeface="Microsoft YaHei" pitchFamily="34" charset="0"/>
                 <a:ea typeface="Microsoft YaHei" pitchFamily="34" charset="-122"/>
@@ -35231,7 +36083,7 @@
             <a:r>
               <a:rPr lang="zh-CN" altLang="en-US" sz="1200" dirty="0">
                 <a:solidFill>
-                  <a:srgbClr val="12374E"/>
+                  <a:srgbClr val="000000"/>
                 </a:solidFill>
                 <a:latin typeface="Microsoft YaHei" pitchFamily="34" charset="0"/>
                 <a:ea typeface="Microsoft YaHei" pitchFamily="34" charset="-122"/>
@@ -35315,7 +36167,7 @@
             <a:r>
               <a:rPr lang="zh-CN" altLang="en-US" sz="1200" dirty="0">
                 <a:solidFill>
-                  <a:srgbClr val="12374E"/>
+                  <a:srgbClr val="000000"/>
                 </a:solidFill>
                 <a:latin typeface="Microsoft YaHei" pitchFamily="34" charset="0"/>
                 <a:ea typeface="Microsoft YaHei" pitchFamily="34" charset="-122"/>
@@ -35399,7 +36251,7 @@
             <a:r>
               <a:rPr lang="zh-CN" altLang="en-US" sz="1200" dirty="0">
                 <a:solidFill>
-                  <a:srgbClr val="12374E"/>
+                  <a:srgbClr val="000000"/>
                 </a:solidFill>
                 <a:latin typeface="Microsoft YaHei" pitchFamily="34" charset="0"/>
                 <a:ea typeface="Microsoft YaHei" pitchFamily="34" charset="-122"/>
@@ -35819,11 +36671,11 @@
             <a:avLst/>
           </a:prstGeom>
           <a:solidFill>
-            <a:srgbClr val="F1F7FB"/>
+            <a:srgbClr val="EEF5F9"/>
           </a:solidFill>
           <a:ln w="7620">
             <a:solidFill>
-              <a:srgbClr val="DFEBF3"/>
+              <a:srgbClr val="CCDEEA"/>
             </a:solidFill>
             <a:prstDash val="solid"/>
           </a:ln>
@@ -35925,7 +36777,7 @@
             <a:r>
               <a:rPr lang="zh-CN" altLang="en-US" sz="1400" dirty="0">
                 <a:solidFill>
-                  <a:srgbClr val="12374E"/>
+                  <a:srgbClr val="526C7D"/>
                 </a:solidFill>
                 <a:latin typeface="Microsoft YaHei" pitchFamily="34" charset="0"/>
                 <a:ea typeface="Microsoft YaHei" pitchFamily="34" charset="-122"/>
@@ -35967,7 +36819,7 @@
             <a:r>
               <a:rPr lang="zh-CN" altLang="en-US" sz="1400" dirty="0">
                 <a:solidFill>
-                  <a:srgbClr val="12374E"/>
+                  <a:srgbClr val="000000"/>
                 </a:solidFill>
                 <a:latin typeface="Microsoft YaHei" pitchFamily="34" charset="0"/>
                 <a:ea typeface="Microsoft YaHei" pitchFamily="34" charset="-122"/>
@@ -35987,7 +36839,7 @@
             <a:r>
               <a:rPr lang="zh-CN" altLang="en-US" sz="1400" dirty="0">
                 <a:solidFill>
-                  <a:srgbClr val="12374E"/>
+                  <a:srgbClr val="000000"/>
                 </a:solidFill>
                 <a:latin typeface="Microsoft YaHei" pitchFamily="34" charset="0"/>
                 <a:ea typeface="Microsoft YaHei" pitchFamily="34" charset="-122"/>
@@ -36029,7 +36881,7 @@
             <a:r>
               <a:rPr lang="zh-CN" altLang="en-US" sz="1200" dirty="0">
                 <a:solidFill>
-                  <a:srgbClr val="12374E"/>
+                  <a:srgbClr val="526C7D"/>
                 </a:solidFill>
                 <a:latin typeface="Microsoft YaHei" pitchFamily="34" charset="0"/>
                 <a:ea typeface="Microsoft YaHei" pitchFamily="34" charset="-122"/>
@@ -36049,7 +36901,49 @@
         </p:nvSpPr>
         <p:spPr>
           <a:xfrm>
-            <a:off x="601980" y="5547360"/>
+            <a:off x="601980" y="5210175"/>
+            <a:ext cx="2270760" cy="220980"/>
+          </a:xfrm>
+          <a:prstGeom prst="rect">
+            <a:avLst/>
+          </a:prstGeom>
+          <a:noFill/>
+          <a:ln/>
+        </p:spPr>
+        <p:txBody>
+          <a:bodyPr wrap="none" lIns="0" tIns="0" rIns="0" bIns="0" rtlCol="0" anchor="t"/>
+          <a:lstStyle/>
+          <a:p>
+            <a:pPr algn="ctr" indent="0" marL="0" eaLnBrk="1" latinLnBrk="0" hangingPunct="1">
+              <a:lnSpc>
+                <a:spcPts val="1740"/>
+              </a:lnSpc>
+              <a:buNone/>
+            </a:pPr>
+            <a:r>
+              <a:rPr lang="zh-CN" altLang="en-US" sz="1200" dirty="0">
+                <a:solidFill>
+                  <a:srgbClr val="526C7D"/>
+                </a:solidFill>
+                <a:latin typeface="Microsoft YaHei" pitchFamily="34" charset="0"/>
+                <a:ea typeface="Microsoft YaHei" pitchFamily="34" charset="-122"/>
+                <a:cs typeface="Microsoft YaHei" pitchFamily="34" charset="-120"/>
+              </a:rPr>
+              <a:t>电话：联系电话</a:t>
+            </a:r>
+            <a:endParaRPr lang="zh-CN" sz="1200" dirty="0"/>
+          </a:p>
+        </p:txBody>
+      </p:sp>
+      <p:sp>
+        <p:nvSpPr>
+          <p:cNvPr id="17" name="Text 13"/>
+          <p:cNvSpPr/>
+          <p:nvPr/>
+        </p:nvSpPr>
+        <p:spPr>
+          <a:xfrm>
+            <a:off x="601980" y="5621655"/>
             <a:ext cx="1074420" cy="342900"/>
           </a:xfrm>
           <a:prstGeom prst="rect">
@@ -36085,13 +36979,13 @@
       </p:sp>
       <p:sp>
         <p:nvSpPr>
-          <p:cNvPr id="17" name="Text 13"/>
-          <p:cNvSpPr/>
-          <p:nvPr/>
-        </p:nvSpPr>
-        <p:spPr>
-          <a:xfrm>
-            <a:off x="601980" y="5920740"/>
+          <p:cNvPr id="18" name="Text 14"/>
+          <p:cNvSpPr/>
+          <p:nvPr/>
+        </p:nvSpPr>
+        <p:spPr>
+          <a:xfrm>
+            <a:off x="601980" y="5995035"/>
             <a:ext cx="1074420" cy="213360"/>
           </a:xfrm>
           <a:prstGeom prst="rect">
@@ -36113,7 +37007,7 @@
             <a:r>
               <a:rPr lang="zh-CN" altLang="en-US" sz="1200" dirty="0">
                 <a:solidFill>
-                  <a:srgbClr val="526B7D"/>
+                  <a:srgbClr val="526C7D"/>
                 </a:solidFill>
                 <a:latin typeface="Microsoft YaHei" pitchFamily="34" charset="0"/>
                 <a:ea typeface="Microsoft YaHei" pitchFamily="34" charset="-122"/>
@@ -36127,13 +37021,13 @@
       </p:sp>
       <p:sp>
         <p:nvSpPr>
-          <p:cNvPr id="18" name="Text 14"/>
-          <p:cNvSpPr/>
-          <p:nvPr/>
-        </p:nvSpPr>
-        <p:spPr>
-          <a:xfrm>
-            <a:off x="1798320" y="5547360"/>
+          <p:cNvPr id="19" name="Text 15"/>
+          <p:cNvSpPr/>
+          <p:nvPr/>
+        </p:nvSpPr>
+        <p:spPr>
+          <a:xfrm>
+            <a:off x="1798320" y="5621655"/>
             <a:ext cx="1074420" cy="342900"/>
           </a:xfrm>
           <a:prstGeom prst="rect">
@@ -36169,13 +37063,13 @@
       </p:sp>
       <p:sp>
         <p:nvSpPr>
-          <p:cNvPr id="19" name="Text 15"/>
-          <p:cNvSpPr/>
-          <p:nvPr/>
-        </p:nvSpPr>
-        <p:spPr>
-          <a:xfrm>
-            <a:off x="1798320" y="5920740"/>
+          <p:cNvPr id="20" name="Text 16"/>
+          <p:cNvSpPr/>
+          <p:nvPr/>
+        </p:nvSpPr>
+        <p:spPr>
+          <a:xfrm>
+            <a:off x="1798320" y="5995035"/>
             <a:ext cx="1074420" cy="213360"/>
           </a:xfrm>
           <a:prstGeom prst="rect">
@@ -36197,7 +37091,7 @@
             <a:r>
               <a:rPr lang="zh-CN" altLang="en-US" sz="1200" dirty="0">
                 <a:solidFill>
-                  <a:srgbClr val="526B7D"/>
+                  <a:srgbClr val="526C7D"/>
                 </a:solidFill>
                 <a:latin typeface="Microsoft YaHei" pitchFamily="34" charset="0"/>
                 <a:ea typeface="Microsoft YaHei" pitchFamily="34" charset="-122"/>
@@ -36211,7 +37105,7 @@
       </p:sp>
       <p:sp>
         <p:nvSpPr>
-          <p:cNvPr id="20" name="Shape 16"/>
+          <p:cNvPr id="21" name="Shape 17"/>
           <p:cNvSpPr/>
           <p:nvPr/>
         </p:nvSpPr>
@@ -36230,15 +37124,15 @@
           </a:solidFill>
           <a:ln w="7620">
             <a:solidFill>
-              <a:srgbClr val="CFDDE6"/>
-            </a:solidFill>
-            <a:prstDash val="solid"/>
-          </a:ln>
-        </p:spPr>
-      </p:sp>
-      <p:sp>
-        <p:nvSpPr>
-          <p:cNvPr id="21" name="Shape 17"/>
+              <a:srgbClr val="CCDEEA"/>
+            </a:solidFill>
+            <a:prstDash val="solid"/>
+          </a:ln>
+        </p:spPr>
+      </p:sp>
+      <p:sp>
+        <p:nvSpPr>
+          <p:cNvPr id="22" name="Shape 18"/>
           <p:cNvSpPr/>
           <p:nvPr/>
         </p:nvSpPr>
@@ -36265,7 +37159,7 @@
       </p:sp>
       <p:sp>
         <p:nvSpPr>
-          <p:cNvPr id="22" name="Text 18"/>
+          <p:cNvPr id="23" name="Text 19"/>
           <p:cNvSpPr/>
           <p:nvPr/>
         </p:nvSpPr>
@@ -36307,7 +37201,7 @@
       </p:sp>
       <p:sp>
         <p:nvSpPr>
-          <p:cNvPr id="23" name="Shape 19"/>
+          <p:cNvPr id="24" name="Shape 20"/>
           <p:cNvSpPr/>
           <p:nvPr/>
         </p:nvSpPr>
@@ -36334,7 +37228,7 @@
       </p:sp>
       <p:sp>
         <p:nvSpPr>
-          <p:cNvPr id="24" name="Shape 20"/>
+          <p:cNvPr id="25" name="Shape 21"/>
           <p:cNvSpPr/>
           <p:nvPr/>
         </p:nvSpPr>
@@ -36361,7 +37255,7 @@
       </p:sp>
       <p:sp>
         <p:nvSpPr>
-          <p:cNvPr id="25" name="Text 21"/>
+          <p:cNvPr id="26" name="Text 22"/>
           <p:cNvSpPr/>
           <p:nvPr/>
         </p:nvSpPr>
@@ -36403,7 +37297,7 @@
       </p:sp>
       <p:sp>
         <p:nvSpPr>
-          <p:cNvPr id="26" name="Shape 22"/>
+          <p:cNvPr id="27" name="Shape 23"/>
           <p:cNvSpPr/>
           <p:nvPr/>
         </p:nvSpPr>
@@ -36430,7 +37324,7 @@
       </p:sp>
       <p:sp>
         <p:nvSpPr>
-          <p:cNvPr id="27" name="Shape 23"/>
+          <p:cNvPr id="28" name="Shape 24"/>
           <p:cNvSpPr/>
           <p:nvPr/>
         </p:nvSpPr>
@@ -36457,7 +37351,7 @@
       </p:sp>
       <p:sp>
         <p:nvSpPr>
-          <p:cNvPr id="28" name="Text 24"/>
+          <p:cNvPr id="29" name="Text 25"/>
           <p:cNvSpPr/>
           <p:nvPr/>
         </p:nvSpPr>
@@ -36499,7 +37393,7 @@
       </p:sp>
       <p:sp>
         <p:nvSpPr>
-          <p:cNvPr id="29" name="Shape 25"/>
+          <p:cNvPr id="30" name="Shape 26"/>
           <p:cNvSpPr/>
           <p:nvPr/>
         </p:nvSpPr>
@@ -36526,7 +37420,7 @@
       </p:sp>
       <p:sp>
         <p:nvSpPr>
-          <p:cNvPr id="30" name="Shape 26"/>
+          <p:cNvPr id="31" name="Shape 27"/>
           <p:cNvSpPr/>
           <p:nvPr/>
         </p:nvSpPr>
@@ -36553,7 +37447,7 @@
       </p:sp>
       <p:sp>
         <p:nvSpPr>
-          <p:cNvPr id="31" name="Text 27"/>
+          <p:cNvPr id="32" name="Text 28"/>
           <p:cNvSpPr/>
           <p:nvPr/>
         </p:nvSpPr>
@@ -36595,7 +37489,7 @@
       </p:sp>
       <p:sp>
         <p:nvSpPr>
-          <p:cNvPr id="32" name="Shape 28"/>
+          <p:cNvPr id="33" name="Shape 29"/>
           <p:cNvSpPr/>
           <p:nvPr/>
         </p:nvSpPr>
@@ -36622,7 +37516,7 @@
       </p:sp>
       <p:sp>
         <p:nvSpPr>
-          <p:cNvPr id="33" name="Text 29"/>
+          <p:cNvPr id="34" name="Text 30"/>
           <p:cNvSpPr/>
           <p:nvPr/>
         </p:nvSpPr>
@@ -36650,7 +37544,7 @@
             <a:r>
               <a:rPr lang="zh-CN" altLang="en-US" sz="1400" dirty="0">
                 <a:solidFill>
-                  <a:srgbClr val="12374E"/>
+                  <a:srgbClr val="000000"/>
                 </a:solidFill>
                 <a:latin typeface="Microsoft YaHei" pitchFamily="34" charset="0"/>
                 <a:ea typeface="Microsoft YaHei" pitchFamily="34" charset="-122"/>
@@ -36664,7 +37558,7 @@
       </p:sp>
       <p:sp>
         <p:nvSpPr>
-          <p:cNvPr id="34" name="Shape 30"/>
+          <p:cNvPr id="35" name="Shape 31"/>
           <p:cNvSpPr/>
           <p:nvPr/>
         </p:nvSpPr>
@@ -36691,7 +37585,7 @@
       </p:sp>
       <p:sp>
         <p:nvSpPr>
-          <p:cNvPr id="35" name="Text 31"/>
+          <p:cNvPr id="36" name="Text 32"/>
           <p:cNvSpPr/>
           <p:nvPr/>
         </p:nvSpPr>
@@ -36719,7 +37613,7 @@
             <a:r>
               <a:rPr lang="zh-CN" altLang="en-US" sz="1400" dirty="0">
                 <a:solidFill>
-                  <a:srgbClr val="12374E"/>
+                  <a:srgbClr val="000000"/>
                 </a:solidFill>
                 <a:latin typeface="Microsoft YaHei" pitchFamily="34" charset="0"/>
                 <a:ea typeface="Microsoft YaHei" pitchFamily="34" charset="-122"/>
@@ -36733,7 +37627,7 @@
       </p:sp>
       <p:sp>
         <p:nvSpPr>
-          <p:cNvPr id="36" name="Shape 32"/>
+          <p:cNvPr id="37" name="Shape 33"/>
           <p:cNvSpPr/>
           <p:nvPr/>
         </p:nvSpPr>
@@ -36760,7 +37654,7 @@
       </p:sp>
       <p:sp>
         <p:nvSpPr>
-          <p:cNvPr id="37" name="Text 33"/>
+          <p:cNvPr id="38" name="Text 34"/>
           <p:cNvSpPr/>
           <p:nvPr/>
         </p:nvSpPr>
@@ -36788,7 +37682,7 @@
             <a:r>
               <a:rPr lang="zh-CN" altLang="en-US" sz="1400" dirty="0">
                 <a:solidFill>
-                  <a:srgbClr val="12374E"/>
+                  <a:srgbClr val="000000"/>
                 </a:solidFill>
                 <a:latin typeface="Microsoft YaHei" pitchFamily="34" charset="0"/>
                 <a:ea typeface="Microsoft YaHei" pitchFamily="34" charset="-122"/>
@@ -36802,7 +37696,7 @@
       </p:sp>
       <p:sp>
         <p:nvSpPr>
-          <p:cNvPr id="38" name="Shape 34"/>
+          <p:cNvPr id="39" name="Shape 35"/>
           <p:cNvSpPr/>
           <p:nvPr/>
         </p:nvSpPr>
@@ -36829,7 +37723,7 @@
       </p:sp>
       <p:sp>
         <p:nvSpPr>
-          <p:cNvPr id="39" name="Text 35"/>
+          <p:cNvPr id="40" name="Text 36"/>
           <p:cNvSpPr/>
           <p:nvPr/>
         </p:nvSpPr>
@@ -36857,7 +37751,7 @@
             <a:r>
               <a:rPr lang="zh-CN" altLang="en-US" sz="1400" dirty="0">
                 <a:solidFill>
-                  <a:srgbClr val="12374E"/>
+                  <a:srgbClr val="000000"/>
                 </a:solidFill>
                 <a:latin typeface="Microsoft YaHei" pitchFamily="34" charset="0"/>
                 <a:ea typeface="Microsoft YaHei" pitchFamily="34" charset="-122"/>
@@ -36871,7 +37765,7 @@
       </p:sp>
       <p:sp>
         <p:nvSpPr>
-          <p:cNvPr id="40" name="Shape 36"/>
+          <p:cNvPr id="41" name="Shape 37"/>
           <p:cNvSpPr/>
           <p:nvPr/>
         </p:nvSpPr>
@@ -36898,7 +37792,7 @@
       </p:sp>
       <p:sp>
         <p:nvSpPr>
-          <p:cNvPr id="41" name="Text 37"/>
+          <p:cNvPr id="42" name="Text 38"/>
           <p:cNvSpPr/>
           <p:nvPr/>
         </p:nvSpPr>
@@ -36926,7 +37820,7 @@
             <a:r>
               <a:rPr lang="zh-CN" altLang="en-US" sz="1400" dirty="0">
                 <a:solidFill>
-                  <a:srgbClr val="12374E"/>
+                  <a:srgbClr val="000000"/>
                 </a:solidFill>
                 <a:latin typeface="Microsoft YaHei" pitchFamily="34" charset="0"/>
                 <a:ea typeface="Microsoft YaHei" pitchFamily="34" charset="-122"/>
@@ -36940,7 +37834,7 @@
       </p:sp>
       <p:sp>
         <p:nvSpPr>
-          <p:cNvPr id="42" name="Shape 38"/>
+          <p:cNvPr id="43" name="Shape 39"/>
           <p:cNvSpPr/>
           <p:nvPr/>
         </p:nvSpPr>
@@ -36967,7 +37861,7 @@
       </p:sp>
       <p:sp>
         <p:nvSpPr>
-          <p:cNvPr id="43" name="Text 39"/>
+          <p:cNvPr id="44" name="Text 40"/>
           <p:cNvSpPr/>
           <p:nvPr/>
         </p:nvSpPr>
@@ -36995,7 +37889,7 @@
             <a:r>
               <a:rPr lang="zh-CN" altLang="en-US" sz="1400" dirty="0">
                 <a:solidFill>
-                  <a:srgbClr val="12374E"/>
+                  <a:srgbClr val="000000"/>
                 </a:solidFill>
                 <a:latin typeface="Microsoft YaHei" pitchFamily="34" charset="0"/>
                 <a:ea typeface="Microsoft YaHei" pitchFamily="34" charset="-122"/>
@@ -37009,7 +37903,7 @@
       </p:sp>
       <p:sp>
         <p:nvSpPr>
-          <p:cNvPr id="44" name="Shape 40"/>
+          <p:cNvPr id="45" name="Shape 41"/>
           <p:cNvSpPr/>
           <p:nvPr/>
         </p:nvSpPr>
@@ -37036,7 +37930,7 @@
       </p:sp>
       <p:sp>
         <p:nvSpPr>
-          <p:cNvPr id="45" name="Text 41"/>
+          <p:cNvPr id="46" name="Text 42"/>
           <p:cNvSpPr/>
           <p:nvPr/>
         </p:nvSpPr>
@@ -37064,7 +37958,7 @@
             <a:r>
               <a:rPr lang="zh-CN" altLang="en-US" sz="1400" dirty="0">
                 <a:solidFill>
-                  <a:srgbClr val="12374E"/>
+                  <a:srgbClr val="000000"/>
                 </a:solidFill>
                 <a:latin typeface="Microsoft YaHei" pitchFamily="34" charset="0"/>
                 <a:ea typeface="Microsoft YaHei" pitchFamily="34" charset="-122"/>
@@ -37078,7 +37972,7 @@
       </p:sp>
       <p:sp>
         <p:nvSpPr>
-          <p:cNvPr id="46" name="Shape 42"/>
+          <p:cNvPr id="47" name="Shape 43"/>
           <p:cNvSpPr/>
           <p:nvPr/>
         </p:nvSpPr>
@@ -37105,7 +37999,7 @@
       </p:sp>
       <p:sp>
         <p:nvSpPr>
-          <p:cNvPr id="47" name="Text 43"/>
+          <p:cNvPr id="48" name="Text 44"/>
           <p:cNvSpPr/>
           <p:nvPr/>
         </p:nvSpPr>
@@ -37133,7 +38027,7 @@
             <a:r>
               <a:rPr lang="zh-CN" altLang="en-US" sz="1400" dirty="0">
                 <a:solidFill>
-                  <a:srgbClr val="12374E"/>
+                  <a:srgbClr val="000000"/>
                 </a:solidFill>
                 <a:latin typeface="Microsoft YaHei" pitchFamily="34" charset="0"/>
                 <a:ea typeface="Microsoft YaHei" pitchFamily="34" charset="-122"/>
@@ -37147,7 +38041,7 @@
       </p:sp>
       <p:sp>
         <p:nvSpPr>
-          <p:cNvPr id="48" name="Shape 44"/>
+          <p:cNvPr id="49" name="Shape 45"/>
           <p:cNvSpPr/>
           <p:nvPr/>
         </p:nvSpPr>
@@ -37174,7 +38068,7 @@
       </p:sp>
       <p:sp>
         <p:nvSpPr>
-          <p:cNvPr id="49" name="Text 45"/>
+          <p:cNvPr id="50" name="Text 46"/>
           <p:cNvSpPr/>
           <p:nvPr/>
         </p:nvSpPr>
@@ -37202,7 +38096,7 @@
             <a:r>
               <a:rPr lang="zh-CN" altLang="en-US" sz="1400" dirty="0">
                 <a:solidFill>
-                  <a:srgbClr val="12374E"/>
+                  <a:srgbClr val="000000"/>
                 </a:solidFill>
                 <a:latin typeface="Microsoft YaHei" pitchFamily="34" charset="0"/>
                 <a:ea typeface="Microsoft YaHei" pitchFamily="34" charset="-122"/>
@@ -37216,7 +38110,7 @@
       </p:sp>
       <p:sp>
         <p:nvSpPr>
-          <p:cNvPr id="50" name="Shape 46"/>
+          <p:cNvPr id="51" name="Shape 47"/>
           <p:cNvSpPr/>
           <p:nvPr/>
         </p:nvSpPr>
@@ -37235,15 +38129,15 @@
           </a:solidFill>
           <a:ln w="7620">
             <a:solidFill>
-              <a:srgbClr val="CFDDE6"/>
-            </a:solidFill>
-            <a:prstDash val="solid"/>
-          </a:ln>
-        </p:spPr>
-      </p:sp>
-      <p:sp>
-        <p:nvSpPr>
-          <p:cNvPr id="51" name="Shape 47"/>
+              <a:srgbClr val="CCDEEA"/>
+            </a:solidFill>
+            <a:prstDash val="solid"/>
+          </a:ln>
+        </p:spPr>
+      </p:sp>
+      <p:sp>
+        <p:nvSpPr>
+          <p:cNvPr id="52" name="Shape 48"/>
           <p:cNvSpPr/>
           <p:nvPr/>
         </p:nvSpPr>
@@ -37270,7 +38164,7 @@
       </p:sp>
       <p:sp>
         <p:nvSpPr>
-          <p:cNvPr id="52" name="Text 48"/>
+          <p:cNvPr id="53" name="Text 49"/>
           <p:cNvSpPr/>
           <p:nvPr/>
         </p:nvSpPr>
@@ -37312,7 +38206,7 @@
       </p:sp>
       <p:sp>
         <p:nvSpPr>
-          <p:cNvPr id="53" name="Shape 49"/>
+          <p:cNvPr id="54" name="Shape 50"/>
           <p:cNvSpPr/>
           <p:nvPr/>
         </p:nvSpPr>
@@ -37339,7 +38233,7 @@
       </p:sp>
       <p:sp>
         <p:nvSpPr>
-          <p:cNvPr id="54" name="Text 50"/>
+          <p:cNvPr id="55" name="Text 51"/>
           <p:cNvSpPr/>
           <p:nvPr/>
         </p:nvSpPr>
@@ -37381,7 +38275,7 @@
       </p:sp>
       <p:sp>
         <p:nvSpPr>
-          <p:cNvPr id="55" name="Shape 51"/>
+          <p:cNvPr id="56" name="Shape 52"/>
           <p:cNvSpPr/>
           <p:nvPr/>
         </p:nvSpPr>
@@ -37408,7 +38302,7 @@
       </p:sp>
       <p:sp>
         <p:nvSpPr>
-          <p:cNvPr id="56" name="Text 52"/>
+          <p:cNvPr id="57" name="Text 53"/>
           <p:cNvSpPr/>
           <p:nvPr/>
         </p:nvSpPr>
@@ -37450,7 +38344,7 @@
       </p:sp>
       <p:sp>
         <p:nvSpPr>
-          <p:cNvPr id="57" name="Shape 53"/>
+          <p:cNvPr id="58" name="Shape 54"/>
           <p:cNvSpPr/>
           <p:nvPr/>
         </p:nvSpPr>
@@ -37477,7 +38371,7 @@
       </p:sp>
       <p:sp>
         <p:nvSpPr>
-          <p:cNvPr id="58" name="Text 54"/>
+          <p:cNvPr id="59" name="Text 55"/>
           <p:cNvSpPr/>
           <p:nvPr/>
         </p:nvSpPr>
@@ -37505,7 +38399,7 @@
             <a:r>
               <a:rPr lang="zh-CN" altLang="en-US" sz="1400" dirty="0">
                 <a:solidFill>
-                  <a:srgbClr val="12374E"/>
+                  <a:srgbClr val="000000"/>
                 </a:solidFill>
                 <a:latin typeface="Microsoft YaHei" pitchFamily="34" charset="0"/>
                 <a:ea typeface="Microsoft YaHei" pitchFamily="34" charset="-122"/>
@@ -37519,7 +38413,7 @@
       </p:sp>
       <p:sp>
         <p:nvSpPr>
-          <p:cNvPr id="59" name="Shape 55"/>
+          <p:cNvPr id="60" name="Shape 56"/>
           <p:cNvSpPr/>
           <p:nvPr/>
         </p:nvSpPr>
@@ -37546,7 +38440,7 @@
       </p:sp>
       <p:sp>
         <p:nvSpPr>
-          <p:cNvPr id="60" name="Text 56"/>
+          <p:cNvPr id="61" name="Text 57"/>
           <p:cNvSpPr/>
           <p:nvPr/>
         </p:nvSpPr>
@@ -37574,7 +38468,7 @@
             <a:r>
               <a:rPr lang="zh-CN" altLang="en-US" sz="1400" dirty="0">
                 <a:solidFill>
-                  <a:srgbClr val="12374E"/>
+                  <a:srgbClr val="000000"/>
                 </a:solidFill>
                 <a:latin typeface="Microsoft YaHei" pitchFamily="34" charset="0"/>
                 <a:ea typeface="Microsoft YaHei" pitchFamily="34" charset="-122"/>
@@ -37588,7 +38482,7 @@
       </p:sp>
       <p:sp>
         <p:nvSpPr>
-          <p:cNvPr id="61" name="Shape 57"/>
+          <p:cNvPr id="62" name="Shape 58"/>
           <p:cNvSpPr/>
           <p:nvPr/>
         </p:nvSpPr>
@@ -37615,7 +38509,7 @@
       </p:sp>
       <p:sp>
         <p:nvSpPr>
-          <p:cNvPr id="62" name="Text 58"/>
+          <p:cNvPr id="63" name="Text 59"/>
           <p:cNvSpPr/>
           <p:nvPr/>
         </p:nvSpPr>
@@ -37643,7 +38537,7 @@
             <a:r>
               <a:rPr lang="zh-CN" altLang="en-US" sz="1400" dirty="0">
                 <a:solidFill>
-                  <a:srgbClr val="12374E"/>
+                  <a:srgbClr val="000000"/>
                 </a:solidFill>
                 <a:latin typeface="Microsoft YaHei" pitchFamily="34" charset="0"/>
                 <a:ea typeface="Microsoft YaHei" pitchFamily="34" charset="-122"/>
@@ -37657,7 +38551,7 @@
       </p:sp>
       <p:sp>
         <p:nvSpPr>
-          <p:cNvPr id="63" name="Shape 59"/>
+          <p:cNvPr id="64" name="Shape 60"/>
           <p:cNvSpPr/>
           <p:nvPr/>
         </p:nvSpPr>
@@ -37684,7 +38578,7 @@
       </p:sp>
       <p:sp>
         <p:nvSpPr>
-          <p:cNvPr id="64" name="Text 60"/>
+          <p:cNvPr id="65" name="Text 61"/>
           <p:cNvSpPr/>
           <p:nvPr/>
         </p:nvSpPr>
@@ -37712,7 +38606,7 @@
             <a:r>
               <a:rPr lang="zh-CN" altLang="en-US" sz="1400" dirty="0">
                 <a:solidFill>
-                  <a:srgbClr val="12374E"/>
+                  <a:srgbClr val="000000"/>
                 </a:solidFill>
                 <a:latin typeface="Microsoft YaHei" pitchFamily="34" charset="0"/>
                 <a:ea typeface="Microsoft YaHei" pitchFamily="34" charset="-122"/>
@@ -37726,7 +38620,7 @@
       </p:sp>
       <p:sp>
         <p:nvSpPr>
-          <p:cNvPr id="65" name="Shape 61"/>
+          <p:cNvPr id="66" name="Shape 62"/>
           <p:cNvSpPr/>
           <p:nvPr/>
         </p:nvSpPr>
@@ -37745,15 +38639,15 @@
           </a:solidFill>
           <a:ln w="7620">
             <a:solidFill>
-              <a:srgbClr val="CFDDE6"/>
-            </a:solidFill>
-            <a:prstDash val="solid"/>
-          </a:ln>
-        </p:spPr>
-      </p:sp>
-      <p:sp>
-        <p:nvSpPr>
-          <p:cNvPr id="66" name="Shape 62"/>
+              <a:srgbClr val="CCDEEA"/>
+            </a:solidFill>
+            <a:prstDash val="solid"/>
+          </a:ln>
+        </p:spPr>
+      </p:sp>
+      <p:sp>
+        <p:nvSpPr>
+          <p:cNvPr id="67" name="Shape 63"/>
           <p:cNvSpPr/>
           <p:nvPr/>
         </p:nvSpPr>
@@ -37780,7 +38674,7 @@
       </p:sp>
       <p:sp>
         <p:nvSpPr>
-          <p:cNvPr id="67" name="Text 63"/>
+          <p:cNvPr id="68" name="Text 64"/>
           <p:cNvSpPr/>
           <p:nvPr/>
         </p:nvSpPr>
@@ -37822,7 +38716,7 @@
       </p:sp>
       <p:sp>
         <p:nvSpPr>
-          <p:cNvPr id="68" name="Shape 64"/>
+          <p:cNvPr id="69" name="Shape 65"/>
           <p:cNvSpPr/>
           <p:nvPr/>
         </p:nvSpPr>
@@ -37849,7 +38743,7 @@
       </p:sp>
       <p:sp>
         <p:nvSpPr>
-          <p:cNvPr id="69" name="Text 65"/>
+          <p:cNvPr id="70" name="Text 66"/>
           <p:cNvSpPr/>
           <p:nvPr/>
         </p:nvSpPr>
@@ -37891,7 +38785,7 @@
       </p:sp>
       <p:sp>
         <p:nvSpPr>
-          <p:cNvPr id="70" name="Shape 66"/>
+          <p:cNvPr id="71" name="Shape 67"/>
           <p:cNvSpPr/>
           <p:nvPr/>
         </p:nvSpPr>
@@ -37918,7 +38812,7 @@
       </p:sp>
       <p:sp>
         <p:nvSpPr>
-          <p:cNvPr id="71" name="Text 67"/>
+          <p:cNvPr id="72" name="Text 68"/>
           <p:cNvSpPr/>
           <p:nvPr/>
         </p:nvSpPr>
@@ -37960,7 +38854,7 @@
       </p:sp>
       <p:sp>
         <p:nvSpPr>
-          <p:cNvPr id="72" name="Shape 68"/>
+          <p:cNvPr id="73" name="Shape 69"/>
           <p:cNvSpPr/>
           <p:nvPr/>
         </p:nvSpPr>
@@ -37987,7 +38881,7 @@
       </p:sp>
       <p:sp>
         <p:nvSpPr>
-          <p:cNvPr id="73" name="Text 69"/>
+          <p:cNvPr id="74" name="Text 70"/>
           <p:cNvSpPr/>
           <p:nvPr/>
         </p:nvSpPr>
@@ -38029,7 +38923,7 @@
       </p:sp>
       <p:sp>
         <p:nvSpPr>
-          <p:cNvPr id="74" name="Shape 70"/>
+          <p:cNvPr id="75" name="Shape 71"/>
           <p:cNvSpPr/>
           <p:nvPr/>
         </p:nvSpPr>
@@ -38056,7 +38950,7 @@
       </p:sp>
       <p:sp>
         <p:nvSpPr>
-          <p:cNvPr id="75" name="Text 71"/>
+          <p:cNvPr id="76" name="Text 72"/>
           <p:cNvSpPr/>
           <p:nvPr/>
         </p:nvSpPr>
@@ -38084,7 +38978,7 @@
             <a:r>
               <a:rPr lang="zh-CN" altLang="en-US" sz="1400" dirty="0">
                 <a:solidFill>
-                  <a:srgbClr val="12374E"/>
+                  <a:srgbClr val="000000"/>
                 </a:solidFill>
                 <a:latin typeface="Microsoft YaHei" pitchFamily="34" charset="0"/>
                 <a:ea typeface="Microsoft YaHei" pitchFamily="34" charset="-122"/>
@@ -38104,7 +38998,7 @@
             <a:r>
               <a:rPr lang="zh-CN" altLang="en-US" sz="1400" dirty="0">
                 <a:solidFill>
-                  <a:srgbClr val="12374E"/>
+                  <a:srgbClr val="000000"/>
                 </a:solidFill>
                 <a:latin typeface="Microsoft YaHei" pitchFamily="34" charset="0"/>
                 <a:ea typeface="Microsoft YaHei" pitchFamily="34" charset="-122"/>
@@ -38118,7 +39012,7 @@
       </p:sp>
       <p:sp>
         <p:nvSpPr>
-          <p:cNvPr id="76" name="Shape 72"/>
+          <p:cNvPr id="77" name="Shape 73"/>
           <p:cNvSpPr/>
           <p:nvPr/>
         </p:nvSpPr>
@@ -38145,7 +39039,7 @@
       </p:sp>
       <p:sp>
         <p:nvSpPr>
-          <p:cNvPr id="77" name="Text 73"/>
+          <p:cNvPr id="78" name="Text 74"/>
           <p:cNvSpPr/>
           <p:nvPr/>
         </p:nvSpPr>
@@ -38173,7 +39067,7 @@
             <a:r>
               <a:rPr lang="zh-CN" altLang="en-US" sz="1400" dirty="0">
                 <a:solidFill>
-                  <a:srgbClr val="12374E"/>
+                  <a:srgbClr val="000000"/>
                 </a:solidFill>
                 <a:latin typeface="Microsoft YaHei" pitchFamily="34" charset="0"/>
                 <a:ea typeface="Microsoft YaHei" pitchFamily="34" charset="-122"/>
@@ -38193,7 +39087,7 @@
             <a:r>
               <a:rPr lang="zh-CN" altLang="en-US" sz="1400" dirty="0">
                 <a:solidFill>
-                  <a:srgbClr val="12374E"/>
+                  <a:srgbClr val="000000"/>
                 </a:solidFill>
                 <a:latin typeface="Microsoft YaHei" pitchFamily="34" charset="0"/>
                 <a:ea typeface="Microsoft YaHei" pitchFamily="34" charset="-122"/>
@@ -38207,7 +39101,7 @@
       </p:sp>
       <p:sp>
         <p:nvSpPr>
-          <p:cNvPr id="78" name="Shape 74"/>
+          <p:cNvPr id="79" name="Shape 75"/>
           <p:cNvSpPr/>
           <p:nvPr/>
         </p:nvSpPr>
@@ -38234,7 +39128,7 @@
       </p:sp>
       <p:sp>
         <p:nvSpPr>
-          <p:cNvPr id="79" name="Text 75"/>
+          <p:cNvPr id="80" name="Text 76"/>
           <p:cNvSpPr/>
           <p:nvPr/>
         </p:nvSpPr>
@@ -38262,7 +39156,7 @@
             <a:r>
               <a:rPr lang="zh-CN" altLang="en-US" sz="1400" dirty="0">
                 <a:solidFill>
-                  <a:srgbClr val="12374E"/>
+                  <a:srgbClr val="000000"/>
                 </a:solidFill>
                 <a:latin typeface="Microsoft YaHei" pitchFamily="34" charset="0"/>
                 <a:ea typeface="Microsoft YaHei" pitchFamily="34" charset="-122"/>
@@ -38282,7 +39176,7 @@
             <a:r>
               <a:rPr lang="zh-CN" altLang="en-US" sz="1400" dirty="0">
                 <a:solidFill>
-                  <a:srgbClr val="12374E"/>
+                  <a:srgbClr val="000000"/>
                 </a:solidFill>
                 <a:latin typeface="Microsoft YaHei" pitchFamily="34" charset="0"/>
                 <a:ea typeface="Microsoft YaHei" pitchFamily="34" charset="-122"/>
@@ -38296,7 +39190,7 @@
       </p:sp>
       <p:sp>
         <p:nvSpPr>
-          <p:cNvPr id="80" name="Text 76"/>
+          <p:cNvPr id="81" name="Text 77"/>
           <p:cNvSpPr/>
           <p:nvPr/>
         </p:nvSpPr>
@@ -38338,7 +39232,7 @@
       </p:sp>
       <p:sp>
         <p:nvSpPr>
-          <p:cNvPr id="81" name="Text 77"/>
+          <p:cNvPr id="82" name="Text 78"/>
           <p:cNvSpPr/>
           <p:nvPr/>
         </p:nvSpPr>
@@ -38380,7 +39274,7 @@
       </p:sp>
       <p:sp>
         <p:nvSpPr>
-          <p:cNvPr id="82" name="Text 78"/>
+          <p:cNvPr id="83" name="Text 79"/>
           <p:cNvSpPr/>
           <p:nvPr/>
         </p:nvSpPr>
@@ -38422,7 +39316,7 @@
       </p:sp>
       <p:sp>
         <p:nvSpPr>
-          <p:cNvPr id="83" name="Shape 79"/>
+          <p:cNvPr id="84" name="Shape 80"/>
           <p:cNvSpPr/>
           <p:nvPr/>
         </p:nvSpPr>
@@ -38435,11 +39329,11 @@
             <a:avLst/>
           </a:prstGeom>
           <a:solidFill>
-            <a:srgbClr val="D8E2E9"/>
-          </a:solidFill>
-          <a:ln w="12700">
-            <a:solidFill>
-              <a:srgbClr val="D8E2E9">
+            <a:srgbClr val="CCDEEA"/>
+          </a:solidFill>
+          <a:ln w="12700">
+            <a:solidFill>
+              <a:srgbClr val="CCDEEA">
                 <a:alpha val="0"/>
               </a:srgbClr>
             </a:solidFill>
@@ -38632,7 +39526,7 @@
             <a:r>
               <a:rPr lang="zh-CN" altLang="en-US" sz="3360" b="1" dirty="0">
                 <a:solidFill>
-                  <a:srgbClr val="12374E"/>
+                  <a:srgbClr val="000000"/>
                 </a:solidFill>
                 <a:latin typeface="Microsoft YaHei" pitchFamily="34" charset="0"/>
                 <a:ea typeface="Microsoft YaHei" pitchFamily="34" charset="-122"/>
@@ -38883,7 +39777,7 @@
             <a:r>
               <a:rPr lang="zh-CN" altLang="en-US" sz="1600" dirty="0">
                 <a:solidFill>
-                  <a:srgbClr val="6B8598"/>
+                  <a:srgbClr val="000000"/>
                 </a:solidFill>
                 <a:latin typeface="Microsoft YaHei" pitchFamily="34" charset="0"/>
                 <a:ea typeface="Microsoft YaHei" pitchFamily="34" charset="-122"/>
@@ -38925,7 +39819,7 @@
             <a:r>
               <a:rPr lang="zh-CN" altLang="en-US" sz="1800" b="1" dirty="0">
                 <a:solidFill>
-                  <a:srgbClr val="12374E"/>
+                  <a:srgbClr val="000000"/>
                 </a:solidFill>
                 <a:latin typeface="Microsoft YaHei" pitchFamily="34" charset="0"/>
                 <a:ea typeface="Microsoft YaHei" pitchFamily="34" charset="-122"/>
@@ -38967,7 +39861,7 @@
             <a:r>
               <a:rPr lang="zh-CN" altLang="en-US" sz="1600" dirty="0">
                 <a:solidFill>
-                  <a:srgbClr val="6B8598"/>
+                  <a:srgbClr val="000000"/>
                 </a:solidFill>
                 <a:latin typeface="Microsoft YaHei" pitchFamily="34" charset="0"/>
                 <a:ea typeface="Microsoft YaHei" pitchFamily="34" charset="-122"/>
@@ -39009,7 +39903,7 @@
             <a:r>
               <a:rPr lang="zh-CN" altLang="en-US" sz="1800" b="1" dirty="0">
                 <a:solidFill>
-                  <a:srgbClr val="12374E"/>
+                  <a:srgbClr val="000000"/>
                 </a:solidFill>
                 <a:latin typeface="Microsoft YaHei" pitchFamily="34" charset="0"/>
                 <a:ea typeface="Microsoft YaHei" pitchFamily="34" charset="-122"/>
@@ -39051,7 +39945,7 @@
             <a:r>
               <a:rPr lang="zh-CN" altLang="en-US" sz="1600" dirty="0">
                 <a:solidFill>
-                  <a:srgbClr val="6B8598"/>
+                  <a:srgbClr val="000000"/>
                 </a:solidFill>
                 <a:latin typeface="Microsoft YaHei" pitchFamily="34" charset="0"/>
                 <a:ea typeface="Microsoft YaHei" pitchFamily="34" charset="-122"/>
@@ -39093,7 +39987,7 @@
             <a:r>
               <a:rPr lang="zh-CN" altLang="en-US" sz="1800" b="1" dirty="0">
                 <a:solidFill>
-                  <a:srgbClr val="12374E"/>
+                  <a:srgbClr val="000000"/>
                 </a:solidFill>
                 <a:latin typeface="Microsoft YaHei" pitchFamily="34" charset="0"/>
                 <a:ea typeface="Microsoft YaHei" pitchFamily="34" charset="-122"/>
@@ -39422,7 +40316,7 @@
             <a:r>
               <a:rPr lang="zh-CN" altLang="en-US" sz="1600" dirty="0">
                 <a:solidFill>
-                  <a:srgbClr val="12374E"/>
+                  <a:srgbClr val="000000"/>
                 </a:solidFill>
                 <a:latin typeface="Microsoft YaHei" pitchFamily="34" charset="0"/>
                 <a:ea typeface="Microsoft YaHei" pitchFamily="34" charset="-122"/>
@@ -39581,7 +40475,7 @@
             <a:r>
               <a:rPr lang="zh-CN" altLang="en-US" sz="1800" b="1" dirty="0">
                 <a:solidFill>
-                  <a:srgbClr val="12374E"/>
+                  <a:srgbClr val="000000"/>
                 </a:solidFill>
                 <a:latin typeface="Microsoft YaHei" pitchFamily="34" charset="0"/>
                 <a:ea typeface="Microsoft YaHei" pitchFamily="34" charset="-122"/>
@@ -39651,7 +40545,7 @@
             <a:r>
               <a:rPr lang="zh-CN" altLang="en-US" sz="1600" dirty="0">
                 <a:solidFill>
-                  <a:srgbClr val="12374E"/>
+                  <a:srgbClr val="000000"/>
                 </a:solidFill>
                 <a:latin typeface="Microsoft YaHei" pitchFamily="34" charset="0"/>
                 <a:ea typeface="Microsoft YaHei" pitchFamily="34" charset="-122"/>
@@ -39694,7 +40588,7 @@
             <a:r>
               <a:rPr lang="zh-CN" altLang="en-US" sz="1600" dirty="0">
                 <a:solidFill>
-                  <a:srgbClr val="12374E"/>
+                  <a:srgbClr val="000000"/>
                 </a:solidFill>
                 <a:latin typeface="Microsoft YaHei" pitchFamily="34" charset="0"/>
                 <a:ea typeface="Microsoft YaHei" pitchFamily="34" charset="-122"/>
@@ -39737,7 +40631,7 @@
             <a:r>
               <a:rPr lang="zh-CN" altLang="en-US" sz="1600" dirty="0">
                 <a:solidFill>
-                  <a:srgbClr val="12374E"/>
+                  <a:srgbClr val="000000"/>
                 </a:solidFill>
                 <a:latin typeface="Microsoft YaHei" pitchFamily="34" charset="0"/>
                 <a:ea typeface="Microsoft YaHei" pitchFamily="34" charset="-122"/>
@@ -39780,7 +40674,7 @@
             <a:r>
               <a:rPr lang="zh-CN" altLang="en-US" sz="1600" dirty="0">
                 <a:solidFill>
-                  <a:srgbClr val="12374E"/>
+                  <a:srgbClr val="000000"/>
                 </a:solidFill>
                 <a:latin typeface="Microsoft YaHei" pitchFamily="34" charset="0"/>
                 <a:ea typeface="Microsoft YaHei" pitchFamily="34" charset="-122"/>
@@ -39822,7 +40716,7 @@
             <a:r>
               <a:rPr lang="zh-CN" altLang="en-US" sz="1600" b="1" dirty="0">
                 <a:solidFill>
-                  <a:srgbClr val="12374E"/>
+                  <a:srgbClr val="000000"/>
                 </a:solidFill>
                 <a:latin typeface="Microsoft YaHei" pitchFamily="34" charset="0"/>
                 <a:ea typeface="Microsoft YaHei" pitchFamily="34" charset="-122"/>
@@ -39864,7 +40758,7 @@
             <a:r>
               <a:rPr lang="zh-CN" altLang="en-US" sz="1400" dirty="0">
                 <a:solidFill>
-                  <a:srgbClr val="12374E"/>
+                  <a:srgbClr val="000000"/>
                 </a:solidFill>
                 <a:latin typeface="Microsoft YaHei" pitchFamily="34" charset="0"/>
                 <a:ea typeface="Microsoft YaHei" pitchFamily="34" charset="-122"/>
@@ -40023,7 +40917,7 @@
             <a:r>
               <a:rPr lang="zh-CN" altLang="en-US" sz="1800" b="1" dirty="0">
                 <a:solidFill>
-                  <a:srgbClr val="12374E"/>
+                  <a:srgbClr val="000000"/>
                 </a:solidFill>
                 <a:latin typeface="Microsoft YaHei" pitchFamily="34" charset="0"/>
                 <a:ea typeface="Microsoft YaHei" pitchFamily="34" charset="-122"/>
@@ -40093,7 +40987,7 @@
             <a:r>
               <a:rPr lang="zh-CN" altLang="en-US" sz="1600" dirty="0">
                 <a:solidFill>
-                  <a:srgbClr val="12374E"/>
+                  <a:srgbClr val="000000"/>
                 </a:solidFill>
                 <a:latin typeface="Microsoft YaHei" pitchFamily="34" charset="0"/>
                 <a:ea typeface="Microsoft YaHei" pitchFamily="34" charset="-122"/>
@@ -40136,7 +41030,7 @@
             <a:r>
               <a:rPr lang="zh-CN" altLang="en-US" sz="1600" dirty="0">
                 <a:solidFill>
-                  <a:srgbClr val="12374E"/>
+                  <a:srgbClr val="000000"/>
                 </a:solidFill>
                 <a:latin typeface="Microsoft YaHei" pitchFamily="34" charset="0"/>
                 <a:ea typeface="Microsoft YaHei" pitchFamily="34" charset="-122"/>
@@ -40179,7 +41073,7 @@
             <a:r>
               <a:rPr lang="zh-CN" altLang="en-US" sz="1600" dirty="0">
                 <a:solidFill>
-                  <a:srgbClr val="12374E"/>
+                  <a:srgbClr val="000000"/>
                 </a:solidFill>
                 <a:latin typeface="Microsoft YaHei" pitchFamily="34" charset="0"/>
                 <a:ea typeface="Microsoft YaHei" pitchFamily="34" charset="-122"/>
@@ -40222,7 +41116,7 @@
             <a:r>
               <a:rPr lang="zh-CN" altLang="en-US" sz="1600" dirty="0">
                 <a:solidFill>
-                  <a:srgbClr val="12374E"/>
+                  <a:srgbClr val="000000"/>
                 </a:solidFill>
                 <a:latin typeface="Microsoft YaHei" pitchFamily="34" charset="0"/>
                 <a:ea typeface="Microsoft YaHei" pitchFamily="34" charset="-122"/>
@@ -40264,7 +41158,7 @@
             <a:r>
               <a:rPr lang="zh-CN" altLang="en-US" sz="1600" b="1" dirty="0">
                 <a:solidFill>
-                  <a:srgbClr val="12374E"/>
+                  <a:srgbClr val="000000"/>
                 </a:solidFill>
                 <a:latin typeface="Microsoft YaHei" pitchFamily="34" charset="0"/>
                 <a:ea typeface="Microsoft YaHei" pitchFamily="34" charset="-122"/>
@@ -40306,7 +41200,7 @@
             <a:r>
               <a:rPr lang="zh-CN" altLang="en-US" sz="1400" dirty="0">
                 <a:solidFill>
-                  <a:srgbClr val="12374E"/>
+                  <a:srgbClr val="000000"/>
                 </a:solidFill>
                 <a:latin typeface="Microsoft YaHei" pitchFamily="34" charset="0"/>
                 <a:ea typeface="Microsoft YaHei" pitchFamily="34" charset="-122"/>
@@ -40465,7 +41359,7 @@
             <a:r>
               <a:rPr lang="zh-CN" altLang="en-US" sz="1800" b="1" dirty="0">
                 <a:solidFill>
-                  <a:srgbClr val="12374E"/>
+                  <a:srgbClr val="000000"/>
                 </a:solidFill>
                 <a:latin typeface="Microsoft YaHei" pitchFamily="34" charset="0"/>
                 <a:ea typeface="Microsoft YaHei" pitchFamily="34" charset="-122"/>
@@ -40535,7 +41429,7 @@
             <a:r>
               <a:rPr lang="zh-CN" altLang="en-US" sz="1600" dirty="0">
                 <a:solidFill>
-                  <a:srgbClr val="12374E"/>
+                  <a:srgbClr val="000000"/>
                 </a:solidFill>
                 <a:latin typeface="Microsoft YaHei" pitchFamily="34" charset="0"/>
                 <a:ea typeface="Microsoft YaHei" pitchFamily="34" charset="-122"/>
@@ -40578,7 +41472,7 @@
             <a:r>
               <a:rPr lang="zh-CN" altLang="en-US" sz="1600" dirty="0">
                 <a:solidFill>
-                  <a:srgbClr val="12374E"/>
+                  <a:srgbClr val="000000"/>
                 </a:solidFill>
                 <a:latin typeface="Microsoft YaHei" pitchFamily="34" charset="0"/>
                 <a:ea typeface="Microsoft YaHei" pitchFamily="34" charset="-122"/>
@@ -40621,7 +41515,7 @@
             <a:r>
               <a:rPr lang="zh-CN" altLang="en-US" sz="1600" dirty="0">
                 <a:solidFill>
-                  <a:srgbClr val="12374E"/>
+                  <a:srgbClr val="000000"/>
                 </a:solidFill>
                 <a:latin typeface="Microsoft YaHei" pitchFamily="34" charset="0"/>
                 <a:ea typeface="Microsoft YaHei" pitchFamily="34" charset="-122"/>
@@ -40664,7 +41558,7 @@
             <a:r>
               <a:rPr lang="zh-CN" altLang="en-US" sz="1600" dirty="0">
                 <a:solidFill>
-                  <a:srgbClr val="12374E"/>
+                  <a:srgbClr val="000000"/>
                 </a:solidFill>
                 <a:latin typeface="Microsoft YaHei" pitchFamily="34" charset="0"/>
                 <a:ea typeface="Microsoft YaHei" pitchFamily="34" charset="-122"/>
@@ -40706,7 +41600,7 @@
             <a:r>
               <a:rPr lang="zh-CN" altLang="en-US" sz="1600" b="1" dirty="0">
                 <a:solidFill>
-                  <a:srgbClr val="12374E"/>
+                  <a:srgbClr val="000000"/>
                 </a:solidFill>
                 <a:latin typeface="Microsoft YaHei" pitchFamily="34" charset="0"/>
                 <a:ea typeface="Microsoft YaHei" pitchFamily="34" charset="-122"/>
@@ -40748,7 +41642,7 @@
             <a:r>
               <a:rPr lang="zh-CN" altLang="en-US" sz="1400" dirty="0">
                 <a:solidFill>
-                  <a:srgbClr val="12374E"/>
+                  <a:srgbClr val="000000"/>
                 </a:solidFill>
                 <a:latin typeface="Microsoft YaHei" pitchFamily="34" charset="0"/>
                 <a:ea typeface="Microsoft YaHei" pitchFamily="34" charset="-122"/>
@@ -40901,11 +41795,11 @@
             <a:avLst/>
           </a:prstGeom>
           <a:solidFill>
-            <a:srgbClr val="D8E2E9"/>
-          </a:solidFill>
-          <a:ln w="12700">
-            <a:solidFill>
-              <a:srgbClr val="D8E2E9">
+            <a:srgbClr val="CCDEEA"/>
+          </a:solidFill>
+          <a:ln w="12700">
+            <a:solidFill>
+              <a:srgbClr val="CCDEEA">
                 <a:alpha val="0"/>
               </a:srgbClr>
             </a:solidFill>
@@ -41230,7 +42124,7 @@
             <a:r>
               <a:rPr lang="zh-CN" altLang="en-US" sz="1600" dirty="0">
                 <a:solidFill>
-                  <a:srgbClr val="12374E"/>
+                  <a:srgbClr val="000000"/>
                 </a:solidFill>
                 <a:latin typeface="Microsoft YaHei" pitchFamily="34" charset="0"/>
                 <a:ea typeface="Microsoft YaHei" pitchFamily="34" charset="-122"/>
@@ -41722,7 +42616,7 @@
             <a:r>
               <a:rPr lang="zh-CN" altLang="en-US" sz="1400" dirty="0">
                 <a:solidFill>
-                  <a:srgbClr val="12374E"/>
+                  <a:srgbClr val="000000"/>
                 </a:solidFill>
                 <a:latin typeface="Microsoft YaHei" pitchFamily="34" charset="0"/>
                 <a:ea typeface="Microsoft YaHei" pitchFamily="34" charset="-122"/>
@@ -41845,7 +42739,7 @@
             <a:r>
               <a:rPr lang="zh-CN" altLang="en-US" sz="1400" dirty="0">
                 <a:solidFill>
-                  <a:srgbClr val="12374E"/>
+                  <a:srgbClr val="000000"/>
                 </a:solidFill>
                 <a:latin typeface="Microsoft YaHei" pitchFamily="34" charset="0"/>
                 <a:ea typeface="Microsoft YaHei" pitchFamily="34" charset="-122"/>
@@ -41968,7 +42862,7 @@
             <a:r>
               <a:rPr lang="zh-CN" altLang="en-US" sz="1400" dirty="0">
                 <a:solidFill>
-                  <a:srgbClr val="12374E"/>
+                  <a:srgbClr val="000000"/>
                 </a:solidFill>
                 <a:latin typeface="Microsoft YaHei" pitchFamily="34" charset="0"/>
                 <a:ea typeface="Microsoft YaHei" pitchFamily="34" charset="-122"/>
@@ -42091,7 +42985,7 @@
             <a:r>
               <a:rPr lang="zh-CN" altLang="en-US" sz="1400" dirty="0">
                 <a:solidFill>
-                  <a:srgbClr val="12374E"/>
+                  <a:srgbClr val="000000"/>
                 </a:solidFill>
                 <a:latin typeface="Microsoft YaHei" pitchFamily="34" charset="0"/>
                 <a:ea typeface="Microsoft YaHei" pitchFamily="34" charset="-122"/>
@@ -42214,7 +43108,7 @@
             <a:r>
               <a:rPr lang="zh-CN" altLang="en-US" sz="1400" dirty="0">
                 <a:solidFill>
-                  <a:srgbClr val="12374E"/>
+                  <a:srgbClr val="000000"/>
                 </a:solidFill>
                 <a:latin typeface="Microsoft YaHei" pitchFamily="34" charset="0"/>
                 <a:ea typeface="Microsoft YaHei" pitchFamily="34" charset="-122"/>
@@ -42337,7 +43231,7 @@
             <a:r>
               <a:rPr lang="zh-CN" altLang="en-US" sz="1400" dirty="0">
                 <a:solidFill>
-                  <a:srgbClr val="12374E"/>
+                  <a:srgbClr val="000000"/>
                 </a:solidFill>
                 <a:latin typeface="Microsoft YaHei" pitchFamily="34" charset="0"/>
                 <a:ea typeface="Microsoft YaHei" pitchFamily="34" charset="-122"/>
@@ -42460,7 +43354,7 @@
             <a:r>
               <a:rPr lang="zh-CN" altLang="en-US" sz="1400" dirty="0">
                 <a:solidFill>
-                  <a:srgbClr val="12374E"/>
+                  <a:srgbClr val="000000"/>
                 </a:solidFill>
                 <a:latin typeface="Microsoft YaHei" pitchFamily="34" charset="0"/>
                 <a:ea typeface="Microsoft YaHei" pitchFamily="34" charset="-122"/>
@@ -42583,7 +43477,7 @@
             <a:r>
               <a:rPr lang="zh-CN" altLang="en-US" sz="1400" dirty="0">
                 <a:solidFill>
-                  <a:srgbClr val="12374E"/>
+                  <a:srgbClr val="000000"/>
                 </a:solidFill>
                 <a:latin typeface="Microsoft YaHei" pitchFamily="34" charset="0"/>
                 <a:ea typeface="Microsoft YaHei" pitchFamily="34" charset="-122"/>
@@ -42706,7 +43600,7 @@
             <a:r>
               <a:rPr lang="zh-CN" altLang="en-US" sz="1400" dirty="0">
                 <a:solidFill>
-                  <a:srgbClr val="12374E"/>
+                  <a:srgbClr val="000000"/>
                 </a:solidFill>
                 <a:latin typeface="Microsoft YaHei" pitchFamily="34" charset="0"/>
                 <a:ea typeface="Microsoft YaHei" pitchFamily="34" charset="-122"/>
@@ -42829,7 +43723,7 @@
             <a:r>
               <a:rPr lang="zh-CN" altLang="en-US" sz="1400" dirty="0">
                 <a:solidFill>
-                  <a:srgbClr val="12374E"/>
+                  <a:srgbClr val="000000"/>
                 </a:solidFill>
                 <a:latin typeface="Microsoft YaHei" pitchFamily="34" charset="0"/>
                 <a:ea typeface="Microsoft YaHei" pitchFamily="34" charset="-122"/>
@@ -42952,7 +43846,7 @@
             <a:r>
               <a:rPr lang="zh-CN" altLang="en-US" sz="1400" dirty="0">
                 <a:solidFill>
-                  <a:srgbClr val="12374E"/>
+                  <a:srgbClr val="000000"/>
                 </a:solidFill>
                 <a:latin typeface="Microsoft YaHei" pitchFamily="34" charset="0"/>
                 <a:ea typeface="Microsoft YaHei" pitchFamily="34" charset="-122"/>
@@ -43075,7 +43969,7 @@
             <a:r>
               <a:rPr lang="zh-CN" altLang="en-US" sz="1400" dirty="0">
                 <a:solidFill>
-                  <a:srgbClr val="12374E"/>
+                  <a:srgbClr val="000000"/>
                 </a:solidFill>
                 <a:latin typeface="Microsoft YaHei" pitchFamily="34" charset="0"/>
                 <a:ea typeface="Microsoft YaHei" pitchFamily="34" charset="-122"/>
@@ -43198,7 +44092,7 @@
             <a:r>
               <a:rPr lang="zh-CN" altLang="en-US" sz="1400" dirty="0">
                 <a:solidFill>
-                  <a:srgbClr val="12374E"/>
+                  <a:srgbClr val="000000"/>
                 </a:solidFill>
                 <a:latin typeface="Microsoft YaHei" pitchFamily="34" charset="0"/>
                 <a:ea typeface="Microsoft YaHei" pitchFamily="34" charset="-122"/>
@@ -43321,7 +44215,7 @@
             <a:r>
               <a:rPr lang="zh-CN" altLang="en-US" sz="1400" dirty="0">
                 <a:solidFill>
-                  <a:srgbClr val="12374E"/>
+                  <a:srgbClr val="000000"/>
                 </a:solidFill>
                 <a:latin typeface="Microsoft YaHei" pitchFamily="34" charset="0"/>
                 <a:ea typeface="Microsoft YaHei" pitchFamily="34" charset="-122"/>
@@ -43444,7 +44338,7 @@
             <a:r>
               <a:rPr lang="zh-CN" altLang="en-US" sz="1400" dirty="0">
                 <a:solidFill>
-                  <a:srgbClr val="12374E"/>
+                  <a:srgbClr val="000000"/>
                 </a:solidFill>
                 <a:latin typeface="Microsoft YaHei" pitchFamily="34" charset="0"/>
                 <a:ea typeface="Microsoft YaHei" pitchFamily="34" charset="-122"/>
@@ -43567,7 +44461,7 @@
             <a:r>
               <a:rPr lang="zh-CN" altLang="en-US" sz="1400" dirty="0">
                 <a:solidFill>
-                  <a:srgbClr val="12374E"/>
+                  <a:srgbClr val="000000"/>
                 </a:solidFill>
                 <a:latin typeface="Microsoft YaHei" pitchFamily="34" charset="0"/>
                 <a:ea typeface="Microsoft YaHei" pitchFamily="34" charset="-122"/>
@@ -43690,7 +44584,7 @@
             <a:r>
               <a:rPr lang="zh-CN" altLang="en-US" sz="1400" dirty="0">
                 <a:solidFill>
-                  <a:srgbClr val="12374E"/>
+                  <a:srgbClr val="000000"/>
                 </a:solidFill>
                 <a:latin typeface="Microsoft YaHei" pitchFamily="34" charset="0"/>
                 <a:ea typeface="Microsoft YaHei" pitchFamily="34" charset="-122"/>
@@ -43813,7 +44707,7 @@
             <a:r>
               <a:rPr lang="zh-CN" altLang="en-US" sz="1400" dirty="0">
                 <a:solidFill>
-                  <a:srgbClr val="12374E"/>
+                  <a:srgbClr val="000000"/>
                 </a:solidFill>
                 <a:latin typeface="Microsoft YaHei" pitchFamily="34" charset="0"/>
                 <a:ea typeface="Microsoft YaHei" pitchFamily="34" charset="-122"/>
@@ -43936,7 +44830,7 @@
             <a:r>
               <a:rPr lang="zh-CN" altLang="en-US" sz="1400" dirty="0">
                 <a:solidFill>
-                  <a:srgbClr val="12374E"/>
+                  <a:srgbClr val="000000"/>
                 </a:solidFill>
                 <a:latin typeface="Microsoft YaHei" pitchFamily="34" charset="0"/>
                 <a:ea typeface="Microsoft YaHei" pitchFamily="34" charset="-122"/>
@@ -44059,7 +44953,7 @@
             <a:r>
               <a:rPr lang="zh-CN" altLang="en-US" sz="1400" dirty="0">
                 <a:solidFill>
-                  <a:srgbClr val="12374E"/>
+                  <a:srgbClr val="000000"/>
                 </a:solidFill>
                 <a:latin typeface="Microsoft YaHei" pitchFamily="34" charset="0"/>
                 <a:ea typeface="Microsoft YaHei" pitchFamily="34" charset="-122"/>
@@ -44182,7 +45076,7 @@
             <a:r>
               <a:rPr lang="zh-CN" altLang="en-US" sz="1400" dirty="0">
                 <a:solidFill>
-                  <a:srgbClr val="12374E"/>
+                  <a:srgbClr val="000000"/>
                 </a:solidFill>
                 <a:latin typeface="Microsoft YaHei" pitchFamily="34" charset="0"/>
                 <a:ea typeface="Microsoft YaHei" pitchFamily="34" charset="-122"/>
@@ -44305,7 +45199,7 @@
             <a:r>
               <a:rPr lang="zh-CN" altLang="en-US" sz="1400" dirty="0">
                 <a:solidFill>
-                  <a:srgbClr val="12374E"/>
+                  <a:srgbClr val="000000"/>
                 </a:solidFill>
                 <a:latin typeface="Microsoft YaHei" pitchFamily="34" charset="0"/>
                 <a:ea typeface="Microsoft YaHei" pitchFamily="34" charset="-122"/>
@@ -44428,7 +45322,7 @@
             <a:r>
               <a:rPr lang="zh-CN" altLang="en-US" sz="1400" dirty="0">
                 <a:solidFill>
-                  <a:srgbClr val="12374E"/>
+                  <a:srgbClr val="000000"/>
                 </a:solidFill>
                 <a:latin typeface="Microsoft YaHei" pitchFamily="34" charset="0"/>
                 <a:ea typeface="Microsoft YaHei" pitchFamily="34" charset="-122"/>
@@ -44551,7 +45445,7 @@
             <a:r>
               <a:rPr lang="zh-CN" altLang="en-US" sz="1400" dirty="0">
                 <a:solidFill>
-                  <a:srgbClr val="12374E"/>
+                  <a:srgbClr val="000000"/>
                 </a:solidFill>
                 <a:latin typeface="Microsoft YaHei" pitchFamily="34" charset="0"/>
                 <a:ea typeface="Microsoft YaHei" pitchFamily="34" charset="-122"/>
@@ -44674,7 +45568,7 @@
             <a:r>
               <a:rPr lang="zh-CN" altLang="en-US" sz="1400" dirty="0">
                 <a:solidFill>
-                  <a:srgbClr val="12374E"/>
+                  <a:srgbClr val="000000"/>
                 </a:solidFill>
                 <a:latin typeface="Microsoft YaHei" pitchFamily="34" charset="0"/>
                 <a:ea typeface="Microsoft YaHei" pitchFamily="34" charset="-122"/>
@@ -44797,7 +45691,7 @@
             <a:r>
               <a:rPr lang="zh-CN" altLang="en-US" sz="1400" dirty="0">
                 <a:solidFill>
-                  <a:srgbClr val="12374E"/>
+                  <a:srgbClr val="000000"/>
                 </a:solidFill>
                 <a:latin typeface="Microsoft YaHei" pitchFamily="34" charset="0"/>
                 <a:ea typeface="Microsoft YaHei" pitchFamily="34" charset="-122"/>
@@ -44920,7 +45814,7 @@
             <a:r>
               <a:rPr lang="zh-CN" altLang="en-US" sz="1400" dirty="0">
                 <a:solidFill>
-                  <a:srgbClr val="12374E"/>
+                  <a:srgbClr val="000000"/>
                 </a:solidFill>
                 <a:latin typeface="Microsoft YaHei" pitchFamily="34" charset="0"/>
                 <a:ea typeface="Microsoft YaHei" pitchFamily="34" charset="-122"/>
@@ -45073,7 +45967,7 @@
             <a:r>
               <a:rPr lang="zh-CN" altLang="en-US" sz="1600" dirty="0">
                 <a:solidFill>
-                  <a:srgbClr val="12374E"/>
+                  <a:srgbClr val="000000"/>
                 </a:solidFill>
                 <a:latin typeface="Microsoft YaHei" pitchFamily="34" charset="0"/>
                 <a:ea typeface="Microsoft YaHei" pitchFamily="34" charset="-122"/>
@@ -45100,11 +45994,11 @@
             <a:avLst/>
           </a:prstGeom>
           <a:solidFill>
-            <a:srgbClr val="9EA8AE"/>
-          </a:solidFill>
-          <a:ln w="12700">
-            <a:solidFill>
-              <a:srgbClr val="9EA8AE">
+            <a:srgbClr val="777777"/>
+          </a:solidFill>
+          <a:ln w="12700">
+            <a:solidFill>
+              <a:srgbClr val="777777">
                 <a:alpha val="0"/>
               </a:srgbClr>
             </a:solidFill>
@@ -45184,7 +46078,7 @@
             <a:r>
               <a:rPr lang="zh-CN" altLang="en-US" sz="1600" dirty="0">
                 <a:solidFill>
-                  <a:srgbClr val="12374E"/>
+                  <a:srgbClr val="000000"/>
                 </a:solidFill>
                 <a:latin typeface="Microsoft YaHei" pitchFamily="34" charset="0"/>
                 <a:ea typeface="Microsoft YaHei" pitchFamily="34" charset="-122"/>
@@ -45211,11 +46105,11 @@
             <a:avLst/>
           </a:prstGeom>
           <a:solidFill>
-            <a:srgbClr val="9EA8AE"/>
-          </a:solidFill>
-          <a:ln w="12700">
-            <a:solidFill>
-              <a:srgbClr val="9EA8AE">
+            <a:srgbClr val="777777"/>
+          </a:solidFill>
+          <a:ln w="12700">
+            <a:solidFill>
+              <a:srgbClr val="777777">
                 <a:alpha val="0"/>
               </a:srgbClr>
             </a:solidFill>
@@ -45295,7 +46189,7 @@
             <a:r>
               <a:rPr lang="zh-CN" altLang="en-US" sz="1600" dirty="0">
                 <a:solidFill>
-                  <a:srgbClr val="12374E"/>
+                  <a:srgbClr val="000000"/>
                 </a:solidFill>
                 <a:latin typeface="Microsoft YaHei" pitchFamily="34" charset="0"/>
                 <a:ea typeface="Microsoft YaHei" pitchFamily="34" charset="-122"/>
@@ -45448,11 +46342,11 @@
             <a:avLst/>
           </a:prstGeom>
           <a:solidFill>
-            <a:srgbClr val="D8E2E9"/>
-          </a:solidFill>
-          <a:ln w="12700">
-            <a:solidFill>
-              <a:srgbClr val="D8E2E9">
+            <a:srgbClr val="CCDEEA"/>
+          </a:solidFill>
+          <a:ln w="12700">
+            <a:solidFill>
+              <a:srgbClr val="CCDEEA">
                 <a:alpha val="0"/>
               </a:srgbClr>
             </a:solidFill>
@@ -45777,7 +46671,7 @@
             <a:r>
               <a:rPr lang="zh-CN" altLang="en-US" sz="1600" dirty="0">
                 <a:solidFill>
-                  <a:srgbClr val="12374E"/>
+                  <a:srgbClr val="000000"/>
                 </a:solidFill>
                 <a:latin typeface="Microsoft YaHei" pitchFamily="34" charset="0"/>
                 <a:ea typeface="Microsoft YaHei" pitchFamily="34" charset="-122"/>
@@ -45934,7 +46828,7 @@
             <a:r>
               <a:rPr lang="zh-CN" altLang="en-US" sz="1600" dirty="0">
                 <a:solidFill>
-                  <a:srgbClr val="12374E"/>
+                  <a:srgbClr val="000000"/>
                 </a:solidFill>
                 <a:latin typeface="Microsoft YaHei" pitchFamily="34" charset="0"/>
                 <a:ea typeface="Microsoft YaHei" pitchFamily="34" charset="-122"/>
@@ -45977,7 +46871,7 @@
             <a:r>
               <a:rPr lang="zh-CN" altLang="en-US" sz="1600" dirty="0">
                 <a:solidFill>
-                  <a:srgbClr val="12374E"/>
+                  <a:srgbClr val="000000"/>
                 </a:solidFill>
                 <a:latin typeface="Microsoft YaHei" pitchFamily="34" charset="0"/>
                 <a:ea typeface="Microsoft YaHei" pitchFamily="34" charset="-122"/>
@@ -46020,7 +46914,7 @@
             <a:r>
               <a:rPr lang="zh-CN" altLang="en-US" sz="1600" dirty="0">
                 <a:solidFill>
-                  <a:srgbClr val="12374E"/>
+                  <a:srgbClr val="000000"/>
                 </a:solidFill>
                 <a:latin typeface="Microsoft YaHei" pitchFamily="34" charset="0"/>
                 <a:ea typeface="Microsoft YaHei" pitchFamily="34" charset="-122"/>
@@ -46063,7 +46957,7 @@
             <a:r>
               <a:rPr lang="zh-CN" altLang="en-US" sz="1600" dirty="0">
                 <a:solidFill>
-                  <a:srgbClr val="12374E"/>
+                  <a:srgbClr val="000000"/>
                 </a:solidFill>
                 <a:latin typeface="Microsoft YaHei" pitchFamily="34" charset="0"/>
                 <a:ea typeface="Microsoft YaHei" pitchFamily="34" charset="-122"/>
@@ -46220,7 +47114,7 @@
             <a:r>
               <a:rPr lang="zh-CN" altLang="en-US" sz="1600" dirty="0">
                 <a:solidFill>
-                  <a:srgbClr val="12374E"/>
+                  <a:srgbClr val="000000"/>
                 </a:solidFill>
                 <a:latin typeface="Microsoft YaHei" pitchFamily="34" charset="0"/>
                 <a:ea typeface="Microsoft YaHei" pitchFamily="34" charset="-122"/>
@@ -46263,7 +47157,7 @@
             <a:r>
               <a:rPr lang="zh-CN" altLang="en-US" sz="1600" dirty="0">
                 <a:solidFill>
-                  <a:srgbClr val="12374E"/>
+                  <a:srgbClr val="000000"/>
                 </a:solidFill>
                 <a:latin typeface="Microsoft YaHei" pitchFamily="34" charset="0"/>
                 <a:ea typeface="Microsoft YaHei" pitchFamily="34" charset="-122"/>
@@ -46306,7 +47200,7 @@
             <a:r>
               <a:rPr lang="zh-CN" altLang="en-US" sz="1600" dirty="0">
                 <a:solidFill>
-                  <a:srgbClr val="12374E"/>
+                  <a:srgbClr val="000000"/>
                 </a:solidFill>
                 <a:latin typeface="Microsoft YaHei" pitchFamily="34" charset="0"/>
                 <a:ea typeface="Microsoft YaHei" pitchFamily="34" charset="-122"/>
@@ -46349,7 +47243,7 @@
             <a:r>
               <a:rPr lang="zh-CN" altLang="en-US" sz="1600" dirty="0">
                 <a:solidFill>
-                  <a:srgbClr val="12374E"/>
+                  <a:srgbClr val="000000"/>
                 </a:solidFill>
                 <a:latin typeface="Microsoft YaHei" pitchFamily="34" charset="0"/>
                 <a:ea typeface="Microsoft YaHei" pitchFamily="34" charset="-122"/>
@@ -46445,7 +47339,7 @@
             <a:r>
               <a:rPr lang="zh-CN" altLang="en-US" sz="1600" dirty="0">
                 <a:solidFill>
-                  <a:srgbClr val="12374E"/>
+                  <a:srgbClr val="000000"/>
                 </a:solidFill>
                 <a:latin typeface="Microsoft YaHei" pitchFamily="34" charset="0"/>
                 <a:ea typeface="Microsoft YaHei" pitchFamily="34" charset="-122"/>
@@ -46541,7 +47435,7 @@
             <a:r>
               <a:rPr lang="zh-CN" altLang="en-US" sz="1600" dirty="0">
                 <a:solidFill>
-                  <a:srgbClr val="12374E"/>
+                  <a:srgbClr val="000000"/>
                 </a:solidFill>
                 <a:latin typeface="Microsoft YaHei" pitchFamily="34" charset="0"/>
                 <a:ea typeface="Microsoft YaHei" pitchFamily="34" charset="-122"/>
@@ -46763,11 +47657,11 @@
             <a:avLst/>
           </a:prstGeom>
           <a:solidFill>
-            <a:srgbClr val="D8E2E9"/>
-          </a:solidFill>
-          <a:ln w="12700">
-            <a:solidFill>
-              <a:srgbClr val="D8E2E9">
+            <a:srgbClr val="CCDEEA"/>
+          </a:solidFill>
+          <a:ln w="12700">
+            <a:solidFill>
+              <a:srgbClr val="CCDEEA">
                 <a:alpha val="0"/>
               </a:srgbClr>
             </a:solidFill>
@@ -47092,7 +47986,7 @@
             <a:r>
               <a:rPr lang="zh-CN" altLang="en-US" sz="1600" dirty="0">
                 <a:solidFill>
-                  <a:srgbClr val="12374E"/>
+                  <a:srgbClr val="000000"/>
                 </a:solidFill>
                 <a:latin typeface="Microsoft YaHei" pitchFamily="34" charset="0"/>
                 <a:ea typeface="Microsoft YaHei" pitchFamily="34" charset="-122"/>
@@ -47251,7 +48145,7 @@
             <a:r>
               <a:rPr lang="zh-CN" altLang="en-US" sz="1800" b="1" dirty="0">
                 <a:solidFill>
-                  <a:srgbClr val="12374E"/>
+                  <a:srgbClr val="000000"/>
                 </a:solidFill>
                 <a:latin typeface="Microsoft YaHei" pitchFamily="34" charset="0"/>
                 <a:ea typeface="Microsoft YaHei" pitchFamily="34" charset="-122"/>
@@ -47321,7 +48215,7 @@
             <a:r>
               <a:rPr lang="zh-CN" altLang="en-US" sz="1600" dirty="0">
                 <a:solidFill>
-                  <a:srgbClr val="12374E"/>
+                  <a:srgbClr val="000000"/>
                 </a:solidFill>
                 <a:latin typeface="Microsoft YaHei" pitchFamily="34" charset="0"/>
                 <a:ea typeface="Microsoft YaHei" pitchFamily="34" charset="-122"/>
@@ -47364,7 +48258,7 @@
             <a:r>
               <a:rPr lang="zh-CN" altLang="en-US" sz="1600" dirty="0">
                 <a:solidFill>
-                  <a:srgbClr val="12374E"/>
+                  <a:srgbClr val="000000"/>
                 </a:solidFill>
                 <a:latin typeface="Microsoft YaHei" pitchFamily="34" charset="0"/>
                 <a:ea typeface="Microsoft YaHei" pitchFamily="34" charset="-122"/>
@@ -47407,7 +48301,7 @@
             <a:r>
               <a:rPr lang="zh-CN" altLang="en-US" sz="1600" dirty="0">
                 <a:solidFill>
-                  <a:srgbClr val="12374E"/>
+                  <a:srgbClr val="000000"/>
                 </a:solidFill>
                 <a:latin typeface="Microsoft YaHei" pitchFamily="34" charset="0"/>
                 <a:ea typeface="Microsoft YaHei" pitchFamily="34" charset="-122"/>
@@ -47450,7 +48344,7 @@
             <a:r>
               <a:rPr lang="zh-CN" altLang="en-US" sz="1600" dirty="0">
                 <a:solidFill>
-                  <a:srgbClr val="12374E"/>
+                  <a:srgbClr val="000000"/>
                 </a:solidFill>
                 <a:latin typeface="Microsoft YaHei" pitchFamily="34" charset="0"/>
                 <a:ea typeface="Microsoft YaHei" pitchFamily="34" charset="-122"/>
@@ -47492,7 +48386,7 @@
             <a:r>
               <a:rPr lang="zh-CN" altLang="en-US" sz="1600" b="1" dirty="0">
                 <a:solidFill>
-                  <a:srgbClr val="12374E"/>
+                  <a:srgbClr val="000000"/>
                 </a:solidFill>
                 <a:latin typeface="Microsoft YaHei" pitchFamily="34" charset="0"/>
                 <a:ea typeface="Microsoft YaHei" pitchFamily="34" charset="-122"/>
@@ -47534,7 +48428,7 @@
             <a:r>
               <a:rPr lang="zh-CN" altLang="en-US" sz="1400" dirty="0">
                 <a:solidFill>
-                  <a:srgbClr val="12374E"/>
+                  <a:srgbClr val="000000"/>
                 </a:solidFill>
                 <a:latin typeface="Microsoft YaHei" pitchFamily="34" charset="0"/>
                 <a:ea typeface="Microsoft YaHei" pitchFamily="34" charset="-122"/>
@@ -47693,7 +48587,7 @@
             <a:r>
               <a:rPr lang="zh-CN" altLang="en-US" sz="1800" b="1" dirty="0">
                 <a:solidFill>
-                  <a:srgbClr val="12374E"/>
+                  <a:srgbClr val="000000"/>
                 </a:solidFill>
                 <a:latin typeface="Microsoft YaHei" pitchFamily="34" charset="0"/>
                 <a:ea typeface="Microsoft YaHei" pitchFamily="34" charset="-122"/>
@@ -47763,7 +48657,7 @@
             <a:r>
               <a:rPr lang="zh-CN" altLang="en-US" sz="1600" dirty="0">
                 <a:solidFill>
-                  <a:srgbClr val="12374E"/>
+                  <a:srgbClr val="000000"/>
                 </a:solidFill>
                 <a:latin typeface="Microsoft YaHei" pitchFamily="34" charset="0"/>
                 <a:ea typeface="Microsoft YaHei" pitchFamily="34" charset="-122"/>
@@ -47806,7 +48700,7 @@
             <a:r>
               <a:rPr lang="zh-CN" altLang="en-US" sz="1600" dirty="0">
                 <a:solidFill>
-                  <a:srgbClr val="12374E"/>
+                  <a:srgbClr val="000000"/>
                 </a:solidFill>
                 <a:latin typeface="Microsoft YaHei" pitchFamily="34" charset="0"/>
                 <a:ea typeface="Microsoft YaHei" pitchFamily="34" charset="-122"/>
@@ -47849,7 +48743,7 @@
             <a:r>
               <a:rPr lang="zh-CN" altLang="en-US" sz="1600" dirty="0">
                 <a:solidFill>
-                  <a:srgbClr val="12374E"/>
+                  <a:srgbClr val="000000"/>
                 </a:solidFill>
                 <a:latin typeface="Microsoft YaHei" pitchFamily="34" charset="0"/>
                 <a:ea typeface="Microsoft YaHei" pitchFamily="34" charset="-122"/>
@@ -47892,7 +48786,7 @@
             <a:r>
               <a:rPr lang="zh-CN" altLang="en-US" sz="1600" dirty="0">
                 <a:solidFill>
-                  <a:srgbClr val="12374E"/>
+                  <a:srgbClr val="000000"/>
                 </a:solidFill>
                 <a:latin typeface="Microsoft YaHei" pitchFamily="34" charset="0"/>
                 <a:ea typeface="Microsoft YaHei" pitchFamily="34" charset="-122"/>
@@ -47934,7 +48828,7 @@
             <a:r>
               <a:rPr lang="zh-CN" altLang="en-US" sz="1600" b="1" dirty="0">
                 <a:solidFill>
-                  <a:srgbClr val="12374E"/>
+                  <a:srgbClr val="000000"/>
                 </a:solidFill>
                 <a:latin typeface="Microsoft YaHei" pitchFamily="34" charset="0"/>
                 <a:ea typeface="Microsoft YaHei" pitchFamily="34" charset="-122"/>
@@ -47976,7 +48870,7 @@
             <a:r>
               <a:rPr lang="zh-CN" altLang="en-US" sz="1400" dirty="0">
                 <a:solidFill>
-                  <a:srgbClr val="12374E"/>
+                  <a:srgbClr val="000000"/>
                 </a:solidFill>
                 <a:latin typeface="Microsoft YaHei" pitchFamily="34" charset="0"/>
                 <a:ea typeface="Microsoft YaHei" pitchFamily="34" charset="-122"/>
@@ -48135,7 +49029,7 @@
             <a:r>
               <a:rPr lang="zh-CN" altLang="en-US" sz="1800" b="1" dirty="0">
                 <a:solidFill>
-                  <a:srgbClr val="12374E"/>
+                  <a:srgbClr val="000000"/>
                 </a:solidFill>
                 <a:latin typeface="Microsoft YaHei" pitchFamily="34" charset="0"/>
                 <a:ea typeface="Microsoft YaHei" pitchFamily="34" charset="-122"/>
@@ -48205,7 +49099,7 @@
             <a:r>
               <a:rPr lang="zh-CN" altLang="en-US" sz="1600" dirty="0">
                 <a:solidFill>
-                  <a:srgbClr val="12374E"/>
+                  <a:srgbClr val="000000"/>
                 </a:solidFill>
                 <a:latin typeface="Microsoft YaHei" pitchFamily="34" charset="0"/>
                 <a:ea typeface="Microsoft YaHei" pitchFamily="34" charset="-122"/>
@@ -48248,7 +49142,7 @@
             <a:r>
               <a:rPr lang="zh-CN" altLang="en-US" sz="1600" dirty="0">
                 <a:solidFill>
-                  <a:srgbClr val="12374E"/>
+                  <a:srgbClr val="000000"/>
                 </a:solidFill>
                 <a:latin typeface="Microsoft YaHei" pitchFamily="34" charset="0"/>
                 <a:ea typeface="Microsoft YaHei" pitchFamily="34" charset="-122"/>
@@ -48291,7 +49185,7 @@
             <a:r>
               <a:rPr lang="zh-CN" altLang="en-US" sz="1600" dirty="0">
                 <a:solidFill>
-                  <a:srgbClr val="12374E"/>
+                  <a:srgbClr val="000000"/>
                 </a:solidFill>
                 <a:latin typeface="Microsoft YaHei" pitchFamily="34" charset="0"/>
                 <a:ea typeface="Microsoft YaHei" pitchFamily="34" charset="-122"/>
@@ -48334,7 +49228,7 @@
             <a:r>
               <a:rPr lang="zh-CN" altLang="en-US" sz="1600" dirty="0">
                 <a:solidFill>
-                  <a:srgbClr val="12374E"/>
+                  <a:srgbClr val="000000"/>
                 </a:solidFill>
                 <a:latin typeface="Microsoft YaHei" pitchFamily="34" charset="0"/>
                 <a:ea typeface="Microsoft YaHei" pitchFamily="34" charset="-122"/>
@@ -48376,7 +49270,7 @@
             <a:r>
               <a:rPr lang="zh-CN" altLang="en-US" sz="1600" b="1" dirty="0">
                 <a:solidFill>
-                  <a:srgbClr val="12374E"/>
+                  <a:srgbClr val="000000"/>
                 </a:solidFill>
                 <a:latin typeface="Microsoft YaHei" pitchFamily="34" charset="0"/>
                 <a:ea typeface="Microsoft YaHei" pitchFamily="34" charset="-122"/>
@@ -48418,7 +49312,7 @@
             <a:r>
               <a:rPr lang="zh-CN" altLang="en-US" sz="1400" dirty="0">
                 <a:solidFill>
-                  <a:srgbClr val="12374E"/>
+                  <a:srgbClr val="000000"/>
                 </a:solidFill>
                 <a:latin typeface="Microsoft YaHei" pitchFamily="34" charset="0"/>
                 <a:ea typeface="Microsoft YaHei" pitchFamily="34" charset="-122"/>
@@ -48640,11 +49534,11 @@
             <a:avLst/>
           </a:prstGeom>
           <a:solidFill>
-            <a:srgbClr val="D8E2E9"/>
-          </a:solidFill>
-          <a:ln w="12700">
-            <a:solidFill>
-              <a:srgbClr val="D8E2E9">
+            <a:srgbClr val="CCDEEA"/>
+          </a:solidFill>
+          <a:ln w="12700">
+            <a:solidFill>
+              <a:srgbClr val="CCDEEA">
                 <a:alpha val="0"/>
               </a:srgbClr>
             </a:solidFill>
@@ -48969,7 +49863,7 @@
             <a:r>
               <a:rPr lang="zh-CN" altLang="en-US" sz="1600" dirty="0">
                 <a:solidFill>
-                  <a:srgbClr val="12374E"/>
+                  <a:srgbClr val="000000"/>
                 </a:solidFill>
                 <a:latin typeface="Microsoft YaHei" pitchFamily="34" charset="0"/>
                 <a:ea typeface="Microsoft YaHei" pitchFamily="34" charset="-122"/>
@@ -49155,7 +50049,7 @@
             <a:r>
               <a:rPr lang="zh-CN" altLang="en-US" sz="1400" dirty="0">
                 <a:solidFill>
-                  <a:srgbClr val="12374E"/>
+                  <a:srgbClr val="000000"/>
                 </a:solidFill>
                 <a:latin typeface="Microsoft YaHei" pitchFamily="34" charset="0"/>
                 <a:ea typeface="Microsoft YaHei" pitchFamily="34" charset="-122"/>
@@ -49407,7 +50301,7 @@
             <a:r>
               <a:rPr lang="zh-CN" altLang="en-US" sz="1400" dirty="0">
                 <a:solidFill>
-                  <a:srgbClr val="12374E"/>
+                  <a:srgbClr val="000000"/>
                 </a:solidFill>
                 <a:latin typeface="Microsoft YaHei" pitchFamily="34" charset="0"/>
                 <a:ea typeface="Microsoft YaHei" pitchFamily="34" charset="-122"/>
@@ -49659,7 +50553,7 @@
             <a:r>
               <a:rPr lang="zh-CN" altLang="en-US" sz="1400" dirty="0">
                 <a:solidFill>
-                  <a:srgbClr val="12374E"/>
+                  <a:srgbClr val="000000"/>
                 </a:solidFill>
                 <a:latin typeface="Microsoft YaHei" pitchFamily="34" charset="0"/>
                 <a:ea typeface="Microsoft YaHei" pitchFamily="34" charset="-122"/>
@@ -49911,7 +50805,7 @@
             <a:r>
               <a:rPr lang="zh-CN" altLang="en-US" sz="1400" dirty="0">
                 <a:solidFill>
-                  <a:srgbClr val="12374E"/>
+                  <a:srgbClr val="000000"/>
                 </a:solidFill>
                 <a:latin typeface="Microsoft YaHei" pitchFamily="34" charset="0"/>
                 <a:ea typeface="Microsoft YaHei" pitchFamily="34" charset="-122"/>
@@ -50154,11 +51048,11 @@
             <a:avLst/>
           </a:prstGeom>
           <a:solidFill>
-            <a:srgbClr val="D8E2E9"/>
-          </a:solidFill>
-          <a:ln w="12700">
-            <a:solidFill>
-              <a:srgbClr val="D8E2E9">
+            <a:srgbClr val="CCDEEA"/>
+          </a:solidFill>
+          <a:ln w="12700">
+            <a:solidFill>
+              <a:srgbClr val="CCDEEA">
                 <a:alpha val="0"/>
               </a:srgbClr>
             </a:solidFill>
@@ -50351,7 +51245,7 @@
             <a:r>
               <a:rPr lang="zh-CN" altLang="en-US" sz="3360" b="1" dirty="0">
                 <a:solidFill>
-                  <a:srgbClr val="12374E"/>
+                  <a:srgbClr val="000000"/>
                 </a:solidFill>
                 <a:latin typeface="Microsoft YaHei" pitchFamily="34" charset="0"/>
                 <a:ea typeface="Microsoft YaHei" pitchFamily="34" charset="-122"/>
